--- a/samples/Шаблон_презентации_VK_Education__split.pptx
+++ b/samples/Шаблон_презентации_VK_Education__split.pptx
@@ -16,8 +16,6 @@
     <p:sldId id="315" r:id="rId68"/>
     <p:sldId id="316" r:id="rId69"/>
     <p:sldId id="317" r:id="rId70"/>
-    <p:sldId id="318" r:id="rId71"/>
-    <p:sldId id="319" r:id="rId72"/>
   </p:sldIdLst>
   <p:sldSz cy="6858000" cx="12192000"/>
   <p:notesSz cx="6858000" cy="9144000"/>
@@ -258,6 +256,380 @@
     </a:lvl9pPr>
   </p:defaultTextStyle>
 </p:presentation>
+</file>
+
+<file path=ppt/charts/chart1.xml><?xml version="1.0" encoding="utf-8"?>
+<c:chartSpace xmlns:c="http://schemas.openxmlformats.org/drawingml/2006/chart" xmlns:a="http://schemas.openxmlformats.org/drawingml/2006/main" xmlns:r="http://schemas.openxmlformats.org/officeDocument/2006/relationships">
+  <c:date1904 val="0"/>
+  <c:chart>
+    <c:autoTitleDeleted val="1"/>
+    <c:plotArea>
+      <c:barChart>
+        <c:barDir val="col"/>
+        <c:grouping val="clustered"/>
+        <c:ser>
+          <c:idx val="0"/>
+          <c:order val="0"/>
+          <c:tx>
+            <c:strRef>
+              <c:f>Sheet1!$B$1</c:f>
+              <c:strCache>
+                <c:ptCount val="1"/>
+                <c:pt idx="0">
+                  <c:v>Время</c:v>
+                </c:pt>
+              </c:strCache>
+            </c:strRef>
+          </c:tx>
+          <c:spPr>
+            <a:solidFill>
+              <a:srgbClr val="0077FF"/>
+            </a:solidFill>
+            <a:ln>
+              <a:solidFill>
+                <a:srgbClr val="0077FF"/>
+              </a:solidFill>
+            </a:ln>
+          </c:spPr>
+          <c:cat>
+            <c:strRef>
+              <c:f>Sheet1!$A$2:$A$3</c:f>
+              <c:strCache>
+                <c:ptCount val="2"/>
+                <c:pt idx="0">
+                  <c:v>Сборка</c:v>
+                </c:pt>
+                <c:pt idx="1">
+                  <c:v>Правки</c:v>
+                </c:pt>
+              </c:strCache>
+            </c:strRef>
+          </c:cat>
+          <c:val>
+            <c:numRef>
+              <c:f>Sheet1!$B$2:$B$3</c:f>
+              <c:numCache>
+                <c:formatCode>General</c:formatCode>
+                <c:ptCount val="2"/>
+                <c:pt idx="0">
+                  <c:v>186.0</c:v>
+                </c:pt>
+                <c:pt idx="1">
+                  <c:v>74.0</c:v>
+                </c:pt>
+              </c:numCache>
+            </c:numRef>
+          </c:val>
+        </c:ser>
+        <c:gapWidth val="60"/>
+        <c:axId val="-2068027336"/>
+        <c:axId val="-2113994440"/>
+      </c:barChart>
+      <c:catAx>
+        <c:axId val="-2068027336"/>
+        <c:scaling>
+          <c:orientation val="minMax"/>
+        </c:scaling>
+        <c:delete val="0"/>
+        <c:axPos val="b"/>
+        <c:majorTickMark val="out"/>
+        <c:minorTickMark val="none"/>
+        <c:tickLblPos val="nextTo"/>
+        <c:txPr>
+          <a:bodyPr/>
+          <a:lstStyle/>
+          <a:p>
+            <a:pPr>
+              <a:defRPr sz="1100" b="0">
+                <a:solidFill>
+                  <a:srgbClr val="000000"/>
+                </a:solidFill>
+                <a:latin typeface="Arial"/>
+                <a:ea typeface="Arial"/>
+                <a:cs typeface="Arial"/>
+              </a:defRPr>
+            </a:pPr>
+          </a:p>
+        </c:txPr>
+        <c:crossAx val="-2113994440"/>
+        <c:crosses val="autoZero"/>
+        <c:auto val="1"/>
+        <c:lblAlgn val="ctr"/>
+        <c:lblOffset val="100"/>
+        <c:noMultiLvlLbl val="0"/>
+      </c:catAx>
+      <c:valAx>
+        <c:axId val="-2113994440"/>
+        <c:scaling/>
+        <c:delete val="0"/>
+        <c:axPos val="l"/>
+        <c:majorGridlines>
+          <c:spPr>
+            <a:ln w="9525">
+              <a:solidFill>
+                <a:srgbClr val="D1D1D1"/>
+              </a:solidFill>
+            </a:ln>
+          </c:spPr>
+        </c:majorGridlines>
+        <c:title>
+          <c:tx>
+            <c:rich>
+              <a:bodyPr/>
+              <a:lstStyle/>
+              <a:p>
+                <a:pPr>
+                  <a:defRPr sz="1100" b="0">
+                    <a:solidFill>
+                      <a:srgbClr val="000000"/>
+                    </a:solidFill>
+                    <a:latin typeface="Arial"/>
+                    <a:ea typeface="Arial"/>
+                    <a:cs typeface="Arial"/>
+                  </a:defRPr>
+                </a:pPr>
+                <a:r>
+                  <a:t>мин</a:t>
+                </a:r>
+              </a:p>
+            </c:rich>
+          </c:tx>
+          <c:layout/>
+          <c:overlay val="0"/>
+        </c:title>
+        <c:majorTickMark val="out"/>
+        <c:minorTickMark val="none"/>
+        <c:tickLblPos val="nextTo"/>
+        <c:txPr>
+          <a:bodyPr/>
+          <a:lstStyle/>
+          <a:p>
+            <a:pPr>
+              <a:defRPr sz="1100" b="0">
+                <a:solidFill>
+                  <a:srgbClr val="000000"/>
+                </a:solidFill>
+                <a:latin typeface="Arial"/>
+                <a:ea typeface="Arial"/>
+                <a:cs typeface="Arial"/>
+              </a:defRPr>
+            </a:pPr>
+          </a:p>
+        </c:txPr>
+        <c:crossAx val="-2068027336"/>
+        <c:crosses val="autoZero"/>
+      </c:valAx>
+    </c:plotArea>
+    <c:dispBlanksAs val="gap"/>
+  </c:chart>
+  <c:txPr>
+    <a:bodyPr/>
+    <a:lstStyle/>
+    <a:p>
+      <a:pPr>
+        <a:defRPr sz="1200" b="0">
+          <a:solidFill>
+            <a:srgbClr val="000000"/>
+          </a:solidFill>
+          <a:latin typeface="Arial"/>
+          <a:ea typeface="Arial"/>
+          <a:cs typeface="Arial"/>
+        </a:defRPr>
+      </a:pPr>
+      <a:endParaRPr lang="en-US"/>
+    </a:p>
+  </c:txPr>
+  <c:externalData r:id="rId1">
+    <c:autoUpdate val="0"/>
+  </c:externalData>
+</c:chartSpace>
+</file>
+
+<file path=ppt/charts/chart2.xml><?xml version="1.0" encoding="utf-8"?>
+<c:chartSpace xmlns:c="http://schemas.openxmlformats.org/drawingml/2006/chart" xmlns:a="http://schemas.openxmlformats.org/drawingml/2006/main" xmlns:r="http://schemas.openxmlformats.org/officeDocument/2006/relationships">
+  <c:date1904 val="0"/>
+  <c:chart>
+    <c:autoTitleDeleted val="1"/>
+    <c:plotArea>
+      <c:barChart>
+        <c:barDir val="col"/>
+        <c:grouping val="clustered"/>
+        <c:ser>
+          <c:idx val="0"/>
+          <c:order val="0"/>
+          <c:tx>
+            <c:strRef>
+              <c:f>Sheet1!$B$1</c:f>
+              <c:strCache>
+                <c:ptCount val="1"/>
+                <c:pt idx="0">
+                  <c:v>Время</c:v>
+                </c:pt>
+              </c:strCache>
+            </c:strRef>
+          </c:tx>
+          <c:spPr>
+            <a:solidFill>
+              <a:srgbClr val="0077FF"/>
+            </a:solidFill>
+            <a:ln>
+              <a:solidFill>
+                <a:srgbClr val="0077FF"/>
+              </a:solidFill>
+            </a:ln>
+          </c:spPr>
+          <c:cat>
+            <c:strRef>
+              <c:f>Sheet1!$A$2:$A$3</c:f>
+              <c:strCache>
+                <c:ptCount val="2"/>
+                <c:pt idx="0">
+                  <c:v>До пилота</c:v>
+                </c:pt>
+                <c:pt idx="1">
+                  <c:v>После пилота</c:v>
+                </c:pt>
+              </c:strCache>
+            </c:strRef>
+          </c:cat>
+          <c:val>
+            <c:numRef>
+              <c:f>Sheet1!$B$2:$B$3</c:f>
+              <c:numCache>
+                <c:formatCode>General</c:formatCode>
+                <c:ptCount val="2"/>
+                <c:pt idx="0">
+                  <c:v>186.0</c:v>
+                </c:pt>
+                <c:pt idx="1">
+                  <c:v>4.0</c:v>
+                </c:pt>
+              </c:numCache>
+            </c:numRef>
+          </c:val>
+        </c:ser>
+        <c:gapWidth val="60"/>
+        <c:axId val="-2068027336"/>
+        <c:axId val="-2113994440"/>
+      </c:barChart>
+      <c:catAx>
+        <c:axId val="-2068027336"/>
+        <c:scaling>
+          <c:orientation val="minMax"/>
+        </c:scaling>
+        <c:delete val="0"/>
+        <c:axPos val="b"/>
+        <c:majorTickMark val="out"/>
+        <c:minorTickMark val="none"/>
+        <c:tickLblPos val="nextTo"/>
+        <c:txPr>
+          <a:bodyPr/>
+          <a:lstStyle/>
+          <a:p>
+            <a:pPr>
+              <a:defRPr sz="1100" b="0">
+                <a:solidFill>
+                  <a:srgbClr val="000000"/>
+                </a:solidFill>
+                <a:latin typeface="Arial"/>
+                <a:ea typeface="Arial"/>
+                <a:cs typeface="Arial"/>
+              </a:defRPr>
+            </a:pPr>
+          </a:p>
+        </c:txPr>
+        <c:crossAx val="-2113994440"/>
+        <c:crosses val="autoZero"/>
+        <c:auto val="1"/>
+        <c:lblAlgn val="ctr"/>
+        <c:lblOffset val="100"/>
+        <c:noMultiLvlLbl val="0"/>
+      </c:catAx>
+      <c:valAx>
+        <c:axId val="-2113994440"/>
+        <c:scaling/>
+        <c:delete val="0"/>
+        <c:axPos val="l"/>
+        <c:majorGridlines>
+          <c:spPr>
+            <a:ln w="9525">
+              <a:solidFill>
+                <a:srgbClr val="D1D1D1"/>
+              </a:solidFill>
+            </a:ln>
+          </c:spPr>
+        </c:majorGridlines>
+        <c:title>
+          <c:tx>
+            <c:rich>
+              <a:bodyPr/>
+              <a:lstStyle/>
+              <a:p>
+                <a:pPr>
+                  <a:defRPr sz="1100" b="0">
+                    <a:solidFill>
+                      <a:srgbClr val="000000"/>
+                    </a:solidFill>
+                    <a:latin typeface="Arial"/>
+                    <a:ea typeface="Arial"/>
+                    <a:cs typeface="Arial"/>
+                  </a:defRPr>
+                </a:pPr>
+                <a:r>
+                  <a:t>мин</a:t>
+                </a:r>
+              </a:p>
+            </c:rich>
+          </c:tx>
+          <c:layout/>
+          <c:overlay val="0"/>
+        </c:title>
+        <c:majorTickMark val="out"/>
+        <c:minorTickMark val="none"/>
+        <c:tickLblPos val="nextTo"/>
+        <c:txPr>
+          <a:bodyPr/>
+          <a:lstStyle/>
+          <a:p>
+            <a:pPr>
+              <a:defRPr sz="1100" b="0">
+                <a:solidFill>
+                  <a:srgbClr val="000000"/>
+                </a:solidFill>
+                <a:latin typeface="Arial"/>
+                <a:ea typeface="Arial"/>
+                <a:cs typeface="Arial"/>
+              </a:defRPr>
+            </a:pPr>
+          </a:p>
+        </c:txPr>
+        <c:crossAx val="-2068027336"/>
+        <c:crosses val="autoZero"/>
+      </c:valAx>
+    </c:plotArea>
+    <c:dispBlanksAs val="gap"/>
+  </c:chart>
+  <c:txPr>
+    <a:bodyPr/>
+    <a:lstStyle/>
+    <a:p>
+      <a:pPr>
+        <a:defRPr sz="1200" b="0">
+          <a:solidFill>
+            <a:srgbClr val="000000"/>
+          </a:solidFill>
+          <a:latin typeface="Arial"/>
+          <a:ea typeface="Arial"/>
+          <a:cs typeface="Arial"/>
+        </a:defRPr>
+      </a:pPr>
+      <a:endParaRPr lang="en-US"/>
+    </a:p>
+  </c:txPr>
+  <c:externalData r:id="rId1">
+    <c:autoUpdate val="0"/>
+  </c:externalData>
+</c:chartSpace>
 </file>
 
 <file path=ppt/notesMasters/notesMaster1.xml><?xml version="1.0" encoding="utf-8"?>
@@ -1888,1420 +2260,6 @@
     <a:masterClrMapping/>
   </p:clrMapOvr>
 </p:notes>
-</file>
-
-<file path=ppt/notesSlides/notesSlide63.xml><?xml version="1.0" encoding="utf-8"?>
-<p:notes xmlns:a="http://schemas.openxmlformats.org/drawingml/2006/main" xmlns:p="http://schemas.openxmlformats.org/presentationml/2006/main" xmlns:r="http://schemas.openxmlformats.org/officeDocument/2006/relationships">
-  <p:cSld>
-    <p:spTree>
-      <p:nvGrpSpPr>
-        <p:cNvPr id="1" name=""/>
-        <p:cNvGrpSpPr/>
-        <p:nvPr/>
-      </p:nvGrpSpPr>
-      <p:grpSpPr>
-        <a:xfrm>
-          <a:off x="0" y="0"/>
-          <a:ext cx="0" cy="0"/>
-          <a:chOff x="0" y="0"/>
-          <a:chExt cx="0" cy="0"/>
-        </a:xfrm>
-      </p:grpSpPr>
-      <p:sp>
-        <p:nvSpPr>
-          <p:cNvPr id="2" name="Slide Image Placeholder 1"/>
-          <p:cNvSpPr>
-            <a:spLocks noGrp="1"/>
-          </p:cNvSpPr>
-          <p:nvPr>
-            <p:ph type="sldImg" idx="3"/>
-          </p:nvPr>
-        </p:nvSpPr>
-        <p:spPr/>
-      </p:sp>
-      <p:sp>
-        <p:nvSpPr>
-          <p:cNvPr id="3" name="Notes Placeholder 2"/>
-          <p:cNvSpPr>
-            <a:spLocks noGrp="1"/>
-          </p:cNvSpPr>
-          <p:nvPr>
-            <p:ph type="body" idx="1"/>
-          </p:nvPr>
-        </p:nvSpPr>
-        <p:spPr/>
-        <p:txBody>
-          <a:bodyPr/>
-          <a:lstStyle/>
-          <a:p/>
-        </p:txBody>
-      </p:sp>
-      <p:sp>
-        <p:nvSpPr>
-          <p:cNvPr id="4" name="Slide Number Placeholder 3"/>
-          <p:cNvSpPr>
-            <a:spLocks noGrp="1"/>
-          </p:cNvSpPr>
-          <p:nvPr>
-            <p:ph type="sldNum" idx="12"/>
-          </p:nvPr>
-        </p:nvSpPr>
-        <p:spPr/>
-      </p:sp>
-    </p:spTree>
-  </p:cSld>
-  <p:clrMapOvr>
-    <a:masterClrMapping/>
-  </p:clrMapOvr>
-</p:notes>
-</file>
-
-<file path=ppt/notesSlides/notesSlide64.xml><?xml version="1.0" encoding="utf-8"?>
-<p:notes xmlns:a="http://schemas.openxmlformats.org/drawingml/2006/main" xmlns:p="http://schemas.openxmlformats.org/presentationml/2006/main" xmlns:r="http://schemas.openxmlformats.org/officeDocument/2006/relationships">
-  <p:cSld>
-    <p:spTree>
-      <p:nvGrpSpPr>
-        <p:cNvPr id="1" name=""/>
-        <p:cNvGrpSpPr/>
-        <p:nvPr/>
-      </p:nvGrpSpPr>
-      <p:grpSpPr>
-        <a:xfrm>
-          <a:off x="0" y="0"/>
-          <a:ext cx="0" cy="0"/>
-          <a:chOff x="0" y="0"/>
-          <a:chExt cx="0" cy="0"/>
-        </a:xfrm>
-      </p:grpSpPr>
-      <p:sp>
-        <p:nvSpPr>
-          <p:cNvPr id="2" name="Slide Image Placeholder 1"/>
-          <p:cNvSpPr>
-            <a:spLocks noGrp="1"/>
-          </p:cNvSpPr>
-          <p:nvPr>
-            <p:ph type="sldImg" idx="3"/>
-          </p:nvPr>
-        </p:nvSpPr>
-        <p:spPr/>
-      </p:sp>
-      <p:sp>
-        <p:nvSpPr>
-          <p:cNvPr id="3" name="Notes Placeholder 2"/>
-          <p:cNvSpPr>
-            <a:spLocks noGrp="1"/>
-          </p:cNvSpPr>
-          <p:nvPr>
-            <p:ph type="body" idx="1"/>
-          </p:nvPr>
-        </p:nvSpPr>
-        <p:spPr/>
-        <p:txBody>
-          <a:bodyPr/>
-          <a:lstStyle/>
-          <a:p/>
-        </p:txBody>
-      </p:sp>
-      <p:sp>
-        <p:nvSpPr>
-          <p:cNvPr id="4" name="Slide Number Placeholder 3"/>
-          <p:cNvSpPr>
-            <a:spLocks noGrp="1"/>
-          </p:cNvSpPr>
-          <p:nvPr>
-            <p:ph type="sldNum" idx="12"/>
-          </p:nvPr>
-        </p:nvSpPr>
-        <p:spPr/>
-      </p:sp>
-    </p:spTree>
-  </p:cSld>
-  <p:clrMapOvr>
-    <a:masterClrMapping/>
-  </p:clrMapOvr>
-</p:notes>
-</file>
-
-<file path=ppt/slideLayouts/slideLayout10.xml><?xml version="1.0" encoding="utf-8"?>
-<p:sldLayout xmlns:a="http://schemas.openxmlformats.org/drawingml/2006/main" xmlns:r="http://schemas.openxmlformats.org/officeDocument/2006/relationships" xmlns:mc="http://schemas.openxmlformats.org/markup-compatibility/2006" xmlns:mv="urn:schemas-microsoft-com:mac:vml" xmlns:p="http://schemas.openxmlformats.org/presentationml/2006/main" xmlns:c="http://schemas.openxmlformats.org/drawingml/2006/chart" xmlns:dgm="http://schemas.openxmlformats.org/drawingml/2006/diagram" xmlns:o="urn:schemas-microsoft-com:office:office" xmlns:v="urn:schemas-microsoft-com:vml" xmlns:pvml="urn:schemas-microsoft-com:office:powerpoint" xmlns:com="http://schemas.openxmlformats.org/drawingml/2006/compatibility" xmlns:p14="http://schemas.microsoft.com/office/powerpoint/2010/main" xmlns:p15="http://schemas.microsoft.com/office/powerpoint/2012/main" xmlns:ahyp="http://schemas.microsoft.com/office/drawing/2018/hyperlinkcolor" matchingName="2 фактоида + текст">
-  <p:cSld name="2 фактоида + текст">
-    <p:spTree>
-      <p:nvGrpSpPr>
-        <p:cNvPr id="93" name="Shape 93"/>
-        <p:cNvGrpSpPr/>
-        <p:nvPr/>
-      </p:nvGrpSpPr>
-      <p:grpSpPr>
-        <a:xfrm>
-          <a:off x="0" y="0"/>
-          <a:ext cx="0" cy="0"/>
-          <a:chOff x="0" y="0"/>
-          <a:chExt cx="0" cy="0"/>
-        </a:xfrm>
-      </p:grpSpPr>
-      <p:sp>
-        <p:nvSpPr>
-          <p:cNvPr id="94" name="Google Shape;94;p11"/>
-          <p:cNvSpPr txBox="1"/>
-          <p:nvPr>
-            <p:ph idx="1" type="body"/>
-          </p:nvPr>
-        </p:nvSpPr>
-        <p:spPr>
-          <a:xfrm>
-            <a:off x="671514" y="1773238"/>
-            <a:ext cx="5135728" cy="4427537"/>
-          </a:xfrm>
-          <a:prstGeom prst="rect">
-            <a:avLst/>
-          </a:prstGeom>
-          <a:noFill/>
-          <a:ln>
-            <a:noFill/>
-          </a:ln>
-        </p:spPr>
-        <p:txBody>
-          <a:bodyPr anchorCtr="0" anchor="t" bIns="0" lIns="0" spcFirstLastPara="1" rIns="0" wrap="square" tIns="0">
-            <a:normAutofit/>
-          </a:bodyPr>
-          <a:lstStyle>
-            <a:lvl1pPr indent="-228600" lvl="0" marL="457200" algn="l">
-              <a:lnSpc>
-                <a:spcPct val="110000"/>
-              </a:lnSpc>
-              <a:spcBef>
-                <a:spcPts val="1000"/>
-              </a:spcBef>
-              <a:spcAft>
-                <a:spcPts val="0"/>
-              </a:spcAft>
-              <a:buClr>
-                <a:schemeClr val="dk1"/>
-              </a:buClr>
-              <a:buSzPts val="1800"/>
-              <a:buNone/>
-              <a:defRPr/>
-            </a:lvl1pPr>
-            <a:lvl2pPr indent="-342900" lvl="1" marL="914400" algn="l">
-              <a:lnSpc>
-                <a:spcPct val="110000"/>
-              </a:lnSpc>
-              <a:spcBef>
-                <a:spcPts val="500"/>
-              </a:spcBef>
-              <a:spcAft>
-                <a:spcPts val="0"/>
-              </a:spcAft>
-              <a:buSzPts val="1800"/>
-              <a:buChar char="•"/>
-              <a:defRPr/>
-            </a:lvl2pPr>
-            <a:lvl3pPr indent="-342900" lvl="2" marL="1371600" algn="l">
-              <a:lnSpc>
-                <a:spcPct val="110000"/>
-              </a:lnSpc>
-              <a:spcBef>
-                <a:spcPts val="500"/>
-              </a:spcBef>
-              <a:spcAft>
-                <a:spcPts val="0"/>
-              </a:spcAft>
-              <a:buClr>
-                <a:schemeClr val="dk1"/>
-              </a:buClr>
-              <a:buSzPts val="1800"/>
-              <a:buChar char="−"/>
-              <a:defRPr/>
-            </a:lvl3pPr>
-            <a:lvl4pPr indent="-342900" lvl="3" marL="1828800" algn="l">
-              <a:lnSpc>
-                <a:spcPct val="90000"/>
-              </a:lnSpc>
-              <a:spcBef>
-                <a:spcPts val="500"/>
-              </a:spcBef>
-              <a:spcAft>
-                <a:spcPts val="0"/>
-              </a:spcAft>
-              <a:buClr>
-                <a:schemeClr val="dk1"/>
-              </a:buClr>
-              <a:buSzPts val="1800"/>
-              <a:buChar char="•"/>
-              <a:defRPr/>
-            </a:lvl4pPr>
-            <a:lvl5pPr indent="-342900" lvl="4" marL="2286000" algn="l">
-              <a:lnSpc>
-                <a:spcPct val="90000"/>
-              </a:lnSpc>
-              <a:spcBef>
-                <a:spcPts val="500"/>
-              </a:spcBef>
-              <a:spcAft>
-                <a:spcPts val="0"/>
-              </a:spcAft>
-              <a:buClr>
-                <a:schemeClr val="dk1"/>
-              </a:buClr>
-              <a:buSzPts val="1800"/>
-              <a:buChar char="•"/>
-              <a:defRPr/>
-            </a:lvl5pPr>
-            <a:lvl6pPr indent="-342900" lvl="5" marL="2743200" algn="l">
-              <a:lnSpc>
-                <a:spcPct val="90000"/>
-              </a:lnSpc>
-              <a:spcBef>
-                <a:spcPts val="500"/>
-              </a:spcBef>
-              <a:spcAft>
-                <a:spcPts val="0"/>
-              </a:spcAft>
-              <a:buClr>
-                <a:schemeClr val="dk1"/>
-              </a:buClr>
-              <a:buSzPts val="1800"/>
-              <a:buChar char="•"/>
-              <a:defRPr/>
-            </a:lvl6pPr>
-            <a:lvl7pPr indent="-342900" lvl="6" marL="3200400" algn="l">
-              <a:lnSpc>
-                <a:spcPct val="90000"/>
-              </a:lnSpc>
-              <a:spcBef>
-                <a:spcPts val="500"/>
-              </a:spcBef>
-              <a:spcAft>
-                <a:spcPts val="0"/>
-              </a:spcAft>
-              <a:buClr>
-                <a:schemeClr val="dk1"/>
-              </a:buClr>
-              <a:buSzPts val="1800"/>
-              <a:buChar char="•"/>
-              <a:defRPr/>
-            </a:lvl7pPr>
-            <a:lvl8pPr indent="-342900" lvl="7" marL="3657600" algn="l">
-              <a:lnSpc>
-                <a:spcPct val="90000"/>
-              </a:lnSpc>
-              <a:spcBef>
-                <a:spcPts val="500"/>
-              </a:spcBef>
-              <a:spcAft>
-                <a:spcPts val="0"/>
-              </a:spcAft>
-              <a:buClr>
-                <a:schemeClr val="dk1"/>
-              </a:buClr>
-              <a:buSzPts val="1800"/>
-              <a:buChar char="•"/>
-              <a:defRPr/>
-            </a:lvl8pPr>
-            <a:lvl9pPr indent="-342900" lvl="8" marL="4114800" algn="l">
-              <a:lnSpc>
-                <a:spcPct val="90000"/>
-              </a:lnSpc>
-              <a:spcBef>
-                <a:spcPts val="500"/>
-              </a:spcBef>
-              <a:spcAft>
-                <a:spcPts val="0"/>
-              </a:spcAft>
-              <a:buClr>
-                <a:schemeClr val="dk1"/>
-              </a:buClr>
-              <a:buSzPts val="1800"/>
-              <a:buChar char="•"/>
-              <a:defRPr/>
-            </a:lvl9pPr>
-          </a:lstStyle>
-          <a:p/>
-        </p:txBody>
-      </p:sp>
-      <p:sp>
-        <p:nvSpPr>
-          <p:cNvPr id="95" name="Google Shape;95;p11"/>
-          <p:cNvSpPr txBox="1"/>
-          <p:nvPr>
-            <p:ph type="title"/>
-          </p:nvPr>
-        </p:nvSpPr>
-        <p:spPr>
-          <a:xfrm>
-            <a:off x="677334" y="692150"/>
-            <a:ext cx="10855854" cy="644241"/>
-          </a:xfrm>
-          <a:prstGeom prst="rect">
-            <a:avLst/>
-          </a:prstGeom>
-          <a:noFill/>
-          <a:ln>
-            <a:noFill/>
-          </a:ln>
-        </p:spPr>
-        <p:txBody>
-          <a:bodyPr anchorCtr="0" anchor="t" bIns="0" lIns="0" spcFirstLastPara="1" rIns="0" wrap="square" tIns="0">
-            <a:noAutofit/>
-          </a:bodyPr>
-          <a:lstStyle>
-            <a:lvl1pPr lvl="0" algn="l">
-              <a:lnSpc>
-                <a:spcPct val="90000"/>
-              </a:lnSpc>
-              <a:spcBef>
-                <a:spcPts val="0"/>
-              </a:spcBef>
-              <a:spcAft>
-                <a:spcPts val="0"/>
-              </a:spcAft>
-              <a:buClr>
-                <a:schemeClr val="accent1"/>
-              </a:buClr>
-              <a:buSzPts val="3600"/>
-              <a:buFont typeface="Play"/>
-              <a:buNone/>
-              <a:defRPr>
-                <a:solidFill>
-                  <a:schemeClr val="accent1"/>
-                </a:solidFill>
-              </a:defRPr>
-            </a:lvl1pPr>
-            <a:lvl2pPr lvl="1">
-              <a:spcBef>
-                <a:spcPts val="0"/>
-              </a:spcBef>
-              <a:spcAft>
-                <a:spcPts val="0"/>
-              </a:spcAft>
-              <a:buSzPts val="1400"/>
-              <a:buNone/>
-              <a:defRPr/>
-            </a:lvl2pPr>
-            <a:lvl3pPr lvl="2">
-              <a:spcBef>
-                <a:spcPts val="0"/>
-              </a:spcBef>
-              <a:spcAft>
-                <a:spcPts val="0"/>
-              </a:spcAft>
-              <a:buSzPts val="1400"/>
-              <a:buNone/>
-              <a:defRPr/>
-            </a:lvl3pPr>
-            <a:lvl4pPr lvl="3">
-              <a:spcBef>
-                <a:spcPts val="0"/>
-              </a:spcBef>
-              <a:spcAft>
-                <a:spcPts val="0"/>
-              </a:spcAft>
-              <a:buSzPts val="1400"/>
-              <a:buNone/>
-              <a:defRPr/>
-            </a:lvl4pPr>
-            <a:lvl5pPr lvl="4">
-              <a:spcBef>
-                <a:spcPts val="0"/>
-              </a:spcBef>
-              <a:spcAft>
-                <a:spcPts val="0"/>
-              </a:spcAft>
-              <a:buSzPts val="1400"/>
-              <a:buNone/>
-              <a:defRPr/>
-            </a:lvl5pPr>
-            <a:lvl6pPr lvl="5">
-              <a:spcBef>
-                <a:spcPts val="0"/>
-              </a:spcBef>
-              <a:spcAft>
-                <a:spcPts val="0"/>
-              </a:spcAft>
-              <a:buSzPts val="1400"/>
-              <a:buNone/>
-              <a:defRPr/>
-            </a:lvl6pPr>
-            <a:lvl7pPr lvl="6">
-              <a:spcBef>
-                <a:spcPts val="0"/>
-              </a:spcBef>
-              <a:spcAft>
-                <a:spcPts val="0"/>
-              </a:spcAft>
-              <a:buSzPts val="1400"/>
-              <a:buNone/>
-              <a:defRPr/>
-            </a:lvl7pPr>
-            <a:lvl8pPr lvl="7">
-              <a:spcBef>
-                <a:spcPts val="0"/>
-              </a:spcBef>
-              <a:spcAft>
-                <a:spcPts val="0"/>
-              </a:spcAft>
-              <a:buSzPts val="1400"/>
-              <a:buNone/>
-              <a:defRPr/>
-            </a:lvl8pPr>
-            <a:lvl9pPr lvl="8">
-              <a:spcBef>
-                <a:spcPts val="0"/>
-              </a:spcBef>
-              <a:spcAft>
-                <a:spcPts val="0"/>
-              </a:spcAft>
-              <a:buSzPts val="1400"/>
-              <a:buNone/>
-              <a:defRPr/>
-            </a:lvl9pPr>
-          </a:lstStyle>
-          <a:p/>
-        </p:txBody>
-      </p:sp>
-      <p:sp>
-        <p:nvSpPr>
-          <p:cNvPr id="96" name="Google Shape;96;p11"/>
-          <p:cNvSpPr txBox="1"/>
-          <p:nvPr>
-            <p:ph idx="11" type="ftr"/>
-          </p:nvPr>
-        </p:nvSpPr>
-        <p:spPr>
-          <a:xfrm>
-            <a:off x="671513" y="167981"/>
-            <a:ext cx="10874375" cy="241437"/>
-          </a:xfrm>
-          <a:prstGeom prst="rect">
-            <a:avLst/>
-          </a:prstGeom>
-          <a:noFill/>
-          <a:ln>
-            <a:noFill/>
-          </a:ln>
-        </p:spPr>
-        <p:txBody>
-          <a:bodyPr anchorCtr="0" anchor="t" bIns="45700" lIns="0" spcFirstLastPara="1" rIns="91425" wrap="square" tIns="45700">
-            <a:noAutofit/>
-          </a:bodyPr>
-          <a:lstStyle>
-            <a:lvl1pPr lvl="0" marR="0" rtl="0" algn="l">
-              <a:spcBef>
-                <a:spcPts val="0"/>
-              </a:spcBef>
-              <a:spcAft>
-                <a:spcPts val="0"/>
-              </a:spcAft>
-              <a:buSzPts val="1400"/>
-              <a:buNone/>
-              <a:defRPr b="0" i="0" sz="1800" u="none" cap="none" strike="noStrike">
-                <a:solidFill>
-                  <a:schemeClr val="dk1"/>
-                </a:solidFill>
-                <a:latin typeface="Arial"/>
-                <a:ea typeface="Arial"/>
-                <a:cs typeface="Arial"/>
-                <a:sym typeface="Arial"/>
-              </a:defRPr>
-            </a:lvl1pPr>
-            <a:lvl2pPr lvl="1" marR="0" rtl="0" algn="l">
-              <a:spcBef>
-                <a:spcPts val="0"/>
-              </a:spcBef>
-              <a:spcAft>
-                <a:spcPts val="0"/>
-              </a:spcAft>
-              <a:buSzPts val="1400"/>
-              <a:buNone/>
-              <a:defRPr b="0" i="0" sz="1800" u="none" cap="none" strike="noStrike">
-                <a:solidFill>
-                  <a:schemeClr val="dk1"/>
-                </a:solidFill>
-                <a:latin typeface="Arial"/>
-                <a:ea typeface="Arial"/>
-                <a:cs typeface="Arial"/>
-                <a:sym typeface="Arial"/>
-              </a:defRPr>
-            </a:lvl2pPr>
-            <a:lvl3pPr lvl="2" marR="0" rtl="0" algn="l">
-              <a:spcBef>
-                <a:spcPts val="0"/>
-              </a:spcBef>
-              <a:spcAft>
-                <a:spcPts val="0"/>
-              </a:spcAft>
-              <a:buSzPts val="1400"/>
-              <a:buNone/>
-              <a:defRPr b="0" i="0" sz="1800" u="none" cap="none" strike="noStrike">
-                <a:solidFill>
-                  <a:schemeClr val="dk1"/>
-                </a:solidFill>
-                <a:latin typeface="Arial"/>
-                <a:ea typeface="Arial"/>
-                <a:cs typeface="Arial"/>
-                <a:sym typeface="Arial"/>
-              </a:defRPr>
-            </a:lvl3pPr>
-            <a:lvl4pPr lvl="3" marR="0" rtl="0" algn="l">
-              <a:spcBef>
-                <a:spcPts val="0"/>
-              </a:spcBef>
-              <a:spcAft>
-                <a:spcPts val="0"/>
-              </a:spcAft>
-              <a:buSzPts val="1400"/>
-              <a:buNone/>
-              <a:defRPr b="0" i="0" sz="1800" u="none" cap="none" strike="noStrike">
-                <a:solidFill>
-                  <a:schemeClr val="dk1"/>
-                </a:solidFill>
-                <a:latin typeface="Arial"/>
-                <a:ea typeface="Arial"/>
-                <a:cs typeface="Arial"/>
-                <a:sym typeface="Arial"/>
-              </a:defRPr>
-            </a:lvl4pPr>
-            <a:lvl5pPr lvl="4" marR="0" rtl="0" algn="l">
-              <a:spcBef>
-                <a:spcPts val="0"/>
-              </a:spcBef>
-              <a:spcAft>
-                <a:spcPts val="0"/>
-              </a:spcAft>
-              <a:buSzPts val="1400"/>
-              <a:buNone/>
-              <a:defRPr b="0" i="0" sz="1800" u="none" cap="none" strike="noStrike">
-                <a:solidFill>
-                  <a:schemeClr val="dk1"/>
-                </a:solidFill>
-                <a:latin typeface="Arial"/>
-                <a:ea typeface="Arial"/>
-                <a:cs typeface="Arial"/>
-                <a:sym typeface="Arial"/>
-              </a:defRPr>
-            </a:lvl5pPr>
-            <a:lvl6pPr lvl="5" marR="0" rtl="0" algn="l">
-              <a:spcBef>
-                <a:spcPts val="0"/>
-              </a:spcBef>
-              <a:spcAft>
-                <a:spcPts val="0"/>
-              </a:spcAft>
-              <a:buSzPts val="1400"/>
-              <a:buNone/>
-              <a:defRPr b="0" i="0" sz="1800" u="none" cap="none" strike="noStrike">
-                <a:solidFill>
-                  <a:schemeClr val="dk1"/>
-                </a:solidFill>
-                <a:latin typeface="Arial"/>
-                <a:ea typeface="Arial"/>
-                <a:cs typeface="Arial"/>
-                <a:sym typeface="Arial"/>
-              </a:defRPr>
-            </a:lvl6pPr>
-            <a:lvl7pPr lvl="6" marR="0" rtl="0" algn="l">
-              <a:spcBef>
-                <a:spcPts val="0"/>
-              </a:spcBef>
-              <a:spcAft>
-                <a:spcPts val="0"/>
-              </a:spcAft>
-              <a:buSzPts val="1400"/>
-              <a:buNone/>
-              <a:defRPr b="0" i="0" sz="1800" u="none" cap="none" strike="noStrike">
-                <a:solidFill>
-                  <a:schemeClr val="dk1"/>
-                </a:solidFill>
-                <a:latin typeface="Arial"/>
-                <a:ea typeface="Arial"/>
-                <a:cs typeface="Arial"/>
-                <a:sym typeface="Arial"/>
-              </a:defRPr>
-            </a:lvl7pPr>
-            <a:lvl8pPr lvl="7" marR="0" rtl="0" algn="l">
-              <a:spcBef>
-                <a:spcPts val="0"/>
-              </a:spcBef>
-              <a:spcAft>
-                <a:spcPts val="0"/>
-              </a:spcAft>
-              <a:buSzPts val="1400"/>
-              <a:buNone/>
-              <a:defRPr b="0" i="0" sz="1800" u="none" cap="none" strike="noStrike">
-                <a:solidFill>
-                  <a:schemeClr val="dk1"/>
-                </a:solidFill>
-                <a:latin typeface="Arial"/>
-                <a:ea typeface="Arial"/>
-                <a:cs typeface="Arial"/>
-                <a:sym typeface="Arial"/>
-              </a:defRPr>
-            </a:lvl8pPr>
-            <a:lvl9pPr lvl="8" marR="0" rtl="0" algn="l">
-              <a:spcBef>
-                <a:spcPts val="0"/>
-              </a:spcBef>
-              <a:spcAft>
-                <a:spcPts val="0"/>
-              </a:spcAft>
-              <a:buSzPts val="1400"/>
-              <a:buNone/>
-              <a:defRPr b="0" i="0" sz="1800" u="none" cap="none" strike="noStrike">
-                <a:solidFill>
-                  <a:schemeClr val="dk1"/>
-                </a:solidFill>
-                <a:latin typeface="Arial"/>
-                <a:ea typeface="Arial"/>
-                <a:cs typeface="Arial"/>
-                <a:sym typeface="Arial"/>
-              </a:defRPr>
-            </a:lvl9pPr>
-          </a:lstStyle>
-          <a:p/>
-        </p:txBody>
-      </p:sp>
-      <p:sp>
-        <p:nvSpPr>
-          <p:cNvPr id="97" name="Google Shape;97;p11"/>
-          <p:cNvSpPr txBox="1"/>
-          <p:nvPr>
-            <p:ph idx="2" type="body"/>
-          </p:nvPr>
-        </p:nvSpPr>
-        <p:spPr>
-          <a:xfrm>
-            <a:off x="6097339" y="3864033"/>
-            <a:ext cx="5417327" cy="1080000"/>
-          </a:xfrm>
-          <a:prstGeom prst="rect">
-            <a:avLst/>
-          </a:prstGeom>
-          <a:noFill/>
-          <a:ln>
-            <a:noFill/>
-          </a:ln>
-        </p:spPr>
-        <p:txBody>
-          <a:bodyPr anchorCtr="0" anchor="b" bIns="0" lIns="0" spcFirstLastPara="1" rIns="0" wrap="square" tIns="0">
-            <a:noAutofit/>
-          </a:bodyPr>
-          <a:lstStyle>
-            <a:lvl1pPr indent="-228600" lvl="0" marL="457200" algn="l">
-              <a:lnSpc>
-                <a:spcPct val="100000"/>
-              </a:lnSpc>
-              <a:spcBef>
-                <a:spcPts val="1000"/>
-              </a:spcBef>
-              <a:spcAft>
-                <a:spcPts val="0"/>
-              </a:spcAft>
-              <a:buClr>
-                <a:schemeClr val="dk1"/>
-              </a:buClr>
-              <a:buSzPts val="8800"/>
-              <a:buNone/>
-              <a:defRPr b="1" i="0" sz="8800">
-                <a:solidFill>
-                  <a:schemeClr val="dk1"/>
-                </a:solidFill>
-                <a:latin typeface="Play"/>
-                <a:ea typeface="Play"/>
-                <a:cs typeface="Play"/>
-                <a:sym typeface="Play"/>
-              </a:defRPr>
-            </a:lvl1pPr>
-            <a:lvl2pPr indent="-342900" lvl="1" marL="914400" algn="l">
-              <a:lnSpc>
-                <a:spcPct val="110000"/>
-              </a:lnSpc>
-              <a:spcBef>
-                <a:spcPts val="500"/>
-              </a:spcBef>
-              <a:spcAft>
-                <a:spcPts val="0"/>
-              </a:spcAft>
-              <a:buSzPts val="1800"/>
-              <a:buChar char="•"/>
-              <a:defRPr/>
-            </a:lvl2pPr>
-            <a:lvl3pPr indent="-342900" lvl="2" marL="1371600" algn="l">
-              <a:lnSpc>
-                <a:spcPct val="110000"/>
-              </a:lnSpc>
-              <a:spcBef>
-                <a:spcPts val="500"/>
-              </a:spcBef>
-              <a:spcAft>
-                <a:spcPts val="0"/>
-              </a:spcAft>
-              <a:buClr>
-                <a:schemeClr val="dk1"/>
-              </a:buClr>
-              <a:buSzPts val="1800"/>
-              <a:buChar char="−"/>
-              <a:defRPr/>
-            </a:lvl3pPr>
-            <a:lvl4pPr indent="-342900" lvl="3" marL="1828800" algn="l">
-              <a:lnSpc>
-                <a:spcPct val="90000"/>
-              </a:lnSpc>
-              <a:spcBef>
-                <a:spcPts val="500"/>
-              </a:spcBef>
-              <a:spcAft>
-                <a:spcPts val="0"/>
-              </a:spcAft>
-              <a:buClr>
-                <a:schemeClr val="dk1"/>
-              </a:buClr>
-              <a:buSzPts val="1800"/>
-              <a:buChar char="•"/>
-              <a:defRPr/>
-            </a:lvl4pPr>
-            <a:lvl5pPr indent="-342900" lvl="4" marL="2286000" algn="l">
-              <a:lnSpc>
-                <a:spcPct val="90000"/>
-              </a:lnSpc>
-              <a:spcBef>
-                <a:spcPts val="500"/>
-              </a:spcBef>
-              <a:spcAft>
-                <a:spcPts val="0"/>
-              </a:spcAft>
-              <a:buClr>
-                <a:schemeClr val="dk1"/>
-              </a:buClr>
-              <a:buSzPts val="1800"/>
-              <a:buChar char="•"/>
-              <a:defRPr/>
-            </a:lvl5pPr>
-            <a:lvl6pPr indent="-342900" lvl="5" marL="2743200" algn="l">
-              <a:lnSpc>
-                <a:spcPct val="90000"/>
-              </a:lnSpc>
-              <a:spcBef>
-                <a:spcPts val="500"/>
-              </a:spcBef>
-              <a:spcAft>
-                <a:spcPts val="0"/>
-              </a:spcAft>
-              <a:buClr>
-                <a:schemeClr val="dk1"/>
-              </a:buClr>
-              <a:buSzPts val="1800"/>
-              <a:buChar char="•"/>
-              <a:defRPr/>
-            </a:lvl6pPr>
-            <a:lvl7pPr indent="-342900" lvl="6" marL="3200400" algn="l">
-              <a:lnSpc>
-                <a:spcPct val="90000"/>
-              </a:lnSpc>
-              <a:spcBef>
-                <a:spcPts val="500"/>
-              </a:spcBef>
-              <a:spcAft>
-                <a:spcPts val="0"/>
-              </a:spcAft>
-              <a:buClr>
-                <a:schemeClr val="dk1"/>
-              </a:buClr>
-              <a:buSzPts val="1800"/>
-              <a:buChar char="•"/>
-              <a:defRPr/>
-            </a:lvl7pPr>
-            <a:lvl8pPr indent="-342900" lvl="7" marL="3657600" algn="l">
-              <a:lnSpc>
-                <a:spcPct val="90000"/>
-              </a:lnSpc>
-              <a:spcBef>
-                <a:spcPts val="500"/>
-              </a:spcBef>
-              <a:spcAft>
-                <a:spcPts val="0"/>
-              </a:spcAft>
-              <a:buClr>
-                <a:schemeClr val="dk1"/>
-              </a:buClr>
-              <a:buSzPts val="1800"/>
-              <a:buChar char="•"/>
-              <a:defRPr/>
-            </a:lvl8pPr>
-            <a:lvl9pPr indent="-342900" lvl="8" marL="4114800" algn="l">
-              <a:lnSpc>
-                <a:spcPct val="90000"/>
-              </a:lnSpc>
-              <a:spcBef>
-                <a:spcPts val="500"/>
-              </a:spcBef>
-              <a:spcAft>
-                <a:spcPts val="0"/>
-              </a:spcAft>
-              <a:buClr>
-                <a:schemeClr val="dk1"/>
-              </a:buClr>
-              <a:buSzPts val="1800"/>
-              <a:buChar char="•"/>
-              <a:defRPr/>
-            </a:lvl9pPr>
-          </a:lstStyle>
-          <a:p/>
-        </p:txBody>
-      </p:sp>
-      <p:sp>
-        <p:nvSpPr>
-          <p:cNvPr id="98" name="Google Shape;98;p11"/>
-          <p:cNvSpPr txBox="1"/>
-          <p:nvPr>
-            <p:ph idx="3" type="body"/>
-          </p:nvPr>
-        </p:nvSpPr>
-        <p:spPr>
-          <a:xfrm>
-            <a:off x="6097338" y="5058095"/>
-            <a:ext cx="5417327" cy="356617"/>
-          </a:xfrm>
-          <a:prstGeom prst="rect">
-            <a:avLst/>
-          </a:prstGeom>
-          <a:noFill/>
-          <a:ln>
-            <a:noFill/>
-          </a:ln>
-        </p:spPr>
-        <p:txBody>
-          <a:bodyPr anchorCtr="0" anchor="t" bIns="0" lIns="0" spcFirstLastPara="1" rIns="0" wrap="square" tIns="0">
-            <a:normAutofit/>
-          </a:bodyPr>
-          <a:lstStyle>
-            <a:lvl1pPr indent="-228600" lvl="0" marL="457200" algn="l">
-              <a:lnSpc>
-                <a:spcPct val="110000"/>
-              </a:lnSpc>
-              <a:spcBef>
-                <a:spcPts val="1000"/>
-              </a:spcBef>
-              <a:spcAft>
-                <a:spcPts val="0"/>
-              </a:spcAft>
-              <a:buClr>
-                <a:schemeClr val="dk1"/>
-              </a:buClr>
-              <a:buSzPts val="1800"/>
-              <a:buNone/>
-              <a:defRPr sz="1800"/>
-            </a:lvl1pPr>
-            <a:lvl2pPr indent="-342900" lvl="1" marL="914400" algn="l">
-              <a:lnSpc>
-                <a:spcPct val="110000"/>
-              </a:lnSpc>
-              <a:spcBef>
-                <a:spcPts val="500"/>
-              </a:spcBef>
-              <a:spcAft>
-                <a:spcPts val="0"/>
-              </a:spcAft>
-              <a:buSzPts val="1800"/>
-              <a:buChar char="•"/>
-              <a:defRPr/>
-            </a:lvl2pPr>
-            <a:lvl3pPr indent="-342900" lvl="2" marL="1371600" algn="l">
-              <a:lnSpc>
-                <a:spcPct val="110000"/>
-              </a:lnSpc>
-              <a:spcBef>
-                <a:spcPts val="500"/>
-              </a:spcBef>
-              <a:spcAft>
-                <a:spcPts val="0"/>
-              </a:spcAft>
-              <a:buClr>
-                <a:schemeClr val="dk1"/>
-              </a:buClr>
-              <a:buSzPts val="1800"/>
-              <a:buChar char="−"/>
-              <a:defRPr/>
-            </a:lvl3pPr>
-            <a:lvl4pPr indent="-342900" lvl="3" marL="1828800" algn="l">
-              <a:lnSpc>
-                <a:spcPct val="90000"/>
-              </a:lnSpc>
-              <a:spcBef>
-                <a:spcPts val="500"/>
-              </a:spcBef>
-              <a:spcAft>
-                <a:spcPts val="0"/>
-              </a:spcAft>
-              <a:buClr>
-                <a:schemeClr val="dk1"/>
-              </a:buClr>
-              <a:buSzPts val="1800"/>
-              <a:buChar char="•"/>
-              <a:defRPr/>
-            </a:lvl4pPr>
-            <a:lvl5pPr indent="-342900" lvl="4" marL="2286000" algn="l">
-              <a:lnSpc>
-                <a:spcPct val="90000"/>
-              </a:lnSpc>
-              <a:spcBef>
-                <a:spcPts val="500"/>
-              </a:spcBef>
-              <a:spcAft>
-                <a:spcPts val="0"/>
-              </a:spcAft>
-              <a:buClr>
-                <a:schemeClr val="dk1"/>
-              </a:buClr>
-              <a:buSzPts val="1800"/>
-              <a:buChar char="•"/>
-              <a:defRPr/>
-            </a:lvl5pPr>
-            <a:lvl6pPr indent="-342900" lvl="5" marL="2743200" algn="l">
-              <a:lnSpc>
-                <a:spcPct val="90000"/>
-              </a:lnSpc>
-              <a:spcBef>
-                <a:spcPts val="500"/>
-              </a:spcBef>
-              <a:spcAft>
-                <a:spcPts val="0"/>
-              </a:spcAft>
-              <a:buClr>
-                <a:schemeClr val="dk1"/>
-              </a:buClr>
-              <a:buSzPts val="1800"/>
-              <a:buChar char="•"/>
-              <a:defRPr/>
-            </a:lvl6pPr>
-            <a:lvl7pPr indent="-342900" lvl="6" marL="3200400" algn="l">
-              <a:lnSpc>
-                <a:spcPct val="90000"/>
-              </a:lnSpc>
-              <a:spcBef>
-                <a:spcPts val="500"/>
-              </a:spcBef>
-              <a:spcAft>
-                <a:spcPts val="0"/>
-              </a:spcAft>
-              <a:buClr>
-                <a:schemeClr val="dk1"/>
-              </a:buClr>
-              <a:buSzPts val="1800"/>
-              <a:buChar char="•"/>
-              <a:defRPr/>
-            </a:lvl7pPr>
-            <a:lvl8pPr indent="-342900" lvl="7" marL="3657600" algn="l">
-              <a:lnSpc>
-                <a:spcPct val="90000"/>
-              </a:lnSpc>
-              <a:spcBef>
-                <a:spcPts val="500"/>
-              </a:spcBef>
-              <a:spcAft>
-                <a:spcPts val="0"/>
-              </a:spcAft>
-              <a:buClr>
-                <a:schemeClr val="dk1"/>
-              </a:buClr>
-              <a:buSzPts val="1800"/>
-              <a:buChar char="•"/>
-              <a:defRPr/>
-            </a:lvl8pPr>
-            <a:lvl9pPr indent="-342900" lvl="8" marL="4114800" algn="l">
-              <a:lnSpc>
-                <a:spcPct val="90000"/>
-              </a:lnSpc>
-              <a:spcBef>
-                <a:spcPts val="500"/>
-              </a:spcBef>
-              <a:spcAft>
-                <a:spcPts val="0"/>
-              </a:spcAft>
-              <a:buClr>
-                <a:schemeClr val="dk1"/>
-              </a:buClr>
-              <a:buSzPts val="1800"/>
-              <a:buChar char="•"/>
-              <a:defRPr/>
-            </a:lvl9pPr>
-          </a:lstStyle>
-          <a:p/>
-        </p:txBody>
-      </p:sp>
-      <p:sp>
-        <p:nvSpPr>
-          <p:cNvPr id="99" name="Google Shape;99;p11"/>
-          <p:cNvSpPr txBox="1"/>
-          <p:nvPr>
-            <p:ph idx="4" type="body"/>
-          </p:nvPr>
-        </p:nvSpPr>
-        <p:spPr>
-          <a:xfrm>
-            <a:off x="6096000" y="1773238"/>
-            <a:ext cx="5417327" cy="1080000"/>
-          </a:xfrm>
-          <a:prstGeom prst="rect">
-            <a:avLst/>
-          </a:prstGeom>
-          <a:noFill/>
-          <a:ln>
-            <a:noFill/>
-          </a:ln>
-        </p:spPr>
-        <p:txBody>
-          <a:bodyPr anchorCtr="0" anchor="b" bIns="0" lIns="0" spcFirstLastPara="1" rIns="0" wrap="square" tIns="0">
-            <a:noAutofit/>
-          </a:bodyPr>
-          <a:lstStyle>
-            <a:lvl1pPr indent="-228600" lvl="0" marL="457200" algn="l">
-              <a:lnSpc>
-                <a:spcPct val="100000"/>
-              </a:lnSpc>
-              <a:spcBef>
-                <a:spcPts val="1000"/>
-              </a:spcBef>
-              <a:spcAft>
-                <a:spcPts val="0"/>
-              </a:spcAft>
-              <a:buClr>
-                <a:schemeClr val="dk1"/>
-              </a:buClr>
-              <a:buSzPts val="8800"/>
-              <a:buNone/>
-              <a:defRPr b="1" i="0" sz="8800">
-                <a:solidFill>
-                  <a:schemeClr val="dk1"/>
-                </a:solidFill>
-                <a:latin typeface="Play"/>
-                <a:ea typeface="Play"/>
-                <a:cs typeface="Play"/>
-                <a:sym typeface="Play"/>
-              </a:defRPr>
-            </a:lvl1pPr>
-            <a:lvl2pPr indent="-342900" lvl="1" marL="914400" algn="l">
-              <a:lnSpc>
-                <a:spcPct val="110000"/>
-              </a:lnSpc>
-              <a:spcBef>
-                <a:spcPts val="500"/>
-              </a:spcBef>
-              <a:spcAft>
-                <a:spcPts val="0"/>
-              </a:spcAft>
-              <a:buSzPts val="1800"/>
-              <a:buChar char="•"/>
-              <a:defRPr/>
-            </a:lvl2pPr>
-            <a:lvl3pPr indent="-342900" lvl="2" marL="1371600" algn="l">
-              <a:lnSpc>
-                <a:spcPct val="110000"/>
-              </a:lnSpc>
-              <a:spcBef>
-                <a:spcPts val="500"/>
-              </a:spcBef>
-              <a:spcAft>
-                <a:spcPts val="0"/>
-              </a:spcAft>
-              <a:buClr>
-                <a:schemeClr val="dk1"/>
-              </a:buClr>
-              <a:buSzPts val="1800"/>
-              <a:buChar char="−"/>
-              <a:defRPr/>
-            </a:lvl3pPr>
-            <a:lvl4pPr indent="-342900" lvl="3" marL="1828800" algn="l">
-              <a:lnSpc>
-                <a:spcPct val="90000"/>
-              </a:lnSpc>
-              <a:spcBef>
-                <a:spcPts val="500"/>
-              </a:spcBef>
-              <a:spcAft>
-                <a:spcPts val="0"/>
-              </a:spcAft>
-              <a:buClr>
-                <a:schemeClr val="dk1"/>
-              </a:buClr>
-              <a:buSzPts val="1800"/>
-              <a:buChar char="•"/>
-              <a:defRPr/>
-            </a:lvl4pPr>
-            <a:lvl5pPr indent="-342900" lvl="4" marL="2286000" algn="l">
-              <a:lnSpc>
-                <a:spcPct val="90000"/>
-              </a:lnSpc>
-              <a:spcBef>
-                <a:spcPts val="500"/>
-              </a:spcBef>
-              <a:spcAft>
-                <a:spcPts val="0"/>
-              </a:spcAft>
-              <a:buClr>
-                <a:schemeClr val="dk1"/>
-              </a:buClr>
-              <a:buSzPts val="1800"/>
-              <a:buChar char="•"/>
-              <a:defRPr/>
-            </a:lvl5pPr>
-            <a:lvl6pPr indent="-342900" lvl="5" marL="2743200" algn="l">
-              <a:lnSpc>
-                <a:spcPct val="90000"/>
-              </a:lnSpc>
-              <a:spcBef>
-                <a:spcPts val="500"/>
-              </a:spcBef>
-              <a:spcAft>
-                <a:spcPts val="0"/>
-              </a:spcAft>
-              <a:buClr>
-                <a:schemeClr val="dk1"/>
-              </a:buClr>
-              <a:buSzPts val="1800"/>
-              <a:buChar char="•"/>
-              <a:defRPr/>
-            </a:lvl6pPr>
-            <a:lvl7pPr indent="-342900" lvl="6" marL="3200400" algn="l">
-              <a:lnSpc>
-                <a:spcPct val="90000"/>
-              </a:lnSpc>
-              <a:spcBef>
-                <a:spcPts val="500"/>
-              </a:spcBef>
-              <a:spcAft>
-                <a:spcPts val="0"/>
-              </a:spcAft>
-              <a:buClr>
-                <a:schemeClr val="dk1"/>
-              </a:buClr>
-              <a:buSzPts val="1800"/>
-              <a:buChar char="•"/>
-              <a:defRPr/>
-            </a:lvl7pPr>
-            <a:lvl8pPr indent="-342900" lvl="7" marL="3657600" algn="l">
-              <a:lnSpc>
-                <a:spcPct val="90000"/>
-              </a:lnSpc>
-              <a:spcBef>
-                <a:spcPts val="500"/>
-              </a:spcBef>
-              <a:spcAft>
-                <a:spcPts val="0"/>
-              </a:spcAft>
-              <a:buClr>
-                <a:schemeClr val="dk1"/>
-              </a:buClr>
-              <a:buSzPts val="1800"/>
-              <a:buChar char="•"/>
-              <a:defRPr/>
-            </a:lvl8pPr>
-            <a:lvl9pPr indent="-342900" lvl="8" marL="4114800" algn="l">
-              <a:lnSpc>
-                <a:spcPct val="90000"/>
-              </a:lnSpc>
-              <a:spcBef>
-                <a:spcPts val="500"/>
-              </a:spcBef>
-              <a:spcAft>
-                <a:spcPts val="0"/>
-              </a:spcAft>
-              <a:buClr>
-                <a:schemeClr val="dk1"/>
-              </a:buClr>
-              <a:buSzPts val="1800"/>
-              <a:buChar char="•"/>
-              <a:defRPr/>
-            </a:lvl9pPr>
-          </a:lstStyle>
-          <a:p/>
-        </p:txBody>
-      </p:sp>
-      <p:sp>
-        <p:nvSpPr>
-          <p:cNvPr id="100" name="Google Shape;100;p11"/>
-          <p:cNvSpPr txBox="1"/>
-          <p:nvPr>
-            <p:ph idx="5" type="body"/>
-          </p:nvPr>
-        </p:nvSpPr>
-        <p:spPr>
-          <a:xfrm>
-            <a:off x="6096000" y="2967300"/>
-            <a:ext cx="5417327" cy="356617"/>
-          </a:xfrm>
-          <a:prstGeom prst="rect">
-            <a:avLst/>
-          </a:prstGeom>
-          <a:noFill/>
-          <a:ln>
-            <a:noFill/>
-          </a:ln>
-        </p:spPr>
-        <p:txBody>
-          <a:bodyPr anchorCtr="0" anchor="t" bIns="0" lIns="0" spcFirstLastPara="1" rIns="0" wrap="square" tIns="0">
-            <a:normAutofit/>
-          </a:bodyPr>
-          <a:lstStyle>
-            <a:lvl1pPr indent="-228600" lvl="0" marL="457200" algn="l">
-              <a:lnSpc>
-                <a:spcPct val="110000"/>
-              </a:lnSpc>
-              <a:spcBef>
-                <a:spcPts val="1000"/>
-              </a:spcBef>
-              <a:spcAft>
-                <a:spcPts val="0"/>
-              </a:spcAft>
-              <a:buClr>
-                <a:schemeClr val="dk1"/>
-              </a:buClr>
-              <a:buSzPts val="1800"/>
-              <a:buNone/>
-              <a:defRPr sz="1800"/>
-            </a:lvl1pPr>
-            <a:lvl2pPr indent="-342900" lvl="1" marL="914400" algn="l">
-              <a:lnSpc>
-                <a:spcPct val="110000"/>
-              </a:lnSpc>
-              <a:spcBef>
-                <a:spcPts val="500"/>
-              </a:spcBef>
-              <a:spcAft>
-                <a:spcPts val="0"/>
-              </a:spcAft>
-              <a:buSzPts val="1800"/>
-              <a:buChar char="•"/>
-              <a:defRPr/>
-            </a:lvl2pPr>
-            <a:lvl3pPr indent="-342900" lvl="2" marL="1371600" algn="l">
-              <a:lnSpc>
-                <a:spcPct val="110000"/>
-              </a:lnSpc>
-              <a:spcBef>
-                <a:spcPts val="500"/>
-              </a:spcBef>
-              <a:spcAft>
-                <a:spcPts val="0"/>
-              </a:spcAft>
-              <a:buClr>
-                <a:schemeClr val="dk1"/>
-              </a:buClr>
-              <a:buSzPts val="1800"/>
-              <a:buChar char="−"/>
-              <a:defRPr/>
-            </a:lvl3pPr>
-            <a:lvl4pPr indent="-342900" lvl="3" marL="1828800" algn="l">
-              <a:lnSpc>
-                <a:spcPct val="90000"/>
-              </a:lnSpc>
-              <a:spcBef>
-                <a:spcPts val="500"/>
-              </a:spcBef>
-              <a:spcAft>
-                <a:spcPts val="0"/>
-              </a:spcAft>
-              <a:buClr>
-                <a:schemeClr val="dk1"/>
-              </a:buClr>
-              <a:buSzPts val="1800"/>
-              <a:buChar char="•"/>
-              <a:defRPr/>
-            </a:lvl4pPr>
-            <a:lvl5pPr indent="-342900" lvl="4" marL="2286000" algn="l">
-              <a:lnSpc>
-                <a:spcPct val="90000"/>
-              </a:lnSpc>
-              <a:spcBef>
-                <a:spcPts val="500"/>
-              </a:spcBef>
-              <a:spcAft>
-                <a:spcPts val="0"/>
-              </a:spcAft>
-              <a:buClr>
-                <a:schemeClr val="dk1"/>
-              </a:buClr>
-              <a:buSzPts val="1800"/>
-              <a:buChar char="•"/>
-              <a:defRPr/>
-            </a:lvl5pPr>
-            <a:lvl6pPr indent="-342900" lvl="5" marL="2743200" algn="l">
-              <a:lnSpc>
-                <a:spcPct val="90000"/>
-              </a:lnSpc>
-              <a:spcBef>
-                <a:spcPts val="500"/>
-              </a:spcBef>
-              <a:spcAft>
-                <a:spcPts val="0"/>
-              </a:spcAft>
-              <a:buClr>
-                <a:schemeClr val="dk1"/>
-              </a:buClr>
-              <a:buSzPts val="1800"/>
-              <a:buChar char="•"/>
-              <a:defRPr/>
-            </a:lvl6pPr>
-            <a:lvl7pPr indent="-342900" lvl="6" marL="3200400" algn="l">
-              <a:lnSpc>
-                <a:spcPct val="90000"/>
-              </a:lnSpc>
-              <a:spcBef>
-                <a:spcPts val="500"/>
-              </a:spcBef>
-              <a:spcAft>
-                <a:spcPts val="0"/>
-              </a:spcAft>
-              <a:buClr>
-                <a:schemeClr val="dk1"/>
-              </a:buClr>
-              <a:buSzPts val="1800"/>
-              <a:buChar char="•"/>
-              <a:defRPr/>
-            </a:lvl7pPr>
-            <a:lvl8pPr indent="-342900" lvl="7" marL="3657600" algn="l">
-              <a:lnSpc>
-                <a:spcPct val="90000"/>
-              </a:lnSpc>
-              <a:spcBef>
-                <a:spcPts val="500"/>
-              </a:spcBef>
-              <a:spcAft>
-                <a:spcPts val="0"/>
-              </a:spcAft>
-              <a:buClr>
-                <a:schemeClr val="dk1"/>
-              </a:buClr>
-              <a:buSzPts val="1800"/>
-              <a:buChar char="•"/>
-              <a:defRPr/>
-            </a:lvl8pPr>
-            <a:lvl9pPr indent="-342900" lvl="8" marL="4114800" algn="l">
-              <a:lnSpc>
-                <a:spcPct val="90000"/>
-              </a:lnSpc>
-              <a:spcBef>
-                <a:spcPts val="500"/>
-              </a:spcBef>
-              <a:spcAft>
-                <a:spcPts val="0"/>
-              </a:spcAft>
-              <a:buClr>
-                <a:schemeClr val="dk1"/>
-              </a:buClr>
-              <a:buSzPts val="1800"/>
-              <a:buChar char="•"/>
-              <a:defRPr/>
-            </a:lvl9pPr>
-          </a:lstStyle>
-          <a:p/>
-        </p:txBody>
-      </p:sp>
-    </p:spTree>
-  </p:cSld>
-  <p:clrMapOvr>
-    <a:masterClrMapping/>
-  </p:clrMapOvr>
-</p:sldLayout>
 </file>
 
 <file path=ppt/slideLayouts/slideLayout12.xml><?xml version="1.0" encoding="utf-8"?>
@@ -5493,7 +4451,6 @@
   <p:clrMap accent1="accent1" accent2="accent2" accent3="accent3" accent4="accent4" accent5="accent5" accent6="accent6" bg1="lt1" bg2="dk2" tx1="dk1" tx2="lt2" folHlink="folHlink" hlink="hlink"/>
   <p:sldLayoutIdLst>
     <p:sldLayoutId id="2147483653" r:id="rId6"/>
-    <p:sldLayoutId id="2147483657" r:id="rId10"/>
     <p:sldLayoutId id="2147483659" r:id="rId12"/>
   </p:sldLayoutIdLst>
   <p:hf dt="0" ftr="0" hdr="0" sldNum="0"/>
@@ -8427,319 +7384,6 @@
       <p:grpSpPr/>
       <p:sp>
         <p:nvSpPr>
-          <p:cNvPr id="795" name="Google Shape;795;p60"/>
-          <p:cNvSpPr txBox="1"/>
-          <p:nvPr/>
-        </p:nvSpPr>
-        <p:spPr>
-          <a:xfrm>
-            <a:off x="18692059" y="4674436"/>
-            <a:ext cx="4304330" cy="678198"/>
-          </a:xfrm>
-          <a:prstGeom prst="rect">
-            <a:avLst/>
-          </a:prstGeom>
-          <a:noFill/>
-          <a:ln>
-            <a:noFill/>
-          </a:ln>
-        </p:spPr>
-        <p:txBody>
-          <a:bodyPr anchorCtr="0" anchor="t" bIns="45700" lIns="91425" spcFirstLastPara="1" rIns="91425" wrap="square" tIns="45700">
-            <a:noAutofit/>
-          </a:bodyPr>
-          <a:lstStyle/>
-          <a:p>
-            <a:pPr indent="0" lvl="0" marL="0" marR="0" rtl="0" algn="l">
-              <a:lnSpc>
-                <a:spcPct val="110000"/>
-              </a:lnSpc>
-              <a:spcBef>
-                <a:spcPts val="0"/>
-              </a:spcBef>
-              <a:spcAft>
-                <a:spcPts val="0"/>
-              </a:spcAft>
-              <a:buClr>
-                <a:schemeClr val="dk1"/>
-              </a:buClr>
-              <a:buSzPts val="1600"/>
-              <a:buFont typeface="Arial"/>
-              <a:buNone/>
-            </a:pPr>
-            <a:r>
-              <a:t/>
-            </a:r>
-            <a:endParaRPr sz="1600">
-              <a:solidFill>
-                <a:schemeClr val="dk1"/>
-              </a:solidFill>
-              <a:latin typeface="Arial"/>
-              <a:ea typeface="Arial"/>
-              <a:cs typeface="Arial"/>
-              <a:sym typeface="Arial"/>
-            </a:endParaRPr>
-          </a:p>
-        </p:txBody>
-      </p:sp>
-      <p:pic>
-        <p:nvPicPr>
-          <p:cNvPr id="797" name="Google Shape;797;p60"/>
-          <p:cNvPicPr preferRelativeResize="0"/>
-          <p:nvPr/>
-        </p:nvPicPr>
-        <p:blipFill rotWithShape="1">
-          <a:blip r:embed="rId3">
-            <a:alphaModFix/>
-          </a:blip>
-          <a:srcRect b="0" l="0" r="0" t="0"/>
-          <a:stretch/>
-        </p:blipFill>
-        <p:spPr>
-          <a:xfrm>
-            <a:off x="669096" y="2601017"/>
-            <a:ext cx="450850" cy="450850"/>
-          </a:xfrm>
-          <a:prstGeom prst="rect">
-            <a:avLst/>
-          </a:prstGeom>
-          <a:noFill/>
-          <a:ln>
-            <a:noFill/>
-          </a:ln>
-        </p:spPr>
-      </p:pic>
-      <p:pic>
-        <p:nvPicPr>
-          <p:cNvPr id="798" name="Google Shape;798;p60"/>
-          <p:cNvPicPr preferRelativeResize="0"/>
-          <p:nvPr/>
-        </p:nvPicPr>
-        <p:blipFill rotWithShape="1">
-          <a:blip r:embed="rId4">
-            <a:alphaModFix/>
-          </a:blip>
-          <a:srcRect b="0" l="0" r="0" t="0"/>
-          <a:stretch/>
-        </p:blipFill>
-        <p:spPr>
-          <a:xfrm>
-            <a:off x="8097007" y="2603210"/>
-            <a:ext cx="450851" cy="450851"/>
-          </a:xfrm>
-          <a:prstGeom prst="rect">
-            <a:avLst/>
-          </a:prstGeom>
-          <a:noFill/>
-          <a:ln>
-            <a:noFill/>
-          </a:ln>
-        </p:spPr>
-      </p:pic>
-      <p:pic>
-        <p:nvPicPr>
-          <p:cNvPr id="799" name="Google Shape;799;p60"/>
-          <p:cNvPicPr preferRelativeResize="0"/>
-          <p:nvPr/>
-        </p:nvPicPr>
-        <p:blipFill rotWithShape="1">
-          <a:blip r:embed="rId5">
-            <a:alphaModFix/>
-          </a:blip>
-          <a:srcRect b="0" l="0" r="0" t="0"/>
-          <a:stretch/>
-        </p:blipFill>
-        <p:spPr>
-          <a:xfrm>
-            <a:off x="4383052" y="2601017"/>
-            <a:ext cx="450850" cy="450850"/>
-          </a:xfrm>
-          <a:prstGeom prst="rect">
-            <a:avLst/>
-          </a:prstGeom>
-          <a:noFill/>
-          <a:ln>
-            <a:noFill/>
-          </a:ln>
-        </p:spPr>
-      </p:pic>
-      <p:sp>
-        <p:nvSpPr>
-          <p:cNvPr id="800" name="title"/>
-          <p:cNvSpPr txBox="1"/>
-          <p:nvPr/>
-        </p:nvSpPr>
-        <p:spPr>
-          <a:xfrm>
-            <a:off x="677387" y="692177"/>
-            <a:ext cx="10855878" cy="1447800"/>
-          </a:xfrm>
-          <a:prstGeom prst="rect">
-            <a:avLst/>
-          </a:prstGeom>
-          <a:noFill/>
-        </p:spPr>
-        <p:txBody>
-          <a:bodyPr wrap="square" lIns="76200" rIns="76200" tIns="50800" bIns="50800">
-            <a:spAutoFit/>
-          </a:bodyPr>
-          <a:lstStyle/>
-          <a:p>
-            <a:pPr algn="l">
-              <a:spcAft>
-                <a:spcPts val="300"/>
-              </a:spcAft>
-              <a:defRPr sz="4000">
-                <a:solidFill>
-                  <a:srgbClr val="000000"/>
-                </a:solidFill>
-                <a:latin typeface="Arial"/>
-                <a:ea typeface="Arial"/>
-                <a:cs typeface="Arial"/>
-              </a:defRPr>
-            </a:pPr>
-            <a:r>
-              <a:rPr sz="4000">
-                <a:solidFill>
-                  <a:srgbClr val="000000"/>
-                </a:solidFill>
-                <a:latin typeface="Arial"/>
-                <a:ea typeface="Arial"/>
-                <a:cs typeface="Arial"/>
-              </a:rPr>
-              <a:t>Текущее состояние: ручная сборка презентаций</a:t>
-            </a:r>
-          </a:p>
-        </p:txBody>
-      </p:sp>
-      <p:sp>
-        <p:nvSpPr>
-          <p:cNvPr id="801" name="body"/>
-          <p:cNvSpPr txBox="1"/>
-          <p:nvPr/>
-        </p:nvSpPr>
-        <p:spPr>
-          <a:xfrm>
-            <a:off x="677387" y="3695391"/>
-            <a:ext cx="10855878" cy="894080"/>
-          </a:xfrm>
-          <a:prstGeom prst="rect">
-            <a:avLst/>
-          </a:prstGeom>
-          <a:noFill/>
-        </p:spPr>
-        <p:txBody>
-          <a:bodyPr wrap="square" lIns="76200" rIns="76200" tIns="50800" bIns="50800">
-            <a:spAutoFit/>
-          </a:bodyPr>
-          <a:lstStyle/>
-          <a:p>
-            <a:pPr algn="l">
-              <a:spcAft>
-                <a:spcPts val="300"/>
-              </a:spcAft>
-              <a:defRPr sz="1600">
-                <a:solidFill>
-                  <a:srgbClr val="000000"/>
-                </a:solidFill>
-                <a:latin typeface="Arial"/>
-                <a:ea typeface="Arial"/>
-                <a:cs typeface="Arial"/>
-              </a:defRPr>
-            </a:pPr>
-            <a:r>
-              <a:rPr sz="1600">
-                <a:solidFill>
-                  <a:srgbClr val="000000"/>
-                </a:solidFill>
-                <a:latin typeface="Arial"/>
-                <a:ea typeface="Arial"/>
-                <a:cs typeface="Arial"/>
-              </a:rPr>
-              <a:t>• Сборка одной колоды 12 слайдов занимает 186 минут</a:t>
-            </a:r>
-          </a:p>
-          <a:p>
-            <a:pPr algn="l">
-              <a:spcAft>
-                <a:spcPts val="300"/>
-              </a:spcAft>
-              <a:defRPr sz="1600">
-                <a:solidFill>
-                  <a:srgbClr val="000000"/>
-                </a:solidFill>
-                <a:latin typeface="Arial"/>
-                <a:ea typeface="Arial"/>
-                <a:cs typeface="Arial"/>
-              </a:defRPr>
-            </a:pPr>
-            <a:r>
-              <a:rPr sz="1600">
-                <a:solidFill>
-                  <a:srgbClr val="000000"/>
-                </a:solidFill>
-                <a:latin typeface="Arial"/>
-                <a:ea typeface="Arial"/>
-                <a:cs typeface="Arial"/>
-              </a:rPr>
-              <a:t>• Правки после ревью дизайнера 74 минуты</a:t>
-            </a:r>
-          </a:p>
-          <a:p>
-            <a:pPr algn="l">
-              <a:spcAft>
-                <a:spcPts val="300"/>
-              </a:spcAft>
-              <a:defRPr sz="1600">
-                <a:solidFill>
-                  <a:srgbClr val="000000"/>
-                </a:solidFill>
-                <a:latin typeface="Arial"/>
-                <a:ea typeface="Arial"/>
-                <a:cs typeface="Arial"/>
-              </a:defRPr>
-            </a:pPr>
-            <a:r>
-              <a:rPr sz="1600">
-                <a:solidFill>
-                  <a:srgbClr val="000000"/>
-                </a:solidFill>
-                <a:latin typeface="Arial"/>
-                <a:ea typeface="Arial"/>
-                <a:cs typeface="Arial"/>
-              </a:rPr>
-              <a:t>• 19 из 42 колод нарушают фирменный стиль</a:t>
-            </a:r>
-          </a:p>
-        </p:txBody>
-      </p:sp>
-    </p:spTree>
-  </p:cSld>
-  <p:clrMapOvr>
-    <a:masterClrMapping/>
-  </p:clrMapOvr>
-</p:sld>
-</file>
-
-<file path=ppt/slides/slide57.xml><?xml version="1.0" encoding="utf-8"?>
-<p:sld xmlns:a="http://schemas.openxmlformats.org/drawingml/2006/main" xmlns:p="http://schemas.openxmlformats.org/presentationml/2006/main" xmlns:r="http://schemas.openxmlformats.org/officeDocument/2006/relationships">
-  <p:cSld>
-    <p:bg>
-      <p:bgPr>
-        <a:solidFill>
-          <a:schemeClr val="lt2"/>
-        </a:solidFill>
-      </p:bgPr>
-    </p:bg>
-    <p:spTree>
-      <p:nvGrpSpPr>
-        <p:cNvPr id="1" name=""/>
-        <p:cNvGrpSpPr/>
-        <p:nvPr/>
-      </p:nvGrpSpPr>
-      <p:grpSpPr/>
-      <p:sp>
-        <p:nvSpPr>
           <p:cNvPr id="2" name="title"/>
           <p:cNvSpPr txBox="1"/>
           <p:nvPr/>
@@ -8782,82 +7426,7 @@
                 <a:ea typeface="Arial"/>
                 <a:cs typeface="Arial"/>
               </a:rPr>
-              <a:t>Ограничения команды дизайна</a:t>
-            </a:r>
-          </a:p>
-        </p:txBody>
-      </p:sp>
-      <p:sp>
-        <p:nvSpPr>
-          <p:cNvPr id="3" name="body"/>
-          <p:cNvSpPr txBox="1"/>
-          <p:nvPr/>
-        </p:nvSpPr>
-        <p:spPr>
-          <a:xfrm>
-            <a:off x="677387" y="3236197"/>
-            <a:ext cx="10855878" cy="894080"/>
-          </a:xfrm>
-          <a:prstGeom prst="rect">
-            <a:avLst/>
-          </a:prstGeom>
-          <a:noFill/>
-        </p:spPr>
-        <p:txBody>
-          <a:bodyPr wrap="square" lIns="76200" rIns="76200" tIns="50800" bIns="50800">
-            <a:spAutoFit/>
-          </a:bodyPr>
-          <a:lstStyle/>
-          <a:p>
-            <a:pPr algn="l">
-              <a:spcAft>
-                <a:spcPts val="300"/>
-              </a:spcAft>
-              <a:defRPr sz="2400">
-                <a:solidFill>
-                  <a:srgbClr val="000000"/>
-                </a:solidFill>
-                <a:latin typeface="Arial"/>
-                <a:ea typeface="Arial"/>
-                <a:cs typeface="Arial"/>
-              </a:defRPr>
-            </a:pPr>
-            <a:r>
-              <a:rPr sz="2400">
-                <a:solidFill>
-                  <a:srgbClr val="000000"/>
-                </a:solidFill>
-                <a:latin typeface="Arial"/>
-                <a:ea typeface="Arial"/>
-                <a:cs typeface="Arial"/>
-              </a:rPr>
-              <a:t>• 4 дизайнера закрывают 11 запросов в неделю из 27</a:t>
-            </a:r>
-          </a:p>
-          <a:p>
-            <a:pPr algn="l">
-              <a:spcAft>
-                <a:spcPts val="300"/>
-              </a:spcAft>
-              <a:defRPr sz="2400">
-                <a:solidFill>
-                  <a:srgbClr val="000000"/>
-                </a:solidFill>
-                <a:latin typeface="Arial"/>
-                <a:ea typeface="Arial"/>
-                <a:cs typeface="Arial"/>
-              </a:defRPr>
-            </a:pPr>
-            <a:r>
-              <a:rPr sz="2400">
-                <a:solidFill>
-                  <a:srgbClr val="000000"/>
-                </a:solidFill>
-                <a:latin typeface="Arial"/>
-                <a:ea typeface="Arial"/>
-                <a:cs typeface="Arial"/>
-              </a:rPr>
-              <a:t>• Средний срок ожидания 6 рабочих дней</a:t>
+              <a:t>Автоматическая вёрстка презентаций</a:t>
             </a:r>
           </a:p>
         </p:txBody>
@@ -8870,425 +7439,7 @@
 </p:sld>
 </file>
 
-<file path=ppt/slides/slide58.xml><?xml version="1.0" encoding="utf-8"?>
-<p:sld xmlns:a="http://schemas.openxmlformats.org/drawingml/2006/main" xmlns:p="http://schemas.openxmlformats.org/presentationml/2006/main" xmlns:r="http://schemas.openxmlformats.org/officeDocument/2006/relationships">
-  <p:cSld>
-    <p:bg>
-      <p:bgPr>
-        <a:solidFill>
-          <a:schemeClr val="lt2"/>
-        </a:solidFill>
-      </p:bgPr>
-    </p:bg>
-    <p:spTree>
-      <p:nvGrpSpPr>
-        <p:cNvPr id="1" name=""/>
-        <p:cNvGrpSpPr/>
-        <p:nvPr/>
-      </p:nvGrpSpPr>
-      <p:grpSpPr/>
-      <p:pic>
-        <p:nvPicPr>
-          <p:cNvPr id="762" name="Google Shape;762;p58"/>
-          <p:cNvPicPr preferRelativeResize="0"/>
-          <p:nvPr/>
-        </p:nvPicPr>
-        <p:blipFill rotWithShape="1">
-          <a:blip r:embed="rId2">
-            <a:alphaModFix/>
-          </a:blip>
-          <a:srcRect b="0" l="0" r="0" t="0"/>
-          <a:stretch/>
-        </p:blipFill>
-        <p:spPr>
-          <a:xfrm>
-            <a:off x="8105070" y="2562300"/>
-            <a:ext cx="866700" cy="866700"/>
-          </a:xfrm>
-          <a:prstGeom prst="rect">
-            <a:avLst/>
-          </a:prstGeom>
-          <a:noFill/>
-          <a:ln>
-            <a:noFill/>
-          </a:ln>
-        </p:spPr>
-      </p:pic>
-      <p:sp>
-        <p:nvSpPr>
-          <p:cNvPr id="764" name="Google Shape;764;p58"/>
-          <p:cNvSpPr txBox="1"/>
-          <p:nvPr/>
-        </p:nvSpPr>
-        <p:spPr>
-          <a:xfrm>
-            <a:off x="18692059" y="4674436"/>
-            <a:ext cx="4304330" cy="678198"/>
-          </a:xfrm>
-          <a:prstGeom prst="rect">
-            <a:avLst/>
-          </a:prstGeom>
-          <a:noFill/>
-          <a:ln>
-            <a:noFill/>
-          </a:ln>
-        </p:spPr>
-        <p:txBody>
-          <a:bodyPr anchorCtr="0" anchor="t" bIns="45700" lIns="91425" spcFirstLastPara="1" rIns="91425" wrap="square" tIns="45700">
-            <a:noAutofit/>
-          </a:bodyPr>
-          <a:lstStyle/>
-          <a:p>
-            <a:pPr indent="0" lvl="0" marL="0" marR="0" rtl="0" algn="l">
-              <a:lnSpc>
-                <a:spcPct val="110000"/>
-              </a:lnSpc>
-              <a:spcBef>
-                <a:spcPts val="0"/>
-              </a:spcBef>
-              <a:spcAft>
-                <a:spcPts val="0"/>
-              </a:spcAft>
-              <a:buClr>
-                <a:schemeClr val="dk1"/>
-              </a:buClr>
-              <a:buSzPts val="1600"/>
-              <a:buFont typeface="Arial"/>
-              <a:buNone/>
-            </a:pPr>
-            <a:r>
-              <a:t/>
-            </a:r>
-            <a:endParaRPr sz="1600">
-              <a:solidFill>
-                <a:schemeClr val="dk1"/>
-              </a:solidFill>
-              <a:latin typeface="Arial"/>
-              <a:ea typeface="Arial"/>
-              <a:cs typeface="Arial"/>
-              <a:sym typeface="Arial"/>
-            </a:endParaRPr>
-          </a:p>
-        </p:txBody>
-      </p:sp>
-      <p:sp>
-        <p:nvSpPr>
-          <p:cNvPr id="768" name="Google Shape;768;p58"/>
-          <p:cNvSpPr/>
-          <p:nvPr/>
-        </p:nvSpPr>
-        <p:spPr>
-          <a:xfrm>
-            <a:off x="671513" y="2562300"/>
-            <a:ext cx="866700" cy="866700"/>
-          </a:xfrm>
-          <a:prstGeom prst="ellipse">
-            <a:avLst/>
-          </a:prstGeom>
-          <a:solidFill>
-            <a:schemeClr val="accent1"/>
-          </a:solidFill>
-          <a:ln>
-            <a:noFill/>
-          </a:ln>
-        </p:spPr>
-        <p:txBody>
-          <a:bodyPr anchorCtr="0" anchor="ctr" bIns="45700" lIns="91425" spcFirstLastPara="1" rIns="91425" wrap="square" tIns="45700">
-            <a:noAutofit/>
-          </a:bodyPr>
-          <a:lstStyle/>
-          <a:p>
-            <a:pPr indent="0" lvl="0" marL="0" marR="0" rtl="0" algn="ctr">
-              <a:spcBef>
-                <a:spcPts val="0"/>
-              </a:spcBef>
-              <a:spcAft>
-                <a:spcPts val="0"/>
-              </a:spcAft>
-              <a:buNone/>
-            </a:pPr>
-            <a:r>
-              <a:t/>
-            </a:r>
-            <a:endParaRPr sz="3200">
-              <a:solidFill>
-                <a:schemeClr val="lt1"/>
-              </a:solidFill>
-              <a:latin typeface="Play"/>
-              <a:ea typeface="Play"/>
-              <a:cs typeface="Play"/>
-              <a:sym typeface="Play"/>
-            </a:endParaRPr>
-          </a:p>
-        </p:txBody>
-      </p:sp>
-      <p:pic>
-        <p:nvPicPr>
-          <p:cNvPr id="769" name="Google Shape;769;p58"/>
-          <p:cNvPicPr preferRelativeResize="0"/>
-          <p:nvPr/>
-        </p:nvPicPr>
-        <p:blipFill rotWithShape="1">
-          <a:blip r:embed="rId3">
-            <a:alphaModFix/>
-          </a:blip>
-          <a:srcRect b="0" l="0" r="0" t="0"/>
-          <a:stretch/>
-        </p:blipFill>
-        <p:spPr>
-          <a:xfrm>
-            <a:off x="879438" y="2770225"/>
-            <a:ext cx="450850" cy="450850"/>
-          </a:xfrm>
-          <a:prstGeom prst="rect">
-            <a:avLst/>
-          </a:prstGeom>
-          <a:noFill/>
-          <a:ln>
-            <a:noFill/>
-          </a:ln>
-        </p:spPr>
-      </p:pic>
-      <p:pic>
-        <p:nvPicPr>
-          <p:cNvPr id="770" name="Google Shape;770;p58"/>
-          <p:cNvPicPr preferRelativeResize="0"/>
-          <p:nvPr/>
-        </p:nvPicPr>
-        <p:blipFill rotWithShape="1">
-          <a:blip r:embed="rId4">
-            <a:alphaModFix/>
-          </a:blip>
-          <a:srcRect b="0" l="0" r="0" t="0"/>
-          <a:stretch/>
-        </p:blipFill>
-        <p:spPr>
-          <a:xfrm>
-            <a:off x="8307349" y="2772418"/>
-            <a:ext cx="450851" cy="450851"/>
-          </a:xfrm>
-          <a:prstGeom prst="rect">
-            <a:avLst/>
-          </a:prstGeom>
-          <a:noFill/>
-          <a:ln>
-            <a:noFill/>
-          </a:ln>
-        </p:spPr>
-      </p:pic>
-      <p:pic>
-        <p:nvPicPr>
-          <p:cNvPr id="771" name="Google Shape;771;p58"/>
-          <p:cNvPicPr preferRelativeResize="0"/>
-          <p:nvPr/>
-        </p:nvPicPr>
-        <p:blipFill rotWithShape="1">
-          <a:blip r:embed="rId5">
-            <a:alphaModFix/>
-          </a:blip>
-          <a:srcRect b="0" l="0" r="0" t="0"/>
-          <a:stretch/>
-        </p:blipFill>
-        <p:spPr>
-          <a:xfrm>
-            <a:off x="4385469" y="2562300"/>
-            <a:ext cx="866700" cy="866700"/>
-          </a:xfrm>
-          <a:prstGeom prst="rect">
-            <a:avLst/>
-          </a:prstGeom>
-          <a:noFill/>
-          <a:ln>
-            <a:noFill/>
-          </a:ln>
-        </p:spPr>
-      </p:pic>
-      <p:pic>
-        <p:nvPicPr>
-          <p:cNvPr id="772" name="Google Shape;772;p58"/>
-          <p:cNvPicPr preferRelativeResize="0"/>
-          <p:nvPr/>
-        </p:nvPicPr>
-        <p:blipFill rotWithShape="1">
-          <a:blip r:embed="rId6">
-            <a:alphaModFix/>
-          </a:blip>
-          <a:srcRect b="0" l="0" r="0" t="0"/>
-          <a:stretch/>
-        </p:blipFill>
-        <p:spPr>
-          <a:xfrm>
-            <a:off x="4593394" y="2770225"/>
-            <a:ext cx="450850" cy="450850"/>
-          </a:xfrm>
-          <a:prstGeom prst="rect">
-            <a:avLst/>
-          </a:prstGeom>
-          <a:noFill/>
-          <a:ln>
-            <a:noFill/>
-          </a:ln>
-        </p:spPr>
-      </p:pic>
-      <p:sp>
-        <p:nvSpPr>
-          <p:cNvPr id="773" name="title"/>
-          <p:cNvSpPr txBox="1"/>
-          <p:nvPr/>
-        </p:nvSpPr>
-        <p:spPr>
-          <a:xfrm>
-            <a:off x="677387" y="692177"/>
-            <a:ext cx="10855878" cy="1447800"/>
-          </a:xfrm>
-          <a:prstGeom prst="rect">
-            <a:avLst/>
-          </a:prstGeom>
-          <a:noFill/>
-        </p:spPr>
-        <p:txBody>
-          <a:bodyPr wrap="square" lIns="76200" rIns="76200" tIns="50800" bIns="50800">
-            <a:spAutoFit/>
-          </a:bodyPr>
-          <a:lstStyle/>
-          <a:p>
-            <a:pPr algn="l">
-              <a:spcAft>
-                <a:spcPts val="300"/>
-              </a:spcAft>
-              <a:defRPr sz="4000">
-                <a:solidFill>
-                  <a:srgbClr val="000000"/>
-                </a:solidFill>
-                <a:latin typeface="Arial"/>
-                <a:ea typeface="Arial"/>
-                <a:cs typeface="Arial"/>
-              </a:defRPr>
-            </a:pPr>
-            <a:r>
-              <a:rPr sz="4000">
-                <a:solidFill>
-                  <a:srgbClr val="000000"/>
-                </a:solidFill>
-                <a:latin typeface="Arial"/>
-                <a:ea typeface="Arial"/>
-                <a:cs typeface="Arial"/>
-              </a:rPr>
-              <a:t>Предлагаемый сервис: автоматическая вёрстка</a:t>
-            </a:r>
-          </a:p>
-        </p:txBody>
-      </p:sp>
-      <p:sp>
-        <p:nvSpPr>
-          <p:cNvPr id="774" name="body"/>
-          <p:cNvSpPr txBox="1"/>
-          <p:nvPr/>
-        </p:nvSpPr>
-        <p:spPr>
-          <a:xfrm>
-            <a:off x="677387" y="3695391"/>
-            <a:ext cx="10855878" cy="894080"/>
-          </a:xfrm>
-          <a:prstGeom prst="rect">
-            <a:avLst/>
-          </a:prstGeom>
-          <a:noFill/>
-        </p:spPr>
-        <p:txBody>
-          <a:bodyPr wrap="square" lIns="76200" rIns="76200" tIns="50800" bIns="50800">
-            <a:spAutoFit/>
-          </a:bodyPr>
-          <a:lstStyle/>
-          <a:p>
-            <a:pPr algn="l">
-              <a:spcAft>
-                <a:spcPts val="300"/>
-              </a:spcAft>
-              <a:defRPr sz="1600">
-                <a:solidFill>
-                  <a:srgbClr val="000000"/>
-                </a:solidFill>
-                <a:latin typeface="Arial"/>
-                <a:ea typeface="Arial"/>
-                <a:cs typeface="Arial"/>
-              </a:defRPr>
-            </a:pPr>
-            <a:r>
-              <a:rPr sz="1600">
-                <a:solidFill>
-                  <a:srgbClr val="000000"/>
-                </a:solidFill>
-                <a:latin typeface="Arial"/>
-                <a:ea typeface="Arial"/>
-                <a:cs typeface="Arial"/>
-              </a:rPr>
-              <a:t>• Принимает шаблон pptx и материалы: документы, таблицы, заметки</a:t>
-            </a:r>
-          </a:p>
-          <a:p>
-            <a:pPr algn="l">
-              <a:spcAft>
-                <a:spcPts val="300"/>
-              </a:spcAft>
-              <a:defRPr sz="1600">
-                <a:solidFill>
-                  <a:srgbClr val="000000"/>
-                </a:solidFill>
-                <a:latin typeface="Arial"/>
-                <a:ea typeface="Arial"/>
-                <a:cs typeface="Arial"/>
-              </a:defRPr>
-            </a:pPr>
-            <a:r>
-              <a:rPr sz="1600">
-                <a:solidFill>
-                  <a:srgbClr val="000000"/>
-                </a:solidFill>
-                <a:latin typeface="Arial"/>
-                <a:ea typeface="Arial"/>
-                <a:cs typeface="Arial"/>
-              </a:rPr>
-              <a:t>• Генерирует колоду по дизайн-системе и аудит качества</a:t>
-            </a:r>
-          </a:p>
-          <a:p>
-            <a:pPr algn="l">
-              <a:spcAft>
-                <a:spcPts val="300"/>
-              </a:spcAft>
-              <a:defRPr sz="1600">
-                <a:solidFill>
-                  <a:srgbClr val="000000"/>
-                </a:solidFill>
-                <a:latin typeface="Arial"/>
-                <a:ea typeface="Arial"/>
-                <a:cs typeface="Arial"/>
-              </a:defRPr>
-            </a:pPr>
-            <a:r>
-              <a:rPr sz="1600">
-                <a:solidFill>
-                  <a:srgbClr val="000000"/>
-                </a:solidFill>
-                <a:latin typeface="Arial"/>
-                <a:ea typeface="Arial"/>
-                <a:cs typeface="Arial"/>
-              </a:rPr>
-              <a:t>• Экспорт в pptx, pdf, html, слайды редактируемы</a:t>
-            </a:r>
-          </a:p>
-        </p:txBody>
-      </p:sp>
-    </p:spTree>
-  </p:cSld>
-  <p:clrMapOvr>
-    <a:masterClrMapping/>
-  </p:clrMapOvr>
-</p:sld>
-</file>
-
-<file path=ppt/slides/slide59.xml><?xml version="1.0" encoding="utf-8"?>
+<file path=ppt/slides/slide57.xml><?xml version="1.0" encoding="utf-8"?>
 <p:sld xmlns:a="http://schemas.openxmlformats.org/drawingml/2006/main" xmlns:p="http://schemas.openxmlformats.org/presentationml/2006/main" xmlns:r="http://schemas.openxmlformats.org/officeDocument/2006/relationships">
   <p:cSld>
     <p:spTree>
@@ -9333,7 +7484,7 @@
         <p:spPr>
           <a:xfrm>
             <a:off x="677387" y="692177"/>
-            <a:ext cx="10855878" cy="822960"/>
+            <a:ext cx="10855878" cy="1447800"/>
           </a:xfrm>
           <a:prstGeom prst="rect">
             <a:avLst/>
@@ -9368,23 +7519,317 @@
                 <a:ea typeface="Arial"/>
                 <a:cs typeface="Arial"/>
               </a:rPr>
-              <a:t>Ключевые возможности сервиса</a:t>
+              <a:t>Сейчас сборка презентаций занимает 186 минут</a:t>
             </a:r>
           </a:p>
         </p:txBody>
       </p:sp>
       <p:sp>
         <p:nvSpPr>
-          <p:cNvPr id="988" name="Document 987"/>
+          <p:cNvPr id="988" name="body"/>
+          <p:cNvSpPr txBox="1"/>
+          <p:nvPr/>
+        </p:nvSpPr>
+        <p:spPr>
+          <a:xfrm>
+            <a:off x="677387" y="3591534"/>
+            <a:ext cx="5245059" cy="1254945"/>
+          </a:xfrm>
+          <a:prstGeom prst="rect">
+            <a:avLst/>
+          </a:prstGeom>
+          <a:noFill/>
+        </p:spPr>
+        <p:txBody>
+          <a:bodyPr wrap="square" lIns="76200" rIns="76200" tIns="50800" bIns="50800">
+            <a:spAutoFit/>
+          </a:bodyPr>
+          <a:lstStyle/>
+          <a:p>
+            <a:pPr algn="l">
+              <a:spcAft>
+                <a:spcPts val="300"/>
+              </a:spcAft>
+              <a:defRPr sz="1400">
+                <a:solidFill>
+                  <a:srgbClr val="000000"/>
+                </a:solidFill>
+                <a:latin typeface="Arial"/>
+                <a:ea typeface="Arial"/>
+                <a:cs typeface="Arial"/>
+              </a:defRPr>
+            </a:pPr>
+            <a:r>
+              <a:rPr sz="1400">
+                <a:solidFill>
+                  <a:srgbClr val="000000"/>
+                </a:solidFill>
+                <a:latin typeface="Arial"/>
+                <a:ea typeface="Arial"/>
+                <a:cs typeface="Arial"/>
+              </a:rPr>
+              <a:t>• Отдел маркетинга вручную собирает 42 колоды за квартал</a:t>
+            </a:r>
+          </a:p>
+          <a:p>
+            <a:pPr algn="l">
+              <a:spcAft>
+                <a:spcPts val="300"/>
+              </a:spcAft>
+              <a:defRPr sz="1400">
+                <a:solidFill>
+                  <a:srgbClr val="000000"/>
+                </a:solidFill>
+                <a:latin typeface="Arial"/>
+                <a:ea typeface="Arial"/>
+                <a:cs typeface="Arial"/>
+              </a:defRPr>
+            </a:pPr>
+            <a:r>
+              <a:rPr sz="1400">
+                <a:solidFill>
+                  <a:srgbClr val="000000"/>
+                </a:solidFill>
+                <a:latin typeface="Arial"/>
+                <a:ea typeface="Arial"/>
+                <a:cs typeface="Arial"/>
+              </a:rPr>
+              <a:t>• 74 минуты уходит на правки после ревью дизайнера</a:t>
+            </a:r>
+          </a:p>
+          <a:p>
+            <a:pPr algn="l">
+              <a:spcAft>
+                <a:spcPts val="300"/>
+              </a:spcAft>
+              <a:defRPr sz="1400">
+                <a:solidFill>
+                  <a:srgbClr val="000000"/>
+                </a:solidFill>
+                <a:latin typeface="Arial"/>
+                <a:ea typeface="Arial"/>
+                <a:cs typeface="Arial"/>
+              </a:defRPr>
+            </a:pPr>
+            <a:r>
+              <a:rPr sz="1400">
+                <a:solidFill>
+                  <a:srgbClr val="000000"/>
+                </a:solidFill>
+                <a:latin typeface="Arial"/>
+                <a:ea typeface="Arial"/>
+                <a:cs typeface="Arial"/>
+              </a:rPr>
+              <a:t>• 19 колод нарушают фирменный стиль</a:t>
+            </a:r>
+          </a:p>
+        </p:txBody>
+      </p:sp>
+      <p:graphicFrame>
+        <p:nvGraphicFramePr>
+          <p:cNvPr id="989" name="Chart 988"/>
+          <p:cNvGraphicFramePr>
+            <a:graphicFrameLocks noGrp="1"/>
+          </p:cNvGraphicFramePr>
+          <p:nvPr/>
+        </p:nvGraphicFramePr>
+        <p:xfrm>
+          <a:off x="6288206" y="3591534"/>
+          <a:ext cx="5245059" cy="1254945"/>
+        </p:xfrm>
+        <a:graphic>
+          <a:graphicData uri="http://schemas.openxmlformats.org/drawingml/2006/chart">
+            <c:chart xmlns:c="http://schemas.openxmlformats.org/drawingml/2006/chart" r:id="rId2"/>
+          </a:graphicData>
+        </a:graphic>
+      </p:graphicFrame>
+    </p:spTree>
+  </p:cSld>
+  <p:clrMapOvr>
+    <a:masterClrMapping/>
+  </p:clrMapOvr>
+</p:sld>
+</file>
+
+<file path=ppt/slides/slide58.xml><?xml version="1.0" encoding="utf-8"?>
+<p:sld xmlns:a="http://schemas.openxmlformats.org/drawingml/2006/main" xmlns:p="http://schemas.openxmlformats.org/presentationml/2006/main" xmlns:r="http://schemas.openxmlformats.org/officeDocument/2006/relationships">
+  <p:cSld>
+    <p:bg>
+      <p:bgPr>
+        <a:solidFill>
+          <a:schemeClr val="lt2"/>
+        </a:solidFill>
+      </p:bgPr>
+    </p:bg>
+    <p:spTree>
+      <p:nvGrpSpPr>
+        <p:cNvPr id="1" name=""/>
+        <p:cNvGrpSpPr/>
+        <p:nvPr/>
+      </p:nvGrpSpPr>
+      <p:grpSpPr/>
+      <p:sp>
+        <p:nvSpPr>
+          <p:cNvPr id="2" name="title"/>
+          <p:cNvSpPr txBox="1"/>
+          <p:nvPr/>
+        </p:nvSpPr>
+        <p:spPr>
+          <a:xfrm>
+            <a:off x="677387" y="692177"/>
+            <a:ext cx="10855878" cy="1447800"/>
+          </a:xfrm>
+          <a:prstGeom prst="rect">
+            <a:avLst/>
+          </a:prstGeom>
+          <a:noFill/>
+        </p:spPr>
+        <p:txBody>
+          <a:bodyPr wrap="square" lIns="76200" rIns="76200" tIns="50800" bIns="50800">
+            <a:spAutoFit/>
+          </a:bodyPr>
+          <a:lstStyle/>
+          <a:p>
+            <a:pPr algn="l">
+              <a:spcAft>
+                <a:spcPts val="300"/>
+              </a:spcAft>
+              <a:defRPr sz="4000">
+                <a:solidFill>
+                  <a:srgbClr val="000000"/>
+                </a:solidFill>
+                <a:latin typeface="Arial"/>
+                <a:ea typeface="Arial"/>
+                <a:cs typeface="Arial"/>
+              </a:defRPr>
+            </a:pPr>
+            <a:r>
+              <a:rPr sz="4000">
+                <a:solidFill>
+                  <a:srgbClr val="000000"/>
+                </a:solidFill>
+                <a:latin typeface="Arial"/>
+                <a:ea typeface="Arial"/>
+                <a:cs typeface="Arial"/>
+              </a:rPr>
+              <a:t>Сервис автоматически вёрстит презентации за 4 минуты</a:t>
+            </a:r>
+          </a:p>
+        </p:txBody>
+      </p:sp>
+      <p:sp>
+        <p:nvSpPr>
+          <p:cNvPr id="3" name="body"/>
+          <p:cNvSpPr txBox="1"/>
+          <p:nvPr/>
+        </p:nvSpPr>
+        <p:spPr>
+          <a:xfrm>
+            <a:off x="677387" y="2277137"/>
+            <a:ext cx="5245059" cy="3923659"/>
+          </a:xfrm>
+          <a:prstGeom prst="rect">
+            <a:avLst/>
+          </a:prstGeom>
+          <a:noFill/>
+        </p:spPr>
+        <p:txBody>
+          <a:bodyPr wrap="square" lIns="76200" rIns="76200" tIns="50800" bIns="50800">
+            <a:spAutoFit/>
+          </a:bodyPr>
+          <a:lstStyle/>
+          <a:p>
+            <a:pPr algn="l">
+              <a:spcAft>
+                <a:spcPts val="300"/>
+              </a:spcAft>
+              <a:defRPr sz="1800">
+                <a:solidFill>
+                  <a:srgbClr val="000000"/>
+                </a:solidFill>
+                <a:latin typeface="Arial"/>
+                <a:ea typeface="Arial"/>
+                <a:cs typeface="Arial"/>
+              </a:defRPr>
+            </a:pPr>
+            <a:r>
+              <a:rPr sz="1800">
+                <a:solidFill>
+                  <a:srgbClr val="000000"/>
+                </a:solidFill>
+                <a:latin typeface="Arial"/>
+                <a:ea typeface="Arial"/>
+                <a:cs typeface="Arial"/>
+              </a:rPr>
+              <a:t>• Принимает шаблон pptx и материалы</a:t>
+            </a:r>
+          </a:p>
+          <a:p>
+            <a:pPr algn="l">
+              <a:spcAft>
+                <a:spcPts val="300"/>
+              </a:spcAft>
+              <a:defRPr sz="1800">
+                <a:solidFill>
+                  <a:srgbClr val="000000"/>
+                </a:solidFill>
+                <a:latin typeface="Arial"/>
+                <a:ea typeface="Arial"/>
+                <a:cs typeface="Arial"/>
+              </a:defRPr>
+            </a:pPr>
+            <a:r>
+              <a:rPr sz="1800">
+                <a:solidFill>
+                  <a:srgbClr val="000000"/>
+                </a:solidFill>
+                <a:latin typeface="Arial"/>
+                <a:ea typeface="Arial"/>
+                <a:cs typeface="Arial"/>
+              </a:rPr>
+              <a:t>• Автоматически формирует план колоды</a:t>
+            </a:r>
+          </a:p>
+          <a:p>
+            <a:pPr algn="l">
+              <a:spcAft>
+                <a:spcPts val="300"/>
+              </a:spcAft>
+              <a:defRPr sz="1800">
+                <a:solidFill>
+                  <a:srgbClr val="000000"/>
+                </a:solidFill>
+                <a:latin typeface="Arial"/>
+                <a:ea typeface="Arial"/>
+                <a:cs typeface="Arial"/>
+              </a:defRPr>
+            </a:pPr>
+            <a:r>
+              <a:rPr sz="1800">
+                <a:solidFill>
+                  <a:srgbClr val="000000"/>
+                </a:solidFill>
+                <a:latin typeface="Arial"/>
+                <a:ea typeface="Arial"/>
+                <a:cs typeface="Arial"/>
+              </a:rPr>
+              <a:t>• Экспорт в pptx, pdf, html</a:t>
+            </a:r>
+          </a:p>
+        </p:txBody>
+      </p:sp>
+      <p:sp>
+        <p:nvSpPr>
+          <p:cNvPr id="4" name="Pentagon 3"/>
           <p:cNvSpPr/>
           <p:nvPr/>
         </p:nvSpPr>
         <p:spPr>
           <a:xfrm>
-            <a:off x="6556689" y="2251302"/>
-            <a:ext cx="478476" cy="528842"/>
+            <a:off x="6288206" y="3929382"/>
+            <a:ext cx="998659" cy="619168"/>
           </a:xfrm>
-          <a:prstGeom prst="flowChartDocument">
+          <a:prstGeom prst="homePlate">
             <a:avLst/>
           </a:prstGeom>
           <a:solidFill>
@@ -9409,39 +7854,13 @@
           </a:fontRef>
         </p:style>
         <p:txBody>
-          <a:bodyPr rtlCol="0" anchor="ctr"/>
-          <a:lstStyle/>
-          <a:p>
-            <a:pPr algn="ctr"/>
-          </a:p>
-        </p:txBody>
-      </p:sp>
-      <p:sp>
-        <p:nvSpPr>
-          <p:cNvPr id="989" name="TextBox 988"/>
-          <p:cNvSpPr txBox="1"/>
-          <p:nvPr/>
-        </p:nvSpPr>
-        <p:spPr>
-          <a:xfrm>
-            <a:off x="6288206" y="2913947"/>
-            <a:ext cx="1015443" cy="677585"/>
-          </a:xfrm>
-          <a:prstGeom prst="rect">
-            <a:avLst/>
-          </a:prstGeom>
-          <a:noFill/>
-        </p:spPr>
-        <p:txBody>
-          <a:bodyPr wrap="square">
-            <a:spAutoFit/>
-          </a:bodyPr>
+          <a:bodyPr rtlCol="0" anchor="ctr" wrap="square" lIns="12700" rIns="12700" tIns="12700" bIns="12700"/>
           <a:lstStyle/>
           <a:p>
             <a:pPr algn="ctr">
-              <a:defRPr sz="1200" b="0">
-                <a:solidFill>
-                  <a:srgbClr val="000000"/>
+              <a:defRPr sz="629" b="0">
+                <a:solidFill>
+                  <a:srgbClr val="FFFFFF"/>
                 </a:solidFill>
                 <a:latin typeface="Arial"/>
                 <a:ea typeface="Arial"/>
@@ -9449,9 +7868,9 @@
               </a:defRPr>
             </a:pPr>
             <a:r>
-              <a:rPr sz="1200" b="0">
-                <a:solidFill>
-                  <a:srgbClr val="000000"/>
+              <a:rPr sz="629" b="0">
+                <a:solidFill>
+                  <a:srgbClr val="FFFFFF"/>
                 </a:solidFill>
                 <a:latin typeface="Arial"/>
                 <a:ea typeface="Arial"/>
@@ -9464,16 +7883,16 @@
       </p:sp>
       <p:sp>
         <p:nvSpPr>
-          <p:cNvPr id="990" name="Document 989"/>
+          <p:cNvPr id="5" name="Chevron 4"/>
           <p:cNvSpPr/>
           <p:nvPr/>
         </p:nvSpPr>
         <p:spPr>
           <a:xfrm>
-            <a:off x="7614093" y="2251302"/>
-            <a:ext cx="478476" cy="528842"/>
+            <a:off x="7349805" y="3929382"/>
+            <a:ext cx="998659" cy="619168"/>
           </a:xfrm>
-          <a:prstGeom prst="flowChartDocument">
+          <a:prstGeom prst="chevron">
             <a:avLst/>
           </a:prstGeom>
           <a:solidFill>
@@ -9498,39 +7917,13 @@
           </a:fontRef>
         </p:style>
         <p:txBody>
-          <a:bodyPr rtlCol="0" anchor="ctr"/>
-          <a:lstStyle/>
-          <a:p>
-            <a:pPr algn="ctr"/>
-          </a:p>
-        </p:txBody>
-      </p:sp>
-      <p:sp>
-        <p:nvSpPr>
-          <p:cNvPr id="991" name="TextBox 990"/>
-          <p:cNvSpPr txBox="1"/>
-          <p:nvPr/>
-        </p:nvSpPr>
-        <p:spPr>
-          <a:xfrm>
-            <a:off x="7345609" y="2913947"/>
-            <a:ext cx="1015443" cy="677585"/>
-          </a:xfrm>
-          <a:prstGeom prst="rect">
-            <a:avLst/>
-          </a:prstGeom>
-          <a:noFill/>
-        </p:spPr>
-        <p:txBody>
-          <a:bodyPr wrap="square">
-            <a:spAutoFit/>
-          </a:bodyPr>
+          <a:bodyPr rtlCol="0" anchor="ctr" wrap="square" lIns="12700" rIns="12700" tIns="12700" bIns="12700"/>
           <a:lstStyle/>
           <a:p>
             <a:pPr algn="ctr">
-              <a:defRPr sz="1200" b="0">
-                <a:solidFill>
-                  <a:srgbClr val="000000"/>
+              <a:defRPr sz="943" b="0">
+                <a:solidFill>
+                  <a:srgbClr val="FFFFFF"/>
                 </a:solidFill>
                 <a:latin typeface="Arial"/>
                 <a:ea typeface="Arial"/>
@@ -9538,31 +7931,31 @@
               </a:defRPr>
             </a:pPr>
             <a:r>
-              <a:rPr sz="1200" b="0">
-                <a:solidFill>
-                  <a:srgbClr val="000000"/>
+              <a:rPr sz="943" b="0">
+                <a:solidFill>
+                  <a:srgbClr val="FFFFFF"/>
                 </a:solidFill>
                 <a:latin typeface="Arial"/>
                 <a:ea typeface="Arial"/>
                 <a:cs typeface="Arial"/>
               </a:rPr>
-              <a:t>Материалы</a:t>
+              <a:t>План</a:t>
             </a:r>
           </a:p>
         </p:txBody>
       </p:sp>
       <p:sp>
         <p:nvSpPr>
-          <p:cNvPr id="992" name="Gear 6 991"/>
+          <p:cNvPr id="6" name="Chevron 5"/>
           <p:cNvSpPr/>
           <p:nvPr/>
         </p:nvSpPr>
         <p:spPr>
           <a:xfrm>
-            <a:off x="8621131" y="2226119"/>
-            <a:ext cx="390336" cy="390336"/>
+            <a:off x="8411405" y="3929382"/>
+            <a:ext cx="998659" cy="619168"/>
           </a:xfrm>
-          <a:prstGeom prst="gear6">
+          <a:prstGeom prst="chevron">
             <a:avLst/>
           </a:prstGeom>
           <a:solidFill>
@@ -9587,25 +7980,45 @@
           </a:fontRef>
         </p:style>
         <p:txBody>
-          <a:bodyPr rtlCol="0" anchor="ctr"/>
+          <a:bodyPr rtlCol="0" anchor="ctr" wrap="square" lIns="12700" rIns="12700" tIns="12700" bIns="12700"/>
           <a:lstStyle/>
           <a:p>
-            <a:pPr algn="ctr"/>
+            <a:pPr algn="ctr">
+              <a:defRPr sz="600" b="0">
+                <a:solidFill>
+                  <a:srgbClr val="FFFFFF"/>
+                </a:solidFill>
+                <a:latin typeface="Arial"/>
+                <a:ea typeface="Arial"/>
+                <a:cs typeface="Arial"/>
+              </a:defRPr>
+            </a:pPr>
+            <a:r>
+              <a:rPr sz="600" b="0">
+                <a:solidFill>
+                  <a:srgbClr val="FFFFFF"/>
+                </a:solidFill>
+                <a:latin typeface="Arial"/>
+                <a:ea typeface="Arial"/>
+                <a:cs typeface="Arial"/>
+              </a:rPr>
+              <a:t>Вёрстка</a:t>
+            </a:r>
           </a:p>
         </p:txBody>
       </p:sp>
       <p:sp>
         <p:nvSpPr>
-          <p:cNvPr id="993" name="Gear 6 992"/>
+          <p:cNvPr id="7" name="Chevron 6"/>
           <p:cNvSpPr/>
           <p:nvPr/>
         </p:nvSpPr>
         <p:spPr>
           <a:xfrm>
-            <a:off x="8885552" y="2465358"/>
-            <a:ext cx="314787" cy="314787"/>
+            <a:off x="9473005" y="3929382"/>
+            <a:ext cx="998659" cy="619168"/>
           </a:xfrm>
-          <a:prstGeom prst="gear6">
+          <a:prstGeom prst="chevron">
             <a:avLst/>
           </a:prstGeom>
           <a:solidFill>
@@ -9630,39 +8043,13 @@
           </a:fontRef>
         </p:style>
         <p:txBody>
-          <a:bodyPr rtlCol="0" anchor="ctr"/>
-          <a:lstStyle/>
-          <a:p>
-            <a:pPr algn="ctr"/>
-          </a:p>
-        </p:txBody>
-      </p:sp>
-      <p:sp>
-        <p:nvSpPr>
-          <p:cNvPr id="994" name="TextBox 993"/>
-          <p:cNvSpPr txBox="1"/>
-          <p:nvPr/>
-        </p:nvSpPr>
-        <p:spPr>
-          <a:xfrm>
-            <a:off x="8403013" y="2913947"/>
-            <a:ext cx="1015443" cy="677585"/>
-          </a:xfrm>
-          <a:prstGeom prst="rect">
-            <a:avLst/>
-          </a:prstGeom>
-          <a:noFill/>
-        </p:spPr>
-        <p:txBody>
-          <a:bodyPr wrap="square">
-            <a:spAutoFit/>
-          </a:bodyPr>
+          <a:bodyPr rtlCol="0" anchor="ctr" wrap="square" lIns="12700" rIns="12700" tIns="12700" bIns="12700"/>
           <a:lstStyle/>
           <a:p>
             <a:pPr algn="ctr">
-              <a:defRPr sz="1200" b="0">
-                <a:solidFill>
-                  <a:srgbClr val="000000"/>
+              <a:defRPr sz="754" b="0">
+                <a:solidFill>
+                  <a:srgbClr val="FFFFFF"/>
                 </a:solidFill>
                 <a:latin typeface="Arial"/>
                 <a:ea typeface="Arial"/>
@@ -9670,31 +8057,31 @@
               </a:defRPr>
             </a:pPr>
             <a:r>
-              <a:rPr sz="1200" b="0">
-                <a:solidFill>
-                  <a:srgbClr val="000000"/>
+              <a:rPr sz="754" b="0">
+                <a:solidFill>
+                  <a:srgbClr val="FFFFFF"/>
                 </a:solidFill>
                 <a:latin typeface="Arial"/>
                 <a:ea typeface="Arial"/>
                 <a:cs typeface="Arial"/>
               </a:rPr>
-              <a:t>Генерация</a:t>
+              <a:t>Аудит</a:t>
             </a:r>
           </a:p>
         </p:txBody>
       </p:sp>
       <p:sp>
         <p:nvSpPr>
-          <p:cNvPr id="995" name="Document 994"/>
+          <p:cNvPr id="8" name="Chevron 7"/>
           <p:cNvSpPr/>
           <p:nvPr/>
         </p:nvSpPr>
         <p:spPr>
           <a:xfrm>
-            <a:off x="9728900" y="2251302"/>
-            <a:ext cx="478476" cy="528842"/>
+            <a:off x="10534605" y="3929382"/>
+            <a:ext cx="998659" cy="619168"/>
           </a:xfrm>
-          <a:prstGeom prst="flowChartDocument">
+          <a:prstGeom prst="chevron">
             <a:avLst/>
           </a:prstGeom>
           <a:solidFill>
@@ -9719,39 +8106,13 @@
           </a:fontRef>
         </p:style>
         <p:txBody>
-          <a:bodyPr rtlCol="0" anchor="ctr"/>
-          <a:lstStyle/>
-          <a:p>
-            <a:pPr algn="ctr"/>
-          </a:p>
-        </p:txBody>
-      </p:sp>
-      <p:sp>
-        <p:nvSpPr>
-          <p:cNvPr id="996" name="TextBox 995"/>
-          <p:cNvSpPr txBox="1"/>
-          <p:nvPr/>
-        </p:nvSpPr>
-        <p:spPr>
-          <a:xfrm>
-            <a:off x="9460417" y="2913947"/>
-            <a:ext cx="1015443" cy="677585"/>
-          </a:xfrm>
-          <a:prstGeom prst="rect">
-            <a:avLst/>
-          </a:prstGeom>
-          <a:noFill/>
-        </p:spPr>
-        <p:txBody>
-          <a:bodyPr wrap="square">
-            <a:spAutoFit/>
-          </a:bodyPr>
+          <a:bodyPr rtlCol="0" anchor="ctr" wrap="square" lIns="12700" rIns="12700" tIns="12700" bIns="12700"/>
           <a:lstStyle/>
           <a:p>
             <a:pPr algn="ctr">
-              <a:defRPr sz="1200" b="0">
-                <a:solidFill>
-                  <a:srgbClr val="000000"/>
+              <a:defRPr sz="600" b="0">
+                <a:solidFill>
+                  <a:srgbClr val="FFFFFF"/>
                 </a:solidFill>
                 <a:latin typeface="Arial"/>
                 <a:ea typeface="Arial"/>
@@ -9759,104 +8120,15 @@
               </a:defRPr>
             </a:pPr>
             <a:r>
-              <a:rPr sz="1200" b="0">
-                <a:solidFill>
-                  <a:srgbClr val="000000"/>
+              <a:rPr sz="600" b="0">
+                <a:solidFill>
+                  <a:srgbClr val="FFFFFF"/>
                 </a:solidFill>
                 <a:latin typeface="Arial"/>
                 <a:ea typeface="Arial"/>
                 <a:cs typeface="Arial"/>
               </a:rPr>
               <a:t>Экспорт</a:t>
-            </a:r>
-          </a:p>
-        </p:txBody>
-      </p:sp>
-      <p:sp>
-        <p:nvSpPr>
-          <p:cNvPr id="997" name="Oval 996"/>
-          <p:cNvSpPr/>
-          <p:nvPr/>
-        </p:nvSpPr>
-        <p:spPr>
-          <a:xfrm>
-            <a:off x="10773713" y="2263894"/>
-            <a:ext cx="503659" cy="503659"/>
-          </a:xfrm>
-          <a:prstGeom prst="ellipse">
-            <a:avLst/>
-          </a:prstGeom>
-          <a:solidFill>
-            <a:srgbClr val="0077FF"/>
-          </a:solidFill>
-          <a:ln>
-            <a:noFill/>
-          </a:ln>
-        </p:spPr>
-        <p:style>
-          <a:lnRef idx="1">
-            <a:schemeClr val="accent1"/>
-          </a:lnRef>
-          <a:fillRef idx="3">
-            <a:schemeClr val="accent1"/>
-          </a:fillRef>
-          <a:effectRef idx="2">
-            <a:schemeClr val="accent1"/>
-          </a:effectRef>
-          <a:fontRef idx="minor">
-            <a:schemeClr val="lt1"/>
-          </a:fontRef>
-        </p:style>
-        <p:txBody>
-          <a:bodyPr rtlCol="0" anchor="ctr"/>
-          <a:lstStyle/>
-          <a:p>
-            <a:pPr algn="ctr"/>
-          </a:p>
-        </p:txBody>
-      </p:sp>
-      <p:sp>
-        <p:nvSpPr>
-          <p:cNvPr id="998" name="TextBox 997"/>
-          <p:cNvSpPr txBox="1"/>
-          <p:nvPr/>
-        </p:nvSpPr>
-        <p:spPr>
-          <a:xfrm>
-            <a:off x="10517821" y="2913947"/>
-            <a:ext cx="1015443" cy="677585"/>
-          </a:xfrm>
-          <a:prstGeom prst="rect">
-            <a:avLst/>
-          </a:prstGeom>
-          <a:noFill/>
-        </p:spPr>
-        <p:txBody>
-          <a:bodyPr wrap="square">
-            <a:spAutoFit/>
-          </a:bodyPr>
-          <a:lstStyle/>
-          <a:p>
-            <a:pPr algn="ctr">
-              <a:defRPr sz="1200" b="0">
-                <a:solidFill>
-                  <a:srgbClr val="000000"/>
-                </a:solidFill>
-                <a:latin typeface="Arial"/>
-                <a:ea typeface="Arial"/>
-                <a:cs typeface="Arial"/>
-              </a:defRPr>
-            </a:pPr>
-            <a:r>
-              <a:rPr sz="1200" b="0">
-                <a:solidFill>
-                  <a:srgbClr val="000000"/>
-                </a:solidFill>
-                <a:latin typeface="Arial"/>
-                <a:ea typeface="Arial"/>
-                <a:cs typeface="Arial"/>
-              </a:rPr>
-              <a:t>Редактируемость</a:t>
             </a:r>
           </a:p>
         </p:txBody>
@@ -9869,9 +8141,16 @@
 </p:sld>
 </file>
 
-<file path=ppt/slides/slide60.xml><?xml version="1.0" encoding="utf-8"?>
+<file path=ppt/slides/slide59.xml><?xml version="1.0" encoding="utf-8"?>
 <p:sld xmlns:a="http://schemas.openxmlformats.org/drawingml/2006/main" xmlns:p="http://schemas.openxmlformats.org/presentationml/2006/main" xmlns:r="http://schemas.openxmlformats.org/officeDocument/2006/relationships">
   <p:cSld>
+    <p:bg>
+      <p:bgPr>
+        <a:solidFill>
+          <a:schemeClr val="lt2"/>
+        </a:solidFill>
+      </p:bgPr>
+    </p:bg>
     <p:spTree>
       <p:nvGrpSpPr>
         <p:cNvPr id="1" name=""/>
@@ -9881,66 +8160,200 @@
       <p:grpSpPr/>
       <p:sp>
         <p:nvSpPr>
-          <p:cNvPr id="443" name="Google Shape;443;p50"/>
-          <p:cNvSpPr/>
+          <p:cNvPr id="2" name="title"/>
+          <p:cNvSpPr txBox="1"/>
           <p:nvPr/>
         </p:nvSpPr>
         <p:spPr>
           <a:xfrm>
-            <a:off x="658813" y="1794065"/>
-            <a:ext cx="6130294" cy="4406709"/>
+            <a:off x="677387" y="692177"/>
+            <a:ext cx="10855878" cy="1447800"/>
           </a:xfrm>
-          <a:prstGeom prst="roundRect">
-            <a:avLst>
-              <a:gd fmla="val 4444" name="adj"/>
-            </a:avLst>
+          <a:prstGeom prst="rect">
+            <a:avLst/>
           </a:prstGeom>
-          <a:solidFill>
-            <a:schemeClr val="lt2"/>
-          </a:solidFill>
-          <a:ln cap="flat" cmpd="sng" w="19050">
-            <a:solidFill>
-              <a:schemeClr val="dk2"/>
-            </a:solidFill>
-            <a:prstDash val="solid"/>
-            <a:miter lim="8000"/>
-            <a:headEnd len="sm" w="sm" type="none"/>
-            <a:tailEnd len="sm" w="sm" type="none"/>
-          </a:ln>
+          <a:noFill/>
         </p:spPr>
         <p:txBody>
-          <a:bodyPr anchorCtr="0" anchor="ctr" bIns="45700" lIns="91425" spcFirstLastPara="1" rIns="91425" wrap="square" tIns="45700">
-            <a:noAutofit/>
+          <a:bodyPr wrap="square" lIns="76200" rIns="76200" tIns="50800" bIns="50800">
+            <a:spAutoFit/>
           </a:bodyPr>
           <a:lstStyle/>
           <a:p>
-            <a:pPr indent="0" lvl="0" marL="0" marR="0" rtl="0" algn="ctr">
-              <a:spcBef>
-                <a:spcPts val="0"/>
-              </a:spcBef>
-              <a:spcAft>
-                <a:spcPts val="0"/>
-              </a:spcAft>
-              <a:buNone/>
+            <a:pPr algn="l">
+              <a:spcAft>
+                <a:spcPts val="300"/>
+              </a:spcAft>
+              <a:defRPr sz="4000">
+                <a:solidFill>
+                  <a:srgbClr val="000000"/>
+                </a:solidFill>
+                <a:latin typeface="Arial"/>
+                <a:ea typeface="Arial"/>
+                <a:cs typeface="Arial"/>
+              </a:defRPr>
             </a:pPr>
             <a:r>
-              <a:t/>
+              <a:rPr sz="4000">
+                <a:solidFill>
+                  <a:srgbClr val="000000"/>
+                </a:solidFill>
+                <a:latin typeface="Arial"/>
+                <a:ea typeface="Arial"/>
+                <a:cs typeface="Arial"/>
+              </a:rPr>
+              <a:t>Пилот сократил время сборки до 4 минут</a:t>
             </a:r>
-            <a:endParaRPr b="0" i="0" sz="1800" u="none" cap="none" strike="noStrike">
-              <a:solidFill>
-                <a:schemeClr val="lt1"/>
-              </a:solidFill>
-              <a:latin typeface="Arial"/>
-              <a:ea typeface="Arial"/>
-              <a:cs typeface="Arial"/>
-              <a:sym typeface="Arial"/>
-            </a:endParaRPr>
           </a:p>
         </p:txBody>
       </p:sp>
       <p:sp>
         <p:nvSpPr>
-          <p:cNvPr id="449" name="Google Shape;449;p50"/>
+          <p:cNvPr id="3" name="body"/>
+          <p:cNvSpPr txBox="1"/>
+          <p:nvPr/>
+        </p:nvSpPr>
+        <p:spPr>
+          <a:xfrm>
+            <a:off x="677387" y="2277137"/>
+            <a:ext cx="5245059" cy="3923659"/>
+          </a:xfrm>
+          <a:prstGeom prst="rect">
+            <a:avLst/>
+          </a:prstGeom>
+          <a:noFill/>
+        </p:spPr>
+        <p:txBody>
+          <a:bodyPr wrap="square" lIns="76200" rIns="76200" tIns="50800" bIns="50800">
+            <a:spAutoFit/>
+          </a:bodyPr>
+          <a:lstStyle/>
+          <a:p>
+            <a:pPr algn="l">
+              <a:spcAft>
+                <a:spcPts val="300"/>
+              </a:spcAft>
+              <a:defRPr sz="1600">
+                <a:solidFill>
+                  <a:srgbClr val="000000"/>
+                </a:solidFill>
+                <a:latin typeface="Arial"/>
+                <a:ea typeface="Arial"/>
+                <a:cs typeface="Arial"/>
+              </a:defRPr>
+            </a:pPr>
+            <a:r>
+              <a:rPr sz="1600">
+                <a:solidFill>
+                  <a:srgbClr val="000000"/>
+                </a:solidFill>
+                <a:latin typeface="Arial"/>
+                <a:ea typeface="Arial"/>
+                <a:cs typeface="Arial"/>
+              </a:rPr>
+              <a:t>• Среднее время 4 минуты вместо 186</a:t>
+            </a:r>
+          </a:p>
+          <a:p>
+            <a:pPr algn="l">
+              <a:spcAft>
+                <a:spcPts val="300"/>
+              </a:spcAft>
+              <a:defRPr sz="1600">
+                <a:solidFill>
+                  <a:srgbClr val="000000"/>
+                </a:solidFill>
+                <a:latin typeface="Arial"/>
+                <a:ea typeface="Arial"/>
+                <a:cs typeface="Arial"/>
+              </a:defRPr>
+            </a:pPr>
+            <a:r>
+              <a:rPr sz="1600">
+                <a:solidFill>
+                  <a:srgbClr val="000000"/>
+                </a:solidFill>
+                <a:latin typeface="Arial"/>
+                <a:ea typeface="Arial"/>
+                <a:cs typeface="Arial"/>
+              </a:rPr>
+              <a:t>• Срок до первой версии сократился с 6 дней до 1</a:t>
+            </a:r>
+          </a:p>
+          <a:p>
+            <a:pPr algn="l">
+              <a:spcAft>
+                <a:spcPts val="300"/>
+              </a:spcAft>
+              <a:defRPr sz="1600">
+                <a:solidFill>
+                  <a:srgbClr val="000000"/>
+                </a:solidFill>
+                <a:latin typeface="Arial"/>
+                <a:ea typeface="Arial"/>
+                <a:cs typeface="Arial"/>
+              </a:defRPr>
+            </a:pPr>
+            <a:r>
+              <a:rPr sz="1600">
+                <a:solidFill>
+                  <a:srgbClr val="000000"/>
+                </a:solidFill>
+                <a:latin typeface="Arial"/>
+                <a:ea typeface="Arial"/>
+                <a:cs typeface="Arial"/>
+              </a:rPr>
+              <a:t>• Нарушений стиля 2 из 68</a:t>
+            </a:r>
+          </a:p>
+        </p:txBody>
+      </p:sp>
+      <p:graphicFrame>
+        <p:nvGraphicFramePr>
+          <p:cNvPr id="4" name="Chart 3"/>
+          <p:cNvGraphicFramePr>
+            <a:graphicFrameLocks noGrp="1"/>
+          </p:cNvGraphicFramePr>
+          <p:nvPr/>
+        </p:nvGraphicFramePr>
+        <p:xfrm>
+          <a:off x="6288206" y="2277137"/>
+          <a:ext cx="5245059" cy="3923659"/>
+        </p:xfrm>
+        <a:graphic>
+          <a:graphicData uri="http://schemas.openxmlformats.org/drawingml/2006/chart">
+            <c:chart xmlns:c="http://schemas.openxmlformats.org/drawingml/2006/chart" r:id="rId2"/>
+          </a:graphicData>
+        </a:graphic>
+      </p:graphicFrame>
+    </p:spTree>
+  </p:cSld>
+  <p:clrMapOvr>
+    <a:masterClrMapping/>
+  </p:clrMapOvr>
+</p:sld>
+</file>
+
+<file path=ppt/slides/slide60.xml><?xml version="1.0" encoding="utf-8"?>
+<p:sld xmlns:a="http://schemas.openxmlformats.org/drawingml/2006/main" xmlns:p="http://schemas.openxmlformats.org/presentationml/2006/main" xmlns:r="http://schemas.openxmlformats.org/officeDocument/2006/relationships">
+  <p:cSld>
+    <p:bg>
+      <p:bgPr>
+        <a:solidFill>
+          <a:schemeClr val="lt2"/>
+        </a:solidFill>
+      </p:bgPr>
+    </p:bg>
+    <p:spTree>
+      <p:nvGrpSpPr>
+        <p:cNvPr id="1" name=""/>
+        <p:cNvGrpSpPr/>
+        <p:nvPr/>
+      </p:nvGrpSpPr>
+      <p:grpSpPr/>
+      <p:sp>
+        <p:nvSpPr>
+          <p:cNvPr id="795" name="Google Shape;795;p60"/>
           <p:cNvSpPr txBox="1"/>
           <p:nvPr/>
         </p:nvSpPr>
@@ -9983,7 +8396,7 @@
             <a:r>
               <a:t/>
             </a:r>
-            <a:endParaRPr b="0" i="0" sz="1600" u="none" cap="none" strike="noStrike">
+            <a:endParaRPr sz="1600">
               <a:solidFill>
                 <a:schemeClr val="dk1"/>
               </a:solidFill>
@@ -9997,14 +8410,14 @@
       </p:sp>
       <p:sp>
         <p:nvSpPr>
-          <p:cNvPr id="450" name="title"/>
+          <p:cNvPr id="796" name="title"/>
           <p:cNvSpPr txBox="1"/>
           <p:nvPr/>
         </p:nvSpPr>
         <p:spPr>
           <a:xfrm>
             <a:off x="677387" y="692177"/>
-            <a:ext cx="10855878" cy="822960"/>
+            <a:ext cx="10855878" cy="1447800"/>
           </a:xfrm>
           <a:prstGeom prst="rect">
             <a:avLst/>
@@ -10039,21 +8452,21 @@
                 <a:ea typeface="Arial"/>
                 <a:cs typeface="Arial"/>
               </a:rPr>
-              <a:t>Сокращение времени сборки</a:t>
+              <a:t>Для запуска требуется 2 vCPU, 2 ГБ RAM и 1 400 руб. за инференс</a:t>
             </a:r>
           </a:p>
         </p:txBody>
       </p:sp>
       <p:sp>
         <p:nvSpPr>
-          <p:cNvPr id="451" name="body"/>
+          <p:cNvPr id="797" name="body"/>
           <p:cNvSpPr txBox="1"/>
           <p:nvPr/>
         </p:nvSpPr>
         <p:spPr>
           <a:xfrm>
-            <a:off x="677387" y="2937888"/>
-            <a:ext cx="5874715" cy="1950720"/>
+            <a:off x="677387" y="3695391"/>
+            <a:ext cx="10855878" cy="894080"/>
           </a:xfrm>
           <a:prstGeom prst="rect">
             <a:avLst/>
@@ -10070,7 +8483,7 @@
               <a:spcAft>
                 <a:spcPts val="300"/>
               </a:spcAft>
-              <a:defRPr sz="2800" b="1">
+              <a:defRPr sz="1600">
                 <a:solidFill>
                   <a:srgbClr val="000000"/>
                 </a:solidFill>
@@ -10080,7 +8493,7 @@
               </a:defRPr>
             </a:pPr>
             <a:r>
-              <a:rPr sz="2800" b="1">
+              <a:rPr sz="1600">
                 <a:solidFill>
                   <a:srgbClr val="000000"/>
                 </a:solidFill>
@@ -10088,7 +8501,7 @@
                 <a:ea typeface="Arial"/>
                 <a:cs typeface="Arial"/>
               </a:rPr>
-              <a:t>• Средняя сборка колоды 12 слайдов 4 минуты вместо 186</a:t>
+              <a:t>• Сервис работает на одной машине</a:t>
             </a:r>
           </a:p>
           <a:p>
@@ -10096,7 +8509,7 @@
               <a:spcAft>
                 <a:spcPts val="300"/>
               </a:spcAft>
-              <a:defRPr sz="2800" b="1">
+              <a:defRPr sz="1600">
                 <a:solidFill>
                   <a:srgbClr val="000000"/>
                 </a:solidFill>
@@ -10106,7 +8519,7 @@
               </a:defRPr>
             </a:pPr>
             <a:r>
-              <a:rPr sz="2800" b="1">
+              <a:rPr sz="1600">
                 <a:solidFill>
                   <a:srgbClr val="000000"/>
                 </a:solidFill>
@@ -10114,7 +8527,33 @@
                 <a:ea typeface="Arial"/>
                 <a:cs typeface="Arial"/>
               </a:rPr>
-              <a:t>• Время до первой версии сократилось с 6 дней до 1</a:t>
+              <a:t>• Модель gpt-oss-20b подключается по OpenAI</a:t>
+            </a:r>
+          </a:p>
+          <a:p>
+            <a:pPr algn="l">
+              <a:spcAft>
+                <a:spcPts val="300"/>
+              </a:spcAft>
+              <a:defRPr sz="1600">
+                <a:solidFill>
+                  <a:srgbClr val="000000"/>
+                </a:solidFill>
+                <a:latin typeface="Arial"/>
+                <a:ea typeface="Arial"/>
+                <a:cs typeface="Arial"/>
+              </a:defRPr>
+            </a:pPr>
+            <a:r>
+              <a:rPr sz="1600">
+                <a:solidFill>
+                  <a:srgbClr val="000000"/>
+                </a:solidFill>
+                <a:latin typeface="Arial"/>
+                <a:ea typeface="Arial"/>
+                <a:cs typeface="Arial"/>
+              </a:rPr>
+              <a:t>• План запуска: Q3 2026 подключить 4 команды</a:t>
             </a:r>
           </a:p>
         </p:txBody>
@@ -10146,14 +8585,71 @@
       <p:grpSpPr/>
       <p:sp>
         <p:nvSpPr>
-          <p:cNvPr id="2" name="title"/>
+          <p:cNvPr id="764" name="Google Shape;764;p58"/>
+          <p:cNvSpPr txBox="1"/>
+          <p:nvPr/>
+        </p:nvSpPr>
+        <p:spPr>
+          <a:xfrm>
+            <a:off x="18692059" y="4674436"/>
+            <a:ext cx="4304330" cy="678198"/>
+          </a:xfrm>
+          <a:prstGeom prst="rect">
+            <a:avLst/>
+          </a:prstGeom>
+          <a:noFill/>
+          <a:ln>
+            <a:noFill/>
+          </a:ln>
+        </p:spPr>
+        <p:txBody>
+          <a:bodyPr anchorCtr="0" anchor="t" bIns="45700" lIns="91425" spcFirstLastPara="1" rIns="91425" wrap="square" tIns="45700">
+            <a:noAutofit/>
+          </a:bodyPr>
+          <a:lstStyle/>
+          <a:p>
+            <a:pPr indent="0" lvl="0" marL="0" marR="0" rtl="0" algn="l">
+              <a:lnSpc>
+                <a:spcPct val="110000"/>
+              </a:lnSpc>
+              <a:spcBef>
+                <a:spcPts val="0"/>
+              </a:spcBef>
+              <a:spcAft>
+                <a:spcPts val="0"/>
+              </a:spcAft>
+              <a:buClr>
+                <a:schemeClr val="dk1"/>
+              </a:buClr>
+              <a:buSzPts val="1600"/>
+              <a:buFont typeface="Arial"/>
+              <a:buNone/>
+            </a:pPr>
+            <a:r>
+              <a:t/>
+            </a:r>
+            <a:endParaRPr sz="1600">
+              <a:solidFill>
+                <a:schemeClr val="dk1"/>
+              </a:solidFill>
+              <a:latin typeface="Arial"/>
+              <a:ea typeface="Arial"/>
+              <a:cs typeface="Arial"/>
+              <a:sym typeface="Arial"/>
+            </a:endParaRPr>
+          </a:p>
+        </p:txBody>
+      </p:sp>
+      <p:sp>
+        <p:nvSpPr>
+          <p:cNvPr id="765" name="title"/>
           <p:cNvSpPr txBox="1"/>
           <p:nvPr/>
         </p:nvSpPr>
         <p:spPr>
           <a:xfrm>
             <a:off x="677387" y="692177"/>
-            <a:ext cx="10855878" cy="822960"/>
+            <a:ext cx="10855878" cy="1447800"/>
           </a:xfrm>
           <a:prstGeom prst="rect">
             <a:avLst/>
@@ -10188,21 +8684,21 @@
                 <a:ea typeface="Arial"/>
                 <a:cs typeface="Arial"/>
               </a:rPr>
-              <a:t>Улучшение качества и стиля</a:t>
+              <a:t>Пилот собрал 68 презентаций за 6 недель</a:t>
             </a:r>
           </a:p>
         </p:txBody>
       </p:sp>
       <p:sp>
         <p:nvSpPr>
-          <p:cNvPr id="3" name="body"/>
+          <p:cNvPr id="766" name="body"/>
           <p:cNvSpPr txBox="1"/>
           <p:nvPr/>
         </p:nvSpPr>
         <p:spPr>
           <a:xfrm>
-            <a:off x="677387" y="3104117"/>
-            <a:ext cx="10855878" cy="1290320"/>
+            <a:off x="677387" y="3695391"/>
+            <a:ext cx="10855878" cy="894080"/>
           </a:xfrm>
           <a:prstGeom prst="rect">
             <a:avLst/>
@@ -10219,7 +8715,7 @@
               <a:spcAft>
                 <a:spcPts val="300"/>
               </a:spcAft>
-              <a:defRPr sz="2400">
+              <a:defRPr sz="1600">
                 <a:solidFill>
                   <a:srgbClr val="000000"/>
                 </a:solidFill>
@@ -10229,7 +8725,7 @@
               </a:defRPr>
             </a:pPr>
             <a:r>
-              <a:rPr sz="2400">
+              <a:rPr sz="1600">
                 <a:solidFill>
                   <a:srgbClr val="000000"/>
                 </a:solidFill>
@@ -10237,7 +8733,7 @@
                 <a:ea typeface="Arial"/>
                 <a:cs typeface="Arial"/>
               </a:rPr>
-              <a:t>• Нарушений фирменного стиля в пилоте 2 из 68, исправлены автоматически</a:t>
+              <a:t>• Дизайнеры закрыли 38 запросов вместо 11</a:t>
             </a:r>
           </a:p>
           <a:p>
@@ -10245,7 +8741,7 @@
               <a:spcAft>
                 <a:spcPts val="300"/>
               </a:spcAft>
-              <a:defRPr sz="2400">
+              <a:defRPr sz="1600">
                 <a:solidFill>
                   <a:srgbClr val="000000"/>
                 </a:solidFill>
@@ -10255,7 +8751,7 @@
               </a:defRPr>
             </a:pPr>
             <a:r>
-              <a:rPr sz="2400">
+              <a:rPr sz="1600">
                 <a:solidFill>
                   <a:srgbClr val="000000"/>
                 </a:solidFill>
@@ -10263,7 +8759,33 @@
                 <a:ea typeface="Arial"/>
                 <a:cs typeface="Arial"/>
               </a:rPr>
-              <a:t>• Дизайнеры закрыли 38 запросов вместо 11 за 6 недель</a:t>
+              <a:t>• Рутина вёрстки ушла в сервис</a:t>
+            </a:r>
+          </a:p>
+          <a:p>
+            <a:pPr algn="l">
+              <a:spcAft>
+                <a:spcPts val="300"/>
+              </a:spcAft>
+              <a:defRPr sz="1600">
+                <a:solidFill>
+                  <a:srgbClr val="000000"/>
+                </a:solidFill>
+                <a:latin typeface="Arial"/>
+                <a:ea typeface="Arial"/>
+                <a:cs typeface="Arial"/>
+              </a:defRPr>
+            </a:pPr>
+            <a:r>
+              <a:rPr sz="1600">
+                <a:solidFill>
+                  <a:srgbClr val="000000"/>
+                </a:solidFill>
+                <a:latin typeface="Arial"/>
+                <a:ea typeface="Arial"/>
+                <a:cs typeface="Arial"/>
+              </a:rPr>
+              <a:t>• Нагрузка выше 20 задач требует внешней очереди</a:t>
             </a:r>
           </a:p>
         </p:txBody>
@@ -10295,972 +8817,6 @@
       <p:grpSpPr/>
       <p:sp>
         <p:nvSpPr>
-          <p:cNvPr id="2" name="title"/>
-          <p:cNvSpPr txBox="1"/>
-          <p:nvPr/>
-        </p:nvSpPr>
-        <p:spPr>
-          <a:xfrm>
-            <a:off x="677387" y="692177"/>
-            <a:ext cx="10855878" cy="822960"/>
-          </a:xfrm>
-          <a:prstGeom prst="rect">
-            <a:avLst/>
-          </a:prstGeom>
-          <a:noFill/>
-        </p:spPr>
-        <p:txBody>
-          <a:bodyPr wrap="square" lIns="76200" rIns="76200" tIns="50800" bIns="50800">
-            <a:spAutoFit/>
-          </a:bodyPr>
-          <a:lstStyle/>
-          <a:p>
-            <a:pPr algn="l">
-              <a:spcAft>
-                <a:spcPts val="300"/>
-              </a:spcAft>
-              <a:defRPr sz="4000">
-                <a:solidFill>
-                  <a:srgbClr val="000000"/>
-                </a:solidFill>
-                <a:latin typeface="Arial"/>
-                <a:ea typeface="Arial"/>
-                <a:cs typeface="Arial"/>
-              </a:defRPr>
-            </a:pPr>
-            <a:r>
-              <a:rPr sz="4000">
-                <a:solidFill>
-                  <a:srgbClr val="000000"/>
-                </a:solidFill>
-                <a:latin typeface="Arial"/>
-                <a:ea typeface="Arial"/>
-                <a:cs typeface="Arial"/>
-              </a:rPr>
-              <a:t>Ресурсы и сроки запуска</a:t>
-            </a:r>
-          </a:p>
-        </p:txBody>
-      </p:sp>
-      <p:sp>
-        <p:nvSpPr>
-          <p:cNvPr id="3" name="Rectangle 2"/>
-          <p:cNvSpPr/>
-          <p:nvPr/>
-        </p:nvSpPr>
-        <p:spPr>
-          <a:xfrm>
-            <a:off x="6288206" y="3809896"/>
-            <a:ext cx="5245059" cy="132827"/>
-          </a:xfrm>
-          <a:prstGeom prst="rect">
-            <a:avLst/>
-          </a:prstGeom>
-          <a:solidFill>
-            <a:srgbClr val="0077FF"/>
-          </a:solidFill>
-          <a:ln>
-            <a:noFill/>
-          </a:ln>
-        </p:spPr>
-        <p:style>
-          <a:lnRef idx="1">
-            <a:schemeClr val="accent1"/>
-          </a:lnRef>
-          <a:fillRef idx="3">
-            <a:schemeClr val="accent1"/>
-          </a:fillRef>
-          <a:effectRef idx="2">
-            <a:schemeClr val="accent1"/>
-          </a:effectRef>
-          <a:fontRef idx="minor">
-            <a:schemeClr val="lt1"/>
-          </a:fontRef>
-        </p:style>
-        <p:txBody>
-          <a:bodyPr rtlCol="0" anchor="ctr"/>
-          <a:lstStyle/>
-          <a:p>
-            <a:pPr algn="ctr"/>
-          </a:p>
-        </p:txBody>
-      </p:sp>
-      <p:sp>
-        <p:nvSpPr>
-          <p:cNvPr id="4" name="Oval 3"/>
-          <p:cNvSpPr/>
-          <p:nvPr/>
-        </p:nvSpPr>
-        <p:spPr>
-          <a:xfrm>
-            <a:off x="6900129" y="3614057"/>
-            <a:ext cx="524505" cy="524505"/>
-          </a:xfrm>
-          <a:prstGeom prst="ellipse">
-            <a:avLst/>
-          </a:prstGeom>
-          <a:solidFill>
-            <a:srgbClr val="0077FF"/>
-          </a:solidFill>
-          <a:ln>
-            <a:noFill/>
-          </a:ln>
-        </p:spPr>
-        <p:style>
-          <a:lnRef idx="1">
-            <a:schemeClr val="accent1"/>
-          </a:lnRef>
-          <a:fillRef idx="3">
-            <a:schemeClr val="accent1"/>
-          </a:fillRef>
-          <a:effectRef idx="2">
-            <a:schemeClr val="accent1"/>
-          </a:effectRef>
-          <a:fontRef idx="minor">
-            <a:schemeClr val="lt1"/>
-          </a:fontRef>
-        </p:style>
-        <p:txBody>
-          <a:bodyPr rtlCol="0" anchor="ctr"/>
-          <a:lstStyle/>
-          <a:p>
-            <a:pPr algn="ctr"/>
-          </a:p>
-        </p:txBody>
-      </p:sp>
-      <p:sp>
-        <p:nvSpPr>
-          <p:cNvPr id="5" name="TextBox 4"/>
-          <p:cNvSpPr txBox="1"/>
-          <p:nvPr/>
-        </p:nvSpPr>
-        <p:spPr>
-          <a:xfrm>
-            <a:off x="6288206" y="1773204"/>
-            <a:ext cx="1748353" cy="1682485"/>
-          </a:xfrm>
-          <a:prstGeom prst="rect">
-            <a:avLst/>
-          </a:prstGeom>
-          <a:noFill/>
-        </p:spPr>
-        <p:txBody>
-          <a:bodyPr wrap="square">
-            <a:spAutoFit/>
-          </a:bodyPr>
-          <a:lstStyle/>
-          <a:p>
-            <a:pPr algn="ctr">
-              <a:defRPr sz="1200" b="0">
-                <a:solidFill>
-                  <a:srgbClr val="000000"/>
-                </a:solidFill>
-                <a:latin typeface="Arial"/>
-                <a:ea typeface="Arial"/>
-                <a:cs typeface="Arial"/>
-              </a:defRPr>
-            </a:pPr>
-            <a:r>
-              <a:rPr sz="1200" b="0">
-                <a:solidFill>
-                  <a:srgbClr val="000000"/>
-                </a:solidFill>
-                <a:latin typeface="Arial"/>
-                <a:ea typeface="Arial"/>
-                <a:cs typeface="Arial"/>
-              </a:rPr>
-              <a:t>Подключение 4 команд</a:t>
-            </a:r>
-          </a:p>
-        </p:txBody>
-      </p:sp>
-      <p:sp>
-        <p:nvSpPr>
-          <p:cNvPr id="6" name="Oval 5"/>
-          <p:cNvSpPr/>
-          <p:nvPr/>
-        </p:nvSpPr>
-        <p:spPr>
-          <a:xfrm>
-            <a:off x="8648482" y="3614057"/>
-            <a:ext cx="524505" cy="524505"/>
-          </a:xfrm>
-          <a:prstGeom prst="ellipse">
-            <a:avLst/>
-          </a:prstGeom>
-          <a:solidFill>
-            <a:srgbClr val="0077FF"/>
-          </a:solidFill>
-          <a:ln>
-            <a:noFill/>
-          </a:ln>
-        </p:spPr>
-        <p:style>
-          <a:lnRef idx="1">
-            <a:schemeClr val="accent1"/>
-          </a:lnRef>
-          <a:fillRef idx="3">
-            <a:schemeClr val="accent1"/>
-          </a:fillRef>
-          <a:effectRef idx="2">
-            <a:schemeClr val="accent1"/>
-          </a:effectRef>
-          <a:fontRef idx="minor">
-            <a:schemeClr val="lt1"/>
-          </a:fontRef>
-        </p:style>
-        <p:txBody>
-          <a:bodyPr rtlCol="0" anchor="ctr"/>
-          <a:lstStyle/>
-          <a:p>
-            <a:pPr algn="ctr"/>
-          </a:p>
-        </p:txBody>
-      </p:sp>
-      <p:sp>
-        <p:nvSpPr>
-          <p:cNvPr id="7" name="TextBox 6"/>
-          <p:cNvSpPr txBox="1"/>
-          <p:nvPr/>
-        </p:nvSpPr>
-        <p:spPr>
-          <a:xfrm>
-            <a:off x="8036559" y="4334402"/>
-            <a:ext cx="1748353" cy="1682485"/>
-          </a:xfrm>
-          <a:prstGeom prst="rect">
-            <a:avLst/>
-          </a:prstGeom>
-          <a:noFill/>
-        </p:spPr>
-        <p:txBody>
-          <a:bodyPr wrap="square">
-            <a:spAutoFit/>
-          </a:bodyPr>
-          <a:lstStyle/>
-          <a:p>
-            <a:pPr algn="ctr">
-              <a:defRPr sz="1200" b="0">
-                <a:solidFill>
-                  <a:srgbClr val="000000"/>
-                </a:solidFill>
-                <a:latin typeface="Arial"/>
-                <a:ea typeface="Arial"/>
-                <a:cs typeface="Arial"/>
-              </a:defRPr>
-            </a:pPr>
-            <a:r>
-              <a:rPr sz="1200" b="0">
-                <a:solidFill>
-                  <a:srgbClr val="000000"/>
-                </a:solidFill>
-                <a:latin typeface="Arial"/>
-                <a:ea typeface="Arial"/>
-                <a:cs typeface="Arial"/>
-              </a:rPr>
-              <a:t>Доступ всей компании</a:t>
-            </a:r>
-          </a:p>
-        </p:txBody>
-      </p:sp>
-      <p:sp>
-        <p:nvSpPr>
-          <p:cNvPr id="8" name="Oval 7"/>
-          <p:cNvSpPr/>
-          <p:nvPr/>
-        </p:nvSpPr>
-        <p:spPr>
-          <a:xfrm>
-            <a:off x="10396835" y="3614057"/>
-            <a:ext cx="524505" cy="524505"/>
-          </a:xfrm>
-          <a:prstGeom prst="ellipse">
-            <a:avLst/>
-          </a:prstGeom>
-          <a:solidFill>
-            <a:srgbClr val="0077FF"/>
-          </a:solidFill>
-          <a:ln>
-            <a:noFill/>
-          </a:ln>
-        </p:spPr>
-        <p:style>
-          <a:lnRef idx="1">
-            <a:schemeClr val="accent1"/>
-          </a:lnRef>
-          <a:fillRef idx="3">
-            <a:schemeClr val="accent1"/>
-          </a:fillRef>
-          <a:effectRef idx="2">
-            <a:schemeClr val="accent1"/>
-          </a:effectRef>
-          <a:fontRef idx="minor">
-            <a:schemeClr val="lt1"/>
-          </a:fontRef>
-        </p:style>
-        <p:txBody>
-          <a:bodyPr rtlCol="0" anchor="ctr"/>
-          <a:lstStyle/>
-          <a:p>
-            <a:pPr algn="ctr"/>
-          </a:p>
-        </p:txBody>
-      </p:sp>
-      <p:sp>
-        <p:nvSpPr>
-          <p:cNvPr id="9" name="TextBox 8"/>
-          <p:cNvSpPr txBox="1"/>
-          <p:nvPr/>
-        </p:nvSpPr>
-        <p:spPr>
-          <a:xfrm>
-            <a:off x="9784912" y="1773204"/>
-            <a:ext cx="1748353" cy="1682485"/>
-          </a:xfrm>
-          <a:prstGeom prst="rect">
-            <a:avLst/>
-          </a:prstGeom>
-          <a:noFill/>
-        </p:spPr>
-        <p:txBody>
-          <a:bodyPr wrap="square">
-            <a:spAutoFit/>
-          </a:bodyPr>
-          <a:lstStyle/>
-          <a:p>
-            <a:pPr algn="ctr">
-              <a:defRPr sz="1200" b="0">
-                <a:solidFill>
-                  <a:srgbClr val="000000"/>
-                </a:solidFill>
-                <a:latin typeface="Arial"/>
-                <a:ea typeface="Arial"/>
-                <a:cs typeface="Arial"/>
-              </a:defRPr>
-            </a:pPr>
-            <a:r>
-              <a:rPr sz="1200" b="0">
-                <a:solidFill>
-                  <a:srgbClr val="000000"/>
-                </a:solidFill>
-                <a:latin typeface="Arial"/>
-                <a:ea typeface="Arial"/>
-                <a:cs typeface="Arial"/>
-              </a:rPr>
-              <a:t>Генерация иллюстраций</a:t>
-            </a:r>
-          </a:p>
-        </p:txBody>
-      </p:sp>
-    </p:spTree>
-  </p:cSld>
-  <p:clrMapOvr>
-    <a:masterClrMapping/>
-  </p:clrMapOvr>
-</p:sld>
-</file>
-
-<file path=ppt/slides/slide63.xml><?xml version="1.0" encoding="utf-8"?>
-<p:sld xmlns:a="http://schemas.openxmlformats.org/drawingml/2006/main" xmlns:p="http://schemas.openxmlformats.org/presentationml/2006/main" xmlns:r="http://schemas.openxmlformats.org/officeDocument/2006/relationships">
-  <p:cSld>
-    <p:bg>
-      <p:bgPr>
-        <a:solidFill>
-          <a:schemeClr val="lt2"/>
-        </a:solidFill>
-      </p:bgPr>
-    </p:bg>
-    <p:spTree>
-      <p:nvGrpSpPr>
-        <p:cNvPr id="1" name=""/>
-        <p:cNvGrpSpPr/>
-        <p:nvPr/>
-      </p:nvGrpSpPr>
-      <p:grpSpPr/>
-      <p:sp>
-        <p:nvSpPr>
-          <p:cNvPr id="2" name="title"/>
-          <p:cNvSpPr txBox="1"/>
-          <p:nvPr/>
-        </p:nvSpPr>
-        <p:spPr>
-          <a:xfrm>
-            <a:off x="677387" y="692177"/>
-            <a:ext cx="10855878" cy="822960"/>
-          </a:xfrm>
-          <a:prstGeom prst="rect">
-            <a:avLst/>
-          </a:prstGeom>
-          <a:noFill/>
-        </p:spPr>
-        <p:txBody>
-          <a:bodyPr wrap="square" lIns="76200" rIns="76200" tIns="50800" bIns="50800">
-            <a:spAutoFit/>
-          </a:bodyPr>
-          <a:lstStyle/>
-          <a:p>
-            <a:pPr algn="l">
-              <a:spcAft>
-                <a:spcPts val="300"/>
-              </a:spcAft>
-              <a:defRPr sz="4000">
-                <a:solidFill>
-                  <a:srgbClr val="000000"/>
-                </a:solidFill>
-                <a:latin typeface="Arial"/>
-                <a:ea typeface="Arial"/>
-                <a:cs typeface="Arial"/>
-              </a:defRPr>
-            </a:pPr>
-            <a:r>
-              <a:rPr sz="4000">
-                <a:solidFill>
-                  <a:srgbClr val="000000"/>
-                </a:solidFill>
-                <a:latin typeface="Arial"/>
-                <a:ea typeface="Arial"/>
-                <a:cs typeface="Arial"/>
-              </a:rPr>
-              <a:t>Пилотные результаты</a:t>
-            </a:r>
-          </a:p>
-        </p:txBody>
-      </p:sp>
-      <p:graphicFrame>
-        <p:nvGraphicFramePr>
-          <p:cNvPr id="3" name="Table 2"/>
-          <p:cNvGraphicFramePr>
-            <a:graphicFrameLocks noGrp="1"/>
-          </p:cNvGraphicFramePr>
-          <p:nvPr/>
-        </p:nvGraphicFramePr>
-        <p:xfrm>
-          <a:off x="6288206" y="1773204"/>
-          <a:ext cx="5245059" cy="4427593"/>
-        </p:xfrm>
-        <a:graphic>
-          <a:graphicData uri="http://schemas.openxmlformats.org/drawingml/2006/table">
-            <a:tbl>
-              <a:tblPr firstRow="1" bandRow="1">
-                <a:tableStyleId>{5C22544A-7EE6-4342-B048-85BDC9FD1C3A}</a:tableStyleId>
-              </a:tblPr>
-              <a:tblGrid>
-                <a:gridCol w="1748353"/>
-                <a:gridCol w="1748353"/>
-                <a:gridCol w="1748353"/>
-              </a:tblGrid>
-              <a:tr h="885518">
-                <a:tc>
-                  <a:txBody>
-                    <a:bodyPr/>
-                    <a:lstStyle/>
-                    <a:p>
-                      <a:pPr>
-                        <a:defRPr sz="1300" b="1">
-                          <a:solidFill>
-                            <a:srgbClr val="FFFFFF"/>
-                          </a:solidFill>
-                          <a:latin typeface="Arial"/>
-                          <a:ea typeface="Arial"/>
-                          <a:cs typeface="Arial"/>
-                        </a:defRPr>
-                      </a:pPr>
-                      <a:r>
-                        <a:t>Метрика</a:t>
-                      </a:r>
-                    </a:p>
-                  </a:txBody>
-                  <a:tcPr>
-                    <a:solidFill>
-                      <a:srgbClr val="0077FF"/>
-                    </a:solidFill>
-                  </a:tcPr>
-                </a:tc>
-                <a:tc>
-                  <a:txBody>
-                    <a:bodyPr/>
-                    <a:lstStyle/>
-                    <a:p>
-                      <a:pPr>
-                        <a:defRPr sz="1300" b="1">
-                          <a:solidFill>
-                            <a:srgbClr val="FFFFFF"/>
-                          </a:solidFill>
-                          <a:latin typeface="Arial"/>
-                          <a:ea typeface="Arial"/>
-                          <a:cs typeface="Arial"/>
-                        </a:defRPr>
-                      </a:pPr>
-                      <a:r>
-                        <a:t>До</a:t>
-                      </a:r>
-                    </a:p>
-                  </a:txBody>
-                  <a:tcPr>
-                    <a:solidFill>
-                      <a:srgbClr val="0077FF"/>
-                    </a:solidFill>
-                  </a:tcPr>
-                </a:tc>
-                <a:tc>
-                  <a:txBody>
-                    <a:bodyPr/>
-                    <a:lstStyle/>
-                    <a:p>
-                      <a:pPr>
-                        <a:defRPr sz="1300" b="1">
-                          <a:solidFill>
-                            <a:srgbClr val="FFFFFF"/>
-                          </a:solidFill>
-                          <a:latin typeface="Arial"/>
-                          <a:ea typeface="Arial"/>
-                          <a:cs typeface="Arial"/>
-                        </a:defRPr>
-                      </a:pPr>
-                      <a:r>
-                        <a:t>После</a:t>
-                      </a:r>
-                    </a:p>
-                  </a:txBody>
-                  <a:tcPr>
-                    <a:solidFill>
-                      <a:srgbClr val="0077FF"/>
-                    </a:solidFill>
-                  </a:tcPr>
-                </a:tc>
-              </a:tr>
-              <a:tr h="885518">
-                <a:tc>
-                  <a:txBody>
-                    <a:bodyPr/>
-                    <a:lstStyle/>
-                    <a:p>
-                      <a:pPr>
-                        <a:defRPr sz="1300" b="0">
-                          <a:solidFill>
-                            <a:srgbClr val="000000"/>
-                          </a:solidFill>
-                          <a:latin typeface="Arial"/>
-                          <a:ea typeface="Arial"/>
-                          <a:cs typeface="Arial"/>
-                        </a:defRPr>
-                      </a:pPr>
-                      <a:r>
-                        <a:t>Сборка (мин)</a:t>
-                      </a:r>
-                    </a:p>
-                  </a:txBody>
-                  <a:tcPr>
-                    <a:solidFill>
-                      <a:srgbClr val="FFFFFF"/>
-                    </a:solidFill>
-                  </a:tcPr>
-                </a:tc>
-                <a:tc>
-                  <a:txBody>
-                    <a:bodyPr/>
-                    <a:lstStyle/>
-                    <a:p>
-                      <a:pPr>
-                        <a:defRPr sz="1300" b="0">
-                          <a:solidFill>
-                            <a:srgbClr val="000000"/>
-                          </a:solidFill>
-                          <a:latin typeface="Arial"/>
-                          <a:ea typeface="Arial"/>
-                          <a:cs typeface="Arial"/>
-                        </a:defRPr>
-                      </a:pPr>
-                      <a:r>
-                        <a:t>186</a:t>
-                      </a:r>
-                    </a:p>
-                  </a:txBody>
-                  <a:tcPr>
-                    <a:solidFill>
-                      <a:srgbClr val="FFFFFF"/>
-                    </a:solidFill>
-                  </a:tcPr>
-                </a:tc>
-                <a:tc>
-                  <a:txBody>
-                    <a:bodyPr/>
-                    <a:lstStyle/>
-                    <a:p>
-                      <a:pPr>
-                        <a:defRPr sz="1300" b="0">
-                          <a:solidFill>
-                            <a:srgbClr val="000000"/>
-                          </a:solidFill>
-                          <a:latin typeface="Arial"/>
-                          <a:ea typeface="Arial"/>
-                          <a:cs typeface="Arial"/>
-                        </a:defRPr>
-                      </a:pPr>
-                      <a:r>
-                        <a:t>4</a:t>
-                      </a:r>
-                    </a:p>
-                  </a:txBody>
-                  <a:tcPr>
-                    <a:solidFill>
-                      <a:srgbClr val="FFFFFF"/>
-                    </a:solidFill>
-                  </a:tcPr>
-                </a:tc>
-              </a:tr>
-              <a:tr h="885518">
-                <a:tc>
-                  <a:txBody>
-                    <a:bodyPr/>
-                    <a:lstStyle/>
-                    <a:p>
-                      <a:pPr>
-                        <a:defRPr sz="1300" b="0">
-                          <a:solidFill>
-                            <a:srgbClr val="000000"/>
-                          </a:solidFill>
-                          <a:latin typeface="Arial"/>
-                          <a:ea typeface="Arial"/>
-                          <a:cs typeface="Arial"/>
-                        </a:defRPr>
-                      </a:pPr>
-                      <a:r>
-                        <a:t>Время до первой версии (дней)</a:t>
-                      </a:r>
-                    </a:p>
-                  </a:txBody>
-                  <a:tcPr>
-                    <a:solidFill>
-                      <a:srgbClr val="FFFFFF"/>
-                    </a:solidFill>
-                  </a:tcPr>
-                </a:tc>
-                <a:tc>
-                  <a:txBody>
-                    <a:bodyPr/>
-                    <a:lstStyle/>
-                    <a:p>
-                      <a:pPr>
-                        <a:defRPr sz="1300" b="0">
-                          <a:solidFill>
-                            <a:srgbClr val="000000"/>
-                          </a:solidFill>
-                          <a:latin typeface="Arial"/>
-                          <a:ea typeface="Arial"/>
-                          <a:cs typeface="Arial"/>
-                        </a:defRPr>
-                      </a:pPr>
-                      <a:r>
-                        <a:t>6</a:t>
-                      </a:r>
-                    </a:p>
-                  </a:txBody>
-                  <a:tcPr>
-                    <a:solidFill>
-                      <a:srgbClr val="FFFFFF"/>
-                    </a:solidFill>
-                  </a:tcPr>
-                </a:tc>
-                <a:tc>
-                  <a:txBody>
-                    <a:bodyPr/>
-                    <a:lstStyle/>
-                    <a:p>
-                      <a:pPr>
-                        <a:defRPr sz="1300" b="0">
-                          <a:solidFill>
-                            <a:srgbClr val="000000"/>
-                          </a:solidFill>
-                          <a:latin typeface="Arial"/>
-                          <a:ea typeface="Arial"/>
-                          <a:cs typeface="Arial"/>
-                        </a:defRPr>
-                      </a:pPr>
-                      <a:r>
-                        <a:t>1</a:t>
-                      </a:r>
-                    </a:p>
-                  </a:txBody>
-                  <a:tcPr>
-                    <a:solidFill>
-                      <a:srgbClr val="FFFFFF"/>
-                    </a:solidFill>
-                  </a:tcPr>
-                </a:tc>
-              </a:tr>
-              <a:tr h="885518">
-                <a:tc>
-                  <a:txBody>
-                    <a:bodyPr/>
-                    <a:lstStyle/>
-                    <a:p>
-                      <a:pPr>
-                        <a:defRPr sz="1300" b="0">
-                          <a:solidFill>
-                            <a:srgbClr val="000000"/>
-                          </a:solidFill>
-                          <a:latin typeface="Arial"/>
-                          <a:ea typeface="Arial"/>
-                          <a:cs typeface="Arial"/>
-                        </a:defRPr>
-                      </a:pPr>
-                      <a:r>
-                        <a:t>Нарушения</a:t>
-                      </a:r>
-                    </a:p>
-                  </a:txBody>
-                  <a:tcPr>
-                    <a:solidFill>
-                      <a:srgbClr val="FFFFFF"/>
-                    </a:solidFill>
-                  </a:tcPr>
-                </a:tc>
-                <a:tc>
-                  <a:txBody>
-                    <a:bodyPr/>
-                    <a:lstStyle/>
-                    <a:p>
-                      <a:pPr>
-                        <a:defRPr sz="1300" b="0">
-                          <a:solidFill>
-                            <a:srgbClr val="000000"/>
-                          </a:solidFill>
-                          <a:latin typeface="Arial"/>
-                          <a:ea typeface="Arial"/>
-                          <a:cs typeface="Arial"/>
-                        </a:defRPr>
-                      </a:pPr>
-                      <a:r>
-                        <a:t>19</a:t>
-                      </a:r>
-                    </a:p>
-                  </a:txBody>
-                  <a:tcPr>
-                    <a:solidFill>
-                      <a:srgbClr val="FFFFFF"/>
-                    </a:solidFill>
-                  </a:tcPr>
-                </a:tc>
-                <a:tc>
-                  <a:txBody>
-                    <a:bodyPr/>
-                    <a:lstStyle/>
-                    <a:p>
-                      <a:pPr>
-                        <a:defRPr sz="1300" b="0">
-                          <a:solidFill>
-                            <a:srgbClr val="000000"/>
-                          </a:solidFill>
-                          <a:latin typeface="Arial"/>
-                          <a:ea typeface="Arial"/>
-                          <a:cs typeface="Arial"/>
-                        </a:defRPr>
-                      </a:pPr>
-                      <a:r>
-                        <a:t>2</a:t>
-                      </a:r>
-                    </a:p>
-                  </a:txBody>
-                  <a:tcPr>
-                    <a:solidFill>
-                      <a:srgbClr val="FFFFFF"/>
-                    </a:solidFill>
-                  </a:tcPr>
-                </a:tc>
-              </a:tr>
-              <a:tr h="885521">
-                <a:tc>
-                  <a:txBody>
-                    <a:bodyPr/>
-                    <a:lstStyle/>
-                    <a:p>
-                      <a:pPr>
-                        <a:defRPr sz="1300" b="0">
-                          <a:solidFill>
-                            <a:srgbClr val="000000"/>
-                          </a:solidFill>
-                          <a:latin typeface="Arial"/>
-                          <a:ea typeface="Arial"/>
-                          <a:cs typeface="Arial"/>
-                        </a:defRPr>
-                      </a:pPr>
-                      <a:r>
-                        <a:t>Запросы дизайнеров</a:t>
-                      </a:r>
-                    </a:p>
-                  </a:txBody>
-                  <a:tcPr>
-                    <a:solidFill>
-                      <a:srgbClr val="FFFFFF"/>
-                    </a:solidFill>
-                  </a:tcPr>
-                </a:tc>
-                <a:tc>
-                  <a:txBody>
-                    <a:bodyPr/>
-                    <a:lstStyle/>
-                    <a:p>
-                      <a:pPr>
-                        <a:defRPr sz="1300" b="0">
-                          <a:solidFill>
-                            <a:srgbClr val="000000"/>
-                          </a:solidFill>
-                          <a:latin typeface="Arial"/>
-                          <a:ea typeface="Arial"/>
-                          <a:cs typeface="Arial"/>
-                        </a:defRPr>
-                      </a:pPr>
-                      <a:r>
-                        <a:t>11</a:t>
-                      </a:r>
-                    </a:p>
-                  </a:txBody>
-                  <a:tcPr>
-                    <a:solidFill>
-                      <a:srgbClr val="FFFFFF"/>
-                    </a:solidFill>
-                  </a:tcPr>
-                </a:tc>
-                <a:tc>
-                  <a:txBody>
-                    <a:bodyPr/>
-                    <a:lstStyle/>
-                    <a:p>
-                      <a:pPr>
-                        <a:defRPr sz="1300" b="0">
-                          <a:solidFill>
-                            <a:srgbClr val="000000"/>
-                          </a:solidFill>
-                          <a:latin typeface="Arial"/>
-                          <a:ea typeface="Arial"/>
-                          <a:cs typeface="Arial"/>
-                        </a:defRPr>
-                      </a:pPr>
-                      <a:r>
-                        <a:t>38</a:t>
-                      </a:r>
-                    </a:p>
-                  </a:txBody>
-                  <a:tcPr>
-                    <a:solidFill>
-                      <a:srgbClr val="FFFFFF"/>
-                    </a:solidFill>
-                  </a:tcPr>
-                </a:tc>
-              </a:tr>
-            </a:tbl>
-          </a:graphicData>
-        </a:graphic>
-      </p:graphicFrame>
-    </p:spTree>
-  </p:cSld>
-  <p:clrMapOvr>
-    <a:masterClrMapping/>
-  </p:clrMapOvr>
-</p:sld>
-</file>
-
-<file path=ppt/slides/slide64.xml><?xml version="1.0" encoding="utf-8"?>
-<p:sld xmlns:a="http://schemas.openxmlformats.org/drawingml/2006/main" xmlns:p="http://schemas.openxmlformats.org/presentationml/2006/main" xmlns:r="http://schemas.openxmlformats.org/officeDocument/2006/relationships">
-  <p:cSld>
-    <p:bg>
-      <p:bgPr>
-        <a:solidFill>
-          <a:schemeClr val="lt2"/>
-        </a:solidFill>
-      </p:bgPr>
-    </p:bg>
-    <p:spTree>
-      <p:nvGrpSpPr>
-        <p:cNvPr id="1" name=""/>
-        <p:cNvGrpSpPr/>
-        <p:nvPr/>
-      </p:nvGrpSpPr>
-      <p:grpSpPr/>
-      <p:pic>
-        <p:nvPicPr>
-          <p:cNvPr id="778" name="Google Shape;778;p59"/>
-          <p:cNvPicPr preferRelativeResize="0"/>
-          <p:nvPr/>
-        </p:nvPicPr>
-        <p:blipFill rotWithShape="1">
-          <a:blip r:embed="rId2">
-            <a:alphaModFix/>
-          </a:blip>
-          <a:srcRect b="0" l="0" r="0" t="0"/>
-          <a:stretch/>
-        </p:blipFill>
-        <p:spPr>
-          <a:xfrm>
-            <a:off x="8099424" y="2562300"/>
-            <a:ext cx="866700" cy="866700"/>
-          </a:xfrm>
-          <a:prstGeom prst="rect">
-            <a:avLst/>
-          </a:prstGeom>
-          <a:noFill/>
-          <a:ln>
-            <a:noFill/>
-          </a:ln>
-        </p:spPr>
-      </p:pic>
-      <p:pic>
-        <p:nvPicPr>
-          <p:cNvPr id="779" name="Google Shape;779;p59"/>
-          <p:cNvPicPr preferRelativeResize="0"/>
-          <p:nvPr/>
-        </p:nvPicPr>
-        <p:blipFill rotWithShape="1">
-          <a:blip r:embed="rId3">
-            <a:alphaModFix/>
-          </a:blip>
-          <a:srcRect b="0" l="0" r="0" t="0"/>
-          <a:stretch/>
-        </p:blipFill>
-        <p:spPr>
-          <a:xfrm>
-            <a:off x="4385469" y="2562300"/>
-            <a:ext cx="866700" cy="866700"/>
-          </a:xfrm>
-          <a:prstGeom prst="rect">
-            <a:avLst/>
-          </a:prstGeom>
-          <a:noFill/>
-          <a:ln>
-            <a:noFill/>
-          </a:ln>
-        </p:spPr>
-      </p:pic>
-      <p:pic>
-        <p:nvPicPr>
-          <p:cNvPr id="780" name="Google Shape;780;p59"/>
-          <p:cNvPicPr preferRelativeResize="0"/>
-          <p:nvPr/>
-        </p:nvPicPr>
-        <p:blipFill rotWithShape="1">
-          <a:blip r:embed="rId5">
-            <a:alphaModFix/>
-          </a:blip>
-          <a:srcRect b="0" l="0" r="0" t="0"/>
-          <a:stretch/>
-        </p:blipFill>
-        <p:spPr>
-          <a:xfrm>
-            <a:off x="671513" y="2562300"/>
-            <a:ext cx="866700" cy="866700"/>
-          </a:xfrm>
-          <a:prstGeom prst="rect">
-            <a:avLst/>
-          </a:prstGeom>
-          <a:noFill/>
-          <a:ln>
-            <a:noFill/>
-          </a:ln>
-        </p:spPr>
-      </p:pic>
-      <p:sp>
-        <p:nvSpPr>
           <p:cNvPr id="782" name="Google Shape;782;p59"/>
           <p:cNvSpPr txBox="1"/>
           <p:nvPr/>
@@ -11316,97 +8872,16 @@
           </a:p>
         </p:txBody>
       </p:sp>
-      <p:pic>
-        <p:nvPicPr>
-          <p:cNvPr id="783" name="Google Shape;783;p59"/>
-          <p:cNvPicPr preferRelativeResize="0"/>
-          <p:nvPr/>
-        </p:nvPicPr>
-        <p:blipFill rotWithShape="1">
-          <a:blip r:embed="rId6">
-            <a:alphaModFix/>
-          </a:blip>
-          <a:srcRect b="0" l="0" r="0" t="0"/>
-          <a:stretch/>
-        </p:blipFill>
-        <p:spPr>
-          <a:xfrm>
-            <a:off x="879438" y="2770225"/>
-            <a:ext cx="450850" cy="450850"/>
-          </a:xfrm>
-          <a:prstGeom prst="rect">
-            <a:avLst/>
-          </a:prstGeom>
-          <a:noFill/>
-          <a:ln>
-            <a:noFill/>
-          </a:ln>
-        </p:spPr>
-      </p:pic>
-      <p:pic>
-        <p:nvPicPr>
-          <p:cNvPr id="784" name="Google Shape;784;p59"/>
-          <p:cNvPicPr preferRelativeResize="0"/>
-          <p:nvPr/>
-        </p:nvPicPr>
-        <p:blipFill rotWithShape="1">
-          <a:blip r:embed="rId7">
-            <a:alphaModFix/>
-          </a:blip>
-          <a:srcRect b="0" l="0" r="0" t="0"/>
-          <a:stretch/>
-        </p:blipFill>
-        <p:spPr>
-          <a:xfrm>
-            <a:off x="8316973" y="2791669"/>
-            <a:ext cx="450851" cy="450851"/>
-          </a:xfrm>
-          <a:prstGeom prst="rect">
-            <a:avLst/>
-          </a:prstGeom>
-          <a:noFill/>
-          <a:ln>
-            <a:noFill/>
-          </a:ln>
-        </p:spPr>
-      </p:pic>
-      <p:pic>
-        <p:nvPicPr>
-          <p:cNvPr id="785" name="Google Shape;785;p59"/>
-          <p:cNvPicPr preferRelativeResize="0"/>
-          <p:nvPr/>
-        </p:nvPicPr>
-        <p:blipFill rotWithShape="1">
-          <a:blip r:embed="rId8">
-            <a:alphaModFix/>
-          </a:blip>
-          <a:srcRect b="0" l="0" r="0" t="0"/>
-          <a:stretch/>
-        </p:blipFill>
-        <p:spPr>
-          <a:xfrm>
-            <a:off x="4574144" y="2770225"/>
-            <a:ext cx="450850" cy="450850"/>
-          </a:xfrm>
-          <a:prstGeom prst="rect">
-            <a:avLst/>
-          </a:prstGeom>
-          <a:noFill/>
-          <a:ln>
-            <a:noFill/>
-          </a:ln>
-        </p:spPr>
-      </p:pic>
       <p:sp>
         <p:nvSpPr>
-          <p:cNvPr id="786" name="title"/>
+          <p:cNvPr id="783" name="title"/>
           <p:cNvSpPr txBox="1"/>
           <p:nvPr/>
         </p:nvSpPr>
         <p:spPr>
           <a:xfrm>
             <a:off x="677387" y="692177"/>
-            <a:ext cx="10855878" cy="822960"/>
+            <a:ext cx="10855878" cy="1447800"/>
           </a:xfrm>
           <a:prstGeom prst="rect">
             <a:avLst/>
@@ -11441,21 +8916,21 @@
                 <a:ea typeface="Arial"/>
                 <a:cs typeface="Arial"/>
               </a:rPr>
-              <a:t>Запрос решения руководства</a:t>
+              <a:t>Решение о запуске сервиса на всю компанию</a:t>
             </a:r>
           </a:p>
         </p:txBody>
       </p:sp>
       <p:sp>
         <p:nvSpPr>
-          <p:cNvPr id="787" name="body"/>
+          <p:cNvPr id="784" name="body"/>
           <p:cNvSpPr txBox="1"/>
           <p:nvPr/>
         </p:nvSpPr>
         <p:spPr>
           <a:xfrm>
-            <a:off x="677387" y="3146751"/>
-            <a:ext cx="10855878" cy="1290320"/>
+            <a:off x="677387" y="3695391"/>
+            <a:ext cx="10855878" cy="894080"/>
           </a:xfrm>
           <a:prstGeom prst="rect">
             <a:avLst/>
@@ -11472,7 +8947,7 @@
               <a:spcAft>
                 <a:spcPts val="300"/>
               </a:spcAft>
-              <a:defRPr sz="2400">
+              <a:defRPr sz="1600">
                 <a:solidFill>
                   <a:srgbClr val="000000"/>
                 </a:solidFill>
@@ -11482,7 +8957,7 @@
               </a:defRPr>
             </a:pPr>
             <a:r>
-              <a:rPr sz="2400">
+              <a:rPr sz="1600">
                 <a:solidFill>
                   <a:srgbClr val="000000"/>
                 </a:solidFill>
@@ -11490,7 +8965,7 @@
                 <a:ea typeface="Arial"/>
                 <a:cs typeface="Arial"/>
               </a:rPr>
-              <a:t>• Одобрить запуск сервиса на всю компанию</a:t>
+              <a:t>• Запрос одобрения на масштабирование</a:t>
             </a:r>
           </a:p>
           <a:p>
@@ -11498,7 +8973,7 @@
               <a:spcAft>
                 <a:spcPts val="300"/>
               </a:spcAft>
-              <a:defRPr sz="2400">
+              <a:defRPr sz="1600">
                 <a:solidFill>
                   <a:srgbClr val="000000"/>
                 </a:solidFill>
@@ -11508,7 +8983,7 @@
               </a:defRPr>
             </a:pPr>
             <a:r>
-              <a:rPr sz="2400">
+              <a:rPr sz="1600">
                 <a:solidFill>
                   <a:srgbClr val="000000"/>
                 </a:solidFill>
@@ -11516,7 +8991,7 @@
                 <a:ea typeface="Arial"/>
                 <a:cs typeface="Arial"/>
               </a:rPr>
-              <a:t>• Выделить ресурсы для интеграции с хранилищем</a:t>
+              <a:t>• Подключение к корпоративному хранилищу</a:t>
             </a:r>
           </a:p>
           <a:p>
@@ -11524,7 +8999,7 @@
               <a:spcAft>
                 <a:spcPts val="300"/>
               </a:spcAft>
-              <a:defRPr sz="2400">
+              <a:defRPr sz="1600">
                 <a:solidFill>
                   <a:srgbClr val="000000"/>
                 </a:solidFill>
@@ -11534,7 +9009,7 @@
               </a:defRPr>
             </a:pPr>
             <a:r>
-              <a:rPr sz="2400">
+              <a:rPr sz="1600">
                 <a:solidFill>
                   <a:srgbClr val="000000"/>
                 </a:solidFill>
@@ -11542,7 +9017,7 @@
                 <a:ea typeface="Arial"/>
                 <a:cs typeface="Arial"/>
               </a:rPr>
-              <a:t>• Поддержка модели и масштабирование</a:t>
+              <a:t>• Интеграция с доменом и HTTPS</a:t>
             </a:r>
           </a:p>
         </p:txBody>

--- a/samples/Шаблон_презентации_VK_Education__split.pptx
+++ b/samples/Шаблон_презентации_VK_Education__split.pptx
@@ -276,7 +276,7 @@
               <c:strCache>
                 <c:ptCount val="1"/>
                 <c:pt idx="0">
-                  <c:v>Время</c:v>
+                  <c:v>До</c:v>
                 </c:pt>
               </c:strCache>
             </c:strRef>
@@ -293,34 +293,127 @@
           </c:spPr>
           <c:cat>
             <c:strRef>
-              <c:f>Sheet1!$A$2:$A$3</c:f>
+              <c:f>Sheet1!$A$2:$A$4</c:f>
               <c:strCache>
-                <c:ptCount val="2"/>
+                <c:ptCount val="3"/>
                 <c:pt idx="0">
-                  <c:v>Сборка</c:v>
+                  <c:v>Сборка колоды</c:v>
                 </c:pt>
                 <c:pt idx="1">
-                  <c:v>Правки</c:v>
+                  <c:v>Время до первой версии</c:v>
+                </c:pt>
+                <c:pt idx="2">
+                  <c:v>Запросы/неделя</c:v>
                 </c:pt>
               </c:strCache>
             </c:strRef>
           </c:cat>
           <c:val>
             <c:numRef>
-              <c:f>Sheet1!$B$2:$B$3</c:f>
+              <c:f>Sheet1!$B$2:$B$4</c:f>
               <c:numCache>
                 <c:formatCode>General</c:formatCode>
-                <c:ptCount val="2"/>
+                <c:ptCount val="3"/>
                 <c:pt idx="0">
                   <c:v>186.0</c:v>
                 </c:pt>
                 <c:pt idx="1">
-                  <c:v>74.0</c:v>
+                  <c:v>6.0</c:v>
+                </c:pt>
+                <c:pt idx="2">
+                  <c:v>11.0</c:v>
                 </c:pt>
               </c:numCache>
             </c:numRef>
           </c:val>
         </c:ser>
+        <c:ser>
+          <c:idx val="1"/>
+          <c:order val="1"/>
+          <c:tx>
+            <c:strRef>
+              <c:f>Sheet1!$C$1</c:f>
+              <c:strCache>
+                <c:ptCount val="1"/>
+                <c:pt idx="0">
+                  <c:v>После</c:v>
+                </c:pt>
+              </c:strCache>
+            </c:strRef>
+          </c:tx>
+          <c:spPr>
+            <a:solidFill>
+              <a:srgbClr val="FF3885"/>
+            </a:solidFill>
+            <a:ln>
+              <a:solidFill>
+                <a:srgbClr val="FF3885"/>
+              </a:solidFill>
+            </a:ln>
+          </c:spPr>
+          <c:cat>
+            <c:strRef>
+              <c:f>Sheet1!$A$2:$A$4</c:f>
+              <c:strCache>
+                <c:ptCount val="3"/>
+                <c:pt idx="0">
+                  <c:v>Сборка колоды</c:v>
+                </c:pt>
+                <c:pt idx="1">
+                  <c:v>Время до первой версии</c:v>
+                </c:pt>
+                <c:pt idx="2">
+                  <c:v>Запросы/неделя</c:v>
+                </c:pt>
+              </c:strCache>
+            </c:strRef>
+          </c:cat>
+          <c:val>
+            <c:numRef>
+              <c:f>Sheet1!$C$2:$C$4</c:f>
+              <c:numCache>
+                <c:formatCode>General</c:formatCode>
+                <c:ptCount val="3"/>
+                <c:pt idx="0">
+                  <c:v>4.0</c:v>
+                </c:pt>
+                <c:pt idx="1">
+                  <c:v>1.0</c:v>
+                </c:pt>
+                <c:pt idx="2">
+                  <c:v>38.0</c:v>
+                </c:pt>
+              </c:numCache>
+            </c:numRef>
+          </c:val>
+        </c:ser>
+        <c:dLbls>
+          <c:numFmt formatCode="0&quot; единицы&quot;" sourceLinked="0"/>
+          <c:txPr>
+            <a:bodyPr wrap="none"/>
+            <a:lstStyle/>
+            <a:p>
+              <a:pPr>
+                <a:defRPr sz="1100" b="0">
+                  <a:solidFill>
+                    <a:srgbClr val="000000"/>
+                  </a:solidFill>
+                  <a:latin typeface="Play"/>
+                  <a:ea typeface="Play"/>
+                  <a:cs typeface="Play"/>
+                </a:defRPr>
+              </a:pPr>
+            </a:p>
+          </c:txPr>
+          <c:dLblPos val="outEnd"/>
+          <c:showLegendKey val="0"/>
+          <c:showVal val="1"/>
+          <c:showCatName val="0"/>
+          <c:showSerName val="0"/>
+          <c:showPercent val="0"/>
+          <c:showBubbleSize val="0"/>
+          <c:showLeaderLines val="1"/>
+        </c:dLbls>
         <c:gapWidth val="60"/>
         <c:axId val="-2068027336"/>
         <c:axId val="-2113994440"/>
@@ -344,9 +437,9 @@
                 <a:solidFill>
                   <a:srgbClr val="000000"/>
                 </a:solidFill>
-                <a:latin typeface="Arial"/>
-                <a:ea typeface="Arial"/>
-                <a:cs typeface="Arial"/>
+                <a:latin typeface="Play"/>
+                <a:ea typeface="Play"/>
+                <a:cs typeface="Play"/>
               </a:defRPr>
             </a:pPr>
           </a:p>
@@ -375,7 +468,7 @@
         <c:title>
           <c:tx>
             <c:rich>
-              <a:bodyPr/>
+              <a:bodyPr rot="0" vert="horz"/>
               <a:lstStyle/>
               <a:p>
                 <a:pPr>
@@ -383,13 +476,13 @@
                     <a:solidFill>
                       <a:srgbClr val="000000"/>
                     </a:solidFill>
-                    <a:latin typeface="Arial"/>
-                    <a:ea typeface="Arial"/>
-                    <a:cs typeface="Arial"/>
+                    <a:latin typeface="Play"/>
+                    <a:ea typeface="Play"/>
+                    <a:cs typeface="Play"/>
                   </a:defRPr>
                 </a:pPr>
                 <a:r>
-                  <a:t>мин</a:t>
+                  <a:t>единицы</a:t>
                 </a:r>
               </a:p>
             </c:rich>
@@ -409,9 +502,9 @@
                 <a:solidFill>
                   <a:srgbClr val="000000"/>
                 </a:solidFill>
-                <a:latin typeface="Arial"/>
-                <a:ea typeface="Arial"/>
-                <a:cs typeface="Arial"/>
+                <a:latin typeface="Play"/>
+                <a:ea typeface="Play"/>
+                <a:cs typeface="Play"/>
               </a:defRPr>
             </a:pPr>
           </a:p>
@@ -420,6 +513,10 @@
         <c:crosses val="autoZero"/>
       </c:valAx>
     </c:plotArea>
+    <c:legend>
+      <c:legendPos val="b"/>
+      <c:overlay val="0"/>
+    </c:legend>
     <c:dispBlanksAs val="gap"/>
   </c:chart>
   <c:txPr>
@@ -431,196 +528,9 @@
           <a:solidFill>
             <a:srgbClr val="000000"/>
           </a:solidFill>
-          <a:latin typeface="Arial"/>
-          <a:ea typeface="Arial"/>
-          <a:cs typeface="Arial"/>
-        </a:defRPr>
-      </a:pPr>
-      <a:endParaRPr lang="en-US"/>
-    </a:p>
-  </c:txPr>
-  <c:externalData r:id="rId1">
-    <c:autoUpdate val="0"/>
-  </c:externalData>
-</c:chartSpace>
-</file>
-
-<file path=ppt/charts/chart2.xml><?xml version="1.0" encoding="utf-8"?>
-<c:chartSpace xmlns:c="http://schemas.openxmlformats.org/drawingml/2006/chart" xmlns:a="http://schemas.openxmlformats.org/drawingml/2006/main" xmlns:r="http://schemas.openxmlformats.org/officeDocument/2006/relationships">
-  <c:date1904 val="0"/>
-  <c:chart>
-    <c:autoTitleDeleted val="1"/>
-    <c:plotArea>
-      <c:barChart>
-        <c:barDir val="col"/>
-        <c:grouping val="clustered"/>
-        <c:ser>
-          <c:idx val="0"/>
-          <c:order val="0"/>
-          <c:tx>
-            <c:strRef>
-              <c:f>Sheet1!$B$1</c:f>
-              <c:strCache>
-                <c:ptCount val="1"/>
-                <c:pt idx="0">
-                  <c:v>Время</c:v>
-                </c:pt>
-              </c:strCache>
-            </c:strRef>
-          </c:tx>
-          <c:spPr>
-            <a:solidFill>
-              <a:srgbClr val="0077FF"/>
-            </a:solidFill>
-            <a:ln>
-              <a:solidFill>
-                <a:srgbClr val="0077FF"/>
-              </a:solidFill>
-            </a:ln>
-          </c:spPr>
-          <c:cat>
-            <c:strRef>
-              <c:f>Sheet1!$A$2:$A$3</c:f>
-              <c:strCache>
-                <c:ptCount val="2"/>
-                <c:pt idx="0">
-                  <c:v>До пилота</c:v>
-                </c:pt>
-                <c:pt idx="1">
-                  <c:v>После пилота</c:v>
-                </c:pt>
-              </c:strCache>
-            </c:strRef>
-          </c:cat>
-          <c:val>
-            <c:numRef>
-              <c:f>Sheet1!$B$2:$B$3</c:f>
-              <c:numCache>
-                <c:formatCode>General</c:formatCode>
-                <c:ptCount val="2"/>
-                <c:pt idx="0">
-                  <c:v>186.0</c:v>
-                </c:pt>
-                <c:pt idx="1">
-                  <c:v>4.0</c:v>
-                </c:pt>
-              </c:numCache>
-            </c:numRef>
-          </c:val>
-        </c:ser>
-        <c:gapWidth val="60"/>
-        <c:axId val="-2068027336"/>
-        <c:axId val="-2113994440"/>
-      </c:barChart>
-      <c:catAx>
-        <c:axId val="-2068027336"/>
-        <c:scaling>
-          <c:orientation val="minMax"/>
-        </c:scaling>
-        <c:delete val="0"/>
-        <c:axPos val="b"/>
-        <c:majorTickMark val="out"/>
-        <c:minorTickMark val="none"/>
-        <c:tickLblPos val="nextTo"/>
-        <c:txPr>
-          <a:bodyPr/>
-          <a:lstStyle/>
-          <a:p>
-            <a:pPr>
-              <a:defRPr sz="1100" b="0">
-                <a:solidFill>
-                  <a:srgbClr val="000000"/>
-                </a:solidFill>
-                <a:latin typeface="Arial"/>
-                <a:ea typeface="Arial"/>
-                <a:cs typeface="Arial"/>
-              </a:defRPr>
-            </a:pPr>
-          </a:p>
-        </c:txPr>
-        <c:crossAx val="-2113994440"/>
-        <c:crosses val="autoZero"/>
-        <c:auto val="1"/>
-        <c:lblAlgn val="ctr"/>
-        <c:lblOffset val="100"/>
-        <c:noMultiLvlLbl val="0"/>
-      </c:catAx>
-      <c:valAx>
-        <c:axId val="-2113994440"/>
-        <c:scaling/>
-        <c:delete val="0"/>
-        <c:axPos val="l"/>
-        <c:majorGridlines>
-          <c:spPr>
-            <a:ln w="9525">
-              <a:solidFill>
-                <a:srgbClr val="D1D1D1"/>
-              </a:solidFill>
-            </a:ln>
-          </c:spPr>
-        </c:majorGridlines>
-        <c:title>
-          <c:tx>
-            <c:rich>
-              <a:bodyPr/>
-              <a:lstStyle/>
-              <a:p>
-                <a:pPr>
-                  <a:defRPr sz="1100" b="0">
-                    <a:solidFill>
-                      <a:srgbClr val="000000"/>
-                    </a:solidFill>
-                    <a:latin typeface="Arial"/>
-                    <a:ea typeface="Arial"/>
-                    <a:cs typeface="Arial"/>
-                  </a:defRPr>
-                </a:pPr>
-                <a:r>
-                  <a:t>мин</a:t>
-                </a:r>
-              </a:p>
-            </c:rich>
-          </c:tx>
-          <c:layout/>
-          <c:overlay val="0"/>
-        </c:title>
-        <c:majorTickMark val="out"/>
-        <c:minorTickMark val="none"/>
-        <c:tickLblPos val="nextTo"/>
-        <c:txPr>
-          <a:bodyPr/>
-          <a:lstStyle/>
-          <a:p>
-            <a:pPr>
-              <a:defRPr sz="1100" b="0">
-                <a:solidFill>
-                  <a:srgbClr val="000000"/>
-                </a:solidFill>
-                <a:latin typeface="Arial"/>
-                <a:ea typeface="Arial"/>
-                <a:cs typeface="Arial"/>
-              </a:defRPr>
-            </a:pPr>
-          </a:p>
-        </c:txPr>
-        <c:crossAx val="-2068027336"/>
-        <c:crosses val="autoZero"/>
-      </c:valAx>
-    </c:plotArea>
-    <c:dispBlanksAs val="gap"/>
-  </c:chart>
-  <c:txPr>
-    <a:bodyPr/>
-    <a:lstStyle/>
-    <a:p>
-      <a:pPr>
-        <a:defRPr sz="1200" b="0">
-          <a:solidFill>
-            <a:srgbClr val="000000"/>
-          </a:solidFill>
-          <a:latin typeface="Arial"/>
-          <a:ea typeface="Arial"/>
-          <a:cs typeface="Arial"/>
+          <a:latin typeface="Play"/>
+          <a:ea typeface="Play"/>
+          <a:cs typeface="Play"/>
         </a:defRPr>
       </a:pPr>
       <a:endParaRPr lang="en-US"/>
@@ -7391,7 +7301,7 @@
         <p:spPr>
           <a:xfrm>
             <a:off x="677387" y="692177"/>
-            <a:ext cx="10855878" cy="822960"/>
+            <a:ext cx="10855878" cy="1447800"/>
           </a:xfrm>
           <a:prstGeom prst="rect">
             <a:avLst/>
@@ -7426,7 +7336,7 @@
                 <a:ea typeface="Arial"/>
                 <a:cs typeface="Arial"/>
               </a:rPr>
-              <a:t>Автоматическая вёрстка презентаций</a:t>
+              <a:t>Защита инициативы: сервис автоматической вёрстки презентаций</a:t>
             </a:r>
           </a:p>
         </p:txBody>
@@ -7484,7 +7394,7 @@
         <p:spPr>
           <a:xfrm>
             <a:off x="677387" y="692177"/>
-            <a:ext cx="10855878" cy="1447800"/>
+            <a:ext cx="10855878" cy="822960"/>
           </a:xfrm>
           <a:prstGeom prst="rect">
             <a:avLst/>
@@ -7519,7 +7429,7 @@
                 <a:ea typeface="Arial"/>
                 <a:cs typeface="Arial"/>
               </a:rPr>
-              <a:t>Сейчас сборка презентаций занимает 186 минут</a:t>
+              <a:t>Контекст и возможность</a:t>
             </a:r>
           </a:p>
         </p:txBody>
@@ -7532,8 +7442,8 @@
         </p:nvSpPr>
         <p:spPr>
           <a:xfrm>
-            <a:off x="677387" y="3591534"/>
-            <a:ext cx="5245059" cy="1254945"/>
+            <a:off x="677387" y="2200937"/>
+            <a:ext cx="5245059" cy="1390596"/>
           </a:xfrm>
           <a:prstGeom prst="rect">
             <a:avLst/>
@@ -7554,9 +7464,9 @@
                 <a:solidFill>
                   <a:srgbClr val="000000"/>
                 </a:solidFill>
-                <a:latin typeface="Arial"/>
-                <a:ea typeface="Arial"/>
-                <a:cs typeface="Arial"/>
+                <a:latin typeface="Play"/>
+                <a:ea typeface="Play"/>
+                <a:cs typeface="Play"/>
               </a:defRPr>
             </a:pPr>
             <a:r>
@@ -7564,11 +7474,11 @@
                 <a:solidFill>
                   <a:srgbClr val="000000"/>
                 </a:solidFill>
-                <a:latin typeface="Arial"/>
-                <a:ea typeface="Arial"/>
-                <a:cs typeface="Arial"/>
+                <a:latin typeface="Play"/>
+                <a:ea typeface="Play"/>
+                <a:cs typeface="Play"/>
               </a:rPr>
-              <a:t>• Отдел маркетинга вручную собирает 42 колоды за квартал</a:t>
+              <a:t>• 42 колоды собраны вручную 2026</a:t>
             </a:r>
           </a:p>
           <a:p>
@@ -7580,9 +7490,9 @@
                 <a:solidFill>
                   <a:srgbClr val="000000"/>
                 </a:solidFill>
-                <a:latin typeface="Arial"/>
-                <a:ea typeface="Arial"/>
-                <a:cs typeface="Arial"/>
+                <a:latin typeface="Play"/>
+                <a:ea typeface="Play"/>
+                <a:cs typeface="Play"/>
               </a:defRPr>
             </a:pPr>
             <a:r>
@@ -7590,11 +7500,11 @@
                 <a:solidFill>
                   <a:srgbClr val="000000"/>
                 </a:solidFill>
-                <a:latin typeface="Arial"/>
-                <a:ea typeface="Arial"/>
-                <a:cs typeface="Arial"/>
+                <a:latin typeface="Play"/>
+                <a:ea typeface="Play"/>
+                <a:cs typeface="Play"/>
               </a:rPr>
-              <a:t>• 74 минуты уходит на правки после ревью дизайнера</a:t>
+              <a:t>• Сборка колоды занимает 186 мин</a:t>
             </a:r>
           </a:p>
           <a:p>
@@ -7606,9 +7516,9 @@
                 <a:solidFill>
                   <a:srgbClr val="000000"/>
                 </a:solidFill>
-                <a:latin typeface="Arial"/>
-                <a:ea typeface="Arial"/>
-                <a:cs typeface="Arial"/>
+                <a:latin typeface="Play"/>
+                <a:ea typeface="Play"/>
+                <a:cs typeface="Play"/>
               </a:defRPr>
             </a:pPr>
             <a:r>
@@ -7616,30 +7526,468 @@
                 <a:solidFill>
                   <a:srgbClr val="000000"/>
                 </a:solidFill>
-                <a:latin typeface="Arial"/>
-                <a:ea typeface="Arial"/>
-                <a:cs typeface="Arial"/>
+                <a:latin typeface="Play"/>
+                <a:ea typeface="Play"/>
+                <a:cs typeface="Play"/>
               </a:rPr>
-              <a:t>• 19 колод нарушают фирменный стиль</a:t>
+              <a:t>• Правки ревью добавляют 74 мин</a:t>
+            </a:r>
+          </a:p>
+          <a:p>
+            <a:pPr algn="l">
+              <a:spcAft>
+                <a:spcPts val="300"/>
+              </a:spcAft>
+              <a:defRPr sz="1400">
+                <a:solidFill>
+                  <a:srgbClr val="000000"/>
+                </a:solidFill>
+                <a:latin typeface="Play"/>
+                <a:ea typeface="Play"/>
+                <a:cs typeface="Play"/>
+              </a:defRPr>
+            </a:pPr>
+            <a:r>
+              <a:rPr sz="1400">
+                <a:solidFill>
+                  <a:srgbClr val="000000"/>
+                </a:solidFill>
+                <a:latin typeface="Play"/>
+                <a:ea typeface="Play"/>
+                <a:cs typeface="Play"/>
+              </a:rPr>
+              <a:t>• 19/42 колод нарушают стиль</a:t>
+            </a:r>
+          </a:p>
+          <a:p>
+            <a:pPr algn="l">
+              <a:spcAft>
+                <a:spcPts val="300"/>
+              </a:spcAft>
+              <a:defRPr sz="1400">
+                <a:solidFill>
+                  <a:srgbClr val="000000"/>
+                </a:solidFill>
+                <a:latin typeface="Play"/>
+                <a:ea typeface="Play"/>
+                <a:cs typeface="Play"/>
+              </a:defRPr>
+            </a:pPr>
+            <a:r>
+              <a:rPr sz="1400">
+                <a:solidFill>
+                  <a:srgbClr val="000000"/>
+                </a:solidFill>
+                <a:latin typeface="Play"/>
+                <a:ea typeface="Play"/>
+                <a:cs typeface="Play"/>
+              </a:rPr>
+              <a:t>• Дизайн‑отдел 4 закрывает 11 запросов/нед.</a:t>
             </a:r>
           </a:p>
         </p:txBody>
       </p:sp>
       <p:graphicFrame>
         <p:nvGraphicFramePr>
-          <p:cNvPr id="989" name="Chart 988"/>
+          <p:cNvPr id="989" name="Table 988"/>
           <p:cNvGraphicFramePr>
             <a:graphicFrameLocks noGrp="1"/>
           </p:cNvGraphicFramePr>
           <p:nvPr/>
         </p:nvGraphicFramePr>
         <p:xfrm>
-          <a:off x="6288206" y="3591534"/>
-          <a:ext cx="5245059" cy="1254945"/>
+          <a:off x="6288206" y="2200937"/>
+          <a:ext cx="5245059" cy="1390596"/>
         </p:xfrm>
         <a:graphic>
-          <a:graphicData uri="http://schemas.openxmlformats.org/drawingml/2006/chart">
-            <c:chart xmlns:c="http://schemas.openxmlformats.org/drawingml/2006/chart" r:id="rId2"/>
+          <a:graphicData uri="http://schemas.openxmlformats.org/drawingml/2006/table">
+            <a:tbl>
+              <a:tblPr firstRow="1" bandRow="1">
+                <a:tableStyleId>{5C22544A-7EE6-4342-B048-85BDC9FD1C3A}</a:tableStyleId>
+              </a:tblPr>
+              <a:tblGrid>
+                <a:gridCol w="2622529"/>
+                <a:gridCol w="2622530"/>
+              </a:tblGrid>
+              <a:tr h="198656">
+                <a:tc>
+                  <a:txBody>
+                    <a:bodyPr/>
+                    <a:lstStyle/>
+                    <a:p>
+                      <a:pPr>
+                        <a:defRPr sz="1300" b="1">
+                          <a:solidFill>
+                            <a:srgbClr val="FFFFFF"/>
+                          </a:solidFill>
+                          <a:latin typeface="Play"/>
+                          <a:ea typeface="Play"/>
+                          <a:cs typeface="Play"/>
+                        </a:defRPr>
+                      </a:pPr>
+                      <a:r>
+                        <a:t>Показатель</a:t>
+                      </a:r>
+                    </a:p>
+                  </a:txBody>
+                  <a:tcPr>
+                    <a:solidFill>
+                      <a:srgbClr val="0077FF"/>
+                    </a:solidFill>
+                  </a:tcPr>
+                </a:tc>
+                <a:tc>
+                  <a:txBody>
+                    <a:bodyPr/>
+                    <a:lstStyle/>
+                    <a:p>
+                      <a:pPr>
+                        <a:defRPr sz="1300" b="1">
+                          <a:solidFill>
+                            <a:srgbClr val="FFFFFF"/>
+                          </a:solidFill>
+                          <a:latin typeface="Play"/>
+                          <a:ea typeface="Play"/>
+                          <a:cs typeface="Play"/>
+                        </a:defRPr>
+                      </a:pPr>
+                      <a:r>
+                        <a:t>Значение</a:t>
+                      </a:r>
+                    </a:p>
+                  </a:txBody>
+                  <a:tcPr>
+                    <a:solidFill>
+                      <a:srgbClr val="0077FF"/>
+                    </a:solidFill>
+                  </a:tcPr>
+                </a:tc>
+              </a:tr>
+              <a:tr h="198656">
+                <a:tc>
+                  <a:txBody>
+                    <a:bodyPr/>
+                    <a:lstStyle/>
+                    <a:p>
+                      <a:pPr>
+                        <a:defRPr sz="1300" b="0">
+                          <a:solidFill>
+                            <a:srgbClr val="000000"/>
+                          </a:solidFill>
+                          <a:latin typeface="Play"/>
+                          <a:ea typeface="Play"/>
+                          <a:cs typeface="Play"/>
+                        </a:defRPr>
+                      </a:pPr>
+                      <a:r>
+                        <a:t>Колоды</a:t>
+                      </a:r>
+                    </a:p>
+                  </a:txBody>
+                  <a:tcPr>
+                    <a:solidFill>
+                      <a:srgbClr val="FFFFFF"/>
+                    </a:solidFill>
+                  </a:tcPr>
+                </a:tc>
+                <a:tc>
+                  <a:txBody>
+                    <a:bodyPr/>
+                    <a:lstStyle/>
+                    <a:p>
+                      <a:pPr>
+                        <a:defRPr sz="1300" b="0">
+                          <a:solidFill>
+                            <a:srgbClr val="000000"/>
+                          </a:solidFill>
+                          <a:latin typeface="Play"/>
+                          <a:ea typeface="Play"/>
+                          <a:cs typeface="Play"/>
+                        </a:defRPr>
+                      </a:pPr>
+                      <a:r>
+                        <a:t>42</a:t>
+                      </a:r>
+                    </a:p>
+                  </a:txBody>
+                  <a:tcPr>
+                    <a:solidFill>
+                      <a:srgbClr val="FFFFFF"/>
+                    </a:solidFill>
+                  </a:tcPr>
+                </a:tc>
+              </a:tr>
+              <a:tr h="198656">
+                <a:tc>
+                  <a:txBody>
+                    <a:bodyPr/>
+                    <a:lstStyle/>
+                    <a:p>
+                      <a:pPr>
+                        <a:defRPr sz="1300" b="0">
+                          <a:solidFill>
+                            <a:srgbClr val="000000"/>
+                          </a:solidFill>
+                          <a:latin typeface="Play"/>
+                          <a:ea typeface="Play"/>
+                          <a:cs typeface="Play"/>
+                        </a:defRPr>
+                      </a:pPr>
+                      <a:r>
+                        <a:t>Сборка колоды</a:t>
+                      </a:r>
+                    </a:p>
+                  </a:txBody>
+                  <a:tcPr>
+                    <a:solidFill>
+                      <a:srgbClr val="FFFFFF"/>
+                    </a:solidFill>
+                  </a:tcPr>
+                </a:tc>
+                <a:tc>
+                  <a:txBody>
+                    <a:bodyPr/>
+                    <a:lstStyle/>
+                    <a:p>
+                      <a:pPr>
+                        <a:defRPr sz="1300" b="0">
+                          <a:solidFill>
+                            <a:srgbClr val="000000"/>
+                          </a:solidFill>
+                          <a:latin typeface="Play"/>
+                          <a:ea typeface="Play"/>
+                          <a:cs typeface="Play"/>
+                        </a:defRPr>
+                      </a:pPr>
+                      <a:r>
+                        <a:t>186 мин</a:t>
+                      </a:r>
+                    </a:p>
+                  </a:txBody>
+                  <a:tcPr>
+                    <a:solidFill>
+                      <a:srgbClr val="FFFFFF"/>
+                    </a:solidFill>
+                  </a:tcPr>
+                </a:tc>
+              </a:tr>
+              <a:tr h="198656">
+                <a:tc>
+                  <a:txBody>
+                    <a:bodyPr/>
+                    <a:lstStyle/>
+                    <a:p>
+                      <a:pPr>
+                        <a:defRPr sz="1300" b="0">
+                          <a:solidFill>
+                            <a:srgbClr val="000000"/>
+                          </a:solidFill>
+                          <a:latin typeface="Play"/>
+                          <a:ea typeface="Play"/>
+                          <a:cs typeface="Play"/>
+                        </a:defRPr>
+                      </a:pPr>
+                      <a:r>
+                        <a:t>Правки</a:t>
+                      </a:r>
+                    </a:p>
+                  </a:txBody>
+                  <a:tcPr>
+                    <a:solidFill>
+                      <a:srgbClr val="FFFFFF"/>
+                    </a:solidFill>
+                  </a:tcPr>
+                </a:tc>
+                <a:tc>
+                  <a:txBody>
+                    <a:bodyPr/>
+                    <a:lstStyle/>
+                    <a:p>
+                      <a:pPr>
+                        <a:defRPr sz="1300" b="0">
+                          <a:solidFill>
+                            <a:srgbClr val="000000"/>
+                          </a:solidFill>
+                          <a:latin typeface="Play"/>
+                          <a:ea typeface="Play"/>
+                          <a:cs typeface="Play"/>
+                        </a:defRPr>
+                      </a:pPr>
+                      <a:r>
+                        <a:t>74 мин</a:t>
+                      </a:r>
+                    </a:p>
+                  </a:txBody>
+                  <a:tcPr>
+                    <a:solidFill>
+                      <a:srgbClr val="FFFFFF"/>
+                    </a:solidFill>
+                  </a:tcPr>
+                </a:tc>
+              </a:tr>
+              <a:tr h="198656">
+                <a:tc>
+                  <a:txBody>
+                    <a:bodyPr/>
+                    <a:lstStyle/>
+                    <a:p>
+                      <a:pPr>
+                        <a:defRPr sz="1300" b="0">
+                          <a:solidFill>
+                            <a:srgbClr val="000000"/>
+                          </a:solidFill>
+                          <a:latin typeface="Play"/>
+                          <a:ea typeface="Play"/>
+                          <a:cs typeface="Play"/>
+                        </a:defRPr>
+                      </a:pPr>
+                      <a:r>
+                        <a:t>Нарушения стиля</a:t>
+                      </a:r>
+                    </a:p>
+                  </a:txBody>
+                  <a:tcPr>
+                    <a:solidFill>
+                      <a:srgbClr val="FFFFFF"/>
+                    </a:solidFill>
+                  </a:tcPr>
+                </a:tc>
+                <a:tc>
+                  <a:txBody>
+                    <a:bodyPr/>
+                    <a:lstStyle/>
+                    <a:p>
+                      <a:pPr>
+                        <a:defRPr sz="1300" b="0">
+                          <a:solidFill>
+                            <a:srgbClr val="000000"/>
+                          </a:solidFill>
+                          <a:latin typeface="Play"/>
+                          <a:ea typeface="Play"/>
+                          <a:cs typeface="Play"/>
+                        </a:defRPr>
+                      </a:pPr>
+                      <a:r>
+                        <a:t>19/42</a:t>
+                      </a:r>
+                    </a:p>
+                  </a:txBody>
+                  <a:tcPr>
+                    <a:solidFill>
+                      <a:srgbClr val="FFFFFF"/>
+                    </a:solidFill>
+                  </a:tcPr>
+                </a:tc>
+              </a:tr>
+              <a:tr h="198656">
+                <a:tc>
+                  <a:txBody>
+                    <a:bodyPr/>
+                    <a:lstStyle/>
+                    <a:p>
+                      <a:pPr>
+                        <a:defRPr sz="1300" b="0">
+                          <a:solidFill>
+                            <a:srgbClr val="000000"/>
+                          </a:solidFill>
+                          <a:latin typeface="Play"/>
+                          <a:ea typeface="Play"/>
+                          <a:cs typeface="Play"/>
+                        </a:defRPr>
+                      </a:pPr>
+                      <a:r>
+                        <a:t>Запросы/неделя</a:t>
+                      </a:r>
+                    </a:p>
+                  </a:txBody>
+                  <a:tcPr>
+                    <a:solidFill>
+                      <a:srgbClr val="FFFFFF"/>
+                    </a:solidFill>
+                  </a:tcPr>
+                </a:tc>
+                <a:tc>
+                  <a:txBody>
+                    <a:bodyPr/>
+                    <a:lstStyle/>
+                    <a:p>
+                      <a:pPr>
+                        <a:defRPr sz="1300" b="0">
+                          <a:solidFill>
+                            <a:srgbClr val="000000"/>
+                          </a:solidFill>
+                          <a:latin typeface="Play"/>
+                          <a:ea typeface="Play"/>
+                          <a:cs typeface="Play"/>
+                        </a:defRPr>
+                      </a:pPr>
+                      <a:r>
+                        <a:t>11/27</a:t>
+                      </a:r>
+                    </a:p>
+                  </a:txBody>
+                  <a:tcPr>
+                    <a:solidFill>
+                      <a:srgbClr val="FFFFFF"/>
+                    </a:solidFill>
+                  </a:tcPr>
+                </a:tc>
+              </a:tr>
+              <a:tr h="198660">
+                <a:tc>
+                  <a:txBody>
+                    <a:bodyPr/>
+                    <a:lstStyle/>
+                    <a:p>
+                      <a:pPr>
+                        <a:defRPr sz="1300" b="0">
+                          <a:solidFill>
+                            <a:srgbClr val="000000"/>
+                          </a:solidFill>
+                          <a:latin typeface="Play"/>
+                          <a:ea typeface="Play"/>
+                          <a:cs typeface="Play"/>
+                        </a:defRPr>
+                      </a:pPr>
+                      <a:r>
+                        <a:t>Время ожидания</a:t>
+                      </a:r>
+                    </a:p>
+                  </a:txBody>
+                  <a:tcPr>
+                    <a:solidFill>
+                      <a:srgbClr val="FFFFFF"/>
+                    </a:solidFill>
+                  </a:tcPr>
+                </a:tc>
+                <a:tc>
+                  <a:txBody>
+                    <a:bodyPr/>
+                    <a:lstStyle/>
+                    <a:p>
+                      <a:pPr>
+                        <a:defRPr sz="1300" b="0">
+                          <a:solidFill>
+                            <a:srgbClr val="000000"/>
+                          </a:solidFill>
+                          <a:latin typeface="Play"/>
+                          <a:ea typeface="Play"/>
+                          <a:cs typeface="Play"/>
+                        </a:defRPr>
+                      </a:pPr>
+                      <a:r>
+                        <a:t>6 дней</a:t>
+                      </a:r>
+                    </a:p>
+                  </a:txBody>
+                  <a:tcPr>
+                    <a:solidFill>
+                      <a:srgbClr val="FFFFFF"/>
+                    </a:solidFill>
+                  </a:tcPr>
+                </a:tc>
+              </a:tr>
+            </a:tbl>
           </a:graphicData>
         </a:graphic>
       </p:graphicFrame>
@@ -7677,7 +8025,7 @@
         <p:spPr>
           <a:xfrm>
             <a:off x="677387" y="692177"/>
-            <a:ext cx="10855878" cy="1447800"/>
+            <a:ext cx="10855878" cy="822960"/>
           </a:xfrm>
           <a:prstGeom prst="rect">
             <a:avLst/>
@@ -7712,7 +8060,7 @@
                 <a:ea typeface="Arial"/>
                 <a:cs typeface="Arial"/>
               </a:rPr>
-              <a:t>Сервис автоматически вёрстит презентации за 4 минуты</a:t>
+              <a:t>Предложение</a:t>
             </a:r>
           </a:p>
         </p:txBody>
@@ -7725,8 +8073,8 @@
         </p:nvSpPr>
         <p:spPr>
           <a:xfrm>
-            <a:off x="677387" y="2277137"/>
-            <a:ext cx="5245059" cy="3923659"/>
+            <a:off x="677387" y="1773204"/>
+            <a:ext cx="5245059" cy="4427593"/>
           </a:xfrm>
           <a:prstGeom prst="rect">
             <a:avLst/>
@@ -7747,9 +8095,9 @@
                 <a:solidFill>
                   <a:srgbClr val="000000"/>
                 </a:solidFill>
-                <a:latin typeface="Arial"/>
-                <a:ea typeface="Arial"/>
-                <a:cs typeface="Arial"/>
+                <a:latin typeface="Play"/>
+                <a:ea typeface="Play"/>
+                <a:cs typeface="Play"/>
               </a:defRPr>
             </a:pPr>
             <a:r>
@@ -7757,11 +8105,11 @@
                 <a:solidFill>
                   <a:srgbClr val="000000"/>
                 </a:solidFill>
-                <a:latin typeface="Arial"/>
-                <a:ea typeface="Arial"/>
-                <a:cs typeface="Arial"/>
+                <a:latin typeface="Play"/>
+                <a:ea typeface="Play"/>
+                <a:cs typeface="Play"/>
               </a:rPr>
-              <a:t>• Принимает шаблон pptx и материалы</a:t>
+              <a:t>• Сервис принимает шаблон pptx и материалы</a:t>
             </a:r>
           </a:p>
           <a:p>
@@ -7773,9 +8121,9 @@
                 <a:solidFill>
                   <a:srgbClr val="000000"/>
                 </a:solidFill>
-                <a:latin typeface="Arial"/>
-                <a:ea typeface="Arial"/>
-                <a:cs typeface="Arial"/>
+                <a:latin typeface="Play"/>
+                <a:ea typeface="Play"/>
+                <a:cs typeface="Play"/>
               </a:defRPr>
             </a:pPr>
             <a:r>
@@ -7783,11 +8131,11 @@
                 <a:solidFill>
                   <a:srgbClr val="000000"/>
                 </a:solidFill>
-                <a:latin typeface="Arial"/>
-                <a:ea typeface="Arial"/>
-                <a:cs typeface="Arial"/>
+                <a:latin typeface="Play"/>
+                <a:ea typeface="Play"/>
+                <a:cs typeface="Play"/>
               </a:rPr>
-              <a:t>• Автоматически формирует план колоды</a:t>
+              <a:t>• Автоматически строит план колоды и вёрстку по дизайн‑системе</a:t>
             </a:r>
           </a:p>
           <a:p>
@@ -7799,9 +8147,9 @@
                 <a:solidFill>
                   <a:srgbClr val="000000"/>
                 </a:solidFill>
-                <a:latin typeface="Arial"/>
-                <a:ea typeface="Arial"/>
-                <a:cs typeface="Arial"/>
+                <a:latin typeface="Play"/>
+                <a:ea typeface="Play"/>
+                <a:cs typeface="Play"/>
               </a:defRPr>
             </a:pPr>
             <a:r>
@@ -7809,11 +8157,37 @@
                 <a:solidFill>
                   <a:srgbClr val="000000"/>
                 </a:solidFill>
-                <a:latin typeface="Arial"/>
-                <a:ea typeface="Arial"/>
-                <a:cs typeface="Arial"/>
+                <a:latin typeface="Play"/>
+                <a:ea typeface="Play"/>
+                <a:cs typeface="Play"/>
               </a:rPr>
-              <a:t>• Экспорт в pptx, pdf, html</a:t>
+              <a:t>• Аудит качества проверяет все цифры и стили</a:t>
+            </a:r>
+          </a:p>
+          <a:p>
+            <a:pPr algn="l">
+              <a:spcAft>
+                <a:spcPts val="300"/>
+              </a:spcAft>
+              <a:defRPr sz="1800">
+                <a:solidFill>
+                  <a:srgbClr val="000000"/>
+                </a:solidFill>
+                <a:latin typeface="Play"/>
+                <a:ea typeface="Play"/>
+                <a:cs typeface="Play"/>
+              </a:defRPr>
+            </a:pPr>
+            <a:r>
+              <a:rPr sz="1800">
+                <a:solidFill>
+                  <a:srgbClr val="000000"/>
+                </a:solidFill>
+                <a:latin typeface="Play"/>
+                <a:ea typeface="Play"/>
+                <a:cs typeface="Play"/>
+              </a:rPr>
+              <a:t>• Экспорт в pptx, pdf и html без картинок</a:t>
             </a:r>
           </a:p>
         </p:txBody>
@@ -7826,8 +8200,8 @@
         </p:nvSpPr>
         <p:spPr>
           <a:xfrm>
-            <a:off x="6288206" y="3929382"/>
-            <a:ext cx="998659" cy="619168"/>
+            <a:off x="6288206" y="1824859"/>
+            <a:ext cx="5245059" cy="634621"/>
           </a:xfrm>
           <a:prstGeom prst="homePlate">
             <a:avLst/>
@@ -7858,25 +8232,25 @@
           <a:lstStyle/>
           <a:p>
             <a:pPr algn="ctr">
-              <a:defRPr sz="629" b="0">
+              <a:defRPr sz="1400" b="0">
                 <a:solidFill>
                   <a:srgbClr val="FFFFFF"/>
                 </a:solidFill>
-                <a:latin typeface="Arial"/>
-                <a:ea typeface="Arial"/>
-                <a:cs typeface="Arial"/>
+                <a:latin typeface="Play"/>
+                <a:ea typeface="Play"/>
+                <a:cs typeface="Play"/>
               </a:defRPr>
             </a:pPr>
             <a:r>
-              <a:rPr sz="629" b="0">
+              <a:rPr sz="1400" b="0">
                 <a:solidFill>
                   <a:srgbClr val="FFFFFF"/>
                 </a:solidFill>
-                <a:latin typeface="Arial"/>
-                <a:ea typeface="Arial"/>
-                <a:cs typeface="Arial"/>
+                <a:latin typeface="Play"/>
+                <a:ea typeface="Play"/>
+                <a:cs typeface="Play"/>
               </a:rPr>
-              <a:t>Шаблон</a:t>
+              <a:t>Ввод шаблона</a:t>
             </a:r>
           </a:p>
         </p:txBody>
@@ -7889,8 +8263,8 @@
         </p:nvSpPr>
         <p:spPr>
           <a:xfrm>
-            <a:off x="7349805" y="3929382"/>
-            <a:ext cx="998659" cy="619168"/>
+            <a:off x="6288206" y="2562791"/>
+            <a:ext cx="5245059" cy="634621"/>
           </a:xfrm>
           <a:prstGeom prst="chevron">
             <a:avLst/>
@@ -7921,25 +8295,25 @@
           <a:lstStyle/>
           <a:p>
             <a:pPr algn="ctr">
-              <a:defRPr sz="943" b="0">
+              <a:defRPr sz="1400" b="0">
                 <a:solidFill>
                   <a:srgbClr val="FFFFFF"/>
                 </a:solidFill>
-                <a:latin typeface="Arial"/>
-                <a:ea typeface="Arial"/>
-                <a:cs typeface="Arial"/>
+                <a:latin typeface="Play"/>
+                <a:ea typeface="Play"/>
+                <a:cs typeface="Play"/>
               </a:defRPr>
             </a:pPr>
             <a:r>
-              <a:rPr sz="943" b="0">
+              <a:rPr sz="1400" b="0">
                 <a:solidFill>
                   <a:srgbClr val="FFFFFF"/>
                 </a:solidFill>
-                <a:latin typeface="Arial"/>
-                <a:ea typeface="Arial"/>
-                <a:cs typeface="Arial"/>
+                <a:latin typeface="Play"/>
+                <a:ea typeface="Play"/>
+                <a:cs typeface="Play"/>
               </a:rPr>
-              <a:t>План</a:t>
+              <a:t>Анализ</a:t>
             </a:r>
           </a:p>
         </p:txBody>
@@ -7952,8 +8326,8 @@
         </p:nvSpPr>
         <p:spPr>
           <a:xfrm>
-            <a:off x="8411405" y="3929382"/>
-            <a:ext cx="998659" cy="619168"/>
+            <a:off x="6288206" y="3300723"/>
+            <a:ext cx="5245059" cy="634621"/>
           </a:xfrm>
           <a:prstGeom prst="chevron">
             <a:avLst/>
@@ -7984,25 +8358,25 @@
           <a:lstStyle/>
           <a:p>
             <a:pPr algn="ctr">
-              <a:defRPr sz="600" b="0">
+              <a:defRPr sz="1400" b="0">
                 <a:solidFill>
                   <a:srgbClr val="FFFFFF"/>
                 </a:solidFill>
-                <a:latin typeface="Arial"/>
-                <a:ea typeface="Arial"/>
-                <a:cs typeface="Arial"/>
+                <a:latin typeface="Play"/>
+                <a:ea typeface="Play"/>
+                <a:cs typeface="Play"/>
               </a:defRPr>
             </a:pPr>
             <a:r>
-              <a:rPr sz="600" b="0">
+              <a:rPr sz="1400" b="0">
                 <a:solidFill>
                   <a:srgbClr val="FFFFFF"/>
                 </a:solidFill>
-                <a:latin typeface="Arial"/>
-                <a:ea typeface="Arial"/>
-                <a:cs typeface="Arial"/>
+                <a:latin typeface="Play"/>
+                <a:ea typeface="Play"/>
+                <a:cs typeface="Play"/>
               </a:rPr>
-              <a:t>Вёрстка</a:t>
+              <a:t>План колоды</a:t>
             </a:r>
           </a:p>
         </p:txBody>
@@ -8015,8 +8389,8 @@
         </p:nvSpPr>
         <p:spPr>
           <a:xfrm>
-            <a:off x="9473005" y="3929382"/>
-            <a:ext cx="998659" cy="619168"/>
+            <a:off x="6288206" y="4038655"/>
+            <a:ext cx="5245059" cy="634621"/>
           </a:xfrm>
           <a:prstGeom prst="chevron">
             <a:avLst/>
@@ -8047,25 +8421,25 @@
           <a:lstStyle/>
           <a:p>
             <a:pPr algn="ctr">
-              <a:defRPr sz="754" b="0">
+              <a:defRPr sz="1400" b="0">
                 <a:solidFill>
                   <a:srgbClr val="FFFFFF"/>
                 </a:solidFill>
-                <a:latin typeface="Arial"/>
-                <a:ea typeface="Arial"/>
-                <a:cs typeface="Arial"/>
+                <a:latin typeface="Play"/>
+                <a:ea typeface="Play"/>
+                <a:cs typeface="Play"/>
               </a:defRPr>
             </a:pPr>
             <a:r>
-              <a:rPr sz="754" b="0">
+              <a:rPr sz="1400" b="0">
                 <a:solidFill>
                   <a:srgbClr val="FFFFFF"/>
                 </a:solidFill>
-                <a:latin typeface="Arial"/>
-                <a:ea typeface="Arial"/>
-                <a:cs typeface="Arial"/>
+                <a:latin typeface="Play"/>
+                <a:ea typeface="Play"/>
+                <a:cs typeface="Play"/>
               </a:rPr>
-              <a:t>Аудит</a:t>
+              <a:t>Вёрстка</a:t>
             </a:r>
           </a:p>
         </p:txBody>
@@ -8078,8 +8452,8 @@
         </p:nvSpPr>
         <p:spPr>
           <a:xfrm>
-            <a:off x="10534605" y="3929382"/>
-            <a:ext cx="998659" cy="619168"/>
+            <a:off x="6288206" y="4776587"/>
+            <a:ext cx="5245059" cy="634621"/>
           </a:xfrm>
           <a:prstGeom prst="chevron">
             <a:avLst/>
@@ -8110,23 +8484,86 @@
           <a:lstStyle/>
           <a:p>
             <a:pPr algn="ctr">
-              <a:defRPr sz="600" b="0">
+              <a:defRPr sz="1400" b="0">
                 <a:solidFill>
                   <a:srgbClr val="FFFFFF"/>
                 </a:solidFill>
-                <a:latin typeface="Arial"/>
-                <a:ea typeface="Arial"/>
-                <a:cs typeface="Arial"/>
+                <a:latin typeface="Play"/>
+                <a:ea typeface="Play"/>
+                <a:cs typeface="Play"/>
               </a:defRPr>
             </a:pPr>
             <a:r>
-              <a:rPr sz="600" b="0">
+              <a:rPr sz="1400" b="0">
                 <a:solidFill>
                   <a:srgbClr val="FFFFFF"/>
                 </a:solidFill>
-                <a:latin typeface="Arial"/>
-                <a:ea typeface="Arial"/>
-                <a:cs typeface="Arial"/>
+                <a:latin typeface="Play"/>
+                <a:ea typeface="Play"/>
+                <a:cs typeface="Play"/>
+              </a:rPr>
+              <a:t>Аудит</a:t>
+            </a:r>
+          </a:p>
+        </p:txBody>
+      </p:sp>
+      <p:sp>
+        <p:nvSpPr>
+          <p:cNvPr id="9" name="Chevron 8"/>
+          <p:cNvSpPr/>
+          <p:nvPr/>
+        </p:nvSpPr>
+        <p:spPr>
+          <a:xfrm>
+            <a:off x="6288206" y="5514520"/>
+            <a:ext cx="5245059" cy="634621"/>
+          </a:xfrm>
+          <a:prstGeom prst="chevron">
+            <a:avLst/>
+          </a:prstGeom>
+          <a:solidFill>
+            <a:srgbClr val="0077FF"/>
+          </a:solidFill>
+          <a:ln>
+            <a:noFill/>
+          </a:ln>
+        </p:spPr>
+        <p:style>
+          <a:lnRef idx="1">
+            <a:schemeClr val="accent1"/>
+          </a:lnRef>
+          <a:fillRef idx="3">
+            <a:schemeClr val="accent1"/>
+          </a:fillRef>
+          <a:effectRef idx="2">
+            <a:schemeClr val="accent1"/>
+          </a:effectRef>
+          <a:fontRef idx="minor">
+            <a:schemeClr val="lt1"/>
+          </a:fontRef>
+        </p:style>
+        <p:txBody>
+          <a:bodyPr rtlCol="0" anchor="ctr" wrap="square" lIns="12700" rIns="12700" tIns="12700" bIns="12700"/>
+          <a:lstStyle/>
+          <a:p>
+            <a:pPr algn="ctr">
+              <a:defRPr sz="1400" b="0">
+                <a:solidFill>
+                  <a:srgbClr val="FFFFFF"/>
+                </a:solidFill>
+                <a:latin typeface="Play"/>
+                <a:ea typeface="Play"/>
+                <a:cs typeface="Play"/>
+              </a:defRPr>
+            </a:pPr>
+            <a:r>
+              <a:rPr sz="1400" b="0">
+                <a:solidFill>
+                  <a:srgbClr val="FFFFFF"/>
+                </a:solidFill>
+                <a:latin typeface="Play"/>
+                <a:ea typeface="Play"/>
+                <a:cs typeface="Play"/>
               </a:rPr>
               <a:t>Экспорт</a:t>
             </a:r>
@@ -8167,7 +8604,7 @@
         <p:spPr>
           <a:xfrm>
             <a:off x="677387" y="692177"/>
-            <a:ext cx="10855878" cy="1447800"/>
+            <a:ext cx="10855878" cy="822960"/>
           </a:xfrm>
           <a:prstGeom prst="rect">
             <a:avLst/>
@@ -8202,7 +8639,7 @@
                 <a:ea typeface="Arial"/>
                 <a:cs typeface="Arial"/>
               </a:rPr>
-              <a:t>Пилот сократил время сборки до 4 минут</a:t>
+              <a:t>Ожидаемый эффект</a:t>
             </a:r>
           </a:p>
         </p:txBody>
@@ -8215,8 +8652,8 @@
         </p:nvSpPr>
         <p:spPr>
           <a:xfrm>
-            <a:off x="677387" y="2277137"/>
-            <a:ext cx="5245059" cy="3923659"/>
+            <a:off x="677387" y="1773204"/>
+            <a:ext cx="5245059" cy="4427593"/>
           </a:xfrm>
           <a:prstGeom prst="rect">
             <a:avLst/>
@@ -8237,9 +8674,9 @@
                 <a:solidFill>
                   <a:srgbClr val="000000"/>
                 </a:solidFill>
-                <a:latin typeface="Arial"/>
-                <a:ea typeface="Arial"/>
-                <a:cs typeface="Arial"/>
+                <a:latin typeface="Play"/>
+                <a:ea typeface="Play"/>
+                <a:cs typeface="Play"/>
               </a:defRPr>
             </a:pPr>
             <a:r>
@@ -8247,11 +8684,11 @@
                 <a:solidFill>
                   <a:srgbClr val="000000"/>
                 </a:solidFill>
-                <a:latin typeface="Arial"/>
-                <a:ea typeface="Arial"/>
-                <a:cs typeface="Arial"/>
+                <a:latin typeface="Play"/>
+                <a:ea typeface="Play"/>
+                <a:cs typeface="Play"/>
               </a:rPr>
-              <a:t>• Среднее время 4 минуты вместо 186</a:t>
+              <a:t>• Средняя сборка колоды 4 минуты вместо 186</a:t>
             </a:r>
           </a:p>
           <a:p>
@@ -8263,9 +8700,9 @@
                 <a:solidFill>
                   <a:srgbClr val="000000"/>
                 </a:solidFill>
-                <a:latin typeface="Arial"/>
-                <a:ea typeface="Arial"/>
-                <a:cs typeface="Arial"/>
+                <a:latin typeface="Play"/>
+                <a:ea typeface="Play"/>
+                <a:cs typeface="Play"/>
               </a:defRPr>
             </a:pPr>
             <a:r>
@@ -8273,11 +8710,11 @@
                 <a:solidFill>
                   <a:srgbClr val="000000"/>
                 </a:solidFill>
-                <a:latin typeface="Arial"/>
-                <a:ea typeface="Arial"/>
-                <a:cs typeface="Arial"/>
+                <a:latin typeface="Play"/>
+                <a:ea typeface="Play"/>
+                <a:cs typeface="Play"/>
               </a:rPr>
-              <a:t>• Срок до первой версии сократился с 6 дней до 1</a:t>
+              <a:t>• Время до первой версии сократилось с 6 дней до 1</a:t>
             </a:r>
           </a:p>
           <a:p>
@@ -8289,9 +8726,9 @@
                 <a:solidFill>
                   <a:srgbClr val="000000"/>
                 </a:solidFill>
-                <a:latin typeface="Arial"/>
-                <a:ea typeface="Arial"/>
-                <a:cs typeface="Arial"/>
+                <a:latin typeface="Play"/>
+                <a:ea typeface="Play"/>
+                <a:cs typeface="Play"/>
               </a:defRPr>
             </a:pPr>
             <a:r>
@@ -8299,11 +8736,37 @@
                 <a:solidFill>
                   <a:srgbClr val="000000"/>
                 </a:solidFill>
-                <a:latin typeface="Arial"/>
-                <a:ea typeface="Arial"/>
-                <a:cs typeface="Arial"/>
+                <a:latin typeface="Play"/>
+                <a:ea typeface="Play"/>
+                <a:cs typeface="Play"/>
               </a:rPr>
-              <a:t>• Нарушений стиля 2 из 68</a:t>
+              <a:t>• Нарушения фирменного стиля снизились до 2 из 68</a:t>
+            </a:r>
+          </a:p>
+          <a:p>
+            <a:pPr algn="l">
+              <a:spcAft>
+                <a:spcPts val="300"/>
+              </a:spcAft>
+              <a:defRPr sz="1600">
+                <a:solidFill>
+                  <a:srgbClr val="000000"/>
+                </a:solidFill>
+                <a:latin typeface="Play"/>
+                <a:ea typeface="Play"/>
+                <a:cs typeface="Play"/>
+              </a:defRPr>
+            </a:pPr>
+            <a:r>
+              <a:rPr sz="1600">
+                <a:solidFill>
+                  <a:srgbClr val="000000"/>
+                </a:solidFill>
+                <a:latin typeface="Play"/>
+                <a:ea typeface="Play"/>
+                <a:cs typeface="Play"/>
+              </a:rPr>
+              <a:t>• Дизайнеры закрыли 38 запросов вместо 11 в неделю</a:t>
             </a:r>
           </a:p>
         </p:txBody>
@@ -8317,8 +8780,8 @@
           <p:nvPr/>
         </p:nvGraphicFramePr>
         <p:xfrm>
-          <a:off x="6288206" y="2277137"/>
-          <a:ext cx="5245059" cy="3923659"/>
+          <a:off x="6288206" y="1773204"/>
+          <a:ext cx="5245059" cy="4427593"/>
         </p:xfrm>
         <a:graphic>
           <a:graphicData uri="http://schemas.openxmlformats.org/drawingml/2006/chart">
@@ -8335,6 +8798,614 @@
 </file>
 
 <file path=ppt/slides/slide60.xml><?xml version="1.0" encoding="utf-8"?>
+<p:sld xmlns:a="http://schemas.openxmlformats.org/drawingml/2006/main" xmlns:p="http://schemas.openxmlformats.org/presentationml/2006/main" xmlns:r="http://schemas.openxmlformats.org/officeDocument/2006/relationships">
+  <p:cSld>
+    <p:spTree>
+      <p:nvGrpSpPr>
+        <p:cNvPr id="1" name=""/>
+        <p:cNvGrpSpPr/>
+        <p:nvPr/>
+      </p:nvGrpSpPr>
+      <p:grpSpPr/>
+      <p:cxnSp>
+        <p:nvCxnSpPr>
+          <p:cNvPr id="918" name="Google Shape;918;p74"/>
+          <p:cNvCxnSpPr/>
+          <p:nvPr/>
+        </p:nvCxnSpPr>
+        <p:spPr>
+          <a:xfrm rot="10800000">
+            <a:off x="658813" y="2199500"/>
+            <a:ext cx="11533187" cy="0"/>
+          </a:xfrm>
+          <a:prstGeom prst="straightConnector1">
+            <a:avLst/>
+          </a:prstGeom>
+          <a:noFill/>
+          <a:ln cap="flat" cmpd="sng" w="19050">
+            <a:solidFill>
+              <a:schemeClr val="accent4"/>
+            </a:solidFill>
+            <a:prstDash val="solid"/>
+            <a:miter lim="8000"/>
+            <a:headEnd len="sm" w="sm" type="none"/>
+            <a:tailEnd len="sm" w="sm" type="none"/>
+          </a:ln>
+        </p:spPr>
+      </p:cxnSp>
+      <p:cxnSp>
+        <p:nvCxnSpPr>
+          <p:cNvPr id="919" name="Google Shape;919;p74"/>
+          <p:cNvCxnSpPr/>
+          <p:nvPr/>
+        </p:nvCxnSpPr>
+        <p:spPr>
+          <a:xfrm flipH="1">
+            <a:off x="1" y="4351265"/>
+            <a:ext cx="8112124" cy="42098"/>
+          </a:xfrm>
+          <a:prstGeom prst="straightConnector1">
+            <a:avLst/>
+          </a:prstGeom>
+          <a:noFill/>
+          <a:ln cap="flat" cmpd="sng" w="19050">
+            <a:solidFill>
+              <a:schemeClr val="accent4"/>
+            </a:solidFill>
+            <a:prstDash val="solid"/>
+            <a:miter lim="8000"/>
+            <a:headEnd len="lg" w="lg" type="stealth"/>
+            <a:tailEnd len="sm" w="sm" type="none"/>
+          </a:ln>
+        </p:spPr>
+      </p:cxnSp>
+      <p:sp>
+        <p:nvSpPr>
+          <p:cNvPr id="920" name="title"/>
+          <p:cNvSpPr txBox="1"/>
+          <p:nvPr/>
+        </p:nvSpPr>
+        <p:spPr>
+          <a:xfrm>
+            <a:off x="677387" y="692177"/>
+            <a:ext cx="10855878" cy="822960"/>
+          </a:xfrm>
+          <a:prstGeom prst="rect">
+            <a:avLst/>
+          </a:prstGeom>
+          <a:noFill/>
+        </p:spPr>
+        <p:txBody>
+          <a:bodyPr wrap="square" lIns="76200" rIns="76200" tIns="50800" bIns="50800">
+            <a:spAutoFit/>
+          </a:bodyPr>
+          <a:lstStyle/>
+          <a:p>
+            <a:pPr algn="l">
+              <a:spcAft>
+                <a:spcPts val="300"/>
+              </a:spcAft>
+              <a:defRPr sz="4000">
+                <a:solidFill>
+                  <a:srgbClr val="000000"/>
+                </a:solidFill>
+                <a:latin typeface="Arial"/>
+                <a:ea typeface="Arial"/>
+                <a:cs typeface="Arial"/>
+              </a:defRPr>
+            </a:pPr>
+            <a:r>
+              <a:rPr sz="4000">
+                <a:solidFill>
+                  <a:srgbClr val="000000"/>
+                </a:solidFill>
+                <a:latin typeface="Arial"/>
+                <a:ea typeface="Arial"/>
+                <a:cs typeface="Arial"/>
+              </a:rPr>
+              <a:t>Ресурсы и сроки</a:t>
+            </a:r>
+          </a:p>
+        </p:txBody>
+      </p:sp>
+      <p:sp>
+        <p:nvSpPr>
+          <p:cNvPr id="921" name="body"/>
+          <p:cNvSpPr txBox="1"/>
+          <p:nvPr/>
+        </p:nvSpPr>
+        <p:spPr>
+          <a:xfrm>
+            <a:off x="677387" y="2200937"/>
+            <a:ext cx="5245059" cy="2150325"/>
+          </a:xfrm>
+          <a:prstGeom prst="rect">
+            <a:avLst/>
+          </a:prstGeom>
+          <a:noFill/>
+        </p:spPr>
+        <p:txBody>
+          <a:bodyPr wrap="square" lIns="76200" rIns="76200" tIns="50800" bIns="50800">
+            <a:spAutoFit/>
+          </a:bodyPr>
+          <a:lstStyle/>
+          <a:p>
+            <a:pPr algn="l">
+              <a:spcAft>
+                <a:spcPts val="300"/>
+              </a:spcAft>
+              <a:defRPr sz="1600">
+                <a:solidFill>
+                  <a:srgbClr val="000000"/>
+                </a:solidFill>
+                <a:latin typeface="Play"/>
+                <a:ea typeface="Play"/>
+                <a:cs typeface="Play"/>
+              </a:defRPr>
+            </a:pPr>
+            <a:r>
+              <a:rPr sz="1600">
+                <a:solidFill>
+                  <a:srgbClr val="000000"/>
+                </a:solidFill>
+                <a:latin typeface="Play"/>
+                <a:ea typeface="Play"/>
+                <a:cs typeface="Play"/>
+              </a:rPr>
+              <a:t>• 2 vCPU / 2 ГБ RAM</a:t>
+            </a:r>
+          </a:p>
+          <a:p>
+            <a:pPr algn="l">
+              <a:spcAft>
+                <a:spcPts val="300"/>
+              </a:spcAft>
+              <a:defRPr sz="1600">
+                <a:solidFill>
+                  <a:srgbClr val="000000"/>
+                </a:solidFill>
+                <a:latin typeface="Play"/>
+                <a:ea typeface="Play"/>
+                <a:cs typeface="Play"/>
+              </a:defRPr>
+            </a:pPr>
+            <a:r>
+              <a:rPr sz="1600">
+                <a:solidFill>
+                  <a:srgbClr val="000000"/>
+                </a:solidFill>
+                <a:latin typeface="Play"/>
+                <a:ea typeface="Play"/>
+                <a:cs typeface="Play"/>
+              </a:rPr>
+              <a:t>• gpt-oss-20b подключен протоколу</a:t>
+            </a:r>
+          </a:p>
+          <a:p>
+            <a:pPr algn="l">
+              <a:spcAft>
+                <a:spcPts val="300"/>
+              </a:spcAft>
+              <a:defRPr sz="1600">
+                <a:solidFill>
+                  <a:srgbClr val="000000"/>
+                </a:solidFill>
+                <a:latin typeface="Play"/>
+                <a:ea typeface="Play"/>
+                <a:cs typeface="Play"/>
+              </a:defRPr>
+            </a:pPr>
+            <a:r>
+              <a:rPr sz="1600">
+                <a:solidFill>
+                  <a:srgbClr val="000000"/>
+                </a:solidFill>
+                <a:latin typeface="Play"/>
+                <a:ea typeface="Play"/>
+                <a:cs typeface="Play"/>
+              </a:rPr>
+              <a:t>• Инференс 6 недель 1 400 руб.</a:t>
+            </a:r>
+          </a:p>
+          <a:p>
+            <a:pPr algn="l">
+              <a:spcAft>
+                <a:spcPts val="300"/>
+              </a:spcAft>
+              <a:defRPr sz="1600">
+                <a:solidFill>
+                  <a:srgbClr val="000000"/>
+                </a:solidFill>
+                <a:latin typeface="Play"/>
+                <a:ea typeface="Play"/>
+                <a:cs typeface="Play"/>
+              </a:defRPr>
+            </a:pPr>
+            <a:r>
+              <a:rPr sz="1600">
+                <a:solidFill>
+                  <a:srgbClr val="000000"/>
+                </a:solidFill>
+                <a:latin typeface="Play"/>
+                <a:ea typeface="Play"/>
+                <a:cs typeface="Play"/>
+              </a:rPr>
+              <a:t>• Квартал 2026: 4 команды, домен, HTTPS</a:t>
+            </a:r>
+          </a:p>
+          <a:p>
+            <a:pPr algn="l">
+              <a:spcAft>
+                <a:spcPts val="300"/>
+              </a:spcAft>
+              <a:defRPr sz="1600">
+                <a:solidFill>
+                  <a:srgbClr val="000000"/>
+                </a:solidFill>
+                <a:latin typeface="Play"/>
+                <a:ea typeface="Play"/>
+                <a:cs typeface="Play"/>
+              </a:defRPr>
+            </a:pPr>
+            <a:r>
+              <a:rPr sz="1600">
+                <a:solidFill>
+                  <a:srgbClr val="000000"/>
+                </a:solidFill>
+                <a:latin typeface="Play"/>
+                <a:ea typeface="Play"/>
+                <a:cs typeface="Play"/>
+              </a:rPr>
+              <a:t>• Квартал 2026: доступ, интеграция хранилища</a:t>
+            </a:r>
+          </a:p>
+          <a:p>
+            <a:pPr algn="l">
+              <a:spcAft>
+                <a:spcPts val="300"/>
+              </a:spcAft>
+              <a:defRPr sz="1600">
+                <a:solidFill>
+                  <a:srgbClr val="000000"/>
+                </a:solidFill>
+                <a:latin typeface="Play"/>
+                <a:ea typeface="Play"/>
+                <a:cs typeface="Play"/>
+              </a:defRPr>
+            </a:pPr>
+            <a:r>
+              <a:rPr sz="1600">
+                <a:solidFill>
+                  <a:srgbClr val="000000"/>
+                </a:solidFill>
+                <a:latin typeface="Play"/>
+                <a:ea typeface="Play"/>
+                <a:cs typeface="Play"/>
+              </a:rPr>
+              <a:t>• 2027: генерация иллюстраций в стиле шаблона</a:t>
+            </a:r>
+          </a:p>
+        </p:txBody>
+      </p:sp>
+      <p:sp>
+        <p:nvSpPr>
+          <p:cNvPr id="922" name="Rectangle 921"/>
+          <p:cNvSpPr/>
+          <p:nvPr/>
+        </p:nvSpPr>
+        <p:spPr>
+          <a:xfrm>
+            <a:off x="6288206" y="3190086"/>
+            <a:ext cx="5245059" cy="64509"/>
+          </a:xfrm>
+          <a:prstGeom prst="rect">
+            <a:avLst/>
+          </a:prstGeom>
+          <a:solidFill>
+            <a:srgbClr val="0077FF"/>
+          </a:solidFill>
+          <a:ln>
+            <a:noFill/>
+          </a:ln>
+        </p:spPr>
+        <p:style>
+          <a:lnRef idx="1">
+            <a:schemeClr val="accent1"/>
+          </a:lnRef>
+          <a:fillRef idx="3">
+            <a:schemeClr val="accent1"/>
+          </a:fillRef>
+          <a:effectRef idx="2">
+            <a:schemeClr val="accent1"/>
+          </a:effectRef>
+          <a:fontRef idx="minor">
+            <a:schemeClr val="lt1"/>
+          </a:fontRef>
+        </p:style>
+        <p:txBody>
+          <a:bodyPr rtlCol="0" anchor="ctr"/>
+          <a:lstStyle/>
+          <a:p>
+            <a:pPr algn="ctr"/>
+          </a:p>
+        </p:txBody>
+      </p:sp>
+      <p:sp>
+        <p:nvSpPr>
+          <p:cNvPr id="923" name="Oval 922"/>
+          <p:cNvSpPr/>
+          <p:nvPr/>
+        </p:nvSpPr>
+        <p:spPr>
+          <a:xfrm>
+            <a:off x="6925846" y="2985805"/>
+            <a:ext cx="473071" cy="473071"/>
+          </a:xfrm>
+          <a:prstGeom prst="ellipse">
+            <a:avLst/>
+          </a:prstGeom>
+          <a:solidFill>
+            <a:srgbClr val="0077FF"/>
+          </a:solidFill>
+          <a:ln>
+            <a:noFill/>
+          </a:ln>
+        </p:spPr>
+        <p:style>
+          <a:lnRef idx="1">
+            <a:schemeClr val="accent1"/>
+          </a:lnRef>
+          <a:fillRef idx="3">
+            <a:schemeClr val="accent1"/>
+          </a:fillRef>
+          <a:effectRef idx="2">
+            <a:schemeClr val="accent1"/>
+          </a:effectRef>
+          <a:fontRef idx="minor">
+            <a:schemeClr val="lt1"/>
+          </a:fontRef>
+        </p:style>
+        <p:txBody>
+          <a:bodyPr rtlCol="0" anchor="ctr"/>
+          <a:lstStyle/>
+          <a:p>
+            <a:pPr algn="ctr"/>
+          </a:p>
+        </p:txBody>
+      </p:sp>
+      <p:sp>
+        <p:nvSpPr>
+          <p:cNvPr id="924" name="TextBox 923"/>
+          <p:cNvSpPr txBox="1"/>
+          <p:nvPr/>
+        </p:nvSpPr>
+        <p:spPr>
+          <a:xfrm>
+            <a:off x="6288206" y="2200937"/>
+            <a:ext cx="2622529" cy="817123"/>
+          </a:xfrm>
+          <a:prstGeom prst="rect">
+            <a:avLst/>
+          </a:prstGeom>
+          <a:noFill/>
+        </p:spPr>
+        <p:txBody>
+          <a:bodyPr wrap="square" lIns="12700" rIns="12700" tIns="12700" bIns="12700">
+            <a:spAutoFit/>
+          </a:bodyPr>
+          <a:lstStyle/>
+          <a:p>
+            <a:pPr algn="ctr">
+              <a:defRPr sz="1400" b="0">
+                <a:solidFill>
+                  <a:srgbClr val="000000"/>
+                </a:solidFill>
+                <a:latin typeface="Play"/>
+                <a:ea typeface="Play"/>
+                <a:cs typeface="Play"/>
+              </a:defRPr>
+            </a:pPr>
+            <a:r>
+              <a:rPr sz="1400" b="0">
+                <a:solidFill>
+                  <a:srgbClr val="000000"/>
+                </a:solidFill>
+                <a:latin typeface="Play"/>
+                <a:ea typeface="Play"/>
+                <a:cs typeface="Play"/>
+              </a:rPr>
+              <a:t>Третий квартал 2026</a:t>
+            </a:r>
+          </a:p>
+        </p:txBody>
+      </p:sp>
+      <p:sp>
+        <p:nvSpPr>
+          <p:cNvPr id="925" name="Oval 924"/>
+          <p:cNvSpPr/>
+          <p:nvPr/>
+        </p:nvSpPr>
+        <p:spPr>
+          <a:xfrm>
+            <a:off x="8674199" y="2985805"/>
+            <a:ext cx="473071" cy="473071"/>
+          </a:xfrm>
+          <a:prstGeom prst="ellipse">
+            <a:avLst/>
+          </a:prstGeom>
+          <a:solidFill>
+            <a:srgbClr val="0077FF"/>
+          </a:solidFill>
+          <a:ln>
+            <a:noFill/>
+          </a:ln>
+        </p:spPr>
+        <p:style>
+          <a:lnRef idx="1">
+            <a:schemeClr val="accent1"/>
+          </a:lnRef>
+          <a:fillRef idx="3">
+            <a:schemeClr val="accent1"/>
+          </a:fillRef>
+          <a:effectRef idx="2">
+            <a:schemeClr val="accent1"/>
+          </a:effectRef>
+          <a:fontRef idx="minor">
+            <a:schemeClr val="lt1"/>
+          </a:fontRef>
+        </p:style>
+        <p:txBody>
+          <a:bodyPr rtlCol="0" anchor="ctr"/>
+          <a:lstStyle/>
+          <a:p>
+            <a:pPr algn="ctr"/>
+          </a:p>
+        </p:txBody>
+      </p:sp>
+      <p:sp>
+        <p:nvSpPr>
+          <p:cNvPr id="926" name="TextBox 925"/>
+          <p:cNvSpPr txBox="1"/>
+          <p:nvPr/>
+        </p:nvSpPr>
+        <p:spPr>
+          <a:xfrm>
+            <a:off x="7599470" y="3663158"/>
+            <a:ext cx="2622529" cy="817123"/>
+          </a:xfrm>
+          <a:prstGeom prst="rect">
+            <a:avLst/>
+          </a:prstGeom>
+          <a:noFill/>
+        </p:spPr>
+        <p:txBody>
+          <a:bodyPr wrap="square" lIns="12700" rIns="12700" tIns="12700" bIns="12700">
+            <a:spAutoFit/>
+          </a:bodyPr>
+          <a:lstStyle/>
+          <a:p>
+            <a:pPr algn="ctr">
+              <a:defRPr sz="1400" b="0">
+                <a:solidFill>
+                  <a:srgbClr val="000000"/>
+                </a:solidFill>
+                <a:latin typeface="Play"/>
+                <a:ea typeface="Play"/>
+                <a:cs typeface="Play"/>
+              </a:defRPr>
+            </a:pPr>
+            <a:r>
+              <a:rPr sz="1400" b="0">
+                <a:solidFill>
+                  <a:srgbClr val="000000"/>
+                </a:solidFill>
+                <a:latin typeface="Play"/>
+                <a:ea typeface="Play"/>
+                <a:cs typeface="Play"/>
+              </a:rPr>
+              <a:t>Четвёртый квартал 2026</a:t>
+            </a:r>
+          </a:p>
+        </p:txBody>
+      </p:sp>
+      <p:sp>
+        <p:nvSpPr>
+          <p:cNvPr id="927" name="Oval 926"/>
+          <p:cNvSpPr/>
+          <p:nvPr/>
+        </p:nvSpPr>
+        <p:spPr>
+          <a:xfrm>
+            <a:off x="10422552" y="2985805"/>
+            <a:ext cx="473071" cy="473071"/>
+          </a:xfrm>
+          <a:prstGeom prst="ellipse">
+            <a:avLst/>
+          </a:prstGeom>
+          <a:solidFill>
+            <a:srgbClr val="0077FF"/>
+          </a:solidFill>
+          <a:ln>
+            <a:noFill/>
+          </a:ln>
+        </p:spPr>
+        <p:style>
+          <a:lnRef idx="1">
+            <a:schemeClr val="accent1"/>
+          </a:lnRef>
+          <a:fillRef idx="3">
+            <a:schemeClr val="accent1"/>
+          </a:fillRef>
+          <a:effectRef idx="2">
+            <a:schemeClr val="accent1"/>
+          </a:effectRef>
+          <a:fontRef idx="minor">
+            <a:schemeClr val="lt1"/>
+          </a:fontRef>
+        </p:style>
+        <p:txBody>
+          <a:bodyPr rtlCol="0" anchor="ctr"/>
+          <a:lstStyle/>
+          <a:p>
+            <a:pPr algn="ctr"/>
+          </a:p>
+        </p:txBody>
+      </p:sp>
+      <p:sp>
+        <p:nvSpPr>
+          <p:cNvPr id="928" name="TextBox 927"/>
+          <p:cNvSpPr txBox="1"/>
+          <p:nvPr/>
+        </p:nvSpPr>
+        <p:spPr>
+          <a:xfrm>
+            <a:off x="8910735" y="2200937"/>
+            <a:ext cx="2622529" cy="817123"/>
+          </a:xfrm>
+          <a:prstGeom prst="rect">
+            <a:avLst/>
+          </a:prstGeom>
+          <a:noFill/>
+        </p:spPr>
+        <p:txBody>
+          <a:bodyPr wrap="square" lIns="12700" rIns="12700" tIns="12700" bIns="12700">
+            <a:spAutoFit/>
+          </a:bodyPr>
+          <a:lstStyle/>
+          <a:p>
+            <a:pPr algn="ctr">
+              <a:defRPr sz="1400" b="0">
+                <a:solidFill>
+                  <a:srgbClr val="000000"/>
+                </a:solidFill>
+                <a:latin typeface="Play"/>
+                <a:ea typeface="Play"/>
+                <a:cs typeface="Play"/>
+              </a:defRPr>
+            </a:pPr>
+            <a:r>
+              <a:rPr sz="1400" b="0">
+                <a:solidFill>
+                  <a:srgbClr val="000000"/>
+                </a:solidFill>
+                <a:latin typeface="Play"/>
+                <a:ea typeface="Play"/>
+                <a:cs typeface="Play"/>
+              </a:rPr>
+              <a:t>Первый квартал 2027</a:t>
+            </a:r>
+          </a:p>
+        </p:txBody>
+      </p:sp>
+    </p:spTree>
+  </p:cSld>
+  <p:clrMapOvr>
+    <a:masterClrMapping/>
+  </p:clrMapOvr>
+</p:sld>
+</file>
+
+<file path=ppt/slides/slide61.xml><?xml version="1.0" encoding="utf-8"?>
 <p:sld xmlns:a="http://schemas.openxmlformats.org/drawingml/2006/main" xmlns:p="http://schemas.openxmlformats.org/presentationml/2006/main" xmlns:r="http://schemas.openxmlformats.org/officeDocument/2006/relationships">
   <p:cSld>
     <p:bg>
@@ -8417,7 +9488,7 @@
         <p:spPr>
           <a:xfrm>
             <a:off x="677387" y="692177"/>
-            <a:ext cx="10855878" cy="1447800"/>
+            <a:ext cx="10855878" cy="822960"/>
           </a:xfrm>
           <a:prstGeom prst="rect">
             <a:avLst/>
@@ -8452,7 +9523,7 @@
                 <a:ea typeface="Arial"/>
                 <a:cs typeface="Arial"/>
               </a:rPr>
-              <a:t>Для запуска требуется 2 vCPU, 2 ГБ RAM и 1 400 руб. за инференс</a:t>
+              <a:t>План пилота</a:t>
             </a:r>
           </a:p>
         </p:txBody>
@@ -8465,8 +9536,8 @@
         </p:nvSpPr>
         <p:spPr>
           <a:xfrm>
-            <a:off x="677387" y="3695391"/>
-            <a:ext cx="10855878" cy="894080"/>
+            <a:off x="677387" y="3080711"/>
+            <a:ext cx="10855878" cy="1488440"/>
           </a:xfrm>
           <a:prstGeom prst="rect">
             <a:avLst/>
@@ -8483,25 +9554,25 @@
               <a:spcAft>
                 <a:spcPts val="300"/>
               </a:spcAft>
-              <a:defRPr sz="1600">
+              <a:defRPr sz="2800">
                 <a:solidFill>
                   <a:srgbClr val="000000"/>
                 </a:solidFill>
-                <a:latin typeface="Arial"/>
-                <a:ea typeface="Arial"/>
-                <a:cs typeface="Arial"/>
+                <a:latin typeface="Play"/>
+                <a:ea typeface="Play"/>
+                <a:cs typeface="Play"/>
               </a:defRPr>
             </a:pPr>
             <a:r>
-              <a:rPr sz="1600">
+              <a:rPr sz="2800">
                 <a:solidFill>
                   <a:srgbClr val="000000"/>
                 </a:solidFill>
-                <a:latin typeface="Arial"/>
-                <a:ea typeface="Arial"/>
-                <a:cs typeface="Arial"/>
+                <a:latin typeface="Play"/>
+                <a:ea typeface="Play"/>
+                <a:cs typeface="Play"/>
               </a:rPr>
-              <a:t>• Сервис работает на одной машине</a:t>
+              <a:t>• Пилот шёл 6 недель на двух командах</a:t>
             </a:r>
           </a:p>
           <a:p>
@@ -8509,25 +9580,25 @@
               <a:spcAft>
                 <a:spcPts val="300"/>
               </a:spcAft>
-              <a:defRPr sz="1600">
+              <a:defRPr sz="2800">
                 <a:solidFill>
                   <a:srgbClr val="000000"/>
                 </a:solidFill>
-                <a:latin typeface="Arial"/>
-                <a:ea typeface="Arial"/>
-                <a:cs typeface="Arial"/>
+                <a:latin typeface="Play"/>
+                <a:ea typeface="Play"/>
+                <a:cs typeface="Play"/>
               </a:defRPr>
             </a:pPr>
             <a:r>
-              <a:rPr sz="1600">
+              <a:rPr sz="2800">
                 <a:solidFill>
                   <a:srgbClr val="000000"/>
                 </a:solidFill>
-                <a:latin typeface="Arial"/>
-                <a:ea typeface="Arial"/>
-                <a:cs typeface="Arial"/>
+                <a:latin typeface="Play"/>
+                <a:ea typeface="Play"/>
+                <a:cs typeface="Play"/>
               </a:rPr>
-              <a:t>• Модель gpt-oss-20b подключается по OpenAI</a:t>
+              <a:t>• Собрано 68 презентаций</a:t>
             </a:r>
           </a:p>
           <a:p>
@@ -8535,257 +9606,25 @@
               <a:spcAft>
                 <a:spcPts val="300"/>
               </a:spcAft>
-              <a:defRPr sz="1600">
+              <a:defRPr sz="2800">
                 <a:solidFill>
                   <a:srgbClr val="000000"/>
                 </a:solidFill>
-                <a:latin typeface="Arial"/>
-                <a:ea typeface="Arial"/>
-                <a:cs typeface="Arial"/>
+                <a:latin typeface="Play"/>
+                <a:ea typeface="Play"/>
+                <a:cs typeface="Play"/>
               </a:defRPr>
             </a:pPr>
             <a:r>
-              <a:rPr sz="1600">
+              <a:rPr sz="2800">
                 <a:solidFill>
                   <a:srgbClr val="000000"/>
                 </a:solidFill>
-                <a:latin typeface="Arial"/>
-                <a:ea typeface="Arial"/>
-                <a:cs typeface="Arial"/>
+                <a:latin typeface="Play"/>
+                <a:ea typeface="Play"/>
+                <a:cs typeface="Play"/>
               </a:rPr>
-              <a:t>• План запуска: Q3 2026 подключить 4 команды</a:t>
-            </a:r>
-          </a:p>
-        </p:txBody>
-      </p:sp>
-    </p:spTree>
-  </p:cSld>
-  <p:clrMapOvr>
-    <a:masterClrMapping/>
-  </p:clrMapOvr>
-</p:sld>
-</file>
-
-<file path=ppt/slides/slide61.xml><?xml version="1.0" encoding="utf-8"?>
-<p:sld xmlns:a="http://schemas.openxmlformats.org/drawingml/2006/main" xmlns:p="http://schemas.openxmlformats.org/presentationml/2006/main" xmlns:r="http://schemas.openxmlformats.org/officeDocument/2006/relationships">
-  <p:cSld>
-    <p:bg>
-      <p:bgPr>
-        <a:solidFill>
-          <a:schemeClr val="lt2"/>
-        </a:solidFill>
-      </p:bgPr>
-    </p:bg>
-    <p:spTree>
-      <p:nvGrpSpPr>
-        <p:cNvPr id="1" name=""/>
-        <p:cNvGrpSpPr/>
-        <p:nvPr/>
-      </p:nvGrpSpPr>
-      <p:grpSpPr/>
-      <p:sp>
-        <p:nvSpPr>
-          <p:cNvPr id="764" name="Google Shape;764;p58"/>
-          <p:cNvSpPr txBox="1"/>
-          <p:nvPr/>
-        </p:nvSpPr>
-        <p:spPr>
-          <a:xfrm>
-            <a:off x="18692059" y="4674436"/>
-            <a:ext cx="4304330" cy="678198"/>
-          </a:xfrm>
-          <a:prstGeom prst="rect">
-            <a:avLst/>
-          </a:prstGeom>
-          <a:noFill/>
-          <a:ln>
-            <a:noFill/>
-          </a:ln>
-        </p:spPr>
-        <p:txBody>
-          <a:bodyPr anchorCtr="0" anchor="t" bIns="45700" lIns="91425" spcFirstLastPara="1" rIns="91425" wrap="square" tIns="45700">
-            <a:noAutofit/>
-          </a:bodyPr>
-          <a:lstStyle/>
-          <a:p>
-            <a:pPr indent="0" lvl="0" marL="0" marR="0" rtl="0" algn="l">
-              <a:lnSpc>
-                <a:spcPct val="110000"/>
-              </a:lnSpc>
-              <a:spcBef>
-                <a:spcPts val="0"/>
-              </a:spcBef>
-              <a:spcAft>
-                <a:spcPts val="0"/>
-              </a:spcAft>
-              <a:buClr>
-                <a:schemeClr val="dk1"/>
-              </a:buClr>
-              <a:buSzPts val="1600"/>
-              <a:buFont typeface="Arial"/>
-              <a:buNone/>
-            </a:pPr>
-            <a:r>
-              <a:t/>
-            </a:r>
-            <a:endParaRPr sz="1600">
-              <a:solidFill>
-                <a:schemeClr val="dk1"/>
-              </a:solidFill>
-              <a:latin typeface="Arial"/>
-              <a:ea typeface="Arial"/>
-              <a:cs typeface="Arial"/>
-              <a:sym typeface="Arial"/>
-            </a:endParaRPr>
-          </a:p>
-        </p:txBody>
-      </p:sp>
-      <p:sp>
-        <p:nvSpPr>
-          <p:cNvPr id="765" name="title"/>
-          <p:cNvSpPr txBox="1"/>
-          <p:nvPr/>
-        </p:nvSpPr>
-        <p:spPr>
-          <a:xfrm>
-            <a:off x="677387" y="692177"/>
-            <a:ext cx="10855878" cy="1447800"/>
-          </a:xfrm>
-          <a:prstGeom prst="rect">
-            <a:avLst/>
-          </a:prstGeom>
-          <a:noFill/>
-        </p:spPr>
-        <p:txBody>
-          <a:bodyPr wrap="square" lIns="76200" rIns="76200" tIns="50800" bIns="50800">
-            <a:spAutoFit/>
-          </a:bodyPr>
-          <a:lstStyle/>
-          <a:p>
-            <a:pPr algn="l">
-              <a:spcAft>
-                <a:spcPts val="300"/>
-              </a:spcAft>
-              <a:defRPr sz="4000">
-                <a:solidFill>
-                  <a:srgbClr val="000000"/>
-                </a:solidFill>
-                <a:latin typeface="Arial"/>
-                <a:ea typeface="Arial"/>
-                <a:cs typeface="Arial"/>
-              </a:defRPr>
-            </a:pPr>
-            <a:r>
-              <a:rPr sz="4000">
-                <a:solidFill>
-                  <a:srgbClr val="000000"/>
-                </a:solidFill>
-                <a:latin typeface="Arial"/>
-                <a:ea typeface="Arial"/>
-                <a:cs typeface="Arial"/>
-              </a:rPr>
-              <a:t>Пилот собрал 68 презентаций за 6 недель</a:t>
-            </a:r>
-          </a:p>
-        </p:txBody>
-      </p:sp>
-      <p:sp>
-        <p:nvSpPr>
-          <p:cNvPr id="766" name="body"/>
-          <p:cNvSpPr txBox="1"/>
-          <p:nvPr/>
-        </p:nvSpPr>
-        <p:spPr>
-          <a:xfrm>
-            <a:off x="677387" y="3695391"/>
-            <a:ext cx="10855878" cy="894080"/>
-          </a:xfrm>
-          <a:prstGeom prst="rect">
-            <a:avLst/>
-          </a:prstGeom>
-          <a:noFill/>
-        </p:spPr>
-        <p:txBody>
-          <a:bodyPr wrap="square" lIns="76200" rIns="76200" tIns="50800" bIns="50800">
-            <a:spAutoFit/>
-          </a:bodyPr>
-          <a:lstStyle/>
-          <a:p>
-            <a:pPr algn="l">
-              <a:spcAft>
-                <a:spcPts val="300"/>
-              </a:spcAft>
-              <a:defRPr sz="1600">
-                <a:solidFill>
-                  <a:srgbClr val="000000"/>
-                </a:solidFill>
-                <a:latin typeface="Arial"/>
-                <a:ea typeface="Arial"/>
-                <a:cs typeface="Arial"/>
-              </a:defRPr>
-            </a:pPr>
-            <a:r>
-              <a:rPr sz="1600">
-                <a:solidFill>
-                  <a:srgbClr val="000000"/>
-                </a:solidFill>
-                <a:latin typeface="Arial"/>
-                <a:ea typeface="Arial"/>
-                <a:cs typeface="Arial"/>
-              </a:rPr>
-              <a:t>• Дизайнеры закрыли 38 запросов вместо 11</a:t>
-            </a:r>
-          </a:p>
-          <a:p>
-            <a:pPr algn="l">
-              <a:spcAft>
-                <a:spcPts val="300"/>
-              </a:spcAft>
-              <a:defRPr sz="1600">
-                <a:solidFill>
-                  <a:srgbClr val="000000"/>
-                </a:solidFill>
-                <a:latin typeface="Arial"/>
-                <a:ea typeface="Arial"/>
-                <a:cs typeface="Arial"/>
-              </a:defRPr>
-            </a:pPr>
-            <a:r>
-              <a:rPr sz="1600">
-                <a:solidFill>
-                  <a:srgbClr val="000000"/>
-                </a:solidFill>
-                <a:latin typeface="Arial"/>
-                <a:ea typeface="Arial"/>
-                <a:cs typeface="Arial"/>
-              </a:rPr>
-              <a:t>• Рутина вёрстки ушла в сервис</a:t>
-            </a:r>
-          </a:p>
-          <a:p>
-            <a:pPr algn="l">
-              <a:spcAft>
-                <a:spcPts val="300"/>
-              </a:spcAft>
-              <a:defRPr sz="1600">
-                <a:solidFill>
-                  <a:srgbClr val="000000"/>
-                </a:solidFill>
-                <a:latin typeface="Arial"/>
-                <a:ea typeface="Arial"/>
-                <a:cs typeface="Arial"/>
-              </a:defRPr>
-            </a:pPr>
-            <a:r>
-              <a:rPr sz="1600">
-                <a:solidFill>
-                  <a:srgbClr val="000000"/>
-                </a:solidFill>
-                <a:latin typeface="Arial"/>
-                <a:ea typeface="Arial"/>
-                <a:cs typeface="Arial"/>
-              </a:rPr>
-              <a:t>• Нагрузка выше 20 задач требует внешней очереди</a:t>
+              <a:t>• Средняя сборка колоды 4 минуты вместо 186</a:t>
             </a:r>
           </a:p>
         </p:txBody>
@@ -8817,71 +9656,14 @@
       <p:grpSpPr/>
       <p:sp>
         <p:nvSpPr>
-          <p:cNvPr id="782" name="Google Shape;782;p59"/>
+          <p:cNvPr id="2" name="title"/>
           <p:cNvSpPr txBox="1"/>
           <p:nvPr/>
         </p:nvSpPr>
         <p:spPr>
           <a:xfrm>
-            <a:off x="18692059" y="4674436"/>
-            <a:ext cx="4304330" cy="678198"/>
-          </a:xfrm>
-          <a:prstGeom prst="rect">
-            <a:avLst/>
-          </a:prstGeom>
-          <a:noFill/>
-          <a:ln>
-            <a:noFill/>
-          </a:ln>
-        </p:spPr>
-        <p:txBody>
-          <a:bodyPr anchorCtr="0" anchor="t" bIns="45700" lIns="91425" spcFirstLastPara="1" rIns="91425" wrap="square" tIns="45700">
-            <a:noAutofit/>
-          </a:bodyPr>
-          <a:lstStyle/>
-          <a:p>
-            <a:pPr indent="0" lvl="0" marL="0" marR="0" rtl="0" algn="l">
-              <a:lnSpc>
-                <a:spcPct val="110000"/>
-              </a:lnSpc>
-              <a:spcBef>
-                <a:spcPts val="0"/>
-              </a:spcBef>
-              <a:spcAft>
-                <a:spcPts val="0"/>
-              </a:spcAft>
-              <a:buClr>
-                <a:schemeClr val="dk1"/>
-              </a:buClr>
-              <a:buSzPts val="1600"/>
-              <a:buFont typeface="Arial"/>
-              <a:buNone/>
-            </a:pPr>
-            <a:r>
-              <a:t/>
-            </a:r>
-            <a:endParaRPr sz="1600">
-              <a:solidFill>
-                <a:schemeClr val="dk1"/>
-              </a:solidFill>
-              <a:latin typeface="Arial"/>
-              <a:ea typeface="Arial"/>
-              <a:cs typeface="Arial"/>
-              <a:sym typeface="Arial"/>
-            </a:endParaRPr>
-          </a:p>
-        </p:txBody>
-      </p:sp>
-      <p:sp>
-        <p:nvSpPr>
-          <p:cNvPr id="783" name="title"/>
-          <p:cNvSpPr txBox="1"/>
-          <p:nvPr/>
-        </p:nvSpPr>
-        <p:spPr>
-          <a:xfrm>
-            <a:off x="677387" y="692177"/>
-            <a:ext cx="10855878" cy="1447800"/>
+            <a:off x="677875" y="692177"/>
+            <a:ext cx="10855391" cy="822960"/>
           </a:xfrm>
           <a:prstGeom prst="rect">
             <a:avLst/>
@@ -8916,21 +9698,21 @@
                 <a:ea typeface="Arial"/>
                 <a:cs typeface="Arial"/>
               </a:rPr>
-              <a:t>Решение о запуске сервиса на всю компанию</a:t>
+              <a:t>Что мы просим решить</a:t>
             </a:r>
           </a:p>
         </p:txBody>
       </p:sp>
       <p:sp>
         <p:nvSpPr>
-          <p:cNvPr id="784" name="body"/>
+          <p:cNvPr id="3" name="body"/>
           <p:cNvSpPr txBox="1"/>
           <p:nvPr/>
         </p:nvSpPr>
         <p:spPr>
           <a:xfrm>
-            <a:off x="677387" y="3695391"/>
-            <a:ext cx="10855878" cy="894080"/>
+            <a:off x="677875" y="2804310"/>
+            <a:ext cx="10855391" cy="1422400"/>
           </a:xfrm>
           <a:prstGeom prst="rect">
             <a:avLst/>
@@ -8943,81 +9725,29 @@
           </a:bodyPr>
           <a:lstStyle/>
           <a:p>
-            <a:pPr algn="l">
+            <a:pPr algn="ctr">
               <a:spcAft>
                 <a:spcPts val="300"/>
               </a:spcAft>
-              <a:defRPr sz="1600">
+              <a:defRPr sz="4000">
                 <a:solidFill>
                   <a:srgbClr val="000000"/>
                 </a:solidFill>
-                <a:latin typeface="Arial"/>
-                <a:ea typeface="Arial"/>
-                <a:cs typeface="Arial"/>
+                <a:latin typeface="Play"/>
+                <a:ea typeface="Play"/>
+                <a:cs typeface="Play"/>
               </a:defRPr>
             </a:pPr>
             <a:r>
-              <a:rPr sz="1600">
+              <a:rPr sz="4000">
                 <a:solidFill>
                   <a:srgbClr val="000000"/>
                 </a:solidFill>
-                <a:latin typeface="Arial"/>
-                <a:ea typeface="Arial"/>
-                <a:cs typeface="Arial"/>
+                <a:latin typeface="Play"/>
+                <a:ea typeface="Play"/>
+                <a:cs typeface="Play"/>
               </a:rPr>
-              <a:t>• Запрос одобрения на масштабирование</a:t>
-            </a:r>
-          </a:p>
-          <a:p>
-            <a:pPr algn="l">
-              <a:spcAft>
-                <a:spcPts val="300"/>
-              </a:spcAft>
-              <a:defRPr sz="1600">
-                <a:solidFill>
-                  <a:srgbClr val="000000"/>
-                </a:solidFill>
-                <a:latin typeface="Arial"/>
-                <a:ea typeface="Arial"/>
-                <a:cs typeface="Arial"/>
-              </a:defRPr>
-            </a:pPr>
-            <a:r>
-              <a:rPr sz="1600">
-                <a:solidFill>
-                  <a:srgbClr val="000000"/>
-                </a:solidFill>
-                <a:latin typeface="Arial"/>
-                <a:ea typeface="Arial"/>
-                <a:cs typeface="Arial"/>
-              </a:rPr>
-              <a:t>• Подключение к корпоративному хранилищу</a:t>
-            </a:r>
-          </a:p>
-          <a:p>
-            <a:pPr algn="l">
-              <a:spcAft>
-                <a:spcPts val="300"/>
-              </a:spcAft>
-              <a:defRPr sz="1600">
-                <a:solidFill>
-                  <a:srgbClr val="000000"/>
-                </a:solidFill>
-                <a:latin typeface="Arial"/>
-                <a:ea typeface="Arial"/>
-                <a:cs typeface="Arial"/>
-              </a:defRPr>
-            </a:pPr>
-            <a:r>
-              <a:rPr sz="1600">
-                <a:solidFill>
-                  <a:srgbClr val="000000"/>
-                </a:solidFill>
-                <a:latin typeface="Arial"/>
-                <a:ea typeface="Arial"/>
-                <a:cs typeface="Arial"/>
-              </a:rPr>
-              <a:t>• Интеграция с доменом и HTTPS</a:t>
+              <a:t>Принять решение о запуске сервиса на всю компанию</a:t>
             </a:r>
           </a:p>
         </p:txBody>

--- a/samples/Шаблон_презентации_VK_Education__split.pptx
+++ b/samples/Шаблон_презентации_VK_Education__split.pptx
@@ -16,6 +16,9 @@
     <p:sldId id="315" r:id="rId68"/>
     <p:sldId id="316" r:id="rId69"/>
     <p:sldId id="317" r:id="rId70"/>
+    <p:sldId id="318" r:id="rId71"/>
+    <p:sldId id="319" r:id="rId72"/>
+    <p:sldId id="320" r:id="rId73"/>
   </p:sldIdLst>
   <p:sldSz cy="6858000" cx="12192000"/>
   <p:notesSz cx="6858000" cy="9144000"/>
@@ -276,7 +279,7 @@
               <c:strCache>
                 <c:ptCount val="1"/>
                 <c:pt idx="0">
-                  <c:v>До</c:v>
+                  <c:v>Время</c:v>
                 </c:pt>
               </c:strCache>
             </c:strRef>
@@ -293,102 +296,36 @@
           </c:spPr>
           <c:cat>
             <c:strRef>
-              <c:f>Sheet1!$A$2:$A$4</c:f>
+              <c:f>Sheet1!$A$2:$A$3</c:f>
               <c:strCache>
-                <c:ptCount val="3"/>
+                <c:ptCount val="2"/>
                 <c:pt idx="0">
-                  <c:v>Сборка колоды</c:v>
+                  <c:v>Сборка</c:v>
                 </c:pt>
                 <c:pt idx="1">
-                  <c:v>Время до первой версии</c:v>
-                </c:pt>
-                <c:pt idx="2">
-                  <c:v>Запросы/неделя</c:v>
+                  <c:v>Правки</c:v>
                 </c:pt>
               </c:strCache>
             </c:strRef>
           </c:cat>
           <c:val>
             <c:numRef>
-              <c:f>Sheet1!$B$2:$B$4</c:f>
+              <c:f>Sheet1!$B$2:$B$3</c:f>
               <c:numCache>
                 <c:formatCode>General</c:formatCode>
-                <c:ptCount val="3"/>
+                <c:ptCount val="2"/>
                 <c:pt idx="0">
                   <c:v>186.0</c:v>
                 </c:pt>
                 <c:pt idx="1">
-                  <c:v>6.0</c:v>
-                </c:pt>
-                <c:pt idx="2">
-                  <c:v>11.0</c:v>
-                </c:pt>
-              </c:numCache>
-            </c:numRef>
-          </c:val>
-        </c:ser>
-        <c:ser>
-          <c:idx val="1"/>
-          <c:order val="1"/>
-          <c:tx>
-            <c:strRef>
-              <c:f>Sheet1!$C$1</c:f>
-              <c:strCache>
-                <c:ptCount val="1"/>
-                <c:pt idx="0">
-                  <c:v>После</c:v>
-                </c:pt>
-              </c:strCache>
-            </c:strRef>
-          </c:tx>
-          <c:spPr>
-            <a:solidFill>
-              <a:srgbClr val="FF3885"/>
-            </a:solidFill>
-            <a:ln>
-              <a:solidFill>
-                <a:srgbClr val="FF3885"/>
-              </a:solidFill>
-            </a:ln>
-          </c:spPr>
-          <c:cat>
-            <c:strRef>
-              <c:f>Sheet1!$A$2:$A$4</c:f>
-              <c:strCache>
-                <c:ptCount val="3"/>
-                <c:pt idx="0">
-                  <c:v>Сборка колоды</c:v>
-                </c:pt>
-                <c:pt idx="1">
-                  <c:v>Время до первой версии</c:v>
-                </c:pt>
-                <c:pt idx="2">
-                  <c:v>Запросы/неделя</c:v>
-                </c:pt>
-              </c:strCache>
-            </c:strRef>
-          </c:cat>
-          <c:val>
-            <c:numRef>
-              <c:f>Sheet1!$C$2:$C$4</c:f>
-              <c:numCache>
-                <c:formatCode>General</c:formatCode>
-                <c:ptCount val="3"/>
-                <c:pt idx="0">
-                  <c:v>4.0</c:v>
-                </c:pt>
-                <c:pt idx="1">
-                  <c:v>1.0</c:v>
-                </c:pt>
-                <c:pt idx="2">
-                  <c:v>38.0</c:v>
+                  <c:v>74.0</c:v>
                 </c:pt>
               </c:numCache>
             </c:numRef>
           </c:val>
         </c:ser>
         <c:dLbls>
-          <c:numFmt formatCode="0&quot; единицы&quot;" sourceLinked="0"/>
+          <c:numFmt formatCode="0&quot; мин&quot;" sourceLinked="0"/>
           <c:txPr>
             <a:bodyPr wrap="none"/>
             <a:lstStyle/>
@@ -482,7 +419,7 @@
                   </a:defRPr>
                 </a:pPr>
                 <a:r>
-                  <a:t>единицы</a:t>
+                  <a:t>Время, мин</a:t>
                 </a:r>
               </a:p>
             </c:rich>
@@ -513,10 +450,220 @@
         <c:crosses val="autoZero"/>
       </c:valAx>
     </c:plotArea>
-    <c:legend>
-      <c:legendPos val="b"/>
-      <c:overlay val="0"/>
-    </c:legend>
+    <c:dispBlanksAs val="gap"/>
+  </c:chart>
+  <c:txPr>
+    <a:bodyPr/>
+    <a:lstStyle/>
+    <a:p>
+      <a:pPr>
+        <a:defRPr sz="1200" b="0">
+          <a:solidFill>
+            <a:srgbClr val="000000"/>
+          </a:solidFill>
+          <a:latin typeface="Play"/>
+          <a:ea typeface="Play"/>
+          <a:cs typeface="Play"/>
+        </a:defRPr>
+      </a:pPr>
+      <a:endParaRPr lang="en-US"/>
+    </a:p>
+  </c:txPr>
+  <c:externalData r:id="rId1">
+    <c:autoUpdate val="0"/>
+  </c:externalData>
+</c:chartSpace>
+</file>
+
+<file path=ppt/charts/chart2.xml><?xml version="1.0" encoding="utf-8"?>
+<c:chartSpace xmlns:c="http://schemas.openxmlformats.org/drawingml/2006/chart" xmlns:a="http://schemas.openxmlformats.org/drawingml/2006/main" xmlns:r="http://schemas.openxmlformats.org/officeDocument/2006/relationships">
+  <c:date1904 val="0"/>
+  <c:chart>
+    <c:autoTitleDeleted val="1"/>
+    <c:plotArea>
+      <c:barChart>
+        <c:barDir val="col"/>
+        <c:grouping val="clustered"/>
+        <c:ser>
+          <c:idx val="0"/>
+          <c:order val="0"/>
+          <c:tx>
+            <c:strRef>
+              <c:f>Sheet1!$B$1</c:f>
+              <c:strCache>
+                <c:ptCount val="1"/>
+                <c:pt idx="0">
+                  <c:v>Значения</c:v>
+                </c:pt>
+              </c:strCache>
+            </c:strRef>
+          </c:tx>
+          <c:spPr>
+            <a:solidFill>
+              <a:srgbClr val="0077FF"/>
+            </a:solidFill>
+            <a:ln>
+              <a:solidFill>
+                <a:srgbClr val="0077FF"/>
+              </a:solidFill>
+            </a:ln>
+          </c:spPr>
+          <c:cat>
+            <c:strRef>
+              <c:f>Sheet1!$A$2:$A$3</c:f>
+              <c:strCache>
+                <c:ptCount val="2"/>
+                <c:pt idx="0">
+                  <c:v>Сборка</c:v>
+                </c:pt>
+                <c:pt idx="1">
+                  <c:v>Запросы дизайнеров</c:v>
+                </c:pt>
+              </c:strCache>
+            </c:strRef>
+          </c:cat>
+          <c:val>
+            <c:numRef>
+              <c:f>Sheet1!$B$2:$B$3</c:f>
+              <c:numCache>
+                <c:formatCode>General</c:formatCode>
+                <c:ptCount val="2"/>
+                <c:pt idx="0">
+                  <c:v>4.0</c:v>
+                </c:pt>
+                <c:pt idx="1">
+                  <c:v>38.0</c:v>
+                </c:pt>
+              </c:numCache>
+            </c:numRef>
+          </c:val>
+        </c:ser>
+        <c:dLbls>
+          <c:numFmt formatCode="0&quot; значений&quot;" sourceLinked="0"/>
+          <c:txPr>
+            <a:bodyPr wrap="none"/>
+            <a:lstStyle/>
+            <a:p>
+              <a:pPr>
+                <a:defRPr sz="1100" b="0">
+                  <a:solidFill>
+                    <a:srgbClr val="000000"/>
+                  </a:solidFill>
+                  <a:latin typeface="Play"/>
+                  <a:ea typeface="Play"/>
+                  <a:cs typeface="Play"/>
+                </a:defRPr>
+              </a:pPr>
+            </a:p>
+          </c:txPr>
+          <c:dLblPos val="outEnd"/>
+          <c:showLegendKey val="0"/>
+          <c:showVal val="1"/>
+          <c:showCatName val="0"/>
+          <c:showSerName val="0"/>
+          <c:showPercent val="0"/>
+          <c:showBubbleSize val="0"/>
+          <c:showLeaderLines val="1"/>
+        </c:dLbls>
+        <c:gapWidth val="60"/>
+        <c:axId val="-2068027336"/>
+        <c:axId val="-2113994440"/>
+      </c:barChart>
+      <c:catAx>
+        <c:axId val="-2068027336"/>
+        <c:scaling>
+          <c:orientation val="minMax"/>
+        </c:scaling>
+        <c:delete val="0"/>
+        <c:axPos val="b"/>
+        <c:majorTickMark val="out"/>
+        <c:minorTickMark val="none"/>
+        <c:tickLblPos val="nextTo"/>
+        <c:txPr>
+          <a:bodyPr/>
+          <a:lstStyle/>
+          <a:p>
+            <a:pPr>
+              <a:defRPr sz="1100" b="0">
+                <a:solidFill>
+                  <a:srgbClr val="000000"/>
+                </a:solidFill>
+                <a:latin typeface="Play"/>
+                <a:ea typeface="Play"/>
+                <a:cs typeface="Play"/>
+              </a:defRPr>
+            </a:pPr>
+          </a:p>
+        </c:txPr>
+        <c:crossAx val="-2113994440"/>
+        <c:crosses val="autoZero"/>
+        <c:auto val="1"/>
+        <c:lblAlgn val="ctr"/>
+        <c:lblOffset val="100"/>
+        <c:noMultiLvlLbl val="0"/>
+      </c:catAx>
+      <c:valAx>
+        <c:axId val="-2113994440"/>
+        <c:scaling/>
+        <c:delete val="0"/>
+        <c:axPos val="l"/>
+        <c:majorGridlines>
+          <c:spPr>
+            <a:ln w="9525">
+              <a:solidFill>
+                <a:srgbClr val="D1D1D1"/>
+              </a:solidFill>
+            </a:ln>
+          </c:spPr>
+        </c:majorGridlines>
+        <c:title>
+          <c:tx>
+            <c:rich>
+              <a:bodyPr rot="0" vert="horz"/>
+              <a:lstStyle/>
+              <a:p>
+                <a:pPr>
+                  <a:defRPr sz="1100" b="0">
+                    <a:solidFill>
+                      <a:srgbClr val="000000"/>
+                    </a:solidFill>
+                    <a:latin typeface="Play"/>
+                    <a:ea typeface="Play"/>
+                    <a:cs typeface="Play"/>
+                  </a:defRPr>
+                </a:pPr>
+                <a:r>
+                  <a:t>Значения, значений</a:t>
+                </a:r>
+              </a:p>
+            </c:rich>
+          </c:tx>
+          <c:layout/>
+          <c:overlay val="0"/>
+        </c:title>
+        <c:majorTickMark val="out"/>
+        <c:minorTickMark val="none"/>
+        <c:tickLblPos val="nextTo"/>
+        <c:txPr>
+          <a:bodyPr/>
+          <a:lstStyle/>
+          <a:p>
+            <a:pPr>
+              <a:defRPr sz="1100" b="0">
+                <a:solidFill>
+                  <a:srgbClr val="000000"/>
+                </a:solidFill>
+                <a:latin typeface="Play"/>
+                <a:ea typeface="Play"/>
+                <a:cs typeface="Play"/>
+              </a:defRPr>
+            </a:pPr>
+          </a:p>
+        </c:txPr>
+        <c:crossAx val="-2068027336"/>
+        <c:crosses val="autoZero"/>
+      </c:valAx>
+    </c:plotArea>
     <c:dispBlanksAs val="gap"/>
   </c:chart>
   <c:txPr>
@@ -2107,6 +2254,204 @@
 </file>
 
 <file path=ppt/notesSlides/notesSlide62.xml><?xml version="1.0" encoding="utf-8"?>
+<p:notes xmlns:a="http://schemas.openxmlformats.org/drawingml/2006/main" xmlns:p="http://schemas.openxmlformats.org/presentationml/2006/main" xmlns:r="http://schemas.openxmlformats.org/officeDocument/2006/relationships">
+  <p:cSld>
+    <p:spTree>
+      <p:nvGrpSpPr>
+        <p:cNvPr id="1" name=""/>
+        <p:cNvGrpSpPr/>
+        <p:nvPr/>
+      </p:nvGrpSpPr>
+      <p:grpSpPr>
+        <a:xfrm>
+          <a:off x="0" y="0"/>
+          <a:ext cx="0" cy="0"/>
+          <a:chOff x="0" y="0"/>
+          <a:chExt cx="0" cy="0"/>
+        </a:xfrm>
+      </p:grpSpPr>
+      <p:sp>
+        <p:nvSpPr>
+          <p:cNvPr id="2" name="Slide Image Placeholder 1"/>
+          <p:cNvSpPr>
+            <a:spLocks noGrp="1"/>
+          </p:cNvSpPr>
+          <p:nvPr>
+            <p:ph type="sldImg" idx="3"/>
+          </p:nvPr>
+        </p:nvSpPr>
+        <p:spPr/>
+      </p:sp>
+      <p:sp>
+        <p:nvSpPr>
+          <p:cNvPr id="3" name="Notes Placeholder 2"/>
+          <p:cNvSpPr>
+            <a:spLocks noGrp="1"/>
+          </p:cNvSpPr>
+          <p:nvPr>
+            <p:ph type="body" idx="1"/>
+          </p:nvPr>
+        </p:nvSpPr>
+        <p:spPr/>
+        <p:txBody>
+          <a:bodyPr/>
+          <a:lstStyle/>
+          <a:p/>
+        </p:txBody>
+      </p:sp>
+      <p:sp>
+        <p:nvSpPr>
+          <p:cNvPr id="4" name="Slide Number Placeholder 3"/>
+          <p:cNvSpPr>
+            <a:spLocks noGrp="1"/>
+          </p:cNvSpPr>
+          <p:nvPr>
+            <p:ph type="sldNum" idx="12"/>
+          </p:nvPr>
+        </p:nvSpPr>
+        <p:spPr/>
+      </p:sp>
+    </p:spTree>
+  </p:cSld>
+  <p:clrMapOvr>
+    <a:masterClrMapping/>
+  </p:clrMapOvr>
+</p:notes>
+</file>
+
+<file path=ppt/notesSlides/notesSlide63.xml><?xml version="1.0" encoding="utf-8"?>
+<p:notes xmlns:a="http://schemas.openxmlformats.org/drawingml/2006/main" xmlns:p="http://schemas.openxmlformats.org/presentationml/2006/main" xmlns:r="http://schemas.openxmlformats.org/officeDocument/2006/relationships">
+  <p:cSld>
+    <p:spTree>
+      <p:nvGrpSpPr>
+        <p:cNvPr id="1" name=""/>
+        <p:cNvGrpSpPr/>
+        <p:nvPr/>
+      </p:nvGrpSpPr>
+      <p:grpSpPr>
+        <a:xfrm>
+          <a:off x="0" y="0"/>
+          <a:ext cx="0" cy="0"/>
+          <a:chOff x="0" y="0"/>
+          <a:chExt cx="0" cy="0"/>
+        </a:xfrm>
+      </p:grpSpPr>
+      <p:sp>
+        <p:nvSpPr>
+          <p:cNvPr id="2" name="Slide Image Placeholder 1"/>
+          <p:cNvSpPr>
+            <a:spLocks noGrp="1"/>
+          </p:cNvSpPr>
+          <p:nvPr>
+            <p:ph type="sldImg" idx="3"/>
+          </p:nvPr>
+        </p:nvSpPr>
+        <p:spPr/>
+      </p:sp>
+      <p:sp>
+        <p:nvSpPr>
+          <p:cNvPr id="3" name="Notes Placeholder 2"/>
+          <p:cNvSpPr>
+            <a:spLocks noGrp="1"/>
+          </p:cNvSpPr>
+          <p:nvPr>
+            <p:ph type="body" idx="1"/>
+          </p:nvPr>
+        </p:nvSpPr>
+        <p:spPr/>
+        <p:txBody>
+          <a:bodyPr/>
+          <a:lstStyle/>
+          <a:p/>
+        </p:txBody>
+      </p:sp>
+      <p:sp>
+        <p:nvSpPr>
+          <p:cNvPr id="4" name="Slide Number Placeholder 3"/>
+          <p:cNvSpPr>
+            <a:spLocks noGrp="1"/>
+          </p:cNvSpPr>
+          <p:nvPr>
+            <p:ph type="sldNum" idx="12"/>
+          </p:nvPr>
+        </p:nvSpPr>
+        <p:spPr/>
+      </p:sp>
+    </p:spTree>
+  </p:cSld>
+  <p:clrMapOvr>
+    <a:masterClrMapping/>
+  </p:clrMapOvr>
+</p:notes>
+</file>
+
+<file path=ppt/notesSlides/notesSlide64.xml><?xml version="1.0" encoding="utf-8"?>
+<p:notes xmlns:a="http://schemas.openxmlformats.org/drawingml/2006/main" xmlns:p="http://schemas.openxmlformats.org/presentationml/2006/main" xmlns:r="http://schemas.openxmlformats.org/officeDocument/2006/relationships">
+  <p:cSld>
+    <p:spTree>
+      <p:nvGrpSpPr>
+        <p:cNvPr id="1" name=""/>
+        <p:cNvGrpSpPr/>
+        <p:nvPr/>
+      </p:nvGrpSpPr>
+      <p:grpSpPr>
+        <a:xfrm>
+          <a:off x="0" y="0"/>
+          <a:ext cx="0" cy="0"/>
+          <a:chOff x="0" y="0"/>
+          <a:chExt cx="0" cy="0"/>
+        </a:xfrm>
+      </p:grpSpPr>
+      <p:sp>
+        <p:nvSpPr>
+          <p:cNvPr id="2" name="Slide Image Placeholder 1"/>
+          <p:cNvSpPr>
+            <a:spLocks noGrp="1"/>
+          </p:cNvSpPr>
+          <p:nvPr>
+            <p:ph type="sldImg" idx="3"/>
+          </p:nvPr>
+        </p:nvSpPr>
+        <p:spPr/>
+      </p:sp>
+      <p:sp>
+        <p:nvSpPr>
+          <p:cNvPr id="3" name="Notes Placeholder 2"/>
+          <p:cNvSpPr>
+            <a:spLocks noGrp="1"/>
+          </p:cNvSpPr>
+          <p:nvPr>
+            <p:ph type="body" idx="1"/>
+          </p:nvPr>
+        </p:nvSpPr>
+        <p:spPr/>
+        <p:txBody>
+          <a:bodyPr/>
+          <a:lstStyle/>
+          <a:p/>
+        </p:txBody>
+      </p:sp>
+      <p:sp>
+        <p:nvSpPr>
+          <p:cNvPr id="4" name="Slide Number Placeholder 3"/>
+          <p:cNvSpPr>
+            <a:spLocks noGrp="1"/>
+          </p:cNvSpPr>
+          <p:nvPr>
+            <p:ph type="sldNum" idx="12"/>
+          </p:nvPr>
+        </p:nvSpPr>
+        <p:spPr/>
+      </p:sp>
+    </p:spTree>
+  </p:cSld>
+  <p:clrMapOvr>
+    <a:masterClrMapping/>
+  </p:clrMapOvr>
+</p:notes>
+</file>
+
+<file path=ppt/notesSlides/notesSlide65.xml><?xml version="1.0" encoding="utf-8"?>
 <p:notes xmlns:a="http://schemas.openxmlformats.org/drawingml/2006/main" xmlns:p="http://schemas.openxmlformats.org/presentationml/2006/main" xmlns:r="http://schemas.openxmlformats.org/officeDocument/2006/relationships">
   <p:cSld>
     <p:spTree>
@@ -7336,7 +7681,7 @@
                 <a:ea typeface="Arial"/>
                 <a:cs typeface="Arial"/>
               </a:rPr>
-              <a:t>Защита инициативы: сервис автоматической вёрстки презентаций</a:t>
+              <a:t>Автоматическая вёрстка презентаций: пилот и запуск</a:t>
             </a:r>
           </a:p>
         </p:txBody>
@@ -7350,6 +7695,934 @@
 </file>
 
 <file path=ppt/slides/slide57.xml><?xml version="1.0" encoding="utf-8"?>
+<p:sld xmlns:a="http://schemas.openxmlformats.org/drawingml/2006/main" xmlns:p="http://schemas.openxmlformats.org/presentationml/2006/main" xmlns:r="http://schemas.openxmlformats.org/officeDocument/2006/relationships">
+  <p:cSld>
+    <p:bg>
+      <p:bgPr>
+        <a:solidFill>
+          <a:schemeClr val="lt2"/>
+        </a:solidFill>
+      </p:bgPr>
+    </p:bg>
+    <p:spTree>
+      <p:nvGrpSpPr>
+        <p:cNvPr id="1" name=""/>
+        <p:cNvGrpSpPr/>
+        <p:nvPr/>
+      </p:nvGrpSpPr>
+      <p:grpSpPr/>
+      <p:sp>
+        <p:nvSpPr>
+          <p:cNvPr id="795" name="Google Shape;795;p60"/>
+          <p:cNvSpPr txBox="1"/>
+          <p:nvPr/>
+        </p:nvSpPr>
+        <p:spPr>
+          <a:xfrm>
+            <a:off x="18692059" y="4674436"/>
+            <a:ext cx="4304330" cy="678198"/>
+          </a:xfrm>
+          <a:prstGeom prst="rect">
+            <a:avLst/>
+          </a:prstGeom>
+          <a:noFill/>
+          <a:ln>
+            <a:noFill/>
+          </a:ln>
+        </p:spPr>
+        <p:txBody>
+          <a:bodyPr anchorCtr="0" anchor="t" bIns="45700" lIns="91425" spcFirstLastPara="1" rIns="91425" wrap="square" tIns="45700">
+            <a:noAutofit/>
+          </a:bodyPr>
+          <a:lstStyle/>
+          <a:p>
+            <a:pPr indent="0" lvl="0" marL="0" marR="0" rtl="0" algn="l">
+              <a:lnSpc>
+                <a:spcPct val="110000"/>
+              </a:lnSpc>
+              <a:spcBef>
+                <a:spcPts val="0"/>
+              </a:spcBef>
+              <a:spcAft>
+                <a:spcPts val="0"/>
+              </a:spcAft>
+              <a:buClr>
+                <a:schemeClr val="dk1"/>
+              </a:buClr>
+              <a:buSzPts val="1600"/>
+              <a:buFont typeface="Arial"/>
+              <a:buNone/>
+            </a:pPr>
+            <a:r>
+              <a:t/>
+            </a:r>
+            <a:endParaRPr sz="1600">
+              <a:solidFill>
+                <a:schemeClr val="dk1"/>
+              </a:solidFill>
+              <a:latin typeface="Arial"/>
+              <a:ea typeface="Arial"/>
+              <a:cs typeface="Arial"/>
+              <a:sym typeface="Arial"/>
+            </a:endParaRPr>
+          </a:p>
+        </p:txBody>
+      </p:sp>
+      <p:sp>
+        <p:nvSpPr>
+          <p:cNvPr id="796" name="title"/>
+          <p:cNvSpPr txBox="1"/>
+          <p:nvPr/>
+        </p:nvSpPr>
+        <p:spPr>
+          <a:xfrm>
+            <a:off x="677387" y="692177"/>
+            <a:ext cx="10855878" cy="1447800"/>
+          </a:xfrm>
+          <a:prstGeom prst="rect">
+            <a:avLst/>
+          </a:prstGeom>
+          <a:noFill/>
+        </p:spPr>
+        <p:txBody>
+          <a:bodyPr wrap="square" lIns="76200" rIns="76200" tIns="50800" bIns="50800">
+            <a:spAutoFit/>
+          </a:bodyPr>
+          <a:lstStyle/>
+          <a:p>
+            <a:pPr algn="l">
+              <a:spcAft>
+                <a:spcPts val="300"/>
+              </a:spcAft>
+              <a:defRPr sz="4000">
+                <a:solidFill>
+                  <a:srgbClr val="000000"/>
+                </a:solidFill>
+                <a:latin typeface="Arial"/>
+                <a:ea typeface="Arial"/>
+                <a:cs typeface="Arial"/>
+              </a:defRPr>
+            </a:pPr>
+            <a:r>
+              <a:rPr sz="4000">
+                <a:solidFill>
+                  <a:srgbClr val="000000"/>
+                </a:solidFill>
+                <a:latin typeface="Arial"/>
+                <a:ea typeface="Arial"/>
+                <a:cs typeface="Arial"/>
+              </a:rPr>
+              <a:t>Текущее состояние: ручная сборка и проблемы</a:t>
+            </a:r>
+          </a:p>
+        </p:txBody>
+      </p:sp>
+      <p:sp>
+        <p:nvSpPr>
+          <p:cNvPr id="797" name="body"/>
+          <p:cNvSpPr txBox="1"/>
+          <p:nvPr/>
+        </p:nvSpPr>
+        <p:spPr>
+          <a:xfrm>
+            <a:off x="677387" y="3695391"/>
+            <a:ext cx="10855878" cy="894080"/>
+          </a:xfrm>
+          <a:prstGeom prst="rect">
+            <a:avLst/>
+          </a:prstGeom>
+          <a:noFill/>
+        </p:spPr>
+        <p:txBody>
+          <a:bodyPr wrap="square" lIns="76200" rIns="76200" tIns="50800" bIns="50800">
+            <a:spAutoFit/>
+          </a:bodyPr>
+          <a:lstStyle/>
+          <a:p>
+            <a:pPr algn="l">
+              <a:spcAft>
+                <a:spcPts val="300"/>
+              </a:spcAft>
+              <a:defRPr sz="1600">
+                <a:solidFill>
+                  <a:srgbClr val="000000"/>
+                </a:solidFill>
+                <a:latin typeface="Play"/>
+                <a:ea typeface="Play"/>
+                <a:cs typeface="Play"/>
+              </a:defRPr>
+            </a:pPr>
+            <a:r>
+              <a:rPr sz="1600">
+                <a:solidFill>
+                  <a:srgbClr val="000000"/>
+                </a:solidFill>
+                <a:latin typeface="Play"/>
+                <a:ea typeface="Play"/>
+                <a:cs typeface="Play"/>
+              </a:rPr>
+              <a:t>• 12-слайдовая колода занимает 186 мин</a:t>
+            </a:r>
+          </a:p>
+          <a:p>
+            <a:pPr algn="l">
+              <a:spcAft>
+                <a:spcPts val="300"/>
+              </a:spcAft>
+              <a:defRPr sz="1600">
+                <a:solidFill>
+                  <a:srgbClr val="000000"/>
+                </a:solidFill>
+                <a:latin typeface="Play"/>
+                <a:ea typeface="Play"/>
+                <a:cs typeface="Play"/>
+              </a:defRPr>
+            </a:pPr>
+            <a:r>
+              <a:rPr sz="1600">
+                <a:solidFill>
+                  <a:srgbClr val="000000"/>
+                </a:solidFill>
+                <a:latin typeface="Play"/>
+                <a:ea typeface="Play"/>
+                <a:cs typeface="Play"/>
+              </a:rPr>
+              <a:t>• Правки после ревью добавляют 74 мин</a:t>
+            </a:r>
+          </a:p>
+          <a:p>
+            <a:pPr algn="l">
+              <a:spcAft>
+                <a:spcPts val="300"/>
+              </a:spcAft>
+              <a:defRPr sz="1600">
+                <a:solidFill>
+                  <a:srgbClr val="000000"/>
+                </a:solidFill>
+                <a:latin typeface="Play"/>
+                <a:ea typeface="Play"/>
+                <a:cs typeface="Play"/>
+              </a:defRPr>
+            </a:pPr>
+            <a:r>
+              <a:rPr sz="1600">
+                <a:solidFill>
+                  <a:srgbClr val="000000"/>
+                </a:solidFill>
+                <a:latin typeface="Play"/>
+                <a:ea typeface="Play"/>
+                <a:cs typeface="Play"/>
+              </a:rPr>
+              <a:t>• 19 из 42 колод нарушают фирменный стиль</a:t>
+            </a:r>
+          </a:p>
+        </p:txBody>
+      </p:sp>
+    </p:spTree>
+  </p:cSld>
+  <p:clrMapOvr>
+    <a:masterClrMapping/>
+  </p:clrMapOvr>
+</p:sld>
+</file>
+
+<file path=ppt/slides/slide58.xml><?xml version="1.0" encoding="utf-8"?>
+<p:sld xmlns:a="http://schemas.openxmlformats.org/drawingml/2006/main" xmlns:p="http://schemas.openxmlformats.org/presentationml/2006/main" xmlns:r="http://schemas.openxmlformats.org/officeDocument/2006/relationships">
+  <p:cSld>
+    <p:bg>
+      <p:bgPr>
+        <a:solidFill>
+          <a:schemeClr val="lt2"/>
+        </a:solidFill>
+      </p:bgPr>
+    </p:bg>
+    <p:spTree>
+      <p:nvGrpSpPr>
+        <p:cNvPr id="1" name=""/>
+        <p:cNvGrpSpPr/>
+        <p:nvPr/>
+      </p:nvGrpSpPr>
+      <p:grpSpPr/>
+      <p:sp>
+        <p:nvSpPr>
+          <p:cNvPr id="764" name="Google Shape;764;p58"/>
+          <p:cNvSpPr txBox="1"/>
+          <p:nvPr/>
+        </p:nvSpPr>
+        <p:spPr>
+          <a:xfrm>
+            <a:off x="18692059" y="4674436"/>
+            <a:ext cx="4304330" cy="678198"/>
+          </a:xfrm>
+          <a:prstGeom prst="rect">
+            <a:avLst/>
+          </a:prstGeom>
+          <a:noFill/>
+          <a:ln>
+            <a:noFill/>
+          </a:ln>
+        </p:spPr>
+        <p:txBody>
+          <a:bodyPr anchorCtr="0" anchor="t" bIns="45700" lIns="91425" spcFirstLastPara="1" rIns="91425" wrap="square" tIns="45700">
+            <a:noAutofit/>
+          </a:bodyPr>
+          <a:lstStyle/>
+          <a:p>
+            <a:pPr indent="0" lvl="0" marL="0" marR="0" rtl="0" algn="l">
+              <a:lnSpc>
+                <a:spcPct val="110000"/>
+              </a:lnSpc>
+              <a:spcBef>
+                <a:spcPts val="0"/>
+              </a:spcBef>
+              <a:spcAft>
+                <a:spcPts val="0"/>
+              </a:spcAft>
+              <a:buClr>
+                <a:schemeClr val="dk1"/>
+              </a:buClr>
+              <a:buSzPts val="1600"/>
+              <a:buFont typeface="Arial"/>
+              <a:buNone/>
+            </a:pPr>
+            <a:r>
+              <a:t/>
+            </a:r>
+            <a:endParaRPr sz="1600">
+              <a:solidFill>
+                <a:schemeClr val="dk1"/>
+              </a:solidFill>
+              <a:latin typeface="Arial"/>
+              <a:ea typeface="Arial"/>
+              <a:cs typeface="Arial"/>
+              <a:sym typeface="Arial"/>
+            </a:endParaRPr>
+          </a:p>
+        </p:txBody>
+      </p:sp>
+      <p:sp>
+        <p:nvSpPr>
+          <p:cNvPr id="765" name="title"/>
+          <p:cNvSpPr txBox="1"/>
+          <p:nvPr/>
+        </p:nvSpPr>
+        <p:spPr>
+          <a:xfrm>
+            <a:off x="677387" y="692177"/>
+            <a:ext cx="10855878" cy="1447800"/>
+          </a:xfrm>
+          <a:prstGeom prst="rect">
+            <a:avLst/>
+          </a:prstGeom>
+          <a:noFill/>
+        </p:spPr>
+        <p:txBody>
+          <a:bodyPr wrap="square" lIns="76200" rIns="76200" tIns="50800" bIns="50800">
+            <a:spAutoFit/>
+          </a:bodyPr>
+          <a:lstStyle/>
+          <a:p>
+            <a:pPr algn="l">
+              <a:spcAft>
+                <a:spcPts val="300"/>
+              </a:spcAft>
+              <a:defRPr sz="4000">
+                <a:solidFill>
+                  <a:srgbClr val="000000"/>
+                </a:solidFill>
+                <a:latin typeface="Arial"/>
+                <a:ea typeface="Arial"/>
+                <a:cs typeface="Arial"/>
+              </a:defRPr>
+            </a:pPr>
+            <a:r>
+              <a:rPr sz="4000">
+                <a:solidFill>
+                  <a:srgbClr val="000000"/>
+                </a:solidFill>
+                <a:latin typeface="Arial"/>
+                <a:ea typeface="Arial"/>
+                <a:cs typeface="Arial"/>
+              </a:rPr>
+              <a:t>Предлагаемый сервис: автоматизация от шаблона до аудита</a:t>
+            </a:r>
+          </a:p>
+        </p:txBody>
+      </p:sp>
+      <p:sp>
+        <p:nvSpPr>
+          <p:cNvPr id="766" name="body"/>
+          <p:cNvSpPr txBox="1"/>
+          <p:nvPr/>
+        </p:nvSpPr>
+        <p:spPr>
+          <a:xfrm>
+            <a:off x="677387" y="3695391"/>
+            <a:ext cx="10855878" cy="894080"/>
+          </a:xfrm>
+          <a:prstGeom prst="rect">
+            <a:avLst/>
+          </a:prstGeom>
+          <a:noFill/>
+        </p:spPr>
+        <p:txBody>
+          <a:bodyPr wrap="square" lIns="76200" rIns="76200" tIns="50800" bIns="50800">
+            <a:spAutoFit/>
+          </a:bodyPr>
+          <a:lstStyle/>
+          <a:p>
+            <a:pPr algn="l">
+              <a:spcAft>
+                <a:spcPts val="300"/>
+              </a:spcAft>
+              <a:defRPr sz="1600">
+                <a:solidFill>
+                  <a:srgbClr val="000000"/>
+                </a:solidFill>
+                <a:latin typeface="Play"/>
+                <a:ea typeface="Play"/>
+                <a:cs typeface="Play"/>
+              </a:defRPr>
+            </a:pPr>
+            <a:r>
+              <a:rPr sz="1600">
+                <a:solidFill>
+                  <a:srgbClr val="000000"/>
+                </a:solidFill>
+                <a:latin typeface="Play"/>
+                <a:ea typeface="Play"/>
+                <a:cs typeface="Play"/>
+              </a:rPr>
+              <a:t>• Сервис принимает pptx шаблон и материалы</a:t>
+            </a:r>
+          </a:p>
+          <a:p>
+            <a:pPr algn="l">
+              <a:spcAft>
+                <a:spcPts val="300"/>
+              </a:spcAft>
+              <a:defRPr sz="1600">
+                <a:solidFill>
+                  <a:srgbClr val="000000"/>
+                </a:solidFill>
+                <a:latin typeface="Play"/>
+                <a:ea typeface="Play"/>
+                <a:cs typeface="Play"/>
+              </a:defRPr>
+            </a:pPr>
+            <a:r>
+              <a:rPr sz="1600">
+                <a:solidFill>
+                  <a:srgbClr val="000000"/>
+                </a:solidFill>
+                <a:latin typeface="Play"/>
+                <a:ea typeface="Play"/>
+                <a:cs typeface="Play"/>
+              </a:rPr>
+              <a:t>• Автоматически формирует дизайн-систему и план колоды</a:t>
+            </a:r>
+          </a:p>
+          <a:p>
+            <a:pPr algn="l">
+              <a:spcAft>
+                <a:spcPts val="300"/>
+              </a:spcAft>
+              <a:defRPr sz="1600">
+                <a:solidFill>
+                  <a:srgbClr val="000000"/>
+                </a:solidFill>
+                <a:latin typeface="Play"/>
+                <a:ea typeface="Play"/>
+                <a:cs typeface="Play"/>
+              </a:defRPr>
+            </a:pPr>
+            <a:r>
+              <a:rPr sz="1600">
+                <a:solidFill>
+                  <a:srgbClr val="000000"/>
+                </a:solidFill>
+                <a:latin typeface="Play"/>
+                <a:ea typeface="Play"/>
+                <a:cs typeface="Play"/>
+              </a:rPr>
+              <a:t>• Результат – редактируемый pptx, pdf и html</a:t>
+            </a:r>
+          </a:p>
+        </p:txBody>
+      </p:sp>
+    </p:spTree>
+  </p:cSld>
+  <p:clrMapOvr>
+    <a:masterClrMapping/>
+  </p:clrMapOvr>
+</p:sld>
+</file>
+
+<file path=ppt/slides/slide59.xml><?xml version="1.0" encoding="utf-8"?>
+<p:sld xmlns:a="http://schemas.openxmlformats.org/drawingml/2006/main" xmlns:p="http://schemas.openxmlformats.org/presentationml/2006/main" xmlns:r="http://schemas.openxmlformats.org/officeDocument/2006/relationships">
+  <p:cSld>
+    <p:bg>
+      <p:bgPr>
+        <a:solidFill>
+          <a:schemeClr val="lt2"/>
+        </a:solidFill>
+      </p:bgPr>
+    </p:bg>
+    <p:spTree>
+      <p:nvGrpSpPr>
+        <p:cNvPr id="1" name=""/>
+        <p:cNvGrpSpPr/>
+        <p:nvPr/>
+      </p:nvGrpSpPr>
+      <p:grpSpPr/>
+      <p:sp>
+        <p:nvSpPr>
+          <p:cNvPr id="782" name="Google Shape;782;p59"/>
+          <p:cNvSpPr txBox="1"/>
+          <p:nvPr/>
+        </p:nvSpPr>
+        <p:spPr>
+          <a:xfrm>
+            <a:off x="18692059" y="4674436"/>
+            <a:ext cx="4304330" cy="678198"/>
+          </a:xfrm>
+          <a:prstGeom prst="rect">
+            <a:avLst/>
+          </a:prstGeom>
+          <a:noFill/>
+          <a:ln>
+            <a:noFill/>
+          </a:ln>
+        </p:spPr>
+        <p:txBody>
+          <a:bodyPr anchorCtr="0" anchor="t" bIns="45700" lIns="91425" spcFirstLastPara="1" rIns="91425" wrap="square" tIns="45700">
+            <a:noAutofit/>
+          </a:bodyPr>
+          <a:lstStyle/>
+          <a:p>
+            <a:pPr indent="0" lvl="0" marL="0" marR="0" rtl="0" algn="l">
+              <a:lnSpc>
+                <a:spcPct val="110000"/>
+              </a:lnSpc>
+              <a:spcBef>
+                <a:spcPts val="0"/>
+              </a:spcBef>
+              <a:spcAft>
+                <a:spcPts val="0"/>
+              </a:spcAft>
+              <a:buClr>
+                <a:schemeClr val="dk1"/>
+              </a:buClr>
+              <a:buSzPts val="1600"/>
+              <a:buFont typeface="Arial"/>
+              <a:buNone/>
+            </a:pPr>
+            <a:r>
+              <a:t/>
+            </a:r>
+            <a:endParaRPr sz="1600">
+              <a:solidFill>
+                <a:schemeClr val="dk1"/>
+              </a:solidFill>
+              <a:latin typeface="Arial"/>
+              <a:ea typeface="Arial"/>
+              <a:cs typeface="Arial"/>
+              <a:sym typeface="Arial"/>
+            </a:endParaRPr>
+          </a:p>
+        </p:txBody>
+      </p:sp>
+      <p:sp>
+        <p:nvSpPr>
+          <p:cNvPr id="783" name="title"/>
+          <p:cNvSpPr txBox="1"/>
+          <p:nvPr/>
+        </p:nvSpPr>
+        <p:spPr>
+          <a:xfrm>
+            <a:off x="677387" y="692177"/>
+            <a:ext cx="10855878" cy="1447800"/>
+          </a:xfrm>
+          <a:prstGeom prst="rect">
+            <a:avLst/>
+          </a:prstGeom>
+          <a:noFill/>
+        </p:spPr>
+        <p:txBody>
+          <a:bodyPr wrap="square" lIns="76200" rIns="76200" tIns="50800" bIns="50800">
+            <a:spAutoFit/>
+          </a:bodyPr>
+          <a:lstStyle/>
+          <a:p>
+            <a:pPr algn="l">
+              <a:spcAft>
+                <a:spcPts val="300"/>
+              </a:spcAft>
+              <a:defRPr sz="4000">
+                <a:solidFill>
+                  <a:srgbClr val="000000"/>
+                </a:solidFill>
+                <a:latin typeface="Arial"/>
+                <a:ea typeface="Arial"/>
+                <a:cs typeface="Arial"/>
+              </a:defRPr>
+            </a:pPr>
+            <a:r>
+              <a:rPr sz="4000">
+                <a:solidFill>
+                  <a:srgbClr val="000000"/>
+                </a:solidFill>
+                <a:latin typeface="Arial"/>
+                <a:ea typeface="Arial"/>
+                <a:cs typeface="Arial"/>
+              </a:rPr>
+              <a:t>Ожидаемый эффект: ускорение и качество</a:t>
+            </a:r>
+          </a:p>
+        </p:txBody>
+      </p:sp>
+      <p:sp>
+        <p:nvSpPr>
+          <p:cNvPr id="784" name="body"/>
+          <p:cNvSpPr txBox="1"/>
+          <p:nvPr/>
+        </p:nvSpPr>
+        <p:spPr>
+          <a:xfrm>
+            <a:off x="677387" y="3497271"/>
+            <a:ext cx="10855878" cy="1488440"/>
+          </a:xfrm>
+          <a:prstGeom prst="rect">
+            <a:avLst/>
+          </a:prstGeom>
+          <a:noFill/>
+        </p:spPr>
+        <p:txBody>
+          <a:bodyPr wrap="square" lIns="76200" rIns="76200" tIns="50800" bIns="50800">
+            <a:spAutoFit/>
+          </a:bodyPr>
+          <a:lstStyle/>
+          <a:p>
+            <a:pPr algn="l">
+              <a:spcAft>
+                <a:spcPts val="300"/>
+              </a:spcAft>
+              <a:defRPr sz="2800">
+                <a:solidFill>
+                  <a:srgbClr val="000000"/>
+                </a:solidFill>
+                <a:latin typeface="Play"/>
+                <a:ea typeface="Play"/>
+                <a:cs typeface="Play"/>
+              </a:defRPr>
+            </a:pPr>
+            <a:r>
+              <a:rPr sz="2800">
+                <a:solidFill>
+                  <a:srgbClr val="000000"/>
+                </a:solidFill>
+                <a:latin typeface="Play"/>
+                <a:ea typeface="Play"/>
+                <a:cs typeface="Play"/>
+              </a:rPr>
+              <a:t>• Время сборки сократилось до 4 мин</a:t>
+            </a:r>
+          </a:p>
+          <a:p>
+            <a:pPr algn="l">
+              <a:spcAft>
+                <a:spcPts val="300"/>
+              </a:spcAft>
+              <a:defRPr sz="2800">
+                <a:solidFill>
+                  <a:srgbClr val="000000"/>
+                </a:solidFill>
+                <a:latin typeface="Play"/>
+                <a:ea typeface="Play"/>
+                <a:cs typeface="Play"/>
+              </a:defRPr>
+            </a:pPr>
+            <a:r>
+              <a:rPr sz="2800">
+                <a:solidFill>
+                  <a:srgbClr val="000000"/>
+                </a:solidFill>
+                <a:latin typeface="Play"/>
+                <a:ea typeface="Play"/>
+                <a:cs typeface="Play"/>
+              </a:rPr>
+              <a:t>• Первый вариант готов за 1 день</a:t>
+            </a:r>
+          </a:p>
+          <a:p>
+            <a:pPr algn="l">
+              <a:spcAft>
+                <a:spcPts val="300"/>
+              </a:spcAft>
+              <a:defRPr sz="2800">
+                <a:solidFill>
+                  <a:srgbClr val="000000"/>
+                </a:solidFill>
+                <a:latin typeface="Play"/>
+                <a:ea typeface="Play"/>
+                <a:cs typeface="Play"/>
+              </a:defRPr>
+            </a:pPr>
+            <a:r>
+              <a:rPr sz="2800">
+                <a:solidFill>
+                  <a:srgbClr val="000000"/>
+                </a:solidFill>
+                <a:latin typeface="Play"/>
+                <a:ea typeface="Play"/>
+                <a:cs typeface="Play"/>
+              </a:rPr>
+              <a:t>• Стиль-нарушения упали до 2 из 68</a:t>
+            </a:r>
+          </a:p>
+        </p:txBody>
+      </p:sp>
+    </p:spTree>
+  </p:cSld>
+  <p:clrMapOvr>
+    <a:masterClrMapping/>
+  </p:clrMapOvr>
+</p:sld>
+</file>
+
+<file path=ppt/slides/slide60.xml><?xml version="1.0" encoding="utf-8"?>
+<p:sld xmlns:a="http://schemas.openxmlformats.org/drawingml/2006/main" xmlns:p="http://schemas.openxmlformats.org/presentationml/2006/main" xmlns:r="http://schemas.openxmlformats.org/officeDocument/2006/relationships">
+  <p:cSld>
+    <p:bg>
+      <p:bgPr>
+        <a:solidFill>
+          <a:schemeClr val="lt2"/>
+        </a:solidFill>
+      </p:bgPr>
+    </p:bg>
+    <p:spTree>
+      <p:nvGrpSpPr>
+        <p:cNvPr id="1" name=""/>
+        <p:cNvGrpSpPr/>
+        <p:nvPr/>
+      </p:nvGrpSpPr>
+      <p:grpSpPr/>
+      <p:sp>
+        <p:nvSpPr>
+          <p:cNvPr id="795" name="Google Shape;795;p60"/>
+          <p:cNvSpPr txBox="1"/>
+          <p:nvPr/>
+        </p:nvSpPr>
+        <p:spPr>
+          <a:xfrm>
+            <a:off x="18692059" y="4674436"/>
+            <a:ext cx="4304330" cy="678198"/>
+          </a:xfrm>
+          <a:prstGeom prst="rect">
+            <a:avLst/>
+          </a:prstGeom>
+          <a:noFill/>
+          <a:ln>
+            <a:noFill/>
+          </a:ln>
+        </p:spPr>
+        <p:txBody>
+          <a:bodyPr anchorCtr="0" anchor="t" bIns="45700" lIns="91425" spcFirstLastPara="1" rIns="91425" wrap="square" tIns="45700">
+            <a:noAutofit/>
+          </a:bodyPr>
+          <a:lstStyle/>
+          <a:p>
+            <a:pPr indent="0" lvl="0" marL="0" marR="0" rtl="0" algn="l">
+              <a:lnSpc>
+                <a:spcPct val="110000"/>
+              </a:lnSpc>
+              <a:spcBef>
+                <a:spcPts val="0"/>
+              </a:spcBef>
+              <a:spcAft>
+                <a:spcPts val="0"/>
+              </a:spcAft>
+              <a:buClr>
+                <a:schemeClr val="dk1"/>
+              </a:buClr>
+              <a:buSzPts val="1600"/>
+              <a:buFont typeface="Arial"/>
+              <a:buNone/>
+            </a:pPr>
+            <a:r>
+              <a:t/>
+            </a:r>
+            <a:endParaRPr sz="1600">
+              <a:solidFill>
+                <a:schemeClr val="dk1"/>
+              </a:solidFill>
+              <a:latin typeface="Arial"/>
+              <a:ea typeface="Arial"/>
+              <a:cs typeface="Arial"/>
+              <a:sym typeface="Arial"/>
+            </a:endParaRPr>
+          </a:p>
+        </p:txBody>
+      </p:sp>
+      <p:sp>
+        <p:nvSpPr>
+          <p:cNvPr id="796" name="title"/>
+          <p:cNvSpPr txBox="1"/>
+          <p:nvPr/>
+        </p:nvSpPr>
+        <p:spPr>
+          <a:xfrm>
+            <a:off x="677387" y="692177"/>
+            <a:ext cx="10855878" cy="1447800"/>
+          </a:xfrm>
+          <a:prstGeom prst="rect">
+            <a:avLst/>
+          </a:prstGeom>
+          <a:noFill/>
+        </p:spPr>
+        <p:txBody>
+          <a:bodyPr wrap="square" lIns="76200" rIns="76200" tIns="50800" bIns="50800">
+            <a:spAutoFit/>
+          </a:bodyPr>
+          <a:lstStyle/>
+          <a:p>
+            <a:pPr algn="l">
+              <a:spcAft>
+                <a:spcPts val="300"/>
+              </a:spcAft>
+              <a:defRPr sz="4000">
+                <a:solidFill>
+                  <a:srgbClr val="000000"/>
+                </a:solidFill>
+                <a:latin typeface="Arial"/>
+                <a:ea typeface="Arial"/>
+                <a:cs typeface="Arial"/>
+              </a:defRPr>
+            </a:pPr>
+            <a:r>
+              <a:rPr sz="4000">
+                <a:solidFill>
+                  <a:srgbClr val="000000"/>
+                </a:solidFill>
+                <a:latin typeface="Arial"/>
+                <a:ea typeface="Arial"/>
+                <a:cs typeface="Arial"/>
+              </a:rPr>
+              <a:t>Ресурсы и сроки: инфраструктура и стоимость</a:t>
+            </a:r>
+          </a:p>
+        </p:txBody>
+      </p:sp>
+      <p:sp>
+        <p:nvSpPr>
+          <p:cNvPr id="797" name="body"/>
+          <p:cNvSpPr txBox="1"/>
+          <p:nvPr/>
+        </p:nvSpPr>
+        <p:spPr>
+          <a:xfrm>
+            <a:off x="677387" y="3695391"/>
+            <a:ext cx="10855878" cy="894080"/>
+          </a:xfrm>
+          <a:prstGeom prst="rect">
+            <a:avLst/>
+          </a:prstGeom>
+          <a:noFill/>
+        </p:spPr>
+        <p:txBody>
+          <a:bodyPr wrap="square" lIns="76200" rIns="76200" tIns="50800" bIns="50800">
+            <a:spAutoFit/>
+          </a:bodyPr>
+          <a:lstStyle/>
+          <a:p>
+            <a:pPr algn="l">
+              <a:spcAft>
+                <a:spcPts val="300"/>
+              </a:spcAft>
+              <a:defRPr sz="1600">
+                <a:solidFill>
+                  <a:srgbClr val="000000"/>
+                </a:solidFill>
+                <a:latin typeface="Play"/>
+                <a:ea typeface="Play"/>
+                <a:cs typeface="Play"/>
+              </a:defRPr>
+            </a:pPr>
+            <a:r>
+              <a:rPr sz="1600">
+                <a:solidFill>
+                  <a:srgbClr val="000000"/>
+                </a:solidFill>
+                <a:latin typeface="Play"/>
+                <a:ea typeface="Play"/>
+                <a:cs typeface="Play"/>
+              </a:rPr>
+              <a:t>• Сервис работает на 2 vCPU / 2 GB RAM</a:t>
+            </a:r>
+          </a:p>
+          <a:p>
+            <a:pPr algn="l">
+              <a:spcAft>
+                <a:spcPts val="300"/>
+              </a:spcAft>
+              <a:defRPr sz="1600">
+                <a:solidFill>
+                  <a:srgbClr val="000000"/>
+                </a:solidFill>
+                <a:latin typeface="Play"/>
+                <a:ea typeface="Play"/>
+                <a:cs typeface="Play"/>
+              </a:defRPr>
+            </a:pPr>
+            <a:r>
+              <a:rPr sz="1600">
+                <a:solidFill>
+                  <a:srgbClr val="000000"/>
+                </a:solidFill>
+                <a:latin typeface="Play"/>
+                <a:ea typeface="Play"/>
+                <a:cs typeface="Play"/>
+              </a:rPr>
+              <a:t>• Модель gpt-oss-20b, инференс 1400 руб за 6 недель</a:t>
+            </a:r>
+          </a:p>
+          <a:p>
+            <a:pPr algn="l">
+              <a:spcAft>
+                <a:spcPts val="300"/>
+              </a:spcAft>
+              <a:defRPr sz="1600">
+                <a:solidFill>
+                  <a:srgbClr val="000000"/>
+                </a:solidFill>
+                <a:latin typeface="Play"/>
+                <a:ea typeface="Play"/>
+                <a:cs typeface="Play"/>
+              </a:defRPr>
+            </a:pPr>
+            <a:r>
+              <a:rPr sz="1600">
+                <a:solidFill>
+                  <a:srgbClr val="000000"/>
+                </a:solidFill>
+                <a:latin typeface="Play"/>
+                <a:ea typeface="Play"/>
+                <a:cs typeface="Play"/>
+              </a:rPr>
+              <a:t>• Параллельность до 20 задач без очереди</a:t>
+            </a:r>
+          </a:p>
+        </p:txBody>
+      </p:sp>
+    </p:spTree>
+  </p:cSld>
+  <p:clrMapOvr>
+    <a:masterClrMapping/>
+  </p:clrMapOvr>
+</p:sld>
+</file>
+
+<file path=ppt/slides/slide61.xml><?xml version="1.0" encoding="utf-8"?>
 <p:sld xmlns:a="http://schemas.openxmlformats.org/drawingml/2006/main" xmlns:p="http://schemas.openxmlformats.org/presentationml/2006/main" xmlns:r="http://schemas.openxmlformats.org/officeDocument/2006/relationships">
   <p:cSld>
     <p:spTree>
@@ -7394,7 +8667,7 @@
         <p:spPr>
           <a:xfrm>
             <a:off x="677387" y="692177"/>
-            <a:ext cx="10855878" cy="822960"/>
+            <a:ext cx="10855878" cy="1447800"/>
           </a:xfrm>
           <a:prstGeom prst="rect">
             <a:avLst/>
@@ -7429,7 +8702,7 @@
                 <a:ea typeface="Arial"/>
                 <a:cs typeface="Arial"/>
               </a:rPr>
-              <a:t>Контекст и возможность</a:t>
+              <a:t>Пилотный план: 6 недель, 2 команды, 68 колод</a:t>
             </a:r>
           </a:p>
         </p:txBody>
@@ -7442,8 +8715,8 @@
         </p:nvSpPr>
         <p:spPr>
           <a:xfrm>
-            <a:off x="677387" y="2200937"/>
-            <a:ext cx="5245059" cy="1390596"/>
+            <a:off x="677387" y="3591534"/>
+            <a:ext cx="5245059" cy="1254945"/>
           </a:xfrm>
           <a:prstGeom prst="rect">
             <a:avLst/>
@@ -7460,7 +8733,7 @@
               <a:spcAft>
                 <a:spcPts val="300"/>
               </a:spcAft>
-              <a:defRPr sz="1400">
+              <a:defRPr sz="1600">
                 <a:solidFill>
                   <a:srgbClr val="000000"/>
                 </a:solidFill>
@@ -7470,7 +8743,7 @@
               </a:defRPr>
             </a:pPr>
             <a:r>
-              <a:rPr sz="1400">
+              <a:rPr sz="1600">
                 <a:solidFill>
                   <a:srgbClr val="000000"/>
                 </a:solidFill>
@@ -7478,7 +8751,7 @@
                 <a:ea typeface="Play"/>
                 <a:cs typeface="Play"/>
               </a:rPr>
-              <a:t>• 42 колоды собраны вручную 2026</a:t>
+              <a:t>• Пилот 6 недель, 2 команды, 68 презентаций</a:t>
             </a:r>
           </a:p>
           <a:p>
@@ -7486,7 +8759,7 @@
               <a:spcAft>
                 <a:spcPts val="300"/>
               </a:spcAft>
-              <a:defRPr sz="1400">
+              <a:defRPr sz="1600">
                 <a:solidFill>
                   <a:srgbClr val="000000"/>
                 </a:solidFill>
@@ -7496,7 +8769,7 @@
               </a:defRPr>
             </a:pPr>
             <a:r>
-              <a:rPr sz="1400">
+              <a:rPr sz="1600">
                 <a:solidFill>
                   <a:srgbClr val="000000"/>
                 </a:solidFill>
@@ -7504,7 +8777,7 @@
                 <a:ea typeface="Play"/>
                 <a:cs typeface="Play"/>
               </a:rPr>
-              <a:t>• Сборка колоды занимает 186 мин</a:t>
+              <a:t>• Дизайнеры закрыли 38 запросов вместо 11</a:t>
             </a:r>
           </a:p>
           <a:p>
@@ -7512,7 +8785,7 @@
               <a:spcAft>
                 <a:spcPts val="300"/>
               </a:spcAft>
-              <a:defRPr sz="1400">
+              <a:defRPr sz="1600">
                 <a:solidFill>
                   <a:srgbClr val="000000"/>
                 </a:solidFill>
@@ -7522,7 +8795,7 @@
               </a:defRPr>
             </a:pPr>
             <a:r>
-              <a:rPr sz="1400">
+              <a:rPr sz="1600">
                 <a:solidFill>
                   <a:srgbClr val="000000"/>
                 </a:solidFill>
@@ -7530,15 +8803,121 @@
                 <a:ea typeface="Play"/>
                 <a:cs typeface="Play"/>
               </a:rPr>
-              <a:t>• Правки ревью добавляют 74 мин</a:t>
+              <a:t>• План расширения: 4 команды в 3-м квартале</a:t>
             </a:r>
           </a:p>
+        </p:txBody>
+      </p:sp>
+      <p:sp>
+        <p:nvSpPr>
+          <p:cNvPr id="989" name="Rectangle 988"/>
+          <p:cNvSpPr/>
+          <p:nvPr/>
+        </p:nvSpPr>
+        <p:spPr>
+          <a:xfrm>
+            <a:off x="6288206" y="4168808"/>
+            <a:ext cx="5245059" cy="37648"/>
+          </a:xfrm>
+          <a:prstGeom prst="rect">
+            <a:avLst/>
+          </a:prstGeom>
+          <a:solidFill>
+            <a:srgbClr val="0077FF"/>
+          </a:solidFill>
+          <a:ln>
+            <a:noFill/>
+          </a:ln>
+        </p:spPr>
+        <p:style>
+          <a:lnRef idx="1">
+            <a:schemeClr val="accent1"/>
+          </a:lnRef>
+          <a:fillRef idx="3">
+            <a:schemeClr val="accent1"/>
+          </a:fillRef>
+          <a:effectRef idx="2">
+            <a:schemeClr val="accent1"/>
+          </a:effectRef>
+          <a:fontRef idx="minor">
+            <a:schemeClr val="lt1"/>
+          </a:fontRef>
+        </p:style>
+        <p:txBody>
+          <a:bodyPr rtlCol="0" anchor="ctr"/>
+          <a:lstStyle/>
           <a:p>
-            <a:pPr algn="l">
-              <a:spcAft>
-                <a:spcPts val="300"/>
-              </a:spcAft>
-              <a:defRPr sz="1400">
+            <a:pPr algn="ctr"/>
+          </a:p>
+        </p:txBody>
+      </p:sp>
+      <p:sp>
+        <p:nvSpPr>
+          <p:cNvPr id="990" name="Oval 989"/>
+          <p:cNvSpPr/>
+          <p:nvPr/>
+        </p:nvSpPr>
+        <p:spPr>
+          <a:xfrm>
+            <a:off x="7024338" y="4049588"/>
+            <a:ext cx="276087" cy="276087"/>
+          </a:xfrm>
+          <a:prstGeom prst="ellipse">
+            <a:avLst/>
+          </a:prstGeom>
+          <a:solidFill>
+            <a:srgbClr val="0077FF"/>
+          </a:solidFill>
+          <a:ln>
+            <a:noFill/>
+          </a:ln>
+        </p:spPr>
+        <p:style>
+          <a:lnRef idx="1">
+            <a:schemeClr val="accent1"/>
+          </a:lnRef>
+          <a:fillRef idx="3">
+            <a:schemeClr val="accent1"/>
+          </a:fillRef>
+          <a:effectRef idx="2">
+            <a:schemeClr val="accent1"/>
+          </a:effectRef>
+          <a:fontRef idx="minor">
+            <a:schemeClr val="lt1"/>
+          </a:fontRef>
+        </p:style>
+        <p:txBody>
+          <a:bodyPr rtlCol="0" anchor="ctr"/>
+          <a:lstStyle/>
+          <a:p>
+            <a:pPr algn="ctr"/>
+          </a:p>
+        </p:txBody>
+      </p:sp>
+      <p:sp>
+        <p:nvSpPr>
+          <p:cNvPr id="991" name="TextBox 990"/>
+          <p:cNvSpPr txBox="1"/>
+          <p:nvPr/>
+        </p:nvSpPr>
+        <p:spPr>
+          <a:xfrm>
+            <a:off x="6288206" y="3591534"/>
+            <a:ext cx="2622529" cy="476879"/>
+          </a:xfrm>
+          <a:prstGeom prst="rect">
+            <a:avLst/>
+          </a:prstGeom>
+          <a:noFill/>
+        </p:spPr>
+        <p:txBody>
+          <a:bodyPr wrap="square" lIns="12700" rIns="12700" tIns="12700" bIns="12700">
+            <a:spAutoFit/>
+          </a:bodyPr>
+          <a:lstStyle/>
+          <a:p>
+            <a:pPr algn="ctr">
+              <a:defRPr sz="1400" b="0">
                 <a:solidFill>
                   <a:srgbClr val="000000"/>
                 </a:solidFill>
@@ -7548,7 +8927,7 @@
               </a:defRPr>
             </a:pPr>
             <a:r>
-              <a:rPr sz="1400">
+              <a:rPr sz="1400" b="0">
                 <a:solidFill>
                   <a:srgbClr val="000000"/>
                 </a:solidFill>
@@ -7556,15 +8935,78 @@
                 <a:ea typeface="Play"/>
                 <a:cs typeface="Play"/>
               </a:rPr>
-              <a:t>• 19/42 колод нарушают стиль</a:t>
+              <a:t>Третий квартал 2026</a:t>
             </a:r>
           </a:p>
+        </p:txBody>
+      </p:sp>
+      <p:sp>
+        <p:nvSpPr>
+          <p:cNvPr id="992" name="Oval 991"/>
+          <p:cNvSpPr/>
+          <p:nvPr/>
+        </p:nvSpPr>
+        <p:spPr>
+          <a:xfrm>
+            <a:off x="8772691" y="4049588"/>
+            <a:ext cx="276087" cy="276087"/>
+          </a:xfrm>
+          <a:prstGeom prst="ellipse">
+            <a:avLst/>
+          </a:prstGeom>
+          <a:solidFill>
+            <a:srgbClr val="0077FF"/>
+          </a:solidFill>
+          <a:ln>
+            <a:noFill/>
+          </a:ln>
+        </p:spPr>
+        <p:style>
+          <a:lnRef idx="1">
+            <a:schemeClr val="accent1"/>
+          </a:lnRef>
+          <a:fillRef idx="3">
+            <a:schemeClr val="accent1"/>
+          </a:fillRef>
+          <a:effectRef idx="2">
+            <a:schemeClr val="accent1"/>
+          </a:effectRef>
+          <a:fontRef idx="minor">
+            <a:schemeClr val="lt1"/>
+          </a:fontRef>
+        </p:style>
+        <p:txBody>
+          <a:bodyPr rtlCol="0" anchor="ctr"/>
+          <a:lstStyle/>
           <a:p>
-            <a:pPr algn="l">
-              <a:spcAft>
-                <a:spcPts val="300"/>
-              </a:spcAft>
-              <a:defRPr sz="1400">
+            <a:pPr algn="ctr"/>
+          </a:p>
+        </p:txBody>
+      </p:sp>
+      <p:sp>
+        <p:nvSpPr>
+          <p:cNvPr id="993" name="TextBox 992"/>
+          <p:cNvSpPr txBox="1"/>
+          <p:nvPr/>
+        </p:nvSpPr>
+        <p:spPr>
+          <a:xfrm>
+            <a:off x="7599470" y="4444896"/>
+            <a:ext cx="2622529" cy="476879"/>
+          </a:xfrm>
+          <a:prstGeom prst="rect">
+            <a:avLst/>
+          </a:prstGeom>
+          <a:noFill/>
+        </p:spPr>
+        <p:txBody>
+          <a:bodyPr wrap="square" lIns="12700" rIns="12700" tIns="12700" bIns="12700">
+            <a:spAutoFit/>
+          </a:bodyPr>
+          <a:lstStyle/>
+          <a:p>
+            <a:pPr algn="ctr">
+              <a:defRPr sz="1400" b="0">
                 <a:solidFill>
                   <a:srgbClr val="000000"/>
                 </a:solidFill>
@@ -7574,7 +9016,7 @@
               </a:defRPr>
             </a:pPr>
             <a:r>
-              <a:rPr sz="1400">
+              <a:rPr sz="1400" b="0">
                 <a:solidFill>
                   <a:srgbClr val="000000"/>
                 </a:solidFill>
@@ -7582,415 +9024,100 @@
                 <a:ea typeface="Play"/>
                 <a:cs typeface="Play"/>
               </a:rPr>
-              <a:t>• Дизайн‑отдел 4 закрывает 11 запросов/нед.</a:t>
+              <a:t>Четвёртый квартал 2026</a:t>
             </a:r>
           </a:p>
         </p:txBody>
       </p:sp>
-      <p:graphicFrame>
-        <p:nvGraphicFramePr>
-          <p:cNvPr id="989" name="Table 988"/>
-          <p:cNvGraphicFramePr>
-            <a:graphicFrameLocks noGrp="1"/>
-          </p:cNvGraphicFramePr>
+      <p:sp>
+        <p:nvSpPr>
+          <p:cNvPr id="994" name="Oval 993"/>
+          <p:cNvSpPr/>
           <p:nvPr/>
-        </p:nvGraphicFramePr>
-        <p:xfrm>
-          <a:off x="6288206" y="2200937"/>
-          <a:ext cx="5245059" cy="1390596"/>
-        </p:xfrm>
-        <a:graphic>
-          <a:graphicData uri="http://schemas.openxmlformats.org/drawingml/2006/table">
-            <a:tbl>
-              <a:tblPr firstRow="1" bandRow="1">
-                <a:tableStyleId>{5C22544A-7EE6-4342-B048-85BDC9FD1C3A}</a:tableStyleId>
-              </a:tblPr>
-              <a:tblGrid>
-                <a:gridCol w="2622529"/>
-                <a:gridCol w="2622530"/>
-              </a:tblGrid>
-              <a:tr h="198656">
-                <a:tc>
-                  <a:txBody>
-                    <a:bodyPr/>
-                    <a:lstStyle/>
-                    <a:p>
-                      <a:pPr>
-                        <a:defRPr sz="1300" b="1">
-                          <a:solidFill>
-                            <a:srgbClr val="FFFFFF"/>
-                          </a:solidFill>
-                          <a:latin typeface="Play"/>
-                          <a:ea typeface="Play"/>
-                          <a:cs typeface="Play"/>
-                        </a:defRPr>
-                      </a:pPr>
-                      <a:r>
-                        <a:t>Показатель</a:t>
-                      </a:r>
-                    </a:p>
-                  </a:txBody>
-                  <a:tcPr>
-                    <a:solidFill>
-                      <a:srgbClr val="0077FF"/>
-                    </a:solidFill>
-                  </a:tcPr>
-                </a:tc>
-                <a:tc>
-                  <a:txBody>
-                    <a:bodyPr/>
-                    <a:lstStyle/>
-                    <a:p>
-                      <a:pPr>
-                        <a:defRPr sz="1300" b="1">
-                          <a:solidFill>
-                            <a:srgbClr val="FFFFFF"/>
-                          </a:solidFill>
-                          <a:latin typeface="Play"/>
-                          <a:ea typeface="Play"/>
-                          <a:cs typeface="Play"/>
-                        </a:defRPr>
-                      </a:pPr>
-                      <a:r>
-                        <a:t>Значение</a:t>
-                      </a:r>
-                    </a:p>
-                  </a:txBody>
-                  <a:tcPr>
-                    <a:solidFill>
-                      <a:srgbClr val="0077FF"/>
-                    </a:solidFill>
-                  </a:tcPr>
-                </a:tc>
-              </a:tr>
-              <a:tr h="198656">
-                <a:tc>
-                  <a:txBody>
-                    <a:bodyPr/>
-                    <a:lstStyle/>
-                    <a:p>
-                      <a:pPr>
-                        <a:defRPr sz="1300" b="0">
-                          <a:solidFill>
-                            <a:srgbClr val="000000"/>
-                          </a:solidFill>
-                          <a:latin typeface="Play"/>
-                          <a:ea typeface="Play"/>
-                          <a:cs typeface="Play"/>
-                        </a:defRPr>
-                      </a:pPr>
-                      <a:r>
-                        <a:t>Колоды</a:t>
-                      </a:r>
-                    </a:p>
-                  </a:txBody>
-                  <a:tcPr>
-                    <a:solidFill>
-                      <a:srgbClr val="FFFFFF"/>
-                    </a:solidFill>
-                  </a:tcPr>
-                </a:tc>
-                <a:tc>
-                  <a:txBody>
-                    <a:bodyPr/>
-                    <a:lstStyle/>
-                    <a:p>
-                      <a:pPr>
-                        <a:defRPr sz="1300" b="0">
-                          <a:solidFill>
-                            <a:srgbClr val="000000"/>
-                          </a:solidFill>
-                          <a:latin typeface="Play"/>
-                          <a:ea typeface="Play"/>
-                          <a:cs typeface="Play"/>
-                        </a:defRPr>
-                      </a:pPr>
-                      <a:r>
-                        <a:t>42</a:t>
-                      </a:r>
-                    </a:p>
-                  </a:txBody>
-                  <a:tcPr>
-                    <a:solidFill>
-                      <a:srgbClr val="FFFFFF"/>
-                    </a:solidFill>
-                  </a:tcPr>
-                </a:tc>
-              </a:tr>
-              <a:tr h="198656">
-                <a:tc>
-                  <a:txBody>
-                    <a:bodyPr/>
-                    <a:lstStyle/>
-                    <a:p>
-                      <a:pPr>
-                        <a:defRPr sz="1300" b="0">
-                          <a:solidFill>
-                            <a:srgbClr val="000000"/>
-                          </a:solidFill>
-                          <a:latin typeface="Play"/>
-                          <a:ea typeface="Play"/>
-                          <a:cs typeface="Play"/>
-                        </a:defRPr>
-                      </a:pPr>
-                      <a:r>
-                        <a:t>Сборка колоды</a:t>
-                      </a:r>
-                    </a:p>
-                  </a:txBody>
-                  <a:tcPr>
-                    <a:solidFill>
-                      <a:srgbClr val="FFFFFF"/>
-                    </a:solidFill>
-                  </a:tcPr>
-                </a:tc>
-                <a:tc>
-                  <a:txBody>
-                    <a:bodyPr/>
-                    <a:lstStyle/>
-                    <a:p>
-                      <a:pPr>
-                        <a:defRPr sz="1300" b="0">
-                          <a:solidFill>
-                            <a:srgbClr val="000000"/>
-                          </a:solidFill>
-                          <a:latin typeface="Play"/>
-                          <a:ea typeface="Play"/>
-                          <a:cs typeface="Play"/>
-                        </a:defRPr>
-                      </a:pPr>
-                      <a:r>
-                        <a:t>186 мин</a:t>
-                      </a:r>
-                    </a:p>
-                  </a:txBody>
-                  <a:tcPr>
-                    <a:solidFill>
-                      <a:srgbClr val="FFFFFF"/>
-                    </a:solidFill>
-                  </a:tcPr>
-                </a:tc>
-              </a:tr>
-              <a:tr h="198656">
-                <a:tc>
-                  <a:txBody>
-                    <a:bodyPr/>
-                    <a:lstStyle/>
-                    <a:p>
-                      <a:pPr>
-                        <a:defRPr sz="1300" b="0">
-                          <a:solidFill>
-                            <a:srgbClr val="000000"/>
-                          </a:solidFill>
-                          <a:latin typeface="Play"/>
-                          <a:ea typeface="Play"/>
-                          <a:cs typeface="Play"/>
-                        </a:defRPr>
-                      </a:pPr>
-                      <a:r>
-                        <a:t>Правки</a:t>
-                      </a:r>
-                    </a:p>
-                  </a:txBody>
-                  <a:tcPr>
-                    <a:solidFill>
-                      <a:srgbClr val="FFFFFF"/>
-                    </a:solidFill>
-                  </a:tcPr>
-                </a:tc>
-                <a:tc>
-                  <a:txBody>
-                    <a:bodyPr/>
-                    <a:lstStyle/>
-                    <a:p>
-                      <a:pPr>
-                        <a:defRPr sz="1300" b="0">
-                          <a:solidFill>
-                            <a:srgbClr val="000000"/>
-                          </a:solidFill>
-                          <a:latin typeface="Play"/>
-                          <a:ea typeface="Play"/>
-                          <a:cs typeface="Play"/>
-                        </a:defRPr>
-                      </a:pPr>
-                      <a:r>
-                        <a:t>74 мин</a:t>
-                      </a:r>
-                    </a:p>
-                  </a:txBody>
-                  <a:tcPr>
-                    <a:solidFill>
-                      <a:srgbClr val="FFFFFF"/>
-                    </a:solidFill>
-                  </a:tcPr>
-                </a:tc>
-              </a:tr>
-              <a:tr h="198656">
-                <a:tc>
-                  <a:txBody>
-                    <a:bodyPr/>
-                    <a:lstStyle/>
-                    <a:p>
-                      <a:pPr>
-                        <a:defRPr sz="1300" b="0">
-                          <a:solidFill>
-                            <a:srgbClr val="000000"/>
-                          </a:solidFill>
-                          <a:latin typeface="Play"/>
-                          <a:ea typeface="Play"/>
-                          <a:cs typeface="Play"/>
-                        </a:defRPr>
-                      </a:pPr>
-                      <a:r>
-                        <a:t>Нарушения стиля</a:t>
-                      </a:r>
-                    </a:p>
-                  </a:txBody>
-                  <a:tcPr>
-                    <a:solidFill>
-                      <a:srgbClr val="FFFFFF"/>
-                    </a:solidFill>
-                  </a:tcPr>
-                </a:tc>
-                <a:tc>
-                  <a:txBody>
-                    <a:bodyPr/>
-                    <a:lstStyle/>
-                    <a:p>
-                      <a:pPr>
-                        <a:defRPr sz="1300" b="0">
-                          <a:solidFill>
-                            <a:srgbClr val="000000"/>
-                          </a:solidFill>
-                          <a:latin typeface="Play"/>
-                          <a:ea typeface="Play"/>
-                          <a:cs typeface="Play"/>
-                        </a:defRPr>
-                      </a:pPr>
-                      <a:r>
-                        <a:t>19/42</a:t>
-                      </a:r>
-                    </a:p>
-                  </a:txBody>
-                  <a:tcPr>
-                    <a:solidFill>
-                      <a:srgbClr val="FFFFFF"/>
-                    </a:solidFill>
-                  </a:tcPr>
-                </a:tc>
-              </a:tr>
-              <a:tr h="198656">
-                <a:tc>
-                  <a:txBody>
-                    <a:bodyPr/>
-                    <a:lstStyle/>
-                    <a:p>
-                      <a:pPr>
-                        <a:defRPr sz="1300" b="0">
-                          <a:solidFill>
-                            <a:srgbClr val="000000"/>
-                          </a:solidFill>
-                          <a:latin typeface="Play"/>
-                          <a:ea typeface="Play"/>
-                          <a:cs typeface="Play"/>
-                        </a:defRPr>
-                      </a:pPr>
-                      <a:r>
-                        <a:t>Запросы/неделя</a:t>
-                      </a:r>
-                    </a:p>
-                  </a:txBody>
-                  <a:tcPr>
-                    <a:solidFill>
-                      <a:srgbClr val="FFFFFF"/>
-                    </a:solidFill>
-                  </a:tcPr>
-                </a:tc>
-                <a:tc>
-                  <a:txBody>
-                    <a:bodyPr/>
-                    <a:lstStyle/>
-                    <a:p>
-                      <a:pPr>
-                        <a:defRPr sz="1300" b="0">
-                          <a:solidFill>
-                            <a:srgbClr val="000000"/>
-                          </a:solidFill>
-                          <a:latin typeface="Play"/>
-                          <a:ea typeface="Play"/>
-                          <a:cs typeface="Play"/>
-                        </a:defRPr>
-                      </a:pPr>
-                      <a:r>
-                        <a:t>11/27</a:t>
-                      </a:r>
-                    </a:p>
-                  </a:txBody>
-                  <a:tcPr>
-                    <a:solidFill>
-                      <a:srgbClr val="FFFFFF"/>
-                    </a:solidFill>
-                  </a:tcPr>
-                </a:tc>
-              </a:tr>
-              <a:tr h="198660">
-                <a:tc>
-                  <a:txBody>
-                    <a:bodyPr/>
-                    <a:lstStyle/>
-                    <a:p>
-                      <a:pPr>
-                        <a:defRPr sz="1300" b="0">
-                          <a:solidFill>
-                            <a:srgbClr val="000000"/>
-                          </a:solidFill>
-                          <a:latin typeface="Play"/>
-                          <a:ea typeface="Play"/>
-                          <a:cs typeface="Play"/>
-                        </a:defRPr>
-                      </a:pPr>
-                      <a:r>
-                        <a:t>Время ожидания</a:t>
-                      </a:r>
-                    </a:p>
-                  </a:txBody>
-                  <a:tcPr>
-                    <a:solidFill>
-                      <a:srgbClr val="FFFFFF"/>
-                    </a:solidFill>
-                  </a:tcPr>
-                </a:tc>
-                <a:tc>
-                  <a:txBody>
-                    <a:bodyPr/>
-                    <a:lstStyle/>
-                    <a:p>
-                      <a:pPr>
-                        <a:defRPr sz="1300" b="0">
-                          <a:solidFill>
-                            <a:srgbClr val="000000"/>
-                          </a:solidFill>
-                          <a:latin typeface="Play"/>
-                          <a:ea typeface="Play"/>
-                          <a:cs typeface="Play"/>
-                        </a:defRPr>
-                      </a:pPr>
-                      <a:r>
-                        <a:t>6 дней</a:t>
-                      </a:r>
-                    </a:p>
-                  </a:txBody>
-                  <a:tcPr>
-                    <a:solidFill>
-                      <a:srgbClr val="FFFFFF"/>
-                    </a:solidFill>
-                  </a:tcPr>
-                </a:tc>
-              </a:tr>
-            </a:tbl>
-          </a:graphicData>
-        </a:graphic>
-      </p:graphicFrame>
+        </p:nvSpPr>
+        <p:spPr>
+          <a:xfrm>
+            <a:off x="10521044" y="4049588"/>
+            <a:ext cx="276087" cy="276087"/>
+          </a:xfrm>
+          <a:prstGeom prst="ellipse">
+            <a:avLst/>
+          </a:prstGeom>
+          <a:solidFill>
+            <a:srgbClr val="0077FF"/>
+          </a:solidFill>
+          <a:ln>
+            <a:noFill/>
+          </a:ln>
+        </p:spPr>
+        <p:style>
+          <a:lnRef idx="1">
+            <a:schemeClr val="accent1"/>
+          </a:lnRef>
+          <a:fillRef idx="3">
+            <a:schemeClr val="accent1"/>
+          </a:fillRef>
+          <a:effectRef idx="2">
+            <a:schemeClr val="accent1"/>
+          </a:effectRef>
+          <a:fontRef idx="minor">
+            <a:schemeClr val="lt1"/>
+          </a:fontRef>
+        </p:style>
+        <p:txBody>
+          <a:bodyPr rtlCol="0" anchor="ctr"/>
+          <a:lstStyle/>
+          <a:p>
+            <a:pPr algn="ctr"/>
+          </a:p>
+        </p:txBody>
+      </p:sp>
+      <p:sp>
+        <p:nvSpPr>
+          <p:cNvPr id="995" name="TextBox 994"/>
+          <p:cNvSpPr txBox="1"/>
+          <p:nvPr/>
+        </p:nvSpPr>
+        <p:spPr>
+          <a:xfrm>
+            <a:off x="8910735" y="3591534"/>
+            <a:ext cx="2622529" cy="476879"/>
+          </a:xfrm>
+          <a:prstGeom prst="rect">
+            <a:avLst/>
+          </a:prstGeom>
+          <a:noFill/>
+        </p:spPr>
+        <p:txBody>
+          <a:bodyPr wrap="square" lIns="12700" rIns="12700" tIns="12700" bIns="12700">
+            <a:spAutoFit/>
+          </a:bodyPr>
+          <a:lstStyle/>
+          <a:p>
+            <a:pPr algn="ctr">
+              <a:defRPr sz="1400" b="0">
+                <a:solidFill>
+                  <a:srgbClr val="000000"/>
+                </a:solidFill>
+                <a:latin typeface="Play"/>
+                <a:ea typeface="Play"/>
+                <a:cs typeface="Play"/>
+              </a:defRPr>
+            </a:pPr>
+            <a:r>
+              <a:rPr sz="1400" b="0">
+                <a:solidFill>
+                  <a:srgbClr val="000000"/>
+                </a:solidFill>
+                <a:latin typeface="Play"/>
+                <a:ea typeface="Play"/>
+                <a:cs typeface="Play"/>
+              </a:rPr>
+              <a:t>Первый квартал 2027</a:t>
+            </a:r>
+          </a:p>
+        </p:txBody>
+      </p:sp>
     </p:spTree>
   </p:cSld>
   <p:clrMapOvr>
@@ -7999,7 +9126,239 @@
 </p:sld>
 </file>
 
-<file path=ppt/slides/slide58.xml><?xml version="1.0" encoding="utf-8"?>
+<file path=ppt/slides/slide62.xml><?xml version="1.0" encoding="utf-8"?>
+<p:sld xmlns:a="http://schemas.openxmlformats.org/drawingml/2006/main" xmlns:p="http://schemas.openxmlformats.org/presentationml/2006/main" xmlns:r="http://schemas.openxmlformats.org/officeDocument/2006/relationships">
+  <p:cSld>
+    <p:bg>
+      <p:bgPr>
+        <a:solidFill>
+          <a:schemeClr val="lt2"/>
+        </a:solidFill>
+      </p:bgPr>
+    </p:bg>
+    <p:spTree>
+      <p:nvGrpSpPr>
+        <p:cNvPr id="1" name=""/>
+        <p:cNvGrpSpPr/>
+        <p:nvPr/>
+      </p:nvGrpSpPr>
+      <p:grpSpPr/>
+      <p:sp>
+        <p:nvSpPr>
+          <p:cNvPr id="764" name="Google Shape;764;p58"/>
+          <p:cNvSpPr txBox="1"/>
+          <p:nvPr/>
+        </p:nvSpPr>
+        <p:spPr>
+          <a:xfrm>
+            <a:off x="18692059" y="4674436"/>
+            <a:ext cx="4304330" cy="678198"/>
+          </a:xfrm>
+          <a:prstGeom prst="rect">
+            <a:avLst/>
+          </a:prstGeom>
+          <a:noFill/>
+          <a:ln>
+            <a:noFill/>
+          </a:ln>
+        </p:spPr>
+        <p:txBody>
+          <a:bodyPr anchorCtr="0" anchor="t" bIns="45700" lIns="91425" spcFirstLastPara="1" rIns="91425" wrap="square" tIns="45700">
+            <a:noAutofit/>
+          </a:bodyPr>
+          <a:lstStyle/>
+          <a:p>
+            <a:pPr indent="0" lvl="0" marL="0" marR="0" rtl="0" algn="l">
+              <a:lnSpc>
+                <a:spcPct val="110000"/>
+              </a:lnSpc>
+              <a:spcBef>
+                <a:spcPts val="0"/>
+              </a:spcBef>
+              <a:spcAft>
+                <a:spcPts val="0"/>
+              </a:spcAft>
+              <a:buClr>
+                <a:schemeClr val="dk1"/>
+              </a:buClr>
+              <a:buSzPts val="1600"/>
+              <a:buFont typeface="Arial"/>
+              <a:buNone/>
+            </a:pPr>
+            <a:r>
+              <a:t/>
+            </a:r>
+            <a:endParaRPr sz="1600">
+              <a:solidFill>
+                <a:schemeClr val="dk1"/>
+              </a:solidFill>
+              <a:latin typeface="Arial"/>
+              <a:ea typeface="Arial"/>
+              <a:cs typeface="Arial"/>
+              <a:sym typeface="Arial"/>
+            </a:endParaRPr>
+          </a:p>
+        </p:txBody>
+      </p:sp>
+      <p:sp>
+        <p:nvSpPr>
+          <p:cNvPr id="765" name="title"/>
+          <p:cNvSpPr txBox="1"/>
+          <p:nvPr/>
+        </p:nvSpPr>
+        <p:spPr>
+          <a:xfrm>
+            <a:off x="677387" y="692177"/>
+            <a:ext cx="10855878" cy="1447800"/>
+          </a:xfrm>
+          <a:prstGeom prst="rect">
+            <a:avLst/>
+          </a:prstGeom>
+          <a:noFill/>
+        </p:spPr>
+        <p:txBody>
+          <a:bodyPr wrap="square" lIns="76200" rIns="76200" tIns="50800" bIns="50800">
+            <a:spAutoFit/>
+          </a:bodyPr>
+          <a:lstStyle/>
+          <a:p>
+            <a:pPr algn="l">
+              <a:spcAft>
+                <a:spcPts val="300"/>
+              </a:spcAft>
+              <a:defRPr sz="4000">
+                <a:solidFill>
+                  <a:srgbClr val="000000"/>
+                </a:solidFill>
+                <a:latin typeface="Arial"/>
+                <a:ea typeface="Arial"/>
+                <a:cs typeface="Arial"/>
+              </a:defRPr>
+            </a:pPr>
+            <a:r>
+              <a:rPr sz="4000">
+                <a:solidFill>
+                  <a:srgbClr val="000000"/>
+                </a:solidFill>
+                <a:latin typeface="Arial"/>
+                <a:ea typeface="Arial"/>
+                <a:cs typeface="Arial"/>
+              </a:rPr>
+              <a:t>Запрос к руководству: одобрение и интеграцию</a:t>
+            </a:r>
+          </a:p>
+        </p:txBody>
+      </p:sp>
+      <p:sp>
+        <p:nvSpPr>
+          <p:cNvPr id="766" name="body"/>
+          <p:cNvSpPr txBox="1"/>
+          <p:nvPr/>
+        </p:nvSpPr>
+        <p:spPr>
+          <a:xfrm>
+            <a:off x="677387" y="3695391"/>
+            <a:ext cx="10855878" cy="894080"/>
+          </a:xfrm>
+          <a:prstGeom prst="rect">
+            <a:avLst/>
+          </a:prstGeom>
+          <a:noFill/>
+        </p:spPr>
+        <p:txBody>
+          <a:bodyPr wrap="square" lIns="76200" rIns="76200" tIns="50800" bIns="50800">
+            <a:spAutoFit/>
+          </a:bodyPr>
+          <a:lstStyle/>
+          <a:p>
+            <a:pPr algn="l">
+              <a:spcAft>
+                <a:spcPts val="300"/>
+              </a:spcAft>
+              <a:defRPr sz="1600">
+                <a:solidFill>
+                  <a:srgbClr val="000000"/>
+                </a:solidFill>
+                <a:latin typeface="Play"/>
+                <a:ea typeface="Play"/>
+                <a:cs typeface="Play"/>
+              </a:defRPr>
+            </a:pPr>
+            <a:r>
+              <a:rPr sz="1600">
+                <a:solidFill>
+                  <a:srgbClr val="000000"/>
+                </a:solidFill>
+                <a:latin typeface="Play"/>
+                <a:ea typeface="Play"/>
+                <a:cs typeface="Play"/>
+              </a:rPr>
+              <a:t>• Одобрить запуск на всю компанию</a:t>
+            </a:r>
+          </a:p>
+          <a:p>
+            <a:pPr algn="l">
+              <a:spcAft>
+                <a:spcPts val="300"/>
+              </a:spcAft>
+              <a:defRPr sz="1600">
+                <a:solidFill>
+                  <a:srgbClr val="000000"/>
+                </a:solidFill>
+                <a:latin typeface="Play"/>
+                <a:ea typeface="Play"/>
+                <a:cs typeface="Play"/>
+              </a:defRPr>
+            </a:pPr>
+            <a:r>
+              <a:rPr sz="1600">
+                <a:solidFill>
+                  <a:srgbClr val="000000"/>
+                </a:solidFill>
+                <a:latin typeface="Play"/>
+                <a:ea typeface="Play"/>
+                <a:cs typeface="Play"/>
+              </a:rPr>
+              <a:t>• Интеграцию с хранилищем документов</a:t>
+            </a:r>
+          </a:p>
+          <a:p>
+            <a:pPr algn="l">
+              <a:spcAft>
+                <a:spcPts val="300"/>
+              </a:spcAft>
+              <a:defRPr sz="1600">
+                <a:solidFill>
+                  <a:srgbClr val="000000"/>
+                </a:solidFill>
+                <a:latin typeface="Play"/>
+                <a:ea typeface="Play"/>
+                <a:cs typeface="Play"/>
+              </a:defRPr>
+            </a:pPr>
+            <a:r>
+              <a:rPr sz="1600">
+                <a:solidFill>
+                  <a:srgbClr val="000000"/>
+                </a:solidFill>
+                <a:latin typeface="Play"/>
+                <a:ea typeface="Play"/>
+                <a:cs typeface="Play"/>
+              </a:rPr>
+              <a:t>• Финансирование дальнейшего развития</a:t>
+            </a:r>
+          </a:p>
+        </p:txBody>
+      </p:sp>
+    </p:spTree>
+  </p:cSld>
+  <p:clrMapOvr>
+    <a:masterClrMapping/>
+  </p:clrMapOvr>
+</p:sld>
+</file>
+
+<file path=ppt/slides/slide63.xml><?xml version="1.0" encoding="utf-8"?>
 <p:sld xmlns:a="http://schemas.openxmlformats.org/drawingml/2006/main" xmlns:p="http://schemas.openxmlformats.org/presentationml/2006/main" xmlns:r="http://schemas.openxmlformats.org/officeDocument/2006/relationships">
   <p:cSld>
     <p:bg>
@@ -8025,7 +9384,7 @@
         <p:spPr>
           <a:xfrm>
             <a:off x="677387" y="692177"/>
-            <a:ext cx="10855878" cy="822960"/>
+            <a:ext cx="10855878" cy="1447800"/>
           </a:xfrm>
           <a:prstGeom prst="rect">
             <a:avLst/>
@@ -8060,516 +9419,29 @@
                 <a:ea typeface="Arial"/>
                 <a:cs typeface="Arial"/>
               </a:rPr>
-              <a:t>Предложение</a:t>
+              <a:t>Текущее время сборки: 186 мин + 74 мин правок</a:t>
             </a:r>
           </a:p>
         </p:txBody>
       </p:sp>
-      <p:sp>
-        <p:nvSpPr>
-          <p:cNvPr id="3" name="body"/>
-          <p:cNvSpPr txBox="1"/>
+      <p:graphicFrame>
+        <p:nvGraphicFramePr>
+          <p:cNvPr id="3" name="Chart 2"/>
+          <p:cNvGraphicFramePr>
+            <a:graphicFrameLocks noGrp="1"/>
+          </p:cNvGraphicFramePr>
           <p:nvPr/>
-        </p:nvSpPr>
-        <p:spPr>
-          <a:xfrm>
-            <a:off x="677387" y="1773204"/>
-            <a:ext cx="5245059" cy="4427593"/>
-          </a:xfrm>
-          <a:prstGeom prst="rect">
-            <a:avLst/>
-          </a:prstGeom>
-          <a:noFill/>
-        </p:spPr>
-        <p:txBody>
-          <a:bodyPr wrap="square" lIns="76200" rIns="76200" tIns="50800" bIns="50800">
-            <a:spAutoFit/>
-          </a:bodyPr>
-          <a:lstStyle/>
-          <a:p>
-            <a:pPr algn="l">
-              <a:spcAft>
-                <a:spcPts val="300"/>
-              </a:spcAft>
-              <a:defRPr sz="1800">
-                <a:solidFill>
-                  <a:srgbClr val="000000"/>
-                </a:solidFill>
-                <a:latin typeface="Play"/>
-                <a:ea typeface="Play"/>
-                <a:cs typeface="Play"/>
-              </a:defRPr>
-            </a:pPr>
-            <a:r>
-              <a:rPr sz="1800">
-                <a:solidFill>
-                  <a:srgbClr val="000000"/>
-                </a:solidFill>
-                <a:latin typeface="Play"/>
-                <a:ea typeface="Play"/>
-                <a:cs typeface="Play"/>
-              </a:rPr>
-              <a:t>• Сервис принимает шаблон pptx и материалы</a:t>
-            </a:r>
-          </a:p>
-          <a:p>
-            <a:pPr algn="l">
-              <a:spcAft>
-                <a:spcPts val="300"/>
-              </a:spcAft>
-              <a:defRPr sz="1800">
-                <a:solidFill>
-                  <a:srgbClr val="000000"/>
-                </a:solidFill>
-                <a:latin typeface="Play"/>
-                <a:ea typeface="Play"/>
-                <a:cs typeface="Play"/>
-              </a:defRPr>
-            </a:pPr>
-            <a:r>
-              <a:rPr sz="1800">
-                <a:solidFill>
-                  <a:srgbClr val="000000"/>
-                </a:solidFill>
-                <a:latin typeface="Play"/>
-                <a:ea typeface="Play"/>
-                <a:cs typeface="Play"/>
-              </a:rPr>
-              <a:t>• Автоматически строит план колоды и вёрстку по дизайн‑системе</a:t>
-            </a:r>
-          </a:p>
-          <a:p>
-            <a:pPr algn="l">
-              <a:spcAft>
-                <a:spcPts val="300"/>
-              </a:spcAft>
-              <a:defRPr sz="1800">
-                <a:solidFill>
-                  <a:srgbClr val="000000"/>
-                </a:solidFill>
-                <a:latin typeface="Play"/>
-                <a:ea typeface="Play"/>
-                <a:cs typeface="Play"/>
-              </a:defRPr>
-            </a:pPr>
-            <a:r>
-              <a:rPr sz="1800">
-                <a:solidFill>
-                  <a:srgbClr val="000000"/>
-                </a:solidFill>
-                <a:latin typeface="Play"/>
-                <a:ea typeface="Play"/>
-                <a:cs typeface="Play"/>
-              </a:rPr>
-              <a:t>• Аудит качества проверяет все цифры и стили</a:t>
-            </a:r>
-          </a:p>
-          <a:p>
-            <a:pPr algn="l">
-              <a:spcAft>
-                <a:spcPts val="300"/>
-              </a:spcAft>
-              <a:defRPr sz="1800">
-                <a:solidFill>
-                  <a:srgbClr val="000000"/>
-                </a:solidFill>
-                <a:latin typeface="Play"/>
-                <a:ea typeface="Play"/>
-                <a:cs typeface="Play"/>
-              </a:defRPr>
-            </a:pPr>
-            <a:r>
-              <a:rPr sz="1800">
-                <a:solidFill>
-                  <a:srgbClr val="000000"/>
-                </a:solidFill>
-                <a:latin typeface="Play"/>
-                <a:ea typeface="Play"/>
-                <a:cs typeface="Play"/>
-              </a:rPr>
-              <a:t>• Экспорт в pptx, pdf и html без картинок</a:t>
-            </a:r>
-          </a:p>
-        </p:txBody>
-      </p:sp>
-      <p:sp>
-        <p:nvSpPr>
-          <p:cNvPr id="4" name="Pentagon 3"/>
-          <p:cNvSpPr/>
-          <p:nvPr/>
-        </p:nvSpPr>
-        <p:spPr>
-          <a:xfrm>
-            <a:off x="6288206" y="1824859"/>
-            <a:ext cx="5245059" cy="634621"/>
-          </a:xfrm>
-          <a:prstGeom prst="homePlate">
-            <a:avLst/>
-          </a:prstGeom>
-          <a:solidFill>
-            <a:srgbClr val="0077FF"/>
-          </a:solidFill>
-          <a:ln>
-            <a:noFill/>
-          </a:ln>
-        </p:spPr>
-        <p:style>
-          <a:lnRef idx="1">
-            <a:schemeClr val="accent1"/>
-          </a:lnRef>
-          <a:fillRef idx="3">
-            <a:schemeClr val="accent1"/>
-          </a:fillRef>
-          <a:effectRef idx="2">
-            <a:schemeClr val="accent1"/>
-          </a:effectRef>
-          <a:fontRef idx="minor">
-            <a:schemeClr val="lt1"/>
-          </a:fontRef>
-        </p:style>
-        <p:txBody>
-          <a:bodyPr rtlCol="0" anchor="ctr" wrap="square" lIns="12700" rIns="12700" tIns="12700" bIns="12700"/>
-          <a:lstStyle/>
-          <a:p>
-            <a:pPr algn="ctr">
-              <a:defRPr sz="1400" b="0">
-                <a:solidFill>
-                  <a:srgbClr val="FFFFFF"/>
-                </a:solidFill>
-                <a:latin typeface="Play"/>
-                <a:ea typeface="Play"/>
-                <a:cs typeface="Play"/>
-              </a:defRPr>
-            </a:pPr>
-            <a:r>
-              <a:rPr sz="1400" b="0">
-                <a:solidFill>
-                  <a:srgbClr val="FFFFFF"/>
-                </a:solidFill>
-                <a:latin typeface="Play"/>
-                <a:ea typeface="Play"/>
-                <a:cs typeface="Play"/>
-              </a:rPr>
-              <a:t>Ввод шаблона</a:t>
-            </a:r>
-          </a:p>
-        </p:txBody>
-      </p:sp>
-      <p:sp>
-        <p:nvSpPr>
-          <p:cNvPr id="5" name="Chevron 4"/>
-          <p:cNvSpPr/>
-          <p:nvPr/>
-        </p:nvSpPr>
-        <p:spPr>
-          <a:xfrm>
-            <a:off x="6288206" y="2562791"/>
-            <a:ext cx="5245059" cy="634621"/>
-          </a:xfrm>
-          <a:prstGeom prst="chevron">
-            <a:avLst/>
-          </a:prstGeom>
-          <a:solidFill>
-            <a:srgbClr val="0077FF"/>
-          </a:solidFill>
-          <a:ln>
-            <a:noFill/>
-          </a:ln>
-        </p:spPr>
-        <p:style>
-          <a:lnRef idx="1">
-            <a:schemeClr val="accent1"/>
-          </a:lnRef>
-          <a:fillRef idx="3">
-            <a:schemeClr val="accent1"/>
-          </a:fillRef>
-          <a:effectRef idx="2">
-            <a:schemeClr val="accent1"/>
-          </a:effectRef>
-          <a:fontRef idx="minor">
-            <a:schemeClr val="lt1"/>
-          </a:fontRef>
-        </p:style>
-        <p:txBody>
-          <a:bodyPr rtlCol="0" anchor="ctr" wrap="square" lIns="12700" rIns="12700" tIns="12700" bIns="12700"/>
-          <a:lstStyle/>
-          <a:p>
-            <a:pPr algn="ctr">
-              <a:defRPr sz="1400" b="0">
-                <a:solidFill>
-                  <a:srgbClr val="FFFFFF"/>
-                </a:solidFill>
-                <a:latin typeface="Play"/>
-                <a:ea typeface="Play"/>
-                <a:cs typeface="Play"/>
-              </a:defRPr>
-            </a:pPr>
-            <a:r>
-              <a:rPr sz="1400" b="0">
-                <a:solidFill>
-                  <a:srgbClr val="FFFFFF"/>
-                </a:solidFill>
-                <a:latin typeface="Play"/>
-                <a:ea typeface="Play"/>
-                <a:cs typeface="Play"/>
-              </a:rPr>
-              <a:t>Анализ</a:t>
-            </a:r>
-          </a:p>
-        </p:txBody>
-      </p:sp>
-      <p:sp>
-        <p:nvSpPr>
-          <p:cNvPr id="6" name="Chevron 5"/>
-          <p:cNvSpPr/>
-          <p:nvPr/>
-        </p:nvSpPr>
-        <p:spPr>
-          <a:xfrm>
-            <a:off x="6288206" y="3300723"/>
-            <a:ext cx="5245059" cy="634621"/>
-          </a:xfrm>
-          <a:prstGeom prst="chevron">
-            <a:avLst/>
-          </a:prstGeom>
-          <a:solidFill>
-            <a:srgbClr val="0077FF"/>
-          </a:solidFill>
-          <a:ln>
-            <a:noFill/>
-          </a:ln>
-        </p:spPr>
-        <p:style>
-          <a:lnRef idx="1">
-            <a:schemeClr val="accent1"/>
-          </a:lnRef>
-          <a:fillRef idx="3">
-            <a:schemeClr val="accent1"/>
-          </a:fillRef>
-          <a:effectRef idx="2">
-            <a:schemeClr val="accent1"/>
-          </a:effectRef>
-          <a:fontRef idx="minor">
-            <a:schemeClr val="lt1"/>
-          </a:fontRef>
-        </p:style>
-        <p:txBody>
-          <a:bodyPr rtlCol="0" anchor="ctr" wrap="square" lIns="12700" rIns="12700" tIns="12700" bIns="12700"/>
-          <a:lstStyle/>
-          <a:p>
-            <a:pPr algn="ctr">
-              <a:defRPr sz="1400" b="0">
-                <a:solidFill>
-                  <a:srgbClr val="FFFFFF"/>
-                </a:solidFill>
-                <a:latin typeface="Play"/>
-                <a:ea typeface="Play"/>
-                <a:cs typeface="Play"/>
-              </a:defRPr>
-            </a:pPr>
-            <a:r>
-              <a:rPr sz="1400" b="0">
-                <a:solidFill>
-                  <a:srgbClr val="FFFFFF"/>
-                </a:solidFill>
-                <a:latin typeface="Play"/>
-                <a:ea typeface="Play"/>
-                <a:cs typeface="Play"/>
-              </a:rPr>
-              <a:t>План колоды</a:t>
-            </a:r>
-          </a:p>
-        </p:txBody>
-      </p:sp>
-      <p:sp>
-        <p:nvSpPr>
-          <p:cNvPr id="7" name="Chevron 6"/>
-          <p:cNvSpPr/>
-          <p:nvPr/>
-        </p:nvSpPr>
-        <p:spPr>
-          <a:xfrm>
-            <a:off x="6288206" y="4038655"/>
-            <a:ext cx="5245059" cy="634621"/>
-          </a:xfrm>
-          <a:prstGeom prst="chevron">
-            <a:avLst/>
-          </a:prstGeom>
-          <a:solidFill>
-            <a:srgbClr val="0077FF"/>
-          </a:solidFill>
-          <a:ln>
-            <a:noFill/>
-          </a:ln>
-        </p:spPr>
-        <p:style>
-          <a:lnRef idx="1">
-            <a:schemeClr val="accent1"/>
-          </a:lnRef>
-          <a:fillRef idx="3">
-            <a:schemeClr val="accent1"/>
-          </a:fillRef>
-          <a:effectRef idx="2">
-            <a:schemeClr val="accent1"/>
-          </a:effectRef>
-          <a:fontRef idx="minor">
-            <a:schemeClr val="lt1"/>
-          </a:fontRef>
-        </p:style>
-        <p:txBody>
-          <a:bodyPr rtlCol="0" anchor="ctr" wrap="square" lIns="12700" rIns="12700" tIns="12700" bIns="12700"/>
-          <a:lstStyle/>
-          <a:p>
-            <a:pPr algn="ctr">
-              <a:defRPr sz="1400" b="0">
-                <a:solidFill>
-                  <a:srgbClr val="FFFFFF"/>
-                </a:solidFill>
-                <a:latin typeface="Play"/>
-                <a:ea typeface="Play"/>
-                <a:cs typeface="Play"/>
-              </a:defRPr>
-            </a:pPr>
-            <a:r>
-              <a:rPr sz="1400" b="0">
-                <a:solidFill>
-                  <a:srgbClr val="FFFFFF"/>
-                </a:solidFill>
-                <a:latin typeface="Play"/>
-                <a:ea typeface="Play"/>
-                <a:cs typeface="Play"/>
-              </a:rPr>
-              <a:t>Вёрстка</a:t>
-            </a:r>
-          </a:p>
-        </p:txBody>
-      </p:sp>
-      <p:sp>
-        <p:nvSpPr>
-          <p:cNvPr id="8" name="Chevron 7"/>
-          <p:cNvSpPr/>
-          <p:nvPr/>
-        </p:nvSpPr>
-        <p:spPr>
-          <a:xfrm>
-            <a:off x="6288206" y="4776587"/>
-            <a:ext cx="5245059" cy="634621"/>
-          </a:xfrm>
-          <a:prstGeom prst="chevron">
-            <a:avLst/>
-          </a:prstGeom>
-          <a:solidFill>
-            <a:srgbClr val="0077FF"/>
-          </a:solidFill>
-          <a:ln>
-            <a:noFill/>
-          </a:ln>
-        </p:spPr>
-        <p:style>
-          <a:lnRef idx="1">
-            <a:schemeClr val="accent1"/>
-          </a:lnRef>
-          <a:fillRef idx="3">
-            <a:schemeClr val="accent1"/>
-          </a:fillRef>
-          <a:effectRef idx="2">
-            <a:schemeClr val="accent1"/>
-          </a:effectRef>
-          <a:fontRef idx="minor">
-            <a:schemeClr val="lt1"/>
-          </a:fontRef>
-        </p:style>
-        <p:txBody>
-          <a:bodyPr rtlCol="0" anchor="ctr" wrap="square" lIns="12700" rIns="12700" tIns="12700" bIns="12700"/>
-          <a:lstStyle/>
-          <a:p>
-            <a:pPr algn="ctr">
-              <a:defRPr sz="1400" b="0">
-                <a:solidFill>
-                  <a:srgbClr val="FFFFFF"/>
-                </a:solidFill>
-                <a:latin typeface="Play"/>
-                <a:ea typeface="Play"/>
-                <a:cs typeface="Play"/>
-              </a:defRPr>
-            </a:pPr>
-            <a:r>
-              <a:rPr sz="1400" b="0">
-                <a:solidFill>
-                  <a:srgbClr val="FFFFFF"/>
-                </a:solidFill>
-                <a:latin typeface="Play"/>
-                <a:ea typeface="Play"/>
-                <a:cs typeface="Play"/>
-              </a:rPr>
-              <a:t>Аудит</a:t>
-            </a:r>
-          </a:p>
-        </p:txBody>
-      </p:sp>
-      <p:sp>
-        <p:nvSpPr>
-          <p:cNvPr id="9" name="Chevron 8"/>
-          <p:cNvSpPr/>
-          <p:nvPr/>
-        </p:nvSpPr>
-        <p:spPr>
-          <a:xfrm>
-            <a:off x="6288206" y="5514520"/>
-            <a:ext cx="5245059" cy="634621"/>
-          </a:xfrm>
-          <a:prstGeom prst="chevron">
-            <a:avLst/>
-          </a:prstGeom>
-          <a:solidFill>
-            <a:srgbClr val="0077FF"/>
-          </a:solidFill>
-          <a:ln>
-            <a:noFill/>
-          </a:ln>
-        </p:spPr>
-        <p:style>
-          <a:lnRef idx="1">
-            <a:schemeClr val="accent1"/>
-          </a:lnRef>
-          <a:fillRef idx="3">
-            <a:schemeClr val="accent1"/>
-          </a:fillRef>
-          <a:effectRef idx="2">
-            <a:schemeClr val="accent1"/>
-          </a:effectRef>
-          <a:fontRef idx="minor">
-            <a:schemeClr val="lt1"/>
-          </a:fontRef>
-        </p:style>
-        <p:txBody>
-          <a:bodyPr rtlCol="0" anchor="ctr" wrap="square" lIns="12700" rIns="12700" tIns="12700" bIns="12700"/>
-          <a:lstStyle/>
-          <a:p>
-            <a:pPr algn="ctr">
-              <a:defRPr sz="1400" b="0">
-                <a:solidFill>
-                  <a:srgbClr val="FFFFFF"/>
-                </a:solidFill>
-                <a:latin typeface="Play"/>
-                <a:ea typeface="Play"/>
-                <a:cs typeface="Play"/>
-              </a:defRPr>
-            </a:pPr>
-            <a:r>
-              <a:rPr sz="1400" b="0">
-                <a:solidFill>
-                  <a:srgbClr val="FFFFFF"/>
-                </a:solidFill>
-                <a:latin typeface="Play"/>
-                <a:ea typeface="Play"/>
-                <a:cs typeface="Play"/>
-              </a:rPr>
-              <a:t>Экспорт</a:t>
-            </a:r>
-          </a:p>
-        </p:txBody>
-      </p:sp>
+        </p:nvGraphicFramePr>
+        <p:xfrm>
+          <a:off x="6288206" y="2277137"/>
+          <a:ext cx="5245059" cy="3923659"/>
+        </p:xfrm>
+        <a:graphic>
+          <a:graphicData uri="http://schemas.openxmlformats.org/drawingml/2006/chart">
+            <c:chart xmlns:c="http://schemas.openxmlformats.org/drawingml/2006/chart" r:id="rId2"/>
+          </a:graphicData>
+        </a:graphic>
+      </p:graphicFrame>
     </p:spTree>
   </p:cSld>
   <p:clrMapOvr>
@@ -8578,7 +9450,7 @@
 </p:sld>
 </file>
 
-<file path=ppt/slides/slide59.xml><?xml version="1.0" encoding="utf-8"?>
+<file path=ppt/slides/slide64.xml><?xml version="1.0" encoding="utf-8"?>
 <p:sld xmlns:a="http://schemas.openxmlformats.org/drawingml/2006/main" xmlns:p="http://schemas.openxmlformats.org/presentationml/2006/main" xmlns:r="http://schemas.openxmlformats.org/officeDocument/2006/relationships">
   <p:cSld>
     <p:bg>
@@ -8604,7 +9476,7 @@
         <p:spPr>
           <a:xfrm>
             <a:off x="677387" y="692177"/>
-            <a:ext cx="10855878" cy="822960"/>
+            <a:ext cx="10855878" cy="1447800"/>
           </a:xfrm>
           <a:prstGeom prst="rect">
             <a:avLst/>
@@ -8639,149 +9511,22 @@
                 <a:ea typeface="Arial"/>
                 <a:cs typeface="Arial"/>
               </a:rPr>
-              <a:t>Ожидаемый эффект</a:t>
-            </a:r>
-          </a:p>
-        </p:txBody>
-      </p:sp>
-      <p:sp>
-        <p:nvSpPr>
-          <p:cNvPr id="3" name="body"/>
-          <p:cNvSpPr txBox="1"/>
-          <p:nvPr/>
-        </p:nvSpPr>
-        <p:spPr>
-          <a:xfrm>
-            <a:off x="677387" y="1773204"/>
-            <a:ext cx="5245059" cy="4427593"/>
-          </a:xfrm>
-          <a:prstGeom prst="rect">
-            <a:avLst/>
-          </a:prstGeom>
-          <a:noFill/>
-        </p:spPr>
-        <p:txBody>
-          <a:bodyPr wrap="square" lIns="76200" rIns="76200" tIns="50800" bIns="50800">
-            <a:spAutoFit/>
-          </a:bodyPr>
-          <a:lstStyle/>
-          <a:p>
-            <a:pPr algn="l">
-              <a:spcAft>
-                <a:spcPts val="300"/>
-              </a:spcAft>
-              <a:defRPr sz="1600">
-                <a:solidFill>
-                  <a:srgbClr val="000000"/>
-                </a:solidFill>
-                <a:latin typeface="Play"/>
-                <a:ea typeface="Play"/>
-                <a:cs typeface="Play"/>
-              </a:defRPr>
-            </a:pPr>
-            <a:r>
-              <a:rPr sz="1600">
-                <a:solidFill>
-                  <a:srgbClr val="000000"/>
-                </a:solidFill>
-                <a:latin typeface="Play"/>
-                <a:ea typeface="Play"/>
-                <a:cs typeface="Play"/>
-              </a:rPr>
-              <a:t>• Средняя сборка колоды 4 минуты вместо 186</a:t>
-            </a:r>
-          </a:p>
-          <a:p>
-            <a:pPr algn="l">
-              <a:spcAft>
-                <a:spcPts val="300"/>
-              </a:spcAft>
-              <a:defRPr sz="1600">
-                <a:solidFill>
-                  <a:srgbClr val="000000"/>
-                </a:solidFill>
-                <a:latin typeface="Play"/>
-                <a:ea typeface="Play"/>
-                <a:cs typeface="Play"/>
-              </a:defRPr>
-            </a:pPr>
-            <a:r>
-              <a:rPr sz="1600">
-                <a:solidFill>
-                  <a:srgbClr val="000000"/>
-                </a:solidFill>
-                <a:latin typeface="Play"/>
-                <a:ea typeface="Play"/>
-                <a:cs typeface="Play"/>
-              </a:rPr>
-              <a:t>• Время до первой версии сократилось с 6 дней до 1</a:t>
-            </a:r>
-          </a:p>
-          <a:p>
-            <a:pPr algn="l">
-              <a:spcAft>
-                <a:spcPts val="300"/>
-              </a:spcAft>
-              <a:defRPr sz="1600">
-                <a:solidFill>
-                  <a:srgbClr val="000000"/>
-                </a:solidFill>
-                <a:latin typeface="Play"/>
-                <a:ea typeface="Play"/>
-                <a:cs typeface="Play"/>
-              </a:defRPr>
-            </a:pPr>
-            <a:r>
-              <a:rPr sz="1600">
-                <a:solidFill>
-                  <a:srgbClr val="000000"/>
-                </a:solidFill>
-                <a:latin typeface="Play"/>
-                <a:ea typeface="Play"/>
-                <a:cs typeface="Play"/>
-              </a:rPr>
-              <a:t>• Нарушения фирменного стиля снизились до 2 из 68</a:t>
-            </a:r>
-          </a:p>
-          <a:p>
-            <a:pPr algn="l">
-              <a:spcAft>
-                <a:spcPts val="300"/>
-              </a:spcAft>
-              <a:defRPr sz="1600">
-                <a:solidFill>
-                  <a:srgbClr val="000000"/>
-                </a:solidFill>
-                <a:latin typeface="Play"/>
-                <a:ea typeface="Play"/>
-                <a:cs typeface="Play"/>
-              </a:defRPr>
-            </a:pPr>
-            <a:r>
-              <a:rPr sz="1600">
-                <a:solidFill>
-                  <a:srgbClr val="000000"/>
-                </a:solidFill>
-                <a:latin typeface="Play"/>
-                <a:ea typeface="Play"/>
-                <a:cs typeface="Play"/>
-              </a:rPr>
-              <a:t>• Дизайнеры закрыли 38 запросов вместо 11 в неделю</a:t>
+              <a:t>Улучшения в пилоте: 4 мин сборки, 38 запросов</a:t>
             </a:r>
           </a:p>
         </p:txBody>
       </p:sp>
       <p:graphicFrame>
         <p:nvGraphicFramePr>
-          <p:cNvPr id="4" name="Chart 3"/>
+          <p:cNvPr id="3" name="Chart 2"/>
           <p:cNvGraphicFramePr>
             <a:graphicFrameLocks noGrp="1"/>
           </p:cNvGraphicFramePr>
           <p:nvPr/>
         </p:nvGraphicFramePr>
         <p:xfrm>
-          <a:off x="6288206" y="1773204"/>
-          <a:ext cx="5245059" cy="4427593"/>
+          <a:off x="6288206" y="2277137"/>
+          <a:ext cx="5245059" cy="3923659"/>
         </p:xfrm>
         <a:graphic>
           <a:graphicData uri="http://schemas.openxmlformats.org/drawingml/2006/chart">
@@ -8797,7 +9542,7 @@
 </p:sld>
 </file>
 
-<file path=ppt/slides/slide60.xml><?xml version="1.0" encoding="utf-8"?>
+<file path=ppt/slides/slide65.xml><?xml version="1.0" encoding="utf-8"?>
 <p:sld xmlns:a="http://schemas.openxmlformats.org/drawingml/2006/main" xmlns:p="http://schemas.openxmlformats.org/presentationml/2006/main" xmlns:r="http://schemas.openxmlformats.org/officeDocument/2006/relationships">
   <p:cSld>
     <p:spTree>
@@ -8868,7 +9613,7 @@
         <p:spPr>
           <a:xfrm>
             <a:off x="677387" y="692177"/>
-            <a:ext cx="10855878" cy="822960"/>
+            <a:ext cx="10855878" cy="1447800"/>
           </a:xfrm>
           <a:prstGeom prst="rect">
             <a:avLst/>
@@ -8903,851 +9648,7 @@
                 <a:ea typeface="Arial"/>
                 <a:cs typeface="Arial"/>
               </a:rPr>
-              <a:t>Ресурсы и сроки</a:t>
-            </a:r>
-          </a:p>
-        </p:txBody>
-      </p:sp>
-      <p:sp>
-        <p:nvSpPr>
-          <p:cNvPr id="921" name="body"/>
-          <p:cNvSpPr txBox="1"/>
-          <p:nvPr/>
-        </p:nvSpPr>
-        <p:spPr>
-          <a:xfrm>
-            <a:off x="677387" y="2200937"/>
-            <a:ext cx="5245059" cy="2150325"/>
-          </a:xfrm>
-          <a:prstGeom prst="rect">
-            <a:avLst/>
-          </a:prstGeom>
-          <a:noFill/>
-        </p:spPr>
-        <p:txBody>
-          <a:bodyPr wrap="square" lIns="76200" rIns="76200" tIns="50800" bIns="50800">
-            <a:spAutoFit/>
-          </a:bodyPr>
-          <a:lstStyle/>
-          <a:p>
-            <a:pPr algn="l">
-              <a:spcAft>
-                <a:spcPts val="300"/>
-              </a:spcAft>
-              <a:defRPr sz="1600">
-                <a:solidFill>
-                  <a:srgbClr val="000000"/>
-                </a:solidFill>
-                <a:latin typeface="Play"/>
-                <a:ea typeface="Play"/>
-                <a:cs typeface="Play"/>
-              </a:defRPr>
-            </a:pPr>
-            <a:r>
-              <a:rPr sz="1600">
-                <a:solidFill>
-                  <a:srgbClr val="000000"/>
-                </a:solidFill>
-                <a:latin typeface="Play"/>
-                <a:ea typeface="Play"/>
-                <a:cs typeface="Play"/>
-              </a:rPr>
-              <a:t>• 2 vCPU / 2 ГБ RAM</a:t>
-            </a:r>
-          </a:p>
-          <a:p>
-            <a:pPr algn="l">
-              <a:spcAft>
-                <a:spcPts val="300"/>
-              </a:spcAft>
-              <a:defRPr sz="1600">
-                <a:solidFill>
-                  <a:srgbClr val="000000"/>
-                </a:solidFill>
-                <a:latin typeface="Play"/>
-                <a:ea typeface="Play"/>
-                <a:cs typeface="Play"/>
-              </a:defRPr>
-            </a:pPr>
-            <a:r>
-              <a:rPr sz="1600">
-                <a:solidFill>
-                  <a:srgbClr val="000000"/>
-                </a:solidFill>
-                <a:latin typeface="Play"/>
-                <a:ea typeface="Play"/>
-                <a:cs typeface="Play"/>
-              </a:rPr>
-              <a:t>• gpt-oss-20b подключен протоколу</a:t>
-            </a:r>
-          </a:p>
-          <a:p>
-            <a:pPr algn="l">
-              <a:spcAft>
-                <a:spcPts val="300"/>
-              </a:spcAft>
-              <a:defRPr sz="1600">
-                <a:solidFill>
-                  <a:srgbClr val="000000"/>
-                </a:solidFill>
-                <a:latin typeface="Play"/>
-                <a:ea typeface="Play"/>
-                <a:cs typeface="Play"/>
-              </a:defRPr>
-            </a:pPr>
-            <a:r>
-              <a:rPr sz="1600">
-                <a:solidFill>
-                  <a:srgbClr val="000000"/>
-                </a:solidFill>
-                <a:latin typeface="Play"/>
-                <a:ea typeface="Play"/>
-                <a:cs typeface="Play"/>
-              </a:rPr>
-              <a:t>• Инференс 6 недель 1 400 руб.</a:t>
-            </a:r>
-          </a:p>
-          <a:p>
-            <a:pPr algn="l">
-              <a:spcAft>
-                <a:spcPts val="300"/>
-              </a:spcAft>
-              <a:defRPr sz="1600">
-                <a:solidFill>
-                  <a:srgbClr val="000000"/>
-                </a:solidFill>
-                <a:latin typeface="Play"/>
-                <a:ea typeface="Play"/>
-                <a:cs typeface="Play"/>
-              </a:defRPr>
-            </a:pPr>
-            <a:r>
-              <a:rPr sz="1600">
-                <a:solidFill>
-                  <a:srgbClr val="000000"/>
-                </a:solidFill>
-                <a:latin typeface="Play"/>
-                <a:ea typeface="Play"/>
-                <a:cs typeface="Play"/>
-              </a:rPr>
-              <a:t>• Квартал 2026: 4 команды, домен, HTTPS</a:t>
-            </a:r>
-          </a:p>
-          <a:p>
-            <a:pPr algn="l">
-              <a:spcAft>
-                <a:spcPts val="300"/>
-              </a:spcAft>
-              <a:defRPr sz="1600">
-                <a:solidFill>
-                  <a:srgbClr val="000000"/>
-                </a:solidFill>
-                <a:latin typeface="Play"/>
-                <a:ea typeface="Play"/>
-                <a:cs typeface="Play"/>
-              </a:defRPr>
-            </a:pPr>
-            <a:r>
-              <a:rPr sz="1600">
-                <a:solidFill>
-                  <a:srgbClr val="000000"/>
-                </a:solidFill>
-                <a:latin typeface="Play"/>
-                <a:ea typeface="Play"/>
-                <a:cs typeface="Play"/>
-              </a:rPr>
-              <a:t>• Квартал 2026: доступ, интеграция хранилища</a:t>
-            </a:r>
-          </a:p>
-          <a:p>
-            <a:pPr algn="l">
-              <a:spcAft>
-                <a:spcPts val="300"/>
-              </a:spcAft>
-              <a:defRPr sz="1600">
-                <a:solidFill>
-                  <a:srgbClr val="000000"/>
-                </a:solidFill>
-                <a:latin typeface="Play"/>
-                <a:ea typeface="Play"/>
-                <a:cs typeface="Play"/>
-              </a:defRPr>
-            </a:pPr>
-            <a:r>
-              <a:rPr sz="1600">
-                <a:solidFill>
-                  <a:srgbClr val="000000"/>
-                </a:solidFill>
-                <a:latin typeface="Play"/>
-                <a:ea typeface="Play"/>
-                <a:cs typeface="Play"/>
-              </a:rPr>
-              <a:t>• 2027: генерация иллюстраций в стиле шаблона</a:t>
-            </a:r>
-          </a:p>
-        </p:txBody>
-      </p:sp>
-      <p:sp>
-        <p:nvSpPr>
-          <p:cNvPr id="922" name="Rectangle 921"/>
-          <p:cNvSpPr/>
-          <p:nvPr/>
-        </p:nvSpPr>
-        <p:spPr>
-          <a:xfrm>
-            <a:off x="6288206" y="3190086"/>
-            <a:ext cx="5245059" cy="64509"/>
-          </a:xfrm>
-          <a:prstGeom prst="rect">
-            <a:avLst/>
-          </a:prstGeom>
-          <a:solidFill>
-            <a:srgbClr val="0077FF"/>
-          </a:solidFill>
-          <a:ln>
-            <a:noFill/>
-          </a:ln>
-        </p:spPr>
-        <p:style>
-          <a:lnRef idx="1">
-            <a:schemeClr val="accent1"/>
-          </a:lnRef>
-          <a:fillRef idx="3">
-            <a:schemeClr val="accent1"/>
-          </a:fillRef>
-          <a:effectRef idx="2">
-            <a:schemeClr val="accent1"/>
-          </a:effectRef>
-          <a:fontRef idx="minor">
-            <a:schemeClr val="lt1"/>
-          </a:fontRef>
-        </p:style>
-        <p:txBody>
-          <a:bodyPr rtlCol="0" anchor="ctr"/>
-          <a:lstStyle/>
-          <a:p>
-            <a:pPr algn="ctr"/>
-          </a:p>
-        </p:txBody>
-      </p:sp>
-      <p:sp>
-        <p:nvSpPr>
-          <p:cNvPr id="923" name="Oval 922"/>
-          <p:cNvSpPr/>
-          <p:nvPr/>
-        </p:nvSpPr>
-        <p:spPr>
-          <a:xfrm>
-            <a:off x="6925846" y="2985805"/>
-            <a:ext cx="473071" cy="473071"/>
-          </a:xfrm>
-          <a:prstGeom prst="ellipse">
-            <a:avLst/>
-          </a:prstGeom>
-          <a:solidFill>
-            <a:srgbClr val="0077FF"/>
-          </a:solidFill>
-          <a:ln>
-            <a:noFill/>
-          </a:ln>
-        </p:spPr>
-        <p:style>
-          <a:lnRef idx="1">
-            <a:schemeClr val="accent1"/>
-          </a:lnRef>
-          <a:fillRef idx="3">
-            <a:schemeClr val="accent1"/>
-          </a:fillRef>
-          <a:effectRef idx="2">
-            <a:schemeClr val="accent1"/>
-          </a:effectRef>
-          <a:fontRef idx="minor">
-            <a:schemeClr val="lt1"/>
-          </a:fontRef>
-        </p:style>
-        <p:txBody>
-          <a:bodyPr rtlCol="0" anchor="ctr"/>
-          <a:lstStyle/>
-          <a:p>
-            <a:pPr algn="ctr"/>
-          </a:p>
-        </p:txBody>
-      </p:sp>
-      <p:sp>
-        <p:nvSpPr>
-          <p:cNvPr id="924" name="TextBox 923"/>
-          <p:cNvSpPr txBox="1"/>
-          <p:nvPr/>
-        </p:nvSpPr>
-        <p:spPr>
-          <a:xfrm>
-            <a:off x="6288206" y="2200937"/>
-            <a:ext cx="2622529" cy="817123"/>
-          </a:xfrm>
-          <a:prstGeom prst="rect">
-            <a:avLst/>
-          </a:prstGeom>
-          <a:noFill/>
-        </p:spPr>
-        <p:txBody>
-          <a:bodyPr wrap="square" lIns="12700" rIns="12700" tIns="12700" bIns="12700">
-            <a:spAutoFit/>
-          </a:bodyPr>
-          <a:lstStyle/>
-          <a:p>
-            <a:pPr algn="ctr">
-              <a:defRPr sz="1400" b="0">
-                <a:solidFill>
-                  <a:srgbClr val="000000"/>
-                </a:solidFill>
-                <a:latin typeface="Play"/>
-                <a:ea typeface="Play"/>
-                <a:cs typeface="Play"/>
-              </a:defRPr>
-            </a:pPr>
-            <a:r>
-              <a:rPr sz="1400" b="0">
-                <a:solidFill>
-                  <a:srgbClr val="000000"/>
-                </a:solidFill>
-                <a:latin typeface="Play"/>
-                <a:ea typeface="Play"/>
-                <a:cs typeface="Play"/>
-              </a:rPr>
-              <a:t>Третий квартал 2026</a:t>
-            </a:r>
-          </a:p>
-        </p:txBody>
-      </p:sp>
-      <p:sp>
-        <p:nvSpPr>
-          <p:cNvPr id="925" name="Oval 924"/>
-          <p:cNvSpPr/>
-          <p:nvPr/>
-        </p:nvSpPr>
-        <p:spPr>
-          <a:xfrm>
-            <a:off x="8674199" y="2985805"/>
-            <a:ext cx="473071" cy="473071"/>
-          </a:xfrm>
-          <a:prstGeom prst="ellipse">
-            <a:avLst/>
-          </a:prstGeom>
-          <a:solidFill>
-            <a:srgbClr val="0077FF"/>
-          </a:solidFill>
-          <a:ln>
-            <a:noFill/>
-          </a:ln>
-        </p:spPr>
-        <p:style>
-          <a:lnRef idx="1">
-            <a:schemeClr val="accent1"/>
-          </a:lnRef>
-          <a:fillRef idx="3">
-            <a:schemeClr val="accent1"/>
-          </a:fillRef>
-          <a:effectRef idx="2">
-            <a:schemeClr val="accent1"/>
-          </a:effectRef>
-          <a:fontRef idx="minor">
-            <a:schemeClr val="lt1"/>
-          </a:fontRef>
-        </p:style>
-        <p:txBody>
-          <a:bodyPr rtlCol="0" anchor="ctr"/>
-          <a:lstStyle/>
-          <a:p>
-            <a:pPr algn="ctr"/>
-          </a:p>
-        </p:txBody>
-      </p:sp>
-      <p:sp>
-        <p:nvSpPr>
-          <p:cNvPr id="926" name="TextBox 925"/>
-          <p:cNvSpPr txBox="1"/>
-          <p:nvPr/>
-        </p:nvSpPr>
-        <p:spPr>
-          <a:xfrm>
-            <a:off x="7599470" y="3663158"/>
-            <a:ext cx="2622529" cy="817123"/>
-          </a:xfrm>
-          <a:prstGeom prst="rect">
-            <a:avLst/>
-          </a:prstGeom>
-          <a:noFill/>
-        </p:spPr>
-        <p:txBody>
-          <a:bodyPr wrap="square" lIns="12700" rIns="12700" tIns="12700" bIns="12700">
-            <a:spAutoFit/>
-          </a:bodyPr>
-          <a:lstStyle/>
-          <a:p>
-            <a:pPr algn="ctr">
-              <a:defRPr sz="1400" b="0">
-                <a:solidFill>
-                  <a:srgbClr val="000000"/>
-                </a:solidFill>
-                <a:latin typeface="Play"/>
-                <a:ea typeface="Play"/>
-                <a:cs typeface="Play"/>
-              </a:defRPr>
-            </a:pPr>
-            <a:r>
-              <a:rPr sz="1400" b="0">
-                <a:solidFill>
-                  <a:srgbClr val="000000"/>
-                </a:solidFill>
-                <a:latin typeface="Play"/>
-                <a:ea typeface="Play"/>
-                <a:cs typeface="Play"/>
-              </a:rPr>
-              <a:t>Четвёртый квартал 2026</a:t>
-            </a:r>
-          </a:p>
-        </p:txBody>
-      </p:sp>
-      <p:sp>
-        <p:nvSpPr>
-          <p:cNvPr id="927" name="Oval 926"/>
-          <p:cNvSpPr/>
-          <p:nvPr/>
-        </p:nvSpPr>
-        <p:spPr>
-          <a:xfrm>
-            <a:off x="10422552" y="2985805"/>
-            <a:ext cx="473071" cy="473071"/>
-          </a:xfrm>
-          <a:prstGeom prst="ellipse">
-            <a:avLst/>
-          </a:prstGeom>
-          <a:solidFill>
-            <a:srgbClr val="0077FF"/>
-          </a:solidFill>
-          <a:ln>
-            <a:noFill/>
-          </a:ln>
-        </p:spPr>
-        <p:style>
-          <a:lnRef idx="1">
-            <a:schemeClr val="accent1"/>
-          </a:lnRef>
-          <a:fillRef idx="3">
-            <a:schemeClr val="accent1"/>
-          </a:fillRef>
-          <a:effectRef idx="2">
-            <a:schemeClr val="accent1"/>
-          </a:effectRef>
-          <a:fontRef idx="minor">
-            <a:schemeClr val="lt1"/>
-          </a:fontRef>
-        </p:style>
-        <p:txBody>
-          <a:bodyPr rtlCol="0" anchor="ctr"/>
-          <a:lstStyle/>
-          <a:p>
-            <a:pPr algn="ctr"/>
-          </a:p>
-        </p:txBody>
-      </p:sp>
-      <p:sp>
-        <p:nvSpPr>
-          <p:cNvPr id="928" name="TextBox 927"/>
-          <p:cNvSpPr txBox="1"/>
-          <p:nvPr/>
-        </p:nvSpPr>
-        <p:spPr>
-          <a:xfrm>
-            <a:off x="8910735" y="2200937"/>
-            <a:ext cx="2622529" cy="817123"/>
-          </a:xfrm>
-          <a:prstGeom prst="rect">
-            <a:avLst/>
-          </a:prstGeom>
-          <a:noFill/>
-        </p:spPr>
-        <p:txBody>
-          <a:bodyPr wrap="square" lIns="12700" rIns="12700" tIns="12700" bIns="12700">
-            <a:spAutoFit/>
-          </a:bodyPr>
-          <a:lstStyle/>
-          <a:p>
-            <a:pPr algn="ctr">
-              <a:defRPr sz="1400" b="0">
-                <a:solidFill>
-                  <a:srgbClr val="000000"/>
-                </a:solidFill>
-                <a:latin typeface="Play"/>
-                <a:ea typeface="Play"/>
-                <a:cs typeface="Play"/>
-              </a:defRPr>
-            </a:pPr>
-            <a:r>
-              <a:rPr sz="1400" b="0">
-                <a:solidFill>
-                  <a:srgbClr val="000000"/>
-                </a:solidFill>
-                <a:latin typeface="Play"/>
-                <a:ea typeface="Play"/>
-                <a:cs typeface="Play"/>
-              </a:rPr>
-              <a:t>Первый квартал 2027</a:t>
-            </a:r>
-          </a:p>
-        </p:txBody>
-      </p:sp>
-    </p:spTree>
-  </p:cSld>
-  <p:clrMapOvr>
-    <a:masterClrMapping/>
-  </p:clrMapOvr>
-</p:sld>
-</file>
-
-<file path=ppt/slides/slide61.xml><?xml version="1.0" encoding="utf-8"?>
-<p:sld xmlns:a="http://schemas.openxmlformats.org/drawingml/2006/main" xmlns:p="http://schemas.openxmlformats.org/presentationml/2006/main" xmlns:r="http://schemas.openxmlformats.org/officeDocument/2006/relationships">
-  <p:cSld>
-    <p:bg>
-      <p:bgPr>
-        <a:solidFill>
-          <a:schemeClr val="lt2"/>
-        </a:solidFill>
-      </p:bgPr>
-    </p:bg>
-    <p:spTree>
-      <p:nvGrpSpPr>
-        <p:cNvPr id="1" name=""/>
-        <p:cNvGrpSpPr/>
-        <p:nvPr/>
-      </p:nvGrpSpPr>
-      <p:grpSpPr/>
-      <p:sp>
-        <p:nvSpPr>
-          <p:cNvPr id="795" name="Google Shape;795;p60"/>
-          <p:cNvSpPr txBox="1"/>
-          <p:nvPr/>
-        </p:nvSpPr>
-        <p:spPr>
-          <a:xfrm>
-            <a:off x="18692059" y="4674436"/>
-            <a:ext cx="4304330" cy="678198"/>
-          </a:xfrm>
-          <a:prstGeom prst="rect">
-            <a:avLst/>
-          </a:prstGeom>
-          <a:noFill/>
-          <a:ln>
-            <a:noFill/>
-          </a:ln>
-        </p:spPr>
-        <p:txBody>
-          <a:bodyPr anchorCtr="0" anchor="t" bIns="45700" lIns="91425" spcFirstLastPara="1" rIns="91425" wrap="square" tIns="45700">
-            <a:noAutofit/>
-          </a:bodyPr>
-          <a:lstStyle/>
-          <a:p>
-            <a:pPr indent="0" lvl="0" marL="0" marR="0" rtl="0" algn="l">
-              <a:lnSpc>
-                <a:spcPct val="110000"/>
-              </a:lnSpc>
-              <a:spcBef>
-                <a:spcPts val="0"/>
-              </a:spcBef>
-              <a:spcAft>
-                <a:spcPts val="0"/>
-              </a:spcAft>
-              <a:buClr>
-                <a:schemeClr val="dk1"/>
-              </a:buClr>
-              <a:buSzPts val="1600"/>
-              <a:buFont typeface="Arial"/>
-              <a:buNone/>
-            </a:pPr>
-            <a:r>
-              <a:t/>
-            </a:r>
-            <a:endParaRPr sz="1600">
-              <a:solidFill>
-                <a:schemeClr val="dk1"/>
-              </a:solidFill>
-              <a:latin typeface="Arial"/>
-              <a:ea typeface="Arial"/>
-              <a:cs typeface="Arial"/>
-              <a:sym typeface="Arial"/>
-            </a:endParaRPr>
-          </a:p>
-        </p:txBody>
-      </p:sp>
-      <p:sp>
-        <p:nvSpPr>
-          <p:cNvPr id="796" name="title"/>
-          <p:cNvSpPr txBox="1"/>
-          <p:nvPr/>
-        </p:nvSpPr>
-        <p:spPr>
-          <a:xfrm>
-            <a:off x="677387" y="692177"/>
-            <a:ext cx="10855878" cy="822960"/>
-          </a:xfrm>
-          <a:prstGeom prst="rect">
-            <a:avLst/>
-          </a:prstGeom>
-          <a:noFill/>
-        </p:spPr>
-        <p:txBody>
-          <a:bodyPr wrap="square" lIns="76200" rIns="76200" tIns="50800" bIns="50800">
-            <a:spAutoFit/>
-          </a:bodyPr>
-          <a:lstStyle/>
-          <a:p>
-            <a:pPr algn="l">
-              <a:spcAft>
-                <a:spcPts val="300"/>
-              </a:spcAft>
-              <a:defRPr sz="4000">
-                <a:solidFill>
-                  <a:srgbClr val="000000"/>
-                </a:solidFill>
-                <a:latin typeface="Arial"/>
-                <a:ea typeface="Arial"/>
-                <a:cs typeface="Arial"/>
-              </a:defRPr>
-            </a:pPr>
-            <a:r>
-              <a:rPr sz="4000">
-                <a:solidFill>
-                  <a:srgbClr val="000000"/>
-                </a:solidFill>
-                <a:latin typeface="Arial"/>
-                <a:ea typeface="Arial"/>
-                <a:cs typeface="Arial"/>
-              </a:rPr>
-              <a:t>План пилота</a:t>
-            </a:r>
-          </a:p>
-        </p:txBody>
-      </p:sp>
-      <p:sp>
-        <p:nvSpPr>
-          <p:cNvPr id="797" name="body"/>
-          <p:cNvSpPr txBox="1"/>
-          <p:nvPr/>
-        </p:nvSpPr>
-        <p:spPr>
-          <a:xfrm>
-            <a:off x="677387" y="3080711"/>
-            <a:ext cx="10855878" cy="1488440"/>
-          </a:xfrm>
-          <a:prstGeom prst="rect">
-            <a:avLst/>
-          </a:prstGeom>
-          <a:noFill/>
-        </p:spPr>
-        <p:txBody>
-          <a:bodyPr wrap="square" lIns="76200" rIns="76200" tIns="50800" bIns="50800">
-            <a:spAutoFit/>
-          </a:bodyPr>
-          <a:lstStyle/>
-          <a:p>
-            <a:pPr algn="l">
-              <a:spcAft>
-                <a:spcPts val="300"/>
-              </a:spcAft>
-              <a:defRPr sz="2800">
-                <a:solidFill>
-                  <a:srgbClr val="000000"/>
-                </a:solidFill>
-                <a:latin typeface="Play"/>
-                <a:ea typeface="Play"/>
-                <a:cs typeface="Play"/>
-              </a:defRPr>
-            </a:pPr>
-            <a:r>
-              <a:rPr sz="2800">
-                <a:solidFill>
-                  <a:srgbClr val="000000"/>
-                </a:solidFill>
-                <a:latin typeface="Play"/>
-                <a:ea typeface="Play"/>
-                <a:cs typeface="Play"/>
-              </a:rPr>
-              <a:t>• Пилот шёл 6 недель на двух командах</a:t>
-            </a:r>
-          </a:p>
-          <a:p>
-            <a:pPr algn="l">
-              <a:spcAft>
-                <a:spcPts val="300"/>
-              </a:spcAft>
-              <a:defRPr sz="2800">
-                <a:solidFill>
-                  <a:srgbClr val="000000"/>
-                </a:solidFill>
-                <a:latin typeface="Play"/>
-                <a:ea typeface="Play"/>
-                <a:cs typeface="Play"/>
-              </a:defRPr>
-            </a:pPr>
-            <a:r>
-              <a:rPr sz="2800">
-                <a:solidFill>
-                  <a:srgbClr val="000000"/>
-                </a:solidFill>
-                <a:latin typeface="Play"/>
-                <a:ea typeface="Play"/>
-                <a:cs typeface="Play"/>
-              </a:rPr>
-              <a:t>• Собрано 68 презентаций</a:t>
-            </a:r>
-          </a:p>
-          <a:p>
-            <a:pPr algn="l">
-              <a:spcAft>
-                <a:spcPts val="300"/>
-              </a:spcAft>
-              <a:defRPr sz="2800">
-                <a:solidFill>
-                  <a:srgbClr val="000000"/>
-                </a:solidFill>
-                <a:latin typeface="Play"/>
-                <a:ea typeface="Play"/>
-                <a:cs typeface="Play"/>
-              </a:defRPr>
-            </a:pPr>
-            <a:r>
-              <a:rPr sz="2800">
-                <a:solidFill>
-                  <a:srgbClr val="000000"/>
-                </a:solidFill>
-                <a:latin typeface="Play"/>
-                <a:ea typeface="Play"/>
-                <a:cs typeface="Play"/>
-              </a:rPr>
-              <a:t>• Средняя сборка колоды 4 минуты вместо 186</a:t>
-            </a:r>
-          </a:p>
-        </p:txBody>
-      </p:sp>
-    </p:spTree>
-  </p:cSld>
-  <p:clrMapOvr>
-    <a:masterClrMapping/>
-  </p:clrMapOvr>
-</p:sld>
-</file>
-
-<file path=ppt/slides/slide62.xml><?xml version="1.0" encoding="utf-8"?>
-<p:sld xmlns:a="http://schemas.openxmlformats.org/drawingml/2006/main" xmlns:p="http://schemas.openxmlformats.org/presentationml/2006/main" xmlns:r="http://schemas.openxmlformats.org/officeDocument/2006/relationships">
-  <p:cSld>
-    <p:bg>
-      <p:bgPr>
-        <a:solidFill>
-          <a:schemeClr val="lt2"/>
-        </a:solidFill>
-      </p:bgPr>
-    </p:bg>
-    <p:spTree>
-      <p:nvGrpSpPr>
-        <p:cNvPr id="1" name=""/>
-        <p:cNvGrpSpPr/>
-        <p:nvPr/>
-      </p:nvGrpSpPr>
-      <p:grpSpPr/>
-      <p:sp>
-        <p:nvSpPr>
-          <p:cNvPr id="2" name="title"/>
-          <p:cNvSpPr txBox="1"/>
-          <p:nvPr/>
-        </p:nvSpPr>
-        <p:spPr>
-          <a:xfrm>
-            <a:off x="677875" y="692177"/>
-            <a:ext cx="10855391" cy="822960"/>
-          </a:xfrm>
-          <a:prstGeom prst="rect">
-            <a:avLst/>
-          </a:prstGeom>
-          <a:noFill/>
-        </p:spPr>
-        <p:txBody>
-          <a:bodyPr wrap="square" lIns="76200" rIns="76200" tIns="50800" bIns="50800">
-            <a:spAutoFit/>
-          </a:bodyPr>
-          <a:lstStyle/>
-          <a:p>
-            <a:pPr algn="l">
-              <a:spcAft>
-                <a:spcPts val="300"/>
-              </a:spcAft>
-              <a:defRPr sz="4000">
-                <a:solidFill>
-                  <a:srgbClr val="000000"/>
-                </a:solidFill>
-                <a:latin typeface="Arial"/>
-                <a:ea typeface="Arial"/>
-                <a:cs typeface="Arial"/>
-              </a:defRPr>
-            </a:pPr>
-            <a:r>
-              <a:rPr sz="4000">
-                <a:solidFill>
-                  <a:srgbClr val="000000"/>
-                </a:solidFill>
-                <a:latin typeface="Arial"/>
-                <a:ea typeface="Arial"/>
-                <a:cs typeface="Arial"/>
-              </a:rPr>
-              <a:t>Что мы просим решить</a:t>
-            </a:r>
-          </a:p>
-        </p:txBody>
-      </p:sp>
-      <p:sp>
-        <p:nvSpPr>
-          <p:cNvPr id="3" name="body"/>
-          <p:cNvSpPr txBox="1"/>
-          <p:nvPr/>
-        </p:nvSpPr>
-        <p:spPr>
-          <a:xfrm>
-            <a:off x="677875" y="2804310"/>
-            <a:ext cx="10855391" cy="1422400"/>
-          </a:xfrm>
-          <a:prstGeom prst="rect">
-            <a:avLst/>
-          </a:prstGeom>
-          <a:noFill/>
-        </p:spPr>
-        <p:txBody>
-          <a:bodyPr wrap="square" lIns="76200" rIns="76200" tIns="50800" bIns="50800">
-            <a:spAutoFit/>
-          </a:bodyPr>
-          <a:lstStyle/>
-          <a:p>
-            <a:pPr algn="ctr">
-              <a:spcAft>
-                <a:spcPts val="300"/>
-              </a:spcAft>
-              <a:defRPr sz="4000">
-                <a:solidFill>
-                  <a:srgbClr val="000000"/>
-                </a:solidFill>
-                <a:latin typeface="Play"/>
-                <a:ea typeface="Play"/>
-                <a:cs typeface="Play"/>
-              </a:defRPr>
-            </a:pPr>
-            <a:r>
-              <a:rPr sz="4000">
-                <a:solidFill>
-                  <a:srgbClr val="000000"/>
-                </a:solidFill>
-                <a:latin typeface="Play"/>
-                <a:ea typeface="Play"/>
-                <a:cs typeface="Play"/>
-              </a:rPr>
-              <a:t>Принять решение о запуске сервиса на всю компанию</a:t>
+              <a:t>Риски и меры: модель, шаблон, нагрузка</a:t>
             </a:r>
           </a:p>
         </p:txBody>

--- a/samples/Шаблон_презентации_VK_Education__split.pptx
+++ b/samples/Шаблон_презентации_VK_Education__split.pptx
@@ -259,434 +259,6 @@
     </a:lvl9pPr>
   </p:defaultTextStyle>
 </p:presentation>
-</file>
-
-<file path=ppt/charts/chart1.xml><?xml version="1.0" encoding="utf-8"?>
-<c:chartSpace xmlns:c="http://schemas.openxmlformats.org/drawingml/2006/chart" xmlns:a="http://schemas.openxmlformats.org/drawingml/2006/main" xmlns:r="http://schemas.openxmlformats.org/officeDocument/2006/relationships">
-  <c:date1904 val="0"/>
-  <c:chart>
-    <c:autoTitleDeleted val="1"/>
-    <c:plotArea>
-      <c:barChart>
-        <c:barDir val="col"/>
-        <c:grouping val="clustered"/>
-        <c:ser>
-          <c:idx val="0"/>
-          <c:order val="0"/>
-          <c:tx>
-            <c:strRef>
-              <c:f>Sheet1!$B$1</c:f>
-              <c:strCache>
-                <c:ptCount val="1"/>
-                <c:pt idx="0">
-                  <c:v>Время</c:v>
-                </c:pt>
-              </c:strCache>
-            </c:strRef>
-          </c:tx>
-          <c:spPr>
-            <a:solidFill>
-              <a:srgbClr val="0077FF"/>
-            </a:solidFill>
-            <a:ln>
-              <a:solidFill>
-                <a:srgbClr val="0077FF"/>
-              </a:solidFill>
-            </a:ln>
-          </c:spPr>
-          <c:cat>
-            <c:strRef>
-              <c:f>Sheet1!$A$2:$A$3</c:f>
-              <c:strCache>
-                <c:ptCount val="2"/>
-                <c:pt idx="0">
-                  <c:v>Сборка</c:v>
-                </c:pt>
-                <c:pt idx="1">
-                  <c:v>Правки</c:v>
-                </c:pt>
-              </c:strCache>
-            </c:strRef>
-          </c:cat>
-          <c:val>
-            <c:numRef>
-              <c:f>Sheet1!$B$2:$B$3</c:f>
-              <c:numCache>
-                <c:formatCode>General</c:formatCode>
-                <c:ptCount val="2"/>
-                <c:pt idx="0">
-                  <c:v>186.0</c:v>
-                </c:pt>
-                <c:pt idx="1">
-                  <c:v>74.0</c:v>
-                </c:pt>
-              </c:numCache>
-            </c:numRef>
-          </c:val>
-        </c:ser>
-        <c:dLbls>
-          <c:numFmt formatCode="0&quot; мин&quot;" sourceLinked="0"/>
-          <c:txPr>
-            <a:bodyPr wrap="none"/>
-            <a:lstStyle/>
-            <a:p>
-              <a:pPr>
-                <a:defRPr sz="1100" b="0">
-                  <a:solidFill>
-                    <a:srgbClr val="000000"/>
-                  </a:solidFill>
-                  <a:latin typeface="Play"/>
-                  <a:ea typeface="Play"/>
-                  <a:cs typeface="Play"/>
-                </a:defRPr>
-              </a:pPr>
-            </a:p>
-          </c:txPr>
-          <c:dLblPos val="outEnd"/>
-          <c:showLegendKey val="0"/>
-          <c:showVal val="1"/>
-          <c:showCatName val="0"/>
-          <c:showSerName val="0"/>
-          <c:showPercent val="0"/>
-          <c:showBubbleSize val="0"/>
-          <c:showLeaderLines val="1"/>
-        </c:dLbls>
-        <c:gapWidth val="60"/>
-        <c:axId val="-2068027336"/>
-        <c:axId val="-2113994440"/>
-      </c:barChart>
-      <c:catAx>
-        <c:axId val="-2068027336"/>
-        <c:scaling>
-          <c:orientation val="minMax"/>
-        </c:scaling>
-        <c:delete val="0"/>
-        <c:axPos val="b"/>
-        <c:majorTickMark val="out"/>
-        <c:minorTickMark val="none"/>
-        <c:tickLblPos val="nextTo"/>
-        <c:txPr>
-          <a:bodyPr/>
-          <a:lstStyle/>
-          <a:p>
-            <a:pPr>
-              <a:defRPr sz="1100" b="0">
-                <a:solidFill>
-                  <a:srgbClr val="000000"/>
-                </a:solidFill>
-                <a:latin typeface="Play"/>
-                <a:ea typeface="Play"/>
-                <a:cs typeface="Play"/>
-              </a:defRPr>
-            </a:pPr>
-          </a:p>
-        </c:txPr>
-        <c:crossAx val="-2113994440"/>
-        <c:crosses val="autoZero"/>
-        <c:auto val="1"/>
-        <c:lblAlgn val="ctr"/>
-        <c:lblOffset val="100"/>
-        <c:noMultiLvlLbl val="0"/>
-      </c:catAx>
-      <c:valAx>
-        <c:axId val="-2113994440"/>
-        <c:scaling/>
-        <c:delete val="0"/>
-        <c:axPos val="l"/>
-        <c:majorGridlines>
-          <c:spPr>
-            <a:ln w="9525">
-              <a:solidFill>
-                <a:srgbClr val="D1D1D1"/>
-              </a:solidFill>
-            </a:ln>
-          </c:spPr>
-        </c:majorGridlines>
-        <c:title>
-          <c:tx>
-            <c:rich>
-              <a:bodyPr rot="0" vert="horz"/>
-              <a:lstStyle/>
-              <a:p>
-                <a:pPr>
-                  <a:defRPr sz="1100" b="0">
-                    <a:solidFill>
-                      <a:srgbClr val="000000"/>
-                    </a:solidFill>
-                    <a:latin typeface="Play"/>
-                    <a:ea typeface="Play"/>
-                    <a:cs typeface="Play"/>
-                  </a:defRPr>
-                </a:pPr>
-                <a:r>
-                  <a:t>Время, мин</a:t>
-                </a:r>
-              </a:p>
-            </c:rich>
-          </c:tx>
-          <c:layout/>
-          <c:overlay val="0"/>
-        </c:title>
-        <c:majorTickMark val="out"/>
-        <c:minorTickMark val="none"/>
-        <c:tickLblPos val="nextTo"/>
-        <c:txPr>
-          <a:bodyPr/>
-          <a:lstStyle/>
-          <a:p>
-            <a:pPr>
-              <a:defRPr sz="1100" b="0">
-                <a:solidFill>
-                  <a:srgbClr val="000000"/>
-                </a:solidFill>
-                <a:latin typeface="Play"/>
-                <a:ea typeface="Play"/>
-                <a:cs typeface="Play"/>
-              </a:defRPr>
-            </a:pPr>
-          </a:p>
-        </c:txPr>
-        <c:crossAx val="-2068027336"/>
-        <c:crosses val="autoZero"/>
-      </c:valAx>
-    </c:plotArea>
-    <c:dispBlanksAs val="gap"/>
-  </c:chart>
-  <c:txPr>
-    <a:bodyPr/>
-    <a:lstStyle/>
-    <a:p>
-      <a:pPr>
-        <a:defRPr sz="1200" b="0">
-          <a:solidFill>
-            <a:srgbClr val="000000"/>
-          </a:solidFill>
-          <a:latin typeface="Play"/>
-          <a:ea typeface="Play"/>
-          <a:cs typeface="Play"/>
-        </a:defRPr>
-      </a:pPr>
-      <a:endParaRPr lang="en-US"/>
-    </a:p>
-  </c:txPr>
-  <c:externalData r:id="rId1">
-    <c:autoUpdate val="0"/>
-  </c:externalData>
-</c:chartSpace>
-</file>
-
-<file path=ppt/charts/chart2.xml><?xml version="1.0" encoding="utf-8"?>
-<c:chartSpace xmlns:c="http://schemas.openxmlformats.org/drawingml/2006/chart" xmlns:a="http://schemas.openxmlformats.org/drawingml/2006/main" xmlns:r="http://schemas.openxmlformats.org/officeDocument/2006/relationships">
-  <c:date1904 val="0"/>
-  <c:chart>
-    <c:autoTitleDeleted val="1"/>
-    <c:plotArea>
-      <c:barChart>
-        <c:barDir val="col"/>
-        <c:grouping val="clustered"/>
-        <c:ser>
-          <c:idx val="0"/>
-          <c:order val="0"/>
-          <c:tx>
-            <c:strRef>
-              <c:f>Sheet1!$B$1</c:f>
-              <c:strCache>
-                <c:ptCount val="1"/>
-                <c:pt idx="0">
-                  <c:v>Значения</c:v>
-                </c:pt>
-              </c:strCache>
-            </c:strRef>
-          </c:tx>
-          <c:spPr>
-            <a:solidFill>
-              <a:srgbClr val="0077FF"/>
-            </a:solidFill>
-            <a:ln>
-              <a:solidFill>
-                <a:srgbClr val="0077FF"/>
-              </a:solidFill>
-            </a:ln>
-          </c:spPr>
-          <c:cat>
-            <c:strRef>
-              <c:f>Sheet1!$A$2:$A$3</c:f>
-              <c:strCache>
-                <c:ptCount val="2"/>
-                <c:pt idx="0">
-                  <c:v>Сборка</c:v>
-                </c:pt>
-                <c:pt idx="1">
-                  <c:v>Запросы дизайнеров</c:v>
-                </c:pt>
-              </c:strCache>
-            </c:strRef>
-          </c:cat>
-          <c:val>
-            <c:numRef>
-              <c:f>Sheet1!$B$2:$B$3</c:f>
-              <c:numCache>
-                <c:formatCode>General</c:formatCode>
-                <c:ptCount val="2"/>
-                <c:pt idx="0">
-                  <c:v>4.0</c:v>
-                </c:pt>
-                <c:pt idx="1">
-                  <c:v>38.0</c:v>
-                </c:pt>
-              </c:numCache>
-            </c:numRef>
-          </c:val>
-        </c:ser>
-        <c:dLbls>
-          <c:numFmt formatCode="0&quot; значений&quot;" sourceLinked="0"/>
-          <c:txPr>
-            <a:bodyPr wrap="none"/>
-            <a:lstStyle/>
-            <a:p>
-              <a:pPr>
-                <a:defRPr sz="1100" b="0">
-                  <a:solidFill>
-                    <a:srgbClr val="000000"/>
-                  </a:solidFill>
-                  <a:latin typeface="Play"/>
-                  <a:ea typeface="Play"/>
-                  <a:cs typeface="Play"/>
-                </a:defRPr>
-              </a:pPr>
-            </a:p>
-          </c:txPr>
-          <c:dLblPos val="outEnd"/>
-          <c:showLegendKey val="0"/>
-          <c:showVal val="1"/>
-          <c:showCatName val="0"/>
-          <c:showSerName val="0"/>
-          <c:showPercent val="0"/>
-          <c:showBubbleSize val="0"/>
-          <c:showLeaderLines val="1"/>
-        </c:dLbls>
-        <c:gapWidth val="60"/>
-        <c:axId val="-2068027336"/>
-        <c:axId val="-2113994440"/>
-      </c:barChart>
-      <c:catAx>
-        <c:axId val="-2068027336"/>
-        <c:scaling>
-          <c:orientation val="minMax"/>
-        </c:scaling>
-        <c:delete val="0"/>
-        <c:axPos val="b"/>
-        <c:majorTickMark val="out"/>
-        <c:minorTickMark val="none"/>
-        <c:tickLblPos val="nextTo"/>
-        <c:txPr>
-          <a:bodyPr/>
-          <a:lstStyle/>
-          <a:p>
-            <a:pPr>
-              <a:defRPr sz="1100" b="0">
-                <a:solidFill>
-                  <a:srgbClr val="000000"/>
-                </a:solidFill>
-                <a:latin typeface="Play"/>
-                <a:ea typeface="Play"/>
-                <a:cs typeface="Play"/>
-              </a:defRPr>
-            </a:pPr>
-          </a:p>
-        </c:txPr>
-        <c:crossAx val="-2113994440"/>
-        <c:crosses val="autoZero"/>
-        <c:auto val="1"/>
-        <c:lblAlgn val="ctr"/>
-        <c:lblOffset val="100"/>
-        <c:noMultiLvlLbl val="0"/>
-      </c:catAx>
-      <c:valAx>
-        <c:axId val="-2113994440"/>
-        <c:scaling/>
-        <c:delete val="0"/>
-        <c:axPos val="l"/>
-        <c:majorGridlines>
-          <c:spPr>
-            <a:ln w="9525">
-              <a:solidFill>
-                <a:srgbClr val="D1D1D1"/>
-              </a:solidFill>
-            </a:ln>
-          </c:spPr>
-        </c:majorGridlines>
-        <c:title>
-          <c:tx>
-            <c:rich>
-              <a:bodyPr rot="0" vert="horz"/>
-              <a:lstStyle/>
-              <a:p>
-                <a:pPr>
-                  <a:defRPr sz="1100" b="0">
-                    <a:solidFill>
-                      <a:srgbClr val="000000"/>
-                    </a:solidFill>
-                    <a:latin typeface="Play"/>
-                    <a:ea typeface="Play"/>
-                    <a:cs typeface="Play"/>
-                  </a:defRPr>
-                </a:pPr>
-                <a:r>
-                  <a:t>Значения, значений</a:t>
-                </a:r>
-              </a:p>
-            </c:rich>
-          </c:tx>
-          <c:layout/>
-          <c:overlay val="0"/>
-        </c:title>
-        <c:majorTickMark val="out"/>
-        <c:minorTickMark val="none"/>
-        <c:tickLblPos val="nextTo"/>
-        <c:txPr>
-          <a:bodyPr/>
-          <a:lstStyle/>
-          <a:p>
-            <a:pPr>
-              <a:defRPr sz="1100" b="0">
-                <a:solidFill>
-                  <a:srgbClr val="000000"/>
-                </a:solidFill>
-                <a:latin typeface="Play"/>
-                <a:ea typeface="Play"/>
-                <a:cs typeface="Play"/>
-              </a:defRPr>
-            </a:pPr>
-          </a:p>
-        </c:txPr>
-        <c:crossAx val="-2068027336"/>
-        <c:crosses val="autoZero"/>
-      </c:valAx>
-    </c:plotArea>
-    <c:dispBlanksAs val="gap"/>
-  </c:chart>
-  <c:txPr>
-    <a:bodyPr/>
-    <a:lstStyle/>
-    <a:p>
-      <a:pPr>
-        <a:defRPr sz="1200" b="0">
-          <a:solidFill>
-            <a:srgbClr val="000000"/>
-          </a:solidFill>
-          <a:latin typeface="Play"/>
-          <a:ea typeface="Play"/>
-          <a:cs typeface="Play"/>
-        </a:defRPr>
-      </a:pPr>
-      <a:endParaRPr lang="en-US"/>
-    </a:p>
-  </c:txPr>
-  <c:externalData r:id="rId1">
-    <c:autoUpdate val="0"/>
-  </c:externalData>
-</c:chartSpace>
 </file>
 
 <file path=ppt/notesMasters/notesMaster1.xml><?xml version="1.0" encoding="utf-8"?>
@@ -2517,19 +2089,19 @@
 </p:notes>
 </file>
 
-<file path=ppt/slideLayouts/slideLayout12.xml><?xml version="1.0" encoding="utf-8"?>
-<p:sldLayout xmlns:a="http://schemas.openxmlformats.org/drawingml/2006/main" xmlns:r="http://schemas.openxmlformats.org/officeDocument/2006/relationships" xmlns:mc="http://schemas.openxmlformats.org/markup-compatibility/2006" xmlns:mv="urn:schemas-microsoft-com:mac:vml" xmlns:p="http://schemas.openxmlformats.org/presentationml/2006/main" xmlns:c="http://schemas.openxmlformats.org/drawingml/2006/chart" xmlns:dgm="http://schemas.openxmlformats.org/drawingml/2006/diagram" xmlns:o="urn:schemas-microsoft-com:office:office" xmlns:v="urn:schemas-microsoft-com:vml" xmlns:pvml="urn:schemas-microsoft-com:office:powerpoint" xmlns:com="http://schemas.openxmlformats.org/drawingml/2006/compatibility" xmlns:p14="http://schemas.microsoft.com/office/powerpoint/2010/main" xmlns:p15="http://schemas.microsoft.com/office/powerpoint/2012/main" xmlns:ahyp="http://schemas.microsoft.com/office/drawing/2018/hyperlinkcolor" matchingName="2_Заголовок + текст в две колонки">
-  <p:cSld name="2_Заголовок + текст в две колонки">
+<file path=ppt/slideLayouts/slideLayout18.xml><?xml version="1.0" encoding="utf-8"?>
+<p:sldLayout xmlns:a="http://schemas.openxmlformats.org/drawingml/2006/main" xmlns:r="http://schemas.openxmlformats.org/officeDocument/2006/relationships" xmlns:mc="http://schemas.openxmlformats.org/markup-compatibility/2006" xmlns:mv="urn:schemas-microsoft-com:mac:vml" xmlns:p="http://schemas.openxmlformats.org/presentationml/2006/main" xmlns:c="http://schemas.openxmlformats.org/drawingml/2006/chart" xmlns:dgm="http://schemas.openxmlformats.org/drawingml/2006/diagram" xmlns:o="urn:schemas-microsoft-com:office:office" xmlns:v="urn:schemas-microsoft-com:vml" xmlns:pvml="urn:schemas-microsoft-com:office:powerpoint" xmlns:com="http://schemas.openxmlformats.org/drawingml/2006/compatibility" xmlns:p14="http://schemas.microsoft.com/office/powerpoint/2010/main" xmlns:p15="http://schemas.microsoft.com/office/powerpoint/2012/main" xmlns:ahyp="http://schemas.microsoft.com/office/drawing/2018/hyperlinkcolor" matchingName="Финальный с QR + подпись">
+  <p:cSld name="Финальный с QR + подпись">
     <p:bg>
       <p:bgPr>
         <a:solidFill>
-          <a:schemeClr val="lt2"/>
+          <a:schemeClr val="accent1"/>
         </a:solidFill>
       </p:bgPr>
     </p:bg>
     <p:spTree>
       <p:nvGrpSpPr>
-        <p:cNvPr id="107" name="Shape 107"/>
+        <p:cNvPr id="132" name="Shape 132"/>
         <p:cNvGrpSpPr/>
         <p:nvPr/>
       </p:nvGrpSpPr>
@@ -2541,9 +2113,198 @@
           <a:chExt cx="0" cy="0"/>
         </a:xfrm>
       </p:grpSpPr>
+      <p:pic>
+        <p:nvPicPr>
+          <p:cNvPr id="133" name="Google Shape;133;p19"/>
+          <p:cNvPicPr preferRelativeResize="0"/>
+          <p:nvPr/>
+        </p:nvPicPr>
+        <p:blipFill rotWithShape="1">
+          <a:blip r:embed="rId2">
+            <a:alphaModFix/>
+          </a:blip>
+          <a:srcRect b="0" l="0" r="0" t="0"/>
+          <a:stretch/>
+        </p:blipFill>
+        <p:spPr>
+          <a:xfrm>
+            <a:off x="6023251" y="692149"/>
+            <a:ext cx="6168749" cy="6168749"/>
+          </a:xfrm>
+          <a:prstGeom prst="rect">
+            <a:avLst/>
+          </a:prstGeom>
+          <a:noFill/>
+          <a:ln>
+            <a:noFill/>
+          </a:ln>
+        </p:spPr>
+      </p:pic>
       <p:sp>
         <p:nvSpPr>
-          <p:cNvPr id="108" name="Google Shape;108;p13"/>
+          <p:cNvPr id="134" name="Google Shape;134;p19"/>
+          <p:cNvSpPr txBox="1"/>
+          <p:nvPr>
+            <p:ph type="title"/>
+          </p:nvPr>
+        </p:nvSpPr>
+        <p:spPr>
+          <a:xfrm>
+            <a:off x="620713" y="2483712"/>
+            <a:ext cx="5475287" cy="1477328"/>
+          </a:xfrm>
+          <a:prstGeom prst="rect">
+            <a:avLst/>
+          </a:prstGeom>
+          <a:noFill/>
+          <a:ln>
+            <a:noFill/>
+          </a:ln>
+        </p:spPr>
+        <p:txBody>
+          <a:bodyPr anchorCtr="0" anchor="b" bIns="0" lIns="0" spcFirstLastPara="1" rIns="0" wrap="square" tIns="0">
+            <a:spAutoFit/>
+          </a:bodyPr>
+          <a:lstStyle>
+            <a:lvl1pPr lvl="0" algn="l">
+              <a:lnSpc>
+                <a:spcPct val="80000"/>
+              </a:lnSpc>
+              <a:spcBef>
+                <a:spcPts val="0"/>
+              </a:spcBef>
+              <a:spcAft>
+                <a:spcPts val="0"/>
+              </a:spcAft>
+              <a:buClr>
+                <a:schemeClr val="lt2"/>
+              </a:buClr>
+              <a:buSzPts val="6000"/>
+              <a:buFont typeface="Play"/>
+              <a:buNone/>
+              <a:defRPr sz="6000">
+                <a:solidFill>
+                  <a:schemeClr val="lt2"/>
+                </a:solidFill>
+              </a:defRPr>
+            </a:lvl1pPr>
+            <a:lvl2pPr lvl="1">
+              <a:spcBef>
+                <a:spcPts val="0"/>
+              </a:spcBef>
+              <a:spcAft>
+                <a:spcPts val="0"/>
+              </a:spcAft>
+              <a:buSzPts val="1400"/>
+              <a:buNone/>
+              <a:defRPr/>
+            </a:lvl2pPr>
+            <a:lvl3pPr lvl="2">
+              <a:spcBef>
+                <a:spcPts val="0"/>
+              </a:spcBef>
+              <a:spcAft>
+                <a:spcPts val="0"/>
+              </a:spcAft>
+              <a:buSzPts val="1400"/>
+              <a:buNone/>
+              <a:defRPr/>
+            </a:lvl3pPr>
+            <a:lvl4pPr lvl="3">
+              <a:spcBef>
+                <a:spcPts val="0"/>
+              </a:spcBef>
+              <a:spcAft>
+                <a:spcPts val="0"/>
+              </a:spcAft>
+              <a:buSzPts val="1400"/>
+              <a:buNone/>
+              <a:defRPr/>
+            </a:lvl4pPr>
+            <a:lvl5pPr lvl="4">
+              <a:spcBef>
+                <a:spcPts val="0"/>
+              </a:spcBef>
+              <a:spcAft>
+                <a:spcPts val="0"/>
+              </a:spcAft>
+              <a:buSzPts val="1400"/>
+              <a:buNone/>
+              <a:defRPr/>
+            </a:lvl5pPr>
+            <a:lvl6pPr lvl="5">
+              <a:spcBef>
+                <a:spcPts val="0"/>
+              </a:spcBef>
+              <a:spcAft>
+                <a:spcPts val="0"/>
+              </a:spcAft>
+              <a:buSzPts val="1400"/>
+              <a:buNone/>
+              <a:defRPr/>
+            </a:lvl6pPr>
+            <a:lvl7pPr lvl="6">
+              <a:spcBef>
+                <a:spcPts val="0"/>
+              </a:spcBef>
+              <a:spcAft>
+                <a:spcPts val="0"/>
+              </a:spcAft>
+              <a:buSzPts val="1400"/>
+              <a:buNone/>
+              <a:defRPr/>
+            </a:lvl7pPr>
+            <a:lvl8pPr lvl="7">
+              <a:spcBef>
+                <a:spcPts val="0"/>
+              </a:spcBef>
+              <a:spcAft>
+                <a:spcPts val="0"/>
+              </a:spcAft>
+              <a:buSzPts val="1400"/>
+              <a:buNone/>
+              <a:defRPr/>
+            </a:lvl8pPr>
+            <a:lvl9pPr lvl="8">
+              <a:spcBef>
+                <a:spcPts val="0"/>
+              </a:spcBef>
+              <a:spcAft>
+                <a:spcPts val="0"/>
+              </a:spcAft>
+              <a:buSzPts val="1400"/>
+              <a:buNone/>
+              <a:defRPr/>
+            </a:lvl9pPr>
+          </a:lstStyle>
+          <a:p/>
+        </p:txBody>
+      </p:sp>
+      <p:sp>
+        <p:nvSpPr>
+          <p:cNvPr id="135" name="Google Shape;135;p19"/>
+          <p:cNvSpPr/>
+          <p:nvPr>
+            <p:ph idx="2" type="pic"/>
+          </p:nvPr>
+        </p:nvSpPr>
+        <p:spPr>
+          <a:xfrm>
+            <a:off x="658813" y="692150"/>
+            <a:ext cx="1081088" cy="1081088"/>
+          </a:xfrm>
+          <a:prstGeom prst="rect">
+            <a:avLst/>
+          </a:prstGeom>
+          <a:noFill/>
+          <a:ln>
+            <a:noFill/>
+          </a:ln>
+        </p:spPr>
+      </p:sp>
+      <p:sp>
+        <p:nvSpPr>
+          <p:cNvPr id="136" name="Google Shape;136;p19"/>
           <p:cNvSpPr txBox="1"/>
           <p:nvPr>
             <p:ph idx="1" type="body"/>
@@ -2551,8 +2312,8 @@
         </p:nvSpPr>
         <p:spPr>
           <a:xfrm>
-            <a:off x="677334" y="1773238"/>
-            <a:ext cx="5304365" cy="4427537"/>
+            <a:off x="658813" y="4161565"/>
+            <a:ext cx="5437187" cy="355600"/>
           </a:xfrm>
           <a:prstGeom prst="rect">
             <a:avLst/>
@@ -2578,18 +2339,21 @@
                 <a:spcPts val="0"/>
               </a:spcAft>
               <a:buClr>
-                <a:schemeClr val="dk1"/>
+                <a:schemeClr val="lt2"/>
               </a:buClr>
               <a:buSzPts val="1600"/>
               <a:buNone/>
               <a:defRPr b="0" i="0">
+                <a:solidFill>
+                  <a:schemeClr val="lt2"/>
+                </a:solidFill>
                 <a:latin typeface="Play"/>
                 <a:ea typeface="Play"/>
                 <a:cs typeface="Play"/>
                 <a:sym typeface="Play"/>
               </a:defRPr>
             </a:lvl1pPr>
-            <a:lvl2pPr indent="-317500" lvl="1" marL="914400" algn="l">
+            <a:lvl2pPr indent="-342900" lvl="1" marL="914400" algn="l">
               <a:lnSpc>
                 <a:spcPct val="110000"/>
               </a:lnSpc>
@@ -2599,16 +2363,11 @@
               <a:spcAft>
                 <a:spcPts val="0"/>
               </a:spcAft>
-              <a:buSzPts val="1400"/>
+              <a:buSzPts val="1800"/>
               <a:buChar char="•"/>
-              <a:defRPr b="0" i="0">
-                <a:latin typeface="Play"/>
-                <a:ea typeface="Play"/>
-                <a:cs typeface="Play"/>
-                <a:sym typeface="Play"/>
-              </a:defRPr>
+              <a:defRPr/>
             </a:lvl2pPr>
-            <a:lvl3pPr indent="-304800" lvl="2" marL="1371600" algn="l">
+            <a:lvl3pPr indent="-342900" lvl="2" marL="1371600" algn="l">
               <a:lnSpc>
                 <a:spcPct val="110000"/>
               </a:lnSpc>
@@ -2621,14 +2380,253 @@
               <a:buClr>
                 <a:schemeClr val="dk1"/>
               </a:buClr>
-              <a:buSzPts val="1200"/>
+              <a:buSzPts val="1800"/>
               <a:buChar char="−"/>
-              <a:defRPr b="0" i="0">
-                <a:latin typeface="Play"/>
-                <a:ea typeface="Play"/>
-                <a:cs typeface="Play"/>
-                <a:sym typeface="Play"/>
-              </a:defRPr>
+              <a:defRPr/>
+            </a:lvl3pPr>
+            <a:lvl4pPr indent="-342900" lvl="3" marL="1828800" algn="l">
+              <a:lnSpc>
+                <a:spcPct val="90000"/>
+              </a:lnSpc>
+              <a:spcBef>
+                <a:spcPts val="500"/>
+              </a:spcBef>
+              <a:spcAft>
+                <a:spcPts val="0"/>
+              </a:spcAft>
+              <a:buClr>
+                <a:schemeClr val="dk1"/>
+              </a:buClr>
+              <a:buSzPts val="1800"/>
+              <a:buChar char="•"/>
+              <a:defRPr/>
+            </a:lvl4pPr>
+            <a:lvl5pPr indent="-342900" lvl="4" marL="2286000" algn="l">
+              <a:lnSpc>
+                <a:spcPct val="90000"/>
+              </a:lnSpc>
+              <a:spcBef>
+                <a:spcPts val="500"/>
+              </a:spcBef>
+              <a:spcAft>
+                <a:spcPts val="0"/>
+              </a:spcAft>
+              <a:buClr>
+                <a:schemeClr val="dk1"/>
+              </a:buClr>
+              <a:buSzPts val="1800"/>
+              <a:buChar char="•"/>
+              <a:defRPr/>
+            </a:lvl5pPr>
+            <a:lvl6pPr indent="-342900" lvl="5" marL="2743200" algn="l">
+              <a:lnSpc>
+                <a:spcPct val="90000"/>
+              </a:lnSpc>
+              <a:spcBef>
+                <a:spcPts val="500"/>
+              </a:spcBef>
+              <a:spcAft>
+                <a:spcPts val="0"/>
+              </a:spcAft>
+              <a:buClr>
+                <a:schemeClr val="dk1"/>
+              </a:buClr>
+              <a:buSzPts val="1800"/>
+              <a:buChar char="•"/>
+              <a:defRPr/>
+            </a:lvl6pPr>
+            <a:lvl7pPr indent="-342900" lvl="6" marL="3200400" algn="l">
+              <a:lnSpc>
+                <a:spcPct val="90000"/>
+              </a:lnSpc>
+              <a:spcBef>
+                <a:spcPts val="500"/>
+              </a:spcBef>
+              <a:spcAft>
+                <a:spcPts val="0"/>
+              </a:spcAft>
+              <a:buClr>
+                <a:schemeClr val="dk1"/>
+              </a:buClr>
+              <a:buSzPts val="1800"/>
+              <a:buChar char="•"/>
+              <a:defRPr/>
+            </a:lvl7pPr>
+            <a:lvl8pPr indent="-342900" lvl="7" marL="3657600" algn="l">
+              <a:lnSpc>
+                <a:spcPct val="90000"/>
+              </a:lnSpc>
+              <a:spcBef>
+                <a:spcPts val="500"/>
+              </a:spcBef>
+              <a:spcAft>
+                <a:spcPts val="0"/>
+              </a:spcAft>
+              <a:buClr>
+                <a:schemeClr val="dk1"/>
+              </a:buClr>
+              <a:buSzPts val="1800"/>
+              <a:buChar char="•"/>
+              <a:defRPr/>
+            </a:lvl8pPr>
+            <a:lvl9pPr indent="-342900" lvl="8" marL="4114800" algn="l">
+              <a:lnSpc>
+                <a:spcPct val="90000"/>
+              </a:lnSpc>
+              <a:spcBef>
+                <a:spcPts val="500"/>
+              </a:spcBef>
+              <a:spcAft>
+                <a:spcPts val="0"/>
+              </a:spcAft>
+              <a:buClr>
+                <a:schemeClr val="dk1"/>
+              </a:buClr>
+              <a:buSzPts val="1800"/>
+              <a:buChar char="•"/>
+              <a:defRPr/>
+            </a:lvl9pPr>
+          </a:lstStyle>
+          <a:p/>
+        </p:txBody>
+      </p:sp>
+      <p:pic>
+        <p:nvPicPr>
+          <p:cNvPr id="137" name="Google Shape;137;p19"/>
+          <p:cNvPicPr preferRelativeResize="0"/>
+          <p:nvPr/>
+        </p:nvPicPr>
+        <p:blipFill rotWithShape="1">
+          <a:blip r:embed="rId3">
+            <a:alphaModFix/>
+          </a:blip>
+          <a:srcRect b="0" l="0" r="0" t="0"/>
+          <a:stretch/>
+        </p:blipFill>
+        <p:spPr>
+          <a:xfrm>
+            <a:off x="658813" y="5711140"/>
+            <a:ext cx="2772297" cy="489635"/>
+          </a:xfrm>
+          <a:prstGeom prst="rect">
+            <a:avLst/>
+          </a:prstGeom>
+          <a:noFill/>
+          <a:ln>
+            <a:noFill/>
+          </a:ln>
+        </p:spPr>
+      </p:pic>
+    </p:spTree>
+  </p:cSld>
+  <p:clrMapOvr>
+    <a:masterClrMapping/>
+  </p:clrMapOvr>
+</p:sldLayout>
+</file>
+
+<file path=ppt/slideLayouts/slideLayout2.xml><?xml version="1.0" encoding="utf-8"?>
+<p:sldLayout xmlns:a="http://schemas.openxmlformats.org/drawingml/2006/main" xmlns:r="http://schemas.openxmlformats.org/officeDocument/2006/relationships" xmlns:mc="http://schemas.openxmlformats.org/markup-compatibility/2006" xmlns:mv="urn:schemas-microsoft-com:mac:vml" xmlns:p="http://schemas.openxmlformats.org/presentationml/2006/main" xmlns:c="http://schemas.openxmlformats.org/drawingml/2006/chart" xmlns:dgm="http://schemas.openxmlformats.org/drawingml/2006/diagram" xmlns:o="urn:schemas-microsoft-com:office:office" xmlns:v="urn:schemas-microsoft-com:vml" xmlns:pvml="urn:schemas-microsoft-com:office:powerpoint" xmlns:com="http://schemas.openxmlformats.org/drawingml/2006/compatibility" xmlns:p14="http://schemas.microsoft.com/office/powerpoint/2010/main" xmlns:p15="http://schemas.microsoft.com/office/powerpoint/2012/main" xmlns:ahyp="http://schemas.microsoft.com/office/drawing/2018/hyperlinkcolor" matchingName="3_Титульный слайд">
+  <p:cSld name="3_Титульный слайд">
+    <p:bg>
+      <p:bgPr>
+        <a:solidFill>
+          <a:schemeClr val="accent1"/>
+        </a:solidFill>
+      </p:bgPr>
+    </p:bg>
+    <p:spTree>
+      <p:nvGrpSpPr>
+        <p:cNvPr id="58" name="Shape 58"/>
+        <p:cNvGrpSpPr/>
+        <p:nvPr/>
+      </p:nvGrpSpPr>
+      <p:grpSpPr>
+        <a:xfrm>
+          <a:off x="0" y="0"/>
+          <a:ext cx="0" cy="0"/>
+          <a:chOff x="0" y="0"/>
+          <a:chExt cx="0" cy="0"/>
+        </a:xfrm>
+      </p:grpSpPr>
+      <p:sp>
+        <p:nvSpPr>
+          <p:cNvPr id="59" name="Google Shape;59;p3"/>
+          <p:cNvSpPr txBox="1"/>
+          <p:nvPr>
+            <p:ph idx="1" type="body"/>
+          </p:nvPr>
+        </p:nvSpPr>
+        <p:spPr>
+          <a:xfrm>
+            <a:off x="658813" y="4728001"/>
+            <a:ext cx="5012644" cy="553998"/>
+          </a:xfrm>
+          <a:prstGeom prst="rect">
+            <a:avLst/>
+          </a:prstGeom>
+          <a:noFill/>
+          <a:ln>
+            <a:noFill/>
+          </a:ln>
+        </p:spPr>
+        <p:txBody>
+          <a:bodyPr anchorCtr="0" anchor="t" bIns="0" lIns="0" spcFirstLastPara="1" rIns="0" wrap="square" tIns="0">
+            <a:spAutoFit/>
+          </a:bodyPr>
+          <a:lstStyle>
+            <a:lvl1pPr indent="-228600" lvl="0" marL="457200" marR="0" algn="l">
+              <a:lnSpc>
+                <a:spcPct val="100000"/>
+              </a:lnSpc>
+              <a:spcBef>
+                <a:spcPts val="0"/>
+              </a:spcBef>
+              <a:spcAft>
+                <a:spcPts val="0"/>
+              </a:spcAft>
+              <a:buClr>
+                <a:schemeClr val="lt2"/>
+              </a:buClr>
+              <a:buSzPts val="2000"/>
+              <a:buFont typeface="Arial"/>
+              <a:buNone/>
+              <a:defRPr sz="2000">
+                <a:solidFill>
+                  <a:schemeClr val="lt2"/>
+                </a:solidFill>
+              </a:defRPr>
+            </a:lvl1pPr>
+            <a:lvl2pPr indent="-342900" lvl="1" marL="914400" algn="l">
+              <a:lnSpc>
+                <a:spcPct val="110000"/>
+              </a:lnSpc>
+              <a:spcBef>
+                <a:spcPts val="500"/>
+              </a:spcBef>
+              <a:spcAft>
+                <a:spcPts val="0"/>
+              </a:spcAft>
+              <a:buSzPts val="1800"/>
+              <a:buChar char="•"/>
+              <a:defRPr/>
+            </a:lvl2pPr>
+            <a:lvl3pPr indent="-342900" lvl="2" marL="1371600" algn="l">
+              <a:lnSpc>
+                <a:spcPct val="110000"/>
+              </a:lnSpc>
+              <a:spcBef>
+                <a:spcPts val="500"/>
+              </a:spcBef>
+              <a:spcAft>
+                <a:spcPts val="0"/>
+              </a:spcAft>
+              <a:buClr>
+                <a:schemeClr val="dk1"/>
+              </a:buClr>
+              <a:buSzPts val="1800"/>
+              <a:buChar char="−"/>
+              <a:defRPr/>
             </a:lvl3pPr>
             <a:lvl4pPr indent="-342900" lvl="3" marL="1828800" algn="l">
               <a:lnSpc>
@@ -2738,16 +2736,16 @@
       </p:sp>
       <p:sp>
         <p:nvSpPr>
-          <p:cNvPr id="109" name="Google Shape;109;p13"/>
+          <p:cNvPr id="60" name="Google Shape;60;p3"/>
           <p:cNvSpPr txBox="1"/>
           <p:nvPr>
-            <p:ph idx="2" type="body"/>
+            <p:ph type="title"/>
           </p:nvPr>
         </p:nvSpPr>
         <p:spPr>
           <a:xfrm>
-            <a:off x="6228824" y="1773239"/>
-            <a:ext cx="5304364" cy="4427537"/>
+            <a:off x="622261" y="2598003"/>
+            <a:ext cx="10220325" cy="1661993"/>
           </a:xfrm>
           <a:prstGeom prst="rect">
             <a:avLst/>
@@ -2758,173 +2756,118 @@
           </a:ln>
         </p:spPr>
         <p:txBody>
-          <a:bodyPr anchorCtr="0" anchor="t" bIns="0" lIns="0" spcFirstLastPara="1" rIns="0" wrap="square" tIns="0">
-            <a:normAutofit/>
+          <a:bodyPr anchorCtr="0" anchor="b" bIns="0" lIns="0" spcFirstLastPara="1" rIns="0" wrap="square" tIns="0">
+            <a:spAutoFit/>
           </a:bodyPr>
           <a:lstStyle>
-            <a:lvl1pPr indent="-228600" lvl="0" marL="457200" algn="l">
-              <a:lnSpc>
-                <a:spcPct val="110000"/>
-              </a:lnSpc>
-              <a:spcBef>
-                <a:spcPts val="1000"/>
-              </a:spcBef>
-              <a:spcAft>
-                <a:spcPts val="0"/>
-              </a:spcAft>
-              <a:buClr>
-                <a:schemeClr val="dk1"/>
-              </a:buClr>
-              <a:buSzPts val="1600"/>
-              <a:buNone/>
-              <a:defRPr b="0" i="0">
-                <a:latin typeface="Play"/>
-                <a:ea typeface="Play"/>
-                <a:cs typeface="Play"/>
-                <a:sym typeface="Play"/>
-              </a:defRPr>
-            </a:lvl1pPr>
-            <a:lvl2pPr indent="-317500" lvl="1" marL="914400" algn="l">
-              <a:lnSpc>
-                <a:spcPct val="110000"/>
-              </a:lnSpc>
-              <a:spcBef>
-                <a:spcPts val="500"/>
-              </a:spcBef>
-              <a:spcAft>
-                <a:spcPts val="0"/>
-              </a:spcAft>
-              <a:buSzPts val="1400"/>
-              <a:buChar char="•"/>
-              <a:defRPr b="0" i="0">
-                <a:latin typeface="Play"/>
-                <a:ea typeface="Play"/>
-                <a:cs typeface="Play"/>
-                <a:sym typeface="Play"/>
-              </a:defRPr>
-            </a:lvl2pPr>
-            <a:lvl3pPr indent="-304800" lvl="2" marL="1371600" algn="l">
-              <a:lnSpc>
-                <a:spcPct val="110000"/>
-              </a:lnSpc>
-              <a:spcBef>
-                <a:spcPts val="500"/>
-              </a:spcBef>
-              <a:spcAft>
-                <a:spcPts val="0"/>
-              </a:spcAft>
-              <a:buClr>
-                <a:schemeClr val="dk1"/>
-              </a:buClr>
-              <a:buSzPts val="1200"/>
-              <a:buChar char="−"/>
-              <a:defRPr b="0" i="0">
-                <a:latin typeface="Play"/>
-                <a:ea typeface="Play"/>
-                <a:cs typeface="Play"/>
-                <a:sym typeface="Play"/>
-              </a:defRPr>
-            </a:lvl3pPr>
-            <a:lvl4pPr indent="-342900" lvl="3" marL="1828800" algn="l">
+            <a:lvl1pPr lvl="0" algn="l">
               <a:lnSpc>
                 <a:spcPct val="90000"/>
               </a:lnSpc>
               <a:spcBef>
-                <a:spcPts val="500"/>
+                <a:spcPts val="0"/>
               </a:spcBef>
               <a:spcAft>
                 <a:spcPts val="0"/>
               </a:spcAft>
               <a:buClr>
-                <a:schemeClr val="dk1"/>
+                <a:schemeClr val="lt2"/>
               </a:buClr>
-              <a:buSzPts val="1800"/>
-              <a:buChar char="•"/>
+              <a:buSzPts val="6000"/>
+              <a:buFont typeface="Play"/>
+              <a:buNone/>
+              <a:defRPr sz="6000">
+                <a:solidFill>
+                  <a:schemeClr val="lt2"/>
+                </a:solidFill>
+              </a:defRPr>
+            </a:lvl1pPr>
+            <a:lvl2pPr lvl="1">
+              <a:spcBef>
+                <a:spcPts val="0"/>
+              </a:spcBef>
+              <a:spcAft>
+                <a:spcPts val="0"/>
+              </a:spcAft>
+              <a:buSzPts val="1400"/>
+              <a:buNone/>
+              <a:defRPr/>
+            </a:lvl2pPr>
+            <a:lvl3pPr lvl="2">
+              <a:spcBef>
+                <a:spcPts val="0"/>
+              </a:spcBef>
+              <a:spcAft>
+                <a:spcPts val="0"/>
+              </a:spcAft>
+              <a:buSzPts val="1400"/>
+              <a:buNone/>
+              <a:defRPr/>
+            </a:lvl3pPr>
+            <a:lvl4pPr lvl="3">
+              <a:spcBef>
+                <a:spcPts val="0"/>
+              </a:spcBef>
+              <a:spcAft>
+                <a:spcPts val="0"/>
+              </a:spcAft>
+              <a:buSzPts val="1400"/>
+              <a:buNone/>
               <a:defRPr/>
             </a:lvl4pPr>
-            <a:lvl5pPr indent="-342900" lvl="4" marL="2286000" algn="l">
-              <a:lnSpc>
-                <a:spcPct val="90000"/>
-              </a:lnSpc>
-              <a:spcBef>
-                <a:spcPts val="500"/>
-              </a:spcBef>
-              <a:spcAft>
-                <a:spcPts val="0"/>
-              </a:spcAft>
-              <a:buClr>
-                <a:schemeClr val="dk1"/>
-              </a:buClr>
-              <a:buSzPts val="1800"/>
-              <a:buChar char="•"/>
+            <a:lvl5pPr lvl="4">
+              <a:spcBef>
+                <a:spcPts val="0"/>
+              </a:spcBef>
+              <a:spcAft>
+                <a:spcPts val="0"/>
+              </a:spcAft>
+              <a:buSzPts val="1400"/>
+              <a:buNone/>
               <a:defRPr/>
             </a:lvl5pPr>
-            <a:lvl6pPr indent="-342900" lvl="5" marL="2743200" algn="l">
-              <a:lnSpc>
-                <a:spcPct val="90000"/>
-              </a:lnSpc>
-              <a:spcBef>
-                <a:spcPts val="500"/>
-              </a:spcBef>
-              <a:spcAft>
-                <a:spcPts val="0"/>
-              </a:spcAft>
-              <a:buClr>
-                <a:schemeClr val="dk1"/>
-              </a:buClr>
-              <a:buSzPts val="1800"/>
-              <a:buChar char="•"/>
+            <a:lvl6pPr lvl="5">
+              <a:spcBef>
+                <a:spcPts val="0"/>
+              </a:spcBef>
+              <a:spcAft>
+                <a:spcPts val="0"/>
+              </a:spcAft>
+              <a:buSzPts val="1400"/>
+              <a:buNone/>
               <a:defRPr/>
             </a:lvl6pPr>
-            <a:lvl7pPr indent="-342900" lvl="6" marL="3200400" algn="l">
-              <a:lnSpc>
-                <a:spcPct val="90000"/>
-              </a:lnSpc>
-              <a:spcBef>
-                <a:spcPts val="500"/>
-              </a:spcBef>
-              <a:spcAft>
-                <a:spcPts val="0"/>
-              </a:spcAft>
-              <a:buClr>
-                <a:schemeClr val="dk1"/>
-              </a:buClr>
-              <a:buSzPts val="1800"/>
-              <a:buChar char="•"/>
+            <a:lvl7pPr lvl="6">
+              <a:spcBef>
+                <a:spcPts val="0"/>
+              </a:spcBef>
+              <a:spcAft>
+                <a:spcPts val="0"/>
+              </a:spcAft>
+              <a:buSzPts val="1400"/>
+              <a:buNone/>
               <a:defRPr/>
             </a:lvl7pPr>
-            <a:lvl8pPr indent="-342900" lvl="7" marL="3657600" algn="l">
-              <a:lnSpc>
-                <a:spcPct val="90000"/>
-              </a:lnSpc>
-              <a:spcBef>
-                <a:spcPts val="500"/>
-              </a:spcBef>
-              <a:spcAft>
-                <a:spcPts val="0"/>
-              </a:spcAft>
-              <a:buClr>
-                <a:schemeClr val="dk1"/>
-              </a:buClr>
-              <a:buSzPts val="1800"/>
-              <a:buChar char="•"/>
+            <a:lvl8pPr lvl="7">
+              <a:spcBef>
+                <a:spcPts val="0"/>
+              </a:spcBef>
+              <a:spcAft>
+                <a:spcPts val="0"/>
+              </a:spcAft>
+              <a:buSzPts val="1400"/>
+              <a:buNone/>
               <a:defRPr/>
             </a:lvl8pPr>
-            <a:lvl9pPr indent="-342900" lvl="8" marL="4114800" algn="l">
-              <a:lnSpc>
-                <a:spcPct val="90000"/>
-              </a:lnSpc>
-              <a:spcBef>
-                <a:spcPts val="500"/>
-              </a:spcBef>
-              <a:spcAft>
-                <a:spcPts val="0"/>
-              </a:spcAft>
-              <a:buClr>
-                <a:schemeClr val="dk1"/>
-              </a:buClr>
-              <a:buSzPts val="1800"/>
-              <a:buChar char="•"/>
+            <a:lvl9pPr lvl="8">
+              <a:spcBef>
+                <a:spcPts val="0"/>
+              </a:spcBef>
+              <a:spcAft>
+                <a:spcPts val="0"/>
+              </a:spcAft>
+              <a:buSzPts val="1400"/>
+              <a:buNone/>
               <a:defRPr/>
             </a:lvl9pPr>
           </a:lstStyle>
@@ -2933,16 +2876,14 @@
       </p:sp>
       <p:sp>
         <p:nvSpPr>
-          <p:cNvPr id="110" name="Google Shape;110;p13"/>
+          <p:cNvPr id="61" name="Google Shape;61;p3"/>
           <p:cNvSpPr txBox="1"/>
-          <p:nvPr>
-            <p:ph type="title"/>
-          </p:nvPr>
+          <p:nvPr/>
         </p:nvSpPr>
         <p:spPr>
           <a:xfrm>
-            <a:off x="677334" y="692150"/>
-            <a:ext cx="10855854" cy="644241"/>
+            <a:off x="3358342" y="482138"/>
+            <a:ext cx="72768" cy="362141"/>
           </a:xfrm>
           <a:prstGeom prst="rect">
             <a:avLst/>
@@ -2953,13 +2894,14 @@
           </a:ln>
         </p:spPr>
         <p:txBody>
-          <a:bodyPr anchorCtr="0" anchor="t" bIns="0" lIns="0" spcFirstLastPara="1" rIns="0" wrap="square" tIns="0">
-            <a:noAutofit/>
+          <a:bodyPr anchorCtr="0" anchor="t" bIns="36000" lIns="36000" spcFirstLastPara="1" rIns="36000" wrap="square" tIns="36000">
+            <a:spAutoFit/>
           </a:bodyPr>
-          <a:lstStyle>
-            <a:lvl1pPr lvl="0" algn="l">
+          <a:lstStyle/>
+          <a:p>
+            <a:pPr indent="0" lvl="0" marL="0" marR="0" rtl="0" algn="l">
               <a:lnSpc>
-                <a:spcPct val="90000"/>
+                <a:spcPct val="110000"/>
               </a:lnSpc>
               <a:spcBef>
                 <a:spcPts val="0"/>
@@ -2967,110 +2909,77 @@
               <a:spcAft>
                 <a:spcPts val="0"/>
               </a:spcAft>
-              <a:buClr>
-                <a:schemeClr val="accent1"/>
-              </a:buClr>
-              <a:buSzPts val="3600"/>
-              <a:buFont typeface="Play"/>
               <a:buNone/>
-              <a:defRPr>
-                <a:solidFill>
-                  <a:schemeClr val="accent1"/>
-                </a:solidFill>
-              </a:defRPr>
-            </a:lvl1pPr>
-            <a:lvl2pPr lvl="1">
-              <a:spcBef>
-                <a:spcPts val="0"/>
-              </a:spcBef>
-              <a:spcAft>
-                <a:spcPts val="0"/>
-              </a:spcAft>
-              <a:buSzPts val="1400"/>
-              <a:buNone/>
-              <a:defRPr/>
-            </a:lvl2pPr>
-            <a:lvl3pPr lvl="2">
-              <a:spcBef>
-                <a:spcPts val="0"/>
-              </a:spcBef>
-              <a:spcAft>
-                <a:spcPts val="0"/>
-              </a:spcAft>
-              <a:buSzPts val="1400"/>
-              <a:buNone/>
-              <a:defRPr/>
-            </a:lvl3pPr>
-            <a:lvl4pPr lvl="3">
-              <a:spcBef>
-                <a:spcPts val="0"/>
-              </a:spcBef>
-              <a:spcAft>
-                <a:spcPts val="0"/>
-              </a:spcAft>
-              <a:buSzPts val="1400"/>
-              <a:buNone/>
-              <a:defRPr/>
-            </a:lvl4pPr>
-            <a:lvl5pPr lvl="4">
-              <a:spcBef>
-                <a:spcPts val="0"/>
-              </a:spcBef>
-              <a:spcAft>
-                <a:spcPts val="0"/>
-              </a:spcAft>
-              <a:buSzPts val="1400"/>
-              <a:buNone/>
-              <a:defRPr/>
-            </a:lvl5pPr>
-            <a:lvl6pPr lvl="5">
-              <a:spcBef>
-                <a:spcPts val="0"/>
-              </a:spcBef>
-              <a:spcAft>
-                <a:spcPts val="0"/>
-              </a:spcAft>
-              <a:buSzPts val="1400"/>
-              <a:buNone/>
-              <a:defRPr/>
-            </a:lvl6pPr>
-            <a:lvl7pPr lvl="6">
-              <a:spcBef>
-                <a:spcPts val="0"/>
-              </a:spcBef>
-              <a:spcAft>
-                <a:spcPts val="0"/>
-              </a:spcAft>
-              <a:buSzPts val="1400"/>
-              <a:buNone/>
-              <a:defRPr/>
-            </a:lvl7pPr>
-            <a:lvl8pPr lvl="7">
-              <a:spcBef>
-                <a:spcPts val="0"/>
-              </a:spcBef>
-              <a:spcAft>
-                <a:spcPts val="0"/>
-              </a:spcAft>
-              <a:buSzPts val="1400"/>
-              <a:buNone/>
-              <a:defRPr/>
-            </a:lvl8pPr>
-            <a:lvl9pPr lvl="8">
-              <a:spcBef>
-                <a:spcPts val="0"/>
-              </a:spcBef>
-              <a:spcAft>
-                <a:spcPts val="0"/>
-              </a:spcAft>
-              <a:buSzPts val="1400"/>
-              <a:buNone/>
-              <a:defRPr/>
-            </a:lvl9pPr>
-          </a:lstStyle>
-          <a:p/>
+            </a:pPr>
+            <a:r>
+              <a:t/>
+            </a:r>
+            <a:endParaRPr b="0" i="0" sz="1800" u="none" cap="none" strike="noStrike">
+              <a:solidFill>
+                <a:schemeClr val="dk1"/>
+              </a:solidFill>
+              <a:latin typeface="Arial"/>
+              <a:ea typeface="Arial"/>
+              <a:cs typeface="Arial"/>
+              <a:sym typeface="Arial"/>
+            </a:endParaRPr>
+          </a:p>
         </p:txBody>
       </p:sp>
+      <p:pic>
+        <p:nvPicPr>
+          <p:cNvPr id="62" name="Google Shape;62;p3"/>
+          <p:cNvPicPr preferRelativeResize="0"/>
+          <p:nvPr/>
+        </p:nvPicPr>
+        <p:blipFill rotWithShape="1">
+          <a:blip r:embed="rId2">
+            <a:alphaModFix/>
+          </a:blip>
+          <a:srcRect b="0" l="0" r="0" t="0"/>
+          <a:stretch/>
+        </p:blipFill>
+        <p:spPr>
+          <a:xfrm>
+            <a:off x="658813" y="692150"/>
+            <a:ext cx="2772297" cy="489635"/>
+          </a:xfrm>
+          <a:prstGeom prst="rect">
+            <a:avLst/>
+          </a:prstGeom>
+          <a:noFill/>
+          <a:ln>
+            <a:noFill/>
+          </a:ln>
+        </p:spPr>
+      </p:pic>
+      <p:pic>
+        <p:nvPicPr>
+          <p:cNvPr id="63" name="Google Shape;63;p3"/>
+          <p:cNvPicPr preferRelativeResize="0"/>
+          <p:nvPr/>
+        </p:nvPicPr>
+        <p:blipFill rotWithShape="1">
+          <a:blip r:embed="rId3">
+            <a:alphaModFix/>
+          </a:blip>
+          <a:srcRect b="0" l="0" r="0" t="0"/>
+          <a:stretch/>
+        </p:blipFill>
+        <p:spPr>
+          <a:xfrm>
+            <a:off x="8803845" y="0"/>
+            <a:ext cx="3397780" cy="6858000"/>
+          </a:xfrm>
+          <a:prstGeom prst="rect">
+            <a:avLst/>
+          </a:prstGeom>
+          <a:noFill/>
+          <a:ln>
+            <a:noFill/>
+          </a:ln>
+        </p:spPr>
+      </p:pic>
     </p:spTree>
   </p:cSld>
   <p:clrMapOvr>
@@ -4705,8 +4614,9 @@
   </p:cSld>
   <p:clrMap accent1="accent1" accent2="accent2" accent3="accent3" accent4="accent4" accent5="accent5" accent6="accent6" bg1="lt1" bg2="dk2" tx1="dk1" tx2="lt2" folHlink="folHlink" hlink="hlink"/>
   <p:sldLayoutIdLst>
+    <p:sldLayoutId id="2147483649" r:id="rId2"/>
     <p:sldLayoutId id="2147483653" r:id="rId6"/>
-    <p:sldLayoutId id="2147483659" r:id="rId12"/>
+    <p:sldLayoutId id="2147483665" r:id="rId18"/>
   </p:sldLayoutIdLst>
   <p:hf dt="0" ftr="0" hdr="0" sldNum="0"/>
   <p:txStyles>
@@ -7623,6 +7533,342 @@
 <file path=ppt/slides/slide56.xml><?xml version="1.0" encoding="utf-8"?>
 <p:sld xmlns:a="http://schemas.openxmlformats.org/drawingml/2006/main" xmlns:p="http://schemas.openxmlformats.org/presentationml/2006/main" xmlns:r="http://schemas.openxmlformats.org/officeDocument/2006/relationships">
   <p:cSld>
+    <p:spTree>
+      <p:nvGrpSpPr>
+        <p:cNvPr id="1" name=""/>
+        <p:cNvGrpSpPr/>
+        <p:nvPr/>
+      </p:nvGrpSpPr>
+      <p:grpSpPr/>
+      <p:sp>
+        <p:nvSpPr>
+          <p:cNvPr id="2" name="title"/>
+          <p:cNvSpPr txBox="1"/>
+          <p:nvPr/>
+        </p:nvSpPr>
+        <p:spPr>
+          <a:xfrm>
+            <a:off x="622279" y="2598016"/>
+            <a:ext cx="7535387" cy="1661967"/>
+          </a:xfrm>
+          <a:prstGeom prst="rect">
+            <a:avLst/>
+          </a:prstGeom>
+          <a:noFill/>
+        </p:spPr>
+        <p:txBody>
+          <a:bodyPr wrap="square" lIns="76200" rIns="76200" tIns="50800" bIns="50800">
+            <a:spAutoFit/>
+          </a:bodyPr>
+          <a:lstStyle/>
+          <a:p>
+            <a:pPr algn="l">
+              <a:spcAft>
+                <a:spcPts val="300"/>
+              </a:spcAft>
+              <a:defRPr sz="3200" b="0">
+                <a:solidFill>
+                  <a:srgbClr val="000000"/>
+                </a:solidFill>
+                <a:latin typeface="Arial"/>
+                <a:ea typeface="Arial"/>
+                <a:cs typeface="Arial"/>
+              </a:defRPr>
+            </a:pPr>
+            <a:r>
+              <a:rPr sz="3200" b="0">
+                <a:solidFill>
+                  <a:srgbClr val="000000"/>
+                </a:solidFill>
+                <a:latin typeface="Arial"/>
+                <a:ea typeface="Arial"/>
+                <a:cs typeface="Arial"/>
+              </a:rPr>
+              <a:t>Защита инициативы: сервис автоматической вёрстки презентаций</a:t>
+            </a:r>
+          </a:p>
+        </p:txBody>
+      </p:sp>
+    </p:spTree>
+  </p:cSld>
+  <p:clrMapOvr>
+    <a:masterClrMapping/>
+  </p:clrMapOvr>
+</p:sld>
+</file>
+
+<file path=ppt/slides/slide57.xml><?xml version="1.0" encoding="utf-8"?>
+<p:sld xmlns:a="http://schemas.openxmlformats.org/drawingml/2006/main" xmlns:p="http://schemas.openxmlformats.org/presentationml/2006/main" xmlns:r="http://schemas.openxmlformats.org/officeDocument/2006/relationships">
+  <p:cSld>
+    <p:spTree>
+      <p:nvGrpSpPr>
+        <p:cNvPr id="1" name=""/>
+        <p:cNvGrpSpPr/>
+        <p:nvPr/>
+      </p:nvGrpSpPr>
+      <p:grpSpPr/>
+      <p:cxnSp>
+        <p:nvCxnSpPr>
+          <p:cNvPr id="986" name="Google Shape;986;p76"/>
+          <p:cNvCxnSpPr/>
+          <p:nvPr/>
+        </p:nvCxnSpPr>
+        <p:spPr>
+          <a:xfrm rot="10800000">
+            <a:off x="-42658" y="3591512"/>
+            <a:ext cx="12234658" cy="0"/>
+          </a:xfrm>
+          <a:prstGeom prst="straightConnector1">
+            <a:avLst/>
+          </a:prstGeom>
+          <a:noFill/>
+          <a:ln cap="flat" cmpd="sng" w="12700">
+            <a:solidFill>
+              <a:srgbClr val="E1E1E2"/>
+            </a:solidFill>
+            <a:prstDash val="solid"/>
+            <a:miter lim="8000"/>
+            <a:headEnd len="sm" w="sm" type="none"/>
+            <a:tailEnd len="sm" w="sm" type="none"/>
+          </a:ln>
+        </p:spPr>
+      </p:cxnSp>
+      <p:sp>
+        <p:nvSpPr>
+          <p:cNvPr id="987" name="title"/>
+          <p:cNvSpPr txBox="1"/>
+          <p:nvPr/>
+        </p:nvSpPr>
+        <p:spPr>
+          <a:xfrm>
+            <a:off x="677387" y="692177"/>
+            <a:ext cx="10855878" cy="822960"/>
+          </a:xfrm>
+          <a:prstGeom prst="rect">
+            <a:avLst/>
+          </a:prstGeom>
+          <a:noFill/>
+        </p:spPr>
+        <p:txBody>
+          <a:bodyPr wrap="square" lIns="76200" rIns="76200" tIns="50800" bIns="50800">
+            <a:spAutoFit/>
+          </a:bodyPr>
+          <a:lstStyle/>
+          <a:p>
+            <a:pPr algn="l">
+              <a:spcAft>
+                <a:spcPts val="300"/>
+              </a:spcAft>
+              <a:defRPr sz="4000">
+                <a:solidFill>
+                  <a:srgbClr val="000000"/>
+                </a:solidFill>
+                <a:latin typeface="Arial"/>
+                <a:ea typeface="Arial"/>
+                <a:cs typeface="Arial"/>
+              </a:defRPr>
+            </a:pPr>
+            <a:r>
+              <a:rPr sz="4000">
+                <a:solidFill>
+                  <a:srgbClr val="000000"/>
+                </a:solidFill>
+                <a:latin typeface="Arial"/>
+                <a:ea typeface="Arial"/>
+                <a:cs typeface="Arial"/>
+              </a:rPr>
+              <a:t>Контекст и возможность</a:t>
+            </a:r>
+          </a:p>
+        </p:txBody>
+      </p:sp>
+      <p:sp>
+        <p:nvSpPr>
+          <p:cNvPr id="988" name="body_left"/>
+          <p:cNvSpPr txBox="1"/>
+          <p:nvPr/>
+        </p:nvSpPr>
+        <p:spPr>
+          <a:xfrm>
+            <a:off x="677387" y="2200937"/>
+            <a:ext cx="5245059" cy="2645542"/>
+          </a:xfrm>
+          <a:prstGeom prst="rect">
+            <a:avLst/>
+          </a:prstGeom>
+          <a:noFill/>
+        </p:spPr>
+        <p:txBody>
+          <a:bodyPr wrap="square" lIns="76200" rIns="76200" tIns="50800" bIns="50800">
+            <a:spAutoFit/>
+          </a:bodyPr>
+          <a:lstStyle/>
+          <a:p>
+            <a:pPr algn="l">
+              <a:spcAft>
+                <a:spcPts val="300"/>
+              </a:spcAft>
+              <a:defRPr sz="1800">
+                <a:solidFill>
+                  <a:srgbClr val="000000"/>
+                </a:solidFill>
+                <a:latin typeface="Play"/>
+                <a:ea typeface="Play"/>
+                <a:cs typeface="Play"/>
+              </a:defRPr>
+            </a:pPr>
+            <a:r>
+              <a:rPr sz="1800">
+                <a:solidFill>
+                  <a:srgbClr val="000000"/>
+                </a:solidFill>
+                <a:latin typeface="Play"/>
+                <a:ea typeface="Play"/>
+                <a:cs typeface="Play"/>
+              </a:rPr>
+              <a:t>• Отделы собирают презентации вручную, затрачивая 186 минут на 12-слайдовую колоду</a:t>
+            </a:r>
+          </a:p>
+          <a:p>
+            <a:pPr algn="l">
+              <a:spcAft>
+                <a:spcPts val="300"/>
+              </a:spcAft>
+              <a:defRPr sz="1800">
+                <a:solidFill>
+                  <a:srgbClr val="000000"/>
+                </a:solidFill>
+                <a:latin typeface="Play"/>
+                <a:ea typeface="Play"/>
+                <a:cs typeface="Play"/>
+              </a:defRPr>
+            </a:pPr>
+            <a:r>
+              <a:rPr sz="1800">
+                <a:solidFill>
+                  <a:srgbClr val="000000"/>
+                </a:solidFill>
+                <a:latin typeface="Play"/>
+                <a:ea typeface="Play"/>
+                <a:cs typeface="Play"/>
+              </a:rPr>
+              <a:t>• После ревью дизайнеров добавляется 74 минуты правок</a:t>
+            </a:r>
+          </a:p>
+          <a:p>
+            <a:pPr algn="l">
+              <a:spcAft>
+                <a:spcPts val="300"/>
+              </a:spcAft>
+              <a:defRPr sz="1800">
+                <a:solidFill>
+                  <a:srgbClr val="000000"/>
+                </a:solidFill>
+                <a:latin typeface="Play"/>
+                <a:ea typeface="Play"/>
+                <a:cs typeface="Play"/>
+              </a:defRPr>
+            </a:pPr>
+            <a:r>
+              <a:rPr sz="1800">
+                <a:solidFill>
+                  <a:srgbClr val="000000"/>
+                </a:solidFill>
+                <a:latin typeface="Play"/>
+                <a:ea typeface="Play"/>
+                <a:cs typeface="Play"/>
+              </a:rPr>
+              <a:t>• 19 из 42 колод нарушают фирменный стиль: чужие гарнитуры и цвета</a:t>
+            </a:r>
+          </a:p>
+        </p:txBody>
+      </p:sp>
+      <p:sp>
+        <p:nvSpPr>
+          <p:cNvPr id="989" name="body_right"/>
+          <p:cNvSpPr txBox="1"/>
+          <p:nvPr/>
+        </p:nvSpPr>
+        <p:spPr>
+          <a:xfrm>
+            <a:off x="6288206" y="2200937"/>
+            <a:ext cx="5245059" cy="2645542"/>
+          </a:xfrm>
+          <a:prstGeom prst="rect">
+            <a:avLst/>
+          </a:prstGeom>
+          <a:noFill/>
+        </p:spPr>
+        <p:txBody>
+          <a:bodyPr wrap="square" lIns="76200" rIns="76200" tIns="50800" bIns="50800">
+            <a:spAutoFit/>
+          </a:bodyPr>
+          <a:lstStyle/>
+          <a:p>
+            <a:pPr algn="l">
+              <a:spcAft>
+                <a:spcPts val="300"/>
+              </a:spcAft>
+              <a:defRPr sz="2400">
+                <a:solidFill>
+                  <a:srgbClr val="000000"/>
+                </a:solidFill>
+                <a:latin typeface="Play"/>
+                <a:ea typeface="Play"/>
+                <a:cs typeface="Play"/>
+              </a:defRPr>
+            </a:pPr>
+            <a:r>
+              <a:rPr sz="2400">
+                <a:solidFill>
+                  <a:srgbClr val="000000"/>
+                </a:solidFill>
+                <a:latin typeface="Play"/>
+                <a:ea typeface="Play"/>
+                <a:cs typeface="Play"/>
+              </a:rPr>
+              <a:t>• Дизайнеры закрывают 11 запросов в неделю из 27 поступающих, ожидание 6 дней</a:t>
+            </a:r>
+          </a:p>
+          <a:p>
+            <a:pPr algn="l">
+              <a:spcAft>
+                <a:spcPts val="300"/>
+              </a:spcAft>
+              <a:defRPr sz="2400">
+                <a:solidFill>
+                  <a:srgbClr val="000000"/>
+                </a:solidFill>
+                <a:latin typeface="Play"/>
+                <a:ea typeface="Play"/>
+                <a:cs typeface="Play"/>
+              </a:defRPr>
+            </a:pPr>
+            <a:r>
+              <a:rPr sz="2400">
+                <a:solidFill>
+                  <a:srgbClr val="000000"/>
+                </a:solidFill>
+                <a:latin typeface="Play"/>
+                <a:ea typeface="Play"/>
+                <a:cs typeface="Play"/>
+              </a:rPr>
+              <a:t>• Время до первой версии колоды составляет 6 рабочих дней</a:t>
+            </a:r>
+          </a:p>
+        </p:txBody>
+      </p:sp>
+    </p:spTree>
+  </p:cSld>
+  <p:clrMapOvr>
+    <a:masterClrMapping/>
+  </p:clrMapOvr>
+</p:sld>
+</file>
+
+<file path=ppt/slides/slide58.xml><?xml version="1.0" encoding="utf-8"?>
+<p:sld xmlns:a="http://schemas.openxmlformats.org/drawingml/2006/main" xmlns:p="http://schemas.openxmlformats.org/presentationml/2006/main" xmlns:r="http://schemas.openxmlformats.org/officeDocument/2006/relationships">
+  <p:cSld>
     <p:bg>
       <p:bgPr>
         <a:solidFill>
@@ -7646,7 +7892,7 @@
         <p:spPr>
           <a:xfrm>
             <a:off x="677387" y="692177"/>
-            <a:ext cx="10855878" cy="1447800"/>
+            <a:ext cx="10855878" cy="822960"/>
           </a:xfrm>
           <a:prstGeom prst="rect">
             <a:avLst/>
@@ -7681,7 +7927,449 @@
                 <a:ea typeface="Arial"/>
                 <a:cs typeface="Arial"/>
               </a:rPr>
-              <a:t>Автоматическая вёрстка презентаций: пилот и запуск</a:t>
+              <a:t>Предложение</a:t>
+            </a:r>
+          </a:p>
+        </p:txBody>
+      </p:sp>
+      <p:sp>
+        <p:nvSpPr>
+          <p:cNvPr id="3" name="body"/>
+          <p:cNvSpPr txBox="1"/>
+          <p:nvPr/>
+        </p:nvSpPr>
+        <p:spPr>
+          <a:xfrm>
+            <a:off x="677387" y="1773204"/>
+            <a:ext cx="5245059" cy="4427593"/>
+          </a:xfrm>
+          <a:prstGeom prst="rect">
+            <a:avLst/>
+          </a:prstGeom>
+          <a:noFill/>
+        </p:spPr>
+        <p:txBody>
+          <a:bodyPr wrap="square" lIns="76200" rIns="76200" tIns="50800" bIns="50800">
+            <a:spAutoFit/>
+          </a:bodyPr>
+          <a:lstStyle/>
+          <a:p>
+            <a:pPr algn="l">
+              <a:spcAft>
+                <a:spcPts val="300"/>
+              </a:spcAft>
+              <a:defRPr sz="1800">
+                <a:solidFill>
+                  <a:srgbClr val="000000"/>
+                </a:solidFill>
+                <a:latin typeface="Play"/>
+                <a:ea typeface="Play"/>
+                <a:cs typeface="Play"/>
+              </a:defRPr>
+            </a:pPr>
+            <a:r>
+              <a:rPr sz="1800">
+                <a:solidFill>
+                  <a:srgbClr val="000000"/>
+                </a:solidFill>
+                <a:latin typeface="Play"/>
+                <a:ea typeface="Play"/>
+                <a:cs typeface="Play"/>
+              </a:rPr>
+              <a:t>• Сервис принимает pptx-шаблон, документы, таблицы, заметки.</a:t>
+            </a:r>
+          </a:p>
+          <a:p>
+            <a:pPr algn="l">
+              <a:spcAft>
+                <a:spcPts val="300"/>
+              </a:spcAft>
+              <a:defRPr sz="1800">
+                <a:solidFill>
+                  <a:srgbClr val="000000"/>
+                </a:solidFill>
+                <a:latin typeface="Play"/>
+                <a:ea typeface="Play"/>
+                <a:cs typeface="Play"/>
+              </a:defRPr>
+            </a:pPr>
+            <a:r>
+              <a:rPr sz="1800">
+                <a:solidFill>
+                  <a:srgbClr val="000000"/>
+                </a:solidFill>
+                <a:latin typeface="Play"/>
+                <a:ea typeface="Play"/>
+                <a:cs typeface="Play"/>
+              </a:rPr>
+              <a:t>• Шабл превращается:гарнитуры, шкала кеглей, палитра</a:t>
+            </a:r>
+          </a:p>
+          <a:p>
+            <a:pPr algn="l">
+              <a:spcAft>
+                <a:spcPts val="300"/>
+              </a:spcAft>
+              <a:defRPr sz="1800">
+                <a:solidFill>
+                  <a:srgbClr val="000000"/>
+                </a:solidFill>
+                <a:latin typeface="Play"/>
+                <a:ea typeface="Play"/>
+                <a:cs typeface="Play"/>
+              </a:defRPr>
+            </a:pPr>
+            <a:r>
+              <a:rPr sz="1800">
+                <a:solidFill>
+                  <a:srgbClr val="000000"/>
+                </a:solidFill>
+                <a:latin typeface="Play"/>
+                <a:ea typeface="Play"/>
+                <a:cs typeface="Play"/>
+              </a:rPr>
+              <a:t>• Бриф генерирует колоду, автоматическая вёрстка</a:t>
+            </a:r>
+          </a:p>
+          <a:p>
+            <a:pPr algn="l">
+              <a:spcAft>
+                <a:spcPts val="300"/>
+              </a:spcAft>
+              <a:defRPr sz="1800">
+                <a:solidFill>
+                  <a:srgbClr val="000000"/>
+                </a:solidFill>
+                <a:latin typeface="Play"/>
+                <a:ea typeface="Play"/>
+                <a:cs typeface="Play"/>
+              </a:defRPr>
+            </a:pPr>
+            <a:r>
+              <a:rPr sz="1800">
+                <a:solidFill>
+                  <a:srgbClr val="000000"/>
+                </a:solidFill>
+                <a:latin typeface="Play"/>
+                <a:ea typeface="Play"/>
+                <a:cs typeface="Play"/>
+              </a:rPr>
+              <a:t>• Экспорт в pptx, pdf, html; слайды редактируемы.</a:t>
+            </a:r>
+          </a:p>
+        </p:txBody>
+      </p:sp>
+      <p:sp>
+        <p:nvSpPr>
+          <p:cNvPr id="4" name="Pentagon 3"/>
+          <p:cNvSpPr/>
+          <p:nvPr/>
+        </p:nvSpPr>
+        <p:spPr>
+          <a:xfrm>
+            <a:off x="6288206" y="1835190"/>
+            <a:ext cx="5245059" cy="761545"/>
+          </a:xfrm>
+          <a:prstGeom prst="homePlate">
+            <a:avLst/>
+          </a:prstGeom>
+          <a:solidFill>
+            <a:srgbClr val="0077FF"/>
+          </a:solidFill>
+          <a:ln>
+            <a:noFill/>
+          </a:ln>
+        </p:spPr>
+        <p:style>
+          <a:lnRef idx="1">
+            <a:schemeClr val="accent1"/>
+          </a:lnRef>
+          <a:fillRef idx="3">
+            <a:schemeClr val="accent1"/>
+          </a:fillRef>
+          <a:effectRef idx="2">
+            <a:schemeClr val="accent1"/>
+          </a:effectRef>
+          <a:fontRef idx="minor">
+            <a:schemeClr val="lt1"/>
+          </a:fontRef>
+        </p:style>
+        <p:txBody>
+          <a:bodyPr rtlCol="0" anchor="ctr" wrap="square" lIns="12700" rIns="12700" tIns="12700" bIns="12700"/>
+          <a:lstStyle/>
+          <a:p>
+            <a:pPr algn="ctr">
+              <a:defRPr sz="1400" b="0">
+                <a:solidFill>
+                  <a:srgbClr val="FFFFFF"/>
+                </a:solidFill>
+                <a:latin typeface="Play"/>
+                <a:ea typeface="Play"/>
+                <a:cs typeface="Play"/>
+              </a:defRPr>
+            </a:pPr>
+            <a:r>
+              <a:rPr sz="1400" b="0">
+                <a:solidFill>
+                  <a:srgbClr val="FFFFFF"/>
+                </a:solidFill>
+                <a:latin typeface="Play"/>
+                <a:ea typeface="Play"/>
+                <a:cs typeface="Play"/>
+              </a:rPr>
+              <a:t>Шаблон</a:t>
+            </a:r>
+          </a:p>
+        </p:txBody>
+      </p:sp>
+      <p:sp>
+        <p:nvSpPr>
+          <p:cNvPr id="5" name="Chevron 4"/>
+          <p:cNvSpPr/>
+          <p:nvPr/>
+        </p:nvSpPr>
+        <p:spPr>
+          <a:xfrm>
+            <a:off x="6288206" y="2720708"/>
+            <a:ext cx="5245059" cy="761545"/>
+          </a:xfrm>
+          <a:prstGeom prst="chevron">
+            <a:avLst/>
+          </a:prstGeom>
+          <a:solidFill>
+            <a:srgbClr val="0077FF"/>
+          </a:solidFill>
+          <a:ln>
+            <a:noFill/>
+          </a:ln>
+        </p:spPr>
+        <p:style>
+          <a:lnRef idx="1">
+            <a:schemeClr val="accent1"/>
+          </a:lnRef>
+          <a:fillRef idx="3">
+            <a:schemeClr val="accent1"/>
+          </a:fillRef>
+          <a:effectRef idx="2">
+            <a:schemeClr val="accent1"/>
+          </a:effectRef>
+          <a:fontRef idx="minor">
+            <a:schemeClr val="lt1"/>
+          </a:fontRef>
+        </p:style>
+        <p:txBody>
+          <a:bodyPr rtlCol="0" anchor="ctr" wrap="square" lIns="12700" rIns="12700" tIns="12700" bIns="12700"/>
+          <a:lstStyle/>
+          <a:p>
+            <a:pPr algn="ctr">
+              <a:defRPr sz="1400" b="0">
+                <a:solidFill>
+                  <a:srgbClr val="FFFFFF"/>
+                </a:solidFill>
+                <a:latin typeface="Play"/>
+                <a:ea typeface="Play"/>
+                <a:cs typeface="Play"/>
+              </a:defRPr>
+            </a:pPr>
+            <a:r>
+              <a:rPr sz="1400" b="0">
+                <a:solidFill>
+                  <a:srgbClr val="FFFFFF"/>
+                </a:solidFill>
+                <a:latin typeface="Play"/>
+                <a:ea typeface="Play"/>
+                <a:cs typeface="Play"/>
+              </a:rPr>
+              <a:t>План</a:t>
+            </a:r>
+          </a:p>
+        </p:txBody>
+      </p:sp>
+      <p:sp>
+        <p:nvSpPr>
+          <p:cNvPr id="6" name="Chevron 5"/>
+          <p:cNvSpPr/>
+          <p:nvPr/>
+        </p:nvSpPr>
+        <p:spPr>
+          <a:xfrm>
+            <a:off x="6288206" y="3606227"/>
+            <a:ext cx="5245059" cy="761545"/>
+          </a:xfrm>
+          <a:prstGeom prst="chevron">
+            <a:avLst/>
+          </a:prstGeom>
+          <a:solidFill>
+            <a:srgbClr val="0077FF"/>
+          </a:solidFill>
+          <a:ln>
+            <a:noFill/>
+          </a:ln>
+        </p:spPr>
+        <p:style>
+          <a:lnRef idx="1">
+            <a:schemeClr val="accent1"/>
+          </a:lnRef>
+          <a:fillRef idx="3">
+            <a:schemeClr val="accent1"/>
+          </a:fillRef>
+          <a:effectRef idx="2">
+            <a:schemeClr val="accent1"/>
+          </a:effectRef>
+          <a:fontRef idx="minor">
+            <a:schemeClr val="lt1"/>
+          </a:fontRef>
+        </p:style>
+        <p:txBody>
+          <a:bodyPr rtlCol="0" anchor="ctr" wrap="square" lIns="12700" rIns="12700" tIns="12700" bIns="12700"/>
+          <a:lstStyle/>
+          <a:p>
+            <a:pPr algn="ctr">
+              <a:defRPr sz="1400" b="0">
+                <a:solidFill>
+                  <a:srgbClr val="FFFFFF"/>
+                </a:solidFill>
+                <a:latin typeface="Play"/>
+                <a:ea typeface="Play"/>
+                <a:cs typeface="Play"/>
+              </a:defRPr>
+            </a:pPr>
+            <a:r>
+              <a:rPr sz="1400" b="0">
+                <a:solidFill>
+                  <a:srgbClr val="FFFFFF"/>
+                </a:solidFill>
+                <a:latin typeface="Play"/>
+                <a:ea typeface="Play"/>
+                <a:cs typeface="Play"/>
+              </a:rPr>
+              <a:t>Вёрстка</a:t>
+            </a:r>
+          </a:p>
+        </p:txBody>
+      </p:sp>
+      <p:sp>
+        <p:nvSpPr>
+          <p:cNvPr id="7" name="Chevron 6"/>
+          <p:cNvSpPr/>
+          <p:nvPr/>
+        </p:nvSpPr>
+        <p:spPr>
+          <a:xfrm>
+            <a:off x="6288206" y="4491746"/>
+            <a:ext cx="5245059" cy="761545"/>
+          </a:xfrm>
+          <a:prstGeom prst="chevron">
+            <a:avLst/>
+          </a:prstGeom>
+          <a:solidFill>
+            <a:srgbClr val="0077FF"/>
+          </a:solidFill>
+          <a:ln>
+            <a:noFill/>
+          </a:ln>
+        </p:spPr>
+        <p:style>
+          <a:lnRef idx="1">
+            <a:schemeClr val="accent1"/>
+          </a:lnRef>
+          <a:fillRef idx="3">
+            <a:schemeClr val="accent1"/>
+          </a:fillRef>
+          <a:effectRef idx="2">
+            <a:schemeClr val="accent1"/>
+          </a:effectRef>
+          <a:fontRef idx="minor">
+            <a:schemeClr val="lt1"/>
+          </a:fontRef>
+        </p:style>
+        <p:txBody>
+          <a:bodyPr rtlCol="0" anchor="ctr" wrap="square" lIns="12700" rIns="12700" tIns="12700" bIns="12700"/>
+          <a:lstStyle/>
+          <a:p>
+            <a:pPr algn="ctr">
+              <a:defRPr sz="1400" b="0">
+                <a:solidFill>
+                  <a:srgbClr val="FFFFFF"/>
+                </a:solidFill>
+                <a:latin typeface="Play"/>
+                <a:ea typeface="Play"/>
+                <a:cs typeface="Play"/>
+              </a:defRPr>
+            </a:pPr>
+            <a:r>
+              <a:rPr sz="1400" b="0">
+                <a:solidFill>
+                  <a:srgbClr val="FFFFFF"/>
+                </a:solidFill>
+                <a:latin typeface="Play"/>
+                <a:ea typeface="Play"/>
+                <a:cs typeface="Play"/>
+              </a:rPr>
+              <a:t>Аудит</a:t>
+            </a:r>
+          </a:p>
+        </p:txBody>
+      </p:sp>
+      <p:sp>
+        <p:nvSpPr>
+          <p:cNvPr id="8" name="Chevron 7"/>
+          <p:cNvSpPr/>
+          <p:nvPr/>
+        </p:nvSpPr>
+        <p:spPr>
+          <a:xfrm>
+            <a:off x="6288206" y="5377264"/>
+            <a:ext cx="5245059" cy="761545"/>
+          </a:xfrm>
+          <a:prstGeom prst="chevron">
+            <a:avLst/>
+          </a:prstGeom>
+          <a:solidFill>
+            <a:srgbClr val="0077FF"/>
+          </a:solidFill>
+          <a:ln>
+            <a:noFill/>
+          </a:ln>
+        </p:spPr>
+        <p:style>
+          <a:lnRef idx="1">
+            <a:schemeClr val="accent1"/>
+          </a:lnRef>
+          <a:fillRef idx="3">
+            <a:schemeClr val="accent1"/>
+          </a:fillRef>
+          <a:effectRef idx="2">
+            <a:schemeClr val="accent1"/>
+          </a:effectRef>
+          <a:fontRef idx="minor">
+            <a:schemeClr val="lt1"/>
+          </a:fontRef>
+        </p:style>
+        <p:txBody>
+          <a:bodyPr rtlCol="0" anchor="ctr" wrap="square" lIns="12700" rIns="12700" tIns="12700" bIns="12700"/>
+          <a:lstStyle/>
+          <a:p>
+            <a:pPr algn="ctr">
+              <a:defRPr sz="1400" b="0">
+                <a:solidFill>
+                  <a:srgbClr val="FFFFFF"/>
+                </a:solidFill>
+                <a:latin typeface="Play"/>
+                <a:ea typeface="Play"/>
+                <a:cs typeface="Play"/>
+              </a:defRPr>
+            </a:pPr>
+            <a:r>
+              <a:rPr sz="1400" b="0">
+                <a:solidFill>
+                  <a:srgbClr val="FFFFFF"/>
+                </a:solidFill>
+                <a:latin typeface="Play"/>
+                <a:ea typeface="Play"/>
+                <a:cs typeface="Play"/>
+              </a:rPr>
+              <a:t>Экспорт</a:t>
             </a:r>
           </a:p>
         </p:txBody>
@@ -7694,7 +8382,1074 @@
 </p:sld>
 </file>
 
-<file path=ppt/slides/slide57.xml><?xml version="1.0" encoding="utf-8"?>
+<file path=ppt/slides/slide59.xml><?xml version="1.0" encoding="utf-8"?>
+<p:sld xmlns:a="http://schemas.openxmlformats.org/drawingml/2006/main" xmlns:p="http://schemas.openxmlformats.org/presentationml/2006/main" xmlns:r="http://schemas.openxmlformats.org/officeDocument/2006/relationships">
+  <p:cSld>
+    <p:spTree>
+      <p:nvGrpSpPr>
+        <p:cNvPr id="1" name=""/>
+        <p:cNvGrpSpPr/>
+        <p:nvPr/>
+      </p:nvGrpSpPr>
+      <p:grpSpPr/>
+      <p:cxnSp>
+        <p:nvCxnSpPr>
+          <p:cNvPr id="918" name="Google Shape;918;p74"/>
+          <p:cNvCxnSpPr/>
+          <p:nvPr/>
+        </p:nvCxnSpPr>
+        <p:spPr>
+          <a:xfrm rot="10800000">
+            <a:off x="658813" y="2199500"/>
+            <a:ext cx="11533187" cy="0"/>
+          </a:xfrm>
+          <a:prstGeom prst="straightConnector1">
+            <a:avLst/>
+          </a:prstGeom>
+          <a:noFill/>
+          <a:ln cap="flat" cmpd="sng" w="19050">
+            <a:solidFill>
+              <a:schemeClr val="accent4"/>
+            </a:solidFill>
+            <a:prstDash val="solid"/>
+            <a:miter lim="8000"/>
+            <a:headEnd len="sm" w="sm" type="none"/>
+            <a:tailEnd len="sm" w="sm" type="none"/>
+          </a:ln>
+        </p:spPr>
+      </p:cxnSp>
+      <p:sp>
+        <p:nvSpPr>
+          <p:cNvPr id="919" name="title"/>
+          <p:cNvSpPr txBox="1"/>
+          <p:nvPr/>
+        </p:nvSpPr>
+        <p:spPr>
+          <a:xfrm>
+            <a:off x="677387" y="692177"/>
+            <a:ext cx="10855878" cy="822960"/>
+          </a:xfrm>
+          <a:prstGeom prst="rect">
+            <a:avLst/>
+          </a:prstGeom>
+          <a:noFill/>
+        </p:spPr>
+        <p:txBody>
+          <a:bodyPr wrap="square" lIns="76200" rIns="76200" tIns="50800" bIns="50800">
+            <a:spAutoFit/>
+          </a:bodyPr>
+          <a:lstStyle/>
+          <a:p>
+            <a:pPr algn="l">
+              <a:spcAft>
+                <a:spcPts val="300"/>
+              </a:spcAft>
+              <a:defRPr sz="4000">
+                <a:solidFill>
+                  <a:srgbClr val="000000"/>
+                </a:solidFill>
+                <a:latin typeface="Arial"/>
+                <a:ea typeface="Arial"/>
+                <a:cs typeface="Arial"/>
+              </a:defRPr>
+            </a:pPr>
+            <a:r>
+              <a:rPr sz="4000">
+                <a:solidFill>
+                  <a:srgbClr val="000000"/>
+                </a:solidFill>
+                <a:latin typeface="Arial"/>
+                <a:ea typeface="Arial"/>
+                <a:cs typeface="Arial"/>
+              </a:rPr>
+              <a:t>Ожидаемый эффект</a:t>
+            </a:r>
+          </a:p>
+        </p:txBody>
+      </p:sp>
+      <p:sp>
+        <p:nvSpPr>
+          <p:cNvPr id="920" name="body_left"/>
+          <p:cNvSpPr txBox="1"/>
+          <p:nvPr/>
+        </p:nvSpPr>
+        <p:spPr>
+          <a:xfrm>
+            <a:off x="677387" y="2200937"/>
+            <a:ext cx="5245059" cy="3748651"/>
+          </a:xfrm>
+          <a:prstGeom prst="rect">
+            <a:avLst/>
+          </a:prstGeom>
+          <a:noFill/>
+        </p:spPr>
+        <p:txBody>
+          <a:bodyPr wrap="square" lIns="76200" rIns="76200" tIns="50800" bIns="50800">
+            <a:spAutoFit/>
+          </a:bodyPr>
+          <a:lstStyle/>
+          <a:p>
+            <a:pPr algn="l">
+              <a:spcAft>
+                <a:spcPts val="300"/>
+              </a:spcAft>
+              <a:defRPr sz="3200">
+                <a:solidFill>
+                  <a:srgbClr val="000000"/>
+                </a:solidFill>
+                <a:latin typeface="Play"/>
+                <a:ea typeface="Play"/>
+                <a:cs typeface="Play"/>
+              </a:defRPr>
+            </a:pPr>
+            <a:r>
+              <a:rPr sz="3200">
+                <a:solidFill>
+                  <a:srgbClr val="000000"/>
+                </a:solidFill>
+                <a:latin typeface="Play"/>
+                <a:ea typeface="Play"/>
+                <a:cs typeface="Play"/>
+              </a:rPr>
+              <a:t>• Время сборки колоды сократилось с 186 до 4 минут</a:t>
+            </a:r>
+          </a:p>
+          <a:p>
+            <a:pPr algn="l">
+              <a:spcAft>
+                <a:spcPts val="300"/>
+              </a:spcAft>
+              <a:defRPr sz="3200">
+                <a:solidFill>
+                  <a:srgbClr val="000000"/>
+                </a:solidFill>
+                <a:latin typeface="Play"/>
+                <a:ea typeface="Play"/>
+                <a:cs typeface="Play"/>
+              </a:defRPr>
+            </a:pPr>
+            <a:r>
+              <a:rPr sz="3200">
+                <a:solidFill>
+                  <a:srgbClr val="000000"/>
+                </a:solidFill>
+                <a:latin typeface="Play"/>
+                <a:ea typeface="Play"/>
+                <a:cs typeface="Play"/>
+              </a:rPr>
+              <a:t>• Первая версия готова за 1 день вместо 6 рабочих дней</a:t>
+            </a:r>
+          </a:p>
+        </p:txBody>
+      </p:sp>
+      <p:sp>
+        <p:nvSpPr>
+          <p:cNvPr id="921" name="body_right"/>
+          <p:cNvSpPr txBox="1"/>
+          <p:nvPr/>
+        </p:nvSpPr>
+        <p:spPr>
+          <a:xfrm>
+            <a:off x="6288206" y="2200937"/>
+            <a:ext cx="5245059" cy="3748651"/>
+          </a:xfrm>
+          <a:prstGeom prst="rect">
+            <a:avLst/>
+          </a:prstGeom>
+          <a:noFill/>
+        </p:spPr>
+        <p:txBody>
+          <a:bodyPr wrap="square" lIns="76200" rIns="76200" tIns="50800" bIns="50800">
+            <a:spAutoFit/>
+          </a:bodyPr>
+          <a:lstStyle/>
+          <a:p>
+            <a:pPr algn="l">
+              <a:spcAft>
+                <a:spcPts val="300"/>
+              </a:spcAft>
+              <a:defRPr sz="2800">
+                <a:solidFill>
+                  <a:srgbClr val="000000"/>
+                </a:solidFill>
+                <a:latin typeface="Play"/>
+                <a:ea typeface="Play"/>
+                <a:cs typeface="Play"/>
+              </a:defRPr>
+            </a:pPr>
+            <a:r>
+              <a:rPr sz="2800">
+                <a:solidFill>
+                  <a:srgbClr val="000000"/>
+                </a:solidFill>
+                <a:latin typeface="Play"/>
+                <a:ea typeface="Play"/>
+                <a:cs typeface="Play"/>
+              </a:rPr>
+              <a:t>• Нарушений фирменного стиля в пилоте 2 из 68 колод, исправлены автоматически</a:t>
+            </a:r>
+          </a:p>
+          <a:p>
+            <a:pPr algn="l">
+              <a:spcAft>
+                <a:spcPts val="300"/>
+              </a:spcAft>
+              <a:defRPr sz="2800">
+                <a:solidFill>
+                  <a:srgbClr val="000000"/>
+                </a:solidFill>
+                <a:latin typeface="Play"/>
+                <a:ea typeface="Play"/>
+                <a:cs typeface="Play"/>
+              </a:defRPr>
+            </a:pPr>
+            <a:r>
+              <a:rPr sz="2800">
+                <a:solidFill>
+                  <a:srgbClr val="000000"/>
+                </a:solidFill>
+                <a:latin typeface="Play"/>
+                <a:ea typeface="Play"/>
+                <a:cs typeface="Play"/>
+              </a:rPr>
+              <a:t>• Дизайнеры закрыли 38 запросов вместо 11 в неделю, рутина ушла в сервис</a:t>
+            </a:r>
+          </a:p>
+        </p:txBody>
+      </p:sp>
+    </p:spTree>
+  </p:cSld>
+  <p:clrMapOvr>
+    <a:masterClrMapping/>
+  </p:clrMapOvr>
+</p:sld>
+</file>
+
+<file path=ppt/slides/slide60.xml><?xml version="1.0" encoding="utf-8"?>
+<p:sld xmlns:a="http://schemas.openxmlformats.org/drawingml/2006/main" xmlns:p="http://schemas.openxmlformats.org/presentationml/2006/main" xmlns:r="http://schemas.openxmlformats.org/officeDocument/2006/relationships">
+  <p:cSld>
+    <p:bg>
+      <p:bgPr>
+        <a:solidFill>
+          <a:schemeClr val="lt2"/>
+        </a:solidFill>
+      </p:bgPr>
+    </p:bg>
+    <p:spTree>
+      <p:nvGrpSpPr>
+        <p:cNvPr id="1" name=""/>
+        <p:cNvGrpSpPr/>
+        <p:nvPr/>
+      </p:nvGrpSpPr>
+      <p:grpSpPr/>
+      <p:sp>
+        <p:nvSpPr>
+          <p:cNvPr id="2" name="title"/>
+          <p:cNvSpPr txBox="1"/>
+          <p:nvPr/>
+        </p:nvSpPr>
+        <p:spPr>
+          <a:xfrm>
+            <a:off x="677387" y="692177"/>
+            <a:ext cx="10855878" cy="822960"/>
+          </a:xfrm>
+          <a:prstGeom prst="rect">
+            <a:avLst/>
+          </a:prstGeom>
+          <a:noFill/>
+        </p:spPr>
+        <p:txBody>
+          <a:bodyPr wrap="square" lIns="76200" rIns="76200" tIns="50800" bIns="50800">
+            <a:spAutoFit/>
+          </a:bodyPr>
+          <a:lstStyle/>
+          <a:p>
+            <a:pPr algn="l">
+              <a:spcAft>
+                <a:spcPts val="300"/>
+              </a:spcAft>
+              <a:defRPr sz="4000">
+                <a:solidFill>
+                  <a:srgbClr val="000000"/>
+                </a:solidFill>
+                <a:latin typeface="Arial"/>
+                <a:ea typeface="Arial"/>
+                <a:cs typeface="Arial"/>
+              </a:defRPr>
+            </a:pPr>
+            <a:r>
+              <a:rPr sz="4000">
+                <a:solidFill>
+                  <a:srgbClr val="000000"/>
+                </a:solidFill>
+                <a:latin typeface="Arial"/>
+                <a:ea typeface="Arial"/>
+                <a:cs typeface="Arial"/>
+              </a:rPr>
+              <a:t>Что потребуется: ресурсы и сроки</a:t>
+            </a:r>
+          </a:p>
+        </p:txBody>
+      </p:sp>
+      <p:sp>
+        <p:nvSpPr>
+          <p:cNvPr id="3" name="body"/>
+          <p:cNvSpPr txBox="1"/>
+          <p:nvPr/>
+        </p:nvSpPr>
+        <p:spPr>
+          <a:xfrm>
+            <a:off x="677387" y="1773204"/>
+            <a:ext cx="5245059" cy="4427593"/>
+          </a:xfrm>
+          <a:prstGeom prst="rect">
+            <a:avLst/>
+          </a:prstGeom>
+          <a:noFill/>
+        </p:spPr>
+        <p:txBody>
+          <a:bodyPr wrap="square" lIns="76200" rIns="76200" tIns="50800" bIns="50800">
+            <a:spAutoFit/>
+          </a:bodyPr>
+          <a:lstStyle/>
+          <a:p>
+            <a:pPr algn="l">
+              <a:spcAft>
+                <a:spcPts val="300"/>
+              </a:spcAft>
+              <a:defRPr sz="1600">
+                <a:solidFill>
+                  <a:srgbClr val="000000"/>
+                </a:solidFill>
+                <a:latin typeface="Play"/>
+                <a:ea typeface="Play"/>
+                <a:cs typeface="Play"/>
+              </a:defRPr>
+            </a:pPr>
+            <a:r>
+              <a:rPr sz="1600">
+                <a:solidFill>
+                  <a:srgbClr val="000000"/>
+                </a:solidFill>
+                <a:latin typeface="Play"/>
+                <a:ea typeface="Play"/>
+                <a:cs typeface="Play"/>
+              </a:rPr>
+              <a:t>• Сервис на машине 2 vCPU / 2 ГБ RAM</a:t>
+            </a:r>
+          </a:p>
+          <a:p>
+            <a:pPr algn="l">
+              <a:spcAft>
+                <a:spcPts val="300"/>
+              </a:spcAft>
+              <a:defRPr sz="1600">
+                <a:solidFill>
+                  <a:srgbClr val="000000"/>
+                </a:solidFill>
+                <a:latin typeface="Play"/>
+                <a:ea typeface="Play"/>
+                <a:cs typeface="Play"/>
+              </a:defRPr>
+            </a:pPr>
+            <a:r>
+              <a:rPr sz="1600">
+                <a:solidFill>
+                  <a:srgbClr val="000000"/>
+                </a:solidFill>
+                <a:latin typeface="Play"/>
+                <a:ea typeface="Play"/>
+                <a:cs typeface="Play"/>
+              </a:rPr>
+              <a:t>• Модель gpt-oss-20b подключена через OpenAI-протокол</a:t>
+            </a:r>
+          </a:p>
+          <a:p>
+            <a:pPr algn="l">
+              <a:spcAft>
+                <a:spcPts val="300"/>
+              </a:spcAft>
+              <a:defRPr sz="1600">
+                <a:solidFill>
+                  <a:srgbClr val="000000"/>
+                </a:solidFill>
+                <a:latin typeface="Play"/>
+                <a:ea typeface="Play"/>
+                <a:cs typeface="Play"/>
+              </a:defRPr>
+            </a:pPr>
+            <a:r>
+              <a:rPr sz="1600">
+                <a:solidFill>
+                  <a:srgbClr val="000000"/>
+                </a:solidFill>
+                <a:latin typeface="Play"/>
+                <a:ea typeface="Play"/>
+                <a:cs typeface="Play"/>
+              </a:rPr>
+              <a:t>• Стоимость инференса за 6 недель 1 400 руб.</a:t>
+            </a:r>
+          </a:p>
+          <a:p>
+            <a:pPr algn="l">
+              <a:spcAft>
+                <a:spcPts val="300"/>
+              </a:spcAft>
+              <a:defRPr sz="1600">
+                <a:solidFill>
+                  <a:srgbClr val="000000"/>
+                </a:solidFill>
+                <a:latin typeface="Play"/>
+                <a:ea typeface="Play"/>
+                <a:cs typeface="Play"/>
+              </a:defRPr>
+            </a:pPr>
+            <a:r>
+              <a:rPr sz="1600">
+                <a:solidFill>
+                  <a:srgbClr val="000000"/>
+                </a:solidFill>
+                <a:latin typeface="Play"/>
+                <a:ea typeface="Play"/>
+                <a:cs typeface="Play"/>
+              </a:rPr>
+              <a:t>• Нагрузка выше 20 задач требует внешней очереди.</a:t>
+            </a:r>
+          </a:p>
+        </p:txBody>
+      </p:sp>
+      <p:sp>
+        <p:nvSpPr>
+          <p:cNvPr id="4" name="Rectangle 3"/>
+          <p:cNvSpPr/>
+          <p:nvPr/>
+        </p:nvSpPr>
+        <p:spPr>
+          <a:xfrm>
+            <a:off x="6288206" y="3809896"/>
+            <a:ext cx="5245059" cy="132827"/>
+          </a:xfrm>
+          <a:prstGeom prst="rect">
+            <a:avLst/>
+          </a:prstGeom>
+          <a:solidFill>
+            <a:srgbClr val="0077FF"/>
+          </a:solidFill>
+          <a:ln>
+            <a:noFill/>
+          </a:ln>
+        </p:spPr>
+        <p:style>
+          <a:lnRef idx="1">
+            <a:schemeClr val="accent1"/>
+          </a:lnRef>
+          <a:fillRef idx="3">
+            <a:schemeClr val="accent1"/>
+          </a:fillRef>
+          <a:effectRef idx="2">
+            <a:schemeClr val="accent1"/>
+          </a:effectRef>
+          <a:fontRef idx="minor">
+            <a:schemeClr val="lt1"/>
+          </a:fontRef>
+        </p:style>
+        <p:txBody>
+          <a:bodyPr rtlCol="0" anchor="ctr"/>
+          <a:lstStyle/>
+          <a:p>
+            <a:pPr algn="ctr"/>
+          </a:p>
+        </p:txBody>
+      </p:sp>
+      <p:sp>
+        <p:nvSpPr>
+          <p:cNvPr id="5" name="Oval 4"/>
+          <p:cNvSpPr/>
+          <p:nvPr/>
+        </p:nvSpPr>
+        <p:spPr>
+          <a:xfrm>
+            <a:off x="6747148" y="3679620"/>
+            <a:ext cx="393379" cy="393379"/>
+          </a:xfrm>
+          <a:prstGeom prst="ellipse">
+            <a:avLst/>
+          </a:prstGeom>
+          <a:solidFill>
+            <a:srgbClr val="0077FF"/>
+          </a:solidFill>
+          <a:ln>
+            <a:noFill/>
+          </a:ln>
+        </p:spPr>
+        <p:style>
+          <a:lnRef idx="1">
+            <a:schemeClr val="accent1"/>
+          </a:lnRef>
+          <a:fillRef idx="3">
+            <a:schemeClr val="accent1"/>
+          </a:fillRef>
+          <a:effectRef idx="2">
+            <a:schemeClr val="accent1"/>
+          </a:effectRef>
+          <a:fontRef idx="minor">
+            <a:schemeClr val="lt1"/>
+          </a:fontRef>
+        </p:style>
+        <p:txBody>
+          <a:bodyPr rtlCol="0" anchor="ctr"/>
+          <a:lstStyle/>
+          <a:p>
+            <a:pPr algn="ctr"/>
+          </a:p>
+        </p:txBody>
+      </p:sp>
+      <p:sp>
+        <p:nvSpPr>
+          <p:cNvPr id="6" name="TextBox 5"/>
+          <p:cNvSpPr txBox="1"/>
+          <p:nvPr/>
+        </p:nvSpPr>
+        <p:spPr>
+          <a:xfrm>
+            <a:off x="6288206" y="1773204"/>
+            <a:ext cx="1966897" cy="1682485"/>
+          </a:xfrm>
+          <a:prstGeom prst="rect">
+            <a:avLst/>
+          </a:prstGeom>
+          <a:noFill/>
+        </p:spPr>
+        <p:txBody>
+          <a:bodyPr wrap="square" lIns="12700" rIns="12700" tIns="12700" bIns="12700">
+            <a:spAutoFit/>
+          </a:bodyPr>
+          <a:lstStyle/>
+          <a:p>
+            <a:pPr algn="ctr">
+              <a:defRPr sz="1400" b="0">
+                <a:solidFill>
+                  <a:srgbClr val="000000"/>
+                </a:solidFill>
+                <a:latin typeface="Play"/>
+                <a:ea typeface="Play"/>
+                <a:cs typeface="Play"/>
+              </a:defRPr>
+            </a:pPr>
+            <a:r>
+              <a:rPr sz="1400" b="0">
+                <a:solidFill>
+                  <a:srgbClr val="000000"/>
+                </a:solidFill>
+                <a:latin typeface="Play"/>
+                <a:ea typeface="Play"/>
+                <a:cs typeface="Play"/>
+              </a:rPr>
+              <a:t>Подключение 4 команд</a:t>
+            </a:r>
+          </a:p>
+        </p:txBody>
+      </p:sp>
+      <p:sp>
+        <p:nvSpPr>
+          <p:cNvPr id="7" name="Oval 6"/>
+          <p:cNvSpPr/>
+          <p:nvPr/>
+        </p:nvSpPr>
+        <p:spPr>
+          <a:xfrm>
+            <a:off x="8058413" y="3679620"/>
+            <a:ext cx="393379" cy="393379"/>
+          </a:xfrm>
+          <a:prstGeom prst="ellipse">
+            <a:avLst/>
+          </a:prstGeom>
+          <a:solidFill>
+            <a:srgbClr val="0077FF"/>
+          </a:solidFill>
+          <a:ln>
+            <a:noFill/>
+          </a:ln>
+        </p:spPr>
+        <p:style>
+          <a:lnRef idx="1">
+            <a:schemeClr val="accent1"/>
+          </a:lnRef>
+          <a:fillRef idx="3">
+            <a:schemeClr val="accent1"/>
+          </a:fillRef>
+          <a:effectRef idx="2">
+            <a:schemeClr val="accent1"/>
+          </a:effectRef>
+          <a:fontRef idx="minor">
+            <a:schemeClr val="lt1"/>
+          </a:fontRef>
+        </p:style>
+        <p:txBody>
+          <a:bodyPr rtlCol="0" anchor="ctr"/>
+          <a:lstStyle/>
+          <a:p>
+            <a:pPr algn="ctr"/>
+          </a:p>
+        </p:txBody>
+      </p:sp>
+      <p:sp>
+        <p:nvSpPr>
+          <p:cNvPr id="8" name="TextBox 7"/>
+          <p:cNvSpPr txBox="1"/>
+          <p:nvPr/>
+        </p:nvSpPr>
+        <p:spPr>
+          <a:xfrm>
+            <a:off x="7271654" y="4203276"/>
+            <a:ext cx="1966897" cy="1682485"/>
+          </a:xfrm>
+          <a:prstGeom prst="rect">
+            <a:avLst/>
+          </a:prstGeom>
+          <a:noFill/>
+        </p:spPr>
+        <p:txBody>
+          <a:bodyPr wrap="square" lIns="12700" rIns="12700" tIns="12700" bIns="12700">
+            <a:spAutoFit/>
+          </a:bodyPr>
+          <a:lstStyle/>
+          <a:p>
+            <a:pPr algn="ctr">
+              <a:defRPr sz="1400" b="0">
+                <a:solidFill>
+                  <a:srgbClr val="000000"/>
+                </a:solidFill>
+                <a:latin typeface="Play"/>
+                <a:ea typeface="Play"/>
+                <a:cs typeface="Play"/>
+              </a:defRPr>
+            </a:pPr>
+            <a:r>
+              <a:rPr sz="1400" b="0">
+                <a:solidFill>
+                  <a:srgbClr val="000000"/>
+                </a:solidFill>
+                <a:latin typeface="Play"/>
+                <a:ea typeface="Play"/>
+                <a:cs typeface="Play"/>
+              </a:rPr>
+              <a:t>Домен и HTTPS</a:t>
+            </a:r>
+          </a:p>
+        </p:txBody>
+      </p:sp>
+      <p:sp>
+        <p:nvSpPr>
+          <p:cNvPr id="9" name="Oval 8"/>
+          <p:cNvSpPr/>
+          <p:nvPr/>
+        </p:nvSpPr>
+        <p:spPr>
+          <a:xfrm>
+            <a:off x="9369678" y="3679620"/>
+            <a:ext cx="393379" cy="393379"/>
+          </a:xfrm>
+          <a:prstGeom prst="ellipse">
+            <a:avLst/>
+          </a:prstGeom>
+          <a:solidFill>
+            <a:srgbClr val="0077FF"/>
+          </a:solidFill>
+          <a:ln>
+            <a:noFill/>
+          </a:ln>
+        </p:spPr>
+        <p:style>
+          <a:lnRef idx="1">
+            <a:schemeClr val="accent1"/>
+          </a:lnRef>
+          <a:fillRef idx="3">
+            <a:schemeClr val="accent1"/>
+          </a:fillRef>
+          <a:effectRef idx="2">
+            <a:schemeClr val="accent1"/>
+          </a:effectRef>
+          <a:fontRef idx="minor">
+            <a:schemeClr val="lt1"/>
+          </a:fontRef>
+        </p:style>
+        <p:txBody>
+          <a:bodyPr rtlCol="0" anchor="ctr"/>
+          <a:lstStyle/>
+          <a:p>
+            <a:pPr algn="ctr"/>
+          </a:p>
+        </p:txBody>
+      </p:sp>
+      <p:sp>
+        <p:nvSpPr>
+          <p:cNvPr id="10" name="TextBox 9"/>
+          <p:cNvSpPr txBox="1"/>
+          <p:nvPr/>
+        </p:nvSpPr>
+        <p:spPr>
+          <a:xfrm>
+            <a:off x="8582919" y="1773204"/>
+            <a:ext cx="1966897" cy="1682485"/>
+          </a:xfrm>
+          <a:prstGeom prst="rect">
+            <a:avLst/>
+          </a:prstGeom>
+          <a:noFill/>
+        </p:spPr>
+        <p:txBody>
+          <a:bodyPr wrap="square" lIns="12700" rIns="12700" tIns="12700" bIns="12700">
+            <a:spAutoFit/>
+          </a:bodyPr>
+          <a:lstStyle/>
+          <a:p>
+            <a:pPr algn="ctr">
+              <a:defRPr sz="1400" b="0">
+                <a:solidFill>
+                  <a:srgbClr val="000000"/>
+                </a:solidFill>
+                <a:latin typeface="Play"/>
+                <a:ea typeface="Play"/>
+                <a:cs typeface="Play"/>
+              </a:defRPr>
+            </a:pPr>
+            <a:r>
+              <a:rPr sz="1400" b="0">
+                <a:solidFill>
+                  <a:srgbClr val="000000"/>
+                </a:solidFill>
+                <a:latin typeface="Play"/>
+                <a:ea typeface="Play"/>
+                <a:cs typeface="Play"/>
+              </a:rPr>
+              <a:t>Доступ для всей компании</a:t>
+            </a:r>
+          </a:p>
+        </p:txBody>
+      </p:sp>
+      <p:sp>
+        <p:nvSpPr>
+          <p:cNvPr id="11" name="Oval 10"/>
+          <p:cNvSpPr/>
+          <p:nvPr/>
+        </p:nvSpPr>
+        <p:spPr>
+          <a:xfrm>
+            <a:off x="10680942" y="3679620"/>
+            <a:ext cx="393379" cy="393379"/>
+          </a:xfrm>
+          <a:prstGeom prst="ellipse">
+            <a:avLst/>
+          </a:prstGeom>
+          <a:solidFill>
+            <a:srgbClr val="0077FF"/>
+          </a:solidFill>
+          <a:ln>
+            <a:noFill/>
+          </a:ln>
+        </p:spPr>
+        <p:style>
+          <a:lnRef idx="1">
+            <a:schemeClr val="accent1"/>
+          </a:lnRef>
+          <a:fillRef idx="3">
+            <a:schemeClr val="accent1"/>
+          </a:fillRef>
+          <a:effectRef idx="2">
+            <a:schemeClr val="accent1"/>
+          </a:effectRef>
+          <a:fontRef idx="minor">
+            <a:schemeClr val="lt1"/>
+          </a:fontRef>
+        </p:style>
+        <p:txBody>
+          <a:bodyPr rtlCol="0" anchor="ctr"/>
+          <a:lstStyle/>
+          <a:p>
+            <a:pPr algn="ctr"/>
+          </a:p>
+        </p:txBody>
+      </p:sp>
+      <p:sp>
+        <p:nvSpPr>
+          <p:cNvPr id="12" name="TextBox 11"/>
+          <p:cNvSpPr txBox="1"/>
+          <p:nvPr/>
+        </p:nvSpPr>
+        <p:spPr>
+          <a:xfrm>
+            <a:off x="9566367" y="4203276"/>
+            <a:ext cx="1966897" cy="1682485"/>
+          </a:xfrm>
+          <a:prstGeom prst="rect">
+            <a:avLst/>
+          </a:prstGeom>
+          <a:noFill/>
+        </p:spPr>
+        <p:txBody>
+          <a:bodyPr wrap="square" lIns="12700" rIns="12700" tIns="12700" bIns="12700">
+            <a:spAutoFit/>
+          </a:bodyPr>
+          <a:lstStyle/>
+          <a:p>
+            <a:pPr algn="ctr">
+              <a:defRPr sz="1400" b="0">
+                <a:solidFill>
+                  <a:srgbClr val="000000"/>
+                </a:solidFill>
+                <a:latin typeface="Play"/>
+                <a:ea typeface="Play"/>
+                <a:cs typeface="Play"/>
+              </a:defRPr>
+            </a:pPr>
+            <a:r>
+              <a:rPr sz="1400" b="0">
+                <a:solidFill>
+                  <a:srgbClr val="000000"/>
+                </a:solidFill>
+                <a:latin typeface="Play"/>
+                <a:ea typeface="Play"/>
+                <a:cs typeface="Play"/>
+              </a:rPr>
+              <a:t>Генерация иллюстраций</a:t>
+            </a:r>
+          </a:p>
+        </p:txBody>
+      </p:sp>
+    </p:spTree>
+  </p:cSld>
+  <p:clrMapOvr>
+    <a:masterClrMapping/>
+  </p:clrMapOvr>
+</p:sld>
+</file>
+
+<file path=ppt/slides/slide61.xml><?xml version="1.0" encoding="utf-8"?>
+<p:sld xmlns:a="http://schemas.openxmlformats.org/drawingml/2006/main" xmlns:p="http://schemas.openxmlformats.org/presentationml/2006/main" xmlns:r="http://schemas.openxmlformats.org/officeDocument/2006/relationships">
+  <p:cSld>
+    <p:bg>
+      <p:bgPr>
+        <a:solidFill>
+          <a:schemeClr val="lt2"/>
+        </a:solidFill>
+      </p:bgPr>
+    </p:bg>
+    <p:spTree>
+      <p:nvGrpSpPr>
+        <p:cNvPr id="1" name=""/>
+        <p:cNvGrpSpPr/>
+        <p:nvPr/>
+      </p:nvGrpSpPr>
+      <p:grpSpPr/>
+      <p:sp>
+        <p:nvSpPr>
+          <p:cNvPr id="2" name="title"/>
+          <p:cNvSpPr txBox="1"/>
+          <p:nvPr/>
+        </p:nvSpPr>
+        <p:spPr>
+          <a:xfrm>
+            <a:off x="677387" y="692177"/>
+            <a:ext cx="10855878" cy="822960"/>
+          </a:xfrm>
+          <a:prstGeom prst="rect">
+            <a:avLst/>
+          </a:prstGeom>
+          <a:noFill/>
+        </p:spPr>
+        <p:txBody>
+          <a:bodyPr wrap="square" lIns="76200" rIns="76200" tIns="50800" bIns="50800">
+            <a:spAutoFit/>
+          </a:bodyPr>
+          <a:lstStyle/>
+          <a:p>
+            <a:pPr algn="l">
+              <a:spcAft>
+                <a:spcPts val="300"/>
+              </a:spcAft>
+              <a:defRPr sz="4000">
+                <a:solidFill>
+                  <a:srgbClr val="000000"/>
+                </a:solidFill>
+                <a:latin typeface="Arial"/>
+                <a:ea typeface="Arial"/>
+                <a:cs typeface="Arial"/>
+              </a:defRPr>
+            </a:pPr>
+            <a:r>
+              <a:rPr sz="4000">
+                <a:solidFill>
+                  <a:srgbClr val="000000"/>
+                </a:solidFill>
+                <a:latin typeface="Arial"/>
+                <a:ea typeface="Arial"/>
+                <a:cs typeface="Arial"/>
+              </a:rPr>
+              <a:t>План пилота</a:t>
+            </a:r>
+          </a:p>
+        </p:txBody>
+      </p:sp>
+      <p:sp>
+        <p:nvSpPr>
+          <p:cNvPr id="3" name="body_left"/>
+          <p:cNvSpPr txBox="1"/>
+          <p:nvPr/>
+        </p:nvSpPr>
+        <p:spPr>
+          <a:xfrm>
+            <a:off x="677387" y="1773204"/>
+            <a:ext cx="5245059" cy="4427593"/>
+          </a:xfrm>
+          <a:prstGeom prst="rect">
+            <a:avLst/>
+          </a:prstGeom>
+          <a:noFill/>
+        </p:spPr>
+        <p:txBody>
+          <a:bodyPr wrap="square" lIns="76200" rIns="76200" tIns="50800" bIns="50800">
+            <a:spAutoFit/>
+          </a:bodyPr>
+          <a:lstStyle/>
+          <a:p>
+            <a:pPr algn="l">
+              <a:spcAft>
+                <a:spcPts val="300"/>
+              </a:spcAft>
+              <a:defRPr sz="2400">
+                <a:solidFill>
+                  <a:srgbClr val="000000"/>
+                </a:solidFill>
+                <a:latin typeface="Play"/>
+                <a:ea typeface="Play"/>
+                <a:cs typeface="Play"/>
+              </a:defRPr>
+            </a:pPr>
+            <a:r>
+              <a:rPr sz="2400">
+                <a:solidFill>
+                  <a:srgbClr val="000000"/>
+                </a:solidFill>
+                <a:latin typeface="Play"/>
+                <a:ea typeface="Play"/>
+                <a:cs typeface="Play"/>
+              </a:rPr>
+              <a:t>• Пилот длился 6 недель, включал 2 команды и 68 презентаций</a:t>
+            </a:r>
+          </a:p>
+          <a:p>
+            <a:pPr algn="l">
+              <a:spcAft>
+                <a:spcPts val="300"/>
+              </a:spcAft>
+              <a:defRPr sz="2400">
+                <a:solidFill>
+                  <a:srgbClr val="000000"/>
+                </a:solidFill>
+                <a:latin typeface="Play"/>
+                <a:ea typeface="Play"/>
+                <a:cs typeface="Play"/>
+              </a:defRPr>
+            </a:pPr>
+            <a:r>
+              <a:rPr sz="2400">
+                <a:solidFill>
+                  <a:srgbClr val="000000"/>
+                </a:solidFill>
+                <a:latin typeface="Play"/>
+                <a:ea typeface="Play"/>
+                <a:cs typeface="Play"/>
+              </a:rPr>
+              <a:t>• Средняя сборка колоды 4 минуты вместо 186, первая версия 1 день вместо 6</a:t>
+            </a:r>
+          </a:p>
+        </p:txBody>
+      </p:sp>
+      <p:sp>
+        <p:nvSpPr>
+          <p:cNvPr id="4" name="body_right"/>
+          <p:cNvSpPr txBox="1"/>
+          <p:nvPr/>
+        </p:nvSpPr>
+        <p:spPr>
+          <a:xfrm>
+            <a:off x="6288206" y="1773204"/>
+            <a:ext cx="5245059" cy="4427593"/>
+          </a:xfrm>
+          <a:prstGeom prst="rect">
+            <a:avLst/>
+          </a:prstGeom>
+          <a:noFill/>
+        </p:spPr>
+        <p:txBody>
+          <a:bodyPr wrap="square" lIns="76200" rIns="76200" tIns="50800" bIns="50800">
+            <a:spAutoFit/>
+          </a:bodyPr>
+          <a:lstStyle/>
+          <a:p>
+            <a:pPr algn="l">
+              <a:spcAft>
+                <a:spcPts val="300"/>
+              </a:spcAft>
+              <a:defRPr sz="2400">
+                <a:solidFill>
+                  <a:srgbClr val="000000"/>
+                </a:solidFill>
+                <a:latin typeface="Play"/>
+                <a:ea typeface="Play"/>
+                <a:cs typeface="Play"/>
+              </a:defRPr>
+            </a:pPr>
+            <a:r>
+              <a:rPr sz="2400">
+                <a:solidFill>
+                  <a:srgbClr val="000000"/>
+                </a:solidFill>
+                <a:latin typeface="Play"/>
+                <a:ea typeface="Play"/>
+                <a:cs typeface="Play"/>
+              </a:rPr>
+              <a:t>• Нарушений стиля 2 из 68 колод, обе исправлены автоматическими правками</a:t>
+            </a:r>
+          </a:p>
+          <a:p>
+            <a:pPr algn="l">
+              <a:spcAft>
+                <a:spcPts val="300"/>
+              </a:spcAft>
+              <a:defRPr sz="2400">
+                <a:solidFill>
+                  <a:srgbClr val="000000"/>
+                </a:solidFill>
+                <a:latin typeface="Play"/>
+                <a:ea typeface="Play"/>
+                <a:cs typeface="Play"/>
+              </a:defRPr>
+            </a:pPr>
+            <a:r>
+              <a:rPr sz="2400">
+                <a:solidFill>
+                  <a:srgbClr val="000000"/>
+                </a:solidFill>
+                <a:latin typeface="Play"/>
+                <a:ea typeface="Play"/>
+                <a:cs typeface="Play"/>
+              </a:rPr>
+              <a:t>• Дизайнеры закрыли 38 запросов вместо 11 в неделю, рутина ушла в сервис</a:t>
+            </a:r>
+          </a:p>
+        </p:txBody>
+      </p:sp>
+    </p:spTree>
+  </p:cSld>
+  <p:clrMapOvr>
+    <a:masterClrMapping/>
+  </p:clrMapOvr>
+</p:sld>
+</file>
+
+<file path=ppt/slides/slide62.xml><?xml version="1.0" encoding="utf-8"?>
 <p:sld xmlns:a="http://schemas.openxmlformats.org/drawingml/2006/main" xmlns:p="http://schemas.openxmlformats.org/presentationml/2006/main" xmlns:r="http://schemas.openxmlformats.org/officeDocument/2006/relationships">
   <p:cSld>
     <p:bg>
@@ -7777,7 +9532,7 @@
         <p:spPr>
           <a:xfrm>
             <a:off x="677387" y="692177"/>
-            <a:ext cx="10855878" cy="1447800"/>
+            <a:ext cx="10855878" cy="822960"/>
           </a:xfrm>
           <a:prstGeom prst="rect">
             <a:avLst/>
@@ -7812,7 +9567,7 @@
                 <a:ea typeface="Arial"/>
                 <a:cs typeface="Arial"/>
               </a:rPr>
-              <a:t>Текущее состояние: ручная сборка и проблемы</a:t>
+              <a:t>Что мы просим решить</a:t>
             </a:r>
           </a:p>
         </p:txBody>
@@ -7825,8 +9580,8 @@
         </p:nvSpPr>
         <p:spPr>
           <a:xfrm>
-            <a:off x="677387" y="3695391"/>
-            <a:ext cx="10855878" cy="894080"/>
+            <a:off x="677387" y="2926618"/>
+            <a:ext cx="10855878" cy="1950720"/>
           </a:xfrm>
           <a:prstGeom prst="rect">
             <a:avLst/>
@@ -7843,7 +9598,7 @@
               <a:spcAft>
                 <a:spcPts val="300"/>
               </a:spcAft>
-              <a:defRPr sz="1600">
+              <a:defRPr sz="2800">
                 <a:solidFill>
                   <a:srgbClr val="000000"/>
                 </a:solidFill>
@@ -7853,7 +9608,7 @@
               </a:defRPr>
             </a:pPr>
             <a:r>
-              <a:rPr sz="1600">
+              <a:rPr sz="2800">
                 <a:solidFill>
                   <a:srgbClr val="000000"/>
                 </a:solidFill>
@@ -7861,7 +9616,7 @@
                 <a:ea typeface="Play"/>
                 <a:cs typeface="Play"/>
               </a:rPr>
-              <a:t>• 12-слайдовая колода занимает 186 мин</a:t>
+              <a:t>• Одобрить запуск сервиса на всю компанию</a:t>
             </a:r>
           </a:p>
           <a:p>
@@ -7869,7 +9624,7 @@
               <a:spcAft>
                 <a:spcPts val="300"/>
               </a:spcAft>
-              <a:defRPr sz="1600">
+              <a:defRPr sz="2800">
                 <a:solidFill>
                   <a:srgbClr val="000000"/>
                 </a:solidFill>
@@ -7879,7 +9634,7 @@
               </a:defRPr>
             </a:pPr>
             <a:r>
-              <a:rPr sz="1600">
+              <a:rPr sz="2800">
                 <a:solidFill>
                   <a:srgbClr val="000000"/>
                 </a:solidFill>
@@ -7887,7 +9642,7 @@
                 <a:ea typeface="Play"/>
                 <a:cs typeface="Play"/>
               </a:rPr>
-              <a:t>• Правки после ревью добавляют 74 мин</a:t>
+              <a:t>• Интеграция с корпоративным хранилищем документов</a:t>
             </a:r>
           </a:p>
           <a:p>
@@ -7895,7 +9650,7 @@
               <a:spcAft>
                 <a:spcPts val="300"/>
               </a:spcAft>
-              <a:defRPr sz="1600">
+              <a:defRPr sz="2800">
                 <a:solidFill>
                   <a:srgbClr val="000000"/>
                 </a:solidFill>
@@ -7905,7 +9660,7 @@
               </a:defRPr>
             </a:pPr>
             <a:r>
-              <a:rPr sz="1600">
+              <a:rPr sz="2800">
                 <a:solidFill>
                   <a:srgbClr val="000000"/>
                 </a:solidFill>
@@ -7913,7 +9668,7 @@
                 <a:ea typeface="Play"/>
                 <a:cs typeface="Play"/>
               </a:rPr>
-              <a:t>• 19 из 42 колод нарушают фирменный стиль</a:t>
+              <a:t>• Обеспечить поддержку очереди для нагрузки более 20 задач</a:t>
             </a:r>
           </a:p>
         </p:txBody>
@@ -7926,7 +9681,7 @@
 </p:sld>
 </file>
 
-<file path=ppt/slides/slide58.xml><?xml version="1.0" encoding="utf-8"?>
+<file path=ppt/slides/slide63.xml><?xml version="1.0" encoding="utf-8"?>
 <p:sld xmlns:a="http://schemas.openxmlformats.org/drawingml/2006/main" xmlns:p="http://schemas.openxmlformats.org/presentationml/2006/main" xmlns:r="http://schemas.openxmlformats.org/officeDocument/2006/relationships">
   <p:cSld>
     <p:bg>
@@ -8009,7 +9764,7 @@
         <p:spPr>
           <a:xfrm>
             <a:off x="677387" y="692177"/>
-            <a:ext cx="10855878" cy="1447800"/>
+            <a:ext cx="10855878" cy="822960"/>
           </a:xfrm>
           <a:prstGeom prst="rect">
             <a:avLst/>
@@ -8044,7 +9799,7 @@
                 <a:ea typeface="Arial"/>
                 <a:cs typeface="Arial"/>
               </a:rPr>
-              <a:t>Предлагаемый сервис: автоматизация от шаблона до аудита</a:t>
+              <a:t>Риски</a:t>
             </a:r>
           </a:p>
         </p:txBody>
@@ -8057,8 +9812,8 @@
         </p:nvSpPr>
         <p:spPr>
           <a:xfrm>
-            <a:off x="677387" y="3695391"/>
-            <a:ext cx="10855878" cy="894080"/>
+            <a:off x="677387" y="3014671"/>
+            <a:ext cx="10855878" cy="1686560"/>
           </a:xfrm>
           <a:prstGeom prst="rect">
             <a:avLst/>
@@ -8075,7 +9830,7 @@
               <a:spcAft>
                 <a:spcPts val="300"/>
               </a:spcAft>
-              <a:defRPr sz="1600">
+              <a:defRPr sz="2400">
                 <a:solidFill>
                   <a:srgbClr val="000000"/>
                 </a:solidFill>
@@ -8085,7 +9840,7 @@
               </a:defRPr>
             </a:pPr>
             <a:r>
-              <a:rPr sz="1600">
+              <a:rPr sz="2400">
                 <a:solidFill>
                   <a:srgbClr val="000000"/>
                 </a:solidFill>
@@ -8093,7 +9848,7 @@
                 <a:ea typeface="Play"/>
                 <a:cs typeface="Play"/>
               </a:rPr>
-              <a:t>• Сервис принимает pptx шаблон и материалы</a:t>
+              <a:t>• Модель может выдумать цифры, которые отсутствуют в материалах</a:t>
             </a:r>
           </a:p>
           <a:p>
@@ -8101,7 +9856,7 @@
               <a:spcAft>
                 <a:spcPts val="300"/>
               </a:spcAft>
-              <a:defRPr sz="1600">
+              <a:defRPr sz="2400">
                 <a:solidFill>
                   <a:srgbClr val="000000"/>
                 </a:solidFill>
@@ -8111,7 +9866,7 @@
               </a:defRPr>
             </a:pPr>
             <a:r>
-              <a:rPr sz="1600">
+              <a:rPr sz="2400">
                 <a:solidFill>
                   <a:srgbClr val="000000"/>
                 </a:solidFill>
@@ -8119,7 +9874,7 @@
                 <a:ea typeface="Play"/>
                 <a:cs typeface="Play"/>
               </a:rPr>
-              <a:t>• Автоматически формирует дизайн-систему и план колоды</a:t>
+              <a:t>• Неполный шаблон приводит к ошибкам, сервис использует рабочую область</a:t>
             </a:r>
           </a:p>
           <a:p>
@@ -8127,7 +9882,7 @@
               <a:spcAft>
                 <a:spcPts val="300"/>
               </a:spcAft>
-              <a:defRPr sz="1600">
+              <a:defRPr sz="2400">
                 <a:solidFill>
                   <a:srgbClr val="000000"/>
                 </a:solidFill>
@@ -8137,7 +9892,7 @@
               </a:defRPr>
             </a:pPr>
             <a:r>
-              <a:rPr sz="1600">
+              <a:rPr sz="2400">
                 <a:solidFill>
                   <a:srgbClr val="000000"/>
                 </a:solidFill>
@@ -8145,7 +9900,7 @@
                 <a:ea typeface="Play"/>
                 <a:cs typeface="Play"/>
               </a:rPr>
-              <a:t>• Результат – редактируемый pptx, pdf и html</a:t>
+              <a:t>• Нагрузка выше 20 задач требует внешней очереди</a:t>
             </a:r>
           </a:p>
         </p:txBody>
@@ -8158,7 +9913,7 @@
 </p:sld>
 </file>
 
-<file path=ppt/slides/slide59.xml><?xml version="1.0" encoding="utf-8"?>
+<file path=ppt/slides/slide64.xml><?xml version="1.0" encoding="utf-8"?>
 <p:sld xmlns:a="http://schemas.openxmlformats.org/drawingml/2006/main" xmlns:p="http://schemas.openxmlformats.org/presentationml/2006/main" xmlns:r="http://schemas.openxmlformats.org/officeDocument/2006/relationships">
   <p:cSld>
     <p:bg>
@@ -8241,7 +9996,7 @@
         <p:spPr>
           <a:xfrm>
             <a:off x="677387" y="692177"/>
-            <a:ext cx="10855878" cy="1447800"/>
+            <a:ext cx="10855878" cy="822960"/>
           </a:xfrm>
           <a:prstGeom prst="rect">
             <a:avLst/>
@@ -8276,7 +10031,7 @@
                 <a:ea typeface="Arial"/>
                 <a:cs typeface="Arial"/>
               </a:rPr>
-              <a:t>Ожидаемый эффект: ускорение и качество</a:t>
+              <a:t>Вопросы к руководству</a:t>
             </a:r>
           </a:p>
         </p:txBody>
@@ -8289,8 +10044,8 @@
         </p:nvSpPr>
         <p:spPr>
           <a:xfrm>
-            <a:off x="677387" y="3497271"/>
-            <a:ext cx="10855878" cy="1488440"/>
+            <a:off x="677387" y="2926618"/>
+            <a:ext cx="10855878" cy="1950720"/>
           </a:xfrm>
           <a:prstGeom prst="rect">
             <a:avLst/>
@@ -8325,7 +10080,7 @@
                 <a:ea typeface="Play"/>
                 <a:cs typeface="Play"/>
               </a:rPr>
-              <a:t>• Время сборки сократилось до 4 мин</a:t>
+              <a:t>• Какие ресурсы нужны для масштабирования сервиса</a:t>
             </a:r>
           </a:p>
           <a:p>
@@ -8351,7 +10106,7 @@
                 <a:ea typeface="Play"/>
                 <a:cs typeface="Play"/>
               </a:rPr>
-              <a:t>• Первый вариант готов за 1 день</a:t>
+              <a:t>• Как обеспечить качество и проверку данных</a:t>
             </a:r>
           </a:p>
           <a:p>
@@ -8377,1163 +10132,11 @@
                 <a:ea typeface="Play"/>
                 <a:cs typeface="Play"/>
               </a:rPr>
-              <a:t>• Стиль-нарушения упали до 2 из 68</a:t>
+              <a:t>• Как быстро интегрировать сервис в существующие процессы</a:t>
             </a:r>
           </a:p>
         </p:txBody>
       </p:sp>
-    </p:spTree>
-  </p:cSld>
-  <p:clrMapOvr>
-    <a:masterClrMapping/>
-  </p:clrMapOvr>
-</p:sld>
-</file>
-
-<file path=ppt/slides/slide60.xml><?xml version="1.0" encoding="utf-8"?>
-<p:sld xmlns:a="http://schemas.openxmlformats.org/drawingml/2006/main" xmlns:p="http://schemas.openxmlformats.org/presentationml/2006/main" xmlns:r="http://schemas.openxmlformats.org/officeDocument/2006/relationships">
-  <p:cSld>
-    <p:bg>
-      <p:bgPr>
-        <a:solidFill>
-          <a:schemeClr val="lt2"/>
-        </a:solidFill>
-      </p:bgPr>
-    </p:bg>
-    <p:spTree>
-      <p:nvGrpSpPr>
-        <p:cNvPr id="1" name=""/>
-        <p:cNvGrpSpPr/>
-        <p:nvPr/>
-      </p:nvGrpSpPr>
-      <p:grpSpPr/>
-      <p:sp>
-        <p:nvSpPr>
-          <p:cNvPr id="795" name="Google Shape;795;p60"/>
-          <p:cNvSpPr txBox="1"/>
-          <p:nvPr/>
-        </p:nvSpPr>
-        <p:spPr>
-          <a:xfrm>
-            <a:off x="18692059" y="4674436"/>
-            <a:ext cx="4304330" cy="678198"/>
-          </a:xfrm>
-          <a:prstGeom prst="rect">
-            <a:avLst/>
-          </a:prstGeom>
-          <a:noFill/>
-          <a:ln>
-            <a:noFill/>
-          </a:ln>
-        </p:spPr>
-        <p:txBody>
-          <a:bodyPr anchorCtr="0" anchor="t" bIns="45700" lIns="91425" spcFirstLastPara="1" rIns="91425" wrap="square" tIns="45700">
-            <a:noAutofit/>
-          </a:bodyPr>
-          <a:lstStyle/>
-          <a:p>
-            <a:pPr indent="0" lvl="0" marL="0" marR="0" rtl="0" algn="l">
-              <a:lnSpc>
-                <a:spcPct val="110000"/>
-              </a:lnSpc>
-              <a:spcBef>
-                <a:spcPts val="0"/>
-              </a:spcBef>
-              <a:spcAft>
-                <a:spcPts val="0"/>
-              </a:spcAft>
-              <a:buClr>
-                <a:schemeClr val="dk1"/>
-              </a:buClr>
-              <a:buSzPts val="1600"/>
-              <a:buFont typeface="Arial"/>
-              <a:buNone/>
-            </a:pPr>
-            <a:r>
-              <a:t/>
-            </a:r>
-            <a:endParaRPr sz="1600">
-              <a:solidFill>
-                <a:schemeClr val="dk1"/>
-              </a:solidFill>
-              <a:latin typeface="Arial"/>
-              <a:ea typeface="Arial"/>
-              <a:cs typeface="Arial"/>
-              <a:sym typeface="Arial"/>
-            </a:endParaRPr>
-          </a:p>
-        </p:txBody>
-      </p:sp>
-      <p:sp>
-        <p:nvSpPr>
-          <p:cNvPr id="796" name="title"/>
-          <p:cNvSpPr txBox="1"/>
-          <p:nvPr/>
-        </p:nvSpPr>
-        <p:spPr>
-          <a:xfrm>
-            <a:off x="677387" y="692177"/>
-            <a:ext cx="10855878" cy="1447800"/>
-          </a:xfrm>
-          <a:prstGeom prst="rect">
-            <a:avLst/>
-          </a:prstGeom>
-          <a:noFill/>
-        </p:spPr>
-        <p:txBody>
-          <a:bodyPr wrap="square" lIns="76200" rIns="76200" tIns="50800" bIns="50800">
-            <a:spAutoFit/>
-          </a:bodyPr>
-          <a:lstStyle/>
-          <a:p>
-            <a:pPr algn="l">
-              <a:spcAft>
-                <a:spcPts val="300"/>
-              </a:spcAft>
-              <a:defRPr sz="4000">
-                <a:solidFill>
-                  <a:srgbClr val="000000"/>
-                </a:solidFill>
-                <a:latin typeface="Arial"/>
-                <a:ea typeface="Arial"/>
-                <a:cs typeface="Arial"/>
-              </a:defRPr>
-            </a:pPr>
-            <a:r>
-              <a:rPr sz="4000">
-                <a:solidFill>
-                  <a:srgbClr val="000000"/>
-                </a:solidFill>
-                <a:latin typeface="Arial"/>
-                <a:ea typeface="Arial"/>
-                <a:cs typeface="Arial"/>
-              </a:rPr>
-              <a:t>Ресурсы и сроки: инфраструктура и стоимость</a:t>
-            </a:r>
-          </a:p>
-        </p:txBody>
-      </p:sp>
-      <p:sp>
-        <p:nvSpPr>
-          <p:cNvPr id="797" name="body"/>
-          <p:cNvSpPr txBox="1"/>
-          <p:nvPr/>
-        </p:nvSpPr>
-        <p:spPr>
-          <a:xfrm>
-            <a:off x="677387" y="3695391"/>
-            <a:ext cx="10855878" cy="894080"/>
-          </a:xfrm>
-          <a:prstGeom prst="rect">
-            <a:avLst/>
-          </a:prstGeom>
-          <a:noFill/>
-        </p:spPr>
-        <p:txBody>
-          <a:bodyPr wrap="square" lIns="76200" rIns="76200" tIns="50800" bIns="50800">
-            <a:spAutoFit/>
-          </a:bodyPr>
-          <a:lstStyle/>
-          <a:p>
-            <a:pPr algn="l">
-              <a:spcAft>
-                <a:spcPts val="300"/>
-              </a:spcAft>
-              <a:defRPr sz="1600">
-                <a:solidFill>
-                  <a:srgbClr val="000000"/>
-                </a:solidFill>
-                <a:latin typeface="Play"/>
-                <a:ea typeface="Play"/>
-                <a:cs typeface="Play"/>
-              </a:defRPr>
-            </a:pPr>
-            <a:r>
-              <a:rPr sz="1600">
-                <a:solidFill>
-                  <a:srgbClr val="000000"/>
-                </a:solidFill>
-                <a:latin typeface="Play"/>
-                <a:ea typeface="Play"/>
-                <a:cs typeface="Play"/>
-              </a:rPr>
-              <a:t>• Сервис работает на 2 vCPU / 2 GB RAM</a:t>
-            </a:r>
-          </a:p>
-          <a:p>
-            <a:pPr algn="l">
-              <a:spcAft>
-                <a:spcPts val="300"/>
-              </a:spcAft>
-              <a:defRPr sz="1600">
-                <a:solidFill>
-                  <a:srgbClr val="000000"/>
-                </a:solidFill>
-                <a:latin typeface="Play"/>
-                <a:ea typeface="Play"/>
-                <a:cs typeface="Play"/>
-              </a:defRPr>
-            </a:pPr>
-            <a:r>
-              <a:rPr sz="1600">
-                <a:solidFill>
-                  <a:srgbClr val="000000"/>
-                </a:solidFill>
-                <a:latin typeface="Play"/>
-                <a:ea typeface="Play"/>
-                <a:cs typeface="Play"/>
-              </a:rPr>
-              <a:t>• Модель gpt-oss-20b, инференс 1400 руб за 6 недель</a:t>
-            </a:r>
-          </a:p>
-          <a:p>
-            <a:pPr algn="l">
-              <a:spcAft>
-                <a:spcPts val="300"/>
-              </a:spcAft>
-              <a:defRPr sz="1600">
-                <a:solidFill>
-                  <a:srgbClr val="000000"/>
-                </a:solidFill>
-                <a:latin typeface="Play"/>
-                <a:ea typeface="Play"/>
-                <a:cs typeface="Play"/>
-              </a:defRPr>
-            </a:pPr>
-            <a:r>
-              <a:rPr sz="1600">
-                <a:solidFill>
-                  <a:srgbClr val="000000"/>
-                </a:solidFill>
-                <a:latin typeface="Play"/>
-                <a:ea typeface="Play"/>
-                <a:cs typeface="Play"/>
-              </a:rPr>
-              <a:t>• Параллельность до 20 задач без очереди</a:t>
-            </a:r>
-          </a:p>
-        </p:txBody>
-      </p:sp>
-    </p:spTree>
-  </p:cSld>
-  <p:clrMapOvr>
-    <a:masterClrMapping/>
-  </p:clrMapOvr>
-</p:sld>
-</file>
-
-<file path=ppt/slides/slide61.xml><?xml version="1.0" encoding="utf-8"?>
-<p:sld xmlns:a="http://schemas.openxmlformats.org/drawingml/2006/main" xmlns:p="http://schemas.openxmlformats.org/presentationml/2006/main" xmlns:r="http://schemas.openxmlformats.org/officeDocument/2006/relationships">
-  <p:cSld>
-    <p:spTree>
-      <p:nvGrpSpPr>
-        <p:cNvPr id="1" name=""/>
-        <p:cNvGrpSpPr/>
-        <p:nvPr/>
-      </p:nvGrpSpPr>
-      <p:grpSpPr/>
-      <p:cxnSp>
-        <p:nvCxnSpPr>
-          <p:cNvPr id="986" name="Google Shape;986;p76"/>
-          <p:cNvCxnSpPr/>
-          <p:nvPr/>
-        </p:nvCxnSpPr>
-        <p:spPr>
-          <a:xfrm rot="10800000">
-            <a:off x="-42658" y="3591512"/>
-            <a:ext cx="12234658" cy="0"/>
-          </a:xfrm>
-          <a:prstGeom prst="straightConnector1">
-            <a:avLst/>
-          </a:prstGeom>
-          <a:noFill/>
-          <a:ln cap="flat" cmpd="sng" w="12700">
-            <a:solidFill>
-              <a:srgbClr val="E1E1E2"/>
-            </a:solidFill>
-            <a:prstDash val="solid"/>
-            <a:miter lim="8000"/>
-            <a:headEnd len="sm" w="sm" type="none"/>
-            <a:tailEnd len="sm" w="sm" type="none"/>
-          </a:ln>
-        </p:spPr>
-      </p:cxnSp>
-      <p:sp>
-        <p:nvSpPr>
-          <p:cNvPr id="987" name="title"/>
-          <p:cNvSpPr txBox="1"/>
-          <p:nvPr/>
-        </p:nvSpPr>
-        <p:spPr>
-          <a:xfrm>
-            <a:off x="677387" y="692177"/>
-            <a:ext cx="10855878" cy="1447800"/>
-          </a:xfrm>
-          <a:prstGeom prst="rect">
-            <a:avLst/>
-          </a:prstGeom>
-          <a:noFill/>
-        </p:spPr>
-        <p:txBody>
-          <a:bodyPr wrap="square" lIns="76200" rIns="76200" tIns="50800" bIns="50800">
-            <a:spAutoFit/>
-          </a:bodyPr>
-          <a:lstStyle/>
-          <a:p>
-            <a:pPr algn="l">
-              <a:spcAft>
-                <a:spcPts val="300"/>
-              </a:spcAft>
-              <a:defRPr sz="4000">
-                <a:solidFill>
-                  <a:srgbClr val="000000"/>
-                </a:solidFill>
-                <a:latin typeface="Arial"/>
-                <a:ea typeface="Arial"/>
-                <a:cs typeface="Arial"/>
-              </a:defRPr>
-            </a:pPr>
-            <a:r>
-              <a:rPr sz="4000">
-                <a:solidFill>
-                  <a:srgbClr val="000000"/>
-                </a:solidFill>
-                <a:latin typeface="Arial"/>
-                <a:ea typeface="Arial"/>
-                <a:cs typeface="Arial"/>
-              </a:rPr>
-              <a:t>Пилотный план: 6 недель, 2 команды, 68 колод</a:t>
-            </a:r>
-          </a:p>
-        </p:txBody>
-      </p:sp>
-      <p:sp>
-        <p:nvSpPr>
-          <p:cNvPr id="988" name="body"/>
-          <p:cNvSpPr txBox="1"/>
-          <p:nvPr/>
-        </p:nvSpPr>
-        <p:spPr>
-          <a:xfrm>
-            <a:off x="677387" y="3591534"/>
-            <a:ext cx="5245059" cy="1254945"/>
-          </a:xfrm>
-          <a:prstGeom prst="rect">
-            <a:avLst/>
-          </a:prstGeom>
-          <a:noFill/>
-        </p:spPr>
-        <p:txBody>
-          <a:bodyPr wrap="square" lIns="76200" rIns="76200" tIns="50800" bIns="50800">
-            <a:spAutoFit/>
-          </a:bodyPr>
-          <a:lstStyle/>
-          <a:p>
-            <a:pPr algn="l">
-              <a:spcAft>
-                <a:spcPts val="300"/>
-              </a:spcAft>
-              <a:defRPr sz="1600">
-                <a:solidFill>
-                  <a:srgbClr val="000000"/>
-                </a:solidFill>
-                <a:latin typeface="Play"/>
-                <a:ea typeface="Play"/>
-                <a:cs typeface="Play"/>
-              </a:defRPr>
-            </a:pPr>
-            <a:r>
-              <a:rPr sz="1600">
-                <a:solidFill>
-                  <a:srgbClr val="000000"/>
-                </a:solidFill>
-                <a:latin typeface="Play"/>
-                <a:ea typeface="Play"/>
-                <a:cs typeface="Play"/>
-              </a:rPr>
-              <a:t>• Пилот 6 недель, 2 команды, 68 презентаций</a:t>
-            </a:r>
-          </a:p>
-          <a:p>
-            <a:pPr algn="l">
-              <a:spcAft>
-                <a:spcPts val="300"/>
-              </a:spcAft>
-              <a:defRPr sz="1600">
-                <a:solidFill>
-                  <a:srgbClr val="000000"/>
-                </a:solidFill>
-                <a:latin typeface="Play"/>
-                <a:ea typeface="Play"/>
-                <a:cs typeface="Play"/>
-              </a:defRPr>
-            </a:pPr>
-            <a:r>
-              <a:rPr sz="1600">
-                <a:solidFill>
-                  <a:srgbClr val="000000"/>
-                </a:solidFill>
-                <a:latin typeface="Play"/>
-                <a:ea typeface="Play"/>
-                <a:cs typeface="Play"/>
-              </a:rPr>
-              <a:t>• Дизайнеры закрыли 38 запросов вместо 11</a:t>
-            </a:r>
-          </a:p>
-          <a:p>
-            <a:pPr algn="l">
-              <a:spcAft>
-                <a:spcPts val="300"/>
-              </a:spcAft>
-              <a:defRPr sz="1600">
-                <a:solidFill>
-                  <a:srgbClr val="000000"/>
-                </a:solidFill>
-                <a:latin typeface="Play"/>
-                <a:ea typeface="Play"/>
-                <a:cs typeface="Play"/>
-              </a:defRPr>
-            </a:pPr>
-            <a:r>
-              <a:rPr sz="1600">
-                <a:solidFill>
-                  <a:srgbClr val="000000"/>
-                </a:solidFill>
-                <a:latin typeface="Play"/>
-                <a:ea typeface="Play"/>
-                <a:cs typeface="Play"/>
-              </a:rPr>
-              <a:t>• План расширения: 4 команды в 3-м квартале</a:t>
-            </a:r>
-          </a:p>
-        </p:txBody>
-      </p:sp>
-      <p:sp>
-        <p:nvSpPr>
-          <p:cNvPr id="989" name="Rectangle 988"/>
-          <p:cNvSpPr/>
-          <p:nvPr/>
-        </p:nvSpPr>
-        <p:spPr>
-          <a:xfrm>
-            <a:off x="6288206" y="4168808"/>
-            <a:ext cx="5245059" cy="37648"/>
-          </a:xfrm>
-          <a:prstGeom prst="rect">
-            <a:avLst/>
-          </a:prstGeom>
-          <a:solidFill>
-            <a:srgbClr val="0077FF"/>
-          </a:solidFill>
-          <a:ln>
-            <a:noFill/>
-          </a:ln>
-        </p:spPr>
-        <p:style>
-          <a:lnRef idx="1">
-            <a:schemeClr val="accent1"/>
-          </a:lnRef>
-          <a:fillRef idx="3">
-            <a:schemeClr val="accent1"/>
-          </a:fillRef>
-          <a:effectRef idx="2">
-            <a:schemeClr val="accent1"/>
-          </a:effectRef>
-          <a:fontRef idx="minor">
-            <a:schemeClr val="lt1"/>
-          </a:fontRef>
-        </p:style>
-        <p:txBody>
-          <a:bodyPr rtlCol="0" anchor="ctr"/>
-          <a:lstStyle/>
-          <a:p>
-            <a:pPr algn="ctr"/>
-          </a:p>
-        </p:txBody>
-      </p:sp>
-      <p:sp>
-        <p:nvSpPr>
-          <p:cNvPr id="990" name="Oval 989"/>
-          <p:cNvSpPr/>
-          <p:nvPr/>
-        </p:nvSpPr>
-        <p:spPr>
-          <a:xfrm>
-            <a:off x="7024338" y="4049588"/>
-            <a:ext cx="276087" cy="276087"/>
-          </a:xfrm>
-          <a:prstGeom prst="ellipse">
-            <a:avLst/>
-          </a:prstGeom>
-          <a:solidFill>
-            <a:srgbClr val="0077FF"/>
-          </a:solidFill>
-          <a:ln>
-            <a:noFill/>
-          </a:ln>
-        </p:spPr>
-        <p:style>
-          <a:lnRef idx="1">
-            <a:schemeClr val="accent1"/>
-          </a:lnRef>
-          <a:fillRef idx="3">
-            <a:schemeClr val="accent1"/>
-          </a:fillRef>
-          <a:effectRef idx="2">
-            <a:schemeClr val="accent1"/>
-          </a:effectRef>
-          <a:fontRef idx="minor">
-            <a:schemeClr val="lt1"/>
-          </a:fontRef>
-        </p:style>
-        <p:txBody>
-          <a:bodyPr rtlCol="0" anchor="ctr"/>
-          <a:lstStyle/>
-          <a:p>
-            <a:pPr algn="ctr"/>
-          </a:p>
-        </p:txBody>
-      </p:sp>
-      <p:sp>
-        <p:nvSpPr>
-          <p:cNvPr id="991" name="TextBox 990"/>
-          <p:cNvSpPr txBox="1"/>
-          <p:nvPr/>
-        </p:nvSpPr>
-        <p:spPr>
-          <a:xfrm>
-            <a:off x="6288206" y="3591534"/>
-            <a:ext cx="2622529" cy="476879"/>
-          </a:xfrm>
-          <a:prstGeom prst="rect">
-            <a:avLst/>
-          </a:prstGeom>
-          <a:noFill/>
-        </p:spPr>
-        <p:txBody>
-          <a:bodyPr wrap="square" lIns="12700" rIns="12700" tIns="12700" bIns="12700">
-            <a:spAutoFit/>
-          </a:bodyPr>
-          <a:lstStyle/>
-          <a:p>
-            <a:pPr algn="ctr">
-              <a:defRPr sz="1400" b="0">
-                <a:solidFill>
-                  <a:srgbClr val="000000"/>
-                </a:solidFill>
-                <a:latin typeface="Play"/>
-                <a:ea typeface="Play"/>
-                <a:cs typeface="Play"/>
-              </a:defRPr>
-            </a:pPr>
-            <a:r>
-              <a:rPr sz="1400" b="0">
-                <a:solidFill>
-                  <a:srgbClr val="000000"/>
-                </a:solidFill>
-                <a:latin typeface="Play"/>
-                <a:ea typeface="Play"/>
-                <a:cs typeface="Play"/>
-              </a:rPr>
-              <a:t>Третий квартал 2026</a:t>
-            </a:r>
-          </a:p>
-        </p:txBody>
-      </p:sp>
-      <p:sp>
-        <p:nvSpPr>
-          <p:cNvPr id="992" name="Oval 991"/>
-          <p:cNvSpPr/>
-          <p:nvPr/>
-        </p:nvSpPr>
-        <p:spPr>
-          <a:xfrm>
-            <a:off x="8772691" y="4049588"/>
-            <a:ext cx="276087" cy="276087"/>
-          </a:xfrm>
-          <a:prstGeom prst="ellipse">
-            <a:avLst/>
-          </a:prstGeom>
-          <a:solidFill>
-            <a:srgbClr val="0077FF"/>
-          </a:solidFill>
-          <a:ln>
-            <a:noFill/>
-          </a:ln>
-        </p:spPr>
-        <p:style>
-          <a:lnRef idx="1">
-            <a:schemeClr val="accent1"/>
-          </a:lnRef>
-          <a:fillRef idx="3">
-            <a:schemeClr val="accent1"/>
-          </a:fillRef>
-          <a:effectRef idx="2">
-            <a:schemeClr val="accent1"/>
-          </a:effectRef>
-          <a:fontRef idx="minor">
-            <a:schemeClr val="lt1"/>
-          </a:fontRef>
-        </p:style>
-        <p:txBody>
-          <a:bodyPr rtlCol="0" anchor="ctr"/>
-          <a:lstStyle/>
-          <a:p>
-            <a:pPr algn="ctr"/>
-          </a:p>
-        </p:txBody>
-      </p:sp>
-      <p:sp>
-        <p:nvSpPr>
-          <p:cNvPr id="993" name="TextBox 992"/>
-          <p:cNvSpPr txBox="1"/>
-          <p:nvPr/>
-        </p:nvSpPr>
-        <p:spPr>
-          <a:xfrm>
-            <a:off x="7599470" y="4444896"/>
-            <a:ext cx="2622529" cy="476879"/>
-          </a:xfrm>
-          <a:prstGeom prst="rect">
-            <a:avLst/>
-          </a:prstGeom>
-          <a:noFill/>
-        </p:spPr>
-        <p:txBody>
-          <a:bodyPr wrap="square" lIns="12700" rIns="12700" tIns="12700" bIns="12700">
-            <a:spAutoFit/>
-          </a:bodyPr>
-          <a:lstStyle/>
-          <a:p>
-            <a:pPr algn="ctr">
-              <a:defRPr sz="1400" b="0">
-                <a:solidFill>
-                  <a:srgbClr val="000000"/>
-                </a:solidFill>
-                <a:latin typeface="Play"/>
-                <a:ea typeface="Play"/>
-                <a:cs typeface="Play"/>
-              </a:defRPr>
-            </a:pPr>
-            <a:r>
-              <a:rPr sz="1400" b="0">
-                <a:solidFill>
-                  <a:srgbClr val="000000"/>
-                </a:solidFill>
-                <a:latin typeface="Play"/>
-                <a:ea typeface="Play"/>
-                <a:cs typeface="Play"/>
-              </a:rPr>
-              <a:t>Четвёртый квартал 2026</a:t>
-            </a:r>
-          </a:p>
-        </p:txBody>
-      </p:sp>
-      <p:sp>
-        <p:nvSpPr>
-          <p:cNvPr id="994" name="Oval 993"/>
-          <p:cNvSpPr/>
-          <p:nvPr/>
-        </p:nvSpPr>
-        <p:spPr>
-          <a:xfrm>
-            <a:off x="10521044" y="4049588"/>
-            <a:ext cx="276087" cy="276087"/>
-          </a:xfrm>
-          <a:prstGeom prst="ellipse">
-            <a:avLst/>
-          </a:prstGeom>
-          <a:solidFill>
-            <a:srgbClr val="0077FF"/>
-          </a:solidFill>
-          <a:ln>
-            <a:noFill/>
-          </a:ln>
-        </p:spPr>
-        <p:style>
-          <a:lnRef idx="1">
-            <a:schemeClr val="accent1"/>
-          </a:lnRef>
-          <a:fillRef idx="3">
-            <a:schemeClr val="accent1"/>
-          </a:fillRef>
-          <a:effectRef idx="2">
-            <a:schemeClr val="accent1"/>
-          </a:effectRef>
-          <a:fontRef idx="minor">
-            <a:schemeClr val="lt1"/>
-          </a:fontRef>
-        </p:style>
-        <p:txBody>
-          <a:bodyPr rtlCol="0" anchor="ctr"/>
-          <a:lstStyle/>
-          <a:p>
-            <a:pPr algn="ctr"/>
-          </a:p>
-        </p:txBody>
-      </p:sp>
-      <p:sp>
-        <p:nvSpPr>
-          <p:cNvPr id="995" name="TextBox 994"/>
-          <p:cNvSpPr txBox="1"/>
-          <p:nvPr/>
-        </p:nvSpPr>
-        <p:spPr>
-          <a:xfrm>
-            <a:off x="8910735" y="3591534"/>
-            <a:ext cx="2622529" cy="476879"/>
-          </a:xfrm>
-          <a:prstGeom prst="rect">
-            <a:avLst/>
-          </a:prstGeom>
-          <a:noFill/>
-        </p:spPr>
-        <p:txBody>
-          <a:bodyPr wrap="square" lIns="12700" rIns="12700" tIns="12700" bIns="12700">
-            <a:spAutoFit/>
-          </a:bodyPr>
-          <a:lstStyle/>
-          <a:p>
-            <a:pPr algn="ctr">
-              <a:defRPr sz="1400" b="0">
-                <a:solidFill>
-                  <a:srgbClr val="000000"/>
-                </a:solidFill>
-                <a:latin typeface="Play"/>
-                <a:ea typeface="Play"/>
-                <a:cs typeface="Play"/>
-              </a:defRPr>
-            </a:pPr>
-            <a:r>
-              <a:rPr sz="1400" b="0">
-                <a:solidFill>
-                  <a:srgbClr val="000000"/>
-                </a:solidFill>
-                <a:latin typeface="Play"/>
-                <a:ea typeface="Play"/>
-                <a:cs typeface="Play"/>
-              </a:rPr>
-              <a:t>Первый квартал 2027</a:t>
-            </a:r>
-          </a:p>
-        </p:txBody>
-      </p:sp>
-    </p:spTree>
-  </p:cSld>
-  <p:clrMapOvr>
-    <a:masterClrMapping/>
-  </p:clrMapOvr>
-</p:sld>
-</file>
-
-<file path=ppt/slides/slide62.xml><?xml version="1.0" encoding="utf-8"?>
-<p:sld xmlns:a="http://schemas.openxmlformats.org/drawingml/2006/main" xmlns:p="http://schemas.openxmlformats.org/presentationml/2006/main" xmlns:r="http://schemas.openxmlformats.org/officeDocument/2006/relationships">
-  <p:cSld>
-    <p:bg>
-      <p:bgPr>
-        <a:solidFill>
-          <a:schemeClr val="lt2"/>
-        </a:solidFill>
-      </p:bgPr>
-    </p:bg>
-    <p:spTree>
-      <p:nvGrpSpPr>
-        <p:cNvPr id="1" name=""/>
-        <p:cNvGrpSpPr/>
-        <p:nvPr/>
-      </p:nvGrpSpPr>
-      <p:grpSpPr/>
-      <p:sp>
-        <p:nvSpPr>
-          <p:cNvPr id="764" name="Google Shape;764;p58"/>
-          <p:cNvSpPr txBox="1"/>
-          <p:nvPr/>
-        </p:nvSpPr>
-        <p:spPr>
-          <a:xfrm>
-            <a:off x="18692059" y="4674436"/>
-            <a:ext cx="4304330" cy="678198"/>
-          </a:xfrm>
-          <a:prstGeom prst="rect">
-            <a:avLst/>
-          </a:prstGeom>
-          <a:noFill/>
-          <a:ln>
-            <a:noFill/>
-          </a:ln>
-        </p:spPr>
-        <p:txBody>
-          <a:bodyPr anchorCtr="0" anchor="t" bIns="45700" lIns="91425" spcFirstLastPara="1" rIns="91425" wrap="square" tIns="45700">
-            <a:noAutofit/>
-          </a:bodyPr>
-          <a:lstStyle/>
-          <a:p>
-            <a:pPr indent="0" lvl="0" marL="0" marR="0" rtl="0" algn="l">
-              <a:lnSpc>
-                <a:spcPct val="110000"/>
-              </a:lnSpc>
-              <a:spcBef>
-                <a:spcPts val="0"/>
-              </a:spcBef>
-              <a:spcAft>
-                <a:spcPts val="0"/>
-              </a:spcAft>
-              <a:buClr>
-                <a:schemeClr val="dk1"/>
-              </a:buClr>
-              <a:buSzPts val="1600"/>
-              <a:buFont typeface="Arial"/>
-              <a:buNone/>
-            </a:pPr>
-            <a:r>
-              <a:t/>
-            </a:r>
-            <a:endParaRPr sz="1600">
-              <a:solidFill>
-                <a:schemeClr val="dk1"/>
-              </a:solidFill>
-              <a:latin typeface="Arial"/>
-              <a:ea typeface="Arial"/>
-              <a:cs typeface="Arial"/>
-              <a:sym typeface="Arial"/>
-            </a:endParaRPr>
-          </a:p>
-        </p:txBody>
-      </p:sp>
-      <p:sp>
-        <p:nvSpPr>
-          <p:cNvPr id="765" name="title"/>
-          <p:cNvSpPr txBox="1"/>
-          <p:nvPr/>
-        </p:nvSpPr>
-        <p:spPr>
-          <a:xfrm>
-            <a:off x="677387" y="692177"/>
-            <a:ext cx="10855878" cy="1447800"/>
-          </a:xfrm>
-          <a:prstGeom prst="rect">
-            <a:avLst/>
-          </a:prstGeom>
-          <a:noFill/>
-        </p:spPr>
-        <p:txBody>
-          <a:bodyPr wrap="square" lIns="76200" rIns="76200" tIns="50800" bIns="50800">
-            <a:spAutoFit/>
-          </a:bodyPr>
-          <a:lstStyle/>
-          <a:p>
-            <a:pPr algn="l">
-              <a:spcAft>
-                <a:spcPts val="300"/>
-              </a:spcAft>
-              <a:defRPr sz="4000">
-                <a:solidFill>
-                  <a:srgbClr val="000000"/>
-                </a:solidFill>
-                <a:latin typeface="Arial"/>
-                <a:ea typeface="Arial"/>
-                <a:cs typeface="Arial"/>
-              </a:defRPr>
-            </a:pPr>
-            <a:r>
-              <a:rPr sz="4000">
-                <a:solidFill>
-                  <a:srgbClr val="000000"/>
-                </a:solidFill>
-                <a:latin typeface="Arial"/>
-                <a:ea typeface="Arial"/>
-                <a:cs typeface="Arial"/>
-              </a:rPr>
-              <a:t>Запрос к руководству: одобрение и интеграцию</a:t>
-            </a:r>
-          </a:p>
-        </p:txBody>
-      </p:sp>
-      <p:sp>
-        <p:nvSpPr>
-          <p:cNvPr id="766" name="body"/>
-          <p:cNvSpPr txBox="1"/>
-          <p:nvPr/>
-        </p:nvSpPr>
-        <p:spPr>
-          <a:xfrm>
-            <a:off x="677387" y="3695391"/>
-            <a:ext cx="10855878" cy="894080"/>
-          </a:xfrm>
-          <a:prstGeom prst="rect">
-            <a:avLst/>
-          </a:prstGeom>
-          <a:noFill/>
-        </p:spPr>
-        <p:txBody>
-          <a:bodyPr wrap="square" lIns="76200" rIns="76200" tIns="50800" bIns="50800">
-            <a:spAutoFit/>
-          </a:bodyPr>
-          <a:lstStyle/>
-          <a:p>
-            <a:pPr algn="l">
-              <a:spcAft>
-                <a:spcPts val="300"/>
-              </a:spcAft>
-              <a:defRPr sz="1600">
-                <a:solidFill>
-                  <a:srgbClr val="000000"/>
-                </a:solidFill>
-                <a:latin typeface="Play"/>
-                <a:ea typeface="Play"/>
-                <a:cs typeface="Play"/>
-              </a:defRPr>
-            </a:pPr>
-            <a:r>
-              <a:rPr sz="1600">
-                <a:solidFill>
-                  <a:srgbClr val="000000"/>
-                </a:solidFill>
-                <a:latin typeface="Play"/>
-                <a:ea typeface="Play"/>
-                <a:cs typeface="Play"/>
-              </a:rPr>
-              <a:t>• Одобрить запуск на всю компанию</a:t>
-            </a:r>
-          </a:p>
-          <a:p>
-            <a:pPr algn="l">
-              <a:spcAft>
-                <a:spcPts val="300"/>
-              </a:spcAft>
-              <a:defRPr sz="1600">
-                <a:solidFill>
-                  <a:srgbClr val="000000"/>
-                </a:solidFill>
-                <a:latin typeface="Play"/>
-                <a:ea typeface="Play"/>
-                <a:cs typeface="Play"/>
-              </a:defRPr>
-            </a:pPr>
-            <a:r>
-              <a:rPr sz="1600">
-                <a:solidFill>
-                  <a:srgbClr val="000000"/>
-                </a:solidFill>
-                <a:latin typeface="Play"/>
-                <a:ea typeface="Play"/>
-                <a:cs typeface="Play"/>
-              </a:rPr>
-              <a:t>• Интеграцию с хранилищем документов</a:t>
-            </a:r>
-          </a:p>
-          <a:p>
-            <a:pPr algn="l">
-              <a:spcAft>
-                <a:spcPts val="300"/>
-              </a:spcAft>
-              <a:defRPr sz="1600">
-                <a:solidFill>
-                  <a:srgbClr val="000000"/>
-                </a:solidFill>
-                <a:latin typeface="Play"/>
-                <a:ea typeface="Play"/>
-                <a:cs typeface="Play"/>
-              </a:defRPr>
-            </a:pPr>
-            <a:r>
-              <a:rPr sz="1600">
-                <a:solidFill>
-                  <a:srgbClr val="000000"/>
-                </a:solidFill>
-                <a:latin typeface="Play"/>
-                <a:ea typeface="Play"/>
-                <a:cs typeface="Play"/>
-              </a:rPr>
-              <a:t>• Финансирование дальнейшего развития</a:t>
-            </a:r>
-          </a:p>
-        </p:txBody>
-      </p:sp>
-    </p:spTree>
-  </p:cSld>
-  <p:clrMapOvr>
-    <a:masterClrMapping/>
-  </p:clrMapOvr>
-</p:sld>
-</file>
-
-<file path=ppt/slides/slide63.xml><?xml version="1.0" encoding="utf-8"?>
-<p:sld xmlns:a="http://schemas.openxmlformats.org/drawingml/2006/main" xmlns:p="http://schemas.openxmlformats.org/presentationml/2006/main" xmlns:r="http://schemas.openxmlformats.org/officeDocument/2006/relationships">
-  <p:cSld>
-    <p:bg>
-      <p:bgPr>
-        <a:solidFill>
-          <a:schemeClr val="lt2"/>
-        </a:solidFill>
-      </p:bgPr>
-    </p:bg>
-    <p:spTree>
-      <p:nvGrpSpPr>
-        <p:cNvPr id="1" name=""/>
-        <p:cNvGrpSpPr/>
-        <p:nvPr/>
-      </p:nvGrpSpPr>
-      <p:grpSpPr/>
-      <p:sp>
-        <p:nvSpPr>
-          <p:cNvPr id="2" name="title"/>
-          <p:cNvSpPr txBox="1"/>
-          <p:nvPr/>
-        </p:nvSpPr>
-        <p:spPr>
-          <a:xfrm>
-            <a:off x="677387" y="692177"/>
-            <a:ext cx="10855878" cy="1447800"/>
-          </a:xfrm>
-          <a:prstGeom prst="rect">
-            <a:avLst/>
-          </a:prstGeom>
-          <a:noFill/>
-        </p:spPr>
-        <p:txBody>
-          <a:bodyPr wrap="square" lIns="76200" rIns="76200" tIns="50800" bIns="50800">
-            <a:spAutoFit/>
-          </a:bodyPr>
-          <a:lstStyle/>
-          <a:p>
-            <a:pPr algn="l">
-              <a:spcAft>
-                <a:spcPts val="300"/>
-              </a:spcAft>
-              <a:defRPr sz="4000">
-                <a:solidFill>
-                  <a:srgbClr val="000000"/>
-                </a:solidFill>
-                <a:latin typeface="Arial"/>
-                <a:ea typeface="Arial"/>
-                <a:cs typeface="Arial"/>
-              </a:defRPr>
-            </a:pPr>
-            <a:r>
-              <a:rPr sz="4000">
-                <a:solidFill>
-                  <a:srgbClr val="000000"/>
-                </a:solidFill>
-                <a:latin typeface="Arial"/>
-                <a:ea typeface="Arial"/>
-                <a:cs typeface="Arial"/>
-              </a:rPr>
-              <a:t>Текущее время сборки: 186 мин + 74 мин правок</a:t>
-            </a:r>
-          </a:p>
-        </p:txBody>
-      </p:sp>
-      <p:graphicFrame>
-        <p:nvGraphicFramePr>
-          <p:cNvPr id="3" name="Chart 2"/>
-          <p:cNvGraphicFramePr>
-            <a:graphicFrameLocks noGrp="1"/>
-          </p:cNvGraphicFramePr>
-          <p:nvPr/>
-        </p:nvGraphicFramePr>
-        <p:xfrm>
-          <a:off x="6288206" y="2277137"/>
-          <a:ext cx="5245059" cy="3923659"/>
-        </p:xfrm>
-        <a:graphic>
-          <a:graphicData uri="http://schemas.openxmlformats.org/drawingml/2006/chart">
-            <c:chart xmlns:c="http://schemas.openxmlformats.org/drawingml/2006/chart" r:id="rId2"/>
-          </a:graphicData>
-        </a:graphic>
-      </p:graphicFrame>
-    </p:spTree>
-  </p:cSld>
-  <p:clrMapOvr>
-    <a:masterClrMapping/>
-  </p:clrMapOvr>
-</p:sld>
-</file>
-
-<file path=ppt/slides/slide64.xml><?xml version="1.0" encoding="utf-8"?>
-<p:sld xmlns:a="http://schemas.openxmlformats.org/drawingml/2006/main" xmlns:p="http://schemas.openxmlformats.org/presentationml/2006/main" xmlns:r="http://schemas.openxmlformats.org/officeDocument/2006/relationships">
-  <p:cSld>
-    <p:bg>
-      <p:bgPr>
-        <a:solidFill>
-          <a:schemeClr val="lt2"/>
-        </a:solidFill>
-      </p:bgPr>
-    </p:bg>
-    <p:spTree>
-      <p:nvGrpSpPr>
-        <p:cNvPr id="1" name=""/>
-        <p:cNvGrpSpPr/>
-        <p:nvPr/>
-      </p:nvGrpSpPr>
-      <p:grpSpPr/>
-      <p:sp>
-        <p:nvSpPr>
-          <p:cNvPr id="2" name="title"/>
-          <p:cNvSpPr txBox="1"/>
-          <p:nvPr/>
-        </p:nvSpPr>
-        <p:spPr>
-          <a:xfrm>
-            <a:off x="677387" y="692177"/>
-            <a:ext cx="10855878" cy="1447800"/>
-          </a:xfrm>
-          <a:prstGeom prst="rect">
-            <a:avLst/>
-          </a:prstGeom>
-          <a:noFill/>
-        </p:spPr>
-        <p:txBody>
-          <a:bodyPr wrap="square" lIns="76200" rIns="76200" tIns="50800" bIns="50800">
-            <a:spAutoFit/>
-          </a:bodyPr>
-          <a:lstStyle/>
-          <a:p>
-            <a:pPr algn="l">
-              <a:spcAft>
-                <a:spcPts val="300"/>
-              </a:spcAft>
-              <a:defRPr sz="4000">
-                <a:solidFill>
-                  <a:srgbClr val="000000"/>
-                </a:solidFill>
-                <a:latin typeface="Arial"/>
-                <a:ea typeface="Arial"/>
-                <a:cs typeface="Arial"/>
-              </a:defRPr>
-            </a:pPr>
-            <a:r>
-              <a:rPr sz="4000">
-                <a:solidFill>
-                  <a:srgbClr val="000000"/>
-                </a:solidFill>
-                <a:latin typeface="Arial"/>
-                <a:ea typeface="Arial"/>
-                <a:cs typeface="Arial"/>
-              </a:rPr>
-              <a:t>Улучшения в пилоте: 4 мин сборки, 38 запросов</a:t>
-            </a:r>
-          </a:p>
-        </p:txBody>
-      </p:sp>
-      <p:graphicFrame>
-        <p:nvGraphicFramePr>
-          <p:cNvPr id="3" name="Chart 2"/>
-          <p:cNvGraphicFramePr>
-            <a:graphicFrameLocks noGrp="1"/>
-          </p:cNvGraphicFramePr>
-          <p:nvPr/>
-        </p:nvGraphicFramePr>
-        <p:xfrm>
-          <a:off x="6288206" y="2277137"/>
-          <a:ext cx="5245059" cy="3923659"/>
-        </p:xfrm>
-        <a:graphic>
-          <a:graphicData uri="http://schemas.openxmlformats.org/drawingml/2006/chart">
-            <c:chart xmlns:c="http://schemas.openxmlformats.org/drawingml/2006/chart" r:id="rId2"/>
-          </a:graphicData>
-        </a:graphic>
-      </p:graphicFrame>
     </p:spTree>
   </p:cSld>
   <p:clrMapOvr>
@@ -9552,68 +10155,16 @@
         <p:nvPr/>
       </p:nvGrpSpPr>
       <p:grpSpPr/>
-      <p:cxnSp>
-        <p:nvCxnSpPr>
-          <p:cNvPr id="918" name="Google Shape;918;p74"/>
-          <p:cNvCxnSpPr/>
-          <p:nvPr/>
-        </p:nvCxnSpPr>
-        <p:spPr>
-          <a:xfrm rot="10800000">
-            <a:off x="658813" y="2199500"/>
-            <a:ext cx="11533187" cy="0"/>
-          </a:xfrm>
-          <a:prstGeom prst="straightConnector1">
-            <a:avLst/>
-          </a:prstGeom>
-          <a:noFill/>
-          <a:ln cap="flat" cmpd="sng" w="19050">
-            <a:solidFill>
-              <a:schemeClr val="accent4"/>
-            </a:solidFill>
-            <a:prstDash val="solid"/>
-            <a:miter lim="8000"/>
-            <a:headEnd len="sm" w="sm" type="none"/>
-            <a:tailEnd len="sm" w="sm" type="none"/>
-          </a:ln>
-        </p:spPr>
-      </p:cxnSp>
-      <p:cxnSp>
-        <p:nvCxnSpPr>
-          <p:cNvPr id="919" name="Google Shape;919;p74"/>
-          <p:cNvCxnSpPr/>
-          <p:nvPr/>
-        </p:nvCxnSpPr>
-        <p:spPr>
-          <a:xfrm flipH="1">
-            <a:off x="1" y="4351265"/>
-            <a:ext cx="8112124" cy="42098"/>
-          </a:xfrm>
-          <a:prstGeom prst="straightConnector1">
-            <a:avLst/>
-          </a:prstGeom>
-          <a:noFill/>
-          <a:ln cap="flat" cmpd="sng" w="19050">
-            <a:solidFill>
-              <a:schemeClr val="accent4"/>
-            </a:solidFill>
-            <a:prstDash val="solid"/>
-            <a:miter lim="8000"/>
-            <a:headEnd len="lg" w="lg" type="stealth"/>
-            <a:tailEnd len="sm" w="sm" type="none"/>
-          </a:ln>
-        </p:spPr>
-      </p:cxnSp>
       <p:sp>
         <p:nvSpPr>
-          <p:cNvPr id="920" name="title"/>
+          <p:cNvPr id="2" name="title"/>
           <p:cNvSpPr txBox="1"/>
           <p:nvPr/>
         </p:nvSpPr>
         <p:spPr>
           <a:xfrm>
-            <a:off x="677387" y="692177"/>
-            <a:ext cx="10855878" cy="1447800"/>
+            <a:off x="658855" y="692177"/>
+            <a:ext cx="5242438" cy="1447800"/>
           </a:xfrm>
           <a:prstGeom prst="rect">
             <a:avLst/>
@@ -9632,7 +10183,7 @@
               </a:spcAft>
               <a:defRPr sz="4000">
                 <a:solidFill>
-                  <a:srgbClr val="000000"/>
+                  <a:srgbClr val="FFFFFF"/>
                 </a:solidFill>
                 <a:latin typeface="Arial"/>
                 <a:ea typeface="Arial"/>
@@ -9642,13 +10193,114 @@
             <a:r>
               <a:rPr sz="4000">
                 <a:solidFill>
-                  <a:srgbClr val="000000"/>
+                  <a:srgbClr val="FFFFFF"/>
                 </a:solidFill>
                 <a:latin typeface="Arial"/>
                 <a:ea typeface="Arial"/>
                 <a:cs typeface="Arial"/>
               </a:rPr>
-              <a:t>Риски и меры: модель, шаблон, нагрузка</a:t>
+              <a:t>Следующие шаги после одобрения</a:t>
+            </a:r>
+          </a:p>
+        </p:txBody>
+      </p:sp>
+      <p:sp>
+        <p:nvSpPr>
+          <p:cNvPr id="3" name="body"/>
+          <p:cNvSpPr txBox="1"/>
+          <p:nvPr/>
+        </p:nvSpPr>
+        <p:spPr>
+          <a:xfrm>
+            <a:off x="658855" y="2380007"/>
+            <a:ext cx="5242438" cy="3262548"/>
+          </a:xfrm>
+          <a:prstGeom prst="rect">
+            <a:avLst/>
+          </a:prstGeom>
+          <a:noFill/>
+        </p:spPr>
+        <p:txBody>
+          <a:bodyPr wrap="square" lIns="76200" rIns="76200" tIns="50800" bIns="50800">
+            <a:spAutoFit/>
+          </a:bodyPr>
+          <a:lstStyle/>
+          <a:p>
+            <a:pPr algn="l">
+              <a:spcAft>
+                <a:spcPts val="300"/>
+              </a:spcAft>
+              <a:defRPr sz="2400">
+                <a:solidFill>
+                  <a:srgbClr val="FFFFFF"/>
+                </a:solidFill>
+                <a:latin typeface="Play"/>
+                <a:ea typeface="Play"/>
+                <a:cs typeface="Play"/>
+              </a:defRPr>
+            </a:pPr>
+            <a:r>
+              <a:rPr sz="2400">
+                <a:solidFill>
+                  <a:srgbClr val="FFFFFF"/>
+                </a:solidFill>
+                <a:latin typeface="Play"/>
+                <a:ea typeface="Play"/>
+                <a:cs typeface="Play"/>
+              </a:rPr>
+              <a:t>• После одобрения подключить 4 команды в Q3 2026</a:t>
+            </a:r>
+          </a:p>
+          <a:p>
+            <a:pPr algn="l">
+              <a:spcAft>
+                <a:spcPts val="300"/>
+              </a:spcAft>
+              <a:defRPr sz="2400">
+                <a:solidFill>
+                  <a:srgbClr val="FFFFFF"/>
+                </a:solidFill>
+                <a:latin typeface="Play"/>
+                <a:ea typeface="Play"/>
+                <a:cs typeface="Play"/>
+              </a:defRPr>
+            </a:pPr>
+            <a:r>
+              <a:rPr sz="2400">
+                <a:solidFill>
+                  <a:srgbClr val="FFFFFF"/>
+                </a:solidFill>
+                <a:latin typeface="Play"/>
+                <a:ea typeface="Play"/>
+                <a:cs typeface="Play"/>
+              </a:rPr>
+              <a:t>• В Q4 2026 обеспечить домен, HTTPS и доступ для всей компании</a:t>
+            </a:r>
+          </a:p>
+          <a:p>
+            <a:pPr algn="l">
+              <a:spcAft>
+                <a:spcPts val="300"/>
+              </a:spcAft>
+              <a:defRPr sz="2400">
+                <a:solidFill>
+                  <a:srgbClr val="FFFFFF"/>
+                </a:solidFill>
+                <a:latin typeface="Play"/>
+                <a:ea typeface="Play"/>
+                <a:cs typeface="Play"/>
+              </a:defRPr>
+            </a:pPr>
+            <a:r>
+              <a:rPr sz="2400">
+                <a:solidFill>
+                  <a:srgbClr val="FFFFFF"/>
+                </a:solidFill>
+                <a:latin typeface="Play"/>
+                <a:ea typeface="Play"/>
+                <a:cs typeface="Play"/>
+              </a:rPr>
+              <a:t>• В Q1 2027 добавить генерацию иллюстраций под стиль шаблона</a:t>
             </a:r>
           </a:p>
         </p:txBody>

--- a/samples/Шаблон_презентации_VK_Education__split.pptx
+++ b/samples/Шаблон_презентации_VK_Education__split.pptx
@@ -7566,7 +7566,7 @@
               <a:spcAft>
                 <a:spcPts val="300"/>
               </a:spcAft>
-              <a:defRPr sz="3200" b="0">
+              <a:defRPr sz="4000" b="0">
                 <a:solidFill>
                   <a:srgbClr val="000000"/>
                 </a:solidFill>
@@ -7576,7 +7576,7 @@
               </a:defRPr>
             </a:pPr>
             <a:r>
-              <a:rPr sz="3200" b="0">
+              <a:rPr sz="4000" b="0">
                 <a:solidFill>
                   <a:srgbClr val="000000"/>
                 </a:solidFill>
@@ -7584,7 +7584,7 @@
                 <a:ea typeface="Arial"/>
                 <a:cs typeface="Arial"/>
               </a:rPr>
-              <a:t>Защита инициативы: сервис автоматической вёрстки презентаций</a:t>
+              <a:t>Автоматическая вёрстка презентаций</a:t>
             </a:r>
           </a:p>
         </p:txBody>
@@ -7708,7 +7708,7 @@
               <a:spcAft>
                 <a:spcPts val="300"/>
               </a:spcAft>
-              <a:defRPr sz="1800">
+              <a:defRPr sz="2400">
                 <a:solidFill>
                   <a:srgbClr val="000000"/>
                 </a:solidFill>
@@ -7718,7 +7718,7 @@
               </a:defRPr>
             </a:pPr>
             <a:r>
-              <a:rPr sz="1800">
+              <a:rPr sz="2400">
                 <a:solidFill>
                   <a:srgbClr val="000000"/>
                 </a:solidFill>
@@ -7726,7 +7726,7 @@
                 <a:ea typeface="Play"/>
                 <a:cs typeface="Play"/>
               </a:rPr>
-              <a:t>• Отделы собирают презентации вручную, затрачивая 186 минут на 12-слайдовую колоду</a:t>
+              <a:t>• Сборка одной колоды 12 слайдов занимает 186 минут</a:t>
             </a:r>
           </a:p>
           <a:p>
@@ -7734,7 +7734,7 @@
               <a:spcAft>
                 <a:spcPts val="300"/>
               </a:spcAft>
-              <a:defRPr sz="1800">
+              <a:defRPr sz="2400">
                 <a:solidFill>
                   <a:srgbClr val="000000"/>
                 </a:solidFill>
@@ -7744,7 +7744,7 @@
               </a:defRPr>
             </a:pPr>
             <a:r>
-              <a:rPr sz="1800">
+              <a:rPr sz="2400">
                 <a:solidFill>
                   <a:srgbClr val="000000"/>
                 </a:solidFill>
@@ -7752,7 +7752,7 @@
                 <a:ea typeface="Play"/>
                 <a:cs typeface="Play"/>
               </a:rPr>
-              <a:t>• После ревью дизайнеров добавляется 74 минуты правок</a:t>
+              <a:t>• 74 минуты уходит на правки после ревью дизайнера</a:t>
             </a:r>
           </a:p>
           <a:p>
@@ -7760,7 +7760,7 @@
               <a:spcAft>
                 <a:spcPts val="300"/>
               </a:spcAft>
-              <a:defRPr sz="1800">
+              <a:defRPr sz="2400">
                 <a:solidFill>
                   <a:srgbClr val="000000"/>
                 </a:solidFill>
@@ -7770,7 +7770,7 @@
               </a:defRPr>
             </a:pPr>
             <a:r>
-              <a:rPr sz="1800">
+              <a:rPr sz="2400">
                 <a:solidFill>
                   <a:srgbClr val="000000"/>
                 </a:solidFill>
@@ -7778,7 +7778,7 @@
                 <a:ea typeface="Play"/>
                 <a:cs typeface="Play"/>
               </a:rPr>
-              <a:t>• 19 из 42 колод нарушают фирменный стиль: чужие гарнитуры и цвета</a:t>
+              <a:t>• 19 из 42 колод нарушают фирменный стиль</a:t>
             </a:r>
           </a:p>
         </p:txBody>
@@ -7809,7 +7809,7 @@
               <a:spcAft>
                 <a:spcPts val="300"/>
               </a:spcAft>
-              <a:defRPr sz="2400">
+              <a:defRPr sz="2800">
                 <a:solidFill>
                   <a:srgbClr val="000000"/>
                 </a:solidFill>
@@ -7819,7 +7819,7 @@
               </a:defRPr>
             </a:pPr>
             <a:r>
-              <a:rPr sz="2400">
+              <a:rPr sz="2800">
                 <a:solidFill>
                   <a:srgbClr val="000000"/>
                 </a:solidFill>
@@ -7827,7 +7827,7 @@
                 <a:ea typeface="Play"/>
                 <a:cs typeface="Play"/>
               </a:rPr>
-              <a:t>• Дизайнеры закрывают 11 запросов в неделю из 27 поступающих, ожидание 6 дней</a:t>
+              <a:t>• Дизайн-отдел из 4 человек закрывает 11 запросов в неделю из 27</a:t>
             </a:r>
           </a:p>
           <a:p>
@@ -7835,7 +7835,7 @@
               <a:spcAft>
                 <a:spcPts val="300"/>
               </a:spcAft>
-              <a:defRPr sz="2400">
+              <a:defRPr sz="2800">
                 <a:solidFill>
                   <a:srgbClr val="000000"/>
                 </a:solidFill>
@@ -7845,7 +7845,7 @@
               </a:defRPr>
             </a:pPr>
             <a:r>
-              <a:rPr sz="2400">
+              <a:rPr sz="2800">
                 <a:solidFill>
                   <a:srgbClr val="000000"/>
                 </a:solidFill>
@@ -7853,7 +7853,7 @@
                 <a:ea typeface="Play"/>
                 <a:cs typeface="Play"/>
               </a:rPr>
-              <a:t>• Время до первой версии колоды составляет 6 рабочих дней</a:t>
+              <a:t>• Средний срок ожидания в очереди — 6 рабочих дней</a:t>
             </a:r>
           </a:p>
         </p:txBody>
@@ -7934,141 +7934,14 @@
       </p:sp>
       <p:sp>
         <p:nvSpPr>
-          <p:cNvPr id="3" name="body"/>
-          <p:cNvSpPr txBox="1"/>
-          <p:nvPr/>
-        </p:nvSpPr>
-        <p:spPr>
-          <a:xfrm>
-            <a:off x="677387" y="1773204"/>
-            <a:ext cx="5245059" cy="4427593"/>
-          </a:xfrm>
-          <a:prstGeom prst="rect">
-            <a:avLst/>
-          </a:prstGeom>
-          <a:noFill/>
-        </p:spPr>
-        <p:txBody>
-          <a:bodyPr wrap="square" lIns="76200" rIns="76200" tIns="50800" bIns="50800">
-            <a:spAutoFit/>
-          </a:bodyPr>
-          <a:lstStyle/>
-          <a:p>
-            <a:pPr algn="l">
-              <a:spcAft>
-                <a:spcPts val="300"/>
-              </a:spcAft>
-              <a:defRPr sz="1800">
-                <a:solidFill>
-                  <a:srgbClr val="000000"/>
-                </a:solidFill>
-                <a:latin typeface="Play"/>
-                <a:ea typeface="Play"/>
-                <a:cs typeface="Play"/>
-              </a:defRPr>
-            </a:pPr>
-            <a:r>
-              <a:rPr sz="1800">
-                <a:solidFill>
-                  <a:srgbClr val="000000"/>
-                </a:solidFill>
-                <a:latin typeface="Play"/>
-                <a:ea typeface="Play"/>
-                <a:cs typeface="Play"/>
-              </a:rPr>
-              <a:t>• Сервис принимает pptx-шаблон, документы, таблицы, заметки.</a:t>
-            </a:r>
-          </a:p>
-          <a:p>
-            <a:pPr algn="l">
-              <a:spcAft>
-                <a:spcPts val="300"/>
-              </a:spcAft>
-              <a:defRPr sz="1800">
-                <a:solidFill>
-                  <a:srgbClr val="000000"/>
-                </a:solidFill>
-                <a:latin typeface="Play"/>
-                <a:ea typeface="Play"/>
-                <a:cs typeface="Play"/>
-              </a:defRPr>
-            </a:pPr>
-            <a:r>
-              <a:rPr sz="1800">
-                <a:solidFill>
-                  <a:srgbClr val="000000"/>
-                </a:solidFill>
-                <a:latin typeface="Play"/>
-                <a:ea typeface="Play"/>
-                <a:cs typeface="Play"/>
-              </a:rPr>
-              <a:t>• Шабл превращается:гарнитуры, шкала кеглей, палитра</a:t>
-            </a:r>
-          </a:p>
-          <a:p>
-            <a:pPr algn="l">
-              <a:spcAft>
-                <a:spcPts val="300"/>
-              </a:spcAft>
-              <a:defRPr sz="1800">
-                <a:solidFill>
-                  <a:srgbClr val="000000"/>
-                </a:solidFill>
-                <a:latin typeface="Play"/>
-                <a:ea typeface="Play"/>
-                <a:cs typeface="Play"/>
-              </a:defRPr>
-            </a:pPr>
-            <a:r>
-              <a:rPr sz="1800">
-                <a:solidFill>
-                  <a:srgbClr val="000000"/>
-                </a:solidFill>
-                <a:latin typeface="Play"/>
-                <a:ea typeface="Play"/>
-                <a:cs typeface="Play"/>
-              </a:rPr>
-              <a:t>• Бриф генерирует колоду, автоматическая вёрстка</a:t>
-            </a:r>
-          </a:p>
-          <a:p>
-            <a:pPr algn="l">
-              <a:spcAft>
-                <a:spcPts val="300"/>
-              </a:spcAft>
-              <a:defRPr sz="1800">
-                <a:solidFill>
-                  <a:srgbClr val="000000"/>
-                </a:solidFill>
-                <a:latin typeface="Play"/>
-                <a:ea typeface="Play"/>
-                <a:cs typeface="Play"/>
-              </a:defRPr>
-            </a:pPr>
-            <a:r>
-              <a:rPr sz="1800">
-                <a:solidFill>
-                  <a:srgbClr val="000000"/>
-                </a:solidFill>
-                <a:latin typeface="Play"/>
-                <a:ea typeface="Play"/>
-                <a:cs typeface="Play"/>
-              </a:rPr>
-              <a:t>• Экспорт в pptx, pdf, html; слайды редактируемы.</a:t>
-            </a:r>
-          </a:p>
-        </p:txBody>
-      </p:sp>
-      <p:sp>
-        <p:nvSpPr>
-          <p:cNvPr id="4" name="Pentagon 3"/>
+          <p:cNvPr id="3" name="Pentagon 2"/>
           <p:cNvSpPr/>
           <p:nvPr/>
         </p:nvSpPr>
         <p:spPr>
           <a:xfrm>
-            <a:off x="6288206" y="1835190"/>
-            <a:ext cx="5245059" cy="761545"/>
+            <a:off x="6288206" y="1824859"/>
+            <a:ext cx="5245059" cy="634621"/>
           </a:xfrm>
           <a:prstGeom prst="homePlate">
             <a:avLst/>
@@ -8117,21 +7990,21 @@
                 <a:ea typeface="Play"/>
                 <a:cs typeface="Play"/>
               </a:rPr>
-              <a:t>Шаблон</a:t>
+              <a:t>Загрузка шаблона</a:t>
             </a:r>
           </a:p>
         </p:txBody>
       </p:sp>
       <p:sp>
         <p:nvSpPr>
-          <p:cNvPr id="5" name="Chevron 4"/>
+          <p:cNvPr id="4" name="Chevron 3"/>
           <p:cNvSpPr/>
           <p:nvPr/>
         </p:nvSpPr>
         <p:spPr>
           <a:xfrm>
-            <a:off x="6288206" y="2720708"/>
-            <a:ext cx="5245059" cy="761545"/>
+            <a:off x="6288206" y="2562791"/>
+            <a:ext cx="5245059" cy="634621"/>
           </a:xfrm>
           <a:prstGeom prst="chevron">
             <a:avLst/>
@@ -8180,21 +8053,21 @@
                 <a:ea typeface="Play"/>
                 <a:cs typeface="Play"/>
               </a:rPr>
-              <a:t>План</a:t>
+              <a:t>Анализ дизайна</a:t>
             </a:r>
           </a:p>
         </p:txBody>
       </p:sp>
       <p:sp>
         <p:nvSpPr>
-          <p:cNvPr id="6" name="Chevron 5"/>
+          <p:cNvPr id="5" name="Chevron 4"/>
           <p:cNvSpPr/>
           <p:nvPr/>
         </p:nvSpPr>
         <p:spPr>
           <a:xfrm>
-            <a:off x="6288206" y="3606227"/>
-            <a:ext cx="5245059" cy="761545"/>
+            <a:off x="6288206" y="3300723"/>
+            <a:ext cx="5245059" cy="634621"/>
           </a:xfrm>
           <a:prstGeom prst="chevron">
             <a:avLst/>
@@ -8243,21 +8116,21 @@
                 <a:ea typeface="Play"/>
                 <a:cs typeface="Play"/>
               </a:rPr>
-              <a:t>Вёрстка</a:t>
+              <a:t>План колоды</a:t>
             </a:r>
           </a:p>
         </p:txBody>
       </p:sp>
       <p:sp>
         <p:nvSpPr>
-          <p:cNvPr id="7" name="Chevron 6"/>
+          <p:cNvPr id="6" name="Chevron 5"/>
           <p:cNvSpPr/>
           <p:nvPr/>
         </p:nvSpPr>
         <p:spPr>
           <a:xfrm>
-            <a:off x="6288206" y="4491746"/>
-            <a:ext cx="5245059" cy="761545"/>
+            <a:off x="6288206" y="4038655"/>
+            <a:ext cx="5245059" cy="634621"/>
           </a:xfrm>
           <a:prstGeom prst="chevron">
             <a:avLst/>
@@ -8306,7 +8179,70 @@
                 <a:ea typeface="Play"/>
                 <a:cs typeface="Play"/>
               </a:rPr>
-              <a:t>Аудит</a:t>
+              <a:t>Авто-верстка</a:t>
+            </a:r>
+          </a:p>
+        </p:txBody>
+      </p:sp>
+      <p:sp>
+        <p:nvSpPr>
+          <p:cNvPr id="7" name="Chevron 6"/>
+          <p:cNvSpPr/>
+          <p:nvPr/>
+        </p:nvSpPr>
+        <p:spPr>
+          <a:xfrm>
+            <a:off x="6288206" y="4776587"/>
+            <a:ext cx="5245059" cy="634621"/>
+          </a:xfrm>
+          <a:prstGeom prst="chevron">
+            <a:avLst/>
+          </a:prstGeom>
+          <a:solidFill>
+            <a:srgbClr val="0077FF"/>
+          </a:solidFill>
+          <a:ln>
+            <a:noFill/>
+          </a:ln>
+        </p:spPr>
+        <p:style>
+          <a:lnRef idx="1">
+            <a:schemeClr val="accent1"/>
+          </a:lnRef>
+          <a:fillRef idx="3">
+            <a:schemeClr val="accent1"/>
+          </a:fillRef>
+          <a:effectRef idx="2">
+            <a:schemeClr val="accent1"/>
+          </a:effectRef>
+          <a:fontRef idx="minor">
+            <a:schemeClr val="lt1"/>
+          </a:fontRef>
+        </p:style>
+        <p:txBody>
+          <a:bodyPr rtlCol="0" anchor="ctr" wrap="square" lIns="12700" rIns="12700" tIns="12700" bIns="12700"/>
+          <a:lstStyle/>
+          <a:p>
+            <a:pPr algn="ctr">
+              <a:defRPr sz="1400" b="0">
+                <a:solidFill>
+                  <a:srgbClr val="FFFFFF"/>
+                </a:solidFill>
+                <a:latin typeface="Play"/>
+                <a:ea typeface="Play"/>
+                <a:cs typeface="Play"/>
+              </a:defRPr>
+            </a:pPr>
+            <a:r>
+              <a:rPr sz="1400" b="0">
+                <a:solidFill>
+                  <a:srgbClr val="FFFFFF"/>
+                </a:solidFill>
+                <a:latin typeface="Play"/>
+                <a:ea typeface="Play"/>
+                <a:cs typeface="Play"/>
+              </a:rPr>
+              <a:t>Аудит качества</a:t>
             </a:r>
           </a:p>
         </p:txBody>
@@ -8319,8 +8255,8 @@
         </p:nvSpPr>
         <p:spPr>
           <a:xfrm>
-            <a:off x="6288206" y="5377264"/>
-            <a:ext cx="5245059" cy="761545"/>
+            <a:off x="6288206" y="5514520"/>
+            <a:ext cx="5245059" cy="634621"/>
           </a:xfrm>
           <a:prstGeom prst="chevron">
             <a:avLst/>
@@ -8511,7 +8447,7 @@
                 <a:ea typeface="Play"/>
                 <a:cs typeface="Play"/>
               </a:rPr>
-              <a:t>• Время сборки колоды сократилось с 186 до 4 минут</a:t>
+              <a:t>• Средняя сборка колоды 12 слайдов — 4 минуты вместо 186</a:t>
             </a:r>
           </a:p>
           <a:p>
@@ -8537,7 +8473,7 @@
                 <a:ea typeface="Play"/>
                 <a:cs typeface="Play"/>
               </a:rPr>
-              <a:t>• Первая версия готова за 1 день вместо 6 рабочих дней</a:t>
+              <a:t>• Время до первой версии сократилось с 6 рабочих дней до 1</a:t>
             </a:r>
           </a:p>
         </p:txBody>
@@ -8568,7 +8504,7 @@
               <a:spcAft>
                 <a:spcPts val="300"/>
               </a:spcAft>
-              <a:defRPr sz="2800">
+              <a:defRPr sz="3200">
                 <a:solidFill>
                   <a:srgbClr val="000000"/>
                 </a:solidFill>
@@ -8578,7 +8514,7 @@
               </a:defRPr>
             </a:pPr>
             <a:r>
-              <a:rPr sz="2800">
+              <a:rPr sz="3200">
                 <a:solidFill>
                   <a:srgbClr val="000000"/>
                 </a:solidFill>
@@ -8586,7 +8522,7 @@
                 <a:ea typeface="Play"/>
                 <a:cs typeface="Play"/>
               </a:rPr>
-              <a:t>• Нарушений фирменного стиля в пилоте 2 из 68 колод, исправлены автоматически</a:t>
+              <a:t>• Нарушений фирменного стиля в пилоте — 2 из 68 колод</a:t>
             </a:r>
           </a:p>
           <a:p>
@@ -8594,7 +8530,7 @@
               <a:spcAft>
                 <a:spcPts val="300"/>
               </a:spcAft>
-              <a:defRPr sz="2800">
+              <a:defRPr sz="3200">
                 <a:solidFill>
                   <a:srgbClr val="000000"/>
                 </a:solidFill>
@@ -8604,7 +8540,7 @@
               </a:defRPr>
             </a:pPr>
             <a:r>
-              <a:rPr sz="2800">
+              <a:rPr sz="3200">
                 <a:solidFill>
                   <a:srgbClr val="000000"/>
                 </a:solidFill>
@@ -8612,7 +8548,7 @@
                 <a:ea typeface="Play"/>
                 <a:cs typeface="Play"/>
               </a:rPr>
-              <a:t>• Дизайнеры закрыли 38 запросов вместо 11 в неделю, рутина ушла в сервис</a:t>
+              <a:t>• Дизайнеры закрыли 38 запросов за 6 недель вместо 11 в неделю</a:t>
             </a:r>
           </a:p>
         </p:txBody>
@@ -8735,7 +8671,7 @@
                 <a:ea typeface="Play"/>
                 <a:cs typeface="Play"/>
               </a:rPr>
-              <a:t>• Сервис на машине 2 vCPU / 2 ГБ RAM</a:t>
+              <a:t>• Сервис на 1 машине: 2 vCPU / 2 ГБ RAM</a:t>
             </a:r>
           </a:p>
           <a:p>
@@ -8761,7 +8697,7 @@
                 <a:ea typeface="Play"/>
                 <a:cs typeface="Play"/>
               </a:rPr>
-              <a:t>• Модель gpt-oss-20b подключена через OpenAI-протокол</a:t>
+              <a:t>• Инференс 6 недель: 1 400 руб.</a:t>
             </a:r>
           </a:p>
           <a:p>
@@ -8787,7 +8723,7 @@
                 <a:ea typeface="Play"/>
                 <a:cs typeface="Play"/>
               </a:rPr>
-              <a:t>• Стоимость инференса за 6 недель 1 400 руб.</a:t>
+              <a:t>• Подключение 4 команд: 3й квартал 2026</a:t>
             </a:r>
           </a:p>
           <a:p>
@@ -8813,7 +8749,33 @@
                 <a:ea typeface="Play"/>
                 <a:cs typeface="Play"/>
               </a:rPr>
-              <a:t>• Нагрузка выше 20 задач требует внешней очереди.</a:t>
+              <a:t>• Доступ всей компании: 4й квартал 2026</a:t>
+            </a:r>
+          </a:p>
+          <a:p>
+            <a:pPr algn="l">
+              <a:spcAft>
+                <a:spcPts val="300"/>
+              </a:spcAft>
+              <a:defRPr sz="1600">
+                <a:solidFill>
+                  <a:srgbClr val="000000"/>
+                </a:solidFill>
+                <a:latin typeface="Play"/>
+                <a:ea typeface="Play"/>
+                <a:cs typeface="Play"/>
+              </a:defRPr>
+            </a:pPr>
+            <a:r>
+              <a:rPr sz="1600">
+                <a:solidFill>
+                  <a:srgbClr val="000000"/>
+                </a:solidFill>
+                <a:latin typeface="Play"/>
+                <a:ea typeface="Play"/>
+                <a:cs typeface="Play"/>
+              </a:rPr>
+              <a:t>• Иллюстрации в стиле шаблона: 1й квартал 2027</a:t>
             </a:r>
           </a:p>
         </p:txBody>
@@ -8869,8 +8831,8 @@
         </p:nvSpPr>
         <p:spPr>
           <a:xfrm>
-            <a:off x="6747148" y="3679620"/>
-            <a:ext cx="393379" cy="393379"/>
+            <a:off x="6900129" y="3614057"/>
+            <a:ext cx="524505" cy="524505"/>
           </a:xfrm>
           <a:prstGeom prst="ellipse">
             <a:avLst/>
@@ -8913,7 +8875,7 @@
         <p:spPr>
           <a:xfrm>
             <a:off x="6288206" y="1773204"/>
-            <a:ext cx="1966897" cy="1682485"/>
+            <a:ext cx="2622529" cy="1682485"/>
           </a:xfrm>
           <a:prstGeom prst="rect">
             <a:avLst/>
@@ -8945,7 +8907,7 @@
                 <a:ea typeface="Play"/>
                 <a:cs typeface="Play"/>
               </a:rPr>
-              <a:t>Подключение 4 команд</a:t>
+              <a:t>Третий квартал 2026: подключение 4 команд</a:t>
             </a:r>
           </a:p>
         </p:txBody>
@@ -8958,8 +8920,8 @@
         </p:nvSpPr>
         <p:spPr>
           <a:xfrm>
-            <a:off x="8058413" y="3679620"/>
-            <a:ext cx="393379" cy="393379"/>
+            <a:off x="8648482" y="3614057"/>
+            <a:ext cx="524505" cy="524505"/>
           </a:xfrm>
           <a:prstGeom prst="ellipse">
             <a:avLst/>
@@ -9001,8 +8963,8 @@
         </p:nvSpPr>
         <p:spPr>
           <a:xfrm>
-            <a:off x="7271654" y="4203276"/>
-            <a:ext cx="1966897" cy="1682485"/>
+            <a:off x="7599470" y="4334402"/>
+            <a:ext cx="2622529" cy="1682485"/>
           </a:xfrm>
           <a:prstGeom prst="rect">
             <a:avLst/>
@@ -9034,7 +8996,7 @@
                 <a:ea typeface="Play"/>
                 <a:cs typeface="Play"/>
               </a:rPr>
-              <a:t>Домен и HTTPS</a:t>
+              <a:t>Четвёртый квартал 2026: доступ для всей компании</a:t>
             </a:r>
           </a:p>
         </p:txBody>
@@ -9047,8 +9009,8 @@
         </p:nvSpPr>
         <p:spPr>
           <a:xfrm>
-            <a:off x="9369678" y="3679620"/>
-            <a:ext cx="393379" cy="393379"/>
+            <a:off x="10396835" y="3614057"/>
+            <a:ext cx="524505" cy="524505"/>
           </a:xfrm>
           <a:prstGeom prst="ellipse">
             <a:avLst/>
@@ -9090,8 +9052,8 @@
         </p:nvSpPr>
         <p:spPr>
           <a:xfrm>
-            <a:off x="8582919" y="1773204"/>
-            <a:ext cx="1966897" cy="1682485"/>
+            <a:off x="8910735" y="1773204"/>
+            <a:ext cx="2622529" cy="1682485"/>
           </a:xfrm>
           <a:prstGeom prst="rect">
             <a:avLst/>
@@ -9123,96 +9085,7 @@
                 <a:ea typeface="Play"/>
                 <a:cs typeface="Play"/>
               </a:rPr>
-              <a:t>Доступ для всей компании</a:t>
-            </a:r>
-          </a:p>
-        </p:txBody>
-      </p:sp>
-      <p:sp>
-        <p:nvSpPr>
-          <p:cNvPr id="11" name="Oval 10"/>
-          <p:cNvSpPr/>
-          <p:nvPr/>
-        </p:nvSpPr>
-        <p:spPr>
-          <a:xfrm>
-            <a:off x="10680942" y="3679620"/>
-            <a:ext cx="393379" cy="393379"/>
-          </a:xfrm>
-          <a:prstGeom prst="ellipse">
-            <a:avLst/>
-          </a:prstGeom>
-          <a:solidFill>
-            <a:srgbClr val="0077FF"/>
-          </a:solidFill>
-          <a:ln>
-            <a:noFill/>
-          </a:ln>
-        </p:spPr>
-        <p:style>
-          <a:lnRef idx="1">
-            <a:schemeClr val="accent1"/>
-          </a:lnRef>
-          <a:fillRef idx="3">
-            <a:schemeClr val="accent1"/>
-          </a:fillRef>
-          <a:effectRef idx="2">
-            <a:schemeClr val="accent1"/>
-          </a:effectRef>
-          <a:fontRef idx="minor">
-            <a:schemeClr val="lt1"/>
-          </a:fontRef>
-        </p:style>
-        <p:txBody>
-          <a:bodyPr rtlCol="0" anchor="ctr"/>
-          <a:lstStyle/>
-          <a:p>
-            <a:pPr algn="ctr"/>
-          </a:p>
-        </p:txBody>
-      </p:sp>
-      <p:sp>
-        <p:nvSpPr>
-          <p:cNvPr id="12" name="TextBox 11"/>
-          <p:cNvSpPr txBox="1"/>
-          <p:nvPr/>
-        </p:nvSpPr>
-        <p:spPr>
-          <a:xfrm>
-            <a:off x="9566367" y="4203276"/>
-            <a:ext cx="1966897" cy="1682485"/>
-          </a:xfrm>
-          <a:prstGeom prst="rect">
-            <a:avLst/>
-          </a:prstGeom>
-          <a:noFill/>
-        </p:spPr>
-        <p:txBody>
-          <a:bodyPr wrap="square" lIns="12700" rIns="12700" tIns="12700" bIns="12700">
-            <a:spAutoFit/>
-          </a:bodyPr>
-          <a:lstStyle/>
-          <a:p>
-            <a:pPr algn="ctr">
-              <a:defRPr sz="1400" b="0">
-                <a:solidFill>
-                  <a:srgbClr val="000000"/>
-                </a:solidFill>
-                <a:latin typeface="Play"/>
-                <a:ea typeface="Play"/>
-                <a:cs typeface="Play"/>
-              </a:defRPr>
-            </a:pPr>
-            <a:r>
-              <a:rPr sz="1400" b="0">
-                <a:solidFill>
-                  <a:srgbClr val="000000"/>
-                </a:solidFill>
-                <a:latin typeface="Play"/>
-                <a:ea typeface="Play"/>
-                <a:cs typeface="Play"/>
-              </a:rPr>
-              <a:t>Генерация иллюстраций</a:t>
+              <a:t>Первый квартал 2027: генерация иллюстраций</a:t>
             </a:r>
           </a:p>
         </p:txBody>
@@ -9226,230 +9099,6 @@
 </file>
 
 <file path=ppt/slides/slide61.xml><?xml version="1.0" encoding="utf-8"?>
-<p:sld xmlns:a="http://schemas.openxmlformats.org/drawingml/2006/main" xmlns:p="http://schemas.openxmlformats.org/presentationml/2006/main" xmlns:r="http://schemas.openxmlformats.org/officeDocument/2006/relationships">
-  <p:cSld>
-    <p:bg>
-      <p:bgPr>
-        <a:solidFill>
-          <a:schemeClr val="lt2"/>
-        </a:solidFill>
-      </p:bgPr>
-    </p:bg>
-    <p:spTree>
-      <p:nvGrpSpPr>
-        <p:cNvPr id="1" name=""/>
-        <p:cNvGrpSpPr/>
-        <p:nvPr/>
-      </p:nvGrpSpPr>
-      <p:grpSpPr/>
-      <p:sp>
-        <p:nvSpPr>
-          <p:cNvPr id="2" name="title"/>
-          <p:cNvSpPr txBox="1"/>
-          <p:nvPr/>
-        </p:nvSpPr>
-        <p:spPr>
-          <a:xfrm>
-            <a:off x="677387" y="692177"/>
-            <a:ext cx="10855878" cy="822960"/>
-          </a:xfrm>
-          <a:prstGeom prst="rect">
-            <a:avLst/>
-          </a:prstGeom>
-          <a:noFill/>
-        </p:spPr>
-        <p:txBody>
-          <a:bodyPr wrap="square" lIns="76200" rIns="76200" tIns="50800" bIns="50800">
-            <a:spAutoFit/>
-          </a:bodyPr>
-          <a:lstStyle/>
-          <a:p>
-            <a:pPr algn="l">
-              <a:spcAft>
-                <a:spcPts val="300"/>
-              </a:spcAft>
-              <a:defRPr sz="4000">
-                <a:solidFill>
-                  <a:srgbClr val="000000"/>
-                </a:solidFill>
-                <a:latin typeface="Arial"/>
-                <a:ea typeface="Arial"/>
-                <a:cs typeface="Arial"/>
-              </a:defRPr>
-            </a:pPr>
-            <a:r>
-              <a:rPr sz="4000">
-                <a:solidFill>
-                  <a:srgbClr val="000000"/>
-                </a:solidFill>
-                <a:latin typeface="Arial"/>
-                <a:ea typeface="Arial"/>
-                <a:cs typeface="Arial"/>
-              </a:rPr>
-              <a:t>План пилота</a:t>
-            </a:r>
-          </a:p>
-        </p:txBody>
-      </p:sp>
-      <p:sp>
-        <p:nvSpPr>
-          <p:cNvPr id="3" name="body_left"/>
-          <p:cNvSpPr txBox="1"/>
-          <p:nvPr/>
-        </p:nvSpPr>
-        <p:spPr>
-          <a:xfrm>
-            <a:off x="677387" y="1773204"/>
-            <a:ext cx="5245059" cy="4427593"/>
-          </a:xfrm>
-          <a:prstGeom prst="rect">
-            <a:avLst/>
-          </a:prstGeom>
-          <a:noFill/>
-        </p:spPr>
-        <p:txBody>
-          <a:bodyPr wrap="square" lIns="76200" rIns="76200" tIns="50800" bIns="50800">
-            <a:spAutoFit/>
-          </a:bodyPr>
-          <a:lstStyle/>
-          <a:p>
-            <a:pPr algn="l">
-              <a:spcAft>
-                <a:spcPts val="300"/>
-              </a:spcAft>
-              <a:defRPr sz="2400">
-                <a:solidFill>
-                  <a:srgbClr val="000000"/>
-                </a:solidFill>
-                <a:latin typeface="Play"/>
-                <a:ea typeface="Play"/>
-                <a:cs typeface="Play"/>
-              </a:defRPr>
-            </a:pPr>
-            <a:r>
-              <a:rPr sz="2400">
-                <a:solidFill>
-                  <a:srgbClr val="000000"/>
-                </a:solidFill>
-                <a:latin typeface="Play"/>
-                <a:ea typeface="Play"/>
-                <a:cs typeface="Play"/>
-              </a:rPr>
-              <a:t>• Пилот длился 6 недель, включал 2 команды и 68 презентаций</a:t>
-            </a:r>
-          </a:p>
-          <a:p>
-            <a:pPr algn="l">
-              <a:spcAft>
-                <a:spcPts val="300"/>
-              </a:spcAft>
-              <a:defRPr sz="2400">
-                <a:solidFill>
-                  <a:srgbClr val="000000"/>
-                </a:solidFill>
-                <a:latin typeface="Play"/>
-                <a:ea typeface="Play"/>
-                <a:cs typeface="Play"/>
-              </a:defRPr>
-            </a:pPr>
-            <a:r>
-              <a:rPr sz="2400">
-                <a:solidFill>
-                  <a:srgbClr val="000000"/>
-                </a:solidFill>
-                <a:latin typeface="Play"/>
-                <a:ea typeface="Play"/>
-                <a:cs typeface="Play"/>
-              </a:rPr>
-              <a:t>• Средняя сборка колоды 4 минуты вместо 186, первая версия 1 день вместо 6</a:t>
-            </a:r>
-          </a:p>
-        </p:txBody>
-      </p:sp>
-      <p:sp>
-        <p:nvSpPr>
-          <p:cNvPr id="4" name="body_right"/>
-          <p:cNvSpPr txBox="1"/>
-          <p:nvPr/>
-        </p:nvSpPr>
-        <p:spPr>
-          <a:xfrm>
-            <a:off x="6288206" y="1773204"/>
-            <a:ext cx="5245059" cy="4427593"/>
-          </a:xfrm>
-          <a:prstGeom prst="rect">
-            <a:avLst/>
-          </a:prstGeom>
-          <a:noFill/>
-        </p:spPr>
-        <p:txBody>
-          <a:bodyPr wrap="square" lIns="76200" rIns="76200" tIns="50800" bIns="50800">
-            <a:spAutoFit/>
-          </a:bodyPr>
-          <a:lstStyle/>
-          <a:p>
-            <a:pPr algn="l">
-              <a:spcAft>
-                <a:spcPts val="300"/>
-              </a:spcAft>
-              <a:defRPr sz="2400">
-                <a:solidFill>
-                  <a:srgbClr val="000000"/>
-                </a:solidFill>
-                <a:latin typeface="Play"/>
-                <a:ea typeface="Play"/>
-                <a:cs typeface="Play"/>
-              </a:defRPr>
-            </a:pPr>
-            <a:r>
-              <a:rPr sz="2400">
-                <a:solidFill>
-                  <a:srgbClr val="000000"/>
-                </a:solidFill>
-                <a:latin typeface="Play"/>
-                <a:ea typeface="Play"/>
-                <a:cs typeface="Play"/>
-              </a:rPr>
-              <a:t>• Нарушений стиля 2 из 68 колод, обе исправлены автоматическими правками</a:t>
-            </a:r>
-          </a:p>
-          <a:p>
-            <a:pPr algn="l">
-              <a:spcAft>
-                <a:spcPts val="300"/>
-              </a:spcAft>
-              <a:defRPr sz="2400">
-                <a:solidFill>
-                  <a:srgbClr val="000000"/>
-                </a:solidFill>
-                <a:latin typeface="Play"/>
-                <a:ea typeface="Play"/>
-                <a:cs typeface="Play"/>
-              </a:defRPr>
-            </a:pPr>
-            <a:r>
-              <a:rPr sz="2400">
-                <a:solidFill>
-                  <a:srgbClr val="000000"/>
-                </a:solidFill>
-                <a:latin typeface="Play"/>
-                <a:ea typeface="Play"/>
-                <a:cs typeface="Play"/>
-              </a:rPr>
-              <a:t>• Дизайнеры закрыли 38 запросов вместо 11 в неделю, рутина ушла в сервис</a:t>
-            </a:r>
-          </a:p>
-        </p:txBody>
-      </p:sp>
-    </p:spTree>
-  </p:cSld>
-  <p:clrMapOvr>
-    <a:masterClrMapping/>
-  </p:clrMapOvr>
-</p:sld>
-</file>
-
-<file path=ppt/slides/slide62.xml><?xml version="1.0" encoding="utf-8"?>
 <p:sld xmlns:a="http://schemas.openxmlformats.org/drawingml/2006/main" xmlns:p="http://schemas.openxmlformats.org/presentationml/2006/main" xmlns:r="http://schemas.openxmlformats.org/officeDocument/2006/relationships">
   <p:cSld>
     <p:bg>
@@ -9567,112 +9216,438 @@
                 <a:ea typeface="Arial"/>
                 <a:cs typeface="Arial"/>
               </a:rPr>
-              <a:t>Что мы просим решить</a:t>
+              <a:t>План пилота</a:t>
             </a:r>
           </a:p>
         </p:txBody>
       </p:sp>
-      <p:sp>
-        <p:nvSpPr>
-          <p:cNvPr id="797" name="body"/>
-          <p:cNvSpPr txBox="1"/>
+      <p:graphicFrame>
+        <p:nvGraphicFramePr>
+          <p:cNvPr id="797" name="Table 796"/>
+          <p:cNvGraphicFramePr>
+            <a:graphicFrameLocks noGrp="1"/>
+          </p:cNvGraphicFramePr>
           <p:nvPr/>
-        </p:nvSpPr>
-        <p:spPr>
-          <a:xfrm>
-            <a:off x="677387" y="2926618"/>
-            <a:ext cx="10855878" cy="1950720"/>
-          </a:xfrm>
-          <a:prstGeom prst="rect">
-            <a:avLst/>
-          </a:prstGeom>
-          <a:noFill/>
-        </p:spPr>
-        <p:txBody>
-          <a:bodyPr wrap="square" lIns="76200" rIns="76200" tIns="50800" bIns="50800">
-            <a:spAutoFit/>
-          </a:bodyPr>
-          <a:lstStyle/>
-          <a:p>
-            <a:pPr algn="l">
-              <a:spcAft>
-                <a:spcPts val="300"/>
-              </a:spcAft>
-              <a:defRPr sz="2800">
-                <a:solidFill>
-                  <a:srgbClr val="000000"/>
-                </a:solidFill>
-                <a:latin typeface="Play"/>
-                <a:ea typeface="Play"/>
-                <a:cs typeface="Play"/>
-              </a:defRPr>
-            </a:pPr>
-            <a:r>
-              <a:rPr sz="2800">
-                <a:solidFill>
-                  <a:srgbClr val="000000"/>
-                </a:solidFill>
-                <a:latin typeface="Play"/>
-                <a:ea typeface="Play"/>
-                <a:cs typeface="Play"/>
-              </a:rPr>
-              <a:t>• Одобрить запуск сервиса на всю компанию</a:t>
-            </a:r>
-          </a:p>
-          <a:p>
-            <a:pPr algn="l">
-              <a:spcAft>
-                <a:spcPts val="300"/>
-              </a:spcAft>
-              <a:defRPr sz="2800">
-                <a:solidFill>
-                  <a:srgbClr val="000000"/>
-                </a:solidFill>
-                <a:latin typeface="Play"/>
-                <a:ea typeface="Play"/>
-                <a:cs typeface="Play"/>
-              </a:defRPr>
-            </a:pPr>
-            <a:r>
-              <a:rPr sz="2800">
-                <a:solidFill>
-                  <a:srgbClr val="000000"/>
-                </a:solidFill>
-                <a:latin typeface="Play"/>
-                <a:ea typeface="Play"/>
-                <a:cs typeface="Play"/>
-              </a:rPr>
-              <a:t>• Интеграция с корпоративным хранилищем документов</a:t>
-            </a:r>
-          </a:p>
-          <a:p>
-            <a:pPr algn="l">
-              <a:spcAft>
-                <a:spcPts val="300"/>
-              </a:spcAft>
-              <a:defRPr sz="2800">
-                <a:solidFill>
-                  <a:srgbClr val="000000"/>
-                </a:solidFill>
-                <a:latin typeface="Play"/>
-                <a:ea typeface="Play"/>
-                <a:cs typeface="Play"/>
-              </a:defRPr>
-            </a:pPr>
-            <a:r>
-              <a:rPr sz="2800">
-                <a:solidFill>
-                  <a:srgbClr val="000000"/>
-                </a:solidFill>
-                <a:latin typeface="Play"/>
-                <a:ea typeface="Play"/>
-                <a:cs typeface="Play"/>
-              </a:rPr>
-              <a:t>• Обеспечить поддержку очереди для нагрузки более 20 задач</a:t>
-            </a:r>
-          </a:p>
-        </p:txBody>
-      </p:sp>
+        </p:nvGraphicFramePr>
+        <p:xfrm>
+          <a:off x="6288206" y="2200937"/>
+          <a:ext cx="5245059" cy="4127761"/>
+        </p:xfrm>
+        <a:graphic>
+          <a:graphicData uri="http://schemas.openxmlformats.org/drawingml/2006/table">
+            <a:tbl>
+              <a:tblPr firstRow="1" bandRow="1">
+                <a:tableStyleId>{5C22544A-7EE6-4342-B048-85BDC9FD1C3A}</a:tableStyleId>
+              </a:tblPr>
+              <a:tblGrid>
+                <a:gridCol w="1748353"/>
+                <a:gridCol w="1748353"/>
+                <a:gridCol w="1748353"/>
+              </a:tblGrid>
+              <a:tr h="825552">
+                <a:tc>
+                  <a:txBody>
+                    <a:bodyPr/>
+                    <a:lstStyle/>
+                    <a:p>
+                      <a:pPr>
+                        <a:defRPr sz="1300" b="1">
+                          <a:solidFill>
+                            <a:srgbClr val="FFFFFF"/>
+                          </a:solidFill>
+                          <a:latin typeface="Play"/>
+                          <a:ea typeface="Play"/>
+                          <a:cs typeface="Play"/>
+                        </a:defRPr>
+                      </a:pPr>
+                      <a:r>
+                        <a:t>Метрика</a:t>
+                      </a:r>
+                    </a:p>
+                  </a:txBody>
+                  <a:tcPr>
+                    <a:solidFill>
+                      <a:srgbClr val="0077FF"/>
+                    </a:solidFill>
+                  </a:tcPr>
+                </a:tc>
+                <a:tc>
+                  <a:txBody>
+                    <a:bodyPr/>
+                    <a:lstStyle/>
+                    <a:p>
+                      <a:pPr>
+                        <a:defRPr sz="1300" b="1">
+                          <a:solidFill>
+                            <a:srgbClr val="FFFFFF"/>
+                          </a:solidFill>
+                          <a:latin typeface="Play"/>
+                          <a:ea typeface="Play"/>
+                          <a:cs typeface="Play"/>
+                        </a:defRPr>
+                      </a:pPr>
+                      <a:r>
+                        <a:t>До</a:t>
+                      </a:r>
+                    </a:p>
+                  </a:txBody>
+                  <a:tcPr>
+                    <a:solidFill>
+                      <a:srgbClr val="0077FF"/>
+                    </a:solidFill>
+                  </a:tcPr>
+                </a:tc>
+                <a:tc>
+                  <a:txBody>
+                    <a:bodyPr/>
+                    <a:lstStyle/>
+                    <a:p>
+                      <a:pPr>
+                        <a:defRPr sz="1300" b="1">
+                          <a:solidFill>
+                            <a:srgbClr val="FFFFFF"/>
+                          </a:solidFill>
+                          <a:latin typeface="Play"/>
+                          <a:ea typeface="Play"/>
+                          <a:cs typeface="Play"/>
+                        </a:defRPr>
+                      </a:pPr>
+                      <a:r>
+                        <a:t>После</a:t>
+                      </a:r>
+                    </a:p>
+                  </a:txBody>
+                  <a:tcPr>
+                    <a:solidFill>
+                      <a:srgbClr val="0077FF"/>
+                    </a:solidFill>
+                  </a:tcPr>
+                </a:tc>
+              </a:tr>
+              <a:tr h="825552">
+                <a:tc>
+                  <a:txBody>
+                    <a:bodyPr/>
+                    <a:lstStyle/>
+                    <a:p>
+                      <a:pPr>
+                        <a:defRPr sz="1300" b="0">
+                          <a:solidFill>
+                            <a:srgbClr val="000000"/>
+                          </a:solidFill>
+                          <a:latin typeface="Play"/>
+                          <a:ea typeface="Play"/>
+                          <a:cs typeface="Play"/>
+                        </a:defRPr>
+                      </a:pPr>
+                      <a:r>
+                        <a:t>Время сборки (мин)</a:t>
+                      </a:r>
+                    </a:p>
+                  </a:txBody>
+                  <a:tcPr>
+                    <a:solidFill>
+                      <a:srgbClr val="FFFFFF"/>
+                    </a:solidFill>
+                  </a:tcPr>
+                </a:tc>
+                <a:tc>
+                  <a:txBody>
+                    <a:bodyPr/>
+                    <a:lstStyle/>
+                    <a:p>
+                      <a:pPr>
+                        <a:defRPr sz="1300" b="0">
+                          <a:solidFill>
+                            <a:srgbClr val="000000"/>
+                          </a:solidFill>
+                          <a:latin typeface="Play"/>
+                          <a:ea typeface="Play"/>
+                          <a:cs typeface="Play"/>
+                        </a:defRPr>
+                      </a:pPr>
+                      <a:r>
+                        <a:t>186</a:t>
+                      </a:r>
+                    </a:p>
+                  </a:txBody>
+                  <a:tcPr>
+                    <a:solidFill>
+                      <a:srgbClr val="FFFFFF"/>
+                    </a:solidFill>
+                  </a:tcPr>
+                </a:tc>
+                <a:tc>
+                  <a:txBody>
+                    <a:bodyPr/>
+                    <a:lstStyle/>
+                    <a:p>
+                      <a:pPr>
+                        <a:defRPr sz="1300" b="0">
+                          <a:solidFill>
+                            <a:srgbClr val="000000"/>
+                          </a:solidFill>
+                          <a:latin typeface="Play"/>
+                          <a:ea typeface="Play"/>
+                          <a:cs typeface="Play"/>
+                        </a:defRPr>
+                      </a:pPr>
+                      <a:r>
+                        <a:t>4</a:t>
+                      </a:r>
+                    </a:p>
+                  </a:txBody>
+                  <a:tcPr>
+                    <a:solidFill>
+                      <a:srgbClr val="FFFFFF"/>
+                    </a:solidFill>
+                  </a:tcPr>
+                </a:tc>
+              </a:tr>
+              <a:tr h="825552">
+                <a:tc>
+                  <a:txBody>
+                    <a:bodyPr/>
+                    <a:lstStyle/>
+                    <a:p>
+                      <a:pPr>
+                        <a:defRPr sz="1300" b="0">
+                          <a:solidFill>
+                            <a:srgbClr val="000000"/>
+                          </a:solidFill>
+                          <a:latin typeface="Play"/>
+                          <a:ea typeface="Play"/>
+                          <a:cs typeface="Play"/>
+                        </a:defRPr>
+                      </a:pPr>
+                      <a:r>
+                        <a:t>Время первой версии (дней)</a:t>
+                      </a:r>
+                    </a:p>
+                  </a:txBody>
+                  <a:tcPr>
+                    <a:solidFill>
+                      <a:srgbClr val="FFFFFF"/>
+                    </a:solidFill>
+                  </a:tcPr>
+                </a:tc>
+                <a:tc>
+                  <a:txBody>
+                    <a:bodyPr/>
+                    <a:lstStyle/>
+                    <a:p>
+                      <a:pPr>
+                        <a:defRPr sz="1300" b="0">
+                          <a:solidFill>
+                            <a:srgbClr val="000000"/>
+                          </a:solidFill>
+                          <a:latin typeface="Play"/>
+                          <a:ea typeface="Play"/>
+                          <a:cs typeface="Play"/>
+                        </a:defRPr>
+                      </a:pPr>
+                      <a:r>
+                        <a:t>6</a:t>
+                      </a:r>
+                    </a:p>
+                  </a:txBody>
+                  <a:tcPr>
+                    <a:solidFill>
+                      <a:srgbClr val="FFFFFF"/>
+                    </a:solidFill>
+                  </a:tcPr>
+                </a:tc>
+                <a:tc>
+                  <a:txBody>
+                    <a:bodyPr/>
+                    <a:lstStyle/>
+                    <a:p>
+                      <a:pPr>
+                        <a:defRPr sz="1300" b="0">
+                          <a:solidFill>
+                            <a:srgbClr val="000000"/>
+                          </a:solidFill>
+                          <a:latin typeface="Play"/>
+                          <a:ea typeface="Play"/>
+                          <a:cs typeface="Play"/>
+                        </a:defRPr>
+                      </a:pPr>
+                      <a:r>
+                        <a:t>1</a:t>
+                      </a:r>
+                    </a:p>
+                  </a:txBody>
+                  <a:tcPr>
+                    <a:solidFill>
+                      <a:srgbClr val="FFFFFF"/>
+                    </a:solidFill>
+                  </a:tcPr>
+                </a:tc>
+              </a:tr>
+              <a:tr h="825552">
+                <a:tc>
+                  <a:txBody>
+                    <a:bodyPr/>
+                    <a:lstStyle/>
+                    <a:p>
+                      <a:pPr>
+                        <a:defRPr sz="1300" b="0">
+                          <a:solidFill>
+                            <a:srgbClr val="000000"/>
+                          </a:solidFill>
+                          <a:latin typeface="Play"/>
+                          <a:ea typeface="Play"/>
+                          <a:cs typeface="Play"/>
+                        </a:defRPr>
+                      </a:pPr>
+                      <a:r>
+                        <a:t>Нарушения стиля</a:t>
+                      </a:r>
+                    </a:p>
+                  </a:txBody>
+                  <a:tcPr>
+                    <a:solidFill>
+                      <a:srgbClr val="FFFFFF"/>
+                    </a:solidFill>
+                  </a:tcPr>
+                </a:tc>
+                <a:tc>
+                  <a:txBody>
+                    <a:bodyPr/>
+                    <a:lstStyle/>
+                    <a:p>
+                      <a:pPr>
+                        <a:defRPr sz="1300" b="0">
+                          <a:solidFill>
+                            <a:srgbClr val="000000"/>
+                          </a:solidFill>
+                          <a:latin typeface="Play"/>
+                          <a:ea typeface="Play"/>
+                          <a:cs typeface="Play"/>
+                        </a:defRPr>
+                      </a:pPr>
+                      <a:r>
+                        <a:t>19</a:t>
+                      </a:r>
+                    </a:p>
+                  </a:txBody>
+                  <a:tcPr>
+                    <a:solidFill>
+                      <a:srgbClr val="FFFFFF"/>
+                    </a:solidFill>
+                  </a:tcPr>
+                </a:tc>
+                <a:tc>
+                  <a:txBody>
+                    <a:bodyPr/>
+                    <a:lstStyle/>
+                    <a:p>
+                      <a:pPr>
+                        <a:defRPr sz="1300" b="0">
+                          <a:solidFill>
+                            <a:srgbClr val="000000"/>
+                          </a:solidFill>
+                          <a:latin typeface="Play"/>
+                          <a:ea typeface="Play"/>
+                          <a:cs typeface="Play"/>
+                        </a:defRPr>
+                      </a:pPr>
+                      <a:r>
+                        <a:t>2</a:t>
+                      </a:r>
+                    </a:p>
+                  </a:txBody>
+                  <a:tcPr>
+                    <a:solidFill>
+                      <a:srgbClr val="FFFFFF"/>
+                    </a:solidFill>
+                  </a:tcPr>
+                </a:tc>
+              </a:tr>
+              <a:tr h="825553">
+                <a:tc>
+                  <a:txBody>
+                    <a:bodyPr/>
+                    <a:lstStyle/>
+                    <a:p>
+                      <a:pPr>
+                        <a:defRPr sz="1300" b="0">
+                          <a:solidFill>
+                            <a:srgbClr val="000000"/>
+                          </a:solidFill>
+                          <a:latin typeface="Play"/>
+                          <a:ea typeface="Play"/>
+                          <a:cs typeface="Play"/>
+                        </a:defRPr>
+                      </a:pPr>
+                      <a:r>
+                        <a:t>Запросы закрыты в неделю</a:t>
+                      </a:r>
+                    </a:p>
+                  </a:txBody>
+                  <a:tcPr>
+                    <a:solidFill>
+                      <a:srgbClr val="FFFFFF"/>
+                    </a:solidFill>
+                  </a:tcPr>
+                </a:tc>
+                <a:tc>
+                  <a:txBody>
+                    <a:bodyPr/>
+                    <a:lstStyle/>
+                    <a:p>
+                      <a:pPr>
+                        <a:defRPr sz="1300" b="0">
+                          <a:solidFill>
+                            <a:srgbClr val="000000"/>
+                          </a:solidFill>
+                          <a:latin typeface="Play"/>
+                          <a:ea typeface="Play"/>
+                          <a:cs typeface="Play"/>
+                        </a:defRPr>
+                      </a:pPr>
+                      <a:r>
+                        <a:t>11</a:t>
+                      </a:r>
+                    </a:p>
+                  </a:txBody>
+                  <a:tcPr>
+                    <a:solidFill>
+                      <a:srgbClr val="FFFFFF"/>
+                    </a:solidFill>
+                  </a:tcPr>
+                </a:tc>
+                <a:tc>
+                  <a:txBody>
+                    <a:bodyPr/>
+                    <a:lstStyle/>
+                    <a:p>
+                      <a:pPr>
+                        <a:defRPr sz="1300" b="0">
+                          <a:solidFill>
+                            <a:srgbClr val="000000"/>
+                          </a:solidFill>
+                          <a:latin typeface="Play"/>
+                          <a:ea typeface="Play"/>
+                          <a:cs typeface="Play"/>
+                        </a:defRPr>
+                      </a:pPr>
+                      <a:r>
+                        <a:t>38</a:t>
+                      </a:r>
+                    </a:p>
+                  </a:txBody>
+                  <a:tcPr>
+                    <a:solidFill>
+                      <a:srgbClr val="FFFFFF"/>
+                    </a:solidFill>
+                  </a:tcPr>
+                </a:tc>
+              </a:tr>
+            </a:tbl>
+          </a:graphicData>
+        </a:graphic>
+      </p:graphicFrame>
     </p:spTree>
   </p:cSld>
   <p:clrMapOvr>
@@ -9681,7 +9656,7 @@
 </p:sld>
 </file>
 
-<file path=ppt/slides/slide63.xml><?xml version="1.0" encoding="utf-8"?>
+<file path=ppt/slides/slide62.xml><?xml version="1.0" encoding="utf-8"?>
 <p:sld xmlns:a="http://schemas.openxmlformats.org/drawingml/2006/main" xmlns:p="http://schemas.openxmlformats.org/presentationml/2006/main" xmlns:r="http://schemas.openxmlformats.org/officeDocument/2006/relationships">
   <p:cSld>
     <p:bg>
@@ -9799,7 +9774,7 @@
                 <a:ea typeface="Arial"/>
                 <a:cs typeface="Arial"/>
               </a:rPr>
-              <a:t>Риски</a:t>
+              <a:t>Что мы просим решить</a:t>
             </a:r>
           </a:p>
         </p:txBody>
@@ -9812,8 +9787,8 @@
         </p:nvSpPr>
         <p:spPr>
           <a:xfrm>
-            <a:off x="677387" y="3014671"/>
-            <a:ext cx="10855878" cy="1686560"/>
+            <a:off x="677387" y="2200937"/>
+            <a:ext cx="10855878" cy="4127761"/>
           </a:xfrm>
           <a:prstGeom prst="rect">
             <a:avLst/>
@@ -9830,7 +9805,7 @@
               <a:spcAft>
                 <a:spcPts val="300"/>
               </a:spcAft>
-              <a:defRPr sz="2400">
+              <a:defRPr sz="2800">
                 <a:solidFill>
                   <a:srgbClr val="000000"/>
                 </a:solidFill>
@@ -9840,7 +9815,7 @@
               </a:defRPr>
             </a:pPr>
             <a:r>
-              <a:rPr sz="2400">
+              <a:rPr sz="2800">
                 <a:solidFill>
                   <a:srgbClr val="000000"/>
                 </a:solidFill>
@@ -9848,7 +9823,7 @@
                 <a:ea typeface="Play"/>
                 <a:cs typeface="Play"/>
               </a:rPr>
-              <a:t>• Модель может выдумать цифры, которые отсутствуют в материалах</a:t>
+              <a:t>• Запуск сервиса на всю компанию в четвертом квартале 2026</a:t>
             </a:r>
           </a:p>
           <a:p>
@@ -9856,7 +9831,7 @@
               <a:spcAft>
                 <a:spcPts val="300"/>
               </a:spcAft>
-              <a:defRPr sz="2400">
+              <a:defRPr sz="2800">
                 <a:solidFill>
                   <a:srgbClr val="000000"/>
                 </a:solidFill>
@@ -9866,7 +9841,7 @@
               </a:defRPr>
             </a:pPr>
             <a:r>
-              <a:rPr sz="2400">
+              <a:rPr sz="2800">
                 <a:solidFill>
                   <a:srgbClr val="000000"/>
                 </a:solidFill>
@@ -9874,7 +9849,7 @@
                 <a:ea typeface="Play"/>
                 <a:cs typeface="Play"/>
               </a:rPr>
-              <a:t>• Неполный шаблон приводит к ошибкам, сервис использует рабочую область</a:t>
+              <a:t>• Интеграция с хранилищем документов в четвертом квартале 2026</a:t>
             </a:r>
           </a:p>
           <a:p>
@@ -9882,7 +9857,7 @@
               <a:spcAft>
                 <a:spcPts val="300"/>
               </a:spcAft>
-              <a:defRPr sz="2400">
+              <a:defRPr sz="2800">
                 <a:solidFill>
                   <a:srgbClr val="000000"/>
                 </a:solidFill>
@@ -9892,7 +9867,7 @@
               </a:defRPr>
             </a:pPr>
             <a:r>
-              <a:rPr sz="2400">
+              <a:rPr sz="2800">
                 <a:solidFill>
                   <a:srgbClr val="000000"/>
                 </a:solidFill>
@@ -9900,7 +9875,7 @@
                 <a:ea typeface="Play"/>
                 <a:cs typeface="Play"/>
               </a:rPr>
-              <a:t>• Нагрузка выше 20 задач требует внешней очереди</a:t>
+              <a:t>• Подключение 4 команд в третьем квартале 2026</a:t>
             </a:r>
           </a:p>
         </p:txBody>
@@ -9913,7 +9888,7 @@
 </p:sld>
 </file>
 
-<file path=ppt/slides/slide64.xml><?xml version="1.0" encoding="utf-8"?>
+<file path=ppt/slides/slide63.xml><?xml version="1.0" encoding="utf-8"?>
 <p:sld xmlns:a="http://schemas.openxmlformats.org/drawingml/2006/main" xmlns:p="http://schemas.openxmlformats.org/presentationml/2006/main" xmlns:r="http://schemas.openxmlformats.org/officeDocument/2006/relationships">
   <p:cSld>
     <p:bg>
@@ -10031,7 +10006,7 @@
                 <a:ea typeface="Arial"/>
                 <a:cs typeface="Arial"/>
               </a:rPr>
-              <a:t>Вопросы к руководству</a:t>
+              <a:t>Риски</a:t>
             </a:r>
           </a:p>
         </p:txBody>
@@ -10044,8 +10019,8 @@
         </p:nvSpPr>
         <p:spPr>
           <a:xfrm>
-            <a:off x="677387" y="2926618"/>
-            <a:ext cx="10855878" cy="1950720"/>
+            <a:off x="677387" y="3080711"/>
+            <a:ext cx="10855878" cy="1488440"/>
           </a:xfrm>
           <a:prstGeom prst="rect">
             <a:avLst/>
@@ -10080,7 +10055,7 @@
                 <a:ea typeface="Play"/>
                 <a:cs typeface="Play"/>
               </a:rPr>
-              <a:t>• Какие ресурсы нужны для масштабирования сервиса</a:t>
+              <a:t>• Модель может выдумать цифры, аудит проверяет</a:t>
             </a:r>
           </a:p>
           <a:p>
@@ -10106,7 +10081,7 @@
                 <a:ea typeface="Play"/>
                 <a:cs typeface="Play"/>
               </a:rPr>
-              <a:t>• Как обеспечить качество и проверку данных</a:t>
+              <a:t>• Неизвестный шаблон может быть плохо сделан</a:t>
             </a:r>
           </a:p>
           <a:p>
@@ -10132,7 +10107,231 @@
                 <a:ea typeface="Play"/>
                 <a:cs typeface="Play"/>
               </a:rPr>
-              <a:t>• Как быстро интегрировать сервис в существующие процессы</a:t>
+              <a:t>• Нагрузка выше 20 задач требует внешней очереди</a:t>
+            </a:r>
+          </a:p>
+        </p:txBody>
+      </p:sp>
+    </p:spTree>
+  </p:cSld>
+  <p:clrMapOvr>
+    <a:masterClrMapping/>
+  </p:clrMapOvr>
+</p:sld>
+</file>
+
+<file path=ppt/slides/slide64.xml><?xml version="1.0" encoding="utf-8"?>
+<p:sld xmlns:a="http://schemas.openxmlformats.org/drawingml/2006/main" xmlns:p="http://schemas.openxmlformats.org/presentationml/2006/main" xmlns:r="http://schemas.openxmlformats.org/officeDocument/2006/relationships">
+  <p:cSld>
+    <p:bg>
+      <p:bgPr>
+        <a:solidFill>
+          <a:schemeClr val="lt2"/>
+        </a:solidFill>
+      </p:bgPr>
+    </p:bg>
+    <p:spTree>
+      <p:nvGrpSpPr>
+        <p:cNvPr id="1" name=""/>
+        <p:cNvGrpSpPr/>
+        <p:nvPr/>
+      </p:nvGrpSpPr>
+      <p:grpSpPr/>
+      <p:sp>
+        <p:nvSpPr>
+          <p:cNvPr id="2" name="title"/>
+          <p:cNvSpPr txBox="1"/>
+          <p:nvPr/>
+        </p:nvSpPr>
+        <p:spPr>
+          <a:xfrm>
+            <a:off x="677387" y="692177"/>
+            <a:ext cx="10855878" cy="822960"/>
+          </a:xfrm>
+          <a:prstGeom prst="rect">
+            <a:avLst/>
+          </a:prstGeom>
+          <a:noFill/>
+        </p:spPr>
+        <p:txBody>
+          <a:bodyPr wrap="square" lIns="76200" rIns="76200" tIns="50800" bIns="50800">
+            <a:spAutoFit/>
+          </a:bodyPr>
+          <a:lstStyle/>
+          <a:p>
+            <a:pPr algn="l">
+              <a:spcAft>
+                <a:spcPts val="300"/>
+              </a:spcAft>
+              <a:defRPr sz="4000">
+                <a:solidFill>
+                  <a:srgbClr val="000000"/>
+                </a:solidFill>
+                <a:latin typeface="Arial"/>
+                <a:ea typeface="Arial"/>
+                <a:cs typeface="Arial"/>
+              </a:defRPr>
+            </a:pPr>
+            <a:r>
+              <a:rPr sz="4000">
+                <a:solidFill>
+                  <a:srgbClr val="000000"/>
+                </a:solidFill>
+                <a:latin typeface="Arial"/>
+                <a:ea typeface="Arial"/>
+                <a:cs typeface="Arial"/>
+              </a:rPr>
+              <a:t>Преимущества</a:t>
+            </a:r>
+          </a:p>
+        </p:txBody>
+      </p:sp>
+      <p:sp>
+        <p:nvSpPr>
+          <p:cNvPr id="3" name="body_left"/>
+          <p:cNvSpPr txBox="1"/>
+          <p:nvPr/>
+        </p:nvSpPr>
+        <p:spPr>
+          <a:xfrm>
+            <a:off x="677387" y="2686882"/>
+            <a:ext cx="5245059" cy="1686560"/>
+          </a:xfrm>
+          <a:prstGeom prst="rect">
+            <a:avLst/>
+          </a:prstGeom>
+          <a:noFill/>
+        </p:spPr>
+        <p:txBody>
+          <a:bodyPr wrap="square" lIns="76200" rIns="76200" tIns="50800" bIns="50800">
+            <a:spAutoFit/>
+          </a:bodyPr>
+          <a:lstStyle/>
+          <a:p>
+            <a:pPr algn="l">
+              <a:spcAft>
+                <a:spcPts val="300"/>
+              </a:spcAft>
+              <a:defRPr sz="2400">
+                <a:solidFill>
+                  <a:srgbClr val="000000"/>
+                </a:solidFill>
+                <a:latin typeface="Play"/>
+                <a:ea typeface="Play"/>
+                <a:cs typeface="Play"/>
+              </a:defRPr>
+            </a:pPr>
+            <a:r>
+              <a:rPr sz="2400">
+                <a:solidFill>
+                  <a:srgbClr val="000000"/>
+                </a:solidFill>
+                <a:latin typeface="Play"/>
+                <a:ea typeface="Play"/>
+                <a:cs typeface="Play"/>
+              </a:rPr>
+              <a:t>• Сокращение времени сборки до 4 минут</a:t>
+            </a:r>
+          </a:p>
+          <a:p>
+            <a:pPr algn="l">
+              <a:spcAft>
+                <a:spcPts val="300"/>
+              </a:spcAft>
+              <a:defRPr sz="2400">
+                <a:solidFill>
+                  <a:srgbClr val="000000"/>
+                </a:solidFill>
+                <a:latin typeface="Play"/>
+                <a:ea typeface="Play"/>
+                <a:cs typeface="Play"/>
+              </a:defRPr>
+            </a:pPr>
+            <a:r>
+              <a:rPr sz="2400">
+                <a:solidFill>
+                  <a:srgbClr val="000000"/>
+                </a:solidFill>
+                <a:latin typeface="Play"/>
+                <a:ea typeface="Play"/>
+                <a:cs typeface="Play"/>
+              </a:rPr>
+              <a:t>• Уменьшение нарушений фирменного стиля до 2 из 68</a:t>
+            </a:r>
+          </a:p>
+        </p:txBody>
+      </p:sp>
+      <p:sp>
+        <p:nvSpPr>
+          <p:cNvPr id="4" name="body_right"/>
+          <p:cNvSpPr txBox="1"/>
+          <p:nvPr/>
+        </p:nvSpPr>
+        <p:spPr>
+          <a:xfrm>
+            <a:off x="6288206" y="2686882"/>
+            <a:ext cx="5245059" cy="1686560"/>
+          </a:xfrm>
+          <a:prstGeom prst="rect">
+            <a:avLst/>
+          </a:prstGeom>
+          <a:noFill/>
+        </p:spPr>
+        <p:txBody>
+          <a:bodyPr wrap="square" lIns="76200" rIns="76200" tIns="50800" bIns="50800">
+            <a:spAutoFit/>
+          </a:bodyPr>
+          <a:lstStyle/>
+          <a:p>
+            <a:pPr algn="l">
+              <a:spcAft>
+                <a:spcPts val="300"/>
+              </a:spcAft>
+              <a:defRPr sz="2400">
+                <a:solidFill>
+                  <a:srgbClr val="000000"/>
+                </a:solidFill>
+                <a:latin typeface="Play"/>
+                <a:ea typeface="Play"/>
+                <a:cs typeface="Play"/>
+              </a:defRPr>
+            </a:pPr>
+            <a:r>
+              <a:rPr sz="2400">
+                <a:solidFill>
+                  <a:srgbClr val="000000"/>
+                </a:solidFill>
+                <a:latin typeface="Play"/>
+                <a:ea typeface="Play"/>
+                <a:cs typeface="Play"/>
+              </a:rPr>
+              <a:t>• Экономия 1 400 рублей за 6 недель пилота</a:t>
+            </a:r>
+          </a:p>
+          <a:p>
+            <a:pPr algn="l">
+              <a:spcAft>
+                <a:spcPts val="300"/>
+              </a:spcAft>
+              <a:defRPr sz="2400">
+                <a:solidFill>
+                  <a:srgbClr val="000000"/>
+                </a:solidFill>
+                <a:latin typeface="Play"/>
+                <a:ea typeface="Play"/>
+                <a:cs typeface="Play"/>
+              </a:defRPr>
+            </a:pPr>
+            <a:r>
+              <a:rPr sz="2400">
+                <a:solidFill>
+                  <a:srgbClr val="000000"/>
+                </a:solidFill>
+                <a:latin typeface="Play"/>
+                <a:ea typeface="Play"/>
+                <a:cs typeface="Play"/>
+              </a:rPr>
+              <a:t>• Повышение производительности дизайнеров</a:t>
             </a:r>
           </a:p>
         </p:txBody>
@@ -10164,7 +10363,7 @@
         <p:spPr>
           <a:xfrm>
             <a:off x="658855" y="692177"/>
-            <a:ext cx="5242438" cy="1447800"/>
+            <a:ext cx="5242438" cy="822960"/>
           </a:xfrm>
           <a:prstGeom prst="rect">
             <a:avLst/>
@@ -10199,7 +10398,7 @@
                 <a:ea typeface="Arial"/>
                 <a:cs typeface="Arial"/>
               </a:rPr>
-              <a:t>Следующие шаги после одобрения</a:t>
+              <a:t>Следующие шаги</a:t>
             </a:r>
           </a:p>
         </p:txBody>
@@ -10212,8 +10411,8 @@
         </p:nvSpPr>
         <p:spPr>
           <a:xfrm>
-            <a:off x="658855" y="2380007"/>
-            <a:ext cx="5242438" cy="3262548"/>
+            <a:off x="658855" y="1783080"/>
+            <a:ext cx="5242438" cy="3859476"/>
           </a:xfrm>
           <a:prstGeom prst="rect">
             <a:avLst/>
@@ -10230,7 +10429,7 @@
               <a:spcAft>
                 <a:spcPts val="300"/>
               </a:spcAft>
-              <a:defRPr sz="2400">
+              <a:defRPr sz="2800">
                 <a:solidFill>
                   <a:srgbClr val="FFFFFF"/>
                 </a:solidFill>
@@ -10240,7 +10439,7 @@
               </a:defRPr>
             </a:pPr>
             <a:r>
-              <a:rPr sz="2400">
+              <a:rPr sz="2800">
                 <a:solidFill>
                   <a:srgbClr val="FFFFFF"/>
                 </a:solidFill>
@@ -10248,7 +10447,7 @@
                 <a:ea typeface="Play"/>
                 <a:cs typeface="Play"/>
               </a:rPr>
-              <a:t>• После одобрения подключить 4 команды в Q3 2026</a:t>
+              <a:t>• Сервис готов к масштабированию на всю компанию</a:t>
             </a:r>
           </a:p>
           <a:p>
@@ -10256,7 +10455,7 @@
               <a:spcAft>
                 <a:spcPts val="300"/>
               </a:spcAft>
-              <a:defRPr sz="2400">
+              <a:defRPr sz="2800">
                 <a:solidFill>
                   <a:srgbClr val="FFFFFF"/>
                 </a:solidFill>
@@ -10266,7 +10465,7 @@
               </a:defRPr>
             </a:pPr>
             <a:r>
-              <a:rPr sz="2400">
+              <a:rPr sz="2800">
                 <a:solidFill>
                   <a:srgbClr val="FFFFFF"/>
                 </a:solidFill>
@@ -10274,7 +10473,7 @@
                 <a:ea typeface="Play"/>
                 <a:cs typeface="Play"/>
               </a:rPr>
-              <a:t>• В Q4 2026 обеспечить домен, HTTPS и доступ для всей компании</a:t>
+              <a:t>• Ожидаем решение о запуске в четвертом квартале 2026</a:t>
             </a:r>
           </a:p>
           <a:p>
@@ -10282,7 +10481,7 @@
               <a:spcAft>
                 <a:spcPts val="300"/>
               </a:spcAft>
-              <a:defRPr sz="2400">
+              <a:defRPr sz="2800">
                 <a:solidFill>
                   <a:srgbClr val="FFFFFF"/>
                 </a:solidFill>
@@ -10292,7 +10491,7 @@
               </a:defRPr>
             </a:pPr>
             <a:r>
-              <a:rPr sz="2400">
+              <a:rPr sz="2800">
                 <a:solidFill>
                   <a:srgbClr val="FFFFFF"/>
                 </a:solidFill>
@@ -10300,7 +10499,7 @@
                 <a:ea typeface="Play"/>
                 <a:cs typeface="Play"/>
               </a:rPr>
-              <a:t>• В Q1 2027 добавить генерацию иллюстраций под стиль шаблона</a:t>
+              <a:t>• Планируем интеграцию с хранилищем документов</a:t>
             </a:r>
           </a:p>
         </p:txBody>

--- a/samples/Шаблон_презентации_VK_Education__split.pptx
+++ b/samples/Шаблон_презентации_VK_Education__split.pptx
@@ -19,6 +19,8 @@
     <p:sldId id="318" r:id="rId71"/>
     <p:sldId id="319" r:id="rId72"/>
     <p:sldId id="320" r:id="rId73"/>
+    <p:sldId id="321" r:id="rId74"/>
+    <p:sldId id="322" r:id="rId75"/>
   </p:sldIdLst>
   <p:sldSz cy="6858000" cx="12192000"/>
   <p:notesSz cx="6858000" cy="9144000"/>
@@ -259,6 +261,434 @@
     </a:lvl9pPr>
   </p:defaultTextStyle>
 </p:presentation>
+</file>
+
+<file path=ppt/charts/chart1.xml><?xml version="1.0" encoding="utf-8"?>
+<c:chartSpace xmlns:c="http://schemas.openxmlformats.org/drawingml/2006/chart" xmlns:a="http://schemas.openxmlformats.org/drawingml/2006/main" xmlns:r="http://schemas.openxmlformats.org/officeDocument/2006/relationships">
+  <c:date1904 val="0"/>
+  <c:chart>
+    <c:autoTitleDeleted val="1"/>
+    <c:plotArea>
+      <c:barChart>
+        <c:barDir val="col"/>
+        <c:grouping val="clustered"/>
+        <c:ser>
+          <c:idx val="0"/>
+          <c:order val="0"/>
+          <c:tx>
+            <c:strRef>
+              <c:f>Sheet1!$B$1</c:f>
+              <c:strCache>
+                <c:ptCount val="1"/>
+                <c:pt idx="0">
+                  <c:v>Время (мин)</c:v>
+                </c:pt>
+              </c:strCache>
+            </c:strRef>
+          </c:tx>
+          <c:spPr>
+            <a:solidFill>
+              <a:srgbClr val="0077FF"/>
+            </a:solidFill>
+            <a:ln>
+              <a:solidFill>
+                <a:srgbClr val="0077FF"/>
+              </a:solidFill>
+            </a:ln>
+          </c:spPr>
+          <c:cat>
+            <c:strRef>
+              <c:f>Sheet1!$A$2:$A$3</c:f>
+              <c:strCache>
+                <c:ptCount val="2"/>
+                <c:pt idx="0">
+                  <c:v>Текущий процесс</c:v>
+                </c:pt>
+                <c:pt idx="1">
+                  <c:v>Пилот</c:v>
+                </c:pt>
+              </c:strCache>
+            </c:strRef>
+          </c:cat>
+          <c:val>
+            <c:numRef>
+              <c:f>Sheet1!$B$2:$B$3</c:f>
+              <c:numCache>
+                <c:formatCode>General</c:formatCode>
+                <c:ptCount val="2"/>
+                <c:pt idx="0">
+                  <c:v>186.0</c:v>
+                </c:pt>
+                <c:pt idx="1">
+                  <c:v>4.0</c:v>
+                </c:pt>
+              </c:numCache>
+            </c:numRef>
+          </c:val>
+        </c:ser>
+        <c:dLbls>
+          <c:numFmt formatCode="0&quot; мин&quot;" sourceLinked="0"/>
+          <c:txPr>
+            <a:bodyPr wrap="none"/>
+            <a:lstStyle/>
+            <a:p>
+              <a:pPr>
+                <a:defRPr sz="1100" b="0">
+                  <a:solidFill>
+                    <a:srgbClr val="000000"/>
+                  </a:solidFill>
+                  <a:latin typeface="Play"/>
+                  <a:ea typeface="Play"/>
+                  <a:cs typeface="Play"/>
+                </a:defRPr>
+              </a:pPr>
+            </a:p>
+          </c:txPr>
+          <c:dLblPos val="outEnd"/>
+          <c:showLegendKey val="0"/>
+          <c:showVal val="1"/>
+          <c:showCatName val="0"/>
+          <c:showSerName val="0"/>
+          <c:showPercent val="0"/>
+          <c:showBubbleSize val="0"/>
+          <c:showLeaderLines val="1"/>
+        </c:dLbls>
+        <c:gapWidth val="60"/>
+        <c:axId val="-2068027336"/>
+        <c:axId val="-2113994440"/>
+      </c:barChart>
+      <c:catAx>
+        <c:axId val="-2068027336"/>
+        <c:scaling>
+          <c:orientation val="minMax"/>
+        </c:scaling>
+        <c:delete val="0"/>
+        <c:axPos val="b"/>
+        <c:majorTickMark val="out"/>
+        <c:minorTickMark val="none"/>
+        <c:tickLblPos val="nextTo"/>
+        <c:txPr>
+          <a:bodyPr/>
+          <a:lstStyle/>
+          <a:p>
+            <a:pPr>
+              <a:defRPr sz="1100" b="0">
+                <a:solidFill>
+                  <a:srgbClr val="000000"/>
+                </a:solidFill>
+                <a:latin typeface="Play"/>
+                <a:ea typeface="Play"/>
+                <a:cs typeface="Play"/>
+              </a:defRPr>
+            </a:pPr>
+          </a:p>
+        </c:txPr>
+        <c:crossAx val="-2113994440"/>
+        <c:crosses val="autoZero"/>
+        <c:auto val="1"/>
+        <c:lblAlgn val="ctr"/>
+        <c:lblOffset val="100"/>
+        <c:noMultiLvlLbl val="0"/>
+      </c:catAx>
+      <c:valAx>
+        <c:axId val="-2113994440"/>
+        <c:scaling/>
+        <c:delete val="0"/>
+        <c:axPos val="l"/>
+        <c:majorGridlines>
+          <c:spPr>
+            <a:ln w="9525">
+              <a:solidFill>
+                <a:srgbClr val="D1D1D1"/>
+              </a:solidFill>
+            </a:ln>
+          </c:spPr>
+        </c:majorGridlines>
+        <c:title>
+          <c:tx>
+            <c:rich>
+              <a:bodyPr rot="0" vert="horz"/>
+              <a:lstStyle/>
+              <a:p>
+                <a:pPr>
+                  <a:defRPr sz="1100" b="0">
+                    <a:solidFill>
+                      <a:srgbClr val="000000"/>
+                    </a:solidFill>
+                    <a:latin typeface="Play"/>
+                    <a:ea typeface="Play"/>
+                    <a:cs typeface="Play"/>
+                  </a:defRPr>
+                </a:pPr>
+                <a:r>
+                  <a:t>Время (мин), мин</a:t>
+                </a:r>
+              </a:p>
+            </c:rich>
+          </c:tx>
+          <c:layout/>
+          <c:overlay val="0"/>
+        </c:title>
+        <c:majorTickMark val="out"/>
+        <c:minorTickMark val="none"/>
+        <c:tickLblPos val="nextTo"/>
+        <c:txPr>
+          <a:bodyPr/>
+          <a:lstStyle/>
+          <a:p>
+            <a:pPr>
+              <a:defRPr sz="1100" b="0">
+                <a:solidFill>
+                  <a:srgbClr val="000000"/>
+                </a:solidFill>
+                <a:latin typeface="Play"/>
+                <a:ea typeface="Play"/>
+                <a:cs typeface="Play"/>
+              </a:defRPr>
+            </a:pPr>
+          </a:p>
+        </c:txPr>
+        <c:crossAx val="-2068027336"/>
+        <c:crosses val="autoZero"/>
+      </c:valAx>
+    </c:plotArea>
+    <c:dispBlanksAs val="gap"/>
+  </c:chart>
+  <c:txPr>
+    <a:bodyPr/>
+    <a:lstStyle/>
+    <a:p>
+      <a:pPr>
+        <a:defRPr sz="1200" b="0">
+          <a:solidFill>
+            <a:srgbClr val="000000"/>
+          </a:solidFill>
+          <a:latin typeface="Play"/>
+          <a:ea typeface="Play"/>
+          <a:cs typeface="Play"/>
+        </a:defRPr>
+      </a:pPr>
+      <a:endParaRPr lang="en-US"/>
+    </a:p>
+  </c:txPr>
+  <c:externalData r:id="rId1">
+    <c:autoUpdate val="0"/>
+  </c:externalData>
+</c:chartSpace>
+</file>
+
+<file path=ppt/charts/chart2.xml><?xml version="1.0" encoding="utf-8"?>
+<c:chartSpace xmlns:c="http://schemas.openxmlformats.org/drawingml/2006/chart" xmlns:a="http://schemas.openxmlformats.org/drawingml/2006/main" xmlns:r="http://schemas.openxmlformats.org/officeDocument/2006/relationships">
+  <c:date1904 val="0"/>
+  <c:chart>
+    <c:autoTitleDeleted val="1"/>
+    <c:plotArea>
+      <c:barChart>
+        <c:barDir val="col"/>
+        <c:grouping val="clustered"/>
+        <c:ser>
+          <c:idx val="0"/>
+          <c:order val="0"/>
+          <c:tx>
+            <c:strRef>
+              <c:f>Sheet1!$B$1</c:f>
+              <c:strCache>
+                <c:ptCount val="1"/>
+                <c:pt idx="0">
+                  <c:v>Запросы закрыты</c:v>
+                </c:pt>
+              </c:strCache>
+            </c:strRef>
+          </c:tx>
+          <c:spPr>
+            <a:solidFill>
+              <a:srgbClr val="0077FF"/>
+            </a:solidFill>
+            <a:ln>
+              <a:solidFill>
+                <a:srgbClr val="0077FF"/>
+              </a:solidFill>
+            </a:ln>
+          </c:spPr>
+          <c:cat>
+            <c:strRef>
+              <c:f>Sheet1!$A$2:$A$3</c:f>
+              <c:strCache>
+                <c:ptCount val="2"/>
+                <c:pt idx="0">
+                  <c:v>Текущий процесс</c:v>
+                </c:pt>
+                <c:pt idx="1">
+                  <c:v>Пилот</c:v>
+                </c:pt>
+              </c:strCache>
+            </c:strRef>
+          </c:cat>
+          <c:val>
+            <c:numRef>
+              <c:f>Sheet1!$B$2:$B$3</c:f>
+              <c:numCache>
+                <c:formatCode>General</c:formatCode>
+                <c:ptCount val="2"/>
+                <c:pt idx="0">
+                  <c:v>11.0</c:v>
+                </c:pt>
+                <c:pt idx="1">
+                  <c:v>38.0</c:v>
+                </c:pt>
+              </c:numCache>
+            </c:numRef>
+          </c:val>
+        </c:ser>
+        <c:dLbls>
+          <c:numFmt formatCode="0&quot; запросов&quot;" sourceLinked="0"/>
+          <c:txPr>
+            <a:bodyPr wrap="none"/>
+            <a:lstStyle/>
+            <a:p>
+              <a:pPr>
+                <a:defRPr sz="1100" b="0">
+                  <a:solidFill>
+                    <a:srgbClr val="000000"/>
+                  </a:solidFill>
+                  <a:latin typeface="Play"/>
+                  <a:ea typeface="Play"/>
+                  <a:cs typeface="Play"/>
+                </a:defRPr>
+              </a:pPr>
+            </a:p>
+          </c:txPr>
+          <c:dLblPos val="outEnd"/>
+          <c:showLegendKey val="0"/>
+          <c:showVal val="1"/>
+          <c:showCatName val="0"/>
+          <c:showSerName val="0"/>
+          <c:showPercent val="0"/>
+          <c:showBubbleSize val="0"/>
+          <c:showLeaderLines val="1"/>
+        </c:dLbls>
+        <c:gapWidth val="60"/>
+        <c:axId val="-2068027336"/>
+        <c:axId val="-2113994440"/>
+      </c:barChart>
+      <c:catAx>
+        <c:axId val="-2068027336"/>
+        <c:scaling>
+          <c:orientation val="minMax"/>
+        </c:scaling>
+        <c:delete val="0"/>
+        <c:axPos val="b"/>
+        <c:majorTickMark val="out"/>
+        <c:minorTickMark val="none"/>
+        <c:tickLblPos val="nextTo"/>
+        <c:txPr>
+          <a:bodyPr/>
+          <a:lstStyle/>
+          <a:p>
+            <a:pPr>
+              <a:defRPr sz="1100" b="0">
+                <a:solidFill>
+                  <a:srgbClr val="000000"/>
+                </a:solidFill>
+                <a:latin typeface="Play"/>
+                <a:ea typeface="Play"/>
+                <a:cs typeface="Play"/>
+              </a:defRPr>
+            </a:pPr>
+          </a:p>
+        </c:txPr>
+        <c:crossAx val="-2113994440"/>
+        <c:crosses val="autoZero"/>
+        <c:auto val="1"/>
+        <c:lblAlgn val="ctr"/>
+        <c:lblOffset val="100"/>
+        <c:noMultiLvlLbl val="0"/>
+      </c:catAx>
+      <c:valAx>
+        <c:axId val="-2113994440"/>
+        <c:scaling/>
+        <c:delete val="0"/>
+        <c:axPos val="l"/>
+        <c:majorGridlines>
+          <c:spPr>
+            <a:ln w="9525">
+              <a:solidFill>
+                <a:srgbClr val="D1D1D1"/>
+              </a:solidFill>
+            </a:ln>
+          </c:spPr>
+        </c:majorGridlines>
+        <c:title>
+          <c:tx>
+            <c:rich>
+              <a:bodyPr rot="0" vert="horz"/>
+              <a:lstStyle/>
+              <a:p>
+                <a:pPr>
+                  <a:defRPr sz="1100" b="0">
+                    <a:solidFill>
+                      <a:srgbClr val="000000"/>
+                    </a:solidFill>
+                    <a:latin typeface="Play"/>
+                    <a:ea typeface="Play"/>
+                    <a:cs typeface="Play"/>
+                  </a:defRPr>
+                </a:pPr>
+                <a:r>
+                  <a:t>Запросы закрыты, запросов</a:t>
+                </a:r>
+              </a:p>
+            </c:rich>
+          </c:tx>
+          <c:layout/>
+          <c:overlay val="0"/>
+        </c:title>
+        <c:majorTickMark val="out"/>
+        <c:minorTickMark val="none"/>
+        <c:tickLblPos val="nextTo"/>
+        <c:txPr>
+          <a:bodyPr/>
+          <a:lstStyle/>
+          <a:p>
+            <a:pPr>
+              <a:defRPr sz="1100" b="0">
+                <a:solidFill>
+                  <a:srgbClr val="000000"/>
+                </a:solidFill>
+                <a:latin typeface="Play"/>
+                <a:ea typeface="Play"/>
+                <a:cs typeface="Play"/>
+              </a:defRPr>
+            </a:pPr>
+          </a:p>
+        </c:txPr>
+        <c:crossAx val="-2068027336"/>
+        <c:crosses val="autoZero"/>
+      </c:valAx>
+    </c:plotArea>
+    <c:dispBlanksAs val="gap"/>
+  </c:chart>
+  <c:txPr>
+    <a:bodyPr/>
+    <a:lstStyle/>
+    <a:p>
+      <a:pPr>
+        <a:defRPr sz="1200" b="0">
+          <a:solidFill>
+            <a:srgbClr val="000000"/>
+          </a:solidFill>
+          <a:latin typeface="Play"/>
+          <a:ea typeface="Play"/>
+          <a:cs typeface="Play"/>
+        </a:defRPr>
+      </a:pPr>
+      <a:endParaRPr lang="en-US"/>
+    </a:p>
+  </c:txPr>
+  <c:externalData r:id="rId1">
+    <c:autoUpdate val="0"/>
+  </c:externalData>
+</c:chartSpace>
 </file>
 
 <file path=ppt/notesMasters/notesMaster1.xml><?xml version="1.0" encoding="utf-8"?>
@@ -2087,6 +2517,1982 @@
     <a:masterClrMapping/>
   </p:clrMapOvr>
 </p:notes>
+</file>
+
+<file path=ppt/notesSlides/notesSlide66.xml><?xml version="1.0" encoding="utf-8"?>
+<p:notes xmlns:a="http://schemas.openxmlformats.org/drawingml/2006/main" xmlns:p="http://schemas.openxmlformats.org/presentationml/2006/main" xmlns:r="http://schemas.openxmlformats.org/officeDocument/2006/relationships">
+  <p:cSld>
+    <p:spTree>
+      <p:nvGrpSpPr>
+        <p:cNvPr id="1" name=""/>
+        <p:cNvGrpSpPr/>
+        <p:nvPr/>
+      </p:nvGrpSpPr>
+      <p:grpSpPr>
+        <a:xfrm>
+          <a:off x="0" y="0"/>
+          <a:ext cx="0" cy="0"/>
+          <a:chOff x="0" y="0"/>
+          <a:chExt cx="0" cy="0"/>
+        </a:xfrm>
+      </p:grpSpPr>
+      <p:sp>
+        <p:nvSpPr>
+          <p:cNvPr id="2" name="Slide Image Placeholder 1"/>
+          <p:cNvSpPr>
+            <a:spLocks noGrp="1"/>
+          </p:cNvSpPr>
+          <p:nvPr>
+            <p:ph type="sldImg" idx="3"/>
+          </p:nvPr>
+        </p:nvSpPr>
+        <p:spPr/>
+      </p:sp>
+      <p:sp>
+        <p:nvSpPr>
+          <p:cNvPr id="3" name="Notes Placeholder 2"/>
+          <p:cNvSpPr>
+            <a:spLocks noGrp="1"/>
+          </p:cNvSpPr>
+          <p:nvPr>
+            <p:ph type="body" idx="1"/>
+          </p:nvPr>
+        </p:nvSpPr>
+        <p:spPr/>
+        <p:txBody>
+          <a:bodyPr/>
+          <a:lstStyle/>
+          <a:p/>
+        </p:txBody>
+      </p:sp>
+      <p:sp>
+        <p:nvSpPr>
+          <p:cNvPr id="4" name="Slide Number Placeholder 3"/>
+          <p:cNvSpPr>
+            <a:spLocks noGrp="1"/>
+          </p:cNvSpPr>
+          <p:nvPr>
+            <p:ph type="sldNum" idx="12"/>
+          </p:nvPr>
+        </p:nvSpPr>
+        <p:spPr/>
+      </p:sp>
+    </p:spTree>
+  </p:cSld>
+  <p:clrMapOvr>
+    <a:masterClrMapping/>
+  </p:clrMapOvr>
+</p:notes>
+</file>
+
+<file path=ppt/notesSlides/notesSlide67.xml><?xml version="1.0" encoding="utf-8"?>
+<p:notes xmlns:a="http://schemas.openxmlformats.org/drawingml/2006/main" xmlns:p="http://schemas.openxmlformats.org/presentationml/2006/main" xmlns:r="http://schemas.openxmlformats.org/officeDocument/2006/relationships">
+  <p:cSld>
+    <p:spTree>
+      <p:nvGrpSpPr>
+        <p:cNvPr id="1" name=""/>
+        <p:cNvGrpSpPr/>
+        <p:nvPr/>
+      </p:nvGrpSpPr>
+      <p:grpSpPr>
+        <a:xfrm>
+          <a:off x="0" y="0"/>
+          <a:ext cx="0" cy="0"/>
+          <a:chOff x="0" y="0"/>
+          <a:chExt cx="0" cy="0"/>
+        </a:xfrm>
+      </p:grpSpPr>
+      <p:sp>
+        <p:nvSpPr>
+          <p:cNvPr id="2" name="Slide Image Placeholder 1"/>
+          <p:cNvSpPr>
+            <a:spLocks noGrp="1"/>
+          </p:cNvSpPr>
+          <p:nvPr>
+            <p:ph type="sldImg" idx="3"/>
+          </p:nvPr>
+        </p:nvSpPr>
+        <p:spPr/>
+      </p:sp>
+      <p:sp>
+        <p:nvSpPr>
+          <p:cNvPr id="3" name="Notes Placeholder 2"/>
+          <p:cNvSpPr>
+            <a:spLocks noGrp="1"/>
+          </p:cNvSpPr>
+          <p:nvPr>
+            <p:ph type="body" idx="1"/>
+          </p:nvPr>
+        </p:nvSpPr>
+        <p:spPr/>
+        <p:txBody>
+          <a:bodyPr/>
+          <a:lstStyle/>
+          <a:p/>
+        </p:txBody>
+      </p:sp>
+      <p:sp>
+        <p:nvSpPr>
+          <p:cNvPr id="4" name="Slide Number Placeholder 3"/>
+          <p:cNvSpPr>
+            <a:spLocks noGrp="1"/>
+          </p:cNvSpPr>
+          <p:nvPr>
+            <p:ph type="sldNum" idx="12"/>
+          </p:nvPr>
+        </p:nvSpPr>
+        <p:spPr/>
+      </p:sp>
+    </p:spTree>
+  </p:cSld>
+  <p:clrMapOvr>
+    <a:masterClrMapping/>
+  </p:clrMapOvr>
+</p:notes>
+</file>
+
+<file path=ppt/slideLayouts/slideLayout10.xml><?xml version="1.0" encoding="utf-8"?>
+<p:sldLayout xmlns:a="http://schemas.openxmlformats.org/drawingml/2006/main" xmlns:r="http://schemas.openxmlformats.org/officeDocument/2006/relationships" xmlns:mc="http://schemas.openxmlformats.org/markup-compatibility/2006" xmlns:mv="urn:schemas-microsoft-com:mac:vml" xmlns:p="http://schemas.openxmlformats.org/presentationml/2006/main" xmlns:c="http://schemas.openxmlformats.org/drawingml/2006/chart" xmlns:dgm="http://schemas.openxmlformats.org/drawingml/2006/diagram" xmlns:o="urn:schemas-microsoft-com:office:office" xmlns:v="urn:schemas-microsoft-com:vml" xmlns:pvml="urn:schemas-microsoft-com:office:powerpoint" xmlns:com="http://schemas.openxmlformats.org/drawingml/2006/compatibility" xmlns:p14="http://schemas.microsoft.com/office/powerpoint/2010/main" xmlns:p15="http://schemas.microsoft.com/office/powerpoint/2012/main" xmlns:ahyp="http://schemas.microsoft.com/office/drawing/2018/hyperlinkcolor" matchingName="2 фактоида + текст">
+  <p:cSld name="2 фактоида + текст">
+    <p:spTree>
+      <p:nvGrpSpPr>
+        <p:cNvPr id="93" name="Shape 93"/>
+        <p:cNvGrpSpPr/>
+        <p:nvPr/>
+      </p:nvGrpSpPr>
+      <p:grpSpPr>
+        <a:xfrm>
+          <a:off x="0" y="0"/>
+          <a:ext cx="0" cy="0"/>
+          <a:chOff x="0" y="0"/>
+          <a:chExt cx="0" cy="0"/>
+        </a:xfrm>
+      </p:grpSpPr>
+      <p:sp>
+        <p:nvSpPr>
+          <p:cNvPr id="94" name="Google Shape;94;p11"/>
+          <p:cNvSpPr txBox="1"/>
+          <p:nvPr>
+            <p:ph idx="1" type="body"/>
+          </p:nvPr>
+        </p:nvSpPr>
+        <p:spPr>
+          <a:xfrm>
+            <a:off x="671514" y="1773238"/>
+            <a:ext cx="5135728" cy="4427537"/>
+          </a:xfrm>
+          <a:prstGeom prst="rect">
+            <a:avLst/>
+          </a:prstGeom>
+          <a:noFill/>
+          <a:ln>
+            <a:noFill/>
+          </a:ln>
+        </p:spPr>
+        <p:txBody>
+          <a:bodyPr anchorCtr="0" anchor="t" bIns="0" lIns="0" spcFirstLastPara="1" rIns="0" wrap="square" tIns="0">
+            <a:normAutofit/>
+          </a:bodyPr>
+          <a:lstStyle>
+            <a:lvl1pPr indent="-228600" lvl="0" marL="457200" algn="l">
+              <a:lnSpc>
+                <a:spcPct val="110000"/>
+              </a:lnSpc>
+              <a:spcBef>
+                <a:spcPts val="1000"/>
+              </a:spcBef>
+              <a:spcAft>
+                <a:spcPts val="0"/>
+              </a:spcAft>
+              <a:buClr>
+                <a:schemeClr val="dk1"/>
+              </a:buClr>
+              <a:buSzPts val="1800"/>
+              <a:buNone/>
+              <a:defRPr/>
+            </a:lvl1pPr>
+            <a:lvl2pPr indent="-342900" lvl="1" marL="914400" algn="l">
+              <a:lnSpc>
+                <a:spcPct val="110000"/>
+              </a:lnSpc>
+              <a:spcBef>
+                <a:spcPts val="500"/>
+              </a:spcBef>
+              <a:spcAft>
+                <a:spcPts val="0"/>
+              </a:spcAft>
+              <a:buSzPts val="1800"/>
+              <a:buChar char="•"/>
+              <a:defRPr/>
+            </a:lvl2pPr>
+            <a:lvl3pPr indent="-342900" lvl="2" marL="1371600" algn="l">
+              <a:lnSpc>
+                <a:spcPct val="110000"/>
+              </a:lnSpc>
+              <a:spcBef>
+                <a:spcPts val="500"/>
+              </a:spcBef>
+              <a:spcAft>
+                <a:spcPts val="0"/>
+              </a:spcAft>
+              <a:buClr>
+                <a:schemeClr val="dk1"/>
+              </a:buClr>
+              <a:buSzPts val="1800"/>
+              <a:buChar char="−"/>
+              <a:defRPr/>
+            </a:lvl3pPr>
+            <a:lvl4pPr indent="-342900" lvl="3" marL="1828800" algn="l">
+              <a:lnSpc>
+                <a:spcPct val="90000"/>
+              </a:lnSpc>
+              <a:spcBef>
+                <a:spcPts val="500"/>
+              </a:spcBef>
+              <a:spcAft>
+                <a:spcPts val="0"/>
+              </a:spcAft>
+              <a:buClr>
+                <a:schemeClr val="dk1"/>
+              </a:buClr>
+              <a:buSzPts val="1800"/>
+              <a:buChar char="•"/>
+              <a:defRPr/>
+            </a:lvl4pPr>
+            <a:lvl5pPr indent="-342900" lvl="4" marL="2286000" algn="l">
+              <a:lnSpc>
+                <a:spcPct val="90000"/>
+              </a:lnSpc>
+              <a:spcBef>
+                <a:spcPts val="500"/>
+              </a:spcBef>
+              <a:spcAft>
+                <a:spcPts val="0"/>
+              </a:spcAft>
+              <a:buClr>
+                <a:schemeClr val="dk1"/>
+              </a:buClr>
+              <a:buSzPts val="1800"/>
+              <a:buChar char="•"/>
+              <a:defRPr/>
+            </a:lvl5pPr>
+            <a:lvl6pPr indent="-342900" lvl="5" marL="2743200" algn="l">
+              <a:lnSpc>
+                <a:spcPct val="90000"/>
+              </a:lnSpc>
+              <a:spcBef>
+                <a:spcPts val="500"/>
+              </a:spcBef>
+              <a:spcAft>
+                <a:spcPts val="0"/>
+              </a:spcAft>
+              <a:buClr>
+                <a:schemeClr val="dk1"/>
+              </a:buClr>
+              <a:buSzPts val="1800"/>
+              <a:buChar char="•"/>
+              <a:defRPr/>
+            </a:lvl6pPr>
+            <a:lvl7pPr indent="-342900" lvl="6" marL="3200400" algn="l">
+              <a:lnSpc>
+                <a:spcPct val="90000"/>
+              </a:lnSpc>
+              <a:spcBef>
+                <a:spcPts val="500"/>
+              </a:spcBef>
+              <a:spcAft>
+                <a:spcPts val="0"/>
+              </a:spcAft>
+              <a:buClr>
+                <a:schemeClr val="dk1"/>
+              </a:buClr>
+              <a:buSzPts val="1800"/>
+              <a:buChar char="•"/>
+              <a:defRPr/>
+            </a:lvl7pPr>
+            <a:lvl8pPr indent="-342900" lvl="7" marL="3657600" algn="l">
+              <a:lnSpc>
+                <a:spcPct val="90000"/>
+              </a:lnSpc>
+              <a:spcBef>
+                <a:spcPts val="500"/>
+              </a:spcBef>
+              <a:spcAft>
+                <a:spcPts val="0"/>
+              </a:spcAft>
+              <a:buClr>
+                <a:schemeClr val="dk1"/>
+              </a:buClr>
+              <a:buSzPts val="1800"/>
+              <a:buChar char="•"/>
+              <a:defRPr/>
+            </a:lvl8pPr>
+            <a:lvl9pPr indent="-342900" lvl="8" marL="4114800" algn="l">
+              <a:lnSpc>
+                <a:spcPct val="90000"/>
+              </a:lnSpc>
+              <a:spcBef>
+                <a:spcPts val="500"/>
+              </a:spcBef>
+              <a:spcAft>
+                <a:spcPts val="0"/>
+              </a:spcAft>
+              <a:buClr>
+                <a:schemeClr val="dk1"/>
+              </a:buClr>
+              <a:buSzPts val="1800"/>
+              <a:buChar char="•"/>
+              <a:defRPr/>
+            </a:lvl9pPr>
+          </a:lstStyle>
+          <a:p/>
+        </p:txBody>
+      </p:sp>
+      <p:sp>
+        <p:nvSpPr>
+          <p:cNvPr id="95" name="Google Shape;95;p11"/>
+          <p:cNvSpPr txBox="1"/>
+          <p:nvPr>
+            <p:ph type="title"/>
+          </p:nvPr>
+        </p:nvSpPr>
+        <p:spPr>
+          <a:xfrm>
+            <a:off x="677334" y="692150"/>
+            <a:ext cx="10855854" cy="644241"/>
+          </a:xfrm>
+          <a:prstGeom prst="rect">
+            <a:avLst/>
+          </a:prstGeom>
+          <a:noFill/>
+          <a:ln>
+            <a:noFill/>
+          </a:ln>
+        </p:spPr>
+        <p:txBody>
+          <a:bodyPr anchorCtr="0" anchor="t" bIns="0" lIns="0" spcFirstLastPara="1" rIns="0" wrap="square" tIns="0">
+            <a:noAutofit/>
+          </a:bodyPr>
+          <a:lstStyle>
+            <a:lvl1pPr lvl="0" algn="l">
+              <a:lnSpc>
+                <a:spcPct val="90000"/>
+              </a:lnSpc>
+              <a:spcBef>
+                <a:spcPts val="0"/>
+              </a:spcBef>
+              <a:spcAft>
+                <a:spcPts val="0"/>
+              </a:spcAft>
+              <a:buClr>
+                <a:schemeClr val="accent1"/>
+              </a:buClr>
+              <a:buSzPts val="3600"/>
+              <a:buFont typeface="Play"/>
+              <a:buNone/>
+              <a:defRPr>
+                <a:solidFill>
+                  <a:schemeClr val="accent1"/>
+                </a:solidFill>
+              </a:defRPr>
+            </a:lvl1pPr>
+            <a:lvl2pPr lvl="1">
+              <a:spcBef>
+                <a:spcPts val="0"/>
+              </a:spcBef>
+              <a:spcAft>
+                <a:spcPts val="0"/>
+              </a:spcAft>
+              <a:buSzPts val="1400"/>
+              <a:buNone/>
+              <a:defRPr/>
+            </a:lvl2pPr>
+            <a:lvl3pPr lvl="2">
+              <a:spcBef>
+                <a:spcPts val="0"/>
+              </a:spcBef>
+              <a:spcAft>
+                <a:spcPts val="0"/>
+              </a:spcAft>
+              <a:buSzPts val="1400"/>
+              <a:buNone/>
+              <a:defRPr/>
+            </a:lvl3pPr>
+            <a:lvl4pPr lvl="3">
+              <a:spcBef>
+                <a:spcPts val="0"/>
+              </a:spcBef>
+              <a:spcAft>
+                <a:spcPts val="0"/>
+              </a:spcAft>
+              <a:buSzPts val="1400"/>
+              <a:buNone/>
+              <a:defRPr/>
+            </a:lvl4pPr>
+            <a:lvl5pPr lvl="4">
+              <a:spcBef>
+                <a:spcPts val="0"/>
+              </a:spcBef>
+              <a:spcAft>
+                <a:spcPts val="0"/>
+              </a:spcAft>
+              <a:buSzPts val="1400"/>
+              <a:buNone/>
+              <a:defRPr/>
+            </a:lvl5pPr>
+            <a:lvl6pPr lvl="5">
+              <a:spcBef>
+                <a:spcPts val="0"/>
+              </a:spcBef>
+              <a:spcAft>
+                <a:spcPts val="0"/>
+              </a:spcAft>
+              <a:buSzPts val="1400"/>
+              <a:buNone/>
+              <a:defRPr/>
+            </a:lvl6pPr>
+            <a:lvl7pPr lvl="6">
+              <a:spcBef>
+                <a:spcPts val="0"/>
+              </a:spcBef>
+              <a:spcAft>
+                <a:spcPts val="0"/>
+              </a:spcAft>
+              <a:buSzPts val="1400"/>
+              <a:buNone/>
+              <a:defRPr/>
+            </a:lvl7pPr>
+            <a:lvl8pPr lvl="7">
+              <a:spcBef>
+                <a:spcPts val="0"/>
+              </a:spcBef>
+              <a:spcAft>
+                <a:spcPts val="0"/>
+              </a:spcAft>
+              <a:buSzPts val="1400"/>
+              <a:buNone/>
+              <a:defRPr/>
+            </a:lvl8pPr>
+            <a:lvl9pPr lvl="8">
+              <a:spcBef>
+                <a:spcPts val="0"/>
+              </a:spcBef>
+              <a:spcAft>
+                <a:spcPts val="0"/>
+              </a:spcAft>
+              <a:buSzPts val="1400"/>
+              <a:buNone/>
+              <a:defRPr/>
+            </a:lvl9pPr>
+          </a:lstStyle>
+          <a:p/>
+        </p:txBody>
+      </p:sp>
+      <p:sp>
+        <p:nvSpPr>
+          <p:cNvPr id="96" name="Google Shape;96;p11"/>
+          <p:cNvSpPr txBox="1"/>
+          <p:nvPr>
+            <p:ph idx="11" type="ftr"/>
+          </p:nvPr>
+        </p:nvSpPr>
+        <p:spPr>
+          <a:xfrm>
+            <a:off x="671513" y="167981"/>
+            <a:ext cx="10874375" cy="241437"/>
+          </a:xfrm>
+          <a:prstGeom prst="rect">
+            <a:avLst/>
+          </a:prstGeom>
+          <a:noFill/>
+          <a:ln>
+            <a:noFill/>
+          </a:ln>
+        </p:spPr>
+        <p:txBody>
+          <a:bodyPr anchorCtr="0" anchor="t" bIns="45700" lIns="0" spcFirstLastPara="1" rIns="91425" wrap="square" tIns="45700">
+            <a:noAutofit/>
+          </a:bodyPr>
+          <a:lstStyle>
+            <a:lvl1pPr lvl="0" marR="0" rtl="0" algn="l">
+              <a:spcBef>
+                <a:spcPts val="0"/>
+              </a:spcBef>
+              <a:spcAft>
+                <a:spcPts val="0"/>
+              </a:spcAft>
+              <a:buSzPts val="1400"/>
+              <a:buNone/>
+              <a:defRPr b="0" i="0" sz="1800" u="none" cap="none" strike="noStrike">
+                <a:solidFill>
+                  <a:schemeClr val="dk1"/>
+                </a:solidFill>
+                <a:latin typeface="Arial"/>
+                <a:ea typeface="Arial"/>
+                <a:cs typeface="Arial"/>
+                <a:sym typeface="Arial"/>
+              </a:defRPr>
+            </a:lvl1pPr>
+            <a:lvl2pPr lvl="1" marR="0" rtl="0" algn="l">
+              <a:spcBef>
+                <a:spcPts val="0"/>
+              </a:spcBef>
+              <a:spcAft>
+                <a:spcPts val="0"/>
+              </a:spcAft>
+              <a:buSzPts val="1400"/>
+              <a:buNone/>
+              <a:defRPr b="0" i="0" sz="1800" u="none" cap="none" strike="noStrike">
+                <a:solidFill>
+                  <a:schemeClr val="dk1"/>
+                </a:solidFill>
+                <a:latin typeface="Arial"/>
+                <a:ea typeface="Arial"/>
+                <a:cs typeface="Arial"/>
+                <a:sym typeface="Arial"/>
+              </a:defRPr>
+            </a:lvl2pPr>
+            <a:lvl3pPr lvl="2" marR="0" rtl="0" algn="l">
+              <a:spcBef>
+                <a:spcPts val="0"/>
+              </a:spcBef>
+              <a:spcAft>
+                <a:spcPts val="0"/>
+              </a:spcAft>
+              <a:buSzPts val="1400"/>
+              <a:buNone/>
+              <a:defRPr b="0" i="0" sz="1800" u="none" cap="none" strike="noStrike">
+                <a:solidFill>
+                  <a:schemeClr val="dk1"/>
+                </a:solidFill>
+                <a:latin typeface="Arial"/>
+                <a:ea typeface="Arial"/>
+                <a:cs typeface="Arial"/>
+                <a:sym typeface="Arial"/>
+              </a:defRPr>
+            </a:lvl3pPr>
+            <a:lvl4pPr lvl="3" marR="0" rtl="0" algn="l">
+              <a:spcBef>
+                <a:spcPts val="0"/>
+              </a:spcBef>
+              <a:spcAft>
+                <a:spcPts val="0"/>
+              </a:spcAft>
+              <a:buSzPts val="1400"/>
+              <a:buNone/>
+              <a:defRPr b="0" i="0" sz="1800" u="none" cap="none" strike="noStrike">
+                <a:solidFill>
+                  <a:schemeClr val="dk1"/>
+                </a:solidFill>
+                <a:latin typeface="Arial"/>
+                <a:ea typeface="Arial"/>
+                <a:cs typeface="Arial"/>
+                <a:sym typeface="Arial"/>
+              </a:defRPr>
+            </a:lvl4pPr>
+            <a:lvl5pPr lvl="4" marR="0" rtl="0" algn="l">
+              <a:spcBef>
+                <a:spcPts val="0"/>
+              </a:spcBef>
+              <a:spcAft>
+                <a:spcPts val="0"/>
+              </a:spcAft>
+              <a:buSzPts val="1400"/>
+              <a:buNone/>
+              <a:defRPr b="0" i="0" sz="1800" u="none" cap="none" strike="noStrike">
+                <a:solidFill>
+                  <a:schemeClr val="dk1"/>
+                </a:solidFill>
+                <a:latin typeface="Arial"/>
+                <a:ea typeface="Arial"/>
+                <a:cs typeface="Arial"/>
+                <a:sym typeface="Arial"/>
+              </a:defRPr>
+            </a:lvl5pPr>
+            <a:lvl6pPr lvl="5" marR="0" rtl="0" algn="l">
+              <a:spcBef>
+                <a:spcPts val="0"/>
+              </a:spcBef>
+              <a:spcAft>
+                <a:spcPts val="0"/>
+              </a:spcAft>
+              <a:buSzPts val="1400"/>
+              <a:buNone/>
+              <a:defRPr b="0" i="0" sz="1800" u="none" cap="none" strike="noStrike">
+                <a:solidFill>
+                  <a:schemeClr val="dk1"/>
+                </a:solidFill>
+                <a:latin typeface="Arial"/>
+                <a:ea typeface="Arial"/>
+                <a:cs typeface="Arial"/>
+                <a:sym typeface="Arial"/>
+              </a:defRPr>
+            </a:lvl6pPr>
+            <a:lvl7pPr lvl="6" marR="0" rtl="0" algn="l">
+              <a:spcBef>
+                <a:spcPts val="0"/>
+              </a:spcBef>
+              <a:spcAft>
+                <a:spcPts val="0"/>
+              </a:spcAft>
+              <a:buSzPts val="1400"/>
+              <a:buNone/>
+              <a:defRPr b="0" i="0" sz="1800" u="none" cap="none" strike="noStrike">
+                <a:solidFill>
+                  <a:schemeClr val="dk1"/>
+                </a:solidFill>
+                <a:latin typeface="Arial"/>
+                <a:ea typeface="Arial"/>
+                <a:cs typeface="Arial"/>
+                <a:sym typeface="Arial"/>
+              </a:defRPr>
+            </a:lvl7pPr>
+            <a:lvl8pPr lvl="7" marR="0" rtl="0" algn="l">
+              <a:spcBef>
+                <a:spcPts val="0"/>
+              </a:spcBef>
+              <a:spcAft>
+                <a:spcPts val="0"/>
+              </a:spcAft>
+              <a:buSzPts val="1400"/>
+              <a:buNone/>
+              <a:defRPr b="0" i="0" sz="1800" u="none" cap="none" strike="noStrike">
+                <a:solidFill>
+                  <a:schemeClr val="dk1"/>
+                </a:solidFill>
+                <a:latin typeface="Arial"/>
+                <a:ea typeface="Arial"/>
+                <a:cs typeface="Arial"/>
+                <a:sym typeface="Arial"/>
+              </a:defRPr>
+            </a:lvl8pPr>
+            <a:lvl9pPr lvl="8" marR="0" rtl="0" algn="l">
+              <a:spcBef>
+                <a:spcPts val="0"/>
+              </a:spcBef>
+              <a:spcAft>
+                <a:spcPts val="0"/>
+              </a:spcAft>
+              <a:buSzPts val="1400"/>
+              <a:buNone/>
+              <a:defRPr b="0" i="0" sz="1800" u="none" cap="none" strike="noStrike">
+                <a:solidFill>
+                  <a:schemeClr val="dk1"/>
+                </a:solidFill>
+                <a:latin typeface="Arial"/>
+                <a:ea typeface="Arial"/>
+                <a:cs typeface="Arial"/>
+                <a:sym typeface="Arial"/>
+              </a:defRPr>
+            </a:lvl9pPr>
+          </a:lstStyle>
+          <a:p/>
+        </p:txBody>
+      </p:sp>
+      <p:sp>
+        <p:nvSpPr>
+          <p:cNvPr id="97" name="Google Shape;97;p11"/>
+          <p:cNvSpPr txBox="1"/>
+          <p:nvPr>
+            <p:ph idx="2" type="body"/>
+          </p:nvPr>
+        </p:nvSpPr>
+        <p:spPr>
+          <a:xfrm>
+            <a:off x="6097339" y="3864033"/>
+            <a:ext cx="5417327" cy="1080000"/>
+          </a:xfrm>
+          <a:prstGeom prst="rect">
+            <a:avLst/>
+          </a:prstGeom>
+          <a:noFill/>
+          <a:ln>
+            <a:noFill/>
+          </a:ln>
+        </p:spPr>
+        <p:txBody>
+          <a:bodyPr anchorCtr="0" anchor="b" bIns="0" lIns="0" spcFirstLastPara="1" rIns="0" wrap="square" tIns="0">
+            <a:noAutofit/>
+          </a:bodyPr>
+          <a:lstStyle>
+            <a:lvl1pPr indent="-228600" lvl="0" marL="457200" algn="l">
+              <a:lnSpc>
+                <a:spcPct val="100000"/>
+              </a:lnSpc>
+              <a:spcBef>
+                <a:spcPts val="1000"/>
+              </a:spcBef>
+              <a:spcAft>
+                <a:spcPts val="0"/>
+              </a:spcAft>
+              <a:buClr>
+                <a:schemeClr val="dk1"/>
+              </a:buClr>
+              <a:buSzPts val="8800"/>
+              <a:buNone/>
+              <a:defRPr b="1" i="0" sz="8800">
+                <a:solidFill>
+                  <a:schemeClr val="dk1"/>
+                </a:solidFill>
+                <a:latin typeface="Play"/>
+                <a:ea typeface="Play"/>
+                <a:cs typeface="Play"/>
+                <a:sym typeface="Play"/>
+              </a:defRPr>
+            </a:lvl1pPr>
+            <a:lvl2pPr indent="-342900" lvl="1" marL="914400" algn="l">
+              <a:lnSpc>
+                <a:spcPct val="110000"/>
+              </a:lnSpc>
+              <a:spcBef>
+                <a:spcPts val="500"/>
+              </a:spcBef>
+              <a:spcAft>
+                <a:spcPts val="0"/>
+              </a:spcAft>
+              <a:buSzPts val="1800"/>
+              <a:buChar char="•"/>
+              <a:defRPr/>
+            </a:lvl2pPr>
+            <a:lvl3pPr indent="-342900" lvl="2" marL="1371600" algn="l">
+              <a:lnSpc>
+                <a:spcPct val="110000"/>
+              </a:lnSpc>
+              <a:spcBef>
+                <a:spcPts val="500"/>
+              </a:spcBef>
+              <a:spcAft>
+                <a:spcPts val="0"/>
+              </a:spcAft>
+              <a:buClr>
+                <a:schemeClr val="dk1"/>
+              </a:buClr>
+              <a:buSzPts val="1800"/>
+              <a:buChar char="−"/>
+              <a:defRPr/>
+            </a:lvl3pPr>
+            <a:lvl4pPr indent="-342900" lvl="3" marL="1828800" algn="l">
+              <a:lnSpc>
+                <a:spcPct val="90000"/>
+              </a:lnSpc>
+              <a:spcBef>
+                <a:spcPts val="500"/>
+              </a:spcBef>
+              <a:spcAft>
+                <a:spcPts val="0"/>
+              </a:spcAft>
+              <a:buClr>
+                <a:schemeClr val="dk1"/>
+              </a:buClr>
+              <a:buSzPts val="1800"/>
+              <a:buChar char="•"/>
+              <a:defRPr/>
+            </a:lvl4pPr>
+            <a:lvl5pPr indent="-342900" lvl="4" marL="2286000" algn="l">
+              <a:lnSpc>
+                <a:spcPct val="90000"/>
+              </a:lnSpc>
+              <a:spcBef>
+                <a:spcPts val="500"/>
+              </a:spcBef>
+              <a:spcAft>
+                <a:spcPts val="0"/>
+              </a:spcAft>
+              <a:buClr>
+                <a:schemeClr val="dk1"/>
+              </a:buClr>
+              <a:buSzPts val="1800"/>
+              <a:buChar char="•"/>
+              <a:defRPr/>
+            </a:lvl5pPr>
+            <a:lvl6pPr indent="-342900" lvl="5" marL="2743200" algn="l">
+              <a:lnSpc>
+                <a:spcPct val="90000"/>
+              </a:lnSpc>
+              <a:spcBef>
+                <a:spcPts val="500"/>
+              </a:spcBef>
+              <a:spcAft>
+                <a:spcPts val="0"/>
+              </a:spcAft>
+              <a:buClr>
+                <a:schemeClr val="dk1"/>
+              </a:buClr>
+              <a:buSzPts val="1800"/>
+              <a:buChar char="•"/>
+              <a:defRPr/>
+            </a:lvl6pPr>
+            <a:lvl7pPr indent="-342900" lvl="6" marL="3200400" algn="l">
+              <a:lnSpc>
+                <a:spcPct val="90000"/>
+              </a:lnSpc>
+              <a:spcBef>
+                <a:spcPts val="500"/>
+              </a:spcBef>
+              <a:spcAft>
+                <a:spcPts val="0"/>
+              </a:spcAft>
+              <a:buClr>
+                <a:schemeClr val="dk1"/>
+              </a:buClr>
+              <a:buSzPts val="1800"/>
+              <a:buChar char="•"/>
+              <a:defRPr/>
+            </a:lvl7pPr>
+            <a:lvl8pPr indent="-342900" lvl="7" marL="3657600" algn="l">
+              <a:lnSpc>
+                <a:spcPct val="90000"/>
+              </a:lnSpc>
+              <a:spcBef>
+                <a:spcPts val="500"/>
+              </a:spcBef>
+              <a:spcAft>
+                <a:spcPts val="0"/>
+              </a:spcAft>
+              <a:buClr>
+                <a:schemeClr val="dk1"/>
+              </a:buClr>
+              <a:buSzPts val="1800"/>
+              <a:buChar char="•"/>
+              <a:defRPr/>
+            </a:lvl8pPr>
+            <a:lvl9pPr indent="-342900" lvl="8" marL="4114800" algn="l">
+              <a:lnSpc>
+                <a:spcPct val="90000"/>
+              </a:lnSpc>
+              <a:spcBef>
+                <a:spcPts val="500"/>
+              </a:spcBef>
+              <a:spcAft>
+                <a:spcPts val="0"/>
+              </a:spcAft>
+              <a:buClr>
+                <a:schemeClr val="dk1"/>
+              </a:buClr>
+              <a:buSzPts val="1800"/>
+              <a:buChar char="•"/>
+              <a:defRPr/>
+            </a:lvl9pPr>
+          </a:lstStyle>
+          <a:p/>
+        </p:txBody>
+      </p:sp>
+      <p:sp>
+        <p:nvSpPr>
+          <p:cNvPr id="98" name="Google Shape;98;p11"/>
+          <p:cNvSpPr txBox="1"/>
+          <p:nvPr>
+            <p:ph idx="3" type="body"/>
+          </p:nvPr>
+        </p:nvSpPr>
+        <p:spPr>
+          <a:xfrm>
+            <a:off x="6097338" y="5058095"/>
+            <a:ext cx="5417327" cy="356617"/>
+          </a:xfrm>
+          <a:prstGeom prst="rect">
+            <a:avLst/>
+          </a:prstGeom>
+          <a:noFill/>
+          <a:ln>
+            <a:noFill/>
+          </a:ln>
+        </p:spPr>
+        <p:txBody>
+          <a:bodyPr anchorCtr="0" anchor="t" bIns="0" lIns="0" spcFirstLastPara="1" rIns="0" wrap="square" tIns="0">
+            <a:normAutofit/>
+          </a:bodyPr>
+          <a:lstStyle>
+            <a:lvl1pPr indent="-228600" lvl="0" marL="457200" algn="l">
+              <a:lnSpc>
+                <a:spcPct val="110000"/>
+              </a:lnSpc>
+              <a:spcBef>
+                <a:spcPts val="1000"/>
+              </a:spcBef>
+              <a:spcAft>
+                <a:spcPts val="0"/>
+              </a:spcAft>
+              <a:buClr>
+                <a:schemeClr val="dk1"/>
+              </a:buClr>
+              <a:buSzPts val="1800"/>
+              <a:buNone/>
+              <a:defRPr sz="1800"/>
+            </a:lvl1pPr>
+            <a:lvl2pPr indent="-342900" lvl="1" marL="914400" algn="l">
+              <a:lnSpc>
+                <a:spcPct val="110000"/>
+              </a:lnSpc>
+              <a:spcBef>
+                <a:spcPts val="500"/>
+              </a:spcBef>
+              <a:spcAft>
+                <a:spcPts val="0"/>
+              </a:spcAft>
+              <a:buSzPts val="1800"/>
+              <a:buChar char="•"/>
+              <a:defRPr/>
+            </a:lvl2pPr>
+            <a:lvl3pPr indent="-342900" lvl="2" marL="1371600" algn="l">
+              <a:lnSpc>
+                <a:spcPct val="110000"/>
+              </a:lnSpc>
+              <a:spcBef>
+                <a:spcPts val="500"/>
+              </a:spcBef>
+              <a:spcAft>
+                <a:spcPts val="0"/>
+              </a:spcAft>
+              <a:buClr>
+                <a:schemeClr val="dk1"/>
+              </a:buClr>
+              <a:buSzPts val="1800"/>
+              <a:buChar char="−"/>
+              <a:defRPr/>
+            </a:lvl3pPr>
+            <a:lvl4pPr indent="-342900" lvl="3" marL="1828800" algn="l">
+              <a:lnSpc>
+                <a:spcPct val="90000"/>
+              </a:lnSpc>
+              <a:spcBef>
+                <a:spcPts val="500"/>
+              </a:spcBef>
+              <a:spcAft>
+                <a:spcPts val="0"/>
+              </a:spcAft>
+              <a:buClr>
+                <a:schemeClr val="dk1"/>
+              </a:buClr>
+              <a:buSzPts val="1800"/>
+              <a:buChar char="•"/>
+              <a:defRPr/>
+            </a:lvl4pPr>
+            <a:lvl5pPr indent="-342900" lvl="4" marL="2286000" algn="l">
+              <a:lnSpc>
+                <a:spcPct val="90000"/>
+              </a:lnSpc>
+              <a:spcBef>
+                <a:spcPts val="500"/>
+              </a:spcBef>
+              <a:spcAft>
+                <a:spcPts val="0"/>
+              </a:spcAft>
+              <a:buClr>
+                <a:schemeClr val="dk1"/>
+              </a:buClr>
+              <a:buSzPts val="1800"/>
+              <a:buChar char="•"/>
+              <a:defRPr/>
+            </a:lvl5pPr>
+            <a:lvl6pPr indent="-342900" lvl="5" marL="2743200" algn="l">
+              <a:lnSpc>
+                <a:spcPct val="90000"/>
+              </a:lnSpc>
+              <a:spcBef>
+                <a:spcPts val="500"/>
+              </a:spcBef>
+              <a:spcAft>
+                <a:spcPts val="0"/>
+              </a:spcAft>
+              <a:buClr>
+                <a:schemeClr val="dk1"/>
+              </a:buClr>
+              <a:buSzPts val="1800"/>
+              <a:buChar char="•"/>
+              <a:defRPr/>
+            </a:lvl6pPr>
+            <a:lvl7pPr indent="-342900" lvl="6" marL="3200400" algn="l">
+              <a:lnSpc>
+                <a:spcPct val="90000"/>
+              </a:lnSpc>
+              <a:spcBef>
+                <a:spcPts val="500"/>
+              </a:spcBef>
+              <a:spcAft>
+                <a:spcPts val="0"/>
+              </a:spcAft>
+              <a:buClr>
+                <a:schemeClr val="dk1"/>
+              </a:buClr>
+              <a:buSzPts val="1800"/>
+              <a:buChar char="•"/>
+              <a:defRPr/>
+            </a:lvl7pPr>
+            <a:lvl8pPr indent="-342900" lvl="7" marL="3657600" algn="l">
+              <a:lnSpc>
+                <a:spcPct val="90000"/>
+              </a:lnSpc>
+              <a:spcBef>
+                <a:spcPts val="500"/>
+              </a:spcBef>
+              <a:spcAft>
+                <a:spcPts val="0"/>
+              </a:spcAft>
+              <a:buClr>
+                <a:schemeClr val="dk1"/>
+              </a:buClr>
+              <a:buSzPts val="1800"/>
+              <a:buChar char="•"/>
+              <a:defRPr/>
+            </a:lvl8pPr>
+            <a:lvl9pPr indent="-342900" lvl="8" marL="4114800" algn="l">
+              <a:lnSpc>
+                <a:spcPct val="90000"/>
+              </a:lnSpc>
+              <a:spcBef>
+                <a:spcPts val="500"/>
+              </a:spcBef>
+              <a:spcAft>
+                <a:spcPts val="0"/>
+              </a:spcAft>
+              <a:buClr>
+                <a:schemeClr val="dk1"/>
+              </a:buClr>
+              <a:buSzPts val="1800"/>
+              <a:buChar char="•"/>
+              <a:defRPr/>
+            </a:lvl9pPr>
+          </a:lstStyle>
+          <a:p/>
+        </p:txBody>
+      </p:sp>
+      <p:sp>
+        <p:nvSpPr>
+          <p:cNvPr id="99" name="Google Shape;99;p11"/>
+          <p:cNvSpPr txBox="1"/>
+          <p:nvPr>
+            <p:ph idx="4" type="body"/>
+          </p:nvPr>
+        </p:nvSpPr>
+        <p:spPr>
+          <a:xfrm>
+            <a:off x="6096000" y="1773238"/>
+            <a:ext cx="5417327" cy="1080000"/>
+          </a:xfrm>
+          <a:prstGeom prst="rect">
+            <a:avLst/>
+          </a:prstGeom>
+          <a:noFill/>
+          <a:ln>
+            <a:noFill/>
+          </a:ln>
+        </p:spPr>
+        <p:txBody>
+          <a:bodyPr anchorCtr="0" anchor="b" bIns="0" lIns="0" spcFirstLastPara="1" rIns="0" wrap="square" tIns="0">
+            <a:noAutofit/>
+          </a:bodyPr>
+          <a:lstStyle>
+            <a:lvl1pPr indent="-228600" lvl="0" marL="457200" algn="l">
+              <a:lnSpc>
+                <a:spcPct val="100000"/>
+              </a:lnSpc>
+              <a:spcBef>
+                <a:spcPts val="1000"/>
+              </a:spcBef>
+              <a:spcAft>
+                <a:spcPts val="0"/>
+              </a:spcAft>
+              <a:buClr>
+                <a:schemeClr val="dk1"/>
+              </a:buClr>
+              <a:buSzPts val="8800"/>
+              <a:buNone/>
+              <a:defRPr b="1" i="0" sz="8800">
+                <a:solidFill>
+                  <a:schemeClr val="dk1"/>
+                </a:solidFill>
+                <a:latin typeface="Play"/>
+                <a:ea typeface="Play"/>
+                <a:cs typeface="Play"/>
+                <a:sym typeface="Play"/>
+              </a:defRPr>
+            </a:lvl1pPr>
+            <a:lvl2pPr indent="-342900" lvl="1" marL="914400" algn="l">
+              <a:lnSpc>
+                <a:spcPct val="110000"/>
+              </a:lnSpc>
+              <a:spcBef>
+                <a:spcPts val="500"/>
+              </a:spcBef>
+              <a:spcAft>
+                <a:spcPts val="0"/>
+              </a:spcAft>
+              <a:buSzPts val="1800"/>
+              <a:buChar char="•"/>
+              <a:defRPr/>
+            </a:lvl2pPr>
+            <a:lvl3pPr indent="-342900" lvl="2" marL="1371600" algn="l">
+              <a:lnSpc>
+                <a:spcPct val="110000"/>
+              </a:lnSpc>
+              <a:spcBef>
+                <a:spcPts val="500"/>
+              </a:spcBef>
+              <a:spcAft>
+                <a:spcPts val="0"/>
+              </a:spcAft>
+              <a:buClr>
+                <a:schemeClr val="dk1"/>
+              </a:buClr>
+              <a:buSzPts val="1800"/>
+              <a:buChar char="−"/>
+              <a:defRPr/>
+            </a:lvl3pPr>
+            <a:lvl4pPr indent="-342900" lvl="3" marL="1828800" algn="l">
+              <a:lnSpc>
+                <a:spcPct val="90000"/>
+              </a:lnSpc>
+              <a:spcBef>
+                <a:spcPts val="500"/>
+              </a:spcBef>
+              <a:spcAft>
+                <a:spcPts val="0"/>
+              </a:spcAft>
+              <a:buClr>
+                <a:schemeClr val="dk1"/>
+              </a:buClr>
+              <a:buSzPts val="1800"/>
+              <a:buChar char="•"/>
+              <a:defRPr/>
+            </a:lvl4pPr>
+            <a:lvl5pPr indent="-342900" lvl="4" marL="2286000" algn="l">
+              <a:lnSpc>
+                <a:spcPct val="90000"/>
+              </a:lnSpc>
+              <a:spcBef>
+                <a:spcPts val="500"/>
+              </a:spcBef>
+              <a:spcAft>
+                <a:spcPts val="0"/>
+              </a:spcAft>
+              <a:buClr>
+                <a:schemeClr val="dk1"/>
+              </a:buClr>
+              <a:buSzPts val="1800"/>
+              <a:buChar char="•"/>
+              <a:defRPr/>
+            </a:lvl5pPr>
+            <a:lvl6pPr indent="-342900" lvl="5" marL="2743200" algn="l">
+              <a:lnSpc>
+                <a:spcPct val="90000"/>
+              </a:lnSpc>
+              <a:spcBef>
+                <a:spcPts val="500"/>
+              </a:spcBef>
+              <a:spcAft>
+                <a:spcPts val="0"/>
+              </a:spcAft>
+              <a:buClr>
+                <a:schemeClr val="dk1"/>
+              </a:buClr>
+              <a:buSzPts val="1800"/>
+              <a:buChar char="•"/>
+              <a:defRPr/>
+            </a:lvl6pPr>
+            <a:lvl7pPr indent="-342900" lvl="6" marL="3200400" algn="l">
+              <a:lnSpc>
+                <a:spcPct val="90000"/>
+              </a:lnSpc>
+              <a:spcBef>
+                <a:spcPts val="500"/>
+              </a:spcBef>
+              <a:spcAft>
+                <a:spcPts val="0"/>
+              </a:spcAft>
+              <a:buClr>
+                <a:schemeClr val="dk1"/>
+              </a:buClr>
+              <a:buSzPts val="1800"/>
+              <a:buChar char="•"/>
+              <a:defRPr/>
+            </a:lvl7pPr>
+            <a:lvl8pPr indent="-342900" lvl="7" marL="3657600" algn="l">
+              <a:lnSpc>
+                <a:spcPct val="90000"/>
+              </a:lnSpc>
+              <a:spcBef>
+                <a:spcPts val="500"/>
+              </a:spcBef>
+              <a:spcAft>
+                <a:spcPts val="0"/>
+              </a:spcAft>
+              <a:buClr>
+                <a:schemeClr val="dk1"/>
+              </a:buClr>
+              <a:buSzPts val="1800"/>
+              <a:buChar char="•"/>
+              <a:defRPr/>
+            </a:lvl8pPr>
+            <a:lvl9pPr indent="-342900" lvl="8" marL="4114800" algn="l">
+              <a:lnSpc>
+                <a:spcPct val="90000"/>
+              </a:lnSpc>
+              <a:spcBef>
+                <a:spcPts val="500"/>
+              </a:spcBef>
+              <a:spcAft>
+                <a:spcPts val="0"/>
+              </a:spcAft>
+              <a:buClr>
+                <a:schemeClr val="dk1"/>
+              </a:buClr>
+              <a:buSzPts val="1800"/>
+              <a:buChar char="•"/>
+              <a:defRPr/>
+            </a:lvl9pPr>
+          </a:lstStyle>
+          <a:p/>
+        </p:txBody>
+      </p:sp>
+      <p:sp>
+        <p:nvSpPr>
+          <p:cNvPr id="100" name="Google Shape;100;p11"/>
+          <p:cNvSpPr txBox="1"/>
+          <p:nvPr>
+            <p:ph idx="5" type="body"/>
+          </p:nvPr>
+        </p:nvSpPr>
+        <p:spPr>
+          <a:xfrm>
+            <a:off x="6096000" y="2967300"/>
+            <a:ext cx="5417327" cy="356617"/>
+          </a:xfrm>
+          <a:prstGeom prst="rect">
+            <a:avLst/>
+          </a:prstGeom>
+          <a:noFill/>
+          <a:ln>
+            <a:noFill/>
+          </a:ln>
+        </p:spPr>
+        <p:txBody>
+          <a:bodyPr anchorCtr="0" anchor="t" bIns="0" lIns="0" spcFirstLastPara="1" rIns="0" wrap="square" tIns="0">
+            <a:normAutofit/>
+          </a:bodyPr>
+          <a:lstStyle>
+            <a:lvl1pPr indent="-228600" lvl="0" marL="457200" algn="l">
+              <a:lnSpc>
+                <a:spcPct val="110000"/>
+              </a:lnSpc>
+              <a:spcBef>
+                <a:spcPts val="1000"/>
+              </a:spcBef>
+              <a:spcAft>
+                <a:spcPts val="0"/>
+              </a:spcAft>
+              <a:buClr>
+                <a:schemeClr val="dk1"/>
+              </a:buClr>
+              <a:buSzPts val="1800"/>
+              <a:buNone/>
+              <a:defRPr sz="1800"/>
+            </a:lvl1pPr>
+            <a:lvl2pPr indent="-342900" lvl="1" marL="914400" algn="l">
+              <a:lnSpc>
+                <a:spcPct val="110000"/>
+              </a:lnSpc>
+              <a:spcBef>
+                <a:spcPts val="500"/>
+              </a:spcBef>
+              <a:spcAft>
+                <a:spcPts val="0"/>
+              </a:spcAft>
+              <a:buSzPts val="1800"/>
+              <a:buChar char="•"/>
+              <a:defRPr/>
+            </a:lvl2pPr>
+            <a:lvl3pPr indent="-342900" lvl="2" marL="1371600" algn="l">
+              <a:lnSpc>
+                <a:spcPct val="110000"/>
+              </a:lnSpc>
+              <a:spcBef>
+                <a:spcPts val="500"/>
+              </a:spcBef>
+              <a:spcAft>
+                <a:spcPts val="0"/>
+              </a:spcAft>
+              <a:buClr>
+                <a:schemeClr val="dk1"/>
+              </a:buClr>
+              <a:buSzPts val="1800"/>
+              <a:buChar char="−"/>
+              <a:defRPr/>
+            </a:lvl3pPr>
+            <a:lvl4pPr indent="-342900" lvl="3" marL="1828800" algn="l">
+              <a:lnSpc>
+                <a:spcPct val="90000"/>
+              </a:lnSpc>
+              <a:spcBef>
+                <a:spcPts val="500"/>
+              </a:spcBef>
+              <a:spcAft>
+                <a:spcPts val="0"/>
+              </a:spcAft>
+              <a:buClr>
+                <a:schemeClr val="dk1"/>
+              </a:buClr>
+              <a:buSzPts val="1800"/>
+              <a:buChar char="•"/>
+              <a:defRPr/>
+            </a:lvl4pPr>
+            <a:lvl5pPr indent="-342900" lvl="4" marL="2286000" algn="l">
+              <a:lnSpc>
+                <a:spcPct val="90000"/>
+              </a:lnSpc>
+              <a:spcBef>
+                <a:spcPts val="500"/>
+              </a:spcBef>
+              <a:spcAft>
+                <a:spcPts val="0"/>
+              </a:spcAft>
+              <a:buClr>
+                <a:schemeClr val="dk1"/>
+              </a:buClr>
+              <a:buSzPts val="1800"/>
+              <a:buChar char="•"/>
+              <a:defRPr/>
+            </a:lvl5pPr>
+            <a:lvl6pPr indent="-342900" lvl="5" marL="2743200" algn="l">
+              <a:lnSpc>
+                <a:spcPct val="90000"/>
+              </a:lnSpc>
+              <a:spcBef>
+                <a:spcPts val="500"/>
+              </a:spcBef>
+              <a:spcAft>
+                <a:spcPts val="0"/>
+              </a:spcAft>
+              <a:buClr>
+                <a:schemeClr val="dk1"/>
+              </a:buClr>
+              <a:buSzPts val="1800"/>
+              <a:buChar char="•"/>
+              <a:defRPr/>
+            </a:lvl6pPr>
+            <a:lvl7pPr indent="-342900" lvl="6" marL="3200400" algn="l">
+              <a:lnSpc>
+                <a:spcPct val="90000"/>
+              </a:lnSpc>
+              <a:spcBef>
+                <a:spcPts val="500"/>
+              </a:spcBef>
+              <a:spcAft>
+                <a:spcPts val="0"/>
+              </a:spcAft>
+              <a:buClr>
+                <a:schemeClr val="dk1"/>
+              </a:buClr>
+              <a:buSzPts val="1800"/>
+              <a:buChar char="•"/>
+              <a:defRPr/>
+            </a:lvl7pPr>
+            <a:lvl8pPr indent="-342900" lvl="7" marL="3657600" algn="l">
+              <a:lnSpc>
+                <a:spcPct val="90000"/>
+              </a:lnSpc>
+              <a:spcBef>
+                <a:spcPts val="500"/>
+              </a:spcBef>
+              <a:spcAft>
+                <a:spcPts val="0"/>
+              </a:spcAft>
+              <a:buClr>
+                <a:schemeClr val="dk1"/>
+              </a:buClr>
+              <a:buSzPts val="1800"/>
+              <a:buChar char="•"/>
+              <a:defRPr/>
+            </a:lvl8pPr>
+            <a:lvl9pPr indent="-342900" lvl="8" marL="4114800" algn="l">
+              <a:lnSpc>
+                <a:spcPct val="90000"/>
+              </a:lnSpc>
+              <a:spcBef>
+                <a:spcPts val="500"/>
+              </a:spcBef>
+              <a:spcAft>
+                <a:spcPts val="0"/>
+              </a:spcAft>
+              <a:buClr>
+                <a:schemeClr val="dk1"/>
+              </a:buClr>
+              <a:buSzPts val="1800"/>
+              <a:buChar char="•"/>
+              <a:defRPr/>
+            </a:lvl9pPr>
+          </a:lstStyle>
+          <a:p/>
+        </p:txBody>
+      </p:sp>
+    </p:spTree>
+  </p:cSld>
+  <p:clrMapOvr>
+    <a:masterClrMapping/>
+  </p:clrMapOvr>
+</p:sldLayout>
+</file>
+
+<file path=ppt/slideLayouts/slideLayout12.xml><?xml version="1.0" encoding="utf-8"?>
+<p:sldLayout xmlns:a="http://schemas.openxmlformats.org/drawingml/2006/main" xmlns:r="http://schemas.openxmlformats.org/officeDocument/2006/relationships" xmlns:mc="http://schemas.openxmlformats.org/markup-compatibility/2006" xmlns:mv="urn:schemas-microsoft-com:mac:vml" xmlns:p="http://schemas.openxmlformats.org/presentationml/2006/main" xmlns:c="http://schemas.openxmlformats.org/drawingml/2006/chart" xmlns:dgm="http://schemas.openxmlformats.org/drawingml/2006/diagram" xmlns:o="urn:schemas-microsoft-com:office:office" xmlns:v="urn:schemas-microsoft-com:vml" xmlns:pvml="urn:schemas-microsoft-com:office:powerpoint" xmlns:com="http://schemas.openxmlformats.org/drawingml/2006/compatibility" xmlns:p14="http://schemas.microsoft.com/office/powerpoint/2010/main" xmlns:p15="http://schemas.microsoft.com/office/powerpoint/2012/main" xmlns:ahyp="http://schemas.microsoft.com/office/drawing/2018/hyperlinkcolor" matchingName="2_Заголовок + текст в две колонки">
+  <p:cSld name="2_Заголовок + текст в две колонки">
+    <p:bg>
+      <p:bgPr>
+        <a:solidFill>
+          <a:schemeClr val="lt2"/>
+        </a:solidFill>
+      </p:bgPr>
+    </p:bg>
+    <p:spTree>
+      <p:nvGrpSpPr>
+        <p:cNvPr id="107" name="Shape 107"/>
+        <p:cNvGrpSpPr/>
+        <p:nvPr/>
+      </p:nvGrpSpPr>
+      <p:grpSpPr>
+        <a:xfrm>
+          <a:off x="0" y="0"/>
+          <a:ext cx="0" cy="0"/>
+          <a:chOff x="0" y="0"/>
+          <a:chExt cx="0" cy="0"/>
+        </a:xfrm>
+      </p:grpSpPr>
+      <p:sp>
+        <p:nvSpPr>
+          <p:cNvPr id="108" name="Google Shape;108;p13"/>
+          <p:cNvSpPr txBox="1"/>
+          <p:nvPr>
+            <p:ph idx="1" type="body"/>
+          </p:nvPr>
+        </p:nvSpPr>
+        <p:spPr>
+          <a:xfrm>
+            <a:off x="677334" y="1773238"/>
+            <a:ext cx="5304365" cy="4427537"/>
+          </a:xfrm>
+          <a:prstGeom prst="rect">
+            <a:avLst/>
+          </a:prstGeom>
+          <a:noFill/>
+          <a:ln>
+            <a:noFill/>
+          </a:ln>
+        </p:spPr>
+        <p:txBody>
+          <a:bodyPr anchorCtr="0" anchor="t" bIns="0" lIns="0" spcFirstLastPara="1" rIns="0" wrap="square" tIns="0">
+            <a:normAutofit/>
+          </a:bodyPr>
+          <a:lstStyle>
+            <a:lvl1pPr indent="-228600" lvl="0" marL="457200" algn="l">
+              <a:lnSpc>
+                <a:spcPct val="110000"/>
+              </a:lnSpc>
+              <a:spcBef>
+                <a:spcPts val="1000"/>
+              </a:spcBef>
+              <a:spcAft>
+                <a:spcPts val="0"/>
+              </a:spcAft>
+              <a:buClr>
+                <a:schemeClr val="dk1"/>
+              </a:buClr>
+              <a:buSzPts val="1600"/>
+              <a:buNone/>
+              <a:defRPr b="0" i="0">
+                <a:latin typeface="Play"/>
+                <a:ea typeface="Play"/>
+                <a:cs typeface="Play"/>
+                <a:sym typeface="Play"/>
+              </a:defRPr>
+            </a:lvl1pPr>
+            <a:lvl2pPr indent="-317500" lvl="1" marL="914400" algn="l">
+              <a:lnSpc>
+                <a:spcPct val="110000"/>
+              </a:lnSpc>
+              <a:spcBef>
+                <a:spcPts val="500"/>
+              </a:spcBef>
+              <a:spcAft>
+                <a:spcPts val="0"/>
+              </a:spcAft>
+              <a:buSzPts val="1400"/>
+              <a:buChar char="•"/>
+              <a:defRPr b="0" i="0">
+                <a:latin typeface="Play"/>
+                <a:ea typeface="Play"/>
+                <a:cs typeface="Play"/>
+                <a:sym typeface="Play"/>
+              </a:defRPr>
+            </a:lvl2pPr>
+            <a:lvl3pPr indent="-304800" lvl="2" marL="1371600" algn="l">
+              <a:lnSpc>
+                <a:spcPct val="110000"/>
+              </a:lnSpc>
+              <a:spcBef>
+                <a:spcPts val="500"/>
+              </a:spcBef>
+              <a:spcAft>
+                <a:spcPts val="0"/>
+              </a:spcAft>
+              <a:buClr>
+                <a:schemeClr val="dk1"/>
+              </a:buClr>
+              <a:buSzPts val="1200"/>
+              <a:buChar char="−"/>
+              <a:defRPr b="0" i="0">
+                <a:latin typeface="Play"/>
+                <a:ea typeface="Play"/>
+                <a:cs typeface="Play"/>
+                <a:sym typeface="Play"/>
+              </a:defRPr>
+            </a:lvl3pPr>
+            <a:lvl4pPr indent="-342900" lvl="3" marL="1828800" algn="l">
+              <a:lnSpc>
+                <a:spcPct val="90000"/>
+              </a:lnSpc>
+              <a:spcBef>
+                <a:spcPts val="500"/>
+              </a:spcBef>
+              <a:spcAft>
+                <a:spcPts val="0"/>
+              </a:spcAft>
+              <a:buClr>
+                <a:schemeClr val="dk1"/>
+              </a:buClr>
+              <a:buSzPts val="1800"/>
+              <a:buChar char="•"/>
+              <a:defRPr/>
+            </a:lvl4pPr>
+            <a:lvl5pPr indent="-342900" lvl="4" marL="2286000" algn="l">
+              <a:lnSpc>
+                <a:spcPct val="90000"/>
+              </a:lnSpc>
+              <a:spcBef>
+                <a:spcPts val="500"/>
+              </a:spcBef>
+              <a:spcAft>
+                <a:spcPts val="0"/>
+              </a:spcAft>
+              <a:buClr>
+                <a:schemeClr val="dk1"/>
+              </a:buClr>
+              <a:buSzPts val="1800"/>
+              <a:buChar char="•"/>
+              <a:defRPr/>
+            </a:lvl5pPr>
+            <a:lvl6pPr indent="-342900" lvl="5" marL="2743200" algn="l">
+              <a:lnSpc>
+                <a:spcPct val="90000"/>
+              </a:lnSpc>
+              <a:spcBef>
+                <a:spcPts val="500"/>
+              </a:spcBef>
+              <a:spcAft>
+                <a:spcPts val="0"/>
+              </a:spcAft>
+              <a:buClr>
+                <a:schemeClr val="dk1"/>
+              </a:buClr>
+              <a:buSzPts val="1800"/>
+              <a:buChar char="•"/>
+              <a:defRPr/>
+            </a:lvl6pPr>
+            <a:lvl7pPr indent="-342900" lvl="6" marL="3200400" algn="l">
+              <a:lnSpc>
+                <a:spcPct val="90000"/>
+              </a:lnSpc>
+              <a:spcBef>
+                <a:spcPts val="500"/>
+              </a:spcBef>
+              <a:spcAft>
+                <a:spcPts val="0"/>
+              </a:spcAft>
+              <a:buClr>
+                <a:schemeClr val="dk1"/>
+              </a:buClr>
+              <a:buSzPts val="1800"/>
+              <a:buChar char="•"/>
+              <a:defRPr/>
+            </a:lvl7pPr>
+            <a:lvl8pPr indent="-342900" lvl="7" marL="3657600" algn="l">
+              <a:lnSpc>
+                <a:spcPct val="90000"/>
+              </a:lnSpc>
+              <a:spcBef>
+                <a:spcPts val="500"/>
+              </a:spcBef>
+              <a:spcAft>
+                <a:spcPts val="0"/>
+              </a:spcAft>
+              <a:buClr>
+                <a:schemeClr val="dk1"/>
+              </a:buClr>
+              <a:buSzPts val="1800"/>
+              <a:buChar char="•"/>
+              <a:defRPr/>
+            </a:lvl8pPr>
+            <a:lvl9pPr indent="-342900" lvl="8" marL="4114800" algn="l">
+              <a:lnSpc>
+                <a:spcPct val="90000"/>
+              </a:lnSpc>
+              <a:spcBef>
+                <a:spcPts val="500"/>
+              </a:spcBef>
+              <a:spcAft>
+                <a:spcPts val="0"/>
+              </a:spcAft>
+              <a:buClr>
+                <a:schemeClr val="dk1"/>
+              </a:buClr>
+              <a:buSzPts val="1800"/>
+              <a:buChar char="•"/>
+              <a:defRPr/>
+            </a:lvl9pPr>
+          </a:lstStyle>
+          <a:p/>
+        </p:txBody>
+      </p:sp>
+      <p:sp>
+        <p:nvSpPr>
+          <p:cNvPr id="109" name="Google Shape;109;p13"/>
+          <p:cNvSpPr txBox="1"/>
+          <p:nvPr>
+            <p:ph idx="2" type="body"/>
+          </p:nvPr>
+        </p:nvSpPr>
+        <p:spPr>
+          <a:xfrm>
+            <a:off x="6228824" y="1773239"/>
+            <a:ext cx="5304364" cy="4427537"/>
+          </a:xfrm>
+          <a:prstGeom prst="rect">
+            <a:avLst/>
+          </a:prstGeom>
+          <a:noFill/>
+          <a:ln>
+            <a:noFill/>
+          </a:ln>
+        </p:spPr>
+        <p:txBody>
+          <a:bodyPr anchorCtr="0" anchor="t" bIns="0" lIns="0" spcFirstLastPara="1" rIns="0" wrap="square" tIns="0">
+            <a:normAutofit/>
+          </a:bodyPr>
+          <a:lstStyle>
+            <a:lvl1pPr indent="-228600" lvl="0" marL="457200" algn="l">
+              <a:lnSpc>
+                <a:spcPct val="110000"/>
+              </a:lnSpc>
+              <a:spcBef>
+                <a:spcPts val="1000"/>
+              </a:spcBef>
+              <a:spcAft>
+                <a:spcPts val="0"/>
+              </a:spcAft>
+              <a:buClr>
+                <a:schemeClr val="dk1"/>
+              </a:buClr>
+              <a:buSzPts val="1600"/>
+              <a:buNone/>
+              <a:defRPr b="0" i="0">
+                <a:latin typeface="Play"/>
+                <a:ea typeface="Play"/>
+                <a:cs typeface="Play"/>
+                <a:sym typeface="Play"/>
+              </a:defRPr>
+            </a:lvl1pPr>
+            <a:lvl2pPr indent="-317500" lvl="1" marL="914400" algn="l">
+              <a:lnSpc>
+                <a:spcPct val="110000"/>
+              </a:lnSpc>
+              <a:spcBef>
+                <a:spcPts val="500"/>
+              </a:spcBef>
+              <a:spcAft>
+                <a:spcPts val="0"/>
+              </a:spcAft>
+              <a:buSzPts val="1400"/>
+              <a:buChar char="•"/>
+              <a:defRPr b="0" i="0">
+                <a:latin typeface="Play"/>
+                <a:ea typeface="Play"/>
+                <a:cs typeface="Play"/>
+                <a:sym typeface="Play"/>
+              </a:defRPr>
+            </a:lvl2pPr>
+            <a:lvl3pPr indent="-304800" lvl="2" marL="1371600" algn="l">
+              <a:lnSpc>
+                <a:spcPct val="110000"/>
+              </a:lnSpc>
+              <a:spcBef>
+                <a:spcPts val="500"/>
+              </a:spcBef>
+              <a:spcAft>
+                <a:spcPts val="0"/>
+              </a:spcAft>
+              <a:buClr>
+                <a:schemeClr val="dk1"/>
+              </a:buClr>
+              <a:buSzPts val="1200"/>
+              <a:buChar char="−"/>
+              <a:defRPr b="0" i="0">
+                <a:latin typeface="Play"/>
+                <a:ea typeface="Play"/>
+                <a:cs typeface="Play"/>
+                <a:sym typeface="Play"/>
+              </a:defRPr>
+            </a:lvl3pPr>
+            <a:lvl4pPr indent="-342900" lvl="3" marL="1828800" algn="l">
+              <a:lnSpc>
+                <a:spcPct val="90000"/>
+              </a:lnSpc>
+              <a:spcBef>
+                <a:spcPts val="500"/>
+              </a:spcBef>
+              <a:spcAft>
+                <a:spcPts val="0"/>
+              </a:spcAft>
+              <a:buClr>
+                <a:schemeClr val="dk1"/>
+              </a:buClr>
+              <a:buSzPts val="1800"/>
+              <a:buChar char="•"/>
+              <a:defRPr/>
+            </a:lvl4pPr>
+            <a:lvl5pPr indent="-342900" lvl="4" marL="2286000" algn="l">
+              <a:lnSpc>
+                <a:spcPct val="90000"/>
+              </a:lnSpc>
+              <a:spcBef>
+                <a:spcPts val="500"/>
+              </a:spcBef>
+              <a:spcAft>
+                <a:spcPts val="0"/>
+              </a:spcAft>
+              <a:buClr>
+                <a:schemeClr val="dk1"/>
+              </a:buClr>
+              <a:buSzPts val="1800"/>
+              <a:buChar char="•"/>
+              <a:defRPr/>
+            </a:lvl5pPr>
+            <a:lvl6pPr indent="-342900" lvl="5" marL="2743200" algn="l">
+              <a:lnSpc>
+                <a:spcPct val="90000"/>
+              </a:lnSpc>
+              <a:spcBef>
+                <a:spcPts val="500"/>
+              </a:spcBef>
+              <a:spcAft>
+                <a:spcPts val="0"/>
+              </a:spcAft>
+              <a:buClr>
+                <a:schemeClr val="dk1"/>
+              </a:buClr>
+              <a:buSzPts val="1800"/>
+              <a:buChar char="•"/>
+              <a:defRPr/>
+            </a:lvl6pPr>
+            <a:lvl7pPr indent="-342900" lvl="6" marL="3200400" algn="l">
+              <a:lnSpc>
+                <a:spcPct val="90000"/>
+              </a:lnSpc>
+              <a:spcBef>
+                <a:spcPts val="500"/>
+              </a:spcBef>
+              <a:spcAft>
+                <a:spcPts val="0"/>
+              </a:spcAft>
+              <a:buClr>
+                <a:schemeClr val="dk1"/>
+              </a:buClr>
+              <a:buSzPts val="1800"/>
+              <a:buChar char="•"/>
+              <a:defRPr/>
+            </a:lvl7pPr>
+            <a:lvl8pPr indent="-342900" lvl="7" marL="3657600" algn="l">
+              <a:lnSpc>
+                <a:spcPct val="90000"/>
+              </a:lnSpc>
+              <a:spcBef>
+                <a:spcPts val="500"/>
+              </a:spcBef>
+              <a:spcAft>
+                <a:spcPts val="0"/>
+              </a:spcAft>
+              <a:buClr>
+                <a:schemeClr val="dk1"/>
+              </a:buClr>
+              <a:buSzPts val="1800"/>
+              <a:buChar char="•"/>
+              <a:defRPr/>
+            </a:lvl8pPr>
+            <a:lvl9pPr indent="-342900" lvl="8" marL="4114800" algn="l">
+              <a:lnSpc>
+                <a:spcPct val="90000"/>
+              </a:lnSpc>
+              <a:spcBef>
+                <a:spcPts val="500"/>
+              </a:spcBef>
+              <a:spcAft>
+                <a:spcPts val="0"/>
+              </a:spcAft>
+              <a:buClr>
+                <a:schemeClr val="dk1"/>
+              </a:buClr>
+              <a:buSzPts val="1800"/>
+              <a:buChar char="•"/>
+              <a:defRPr/>
+            </a:lvl9pPr>
+          </a:lstStyle>
+          <a:p/>
+        </p:txBody>
+      </p:sp>
+      <p:sp>
+        <p:nvSpPr>
+          <p:cNvPr id="110" name="Google Shape;110;p13"/>
+          <p:cNvSpPr txBox="1"/>
+          <p:nvPr>
+            <p:ph type="title"/>
+          </p:nvPr>
+        </p:nvSpPr>
+        <p:spPr>
+          <a:xfrm>
+            <a:off x="677334" y="692150"/>
+            <a:ext cx="10855854" cy="644241"/>
+          </a:xfrm>
+          <a:prstGeom prst="rect">
+            <a:avLst/>
+          </a:prstGeom>
+          <a:noFill/>
+          <a:ln>
+            <a:noFill/>
+          </a:ln>
+        </p:spPr>
+        <p:txBody>
+          <a:bodyPr anchorCtr="0" anchor="t" bIns="0" lIns="0" spcFirstLastPara="1" rIns="0" wrap="square" tIns="0">
+            <a:noAutofit/>
+          </a:bodyPr>
+          <a:lstStyle>
+            <a:lvl1pPr lvl="0" algn="l">
+              <a:lnSpc>
+                <a:spcPct val="90000"/>
+              </a:lnSpc>
+              <a:spcBef>
+                <a:spcPts val="0"/>
+              </a:spcBef>
+              <a:spcAft>
+                <a:spcPts val="0"/>
+              </a:spcAft>
+              <a:buClr>
+                <a:schemeClr val="accent1"/>
+              </a:buClr>
+              <a:buSzPts val="3600"/>
+              <a:buFont typeface="Play"/>
+              <a:buNone/>
+              <a:defRPr>
+                <a:solidFill>
+                  <a:schemeClr val="accent1"/>
+                </a:solidFill>
+              </a:defRPr>
+            </a:lvl1pPr>
+            <a:lvl2pPr lvl="1">
+              <a:spcBef>
+                <a:spcPts val="0"/>
+              </a:spcBef>
+              <a:spcAft>
+                <a:spcPts val="0"/>
+              </a:spcAft>
+              <a:buSzPts val="1400"/>
+              <a:buNone/>
+              <a:defRPr/>
+            </a:lvl2pPr>
+            <a:lvl3pPr lvl="2">
+              <a:spcBef>
+                <a:spcPts val="0"/>
+              </a:spcBef>
+              <a:spcAft>
+                <a:spcPts val="0"/>
+              </a:spcAft>
+              <a:buSzPts val="1400"/>
+              <a:buNone/>
+              <a:defRPr/>
+            </a:lvl3pPr>
+            <a:lvl4pPr lvl="3">
+              <a:spcBef>
+                <a:spcPts val="0"/>
+              </a:spcBef>
+              <a:spcAft>
+                <a:spcPts val="0"/>
+              </a:spcAft>
+              <a:buSzPts val="1400"/>
+              <a:buNone/>
+              <a:defRPr/>
+            </a:lvl4pPr>
+            <a:lvl5pPr lvl="4">
+              <a:spcBef>
+                <a:spcPts val="0"/>
+              </a:spcBef>
+              <a:spcAft>
+                <a:spcPts val="0"/>
+              </a:spcAft>
+              <a:buSzPts val="1400"/>
+              <a:buNone/>
+              <a:defRPr/>
+            </a:lvl5pPr>
+            <a:lvl6pPr lvl="5">
+              <a:spcBef>
+                <a:spcPts val="0"/>
+              </a:spcBef>
+              <a:spcAft>
+                <a:spcPts val="0"/>
+              </a:spcAft>
+              <a:buSzPts val="1400"/>
+              <a:buNone/>
+              <a:defRPr/>
+            </a:lvl6pPr>
+            <a:lvl7pPr lvl="6">
+              <a:spcBef>
+                <a:spcPts val="0"/>
+              </a:spcBef>
+              <a:spcAft>
+                <a:spcPts val="0"/>
+              </a:spcAft>
+              <a:buSzPts val="1400"/>
+              <a:buNone/>
+              <a:defRPr/>
+            </a:lvl7pPr>
+            <a:lvl8pPr lvl="7">
+              <a:spcBef>
+                <a:spcPts val="0"/>
+              </a:spcBef>
+              <a:spcAft>
+                <a:spcPts val="0"/>
+              </a:spcAft>
+              <a:buSzPts val="1400"/>
+              <a:buNone/>
+              <a:defRPr/>
+            </a:lvl8pPr>
+            <a:lvl9pPr lvl="8">
+              <a:spcBef>
+                <a:spcPts val="0"/>
+              </a:spcBef>
+              <a:spcAft>
+                <a:spcPts val="0"/>
+              </a:spcAft>
+              <a:buSzPts val="1400"/>
+              <a:buNone/>
+              <a:defRPr/>
+            </a:lvl9pPr>
+          </a:lstStyle>
+          <a:p/>
+        </p:txBody>
+      </p:sp>
+    </p:spTree>
+  </p:cSld>
+  <p:clrMapOvr>
+    <a:masterClrMapping/>
+  </p:clrMapOvr>
+</p:sldLayout>
 </file>
 
 <file path=ppt/slideLayouts/slideLayout18.xml><?xml version="1.0" encoding="utf-8"?>
@@ -4616,6 +7022,8 @@
   <p:sldLayoutIdLst>
     <p:sldLayoutId id="2147483649" r:id="rId2"/>
     <p:sldLayoutId id="2147483653" r:id="rId6"/>
+    <p:sldLayoutId id="2147483657" r:id="rId10"/>
+    <p:sldLayoutId id="2147483659" r:id="rId12"/>
     <p:sldLayoutId id="2147483665" r:id="rId18"/>
   </p:sldLayoutIdLst>
   <p:hf dt="0" ftr="0" hdr="0" sldNum="0"/>
@@ -7584,7 +9992,7 @@
                 <a:ea typeface="Arial"/>
                 <a:cs typeface="Arial"/>
               </a:rPr>
-              <a:t>Автоматическая вёрстка презентаций</a:t>
+              <a:t>Защита инициативы: сервис автоматической вёрстки</a:t>
             </a:r>
           </a:p>
         </p:txBody>
@@ -7607,35 +10015,9 @@
         <p:nvPr/>
       </p:nvGrpSpPr>
       <p:grpSpPr/>
-      <p:cxnSp>
-        <p:nvCxnSpPr>
-          <p:cNvPr id="986" name="Google Shape;986;p76"/>
-          <p:cNvCxnSpPr/>
-          <p:nvPr/>
-        </p:nvCxnSpPr>
-        <p:spPr>
-          <a:xfrm rot="10800000">
-            <a:off x="-42658" y="3591512"/>
-            <a:ext cx="12234658" cy="0"/>
-          </a:xfrm>
-          <a:prstGeom prst="straightConnector1">
-            <a:avLst/>
-          </a:prstGeom>
-          <a:noFill/>
-          <a:ln cap="flat" cmpd="sng" w="12700">
-            <a:solidFill>
-              <a:srgbClr val="E1E1E2"/>
-            </a:solidFill>
-            <a:prstDash val="solid"/>
-            <a:miter lim="8000"/>
-            <a:headEnd len="sm" w="sm" type="none"/>
-            <a:tailEnd len="sm" w="sm" type="none"/>
-          </a:ln>
-        </p:spPr>
-      </p:cxnSp>
       <p:sp>
         <p:nvSpPr>
-          <p:cNvPr id="987" name="title"/>
+          <p:cNvPr id="2" name="title"/>
           <p:cNvSpPr txBox="1"/>
           <p:nvPr/>
         </p:nvSpPr>
@@ -7684,14 +10066,14 @@
       </p:sp>
       <p:sp>
         <p:nvSpPr>
-          <p:cNvPr id="988" name="body_left"/>
+          <p:cNvPr id="3" name="body"/>
           <p:cNvSpPr txBox="1"/>
           <p:nvPr/>
         </p:nvSpPr>
         <p:spPr>
           <a:xfrm>
-            <a:off x="677387" y="2200937"/>
-            <a:ext cx="5245059" cy="2645542"/>
+            <a:off x="677387" y="1783080"/>
+            <a:ext cx="5245059" cy="4417717"/>
           </a:xfrm>
           <a:prstGeom prst="rect">
             <a:avLst/>
@@ -7708,7 +10090,7 @@
               <a:spcAft>
                 <a:spcPts val="300"/>
               </a:spcAft>
-              <a:defRPr sz="2400">
+              <a:defRPr sz="3200">
                 <a:solidFill>
                   <a:srgbClr val="000000"/>
                 </a:solidFill>
@@ -7718,7 +10100,7 @@
               </a:defRPr>
             </a:pPr>
             <a:r>
-              <a:rPr sz="2400">
+              <a:rPr sz="3200">
                 <a:solidFill>
                   <a:srgbClr val="000000"/>
                 </a:solidFill>
@@ -7726,7 +10108,7 @@
                 <a:ea typeface="Play"/>
                 <a:cs typeface="Play"/>
               </a:rPr>
-              <a:t>• Сборка одной колоды 12 слайдов занимает 186 минут</a:t>
+              <a:t>• Сборка одной презентации занимает 186 мин</a:t>
             </a:r>
           </a:p>
           <a:p>
@@ -7734,7 +10116,7 @@
               <a:spcAft>
                 <a:spcPts val="300"/>
               </a:spcAft>
-              <a:defRPr sz="2400">
+              <a:defRPr sz="3200">
                 <a:solidFill>
                   <a:srgbClr val="000000"/>
                 </a:solidFill>
@@ -7744,7 +10126,7 @@
               </a:defRPr>
             </a:pPr>
             <a:r>
-              <a:rPr sz="2400">
+              <a:rPr sz="3200">
                 <a:solidFill>
                   <a:srgbClr val="000000"/>
                 </a:solidFill>
@@ -7752,7 +10134,7 @@
                 <a:ea typeface="Play"/>
                 <a:cs typeface="Play"/>
               </a:rPr>
-              <a:t>• 74 минуты уходит на правки после ревью дизайнера</a:t>
+              <a:t>• 74 мин уходит на правки после ревью</a:t>
             </a:r>
           </a:p>
           <a:p>
@@ -7760,7 +10142,7 @@
               <a:spcAft>
                 <a:spcPts val="300"/>
               </a:spcAft>
-              <a:defRPr sz="2400">
+              <a:defRPr sz="3200">
                 <a:solidFill>
                   <a:srgbClr val="000000"/>
                 </a:solidFill>
@@ -7770,7 +10152,7 @@
               </a:defRPr>
             </a:pPr>
             <a:r>
-              <a:rPr sz="2400">
+              <a:rPr sz="3200">
                 <a:solidFill>
                   <a:srgbClr val="000000"/>
                 </a:solidFill>
@@ -7783,81 +10165,24 @@
           </a:p>
         </p:txBody>
       </p:sp>
-      <p:sp>
-        <p:nvSpPr>
-          <p:cNvPr id="989" name="body_right"/>
-          <p:cNvSpPr txBox="1"/>
+      <p:graphicFrame>
+        <p:nvGraphicFramePr>
+          <p:cNvPr id="4" name="Chart 3"/>
+          <p:cNvGraphicFramePr>
+            <a:graphicFrameLocks noGrp="1"/>
+          </p:cNvGraphicFramePr>
           <p:nvPr/>
-        </p:nvSpPr>
-        <p:spPr>
-          <a:xfrm>
-            <a:off x="6288206" y="2200937"/>
-            <a:ext cx="5245059" cy="2645542"/>
-          </a:xfrm>
-          <a:prstGeom prst="rect">
-            <a:avLst/>
-          </a:prstGeom>
-          <a:noFill/>
-        </p:spPr>
-        <p:txBody>
-          <a:bodyPr wrap="square" lIns="76200" rIns="76200" tIns="50800" bIns="50800">
-            <a:spAutoFit/>
-          </a:bodyPr>
-          <a:lstStyle/>
-          <a:p>
-            <a:pPr algn="l">
-              <a:spcAft>
-                <a:spcPts val="300"/>
-              </a:spcAft>
-              <a:defRPr sz="2800">
-                <a:solidFill>
-                  <a:srgbClr val="000000"/>
-                </a:solidFill>
-                <a:latin typeface="Play"/>
-                <a:ea typeface="Play"/>
-                <a:cs typeface="Play"/>
-              </a:defRPr>
-            </a:pPr>
-            <a:r>
-              <a:rPr sz="2800">
-                <a:solidFill>
-                  <a:srgbClr val="000000"/>
-                </a:solidFill>
-                <a:latin typeface="Play"/>
-                <a:ea typeface="Play"/>
-                <a:cs typeface="Play"/>
-              </a:rPr>
-              <a:t>• Дизайн-отдел из 4 человек закрывает 11 запросов в неделю из 27</a:t>
-            </a:r>
-          </a:p>
-          <a:p>
-            <a:pPr algn="l">
-              <a:spcAft>
-                <a:spcPts val="300"/>
-              </a:spcAft>
-              <a:defRPr sz="2800">
-                <a:solidFill>
-                  <a:srgbClr val="000000"/>
-                </a:solidFill>
-                <a:latin typeface="Play"/>
-                <a:ea typeface="Play"/>
-                <a:cs typeface="Play"/>
-              </a:defRPr>
-            </a:pPr>
-            <a:r>
-              <a:rPr sz="2800">
-                <a:solidFill>
-                  <a:srgbClr val="000000"/>
-                </a:solidFill>
-                <a:latin typeface="Play"/>
-                <a:ea typeface="Play"/>
-                <a:cs typeface="Play"/>
-              </a:rPr>
-              <a:t>• Средний срок ожидания в очереди — 6 рабочих дней</a:t>
-            </a:r>
-          </a:p>
-        </p:txBody>
-      </p:sp>
+        </p:nvGraphicFramePr>
+        <p:xfrm>
+          <a:off x="6288206" y="1783080"/>
+          <a:ext cx="5245059" cy="4417717"/>
+        </p:xfrm>
+        <a:graphic>
+          <a:graphicData uri="http://schemas.openxmlformats.org/drawingml/2006/chart">
+            <c:chart xmlns:c="http://schemas.openxmlformats.org/drawingml/2006/chart" r:id="rId2"/>
+          </a:graphicData>
+        </a:graphic>
+      </p:graphicFrame>
     </p:spTree>
   </p:cSld>
   <p:clrMapOvr>
@@ -7934,436 +10259,14 @@
       </p:sp>
       <p:sp>
         <p:nvSpPr>
-          <p:cNvPr id="3" name="Pentagon 2"/>
-          <p:cNvSpPr/>
-          <p:nvPr/>
-        </p:nvSpPr>
-        <p:spPr>
-          <a:xfrm>
-            <a:off x="6288206" y="1824859"/>
-            <a:ext cx="5245059" cy="634621"/>
-          </a:xfrm>
-          <a:prstGeom prst="homePlate">
-            <a:avLst/>
-          </a:prstGeom>
-          <a:solidFill>
-            <a:srgbClr val="0077FF"/>
-          </a:solidFill>
-          <a:ln>
-            <a:noFill/>
-          </a:ln>
-        </p:spPr>
-        <p:style>
-          <a:lnRef idx="1">
-            <a:schemeClr val="accent1"/>
-          </a:lnRef>
-          <a:fillRef idx="3">
-            <a:schemeClr val="accent1"/>
-          </a:fillRef>
-          <a:effectRef idx="2">
-            <a:schemeClr val="accent1"/>
-          </a:effectRef>
-          <a:fontRef idx="minor">
-            <a:schemeClr val="lt1"/>
-          </a:fontRef>
-        </p:style>
-        <p:txBody>
-          <a:bodyPr rtlCol="0" anchor="ctr" wrap="square" lIns="12700" rIns="12700" tIns="12700" bIns="12700"/>
-          <a:lstStyle/>
-          <a:p>
-            <a:pPr algn="ctr">
-              <a:defRPr sz="1400" b="0">
-                <a:solidFill>
-                  <a:srgbClr val="FFFFFF"/>
-                </a:solidFill>
-                <a:latin typeface="Play"/>
-                <a:ea typeface="Play"/>
-                <a:cs typeface="Play"/>
-              </a:defRPr>
-            </a:pPr>
-            <a:r>
-              <a:rPr sz="1400" b="0">
-                <a:solidFill>
-                  <a:srgbClr val="FFFFFF"/>
-                </a:solidFill>
-                <a:latin typeface="Play"/>
-                <a:ea typeface="Play"/>
-                <a:cs typeface="Play"/>
-              </a:rPr>
-              <a:t>Загрузка шаблона</a:t>
-            </a:r>
-          </a:p>
-        </p:txBody>
-      </p:sp>
-      <p:sp>
-        <p:nvSpPr>
-          <p:cNvPr id="4" name="Chevron 3"/>
-          <p:cNvSpPr/>
-          <p:nvPr/>
-        </p:nvSpPr>
-        <p:spPr>
-          <a:xfrm>
-            <a:off x="6288206" y="2562791"/>
-            <a:ext cx="5245059" cy="634621"/>
-          </a:xfrm>
-          <a:prstGeom prst="chevron">
-            <a:avLst/>
-          </a:prstGeom>
-          <a:solidFill>
-            <a:srgbClr val="0077FF"/>
-          </a:solidFill>
-          <a:ln>
-            <a:noFill/>
-          </a:ln>
-        </p:spPr>
-        <p:style>
-          <a:lnRef idx="1">
-            <a:schemeClr val="accent1"/>
-          </a:lnRef>
-          <a:fillRef idx="3">
-            <a:schemeClr val="accent1"/>
-          </a:fillRef>
-          <a:effectRef idx="2">
-            <a:schemeClr val="accent1"/>
-          </a:effectRef>
-          <a:fontRef idx="minor">
-            <a:schemeClr val="lt1"/>
-          </a:fontRef>
-        </p:style>
-        <p:txBody>
-          <a:bodyPr rtlCol="0" anchor="ctr" wrap="square" lIns="12700" rIns="12700" tIns="12700" bIns="12700"/>
-          <a:lstStyle/>
-          <a:p>
-            <a:pPr algn="ctr">
-              <a:defRPr sz="1400" b="0">
-                <a:solidFill>
-                  <a:srgbClr val="FFFFFF"/>
-                </a:solidFill>
-                <a:latin typeface="Play"/>
-                <a:ea typeface="Play"/>
-                <a:cs typeface="Play"/>
-              </a:defRPr>
-            </a:pPr>
-            <a:r>
-              <a:rPr sz="1400" b="0">
-                <a:solidFill>
-                  <a:srgbClr val="FFFFFF"/>
-                </a:solidFill>
-                <a:latin typeface="Play"/>
-                <a:ea typeface="Play"/>
-                <a:cs typeface="Play"/>
-              </a:rPr>
-              <a:t>Анализ дизайна</a:t>
-            </a:r>
-          </a:p>
-        </p:txBody>
-      </p:sp>
-      <p:sp>
-        <p:nvSpPr>
-          <p:cNvPr id="5" name="Chevron 4"/>
-          <p:cNvSpPr/>
-          <p:nvPr/>
-        </p:nvSpPr>
-        <p:spPr>
-          <a:xfrm>
-            <a:off x="6288206" y="3300723"/>
-            <a:ext cx="5245059" cy="634621"/>
-          </a:xfrm>
-          <a:prstGeom prst="chevron">
-            <a:avLst/>
-          </a:prstGeom>
-          <a:solidFill>
-            <a:srgbClr val="0077FF"/>
-          </a:solidFill>
-          <a:ln>
-            <a:noFill/>
-          </a:ln>
-        </p:spPr>
-        <p:style>
-          <a:lnRef idx="1">
-            <a:schemeClr val="accent1"/>
-          </a:lnRef>
-          <a:fillRef idx="3">
-            <a:schemeClr val="accent1"/>
-          </a:fillRef>
-          <a:effectRef idx="2">
-            <a:schemeClr val="accent1"/>
-          </a:effectRef>
-          <a:fontRef idx="minor">
-            <a:schemeClr val="lt1"/>
-          </a:fontRef>
-        </p:style>
-        <p:txBody>
-          <a:bodyPr rtlCol="0" anchor="ctr" wrap="square" lIns="12700" rIns="12700" tIns="12700" bIns="12700"/>
-          <a:lstStyle/>
-          <a:p>
-            <a:pPr algn="ctr">
-              <a:defRPr sz="1400" b="0">
-                <a:solidFill>
-                  <a:srgbClr val="FFFFFF"/>
-                </a:solidFill>
-                <a:latin typeface="Play"/>
-                <a:ea typeface="Play"/>
-                <a:cs typeface="Play"/>
-              </a:defRPr>
-            </a:pPr>
-            <a:r>
-              <a:rPr sz="1400" b="0">
-                <a:solidFill>
-                  <a:srgbClr val="FFFFFF"/>
-                </a:solidFill>
-                <a:latin typeface="Play"/>
-                <a:ea typeface="Play"/>
-                <a:cs typeface="Play"/>
-              </a:rPr>
-              <a:t>План колоды</a:t>
-            </a:r>
-          </a:p>
-        </p:txBody>
-      </p:sp>
-      <p:sp>
-        <p:nvSpPr>
-          <p:cNvPr id="6" name="Chevron 5"/>
-          <p:cNvSpPr/>
-          <p:nvPr/>
-        </p:nvSpPr>
-        <p:spPr>
-          <a:xfrm>
-            <a:off x="6288206" y="4038655"/>
-            <a:ext cx="5245059" cy="634621"/>
-          </a:xfrm>
-          <a:prstGeom prst="chevron">
-            <a:avLst/>
-          </a:prstGeom>
-          <a:solidFill>
-            <a:srgbClr val="0077FF"/>
-          </a:solidFill>
-          <a:ln>
-            <a:noFill/>
-          </a:ln>
-        </p:spPr>
-        <p:style>
-          <a:lnRef idx="1">
-            <a:schemeClr val="accent1"/>
-          </a:lnRef>
-          <a:fillRef idx="3">
-            <a:schemeClr val="accent1"/>
-          </a:fillRef>
-          <a:effectRef idx="2">
-            <a:schemeClr val="accent1"/>
-          </a:effectRef>
-          <a:fontRef idx="minor">
-            <a:schemeClr val="lt1"/>
-          </a:fontRef>
-        </p:style>
-        <p:txBody>
-          <a:bodyPr rtlCol="0" anchor="ctr" wrap="square" lIns="12700" rIns="12700" tIns="12700" bIns="12700"/>
-          <a:lstStyle/>
-          <a:p>
-            <a:pPr algn="ctr">
-              <a:defRPr sz="1400" b="0">
-                <a:solidFill>
-                  <a:srgbClr val="FFFFFF"/>
-                </a:solidFill>
-                <a:latin typeface="Play"/>
-                <a:ea typeface="Play"/>
-                <a:cs typeface="Play"/>
-              </a:defRPr>
-            </a:pPr>
-            <a:r>
-              <a:rPr sz="1400" b="0">
-                <a:solidFill>
-                  <a:srgbClr val="FFFFFF"/>
-                </a:solidFill>
-                <a:latin typeface="Play"/>
-                <a:ea typeface="Play"/>
-                <a:cs typeface="Play"/>
-              </a:rPr>
-              <a:t>Авто-верстка</a:t>
-            </a:r>
-          </a:p>
-        </p:txBody>
-      </p:sp>
-      <p:sp>
-        <p:nvSpPr>
-          <p:cNvPr id="7" name="Chevron 6"/>
-          <p:cNvSpPr/>
-          <p:nvPr/>
-        </p:nvSpPr>
-        <p:spPr>
-          <a:xfrm>
-            <a:off x="6288206" y="4776587"/>
-            <a:ext cx="5245059" cy="634621"/>
-          </a:xfrm>
-          <a:prstGeom prst="chevron">
-            <a:avLst/>
-          </a:prstGeom>
-          <a:solidFill>
-            <a:srgbClr val="0077FF"/>
-          </a:solidFill>
-          <a:ln>
-            <a:noFill/>
-          </a:ln>
-        </p:spPr>
-        <p:style>
-          <a:lnRef idx="1">
-            <a:schemeClr val="accent1"/>
-          </a:lnRef>
-          <a:fillRef idx="3">
-            <a:schemeClr val="accent1"/>
-          </a:fillRef>
-          <a:effectRef idx="2">
-            <a:schemeClr val="accent1"/>
-          </a:effectRef>
-          <a:fontRef idx="minor">
-            <a:schemeClr val="lt1"/>
-          </a:fontRef>
-        </p:style>
-        <p:txBody>
-          <a:bodyPr rtlCol="0" anchor="ctr" wrap="square" lIns="12700" rIns="12700" tIns="12700" bIns="12700"/>
-          <a:lstStyle/>
-          <a:p>
-            <a:pPr algn="ctr">
-              <a:defRPr sz="1400" b="0">
-                <a:solidFill>
-                  <a:srgbClr val="FFFFFF"/>
-                </a:solidFill>
-                <a:latin typeface="Play"/>
-                <a:ea typeface="Play"/>
-                <a:cs typeface="Play"/>
-              </a:defRPr>
-            </a:pPr>
-            <a:r>
-              <a:rPr sz="1400" b="0">
-                <a:solidFill>
-                  <a:srgbClr val="FFFFFF"/>
-                </a:solidFill>
-                <a:latin typeface="Play"/>
-                <a:ea typeface="Play"/>
-                <a:cs typeface="Play"/>
-              </a:rPr>
-              <a:t>Аудит качества</a:t>
-            </a:r>
-          </a:p>
-        </p:txBody>
-      </p:sp>
-      <p:sp>
-        <p:nvSpPr>
-          <p:cNvPr id="8" name="Chevron 7"/>
-          <p:cNvSpPr/>
-          <p:nvPr/>
-        </p:nvSpPr>
-        <p:spPr>
-          <a:xfrm>
-            <a:off x="6288206" y="5514520"/>
-            <a:ext cx="5245059" cy="634621"/>
-          </a:xfrm>
-          <a:prstGeom prst="chevron">
-            <a:avLst/>
-          </a:prstGeom>
-          <a:solidFill>
-            <a:srgbClr val="0077FF"/>
-          </a:solidFill>
-          <a:ln>
-            <a:noFill/>
-          </a:ln>
-        </p:spPr>
-        <p:style>
-          <a:lnRef idx="1">
-            <a:schemeClr val="accent1"/>
-          </a:lnRef>
-          <a:fillRef idx="3">
-            <a:schemeClr val="accent1"/>
-          </a:fillRef>
-          <a:effectRef idx="2">
-            <a:schemeClr val="accent1"/>
-          </a:effectRef>
-          <a:fontRef idx="minor">
-            <a:schemeClr val="lt1"/>
-          </a:fontRef>
-        </p:style>
-        <p:txBody>
-          <a:bodyPr rtlCol="0" anchor="ctr" wrap="square" lIns="12700" rIns="12700" tIns="12700" bIns="12700"/>
-          <a:lstStyle/>
-          <a:p>
-            <a:pPr algn="ctr">
-              <a:defRPr sz="1400" b="0">
-                <a:solidFill>
-                  <a:srgbClr val="FFFFFF"/>
-                </a:solidFill>
-                <a:latin typeface="Play"/>
-                <a:ea typeface="Play"/>
-                <a:cs typeface="Play"/>
-              </a:defRPr>
-            </a:pPr>
-            <a:r>
-              <a:rPr sz="1400" b="0">
-                <a:solidFill>
-                  <a:srgbClr val="FFFFFF"/>
-                </a:solidFill>
-                <a:latin typeface="Play"/>
-                <a:ea typeface="Play"/>
-                <a:cs typeface="Play"/>
-              </a:rPr>
-              <a:t>Экспорт</a:t>
-            </a:r>
-          </a:p>
-        </p:txBody>
-      </p:sp>
-    </p:spTree>
-  </p:cSld>
-  <p:clrMapOvr>
-    <a:masterClrMapping/>
-  </p:clrMapOvr>
-</p:sld>
-</file>
-
-<file path=ppt/slides/slide59.xml><?xml version="1.0" encoding="utf-8"?>
-<p:sld xmlns:a="http://schemas.openxmlformats.org/drawingml/2006/main" xmlns:p="http://schemas.openxmlformats.org/presentationml/2006/main" xmlns:r="http://schemas.openxmlformats.org/officeDocument/2006/relationships">
-  <p:cSld>
-    <p:spTree>
-      <p:nvGrpSpPr>
-        <p:cNvPr id="1" name=""/>
-        <p:cNvGrpSpPr/>
-        <p:nvPr/>
-      </p:nvGrpSpPr>
-      <p:grpSpPr/>
-      <p:cxnSp>
-        <p:nvCxnSpPr>
-          <p:cNvPr id="918" name="Google Shape;918;p74"/>
-          <p:cNvCxnSpPr/>
-          <p:nvPr/>
-        </p:nvCxnSpPr>
-        <p:spPr>
-          <a:xfrm rot="10800000">
-            <a:off x="658813" y="2199500"/>
-            <a:ext cx="11533187" cy="0"/>
-          </a:xfrm>
-          <a:prstGeom prst="straightConnector1">
-            <a:avLst/>
-          </a:prstGeom>
-          <a:noFill/>
-          <a:ln cap="flat" cmpd="sng" w="19050">
-            <a:solidFill>
-              <a:schemeClr val="accent4"/>
-            </a:solidFill>
-            <a:prstDash val="solid"/>
-            <a:miter lim="8000"/>
-            <a:headEnd len="sm" w="sm" type="none"/>
-            <a:tailEnd len="sm" w="sm" type="none"/>
-          </a:ln>
-        </p:spPr>
-      </p:cxnSp>
-      <p:sp>
-        <p:nvSpPr>
-          <p:cNvPr id="919" name="title"/>
+          <p:cNvPr id="3" name="body"/>
           <p:cNvSpPr txBox="1"/>
           <p:nvPr/>
         </p:nvSpPr>
         <p:spPr>
           <a:xfrm>
-            <a:off x="677387" y="692177"/>
-            <a:ext cx="10855878" cy="822960"/>
+            <a:off x="677387" y="2752418"/>
+            <a:ext cx="5874466" cy="2479040"/>
           </a:xfrm>
           <a:prstGeom prst="rect">
             <a:avLst/>
@@ -8380,56 +10283,7 @@
               <a:spcAft>
                 <a:spcPts val="300"/>
               </a:spcAft>
-              <a:defRPr sz="4000">
-                <a:solidFill>
-                  <a:srgbClr val="000000"/>
-                </a:solidFill>
-                <a:latin typeface="Arial"/>
-                <a:ea typeface="Arial"/>
-                <a:cs typeface="Arial"/>
-              </a:defRPr>
-            </a:pPr>
-            <a:r>
-              <a:rPr sz="4000">
-                <a:solidFill>
-                  <a:srgbClr val="000000"/>
-                </a:solidFill>
-                <a:latin typeface="Arial"/>
-                <a:ea typeface="Arial"/>
-                <a:cs typeface="Arial"/>
-              </a:rPr>
-              <a:t>Ожидаемый эффект</a:t>
-            </a:r>
-          </a:p>
-        </p:txBody>
-      </p:sp>
-      <p:sp>
-        <p:nvSpPr>
-          <p:cNvPr id="920" name="body_left"/>
-          <p:cNvSpPr txBox="1"/>
-          <p:nvPr/>
-        </p:nvSpPr>
-        <p:spPr>
-          <a:xfrm>
-            <a:off x="677387" y="2200937"/>
-            <a:ext cx="5245059" cy="3748651"/>
-          </a:xfrm>
-          <a:prstGeom prst="rect">
-            <a:avLst/>
-          </a:prstGeom>
-          <a:noFill/>
-        </p:spPr>
-        <p:txBody>
-          <a:bodyPr wrap="square" lIns="76200" rIns="76200" tIns="50800" bIns="50800">
-            <a:spAutoFit/>
-          </a:bodyPr>
-          <a:lstStyle/>
-          <a:p>
-            <a:pPr algn="l">
-              <a:spcAft>
-                <a:spcPts val="300"/>
-              </a:spcAft>
-              <a:defRPr sz="3200">
+              <a:defRPr sz="2400">
                 <a:solidFill>
                   <a:srgbClr val="000000"/>
                 </a:solidFill>
@@ -8439,7 +10293,7 @@
               </a:defRPr>
             </a:pPr>
             <a:r>
-              <a:rPr sz="3200">
+              <a:rPr sz="2400">
                 <a:solidFill>
                   <a:srgbClr val="000000"/>
                 </a:solidFill>
@@ -8447,7 +10301,7 @@
                 <a:ea typeface="Play"/>
                 <a:cs typeface="Play"/>
               </a:rPr>
-              <a:t>• Средняя сборка колоды 12 слайдов — 4 минуты вместо 186</a:t>
+              <a:t>• Сервис принимает шаблон pptx и материалы</a:t>
             </a:r>
           </a:p>
           <a:p>
@@ -8455,7 +10309,7 @@
               <a:spcAft>
                 <a:spcPts val="300"/>
               </a:spcAft>
-              <a:defRPr sz="3200">
+              <a:defRPr sz="2400">
                 <a:solidFill>
                   <a:srgbClr val="000000"/>
                 </a:solidFill>
@@ -8465,7 +10319,7 @@
               </a:defRPr>
             </a:pPr>
             <a:r>
-              <a:rPr sz="3200">
+              <a:rPr sz="2400">
                 <a:solidFill>
                   <a:srgbClr val="000000"/>
                 </a:solidFill>
@@ -8473,38 +10327,15 @@
                 <a:ea typeface="Play"/>
                 <a:cs typeface="Play"/>
               </a:rPr>
-              <a:t>• Время до первой версии сократилось с 6 рабочих дней до 1</a:t>
+              <a:t>• Генерирует колоду по дизайн-системе и аудиту</a:t>
             </a:r>
           </a:p>
-        </p:txBody>
-      </p:sp>
-      <p:sp>
-        <p:nvSpPr>
-          <p:cNvPr id="921" name="body_right"/>
-          <p:cNvSpPr txBox="1"/>
-          <p:nvPr/>
-        </p:nvSpPr>
-        <p:spPr>
-          <a:xfrm>
-            <a:off x="6288206" y="2200937"/>
-            <a:ext cx="5245059" cy="3748651"/>
-          </a:xfrm>
-          <a:prstGeom prst="rect">
-            <a:avLst/>
-          </a:prstGeom>
-          <a:noFill/>
-        </p:spPr>
-        <p:txBody>
-          <a:bodyPr wrap="square" lIns="76200" rIns="76200" tIns="50800" bIns="50800">
-            <a:spAutoFit/>
-          </a:bodyPr>
-          <a:lstStyle/>
           <a:p>
             <a:pPr algn="l">
               <a:spcAft>
                 <a:spcPts val="300"/>
               </a:spcAft>
-              <a:defRPr sz="3200">
+              <a:defRPr sz="2400">
                 <a:solidFill>
                   <a:srgbClr val="000000"/>
                 </a:solidFill>
@@ -8514,7 +10345,7 @@
               </a:defRPr>
             </a:pPr>
             <a:r>
-              <a:rPr sz="3200">
+              <a:rPr sz="2400">
                 <a:solidFill>
                   <a:srgbClr val="000000"/>
                 </a:solidFill>
@@ -8522,37 +10353,618 @@
                 <a:ea typeface="Play"/>
                 <a:cs typeface="Play"/>
               </a:rPr>
-              <a:t>• Нарушений фирменного стиля в пилоте — 2 из 68 колод</a:t>
-            </a:r>
-          </a:p>
-          <a:p>
-            <a:pPr algn="l">
-              <a:spcAft>
-                <a:spcPts val="300"/>
-              </a:spcAft>
-              <a:defRPr sz="3200">
-                <a:solidFill>
-                  <a:srgbClr val="000000"/>
-                </a:solidFill>
-                <a:latin typeface="Play"/>
-                <a:ea typeface="Play"/>
-                <a:cs typeface="Play"/>
-              </a:defRPr>
-            </a:pPr>
-            <a:r>
-              <a:rPr sz="3200">
-                <a:solidFill>
-                  <a:srgbClr val="000000"/>
-                </a:solidFill>
-                <a:latin typeface="Play"/>
-                <a:ea typeface="Play"/>
-                <a:cs typeface="Play"/>
-              </a:rPr>
-              <a:t>• Дизайнеры закрыли 38 запросов за 6 недель вместо 11 в неделю</a:t>
+              <a:t>• Экспорт в pptx, pdf, html с редактируемыми слайдами</a:t>
             </a:r>
           </a:p>
         </p:txBody>
       </p:sp>
+      <p:grpSp>
+        <p:nvGrpSpPr>
+          <p:cNvPr id="4" name="illustration:builtin-presentation"/>
+          <p:cNvGrpSpPr/>
+          <p:nvPr/>
+        </p:nvGrpSpPr>
+        <p:grpSpPr>
+          <a:xfrm>
+            <a:off x="7771509" y="2538008"/>
+            <a:ext cx="2907860" cy="2907860"/>
+            <a:chOff x="7771509" y="2538008"/>
+            <a:chExt cx="2907860" cy="2907860"/>
+          </a:xfrm>
+        </p:grpSpPr>
+        <p:sp>
+          <p:nvSpPr>
+            <p:cNvPr id="5" name="Oval 4"/>
+            <p:cNvSpPr/>
+            <p:nvPr/>
+          </p:nvSpPr>
+          <p:spPr>
+            <a:xfrm>
+              <a:off x="7771509" y="2538008"/>
+              <a:ext cx="2907860" cy="2907860"/>
+            </a:xfrm>
+            <a:prstGeom prst="ellipse">
+              <a:avLst/>
+            </a:prstGeom>
+            <a:solidFill>
+              <a:srgbClr val="D6E9FF"/>
+            </a:solidFill>
+            <a:ln>
+              <a:noFill/>
+            </a:ln>
+            <a:effectLst/>
+          </p:spPr>
+          <p:style>
+            <a:lnRef idx="1">
+              <a:schemeClr val="accent1"/>
+            </a:lnRef>
+            <a:fillRef idx="3">
+              <a:schemeClr val="accent1"/>
+            </a:fillRef>
+            <a:effectRef idx="2">
+              <a:schemeClr val="accent1"/>
+            </a:effectRef>
+            <a:fontRef idx="minor">
+              <a:schemeClr val="lt1"/>
+            </a:fontRef>
+          </p:style>
+          <p:txBody>
+            <a:bodyPr rtlCol="0" anchor="ctr"/>
+            <a:lstStyle/>
+            <a:p>
+              <a:pPr algn="ctr"/>
+            </a:p>
+          </p:txBody>
+        </p:sp>
+        <p:sp>
+          <p:nvSpPr>
+            <p:cNvPr id="6" name="Rounded Rectangle 5"/>
+            <p:cNvSpPr/>
+            <p:nvPr/>
+          </p:nvSpPr>
+          <p:spPr>
+            <a:xfrm>
+              <a:off x="7886900" y="2930338"/>
+              <a:ext cx="2677078" cy="1730869"/>
+            </a:xfrm>
+            <a:prstGeom prst="roundRect">
+              <a:avLst>
+                <a:gd name="adj" fmla="val 9333"/>
+              </a:avLst>
+            </a:prstGeom>
+            <a:solidFill>
+              <a:srgbClr val="FFFFFF"/>
+            </a:solidFill>
+            <a:ln>
+              <a:noFill/>
+            </a:ln>
+            <a:effectLst/>
+          </p:spPr>
+          <p:style>
+            <a:lnRef idx="1">
+              <a:schemeClr val="accent1"/>
+            </a:lnRef>
+            <a:fillRef idx="3">
+              <a:schemeClr val="accent1"/>
+            </a:fillRef>
+            <a:effectRef idx="2">
+              <a:schemeClr val="accent1"/>
+            </a:effectRef>
+            <a:fontRef idx="minor">
+              <a:schemeClr val="lt1"/>
+            </a:fontRef>
+          </p:style>
+          <p:txBody>
+            <a:bodyPr rtlCol="0" anchor="ctr"/>
+            <a:lstStyle/>
+            <a:p>
+              <a:pPr algn="ctr"/>
+            </a:p>
+          </p:txBody>
+        </p:sp>
+        <p:sp>
+          <p:nvSpPr>
+            <p:cNvPr id="7" name="Rounded Rectangle 6"/>
+            <p:cNvSpPr/>
+            <p:nvPr/>
+          </p:nvSpPr>
+          <p:spPr>
+            <a:xfrm>
+              <a:off x="7886900" y="2930338"/>
+              <a:ext cx="2677078" cy="346173"/>
+            </a:xfrm>
+            <a:prstGeom prst="roundRect">
+              <a:avLst>
+                <a:gd name="adj" fmla="val 46666"/>
+              </a:avLst>
+            </a:prstGeom>
+            <a:solidFill>
+              <a:srgbClr val="0077FF"/>
+            </a:solidFill>
+            <a:ln>
+              <a:noFill/>
+            </a:ln>
+            <a:effectLst/>
+          </p:spPr>
+          <p:style>
+            <a:lnRef idx="1">
+              <a:schemeClr val="accent1"/>
+            </a:lnRef>
+            <a:fillRef idx="3">
+              <a:schemeClr val="accent1"/>
+            </a:fillRef>
+            <a:effectRef idx="2">
+              <a:schemeClr val="accent1"/>
+            </a:effectRef>
+            <a:fontRef idx="minor">
+              <a:schemeClr val="lt1"/>
+            </a:fontRef>
+          </p:style>
+          <p:txBody>
+            <a:bodyPr rtlCol="0" anchor="ctr"/>
+            <a:lstStyle/>
+            <a:p>
+              <a:pPr algn="ctr"/>
+            </a:p>
+          </p:txBody>
+        </p:sp>
+        <p:sp>
+          <p:nvSpPr>
+            <p:cNvPr id="8" name="Rectangle 7"/>
+            <p:cNvSpPr/>
+            <p:nvPr/>
+          </p:nvSpPr>
+          <p:spPr>
+            <a:xfrm>
+              <a:off x="7886900" y="3114964"/>
+              <a:ext cx="2677078" cy="161547"/>
+            </a:xfrm>
+            <a:prstGeom prst="rect">
+              <a:avLst/>
+            </a:prstGeom>
+            <a:solidFill>
+              <a:srgbClr val="0077FF"/>
+            </a:solidFill>
+            <a:ln>
+              <a:noFill/>
+            </a:ln>
+            <a:effectLst/>
+          </p:spPr>
+          <p:style>
+            <a:lnRef idx="1">
+              <a:schemeClr val="accent1"/>
+            </a:lnRef>
+            <a:fillRef idx="3">
+              <a:schemeClr val="accent1"/>
+            </a:fillRef>
+            <a:effectRef idx="2">
+              <a:schemeClr val="accent1"/>
+            </a:effectRef>
+            <a:fontRef idx="minor">
+              <a:schemeClr val="lt1"/>
+            </a:fontRef>
+          </p:style>
+          <p:txBody>
+            <a:bodyPr rtlCol="0" anchor="ctr"/>
+            <a:lstStyle/>
+            <a:p>
+              <a:pPr algn="ctr"/>
+            </a:p>
+          </p:txBody>
+        </p:sp>
+        <p:sp>
+          <p:nvSpPr>
+            <p:cNvPr id="9" name="Rounded Rectangle 8"/>
+            <p:cNvSpPr/>
+            <p:nvPr/>
+          </p:nvSpPr>
+          <p:spPr>
+            <a:xfrm>
+              <a:off x="8163840" y="3507295"/>
+              <a:ext cx="969286" cy="115391"/>
+            </a:xfrm>
+            <a:prstGeom prst="roundRect">
+              <a:avLst>
+                <a:gd name="adj" fmla="val 50000"/>
+              </a:avLst>
+            </a:prstGeom>
+            <a:solidFill>
+              <a:srgbClr val="000000"/>
+            </a:solidFill>
+            <a:ln>
+              <a:noFill/>
+            </a:ln>
+            <a:effectLst/>
+          </p:spPr>
+          <p:style>
+            <a:lnRef idx="1">
+              <a:schemeClr val="accent1"/>
+            </a:lnRef>
+            <a:fillRef idx="3">
+              <a:schemeClr val="accent1"/>
+            </a:fillRef>
+            <a:effectRef idx="2">
+              <a:schemeClr val="accent1"/>
+            </a:effectRef>
+            <a:fontRef idx="minor">
+              <a:schemeClr val="lt1"/>
+            </a:fontRef>
+          </p:style>
+          <p:txBody>
+            <a:bodyPr rtlCol="0" anchor="ctr"/>
+            <a:lstStyle/>
+            <a:p>
+              <a:pPr algn="ctr"/>
+            </a:p>
+          </p:txBody>
+        </p:sp>
+        <p:sp>
+          <p:nvSpPr>
+            <p:cNvPr id="10" name="Rounded Rectangle 9"/>
+            <p:cNvSpPr/>
+            <p:nvPr/>
+          </p:nvSpPr>
+          <p:spPr>
+            <a:xfrm>
+              <a:off x="8163840" y="3738077"/>
+              <a:ext cx="738504" cy="92313"/>
+            </a:xfrm>
+            <a:prstGeom prst="roundRect">
+              <a:avLst>
+                <a:gd name="adj" fmla="val 50000"/>
+              </a:avLst>
+            </a:prstGeom>
+            <a:solidFill>
+              <a:srgbClr val="B2B2B2"/>
+            </a:solidFill>
+            <a:ln>
+              <a:noFill/>
+            </a:ln>
+            <a:effectLst/>
+          </p:spPr>
+          <p:style>
+            <a:lnRef idx="1">
+              <a:schemeClr val="accent1"/>
+            </a:lnRef>
+            <a:fillRef idx="3">
+              <a:schemeClr val="accent1"/>
+            </a:fillRef>
+            <a:effectRef idx="2">
+              <a:schemeClr val="accent1"/>
+            </a:effectRef>
+            <a:fontRef idx="minor">
+              <a:schemeClr val="lt1"/>
+            </a:fontRef>
+          </p:style>
+          <p:txBody>
+            <a:bodyPr rtlCol="0" anchor="ctr"/>
+            <a:lstStyle/>
+            <a:p>
+              <a:pPr algn="ctr"/>
+            </a:p>
+          </p:txBody>
+        </p:sp>
+        <p:sp>
+          <p:nvSpPr>
+            <p:cNvPr id="11" name="Rounded Rectangle 10"/>
+            <p:cNvSpPr/>
+            <p:nvPr/>
+          </p:nvSpPr>
+          <p:spPr>
+            <a:xfrm>
+              <a:off x="8163840" y="3922703"/>
+              <a:ext cx="853895" cy="92313"/>
+            </a:xfrm>
+            <a:prstGeom prst="roundRect">
+              <a:avLst>
+                <a:gd name="adj" fmla="val 50000"/>
+              </a:avLst>
+            </a:prstGeom>
+            <a:solidFill>
+              <a:srgbClr val="B2B2B2"/>
+            </a:solidFill>
+            <a:ln>
+              <a:noFill/>
+            </a:ln>
+            <a:effectLst/>
+          </p:spPr>
+          <p:style>
+            <a:lnRef idx="1">
+              <a:schemeClr val="accent1"/>
+            </a:lnRef>
+            <a:fillRef idx="3">
+              <a:schemeClr val="accent1"/>
+            </a:fillRef>
+            <a:effectRef idx="2">
+              <a:schemeClr val="accent1"/>
+            </a:effectRef>
+            <a:fontRef idx="minor">
+              <a:schemeClr val="lt1"/>
+            </a:fontRef>
+          </p:style>
+          <p:txBody>
+            <a:bodyPr rtlCol="0" anchor="ctr"/>
+            <a:lstStyle/>
+            <a:p>
+              <a:pPr algn="ctr"/>
+            </a:p>
+          </p:txBody>
+        </p:sp>
+        <p:sp>
+          <p:nvSpPr>
+            <p:cNvPr id="12" name="Rounded Rectangle 11"/>
+            <p:cNvSpPr/>
+            <p:nvPr/>
+          </p:nvSpPr>
+          <p:spPr>
+            <a:xfrm>
+              <a:off x="8163840" y="4107329"/>
+              <a:ext cx="646191" cy="92313"/>
+            </a:xfrm>
+            <a:prstGeom prst="roundRect">
+              <a:avLst>
+                <a:gd name="adj" fmla="val 50000"/>
+              </a:avLst>
+            </a:prstGeom>
+            <a:solidFill>
+              <a:srgbClr val="B2B2B2"/>
+            </a:solidFill>
+            <a:ln>
+              <a:noFill/>
+            </a:ln>
+            <a:effectLst/>
+          </p:spPr>
+          <p:style>
+            <a:lnRef idx="1">
+              <a:schemeClr val="accent1"/>
+            </a:lnRef>
+            <a:fillRef idx="3">
+              <a:schemeClr val="accent1"/>
+            </a:fillRef>
+            <a:effectRef idx="2">
+              <a:schemeClr val="accent1"/>
+            </a:effectRef>
+            <a:fontRef idx="minor">
+              <a:schemeClr val="lt1"/>
+            </a:fontRef>
+          </p:style>
+          <p:txBody>
+            <a:bodyPr rtlCol="0" anchor="ctr"/>
+            <a:lstStyle/>
+            <a:p>
+              <a:pPr algn="ctr"/>
+            </a:p>
+          </p:txBody>
+        </p:sp>
+        <p:sp>
+          <p:nvSpPr>
+            <p:cNvPr id="13" name="Rounded Rectangle 12"/>
+            <p:cNvSpPr/>
+            <p:nvPr/>
+          </p:nvSpPr>
+          <p:spPr>
+            <a:xfrm>
+              <a:off x="9386987" y="3991938"/>
+              <a:ext cx="207704" cy="438486"/>
+            </a:xfrm>
+            <a:prstGeom prst="roundRect">
+              <a:avLst>
+                <a:gd name="adj" fmla="val 22222"/>
+              </a:avLst>
+            </a:prstGeom>
+            <a:solidFill>
+              <a:srgbClr val="B2B2B2"/>
+            </a:solidFill>
+            <a:ln>
+              <a:noFill/>
+            </a:ln>
+            <a:effectLst/>
+          </p:spPr>
+          <p:style>
+            <a:lnRef idx="1">
+              <a:schemeClr val="accent1"/>
+            </a:lnRef>
+            <a:fillRef idx="3">
+              <a:schemeClr val="accent1"/>
+            </a:fillRef>
+            <a:effectRef idx="2">
+              <a:schemeClr val="accent1"/>
+            </a:effectRef>
+            <a:fontRef idx="minor">
+              <a:schemeClr val="lt1"/>
+            </a:fontRef>
+          </p:style>
+          <p:txBody>
+            <a:bodyPr rtlCol="0" anchor="ctr"/>
+            <a:lstStyle/>
+            <a:p>
+              <a:pPr algn="ctr"/>
+            </a:p>
+          </p:txBody>
+        </p:sp>
+        <p:sp>
+          <p:nvSpPr>
+            <p:cNvPr id="14" name="Rounded Rectangle 13"/>
+            <p:cNvSpPr/>
+            <p:nvPr/>
+          </p:nvSpPr>
+          <p:spPr>
+            <a:xfrm>
+              <a:off x="9687005" y="3761155"/>
+              <a:ext cx="207704" cy="669269"/>
+            </a:xfrm>
+            <a:prstGeom prst="roundRect">
+              <a:avLst>
+                <a:gd name="adj" fmla="val 22222"/>
+              </a:avLst>
+            </a:prstGeom>
+            <a:solidFill>
+              <a:srgbClr val="FF3885"/>
+            </a:solidFill>
+            <a:ln>
+              <a:noFill/>
+            </a:ln>
+            <a:effectLst/>
+          </p:spPr>
+          <p:style>
+            <a:lnRef idx="1">
+              <a:schemeClr val="accent1"/>
+            </a:lnRef>
+            <a:fillRef idx="3">
+              <a:schemeClr val="accent1"/>
+            </a:fillRef>
+            <a:effectRef idx="2">
+              <a:schemeClr val="accent1"/>
+            </a:effectRef>
+            <a:fontRef idx="minor">
+              <a:schemeClr val="lt1"/>
+            </a:fontRef>
+          </p:style>
+          <p:txBody>
+            <a:bodyPr rtlCol="0" anchor="ctr"/>
+            <a:lstStyle/>
+            <a:p>
+              <a:pPr algn="ctr"/>
+            </a:p>
+          </p:txBody>
+        </p:sp>
+        <p:sp>
+          <p:nvSpPr>
+            <p:cNvPr id="15" name="Rounded Rectangle 14"/>
+            <p:cNvSpPr/>
+            <p:nvPr/>
+          </p:nvSpPr>
+          <p:spPr>
+            <a:xfrm>
+              <a:off x="9987022" y="3530373"/>
+              <a:ext cx="207704" cy="900052"/>
+            </a:xfrm>
+            <a:prstGeom prst="roundRect">
+              <a:avLst>
+                <a:gd name="adj" fmla="val 22222"/>
+              </a:avLst>
+            </a:prstGeom>
+            <a:solidFill>
+              <a:srgbClr val="0077FF"/>
+            </a:solidFill>
+            <a:ln>
+              <a:noFill/>
+            </a:ln>
+            <a:effectLst/>
+          </p:spPr>
+          <p:style>
+            <a:lnRef idx="1">
+              <a:schemeClr val="accent1"/>
+            </a:lnRef>
+            <a:fillRef idx="3">
+              <a:schemeClr val="accent1"/>
+            </a:fillRef>
+            <a:effectRef idx="2">
+              <a:schemeClr val="accent1"/>
+            </a:effectRef>
+            <a:fontRef idx="minor">
+              <a:schemeClr val="lt1"/>
+            </a:fontRef>
+          </p:style>
+          <p:txBody>
+            <a:bodyPr rtlCol="0" anchor="ctr"/>
+            <a:lstStyle/>
+            <a:p>
+              <a:pPr algn="ctr"/>
+            </a:p>
+          </p:txBody>
+        </p:sp>
+        <p:sp>
+          <p:nvSpPr>
+            <p:cNvPr id="16" name="Rectangle 15"/>
+            <p:cNvSpPr/>
+            <p:nvPr/>
+          </p:nvSpPr>
+          <p:spPr>
+            <a:xfrm>
+              <a:off x="9156205" y="4661208"/>
+              <a:ext cx="138469" cy="415408"/>
+            </a:xfrm>
+            <a:prstGeom prst="rect">
+              <a:avLst/>
+            </a:prstGeom>
+            <a:solidFill>
+              <a:srgbClr val="000000"/>
+            </a:solidFill>
+            <a:ln>
+              <a:noFill/>
+            </a:ln>
+            <a:effectLst/>
+          </p:spPr>
+          <p:style>
+            <a:lnRef idx="1">
+              <a:schemeClr val="accent1"/>
+            </a:lnRef>
+            <a:fillRef idx="3">
+              <a:schemeClr val="accent1"/>
+            </a:fillRef>
+            <a:effectRef idx="2">
+              <a:schemeClr val="accent1"/>
+            </a:effectRef>
+            <a:fontRef idx="minor">
+              <a:schemeClr val="lt1"/>
+            </a:fontRef>
+          </p:style>
+          <p:txBody>
+            <a:bodyPr rtlCol="0" anchor="ctr"/>
+            <a:lstStyle/>
+            <a:p>
+              <a:pPr algn="ctr"/>
+            </a:p>
+          </p:txBody>
+        </p:sp>
+        <p:sp>
+          <p:nvSpPr>
+            <p:cNvPr id="17" name="Rounded Rectangle 16"/>
+            <p:cNvSpPr/>
+            <p:nvPr/>
+          </p:nvSpPr>
+          <p:spPr>
+            <a:xfrm>
+              <a:off x="8648483" y="5030460"/>
+              <a:ext cx="1153913" cy="138469"/>
+            </a:xfrm>
+            <a:prstGeom prst="roundRect">
+              <a:avLst>
+                <a:gd name="adj" fmla="val 50000"/>
+              </a:avLst>
+            </a:prstGeom>
+            <a:solidFill>
+              <a:srgbClr val="000000"/>
+            </a:solidFill>
+            <a:ln>
+              <a:noFill/>
+            </a:ln>
+            <a:effectLst/>
+          </p:spPr>
+          <p:style>
+            <a:lnRef idx="1">
+              <a:schemeClr val="accent1"/>
+            </a:lnRef>
+            <a:fillRef idx="3">
+              <a:schemeClr val="accent1"/>
+            </a:fillRef>
+            <a:effectRef idx="2">
+              <a:schemeClr val="accent1"/>
+            </a:effectRef>
+            <a:fontRef idx="minor">
+              <a:schemeClr val="lt1"/>
+            </a:fontRef>
+          </p:style>
+          <p:txBody>
+            <a:bodyPr rtlCol="0" anchor="ctr"/>
+            <a:lstStyle/>
+            <a:p>
+              <a:pPr algn="ctr"/>
+            </a:p>
+          </p:txBody>
+        </p:sp>
+      </p:grpSp>
     </p:spTree>
   </p:cSld>
   <p:clrMapOvr>
@@ -8561,7 +10973,7 @@
 </p:sld>
 </file>
 
-<file path=ppt/slides/slide60.xml><?xml version="1.0" encoding="utf-8"?>
+<file path=ppt/slides/slide59.xml><?xml version="1.0" encoding="utf-8"?>
 <p:sld xmlns:a="http://schemas.openxmlformats.org/drawingml/2006/main" xmlns:p="http://schemas.openxmlformats.org/presentationml/2006/main" xmlns:r="http://schemas.openxmlformats.org/officeDocument/2006/relationships">
   <p:cSld>
     <p:bg>
@@ -8622,7 +11034,7 @@
                 <a:ea typeface="Arial"/>
                 <a:cs typeface="Arial"/>
               </a:rPr>
-              <a:t>Что потребуется: ресурсы и сроки</a:t>
+              <a:t>Ожидаемый эффект</a:t>
             </a:r>
           </a:p>
         </p:txBody>
@@ -8635,8 +11047,8 @@
         </p:nvSpPr>
         <p:spPr>
           <a:xfrm>
-            <a:off x="677387" y="1773204"/>
-            <a:ext cx="5245059" cy="4427593"/>
+            <a:off x="677387" y="1783080"/>
+            <a:ext cx="5245059" cy="4417717"/>
           </a:xfrm>
           <a:prstGeom prst="rect">
             <a:avLst/>
@@ -8671,7 +11083,7 @@
                 <a:ea typeface="Play"/>
                 <a:cs typeface="Play"/>
               </a:rPr>
-              <a:t>• Сервис на 1 машине: 2 vCPU / 2 ГБ RAM</a:t>
+              <a:t>• Сборка колоды 4 мин вместо 186</a:t>
             </a:r>
           </a:p>
           <a:p>
@@ -8697,7 +11109,7 @@
                 <a:ea typeface="Play"/>
                 <a:cs typeface="Play"/>
               </a:rPr>
-              <a:t>• Инференс 6 недель: 1 400 руб.</a:t>
+              <a:t>• Время до первой версии сократилось с 6 дней до 1</a:t>
             </a:r>
           </a:p>
           <a:p>
@@ -8723,7 +11135,7 @@
                 <a:ea typeface="Play"/>
                 <a:cs typeface="Play"/>
               </a:rPr>
-              <a:t>• Подключение 4 команд: 3й квартал 2026</a:t>
+              <a:t>• Нарушений стиля 2 из 68 колод</a:t>
             </a:r>
           </a:p>
           <a:p>
@@ -8749,47 +11161,106 @@
                 <a:ea typeface="Play"/>
                 <a:cs typeface="Play"/>
               </a:rPr>
-              <a:t>• Доступ всей компании: 4й квартал 2026</a:t>
+              <a:t>• Дизайнеры закрыли 38 запросов вместо 11 в неделю</a:t>
             </a:r>
           </a:p>
+        </p:txBody>
+      </p:sp>
+      <p:graphicFrame>
+        <p:nvGraphicFramePr>
+          <p:cNvPr id="4" name="Chart 3"/>
+          <p:cNvGraphicFramePr>
+            <a:graphicFrameLocks noGrp="1"/>
+          </p:cNvGraphicFramePr>
+          <p:nvPr/>
+        </p:nvGraphicFramePr>
+        <p:xfrm>
+          <a:off x="6288206" y="1783080"/>
+          <a:ext cx="5245059" cy="4417717"/>
+        </p:xfrm>
+        <a:graphic>
+          <a:graphicData uri="http://schemas.openxmlformats.org/drawingml/2006/chart">
+            <c:chart xmlns:c="http://schemas.openxmlformats.org/drawingml/2006/chart" r:id="rId2"/>
+          </a:graphicData>
+        </a:graphic>
+      </p:graphicFrame>
+    </p:spTree>
+  </p:cSld>
+  <p:clrMapOvr>
+    <a:masterClrMapping/>
+  </p:clrMapOvr>
+</p:sld>
+</file>
+
+<file path=ppt/slides/slide60.xml><?xml version="1.0" encoding="utf-8"?>
+<p:sld xmlns:a="http://schemas.openxmlformats.org/drawingml/2006/main" xmlns:p="http://schemas.openxmlformats.org/presentationml/2006/main" xmlns:r="http://schemas.openxmlformats.org/officeDocument/2006/relationships">
+  <p:cSld>
+    <p:spTree>
+      <p:nvGrpSpPr>
+        <p:cNvPr id="1" name=""/>
+        <p:cNvGrpSpPr/>
+        <p:nvPr/>
+      </p:nvGrpSpPr>
+      <p:grpSpPr/>
+      <p:sp>
+        <p:nvSpPr>
+          <p:cNvPr id="2" name="title"/>
+          <p:cNvSpPr txBox="1"/>
+          <p:nvPr/>
+        </p:nvSpPr>
+        <p:spPr>
+          <a:xfrm>
+            <a:off x="677387" y="692177"/>
+            <a:ext cx="10855878" cy="822960"/>
+          </a:xfrm>
+          <a:prstGeom prst="rect">
+            <a:avLst/>
+          </a:prstGeom>
+          <a:noFill/>
+        </p:spPr>
+        <p:txBody>
+          <a:bodyPr wrap="square" lIns="76200" rIns="76200" tIns="50800" bIns="50800">
+            <a:spAutoFit/>
+          </a:bodyPr>
+          <a:lstStyle/>
           <a:p>
             <a:pPr algn="l">
               <a:spcAft>
                 <a:spcPts val="300"/>
               </a:spcAft>
-              <a:defRPr sz="1600">
+              <a:defRPr sz="4000">
                 <a:solidFill>
                   <a:srgbClr val="000000"/>
                 </a:solidFill>
-                <a:latin typeface="Play"/>
-                <a:ea typeface="Play"/>
-                <a:cs typeface="Play"/>
+                <a:latin typeface="Arial"/>
+                <a:ea typeface="Arial"/>
+                <a:cs typeface="Arial"/>
               </a:defRPr>
             </a:pPr>
             <a:r>
-              <a:rPr sz="1600">
+              <a:rPr sz="4000">
                 <a:solidFill>
                   <a:srgbClr val="000000"/>
                 </a:solidFill>
-                <a:latin typeface="Play"/>
-                <a:ea typeface="Play"/>
-                <a:cs typeface="Play"/>
+                <a:latin typeface="Arial"/>
+                <a:ea typeface="Arial"/>
+                <a:cs typeface="Arial"/>
               </a:rPr>
-              <a:t>• Иллюстрации в стиле шаблона: 1й квартал 2027</a:t>
+              <a:t>Что потребуется: ресурсы и сроки</a:t>
             </a:r>
           </a:p>
         </p:txBody>
       </p:sp>
       <p:sp>
         <p:nvSpPr>
-          <p:cNvPr id="4" name="Rectangle 3"/>
+          <p:cNvPr id="3" name="stat_0:bar"/>
           <p:cNvSpPr/>
           <p:nvPr/>
         </p:nvSpPr>
         <p:spPr>
           <a:xfrm>
-            <a:off x="6288206" y="3809896"/>
-            <a:ext cx="5245059" cy="132827"/>
+            <a:off x="677387" y="1892808"/>
+            <a:ext cx="50800" cy="1678432"/>
           </a:xfrm>
           <a:prstGeom prst="rect">
             <a:avLst/>
@@ -8800,6 +11271,7 @@
           <a:ln>
             <a:noFill/>
           </a:ln>
+          <a:effectLst/>
         </p:spPr>
         <p:style>
           <a:lnRef idx="1">
@@ -8825,16 +11297,94 @@
       </p:sp>
       <p:sp>
         <p:nvSpPr>
-          <p:cNvPr id="5" name="Oval 4"/>
+          <p:cNvPr id="4" name="stat_0"/>
+          <p:cNvSpPr txBox="1"/>
+          <p:nvPr/>
+        </p:nvSpPr>
+        <p:spPr>
+          <a:xfrm>
+            <a:off x="855187" y="1783080"/>
+            <a:ext cx="5033021" cy="1788160"/>
+          </a:xfrm>
+          <a:prstGeom prst="rect">
+            <a:avLst/>
+          </a:prstGeom>
+          <a:noFill/>
+        </p:spPr>
+        <p:txBody>
+          <a:bodyPr wrap="square" lIns="76200" rIns="76200" tIns="0" bIns="0">
+            <a:spAutoFit/>
+          </a:bodyPr>
+          <a:lstStyle/>
+          <a:p>
+            <a:pPr>
+              <a:lnSpc>
+                <a:spcPct val="100000"/>
+              </a:lnSpc>
+              <a:spcAft>
+                <a:spcPts val="200"/>
+              </a:spcAft>
+              <a:defRPr sz="4800" b="1">
+                <a:solidFill>
+                  <a:srgbClr val="0077FF"/>
+                </a:solidFill>
+                <a:latin typeface="Play"/>
+                <a:ea typeface="Play"/>
+                <a:cs typeface="Play"/>
+              </a:defRPr>
+            </a:pPr>
+            <a:r>
+              <a:rPr sz="4800" b="1">
+                <a:solidFill>
+                  <a:srgbClr val="0077FF"/>
+                </a:solidFill>
+                <a:latin typeface="Play"/>
+                <a:ea typeface="Play"/>
+                <a:cs typeface="Play"/>
+              </a:rPr>
+              <a:t>2 vCPU</a:t>
+            </a:r>
+          </a:p>
+          <a:p>
+            <a:pPr>
+              <a:spcAft>
+                <a:spcPts val="300"/>
+              </a:spcAft>
+              <a:defRPr sz="2800" b="0">
+                <a:solidFill>
+                  <a:srgbClr val="000000"/>
+                </a:solidFill>
+                <a:latin typeface="Play"/>
+                <a:ea typeface="Play"/>
+                <a:cs typeface="Play"/>
+              </a:defRPr>
+            </a:pPr>
+            <a:r>
+              <a:rPr sz="2800" b="0">
+                <a:solidFill>
+                  <a:srgbClr val="000000"/>
+                </a:solidFill>
+                <a:latin typeface="Play"/>
+                <a:ea typeface="Play"/>
+                <a:cs typeface="Play"/>
+              </a:rPr>
+              <a:t>Сервис работает на 2 vCPU / 2 GB RAM</a:t>
+            </a:r>
+          </a:p>
+        </p:txBody>
+      </p:sp>
+      <p:sp>
+        <p:nvSpPr>
+          <p:cNvPr id="5" name="stat_1:bar"/>
           <p:cNvSpPr/>
           <p:nvPr/>
         </p:nvSpPr>
         <p:spPr>
           <a:xfrm>
-            <a:off x="6900129" y="3614057"/>
-            <a:ext cx="524505" cy="524505"/>
+            <a:off x="6322444" y="1892808"/>
+            <a:ext cx="50800" cy="1678432"/>
           </a:xfrm>
-          <a:prstGeom prst="ellipse">
+          <a:prstGeom prst="rect">
             <a:avLst/>
           </a:prstGeom>
           <a:solidFill>
@@ -8843,6 +11393,7 @@
           <a:ln>
             <a:noFill/>
           </a:ln>
+          <a:effectLst/>
         </p:spPr>
         <p:style>
           <a:lnRef idx="1">
@@ -8868,14 +11419,14 @@
       </p:sp>
       <p:sp>
         <p:nvSpPr>
-          <p:cNvPr id="6" name="TextBox 5"/>
+          <p:cNvPr id="6" name="stat_1"/>
           <p:cNvSpPr txBox="1"/>
           <p:nvPr/>
         </p:nvSpPr>
         <p:spPr>
           <a:xfrm>
-            <a:off x="6288206" y="1773204"/>
-            <a:ext cx="2622529" cy="1682485"/>
+            <a:off x="6500244" y="1783080"/>
+            <a:ext cx="5033021" cy="1788160"/>
           </a:xfrm>
           <a:prstGeom prst="rect">
             <a:avLst/>
@@ -8883,15 +11434,21 @@
           <a:noFill/>
         </p:spPr>
         <p:txBody>
-          <a:bodyPr wrap="square" lIns="12700" rIns="12700" tIns="12700" bIns="12700">
+          <a:bodyPr wrap="square" lIns="76200" rIns="76200" tIns="0" bIns="0">
             <a:spAutoFit/>
           </a:bodyPr>
           <a:lstStyle/>
           <a:p>
-            <a:pPr algn="ctr">
-              <a:defRPr sz="1400" b="0">
-                <a:solidFill>
-                  <a:srgbClr val="000000"/>
+            <a:pPr>
+              <a:lnSpc>
+                <a:spcPct val="100000"/>
+              </a:lnSpc>
+              <a:spcAft>
+                <a:spcPts val="200"/>
+              </a:spcAft>
+              <a:defRPr sz="4800" b="1">
+                <a:solidFill>
+                  <a:srgbClr val="0077FF"/>
                 </a:solidFill>
                 <a:latin typeface="Play"/>
                 <a:ea typeface="Play"/>
@@ -8899,31 +11456,57 @@
               </a:defRPr>
             </a:pPr>
             <a:r>
-              <a:rPr sz="1400" b="0">
-                <a:solidFill>
-                  <a:srgbClr val="000000"/>
+              <a:rPr sz="4800" b="1">
+                <a:solidFill>
+                  <a:srgbClr val="0077FF"/>
                 </a:solidFill>
                 <a:latin typeface="Play"/>
                 <a:ea typeface="Play"/>
                 <a:cs typeface="Play"/>
               </a:rPr>
-              <a:t>Третий квартал 2026: подключение 4 команд</a:t>
+              <a:t>6 нед.</a:t>
+            </a:r>
+          </a:p>
+          <a:p>
+            <a:pPr>
+              <a:spcAft>
+                <a:spcPts val="300"/>
+              </a:spcAft>
+              <a:defRPr sz="2800" b="0">
+                <a:solidFill>
+                  <a:srgbClr val="000000"/>
+                </a:solidFill>
+                <a:latin typeface="Play"/>
+                <a:ea typeface="Play"/>
+                <a:cs typeface="Play"/>
+              </a:defRPr>
+            </a:pPr>
+            <a:r>
+              <a:rPr sz="2800" b="0">
+                <a:solidFill>
+                  <a:srgbClr val="000000"/>
+                </a:solidFill>
+                <a:latin typeface="Play"/>
+                <a:ea typeface="Play"/>
+                <a:cs typeface="Play"/>
+              </a:rPr>
+              <a:t>Инференс за 6 недель пилота стоит 1 400 руб</a:t>
             </a:r>
           </a:p>
         </p:txBody>
       </p:sp>
       <p:sp>
         <p:nvSpPr>
-          <p:cNvPr id="7" name="Oval 6"/>
+          <p:cNvPr id="7" name="stat_2:bar"/>
           <p:cNvSpPr/>
           <p:nvPr/>
         </p:nvSpPr>
         <p:spPr>
           <a:xfrm>
-            <a:off x="8648482" y="3614057"/>
-            <a:ext cx="524505" cy="524505"/>
+            <a:off x="677387" y="4238826"/>
+            <a:ext cx="50800" cy="1678432"/>
           </a:xfrm>
-          <a:prstGeom prst="ellipse">
+          <a:prstGeom prst="rect">
             <a:avLst/>
           </a:prstGeom>
           <a:solidFill>
@@ -8932,6 +11515,7 @@
           <a:ln>
             <a:noFill/>
           </a:ln>
+          <a:effectLst/>
         </p:spPr>
         <p:style>
           <a:lnRef idx="1">
@@ -8957,14 +11541,14 @@
       </p:sp>
       <p:sp>
         <p:nvSpPr>
-          <p:cNvPr id="8" name="TextBox 7"/>
+          <p:cNvPr id="8" name="stat_2"/>
           <p:cNvSpPr txBox="1"/>
           <p:nvPr/>
         </p:nvSpPr>
         <p:spPr>
           <a:xfrm>
-            <a:off x="7599470" y="4334402"/>
-            <a:ext cx="2622529" cy="1682485"/>
+            <a:off x="855187" y="4129098"/>
+            <a:ext cx="5033021" cy="1788160"/>
           </a:xfrm>
           <a:prstGeom prst="rect">
             <a:avLst/>
@@ -8972,15 +11556,21 @@
           <a:noFill/>
         </p:spPr>
         <p:txBody>
-          <a:bodyPr wrap="square" lIns="12700" rIns="12700" tIns="12700" bIns="12700">
+          <a:bodyPr wrap="square" lIns="76200" rIns="76200" tIns="0" bIns="0">
             <a:spAutoFit/>
           </a:bodyPr>
           <a:lstStyle/>
           <a:p>
-            <a:pPr algn="ctr">
-              <a:defRPr sz="1400" b="0">
-                <a:solidFill>
-                  <a:srgbClr val="000000"/>
+            <a:pPr>
+              <a:lnSpc>
+                <a:spcPct val="100000"/>
+              </a:lnSpc>
+              <a:spcAft>
+                <a:spcPts val="200"/>
+              </a:spcAft>
+              <a:defRPr sz="4800" b="1">
+                <a:solidFill>
+                  <a:srgbClr val="0077FF"/>
                 </a:solidFill>
                 <a:latin typeface="Play"/>
                 <a:ea typeface="Play"/>
@@ -8988,86 +11578,23 @@
               </a:defRPr>
             </a:pPr>
             <a:r>
-              <a:rPr sz="1400" b="0">
-                <a:solidFill>
-                  <a:srgbClr val="000000"/>
+              <a:rPr sz="4800" b="1">
+                <a:solidFill>
+                  <a:srgbClr val="0077FF"/>
                 </a:solidFill>
                 <a:latin typeface="Play"/>
                 <a:ea typeface="Play"/>
                 <a:cs typeface="Play"/>
               </a:rPr>
-              <a:t>Четвёртый квартал 2026: доступ для всей компании</a:t>
+              <a:t>20</a:t>
             </a:r>
           </a:p>
-        </p:txBody>
-      </p:sp>
-      <p:sp>
-        <p:nvSpPr>
-          <p:cNvPr id="9" name="Oval 8"/>
-          <p:cNvSpPr/>
-          <p:nvPr/>
-        </p:nvSpPr>
-        <p:spPr>
-          <a:xfrm>
-            <a:off x="10396835" y="3614057"/>
-            <a:ext cx="524505" cy="524505"/>
-          </a:xfrm>
-          <a:prstGeom prst="ellipse">
-            <a:avLst/>
-          </a:prstGeom>
-          <a:solidFill>
-            <a:srgbClr val="0077FF"/>
-          </a:solidFill>
-          <a:ln>
-            <a:noFill/>
-          </a:ln>
-        </p:spPr>
-        <p:style>
-          <a:lnRef idx="1">
-            <a:schemeClr val="accent1"/>
-          </a:lnRef>
-          <a:fillRef idx="3">
-            <a:schemeClr val="accent1"/>
-          </a:fillRef>
-          <a:effectRef idx="2">
-            <a:schemeClr val="accent1"/>
-          </a:effectRef>
-          <a:fontRef idx="minor">
-            <a:schemeClr val="lt1"/>
-          </a:fontRef>
-        </p:style>
-        <p:txBody>
-          <a:bodyPr rtlCol="0" anchor="ctr"/>
-          <a:lstStyle/>
           <a:p>
-            <a:pPr algn="ctr"/>
-          </a:p>
-        </p:txBody>
-      </p:sp>
-      <p:sp>
-        <p:nvSpPr>
-          <p:cNvPr id="10" name="TextBox 9"/>
-          <p:cNvSpPr txBox="1"/>
-          <p:nvPr/>
-        </p:nvSpPr>
-        <p:spPr>
-          <a:xfrm>
-            <a:off x="8910735" y="1773204"/>
-            <a:ext cx="2622529" cy="1682485"/>
-          </a:xfrm>
-          <a:prstGeom prst="rect">
-            <a:avLst/>
-          </a:prstGeom>
-          <a:noFill/>
-        </p:spPr>
-        <p:txBody>
-          <a:bodyPr wrap="square" lIns="12700" rIns="12700" tIns="12700" bIns="12700">
-            <a:spAutoFit/>
-          </a:bodyPr>
-          <a:lstStyle/>
-          <a:p>
-            <a:pPr algn="ctr">
-              <a:defRPr sz="1400" b="0">
+            <a:pPr>
+              <a:spcAft>
+                <a:spcPts val="300"/>
+              </a:spcAft>
+              <a:defRPr sz="2800" b="0">
                 <a:solidFill>
                   <a:srgbClr val="000000"/>
                 </a:solidFill>
@@ -9077,7 +11604,7 @@
               </a:defRPr>
             </a:pPr>
             <a:r>
-              <a:rPr sz="1400" b="0">
+              <a:rPr sz="2800" b="0">
                 <a:solidFill>
                   <a:srgbClr val="000000"/>
                 </a:solidFill>
@@ -9085,7 +11612,7 @@
                 <a:ea typeface="Play"/>
                 <a:cs typeface="Play"/>
               </a:rPr>
-              <a:t>Первый квартал 2027: генерация иллюстраций</a:t>
+              <a:t>Нагрузка выше 20 задач требует внешней очереди</a:t>
             </a:r>
           </a:p>
         </p:txBody>
@@ -9221,17 +11748,92 @@
           </a:p>
         </p:txBody>
       </p:sp>
+      <p:sp>
+        <p:nvSpPr>
+          <p:cNvPr id="797" name="body"/>
+          <p:cNvSpPr txBox="1"/>
+          <p:nvPr/>
+        </p:nvSpPr>
+        <p:spPr>
+          <a:xfrm>
+            <a:off x="677387" y="1783080"/>
+            <a:ext cx="5245059" cy="4417717"/>
+          </a:xfrm>
+          <a:prstGeom prst="rect">
+            <a:avLst/>
+          </a:prstGeom>
+          <a:noFill/>
+        </p:spPr>
+        <p:txBody>
+          <a:bodyPr wrap="square" lIns="76200" rIns="76200" tIns="50800" bIns="50800">
+            <a:spAutoFit/>
+          </a:bodyPr>
+          <a:lstStyle/>
+          <a:p>
+            <a:pPr algn="l">
+              <a:spcAft>
+                <a:spcPts val="300"/>
+              </a:spcAft>
+              <a:defRPr sz="1600">
+                <a:solidFill>
+                  <a:srgbClr val="000000"/>
+                </a:solidFill>
+                <a:latin typeface="Play"/>
+                <a:ea typeface="Play"/>
+                <a:cs typeface="Play"/>
+              </a:defRPr>
+            </a:pPr>
+            <a:r>
+              <a:rPr sz="1600">
+                <a:solidFill>
+                  <a:srgbClr val="000000"/>
+                </a:solidFill>
+                <a:latin typeface="Play"/>
+                <a:ea typeface="Play"/>
+                <a:cs typeface="Play"/>
+              </a:rPr>
+              <a:t>• Пилот 6 недель на двух командах, 68 презентаций</a:t>
+            </a:r>
+          </a:p>
+          <a:p>
+            <a:pPr algn="l">
+              <a:spcAft>
+                <a:spcPts val="300"/>
+              </a:spcAft>
+              <a:defRPr sz="1600">
+                <a:solidFill>
+                  <a:srgbClr val="000000"/>
+                </a:solidFill>
+                <a:latin typeface="Play"/>
+                <a:ea typeface="Play"/>
+                <a:cs typeface="Play"/>
+              </a:defRPr>
+            </a:pPr>
+            <a:r>
+              <a:rPr sz="1600">
+                <a:solidFill>
+                  <a:srgbClr val="000000"/>
+                </a:solidFill>
+                <a:latin typeface="Play"/>
+                <a:ea typeface="Play"/>
+                <a:cs typeface="Play"/>
+              </a:rPr>
+              <a:t>• Сборка 4 мин, 1 день до первой версии, 2 нарушения стиля</a:t>
+            </a:r>
+          </a:p>
+        </p:txBody>
+      </p:sp>
       <p:graphicFrame>
         <p:nvGraphicFramePr>
-          <p:cNvPr id="797" name="Table 796"/>
+          <p:cNvPr id="798" name="Table 797"/>
           <p:cNvGraphicFramePr>
             <a:graphicFrameLocks noGrp="1"/>
           </p:cNvGraphicFramePr>
           <p:nvPr/>
         </p:nvGraphicFramePr>
         <p:xfrm>
-          <a:off x="6288206" y="2200937"/>
-          <a:ext cx="5245059" cy="4127761"/>
+          <a:off x="6288206" y="1783080"/>
+          <a:ext cx="5245059" cy="4417717"/>
         </p:xfrm>
         <a:graphic>
           <a:graphicData uri="http://schemas.openxmlformats.org/drawingml/2006/table">
@@ -9244,7 +11846,7 @@
                 <a:gridCol w="1748353"/>
                 <a:gridCol w="1748353"/>
               </a:tblGrid>
-              <a:tr h="825552">
+              <a:tr h="883543">
                 <a:tc>
                   <a:txBody>
                     <a:bodyPr/>
@@ -9287,7 +11889,7 @@
                         </a:defRPr>
                       </a:pPr>
                       <a:r>
-                        <a:t>До</a:t>
+                        <a:t>Текущий процесс</a:t>
                       </a:r>
                     </a:p>
                   </a:txBody>
@@ -9313,7 +11915,7 @@
                         </a:defRPr>
                       </a:pPr>
                       <a:r>
-                        <a:t>После</a:t>
+                        <a:t>Пилот</a:t>
                       </a:r>
                     </a:p>
                   </a:txBody>
@@ -9324,7 +11926,7 @@
                   </a:tcPr>
                 </a:tc>
               </a:tr>
-              <a:tr h="825552">
+              <a:tr h="883543">
                 <a:tc>
                   <a:txBody>
                     <a:bodyPr/>
@@ -9404,7 +12006,7 @@
                   </a:tcPr>
                 </a:tc>
               </a:tr>
-              <a:tr h="825552">
+              <a:tr h="883543">
                 <a:tc>
                   <a:txBody>
                     <a:bodyPr/>
@@ -9421,7 +12023,7 @@
                         </a:defRPr>
                       </a:pPr>
                       <a:r>
-                        <a:t>Время первой версии (дней)</a:t>
+                        <a:t>Время до первой версии (дней)</a:t>
                       </a:r>
                     </a:p>
                   </a:txBody>
@@ -9484,7 +12086,7 @@
                   </a:tcPr>
                 </a:tc>
               </a:tr>
-              <a:tr h="825552">
+              <a:tr h="883543">
                 <a:tc>
                   <a:txBody>
                     <a:bodyPr/>
@@ -9527,7 +12129,7 @@
                         </a:defRPr>
                       </a:pPr>
                       <a:r>
-                        <a:t>19</a:t>
+                        <a:t>19/42</a:t>
                       </a:r>
                     </a:p>
                   </a:txBody>
@@ -9553,7 +12155,7 @@
                         </a:defRPr>
                       </a:pPr>
                       <a:r>
-                        <a:t>2</a:t>
+                        <a:t>2/68</a:t>
                       </a:r>
                     </a:p>
                   </a:txBody>
@@ -9564,7 +12166,7 @@
                   </a:tcPr>
                 </a:tc>
               </a:tr>
-              <a:tr h="825553">
+              <a:tr h="883545">
                 <a:tc>
                   <a:txBody>
                     <a:bodyPr/>
@@ -9581,7 +12183,7 @@
                         </a:defRPr>
                       </a:pPr>
                       <a:r>
-                        <a:t>Запросы закрыты в неделю</a:t>
+                        <a:t>Запросы закрыты</a:t>
                       </a:r>
                     </a:p>
                   </a:txBody>
@@ -9607,7 +12209,7 @@
                         </a:defRPr>
                       </a:pPr>
                       <a:r>
-                        <a:t>11</a:t>
+                        <a:t>11/нед</a:t>
                       </a:r>
                     </a:p>
                   </a:txBody>
@@ -9633,7 +12235,7 @@
                         </a:defRPr>
                       </a:pPr>
                       <a:r>
-                        <a:t>38</a:t>
+                        <a:t>38/нед</a:t>
                       </a:r>
                     </a:p>
                   </a:txBody>
@@ -9675,64 +12277,7 @@
       <p:grpSpPr/>
       <p:sp>
         <p:nvSpPr>
-          <p:cNvPr id="764" name="Google Shape;764;p58"/>
-          <p:cNvSpPr txBox="1"/>
-          <p:nvPr/>
-        </p:nvSpPr>
-        <p:spPr>
-          <a:xfrm>
-            <a:off x="18692059" y="4674436"/>
-            <a:ext cx="4304330" cy="678198"/>
-          </a:xfrm>
-          <a:prstGeom prst="rect">
-            <a:avLst/>
-          </a:prstGeom>
-          <a:noFill/>
-          <a:ln>
-            <a:noFill/>
-          </a:ln>
-        </p:spPr>
-        <p:txBody>
-          <a:bodyPr anchorCtr="0" anchor="t" bIns="45700" lIns="91425" spcFirstLastPara="1" rIns="91425" wrap="square" tIns="45700">
-            <a:noAutofit/>
-          </a:bodyPr>
-          <a:lstStyle/>
-          <a:p>
-            <a:pPr indent="0" lvl="0" marL="0" marR="0" rtl="0" algn="l">
-              <a:lnSpc>
-                <a:spcPct val="110000"/>
-              </a:lnSpc>
-              <a:spcBef>
-                <a:spcPts val="0"/>
-              </a:spcBef>
-              <a:spcAft>
-                <a:spcPts val="0"/>
-              </a:spcAft>
-              <a:buClr>
-                <a:schemeClr val="dk1"/>
-              </a:buClr>
-              <a:buSzPts val="1600"/>
-              <a:buFont typeface="Arial"/>
-              <a:buNone/>
-            </a:pPr>
-            <a:r>
-              <a:t/>
-            </a:r>
-            <a:endParaRPr sz="1600">
-              <a:solidFill>
-                <a:schemeClr val="dk1"/>
-              </a:solidFill>
-              <a:latin typeface="Arial"/>
-              <a:ea typeface="Arial"/>
-              <a:cs typeface="Arial"/>
-              <a:sym typeface="Arial"/>
-            </a:endParaRPr>
-          </a:p>
-        </p:txBody>
-      </p:sp>
-      <p:sp>
-        <p:nvSpPr>
-          <p:cNvPr id="765" name="title"/>
+          <p:cNvPr id="2" name="title"/>
           <p:cNvSpPr txBox="1"/>
           <p:nvPr/>
         </p:nvSpPr>
@@ -9774,21 +12319,21 @@
                 <a:ea typeface="Arial"/>
                 <a:cs typeface="Arial"/>
               </a:rPr>
-              <a:t>Что мы просим решить</a:t>
+              <a:t>Риски</a:t>
             </a:r>
           </a:p>
         </p:txBody>
       </p:sp>
       <p:sp>
         <p:nvSpPr>
-          <p:cNvPr id="766" name="body"/>
+          <p:cNvPr id="3" name="body"/>
           <p:cNvSpPr txBox="1"/>
           <p:nvPr/>
         </p:nvSpPr>
         <p:spPr>
           <a:xfrm>
-            <a:off x="677387" y="2200937"/>
-            <a:ext cx="10855878" cy="4127761"/>
+            <a:off x="677387" y="2752418"/>
+            <a:ext cx="5874466" cy="2479040"/>
           </a:xfrm>
           <a:prstGeom prst="rect">
             <a:avLst/>
@@ -9805,7 +12350,7 @@
               <a:spcAft>
                 <a:spcPts val="300"/>
               </a:spcAft>
-              <a:defRPr sz="2800">
+              <a:defRPr sz="2400">
                 <a:solidFill>
                   <a:srgbClr val="000000"/>
                 </a:solidFill>
@@ -9815,7 +12360,7 @@
               </a:defRPr>
             </a:pPr>
             <a:r>
-              <a:rPr sz="2800">
+              <a:rPr sz="2400">
                 <a:solidFill>
                   <a:srgbClr val="000000"/>
                 </a:solidFill>
@@ -9823,7 +12368,7 @@
                 <a:ea typeface="Play"/>
                 <a:cs typeface="Play"/>
               </a:rPr>
-              <a:t>• Запуск сервиса на всю компанию в четвертом квартале 2026</a:t>
+              <a:t>• Слабая модель может выдумать неподтверждённые цифры</a:t>
             </a:r>
           </a:p>
           <a:p>
@@ -9831,7 +12376,7 @@
               <a:spcAft>
                 <a:spcPts val="300"/>
               </a:spcAft>
-              <a:defRPr sz="2800">
+              <a:defRPr sz="2400">
                 <a:solidFill>
                   <a:srgbClr val="000000"/>
                 </a:solidFill>
@@ -9841,7 +12386,7 @@
               </a:defRPr>
             </a:pPr>
             <a:r>
-              <a:rPr sz="2800">
+              <a:rPr sz="2400">
                 <a:solidFill>
                   <a:srgbClr val="000000"/>
                 </a:solidFill>
@@ -9849,7 +12394,7 @@
                 <a:ea typeface="Play"/>
                 <a:cs typeface="Play"/>
               </a:rPr>
-              <a:t>• Интеграция с хранилищем документов в четвертом квартале 2026</a:t>
+              <a:t>• Некачественный шаблон приводит к ошибкам стиля</a:t>
             </a:r>
           </a:p>
           <a:p>
@@ -9857,7 +12402,7 @@
               <a:spcAft>
                 <a:spcPts val="300"/>
               </a:spcAft>
-              <a:defRPr sz="2800">
+              <a:defRPr sz="2400">
                 <a:solidFill>
                   <a:srgbClr val="000000"/>
                 </a:solidFill>
@@ -9867,7 +12412,7 @@
               </a:defRPr>
             </a:pPr>
             <a:r>
-              <a:rPr sz="2800">
+              <a:rPr sz="2400">
                 <a:solidFill>
                   <a:srgbClr val="000000"/>
                 </a:solidFill>
@@ -9875,11 +12420,412 @@
                 <a:ea typeface="Play"/>
                 <a:cs typeface="Play"/>
               </a:rPr>
-              <a:t>• Подключение 4 команд в третьем квартале 2026</a:t>
+              <a:t>• Нагрузка &gt;20 задач требует внешней очереди</a:t>
             </a:r>
           </a:p>
         </p:txBody>
       </p:sp>
+      <p:grpSp>
+        <p:nvGrpSpPr>
+          <p:cNvPr id="4" name="illustration:builtin-risk"/>
+          <p:cNvGrpSpPr/>
+          <p:nvPr/>
+        </p:nvGrpSpPr>
+        <p:grpSpPr>
+          <a:xfrm>
+            <a:off x="7771509" y="2538008"/>
+            <a:ext cx="3023252" cy="2907860"/>
+            <a:chOff x="7771509" y="2538008"/>
+            <a:chExt cx="3023252" cy="2907860"/>
+          </a:xfrm>
+        </p:grpSpPr>
+        <p:sp>
+          <p:nvSpPr>
+            <p:cNvPr id="5" name="Oval 4"/>
+            <p:cNvSpPr/>
+            <p:nvPr/>
+          </p:nvSpPr>
+          <p:spPr>
+            <a:xfrm>
+              <a:off x="7771509" y="2538008"/>
+              <a:ext cx="2907860" cy="2907860"/>
+            </a:xfrm>
+            <a:prstGeom prst="ellipse">
+              <a:avLst/>
+            </a:prstGeom>
+            <a:solidFill>
+              <a:srgbClr val="D6E9FF"/>
+            </a:solidFill>
+            <a:ln>
+              <a:noFill/>
+            </a:ln>
+            <a:effectLst/>
+          </p:spPr>
+          <p:style>
+            <a:lnRef idx="1">
+              <a:schemeClr val="accent1"/>
+            </a:lnRef>
+            <a:fillRef idx="3">
+              <a:schemeClr val="accent1"/>
+            </a:fillRef>
+            <a:effectRef idx="2">
+              <a:schemeClr val="accent1"/>
+            </a:effectRef>
+            <a:fontRef idx="minor">
+              <a:schemeClr val="lt1"/>
+            </a:fontRef>
+          </p:style>
+          <p:txBody>
+            <a:bodyPr rtlCol="0" anchor="ctr"/>
+            <a:lstStyle/>
+            <a:p>
+              <a:pPr algn="ctr"/>
+            </a:p>
+          </p:txBody>
+        </p:sp>
+        <p:sp>
+          <p:nvSpPr>
+            <p:cNvPr id="6" name="Freeform 5"/>
+            <p:cNvSpPr/>
+            <p:nvPr/>
+          </p:nvSpPr>
+          <p:spPr>
+            <a:xfrm>
+              <a:off x="7958443" y="2863942"/>
+              <a:ext cx="2533993" cy="2304987"/>
+            </a:xfrm>
+            <a:custGeom>
+              <a:avLst/>
+              <a:gdLst/>
+              <a:ahLst/>
+              <a:cxnLst/>
+              <a:rect l="l" t="t" r="r" b="b"/>
+              <a:pathLst>
+                <a:path w="2533993" h="2304987">
+                  <a:moveTo>
+                    <a:pt x="1082370" y="112553"/>
+                  </a:moveTo>
+                  <a:lnTo>
+                    <a:pt x="1102702" y="80624"/>
+                  </a:lnTo>
+                  <a:lnTo>
+                    <a:pt x="1128492" y="52918"/>
+                  </a:lnTo>
+                  <a:lnTo>
+                    <a:pt x="1158886" y="30359"/>
+                  </a:lnTo>
+                  <a:lnTo>
+                    <a:pt x="1192858" y="13685"/>
+                  </a:lnTo>
+                  <a:lnTo>
+                    <a:pt x="1229298" y="3450"/>
+                  </a:lnTo>
+                  <a:lnTo>
+                    <a:pt x="1266997" y="0"/>
+                  </a:lnTo>
+                  <a:lnTo>
+                    <a:pt x="1304695" y="3450"/>
+                  </a:lnTo>
+                  <a:lnTo>
+                    <a:pt x="1341135" y="13685"/>
+                  </a:lnTo>
+                  <a:lnTo>
+                    <a:pt x="1375107" y="30359"/>
+                  </a:lnTo>
+                  <a:lnTo>
+                    <a:pt x="1405501" y="52918"/>
+                  </a:lnTo>
+                  <a:lnTo>
+                    <a:pt x="1431291" y="80624"/>
+                  </a:lnTo>
+                  <a:lnTo>
+                    <a:pt x="1451623" y="112553"/>
+                  </a:lnTo>
+                  <a:lnTo>
+                    <a:pt x="2513223" y="2004970"/>
+                  </a:lnTo>
+                  <a:lnTo>
+                    <a:pt x="2526977" y="2040580"/>
+                  </a:lnTo>
+                  <a:lnTo>
+                    <a:pt x="2533981" y="2078105"/>
+                  </a:lnTo>
+                  <a:lnTo>
+                    <a:pt x="2533993" y="2116276"/>
+                  </a:lnTo>
+                  <a:lnTo>
+                    <a:pt x="2527023" y="2153813"/>
+                  </a:lnTo>
+                  <a:lnTo>
+                    <a:pt x="2513315" y="2189434"/>
+                  </a:lnTo>
+                  <a:lnTo>
+                    <a:pt x="2493306" y="2221940"/>
+                  </a:lnTo>
+                  <a:lnTo>
+                    <a:pt x="2467689" y="2250234"/>
+                  </a:lnTo>
+                  <a:lnTo>
+                    <a:pt x="2437318" y="2273370"/>
+                  </a:lnTo>
+                  <a:lnTo>
+                    <a:pt x="2403232" y="2290563"/>
+                  </a:lnTo>
+                  <a:lnTo>
+                    <a:pt x="2366583" y="2301214"/>
+                  </a:lnTo>
+                  <a:lnTo>
+                    <a:pt x="2328596" y="2304987"/>
+                  </a:lnTo>
+                  <a:lnTo>
+                    <a:pt x="205397" y="2304987"/>
+                  </a:lnTo>
+                  <a:lnTo>
+                    <a:pt x="167410" y="2301214"/>
+                  </a:lnTo>
+                  <a:lnTo>
+                    <a:pt x="130761" y="2290563"/>
+                  </a:lnTo>
+                  <a:lnTo>
+                    <a:pt x="96675" y="2273370"/>
+                  </a:lnTo>
+                  <a:lnTo>
+                    <a:pt x="66304" y="2250234"/>
+                  </a:lnTo>
+                  <a:lnTo>
+                    <a:pt x="40687" y="2221940"/>
+                  </a:lnTo>
+                  <a:lnTo>
+                    <a:pt x="20678" y="2189434"/>
+                  </a:lnTo>
+                  <a:lnTo>
+                    <a:pt x="6970" y="2153813"/>
+                  </a:lnTo>
+                  <a:lnTo>
+                    <a:pt x="0" y="2116276"/>
+                  </a:lnTo>
+                  <a:lnTo>
+                    <a:pt x="12" y="2078105"/>
+                  </a:lnTo>
+                  <a:lnTo>
+                    <a:pt x="7016" y="2040580"/>
+                  </a:lnTo>
+                  <a:lnTo>
+                    <a:pt x="20770" y="2004970"/>
+                  </a:lnTo>
+                  <a:close/>
+                </a:path>
+              </a:pathLst>
+            </a:custGeom>
+            <a:solidFill>
+              <a:srgbClr val="0077FF"/>
+            </a:solidFill>
+            <a:ln>
+              <a:noFill/>
+            </a:ln>
+            <a:effectLst/>
+          </p:spPr>
+          <p:style>
+            <a:lnRef idx="1">
+              <a:schemeClr val="accent1"/>
+            </a:lnRef>
+            <a:fillRef idx="3">
+              <a:schemeClr val="accent1"/>
+            </a:fillRef>
+            <a:effectRef idx="2">
+              <a:schemeClr val="accent1"/>
+            </a:effectRef>
+            <a:fontRef idx="minor">
+              <a:schemeClr val="lt1"/>
+            </a:fontRef>
+          </p:style>
+          <p:txBody>
+            <a:bodyPr rtlCol="0" anchor="ctr"/>
+            <a:lstStyle/>
+            <a:p>
+              <a:pPr algn="ctr"/>
+            </a:p>
+          </p:txBody>
+        </p:sp>
+        <p:sp>
+          <p:nvSpPr>
+            <p:cNvPr id="7" name="Rounded Rectangle 6"/>
+            <p:cNvSpPr/>
+            <p:nvPr/>
+          </p:nvSpPr>
+          <p:spPr>
+            <a:xfrm>
+              <a:off x="9110048" y="3553451"/>
+              <a:ext cx="230782" cy="853895"/>
+            </a:xfrm>
+            <a:prstGeom prst="roundRect">
+              <a:avLst>
+                <a:gd name="adj" fmla="val 50000"/>
+              </a:avLst>
+            </a:prstGeom>
+            <a:solidFill>
+              <a:srgbClr val="FFFFFF"/>
+            </a:solidFill>
+            <a:ln>
+              <a:noFill/>
+            </a:ln>
+            <a:effectLst/>
+          </p:spPr>
+          <p:style>
+            <a:lnRef idx="1">
+              <a:schemeClr val="accent1"/>
+            </a:lnRef>
+            <a:fillRef idx="3">
+              <a:schemeClr val="accent1"/>
+            </a:fillRef>
+            <a:effectRef idx="2">
+              <a:schemeClr val="accent1"/>
+            </a:effectRef>
+            <a:fontRef idx="minor">
+              <a:schemeClr val="lt1"/>
+            </a:fontRef>
+          </p:style>
+          <p:txBody>
+            <a:bodyPr rtlCol="0" anchor="ctr"/>
+            <a:lstStyle/>
+            <a:p>
+              <a:pPr algn="ctr"/>
+            </a:p>
+          </p:txBody>
+        </p:sp>
+        <p:sp>
+          <p:nvSpPr>
+            <p:cNvPr id="8" name="Oval 7"/>
+            <p:cNvSpPr/>
+            <p:nvPr/>
+          </p:nvSpPr>
+          <p:spPr>
+            <a:xfrm>
+              <a:off x="9086970" y="4591973"/>
+              <a:ext cx="276939" cy="276939"/>
+            </a:xfrm>
+            <a:prstGeom prst="ellipse">
+              <a:avLst/>
+            </a:prstGeom>
+            <a:solidFill>
+              <a:srgbClr val="FFFFFF"/>
+            </a:solidFill>
+            <a:ln>
+              <a:noFill/>
+            </a:ln>
+            <a:effectLst/>
+          </p:spPr>
+          <p:style>
+            <a:lnRef idx="1">
+              <a:schemeClr val="accent1"/>
+            </a:lnRef>
+            <a:fillRef idx="3">
+              <a:schemeClr val="accent1"/>
+            </a:fillRef>
+            <a:effectRef idx="2">
+              <a:schemeClr val="accent1"/>
+            </a:effectRef>
+            <a:fontRef idx="minor">
+              <a:schemeClr val="lt1"/>
+            </a:fontRef>
+          </p:style>
+          <p:txBody>
+            <a:bodyPr rtlCol="0" anchor="ctr"/>
+            <a:lstStyle/>
+            <a:p>
+              <a:pPr algn="ctr"/>
+            </a:p>
+          </p:txBody>
+        </p:sp>
+        <p:sp>
+          <p:nvSpPr>
+            <p:cNvPr id="9" name="Oval 8"/>
+            <p:cNvSpPr/>
+            <p:nvPr/>
+          </p:nvSpPr>
+          <p:spPr>
+            <a:xfrm>
+              <a:off x="7771509" y="3253434"/>
+              <a:ext cx="230782" cy="230782"/>
+            </a:xfrm>
+            <a:prstGeom prst="ellipse">
+              <a:avLst/>
+            </a:prstGeom>
+            <a:solidFill>
+              <a:srgbClr val="FF3885"/>
+            </a:solidFill>
+            <a:ln>
+              <a:noFill/>
+            </a:ln>
+            <a:effectLst/>
+          </p:spPr>
+          <p:style>
+            <a:lnRef idx="1">
+              <a:schemeClr val="accent1"/>
+            </a:lnRef>
+            <a:fillRef idx="3">
+              <a:schemeClr val="accent1"/>
+            </a:fillRef>
+            <a:effectRef idx="2">
+              <a:schemeClr val="accent1"/>
+            </a:effectRef>
+            <a:fontRef idx="minor">
+              <a:schemeClr val="lt1"/>
+            </a:fontRef>
+          </p:style>
+          <p:txBody>
+            <a:bodyPr rtlCol="0" anchor="ctr"/>
+            <a:lstStyle/>
+            <a:p>
+              <a:pPr algn="ctr"/>
+            </a:p>
+          </p:txBody>
+        </p:sp>
+        <p:sp>
+          <p:nvSpPr>
+            <p:cNvPr id="10" name="Oval 9"/>
+            <p:cNvSpPr/>
+            <p:nvPr/>
+          </p:nvSpPr>
+          <p:spPr>
+            <a:xfrm>
+              <a:off x="10471666" y="3068808"/>
+              <a:ext cx="323095" cy="323095"/>
+            </a:xfrm>
+            <a:prstGeom prst="ellipse">
+              <a:avLst/>
+            </a:prstGeom>
+            <a:solidFill>
+              <a:srgbClr val="B2B2B2"/>
+            </a:solidFill>
+            <a:ln>
+              <a:noFill/>
+            </a:ln>
+            <a:effectLst/>
+          </p:spPr>
+          <p:style>
+            <a:lnRef idx="1">
+              <a:schemeClr val="accent1"/>
+            </a:lnRef>
+            <a:fillRef idx="3">
+              <a:schemeClr val="accent1"/>
+            </a:fillRef>
+            <a:effectRef idx="2">
+              <a:schemeClr val="accent1"/>
+            </a:effectRef>
+            <a:fontRef idx="minor">
+              <a:schemeClr val="lt1"/>
+            </a:fontRef>
+          </p:style>
+          <p:txBody>
+            <a:bodyPr rtlCol="0" anchor="ctr"/>
+            <a:lstStyle/>
+            <a:p>
+              <a:pPr algn="ctr"/>
+            </a:p>
+          </p:txBody>
+        </p:sp>
+      </p:grpSp>
     </p:spTree>
   </p:cSld>
   <p:clrMapOvr>
@@ -9907,7 +12853,426 @@
       <p:grpSpPr/>
       <p:sp>
         <p:nvSpPr>
-          <p:cNvPr id="782" name="Google Shape;782;p59"/>
+          <p:cNvPr id="2" name="title"/>
+          <p:cNvSpPr txBox="1"/>
+          <p:nvPr/>
+        </p:nvSpPr>
+        <p:spPr>
+          <a:xfrm>
+            <a:off x="677875" y="692177"/>
+            <a:ext cx="10855391" cy="822960"/>
+          </a:xfrm>
+          <a:prstGeom prst="rect">
+            <a:avLst/>
+          </a:prstGeom>
+          <a:noFill/>
+        </p:spPr>
+        <p:txBody>
+          <a:bodyPr wrap="square" lIns="76200" rIns="76200" tIns="50800" bIns="50800">
+            <a:spAutoFit/>
+          </a:bodyPr>
+          <a:lstStyle/>
+          <a:p>
+            <a:pPr algn="l">
+              <a:spcAft>
+                <a:spcPts val="300"/>
+              </a:spcAft>
+              <a:defRPr sz="4000">
+                <a:solidFill>
+                  <a:srgbClr val="000000"/>
+                </a:solidFill>
+                <a:latin typeface="Arial"/>
+                <a:ea typeface="Arial"/>
+                <a:cs typeface="Arial"/>
+              </a:defRPr>
+            </a:pPr>
+            <a:r>
+              <a:rPr sz="4000">
+                <a:solidFill>
+                  <a:srgbClr val="000000"/>
+                </a:solidFill>
+                <a:latin typeface="Arial"/>
+                <a:ea typeface="Arial"/>
+                <a:cs typeface="Arial"/>
+              </a:rPr>
+              <a:t>Стоимость и ресурсы</a:t>
+            </a:r>
+          </a:p>
+        </p:txBody>
+      </p:sp>
+      <p:sp>
+        <p:nvSpPr>
+          <p:cNvPr id="3" name="body"/>
+          <p:cNvSpPr txBox="1"/>
+          <p:nvPr/>
+        </p:nvSpPr>
+        <p:spPr>
+          <a:xfrm>
+            <a:off x="677875" y="1783080"/>
+            <a:ext cx="10855391" cy="1158240"/>
+          </a:xfrm>
+          <a:prstGeom prst="rect">
+            <a:avLst/>
+          </a:prstGeom>
+          <a:noFill/>
+        </p:spPr>
+        <p:txBody>
+          <a:bodyPr wrap="square" lIns="76200" rIns="76200" tIns="50800" bIns="50800">
+            <a:spAutoFit/>
+          </a:bodyPr>
+          <a:lstStyle/>
+          <a:p>
+            <a:pPr algn="l">
+              <a:spcAft>
+                <a:spcPts val="300"/>
+              </a:spcAft>
+              <a:defRPr sz="3200">
+                <a:solidFill>
+                  <a:srgbClr val="000000"/>
+                </a:solidFill>
+                <a:latin typeface="Play"/>
+                <a:ea typeface="Play"/>
+                <a:cs typeface="Play"/>
+              </a:defRPr>
+            </a:pPr>
+            <a:r>
+              <a:rPr sz="3200">
+                <a:solidFill>
+                  <a:srgbClr val="000000"/>
+                </a:solidFill>
+                <a:latin typeface="Play"/>
+                <a:ea typeface="Play"/>
+                <a:cs typeface="Play"/>
+              </a:rPr>
+              <a:t>Модель gpt-oss-20b подключается по OpenAI-совместимому протоколу</a:t>
+            </a:r>
+          </a:p>
+        </p:txBody>
+      </p:sp>
+      <p:sp>
+        <p:nvSpPr>
+          <p:cNvPr id="4" name="stat_0:bar"/>
+          <p:cNvSpPr/>
+          <p:nvPr/>
+        </p:nvSpPr>
+        <p:spPr>
+          <a:xfrm>
+            <a:off x="677875" y="3256788"/>
+            <a:ext cx="50800" cy="1810512"/>
+          </a:xfrm>
+          <a:prstGeom prst="rect">
+            <a:avLst/>
+          </a:prstGeom>
+          <a:solidFill>
+            <a:srgbClr val="0077FF"/>
+          </a:solidFill>
+          <a:ln>
+            <a:noFill/>
+          </a:ln>
+          <a:effectLst/>
+        </p:spPr>
+        <p:style>
+          <a:lnRef idx="1">
+            <a:schemeClr val="accent1"/>
+          </a:lnRef>
+          <a:fillRef idx="3">
+            <a:schemeClr val="accent1"/>
+          </a:fillRef>
+          <a:effectRef idx="2">
+            <a:schemeClr val="accent1"/>
+          </a:effectRef>
+          <a:fontRef idx="minor">
+            <a:schemeClr val="lt1"/>
+          </a:fontRef>
+        </p:style>
+        <p:txBody>
+          <a:bodyPr rtlCol="0" anchor="ctr"/>
+          <a:lstStyle/>
+          <a:p>
+            <a:pPr algn="ctr"/>
+          </a:p>
+        </p:txBody>
+      </p:sp>
+      <p:sp>
+        <p:nvSpPr>
+          <p:cNvPr id="5" name="stat_0"/>
+          <p:cNvSpPr txBox="1"/>
+          <p:nvPr/>
+        </p:nvSpPr>
+        <p:spPr>
+          <a:xfrm>
+            <a:off x="855675" y="3147060"/>
+            <a:ext cx="5032787" cy="1920239"/>
+          </a:xfrm>
+          <a:prstGeom prst="rect">
+            <a:avLst/>
+          </a:prstGeom>
+          <a:noFill/>
+        </p:spPr>
+        <p:txBody>
+          <a:bodyPr wrap="square" lIns="76200" rIns="76200" tIns="0" bIns="0">
+            <a:spAutoFit/>
+          </a:bodyPr>
+          <a:lstStyle/>
+          <a:p>
+            <a:pPr>
+              <a:lnSpc>
+                <a:spcPct val="100000"/>
+              </a:lnSpc>
+              <a:spcAft>
+                <a:spcPts val="200"/>
+              </a:spcAft>
+              <a:defRPr sz="4800" b="1">
+                <a:solidFill>
+                  <a:srgbClr val="0077FF"/>
+                </a:solidFill>
+                <a:latin typeface="Play"/>
+                <a:ea typeface="Play"/>
+                <a:cs typeface="Play"/>
+              </a:defRPr>
+            </a:pPr>
+            <a:r>
+              <a:rPr sz="4800" b="1">
+                <a:solidFill>
+                  <a:srgbClr val="0077FF"/>
+                </a:solidFill>
+                <a:latin typeface="Play"/>
+                <a:ea typeface="Play"/>
+                <a:cs typeface="Play"/>
+              </a:rPr>
+              <a:t>2 vCPU</a:t>
+            </a:r>
+          </a:p>
+          <a:p>
+            <a:pPr>
+              <a:spcAft>
+                <a:spcPts val="300"/>
+              </a:spcAft>
+              <a:defRPr sz="3200" b="0">
+                <a:solidFill>
+                  <a:srgbClr val="000000"/>
+                </a:solidFill>
+                <a:latin typeface="Play"/>
+                <a:ea typeface="Play"/>
+                <a:cs typeface="Play"/>
+              </a:defRPr>
+            </a:pPr>
+            <a:r>
+              <a:rPr sz="3200" b="0">
+                <a:solidFill>
+                  <a:srgbClr val="000000"/>
+                </a:solidFill>
+                <a:latin typeface="Play"/>
+                <a:ea typeface="Play"/>
+                <a:cs typeface="Play"/>
+              </a:rPr>
+              <a:t>Сервис использует 2 vCPU / 2 GB RAM</a:t>
+            </a:r>
+          </a:p>
+        </p:txBody>
+      </p:sp>
+      <p:sp>
+        <p:nvSpPr>
+          <p:cNvPr id="6" name="stat_1:bar"/>
+          <p:cNvSpPr/>
+          <p:nvPr/>
+        </p:nvSpPr>
+        <p:spPr>
+          <a:xfrm>
+            <a:off x="6322678" y="3256788"/>
+            <a:ext cx="50800" cy="1810512"/>
+          </a:xfrm>
+          <a:prstGeom prst="rect">
+            <a:avLst/>
+          </a:prstGeom>
+          <a:solidFill>
+            <a:srgbClr val="0077FF"/>
+          </a:solidFill>
+          <a:ln>
+            <a:noFill/>
+          </a:ln>
+          <a:effectLst/>
+        </p:spPr>
+        <p:style>
+          <a:lnRef idx="1">
+            <a:schemeClr val="accent1"/>
+          </a:lnRef>
+          <a:fillRef idx="3">
+            <a:schemeClr val="accent1"/>
+          </a:fillRef>
+          <a:effectRef idx="2">
+            <a:schemeClr val="accent1"/>
+          </a:effectRef>
+          <a:fontRef idx="minor">
+            <a:schemeClr val="lt1"/>
+          </a:fontRef>
+        </p:style>
+        <p:txBody>
+          <a:bodyPr rtlCol="0" anchor="ctr"/>
+          <a:lstStyle/>
+          <a:p>
+            <a:pPr algn="ctr"/>
+          </a:p>
+        </p:txBody>
+      </p:sp>
+      <p:sp>
+        <p:nvSpPr>
+          <p:cNvPr id="7" name="stat_1"/>
+          <p:cNvSpPr txBox="1"/>
+          <p:nvPr/>
+        </p:nvSpPr>
+        <p:spPr>
+          <a:xfrm>
+            <a:off x="6500478" y="3147060"/>
+            <a:ext cx="5032787" cy="1920239"/>
+          </a:xfrm>
+          <a:prstGeom prst="rect">
+            <a:avLst/>
+          </a:prstGeom>
+          <a:noFill/>
+        </p:spPr>
+        <p:txBody>
+          <a:bodyPr wrap="square" lIns="76200" rIns="76200" tIns="0" bIns="0">
+            <a:spAutoFit/>
+          </a:bodyPr>
+          <a:lstStyle/>
+          <a:p>
+            <a:pPr>
+              <a:lnSpc>
+                <a:spcPct val="100000"/>
+              </a:lnSpc>
+              <a:spcAft>
+                <a:spcPts val="200"/>
+              </a:spcAft>
+              <a:defRPr sz="4800" b="1">
+                <a:solidFill>
+                  <a:srgbClr val="0077FF"/>
+                </a:solidFill>
+                <a:latin typeface="Play"/>
+                <a:ea typeface="Play"/>
+                <a:cs typeface="Play"/>
+              </a:defRPr>
+            </a:pPr>
+            <a:r>
+              <a:rPr sz="4800" b="1">
+                <a:solidFill>
+                  <a:srgbClr val="0077FF"/>
+                </a:solidFill>
+                <a:latin typeface="Play"/>
+                <a:ea typeface="Play"/>
+                <a:cs typeface="Play"/>
+              </a:rPr>
+              <a:t>6 нед.</a:t>
+            </a:r>
+          </a:p>
+          <a:p>
+            <a:pPr>
+              <a:spcAft>
+                <a:spcPts val="300"/>
+              </a:spcAft>
+              <a:defRPr sz="3200" b="0">
+                <a:solidFill>
+                  <a:srgbClr val="000000"/>
+                </a:solidFill>
+                <a:latin typeface="Play"/>
+                <a:ea typeface="Play"/>
+                <a:cs typeface="Play"/>
+              </a:defRPr>
+            </a:pPr>
+            <a:r>
+              <a:rPr sz="3200" b="0">
+                <a:solidFill>
+                  <a:srgbClr val="000000"/>
+                </a:solidFill>
+                <a:latin typeface="Play"/>
+                <a:ea typeface="Play"/>
+                <a:cs typeface="Play"/>
+              </a:rPr>
+              <a:t>Инференс за 6 недель пилота 1 400 руб</a:t>
+            </a:r>
+          </a:p>
+        </p:txBody>
+      </p:sp>
+    </p:spTree>
+  </p:cSld>
+  <p:clrMapOvr>
+    <a:masterClrMapping/>
+  </p:clrMapOvr>
+</p:sld>
+</file>
+
+<file path=ppt/slides/slide64.xml><?xml version="1.0" encoding="utf-8"?>
+<p:sld xmlns:a="http://schemas.openxmlformats.org/drawingml/2006/main" xmlns:p="http://schemas.openxmlformats.org/presentationml/2006/main" xmlns:r="http://schemas.openxmlformats.org/officeDocument/2006/relationships">
+  <p:cSld>
+    <p:spTree>
+      <p:nvGrpSpPr>
+        <p:cNvPr id="1" name=""/>
+        <p:cNvGrpSpPr/>
+        <p:nvPr/>
+      </p:nvGrpSpPr>
+      <p:grpSpPr/>
+      <p:sp>
+        <p:nvSpPr>
+          <p:cNvPr id="443" name="Google Shape;443;p50"/>
+          <p:cNvSpPr/>
+          <p:nvPr/>
+        </p:nvSpPr>
+        <p:spPr>
+          <a:xfrm>
+            <a:off x="658813" y="1794065"/>
+            <a:ext cx="6130294" cy="4406709"/>
+          </a:xfrm>
+          <a:prstGeom prst="roundRect">
+            <a:avLst>
+              <a:gd fmla="val 4444" name="adj"/>
+            </a:avLst>
+          </a:prstGeom>
+          <a:solidFill>
+            <a:schemeClr val="lt2"/>
+          </a:solidFill>
+          <a:ln cap="flat" cmpd="sng" w="19050">
+            <a:solidFill>
+              <a:schemeClr val="dk2"/>
+            </a:solidFill>
+            <a:prstDash val="solid"/>
+            <a:miter lim="8000"/>
+            <a:headEnd len="sm" w="sm" type="none"/>
+            <a:tailEnd len="sm" w="sm" type="none"/>
+          </a:ln>
+        </p:spPr>
+        <p:txBody>
+          <a:bodyPr anchorCtr="0" anchor="ctr" bIns="45700" lIns="91425" spcFirstLastPara="1" rIns="91425" wrap="square" tIns="45700">
+            <a:noAutofit/>
+          </a:bodyPr>
+          <a:lstStyle/>
+          <a:p>
+            <a:pPr indent="0" lvl="0" marL="0" marR="0" rtl="0" algn="ctr">
+              <a:spcBef>
+                <a:spcPts val="0"/>
+              </a:spcBef>
+              <a:spcAft>
+                <a:spcPts val="0"/>
+              </a:spcAft>
+              <a:buNone/>
+            </a:pPr>
+            <a:r>
+              <a:t/>
+            </a:r>
+            <a:endParaRPr b="0" i="0" sz="1800" u="none" cap="none" strike="noStrike">
+              <a:solidFill>
+                <a:schemeClr val="lt1"/>
+              </a:solidFill>
+              <a:latin typeface="Arial"/>
+              <a:ea typeface="Arial"/>
+              <a:cs typeface="Arial"/>
+              <a:sym typeface="Arial"/>
+            </a:endParaRPr>
+          </a:p>
+        </p:txBody>
+      </p:sp>
+      <p:sp>
+        <p:nvSpPr>
+          <p:cNvPr id="449" name="Google Shape;449;p50"/>
           <p:cNvSpPr txBox="1"/>
           <p:nvPr/>
         </p:nvSpPr>
@@ -9950,7 +13315,7 @@
             <a:r>
               <a:t/>
             </a:r>
-            <a:endParaRPr sz="1600">
+            <a:endParaRPr b="0" i="0" sz="1600" u="none" cap="none" strike="noStrike">
               <a:solidFill>
                 <a:schemeClr val="dk1"/>
               </a:solidFill>
@@ -9964,7 +13329,7 @@
       </p:sp>
       <p:sp>
         <p:nvSpPr>
-          <p:cNvPr id="783" name="title"/>
+          <p:cNvPr id="450" name="title"/>
           <p:cNvSpPr txBox="1"/>
           <p:nvPr/>
         </p:nvSpPr>
@@ -10006,21 +13371,107 @@
                 <a:ea typeface="Arial"/>
                 <a:cs typeface="Arial"/>
               </a:rPr>
-              <a:t>Риски</a:t>
+              <a:t>План развития</a:t>
             </a:r>
           </a:p>
         </p:txBody>
       </p:sp>
       <p:sp>
         <p:nvSpPr>
-          <p:cNvPr id="784" name="body"/>
+          <p:cNvPr id="451" name="Rectangle 450"/>
+          <p:cNvSpPr/>
+          <p:nvPr/>
+        </p:nvSpPr>
+        <p:spPr>
+          <a:xfrm>
+            <a:off x="6288206" y="3815229"/>
+            <a:ext cx="5245059" cy="132531"/>
+          </a:xfrm>
+          <a:prstGeom prst="rect">
+            <a:avLst/>
+          </a:prstGeom>
+          <a:solidFill>
+            <a:srgbClr val="0077FF"/>
+          </a:solidFill>
+          <a:ln>
+            <a:noFill/>
+          </a:ln>
+        </p:spPr>
+        <p:style>
+          <a:lnRef idx="1">
+            <a:schemeClr val="accent1"/>
+          </a:lnRef>
+          <a:fillRef idx="3">
+            <a:schemeClr val="accent1"/>
+          </a:fillRef>
+          <a:effectRef idx="2">
+            <a:schemeClr val="accent1"/>
+          </a:effectRef>
+          <a:fontRef idx="minor">
+            <a:schemeClr val="lt1"/>
+          </a:fontRef>
+        </p:style>
+        <p:txBody>
+          <a:bodyPr rtlCol="0" anchor="ctr"/>
+          <a:lstStyle/>
+          <a:p>
+            <a:pPr algn="ctr"/>
+          </a:p>
+        </p:txBody>
+      </p:sp>
+      <p:sp>
+        <p:nvSpPr>
+          <p:cNvPr id="452" name="Oval 451"/>
+          <p:cNvSpPr/>
+          <p:nvPr/>
+        </p:nvSpPr>
+        <p:spPr>
+          <a:xfrm>
+            <a:off x="6900129" y="3619242"/>
+            <a:ext cx="524505" cy="524505"/>
+          </a:xfrm>
+          <a:prstGeom prst="ellipse">
+            <a:avLst/>
+          </a:prstGeom>
+          <a:solidFill>
+            <a:srgbClr val="0077FF"/>
+          </a:solidFill>
+          <a:ln>
+            <a:noFill/>
+          </a:ln>
+        </p:spPr>
+        <p:style>
+          <a:lnRef idx="1">
+            <a:schemeClr val="accent1"/>
+          </a:lnRef>
+          <a:fillRef idx="3">
+            <a:schemeClr val="accent1"/>
+          </a:fillRef>
+          <a:effectRef idx="2">
+            <a:schemeClr val="accent1"/>
+          </a:effectRef>
+          <a:fontRef idx="minor">
+            <a:schemeClr val="lt1"/>
+          </a:fontRef>
+        </p:style>
+        <p:txBody>
+          <a:bodyPr rtlCol="0" anchor="ctr"/>
+          <a:lstStyle/>
+          <a:p>
+            <a:pPr algn="ctr"/>
+          </a:p>
+        </p:txBody>
+      </p:sp>
+      <p:sp>
+        <p:nvSpPr>
+          <p:cNvPr id="453" name="TextBox 452"/>
           <p:cNvSpPr txBox="1"/>
           <p:nvPr/>
         </p:nvSpPr>
         <p:spPr>
           <a:xfrm>
-            <a:off x="677387" y="3080711"/>
-            <a:ext cx="10855878" cy="1488440"/>
+            <a:off x="6288206" y="1783080"/>
+            <a:ext cx="2622529" cy="1678732"/>
           </a:xfrm>
           <a:prstGeom prst="rect">
             <a:avLst/>
@@ -10028,16 +13479,13 @@
           <a:noFill/>
         </p:spPr>
         <p:txBody>
-          <a:bodyPr wrap="square" lIns="76200" rIns="76200" tIns="50800" bIns="50800">
+          <a:bodyPr wrap="square" lIns="12700" rIns="12700" tIns="12700" bIns="12700">
             <a:spAutoFit/>
           </a:bodyPr>
           <a:lstStyle/>
           <a:p>
-            <a:pPr algn="l">
-              <a:spcAft>
-                <a:spcPts val="300"/>
-              </a:spcAft>
-              <a:defRPr sz="2800">
+            <a:pPr algn="ctr">
+              <a:defRPr sz="1400" b="0">
                 <a:solidFill>
                   <a:srgbClr val="000000"/>
                 </a:solidFill>
@@ -10047,7 +13495,7 @@
               </a:defRPr>
             </a:pPr>
             <a:r>
-              <a:rPr sz="2800">
+              <a:rPr sz="1400" b="0">
                 <a:solidFill>
                   <a:srgbClr val="000000"/>
                 </a:solidFill>
@@ -10055,15 +13503,78 @@
                 <a:ea typeface="Play"/>
                 <a:cs typeface="Play"/>
               </a:rPr>
-              <a:t>• Модель может выдумать цифры, аудит проверяет</a:t>
+              <a:t>Третий квартал 2026</a:t>
             </a:r>
           </a:p>
+        </p:txBody>
+      </p:sp>
+      <p:sp>
+        <p:nvSpPr>
+          <p:cNvPr id="454" name="Oval 453"/>
+          <p:cNvSpPr/>
+          <p:nvPr/>
+        </p:nvSpPr>
+        <p:spPr>
+          <a:xfrm>
+            <a:off x="8648482" y="3619242"/>
+            <a:ext cx="524505" cy="524505"/>
+          </a:xfrm>
+          <a:prstGeom prst="ellipse">
+            <a:avLst/>
+          </a:prstGeom>
+          <a:solidFill>
+            <a:srgbClr val="0077FF"/>
+          </a:solidFill>
+          <a:ln>
+            <a:noFill/>
+          </a:ln>
+        </p:spPr>
+        <p:style>
+          <a:lnRef idx="1">
+            <a:schemeClr val="accent1"/>
+          </a:lnRef>
+          <a:fillRef idx="3">
+            <a:schemeClr val="accent1"/>
+          </a:fillRef>
+          <a:effectRef idx="2">
+            <a:schemeClr val="accent1"/>
+          </a:effectRef>
+          <a:fontRef idx="minor">
+            <a:schemeClr val="lt1"/>
+          </a:fontRef>
+        </p:style>
+        <p:txBody>
+          <a:bodyPr rtlCol="0" anchor="ctr"/>
+          <a:lstStyle/>
           <a:p>
-            <a:pPr algn="l">
-              <a:spcAft>
-                <a:spcPts val="300"/>
-              </a:spcAft>
-              <a:defRPr sz="2800">
+            <a:pPr algn="ctr"/>
+          </a:p>
+        </p:txBody>
+      </p:sp>
+      <p:sp>
+        <p:nvSpPr>
+          <p:cNvPr id="455" name="TextBox 454"/>
+          <p:cNvSpPr txBox="1"/>
+          <p:nvPr/>
+        </p:nvSpPr>
+        <p:spPr>
+          <a:xfrm>
+            <a:off x="7599470" y="4339735"/>
+            <a:ext cx="2622529" cy="1678732"/>
+          </a:xfrm>
+          <a:prstGeom prst="rect">
+            <a:avLst/>
+          </a:prstGeom>
+          <a:noFill/>
+        </p:spPr>
+        <p:txBody>
+          <a:bodyPr wrap="square" lIns="12700" rIns="12700" tIns="12700" bIns="12700">
+            <a:spAutoFit/>
+          </a:bodyPr>
+          <a:lstStyle/>
+          <a:p>
+            <a:pPr algn="ctr">
+              <a:defRPr sz="1400" b="0">
                 <a:solidFill>
                   <a:srgbClr val="000000"/>
                 </a:solidFill>
@@ -10073,7 +13584,7 @@
               </a:defRPr>
             </a:pPr>
             <a:r>
-              <a:rPr sz="2800">
+              <a:rPr sz="1400" b="0">
                 <a:solidFill>
                   <a:srgbClr val="000000"/>
                 </a:solidFill>
@@ -10081,15 +13592,78 @@
                 <a:ea typeface="Play"/>
                 <a:cs typeface="Play"/>
               </a:rPr>
-              <a:t>• Неизвестный шаблон может быть плохо сделан</a:t>
+              <a:t>Четвёртый квартал 2026</a:t>
             </a:r>
           </a:p>
+        </p:txBody>
+      </p:sp>
+      <p:sp>
+        <p:nvSpPr>
+          <p:cNvPr id="456" name="Oval 455"/>
+          <p:cNvSpPr/>
+          <p:nvPr/>
+        </p:nvSpPr>
+        <p:spPr>
+          <a:xfrm>
+            <a:off x="10396835" y="3619242"/>
+            <a:ext cx="524505" cy="524505"/>
+          </a:xfrm>
+          <a:prstGeom prst="ellipse">
+            <a:avLst/>
+          </a:prstGeom>
+          <a:solidFill>
+            <a:srgbClr val="0077FF"/>
+          </a:solidFill>
+          <a:ln>
+            <a:noFill/>
+          </a:ln>
+        </p:spPr>
+        <p:style>
+          <a:lnRef idx="1">
+            <a:schemeClr val="accent1"/>
+          </a:lnRef>
+          <a:fillRef idx="3">
+            <a:schemeClr val="accent1"/>
+          </a:fillRef>
+          <a:effectRef idx="2">
+            <a:schemeClr val="accent1"/>
+          </a:effectRef>
+          <a:fontRef idx="minor">
+            <a:schemeClr val="lt1"/>
+          </a:fontRef>
+        </p:style>
+        <p:txBody>
+          <a:bodyPr rtlCol="0" anchor="ctr"/>
+          <a:lstStyle/>
           <a:p>
-            <a:pPr algn="l">
-              <a:spcAft>
-                <a:spcPts val="300"/>
-              </a:spcAft>
-              <a:defRPr sz="2800">
+            <a:pPr algn="ctr"/>
+          </a:p>
+        </p:txBody>
+      </p:sp>
+      <p:sp>
+        <p:nvSpPr>
+          <p:cNvPr id="457" name="TextBox 456"/>
+          <p:cNvSpPr txBox="1"/>
+          <p:nvPr/>
+        </p:nvSpPr>
+        <p:spPr>
+          <a:xfrm>
+            <a:off x="8910735" y="1783080"/>
+            <a:ext cx="2622529" cy="1678732"/>
+          </a:xfrm>
+          <a:prstGeom prst="rect">
+            <a:avLst/>
+          </a:prstGeom>
+          <a:noFill/>
+        </p:spPr>
+        <p:txBody>
+          <a:bodyPr wrap="square" lIns="12700" rIns="12700" tIns="12700" bIns="12700">
+            <a:spAutoFit/>
+          </a:bodyPr>
+          <a:lstStyle/>
+          <a:p>
+            <a:pPr algn="ctr">
+              <a:defRPr sz="1400" b="0">
                 <a:solidFill>
                   <a:srgbClr val="000000"/>
                 </a:solidFill>
@@ -10099,7 +13673,7 @@
               </a:defRPr>
             </a:pPr>
             <a:r>
-              <a:rPr sz="2800">
+              <a:rPr sz="1400" b="0">
                 <a:solidFill>
                   <a:srgbClr val="000000"/>
                 </a:solidFill>
@@ -10107,7 +13681,7 @@
                 <a:ea typeface="Play"/>
                 <a:cs typeface="Play"/>
               </a:rPr>
-              <a:t>• Нагрузка выше 20 задач требует внешней очереди</a:t>
+              <a:t>Первый квартал 2027</a:t>
             </a:r>
           </a:p>
         </p:txBody>
@@ -10120,16 +13694,9 @@
 </p:sld>
 </file>
 
-<file path=ppt/slides/slide64.xml><?xml version="1.0" encoding="utf-8"?>
+<file path=ppt/slides/slide65.xml><?xml version="1.0" encoding="utf-8"?>
 <p:sld xmlns:a="http://schemas.openxmlformats.org/drawingml/2006/main" xmlns:p="http://schemas.openxmlformats.org/presentationml/2006/main" xmlns:r="http://schemas.openxmlformats.org/officeDocument/2006/relationships">
   <p:cSld>
-    <p:bg>
-      <p:bgPr>
-        <a:solidFill>
-          <a:schemeClr val="lt2"/>
-        </a:solidFill>
-      </p:bgPr>
-    </p:bg>
     <p:spTree>
       <p:nvGrpSpPr>
         <p:cNvPr id="1" name=""/>
@@ -10181,21 +13748,21 @@
                 <a:ea typeface="Arial"/>
                 <a:cs typeface="Arial"/>
               </a:rPr>
-              <a:t>Преимущества</a:t>
+              <a:t>Преимущества для компании</a:t>
             </a:r>
           </a:p>
         </p:txBody>
       </p:sp>
       <p:sp>
         <p:nvSpPr>
-          <p:cNvPr id="3" name="body_left"/>
+          <p:cNvPr id="3" name="body"/>
           <p:cNvSpPr txBox="1"/>
           <p:nvPr/>
         </p:nvSpPr>
         <p:spPr>
           <a:xfrm>
-            <a:off x="677387" y="2686882"/>
-            <a:ext cx="5245059" cy="1686560"/>
+            <a:off x="677387" y="2554298"/>
+            <a:ext cx="5874466" cy="2875280"/>
           </a:xfrm>
           <a:prstGeom prst="rect">
             <a:avLst/>
@@ -10230,7 +13797,7 @@
                 <a:ea typeface="Play"/>
                 <a:cs typeface="Play"/>
               </a:rPr>
-              <a:t>• Сокращение времени сборки до 4 минут</a:t>
+              <a:t>• Ускорение создания презентаций до 4 мин</a:t>
             </a:r>
           </a:p>
           <a:p>
@@ -10256,21 +13823,698 @@
                 <a:ea typeface="Play"/>
                 <a:cs typeface="Play"/>
               </a:rPr>
-              <a:t>• Уменьшение нарушений фирменного стиля до 2 из 68</a:t>
+              <a:t>• Снижение ошибок стиля до 2 из 68 колод</a:t>
+            </a:r>
+          </a:p>
+          <a:p>
+            <a:pPr algn="l">
+              <a:spcAft>
+                <a:spcPts val="300"/>
+              </a:spcAft>
+              <a:defRPr sz="2400">
+                <a:solidFill>
+                  <a:srgbClr val="000000"/>
+                </a:solidFill>
+                <a:latin typeface="Play"/>
+                <a:ea typeface="Play"/>
+                <a:cs typeface="Play"/>
+              </a:defRPr>
+            </a:pPr>
+            <a:r>
+              <a:rPr sz="2400">
+                <a:solidFill>
+                  <a:srgbClr val="000000"/>
+                </a:solidFill>
+                <a:latin typeface="Play"/>
+                <a:ea typeface="Play"/>
+                <a:cs typeface="Play"/>
+              </a:rPr>
+              <a:t>• Экономия времени дизайнеров</a:t>
+            </a:r>
+          </a:p>
+          <a:p>
+            <a:pPr algn="l">
+              <a:spcAft>
+                <a:spcPts val="300"/>
+              </a:spcAft>
+              <a:defRPr sz="2400">
+                <a:solidFill>
+                  <a:srgbClr val="000000"/>
+                </a:solidFill>
+                <a:latin typeface="Play"/>
+                <a:ea typeface="Play"/>
+                <a:cs typeface="Play"/>
+              </a:defRPr>
+            </a:pPr>
+            <a:r>
+              <a:rPr sz="2400">
+                <a:solidFill>
+                  <a:srgbClr val="000000"/>
+                </a:solidFill>
+                <a:latin typeface="Play"/>
+                <a:ea typeface="Play"/>
+                <a:cs typeface="Play"/>
+              </a:rPr>
+              <a:t>• Масштабируемость без дополнительных сотрудников</a:t>
             </a:r>
           </a:p>
         </p:txBody>
       </p:sp>
+      <p:grpSp>
+        <p:nvGrpSpPr>
+          <p:cNvPr id="4" name="illustration:builtin-presentation"/>
+          <p:cNvGrpSpPr/>
+          <p:nvPr/>
+        </p:nvGrpSpPr>
+        <p:grpSpPr>
+          <a:xfrm>
+            <a:off x="7771509" y="2538008"/>
+            <a:ext cx="2907860" cy="2907860"/>
+            <a:chOff x="7771509" y="2538008"/>
+            <a:chExt cx="2907860" cy="2907860"/>
+          </a:xfrm>
+        </p:grpSpPr>
+        <p:sp>
+          <p:nvSpPr>
+            <p:cNvPr id="5" name="Oval 4"/>
+            <p:cNvSpPr/>
+            <p:nvPr/>
+          </p:nvSpPr>
+          <p:spPr>
+            <a:xfrm>
+              <a:off x="7771509" y="2538008"/>
+              <a:ext cx="2907860" cy="2907860"/>
+            </a:xfrm>
+            <a:prstGeom prst="ellipse">
+              <a:avLst/>
+            </a:prstGeom>
+            <a:solidFill>
+              <a:srgbClr val="D6E9FF"/>
+            </a:solidFill>
+            <a:ln>
+              <a:noFill/>
+            </a:ln>
+            <a:effectLst/>
+          </p:spPr>
+          <p:style>
+            <a:lnRef idx="1">
+              <a:schemeClr val="accent1"/>
+            </a:lnRef>
+            <a:fillRef idx="3">
+              <a:schemeClr val="accent1"/>
+            </a:fillRef>
+            <a:effectRef idx="2">
+              <a:schemeClr val="accent1"/>
+            </a:effectRef>
+            <a:fontRef idx="minor">
+              <a:schemeClr val="lt1"/>
+            </a:fontRef>
+          </p:style>
+          <p:txBody>
+            <a:bodyPr rtlCol="0" anchor="ctr"/>
+            <a:lstStyle/>
+            <a:p>
+              <a:pPr algn="ctr"/>
+            </a:p>
+          </p:txBody>
+        </p:sp>
+        <p:sp>
+          <p:nvSpPr>
+            <p:cNvPr id="6" name="Rounded Rectangle 5"/>
+            <p:cNvSpPr/>
+            <p:nvPr/>
+          </p:nvSpPr>
+          <p:spPr>
+            <a:xfrm>
+              <a:off x="7886900" y="2930338"/>
+              <a:ext cx="2677078" cy="1730869"/>
+            </a:xfrm>
+            <a:prstGeom prst="roundRect">
+              <a:avLst>
+                <a:gd name="adj" fmla="val 9333"/>
+              </a:avLst>
+            </a:prstGeom>
+            <a:solidFill>
+              <a:srgbClr val="FFFFFF"/>
+            </a:solidFill>
+            <a:ln>
+              <a:noFill/>
+            </a:ln>
+            <a:effectLst/>
+          </p:spPr>
+          <p:style>
+            <a:lnRef idx="1">
+              <a:schemeClr val="accent1"/>
+            </a:lnRef>
+            <a:fillRef idx="3">
+              <a:schemeClr val="accent1"/>
+            </a:fillRef>
+            <a:effectRef idx="2">
+              <a:schemeClr val="accent1"/>
+            </a:effectRef>
+            <a:fontRef idx="minor">
+              <a:schemeClr val="lt1"/>
+            </a:fontRef>
+          </p:style>
+          <p:txBody>
+            <a:bodyPr rtlCol="0" anchor="ctr"/>
+            <a:lstStyle/>
+            <a:p>
+              <a:pPr algn="ctr"/>
+            </a:p>
+          </p:txBody>
+        </p:sp>
+        <p:sp>
+          <p:nvSpPr>
+            <p:cNvPr id="7" name="Rounded Rectangle 6"/>
+            <p:cNvSpPr/>
+            <p:nvPr/>
+          </p:nvSpPr>
+          <p:spPr>
+            <a:xfrm>
+              <a:off x="7886900" y="2930338"/>
+              <a:ext cx="2677078" cy="346173"/>
+            </a:xfrm>
+            <a:prstGeom prst="roundRect">
+              <a:avLst>
+                <a:gd name="adj" fmla="val 46666"/>
+              </a:avLst>
+            </a:prstGeom>
+            <a:solidFill>
+              <a:srgbClr val="0077FF"/>
+            </a:solidFill>
+            <a:ln>
+              <a:noFill/>
+            </a:ln>
+            <a:effectLst/>
+          </p:spPr>
+          <p:style>
+            <a:lnRef idx="1">
+              <a:schemeClr val="accent1"/>
+            </a:lnRef>
+            <a:fillRef idx="3">
+              <a:schemeClr val="accent1"/>
+            </a:fillRef>
+            <a:effectRef idx="2">
+              <a:schemeClr val="accent1"/>
+            </a:effectRef>
+            <a:fontRef idx="minor">
+              <a:schemeClr val="lt1"/>
+            </a:fontRef>
+          </p:style>
+          <p:txBody>
+            <a:bodyPr rtlCol="0" anchor="ctr"/>
+            <a:lstStyle/>
+            <a:p>
+              <a:pPr algn="ctr"/>
+            </a:p>
+          </p:txBody>
+        </p:sp>
+        <p:sp>
+          <p:nvSpPr>
+            <p:cNvPr id="8" name="Rectangle 7"/>
+            <p:cNvSpPr/>
+            <p:nvPr/>
+          </p:nvSpPr>
+          <p:spPr>
+            <a:xfrm>
+              <a:off x="7886900" y="3114964"/>
+              <a:ext cx="2677078" cy="161547"/>
+            </a:xfrm>
+            <a:prstGeom prst="rect">
+              <a:avLst/>
+            </a:prstGeom>
+            <a:solidFill>
+              <a:srgbClr val="0077FF"/>
+            </a:solidFill>
+            <a:ln>
+              <a:noFill/>
+            </a:ln>
+            <a:effectLst/>
+          </p:spPr>
+          <p:style>
+            <a:lnRef idx="1">
+              <a:schemeClr val="accent1"/>
+            </a:lnRef>
+            <a:fillRef idx="3">
+              <a:schemeClr val="accent1"/>
+            </a:fillRef>
+            <a:effectRef idx="2">
+              <a:schemeClr val="accent1"/>
+            </a:effectRef>
+            <a:fontRef idx="minor">
+              <a:schemeClr val="lt1"/>
+            </a:fontRef>
+          </p:style>
+          <p:txBody>
+            <a:bodyPr rtlCol="0" anchor="ctr"/>
+            <a:lstStyle/>
+            <a:p>
+              <a:pPr algn="ctr"/>
+            </a:p>
+          </p:txBody>
+        </p:sp>
+        <p:sp>
+          <p:nvSpPr>
+            <p:cNvPr id="9" name="Rounded Rectangle 8"/>
+            <p:cNvSpPr/>
+            <p:nvPr/>
+          </p:nvSpPr>
+          <p:spPr>
+            <a:xfrm>
+              <a:off x="8163840" y="3507295"/>
+              <a:ext cx="969286" cy="115391"/>
+            </a:xfrm>
+            <a:prstGeom prst="roundRect">
+              <a:avLst>
+                <a:gd name="adj" fmla="val 50000"/>
+              </a:avLst>
+            </a:prstGeom>
+            <a:solidFill>
+              <a:srgbClr val="000000"/>
+            </a:solidFill>
+            <a:ln>
+              <a:noFill/>
+            </a:ln>
+            <a:effectLst/>
+          </p:spPr>
+          <p:style>
+            <a:lnRef idx="1">
+              <a:schemeClr val="accent1"/>
+            </a:lnRef>
+            <a:fillRef idx="3">
+              <a:schemeClr val="accent1"/>
+            </a:fillRef>
+            <a:effectRef idx="2">
+              <a:schemeClr val="accent1"/>
+            </a:effectRef>
+            <a:fontRef idx="minor">
+              <a:schemeClr val="lt1"/>
+            </a:fontRef>
+          </p:style>
+          <p:txBody>
+            <a:bodyPr rtlCol="0" anchor="ctr"/>
+            <a:lstStyle/>
+            <a:p>
+              <a:pPr algn="ctr"/>
+            </a:p>
+          </p:txBody>
+        </p:sp>
+        <p:sp>
+          <p:nvSpPr>
+            <p:cNvPr id="10" name="Rounded Rectangle 9"/>
+            <p:cNvSpPr/>
+            <p:nvPr/>
+          </p:nvSpPr>
+          <p:spPr>
+            <a:xfrm>
+              <a:off x="8163840" y="3738077"/>
+              <a:ext cx="738504" cy="92313"/>
+            </a:xfrm>
+            <a:prstGeom prst="roundRect">
+              <a:avLst>
+                <a:gd name="adj" fmla="val 50000"/>
+              </a:avLst>
+            </a:prstGeom>
+            <a:solidFill>
+              <a:srgbClr val="B2B2B2"/>
+            </a:solidFill>
+            <a:ln>
+              <a:noFill/>
+            </a:ln>
+            <a:effectLst/>
+          </p:spPr>
+          <p:style>
+            <a:lnRef idx="1">
+              <a:schemeClr val="accent1"/>
+            </a:lnRef>
+            <a:fillRef idx="3">
+              <a:schemeClr val="accent1"/>
+            </a:fillRef>
+            <a:effectRef idx="2">
+              <a:schemeClr val="accent1"/>
+            </a:effectRef>
+            <a:fontRef idx="minor">
+              <a:schemeClr val="lt1"/>
+            </a:fontRef>
+          </p:style>
+          <p:txBody>
+            <a:bodyPr rtlCol="0" anchor="ctr"/>
+            <a:lstStyle/>
+            <a:p>
+              <a:pPr algn="ctr"/>
+            </a:p>
+          </p:txBody>
+        </p:sp>
+        <p:sp>
+          <p:nvSpPr>
+            <p:cNvPr id="11" name="Rounded Rectangle 10"/>
+            <p:cNvSpPr/>
+            <p:nvPr/>
+          </p:nvSpPr>
+          <p:spPr>
+            <a:xfrm>
+              <a:off x="8163840" y="3922703"/>
+              <a:ext cx="853895" cy="92313"/>
+            </a:xfrm>
+            <a:prstGeom prst="roundRect">
+              <a:avLst>
+                <a:gd name="adj" fmla="val 50000"/>
+              </a:avLst>
+            </a:prstGeom>
+            <a:solidFill>
+              <a:srgbClr val="B2B2B2"/>
+            </a:solidFill>
+            <a:ln>
+              <a:noFill/>
+            </a:ln>
+            <a:effectLst/>
+          </p:spPr>
+          <p:style>
+            <a:lnRef idx="1">
+              <a:schemeClr val="accent1"/>
+            </a:lnRef>
+            <a:fillRef idx="3">
+              <a:schemeClr val="accent1"/>
+            </a:fillRef>
+            <a:effectRef idx="2">
+              <a:schemeClr val="accent1"/>
+            </a:effectRef>
+            <a:fontRef idx="minor">
+              <a:schemeClr val="lt1"/>
+            </a:fontRef>
+          </p:style>
+          <p:txBody>
+            <a:bodyPr rtlCol="0" anchor="ctr"/>
+            <a:lstStyle/>
+            <a:p>
+              <a:pPr algn="ctr"/>
+            </a:p>
+          </p:txBody>
+        </p:sp>
+        <p:sp>
+          <p:nvSpPr>
+            <p:cNvPr id="12" name="Rounded Rectangle 11"/>
+            <p:cNvSpPr/>
+            <p:nvPr/>
+          </p:nvSpPr>
+          <p:spPr>
+            <a:xfrm>
+              <a:off x="8163840" y="4107329"/>
+              <a:ext cx="646191" cy="92313"/>
+            </a:xfrm>
+            <a:prstGeom prst="roundRect">
+              <a:avLst>
+                <a:gd name="adj" fmla="val 50000"/>
+              </a:avLst>
+            </a:prstGeom>
+            <a:solidFill>
+              <a:srgbClr val="B2B2B2"/>
+            </a:solidFill>
+            <a:ln>
+              <a:noFill/>
+            </a:ln>
+            <a:effectLst/>
+          </p:spPr>
+          <p:style>
+            <a:lnRef idx="1">
+              <a:schemeClr val="accent1"/>
+            </a:lnRef>
+            <a:fillRef idx="3">
+              <a:schemeClr val="accent1"/>
+            </a:fillRef>
+            <a:effectRef idx="2">
+              <a:schemeClr val="accent1"/>
+            </a:effectRef>
+            <a:fontRef idx="minor">
+              <a:schemeClr val="lt1"/>
+            </a:fontRef>
+          </p:style>
+          <p:txBody>
+            <a:bodyPr rtlCol="0" anchor="ctr"/>
+            <a:lstStyle/>
+            <a:p>
+              <a:pPr algn="ctr"/>
+            </a:p>
+          </p:txBody>
+        </p:sp>
+        <p:sp>
+          <p:nvSpPr>
+            <p:cNvPr id="13" name="Rounded Rectangle 12"/>
+            <p:cNvSpPr/>
+            <p:nvPr/>
+          </p:nvSpPr>
+          <p:spPr>
+            <a:xfrm>
+              <a:off x="9386987" y="3991938"/>
+              <a:ext cx="207704" cy="438486"/>
+            </a:xfrm>
+            <a:prstGeom prst="roundRect">
+              <a:avLst>
+                <a:gd name="adj" fmla="val 22222"/>
+              </a:avLst>
+            </a:prstGeom>
+            <a:solidFill>
+              <a:srgbClr val="B2B2B2"/>
+            </a:solidFill>
+            <a:ln>
+              <a:noFill/>
+            </a:ln>
+            <a:effectLst/>
+          </p:spPr>
+          <p:style>
+            <a:lnRef idx="1">
+              <a:schemeClr val="accent1"/>
+            </a:lnRef>
+            <a:fillRef idx="3">
+              <a:schemeClr val="accent1"/>
+            </a:fillRef>
+            <a:effectRef idx="2">
+              <a:schemeClr val="accent1"/>
+            </a:effectRef>
+            <a:fontRef idx="minor">
+              <a:schemeClr val="lt1"/>
+            </a:fontRef>
+          </p:style>
+          <p:txBody>
+            <a:bodyPr rtlCol="0" anchor="ctr"/>
+            <a:lstStyle/>
+            <a:p>
+              <a:pPr algn="ctr"/>
+            </a:p>
+          </p:txBody>
+        </p:sp>
+        <p:sp>
+          <p:nvSpPr>
+            <p:cNvPr id="14" name="Rounded Rectangle 13"/>
+            <p:cNvSpPr/>
+            <p:nvPr/>
+          </p:nvSpPr>
+          <p:spPr>
+            <a:xfrm>
+              <a:off x="9687005" y="3761155"/>
+              <a:ext cx="207704" cy="669269"/>
+            </a:xfrm>
+            <a:prstGeom prst="roundRect">
+              <a:avLst>
+                <a:gd name="adj" fmla="val 22222"/>
+              </a:avLst>
+            </a:prstGeom>
+            <a:solidFill>
+              <a:srgbClr val="FF3885"/>
+            </a:solidFill>
+            <a:ln>
+              <a:noFill/>
+            </a:ln>
+            <a:effectLst/>
+          </p:spPr>
+          <p:style>
+            <a:lnRef idx="1">
+              <a:schemeClr val="accent1"/>
+            </a:lnRef>
+            <a:fillRef idx="3">
+              <a:schemeClr val="accent1"/>
+            </a:fillRef>
+            <a:effectRef idx="2">
+              <a:schemeClr val="accent1"/>
+            </a:effectRef>
+            <a:fontRef idx="minor">
+              <a:schemeClr val="lt1"/>
+            </a:fontRef>
+          </p:style>
+          <p:txBody>
+            <a:bodyPr rtlCol="0" anchor="ctr"/>
+            <a:lstStyle/>
+            <a:p>
+              <a:pPr algn="ctr"/>
+            </a:p>
+          </p:txBody>
+        </p:sp>
+        <p:sp>
+          <p:nvSpPr>
+            <p:cNvPr id="15" name="Rounded Rectangle 14"/>
+            <p:cNvSpPr/>
+            <p:nvPr/>
+          </p:nvSpPr>
+          <p:spPr>
+            <a:xfrm>
+              <a:off x="9987022" y="3530373"/>
+              <a:ext cx="207704" cy="900052"/>
+            </a:xfrm>
+            <a:prstGeom prst="roundRect">
+              <a:avLst>
+                <a:gd name="adj" fmla="val 22222"/>
+              </a:avLst>
+            </a:prstGeom>
+            <a:solidFill>
+              <a:srgbClr val="0077FF"/>
+            </a:solidFill>
+            <a:ln>
+              <a:noFill/>
+            </a:ln>
+            <a:effectLst/>
+          </p:spPr>
+          <p:style>
+            <a:lnRef idx="1">
+              <a:schemeClr val="accent1"/>
+            </a:lnRef>
+            <a:fillRef idx="3">
+              <a:schemeClr val="accent1"/>
+            </a:fillRef>
+            <a:effectRef idx="2">
+              <a:schemeClr val="accent1"/>
+            </a:effectRef>
+            <a:fontRef idx="minor">
+              <a:schemeClr val="lt1"/>
+            </a:fontRef>
+          </p:style>
+          <p:txBody>
+            <a:bodyPr rtlCol="0" anchor="ctr"/>
+            <a:lstStyle/>
+            <a:p>
+              <a:pPr algn="ctr"/>
+            </a:p>
+          </p:txBody>
+        </p:sp>
+        <p:sp>
+          <p:nvSpPr>
+            <p:cNvPr id="16" name="Rectangle 15"/>
+            <p:cNvSpPr/>
+            <p:nvPr/>
+          </p:nvSpPr>
+          <p:spPr>
+            <a:xfrm>
+              <a:off x="9156205" y="4661208"/>
+              <a:ext cx="138469" cy="415408"/>
+            </a:xfrm>
+            <a:prstGeom prst="rect">
+              <a:avLst/>
+            </a:prstGeom>
+            <a:solidFill>
+              <a:srgbClr val="000000"/>
+            </a:solidFill>
+            <a:ln>
+              <a:noFill/>
+            </a:ln>
+            <a:effectLst/>
+          </p:spPr>
+          <p:style>
+            <a:lnRef idx="1">
+              <a:schemeClr val="accent1"/>
+            </a:lnRef>
+            <a:fillRef idx="3">
+              <a:schemeClr val="accent1"/>
+            </a:fillRef>
+            <a:effectRef idx="2">
+              <a:schemeClr val="accent1"/>
+            </a:effectRef>
+            <a:fontRef idx="minor">
+              <a:schemeClr val="lt1"/>
+            </a:fontRef>
+          </p:style>
+          <p:txBody>
+            <a:bodyPr rtlCol="0" anchor="ctr"/>
+            <a:lstStyle/>
+            <a:p>
+              <a:pPr algn="ctr"/>
+            </a:p>
+          </p:txBody>
+        </p:sp>
+        <p:sp>
+          <p:nvSpPr>
+            <p:cNvPr id="17" name="Rounded Rectangle 16"/>
+            <p:cNvSpPr/>
+            <p:nvPr/>
+          </p:nvSpPr>
+          <p:spPr>
+            <a:xfrm>
+              <a:off x="8648483" y="5030460"/>
+              <a:ext cx="1153913" cy="138469"/>
+            </a:xfrm>
+            <a:prstGeom prst="roundRect">
+              <a:avLst>
+                <a:gd name="adj" fmla="val 50000"/>
+              </a:avLst>
+            </a:prstGeom>
+            <a:solidFill>
+              <a:srgbClr val="000000"/>
+            </a:solidFill>
+            <a:ln>
+              <a:noFill/>
+            </a:ln>
+            <a:effectLst/>
+          </p:spPr>
+          <p:style>
+            <a:lnRef idx="1">
+              <a:schemeClr val="accent1"/>
+            </a:lnRef>
+            <a:fillRef idx="3">
+              <a:schemeClr val="accent1"/>
+            </a:fillRef>
+            <a:effectRef idx="2">
+              <a:schemeClr val="accent1"/>
+            </a:effectRef>
+            <a:fontRef idx="minor">
+              <a:schemeClr val="lt1"/>
+            </a:fontRef>
+          </p:style>
+          <p:txBody>
+            <a:bodyPr rtlCol="0" anchor="ctr"/>
+            <a:lstStyle/>
+            <a:p>
+              <a:pPr algn="ctr"/>
+            </a:p>
+          </p:txBody>
+        </p:sp>
+      </p:grpSp>
+    </p:spTree>
+  </p:cSld>
+  <p:clrMapOvr>
+    <a:masterClrMapping/>
+  </p:clrMapOvr>
+</p:sld>
+</file>
+
+<file path=ppt/slides/slide66.xml><?xml version="1.0" encoding="utf-8"?>
+<p:sld xmlns:a="http://schemas.openxmlformats.org/drawingml/2006/main" xmlns:p="http://schemas.openxmlformats.org/presentationml/2006/main" xmlns:r="http://schemas.openxmlformats.org/officeDocument/2006/relationships">
+  <p:cSld>
+    <p:spTree>
+      <p:nvGrpSpPr>
+        <p:cNvPr id="1" name=""/>
+        <p:cNvGrpSpPr/>
+        <p:nvPr/>
+      </p:nvGrpSpPr>
+      <p:grpSpPr/>
       <p:sp>
         <p:nvSpPr>
-          <p:cNvPr id="4" name="body_right"/>
+          <p:cNvPr id="2" name="title"/>
           <p:cNvSpPr txBox="1"/>
           <p:nvPr/>
         </p:nvSpPr>
         <p:spPr>
           <a:xfrm>
-            <a:off x="6288206" y="2686882"/>
-            <a:ext cx="5245059" cy="1686560"/>
+            <a:off x="677387" y="692177"/>
+            <a:ext cx="10855878" cy="822960"/>
           </a:xfrm>
           <a:prstGeom prst="rect">
             <a:avLst/>
@@ -10287,7 +14531,56 @@
               <a:spcAft>
                 <a:spcPts val="300"/>
               </a:spcAft>
-              <a:defRPr sz="2400">
+              <a:defRPr sz="4000">
+                <a:solidFill>
+                  <a:srgbClr val="000000"/>
+                </a:solidFill>
+                <a:latin typeface="Arial"/>
+                <a:ea typeface="Arial"/>
+                <a:cs typeface="Arial"/>
+              </a:defRPr>
+            </a:pPr>
+            <a:r>
+              <a:rPr sz="4000">
+                <a:solidFill>
+                  <a:srgbClr val="000000"/>
+                </a:solidFill>
+                <a:latin typeface="Arial"/>
+                <a:ea typeface="Arial"/>
+                <a:cs typeface="Arial"/>
+              </a:rPr>
+              <a:t>Что мы просим решить</a:t>
+            </a:r>
+          </a:p>
+        </p:txBody>
+      </p:sp>
+      <p:sp>
+        <p:nvSpPr>
+          <p:cNvPr id="3" name="body"/>
+          <p:cNvSpPr txBox="1"/>
+          <p:nvPr/>
+        </p:nvSpPr>
+        <p:spPr>
+          <a:xfrm>
+            <a:off x="677387" y="2356178"/>
+            <a:ext cx="5874466" cy="3271520"/>
+          </a:xfrm>
+          <a:prstGeom prst="rect">
+            <a:avLst/>
+          </a:prstGeom>
+          <a:noFill/>
+        </p:spPr>
+        <p:txBody>
+          <a:bodyPr wrap="square" lIns="76200" rIns="76200" tIns="50800" bIns="50800">
+            <a:spAutoFit/>
+          </a:bodyPr>
+          <a:lstStyle/>
+          <a:p>
+            <a:pPr algn="l">
+              <a:spcAft>
+                <a:spcPts val="300"/>
+              </a:spcAft>
+              <a:defRPr sz="3200">
                 <a:solidFill>
                   <a:srgbClr val="000000"/>
                 </a:solidFill>
@@ -10297,7 +14590,7 @@
               </a:defRPr>
             </a:pPr>
             <a:r>
-              <a:rPr sz="2400">
+              <a:rPr sz="3200">
                 <a:solidFill>
                   <a:srgbClr val="000000"/>
                 </a:solidFill>
@@ -10305,7 +14598,7 @@
                 <a:ea typeface="Play"/>
                 <a:cs typeface="Play"/>
               </a:rPr>
-              <a:t>• Экономия 1 400 рублей за 6 недель пилота</a:t>
+              <a:t>• Одобрить запуск сервиса на всю компанию</a:t>
             </a:r>
           </a:p>
           <a:p>
@@ -10313,7 +14606,7 @@
               <a:spcAft>
                 <a:spcPts val="300"/>
               </a:spcAft>
-              <a:defRPr sz="2400">
+              <a:defRPr sz="3200">
                 <a:solidFill>
                   <a:srgbClr val="000000"/>
                 </a:solidFill>
@@ -10323,7 +14616,7 @@
               </a:defRPr>
             </a:pPr>
             <a:r>
-              <a:rPr sz="2400">
+              <a:rPr sz="3200">
                 <a:solidFill>
                   <a:srgbClr val="000000"/>
                 </a:solidFill>
@@ -10331,11 +14624,749 @@
                 <a:ea typeface="Play"/>
                 <a:cs typeface="Play"/>
               </a:rPr>
-              <a:t>• Повышение производительности дизайнеров</a:t>
+              <a:t>• Выделить бюджет на инфраструктуру и интеграцию</a:t>
+            </a:r>
+          </a:p>
+          <a:p>
+            <a:pPr algn="l">
+              <a:spcAft>
+                <a:spcPts val="300"/>
+              </a:spcAft>
+              <a:defRPr sz="3200">
+                <a:solidFill>
+                  <a:srgbClr val="000000"/>
+                </a:solidFill>
+                <a:latin typeface="Play"/>
+                <a:ea typeface="Play"/>
+                <a:cs typeface="Play"/>
+              </a:defRPr>
+            </a:pPr>
+            <a:r>
+              <a:rPr sz="3200">
+                <a:solidFill>
+                  <a:srgbClr val="000000"/>
+                </a:solidFill>
+                <a:latin typeface="Play"/>
+                <a:ea typeface="Play"/>
+                <a:cs typeface="Play"/>
+              </a:rPr>
+              <a:t>• Назначить ответственных за внедрение</a:t>
             </a:r>
           </a:p>
         </p:txBody>
       </p:sp>
+      <p:grpSp>
+        <p:nvGrpSpPr>
+          <p:cNvPr id="4" name="illustration:builtin-launch"/>
+          <p:cNvGrpSpPr/>
+          <p:nvPr/>
+        </p:nvGrpSpPr>
+        <p:grpSpPr>
+          <a:xfrm>
+            <a:off x="7771509" y="2538008"/>
+            <a:ext cx="3023252" cy="2907860"/>
+            <a:chOff x="7771509" y="2538008"/>
+            <a:chExt cx="3023252" cy="2907860"/>
+          </a:xfrm>
+        </p:grpSpPr>
+        <p:sp>
+          <p:nvSpPr>
+            <p:cNvPr id="5" name="Oval 4"/>
+            <p:cNvSpPr/>
+            <p:nvPr/>
+          </p:nvSpPr>
+          <p:spPr>
+            <a:xfrm>
+              <a:off x="7771509" y="2538008"/>
+              <a:ext cx="2907860" cy="2907860"/>
+            </a:xfrm>
+            <a:prstGeom prst="ellipse">
+              <a:avLst/>
+            </a:prstGeom>
+            <a:solidFill>
+              <a:srgbClr val="D6E9FF"/>
+            </a:solidFill>
+            <a:ln>
+              <a:noFill/>
+            </a:ln>
+            <a:effectLst/>
+          </p:spPr>
+          <p:style>
+            <a:lnRef idx="1">
+              <a:schemeClr val="accent1"/>
+            </a:lnRef>
+            <a:fillRef idx="3">
+              <a:schemeClr val="accent1"/>
+            </a:fillRef>
+            <a:effectRef idx="2">
+              <a:schemeClr val="accent1"/>
+            </a:effectRef>
+            <a:fontRef idx="minor">
+              <a:schemeClr val="lt1"/>
+            </a:fontRef>
+          </p:style>
+          <p:txBody>
+            <a:bodyPr rtlCol="0" anchor="ctr"/>
+            <a:lstStyle/>
+            <a:p>
+              <a:pPr algn="ctr"/>
+            </a:p>
+          </p:txBody>
+        </p:sp>
+        <p:sp>
+          <p:nvSpPr>
+            <p:cNvPr id="6" name="Freeform 5"/>
+            <p:cNvSpPr/>
+            <p:nvPr/>
+          </p:nvSpPr>
+          <p:spPr>
+            <a:xfrm>
+              <a:off x="8650145" y="2676477"/>
+              <a:ext cx="1150589" cy="1592400"/>
+            </a:xfrm>
+            <a:custGeom>
+              <a:avLst/>
+              <a:gdLst/>
+              <a:ahLst/>
+              <a:cxnLst/>
+              <a:rect l="l" t="t" r="r" b="b"/>
+              <a:pathLst>
+                <a:path w="1150589" h="1592400">
+                  <a:moveTo>
+                    <a:pt x="575295" y="0"/>
+                  </a:moveTo>
+                  <a:lnTo>
+                    <a:pt x="711664" y="111260"/>
+                  </a:lnTo>
+                  <a:lnTo>
+                    <a:pt x="829894" y="236506"/>
+                  </a:lnTo>
+                  <a:lnTo>
+                    <a:pt x="929846" y="374491"/>
+                  </a:lnTo>
+                  <a:lnTo>
+                    <a:pt x="1011381" y="523969"/>
+                  </a:lnTo>
+                  <a:lnTo>
+                    <a:pt x="1074362" y="683694"/>
+                  </a:lnTo>
+                  <a:lnTo>
+                    <a:pt x="1118649" y="852419"/>
+                  </a:lnTo>
+                  <a:lnTo>
+                    <a:pt x="1144104" y="1028898"/>
+                  </a:lnTo>
+                  <a:lnTo>
+                    <a:pt x="1150589" y="1211886"/>
+                  </a:lnTo>
+                  <a:lnTo>
+                    <a:pt x="1137966" y="1400135"/>
+                  </a:lnTo>
+                  <a:lnTo>
+                    <a:pt x="1106094" y="1592400"/>
+                  </a:lnTo>
+                  <a:lnTo>
+                    <a:pt x="44495" y="1592400"/>
+                  </a:lnTo>
+                  <a:lnTo>
+                    <a:pt x="12623" y="1400135"/>
+                  </a:lnTo>
+                  <a:lnTo>
+                    <a:pt x="0" y="1211886"/>
+                  </a:lnTo>
+                  <a:lnTo>
+                    <a:pt x="6485" y="1028898"/>
+                  </a:lnTo>
+                  <a:lnTo>
+                    <a:pt x="31940" y="852419"/>
+                  </a:lnTo>
+                  <a:lnTo>
+                    <a:pt x="76227" y="683694"/>
+                  </a:lnTo>
+                  <a:lnTo>
+                    <a:pt x="139208" y="523969"/>
+                  </a:lnTo>
+                  <a:lnTo>
+                    <a:pt x="220743" y="374491"/>
+                  </a:lnTo>
+                  <a:lnTo>
+                    <a:pt x="320695" y="236506"/>
+                  </a:lnTo>
+                  <a:lnTo>
+                    <a:pt x="438925" y="111260"/>
+                  </a:lnTo>
+                  <a:lnTo>
+                    <a:pt x="575295" y="0"/>
+                  </a:lnTo>
+                  <a:close/>
+                </a:path>
+              </a:pathLst>
+            </a:custGeom>
+            <a:solidFill>
+              <a:srgbClr val="0077FF"/>
+            </a:solidFill>
+            <a:ln>
+              <a:noFill/>
+            </a:ln>
+            <a:effectLst/>
+          </p:spPr>
+          <p:style>
+            <a:lnRef idx="1">
+              <a:schemeClr val="accent1"/>
+            </a:lnRef>
+            <a:fillRef idx="3">
+              <a:schemeClr val="accent1"/>
+            </a:fillRef>
+            <a:effectRef idx="2">
+              <a:schemeClr val="accent1"/>
+            </a:effectRef>
+            <a:fontRef idx="minor">
+              <a:schemeClr val="lt1"/>
+            </a:fontRef>
+          </p:style>
+          <p:txBody>
+            <a:bodyPr rtlCol="0" anchor="ctr"/>
+            <a:lstStyle/>
+            <a:p>
+              <a:pPr algn="ctr"/>
+            </a:p>
+          </p:txBody>
+        </p:sp>
+        <p:sp>
+          <p:nvSpPr>
+            <p:cNvPr id="7" name="Oval 6"/>
+            <p:cNvSpPr/>
+            <p:nvPr/>
+          </p:nvSpPr>
+          <p:spPr>
+            <a:xfrm>
+              <a:off x="8948500" y="3276512"/>
+              <a:ext cx="553878" cy="553878"/>
+            </a:xfrm>
+            <a:prstGeom prst="ellipse">
+              <a:avLst/>
+            </a:prstGeom>
+            <a:solidFill>
+              <a:srgbClr val="FFFFFF"/>
+            </a:solidFill>
+            <a:ln>
+              <a:noFill/>
+            </a:ln>
+            <a:effectLst/>
+          </p:spPr>
+          <p:style>
+            <a:lnRef idx="1">
+              <a:schemeClr val="accent1"/>
+            </a:lnRef>
+            <a:fillRef idx="3">
+              <a:schemeClr val="accent1"/>
+            </a:fillRef>
+            <a:effectRef idx="2">
+              <a:schemeClr val="accent1"/>
+            </a:effectRef>
+            <a:fontRef idx="minor">
+              <a:schemeClr val="lt1"/>
+            </a:fontRef>
+          </p:style>
+          <p:txBody>
+            <a:bodyPr rtlCol="0" anchor="ctr"/>
+            <a:lstStyle/>
+            <a:p>
+              <a:pPr algn="ctr"/>
+            </a:p>
+          </p:txBody>
+        </p:sp>
+        <p:sp>
+          <p:nvSpPr>
+            <p:cNvPr id="8" name="Oval 7"/>
+            <p:cNvSpPr/>
+            <p:nvPr/>
+          </p:nvSpPr>
+          <p:spPr>
+            <a:xfrm>
+              <a:off x="9063892" y="3391903"/>
+              <a:ext cx="323095" cy="323095"/>
+            </a:xfrm>
+            <a:prstGeom prst="ellipse">
+              <a:avLst/>
+            </a:prstGeom>
+            <a:solidFill>
+              <a:srgbClr val="FF3885"/>
+            </a:solidFill>
+            <a:ln>
+              <a:noFill/>
+            </a:ln>
+            <a:effectLst/>
+          </p:spPr>
+          <p:style>
+            <a:lnRef idx="1">
+              <a:schemeClr val="accent1"/>
+            </a:lnRef>
+            <a:fillRef idx="3">
+              <a:schemeClr val="accent1"/>
+            </a:fillRef>
+            <a:effectRef idx="2">
+              <a:schemeClr val="accent1"/>
+            </a:effectRef>
+            <a:fontRef idx="minor">
+              <a:schemeClr val="lt1"/>
+            </a:fontRef>
+          </p:style>
+          <p:txBody>
+            <a:bodyPr rtlCol="0" anchor="ctr"/>
+            <a:lstStyle/>
+            <a:p>
+              <a:pPr algn="ctr"/>
+            </a:p>
+          </p:txBody>
+        </p:sp>
+        <p:sp>
+          <p:nvSpPr>
+            <p:cNvPr id="9" name="Freeform 8"/>
+            <p:cNvSpPr/>
+            <p:nvPr/>
+          </p:nvSpPr>
+          <p:spPr>
+            <a:xfrm>
+              <a:off x="8302309" y="3991938"/>
+              <a:ext cx="461565" cy="761583"/>
+            </a:xfrm>
+            <a:custGeom>
+              <a:avLst/>
+              <a:gdLst/>
+              <a:ahLst/>
+              <a:cxnLst/>
+              <a:rect l="l" t="t" r="r" b="b"/>
+              <a:pathLst>
+                <a:path w="461565" h="761583">
+                  <a:moveTo>
+                    <a:pt x="392331" y="0"/>
+                  </a:moveTo>
+                  <a:lnTo>
+                    <a:pt x="0" y="484643"/>
+                  </a:lnTo>
+                  <a:lnTo>
+                    <a:pt x="0" y="761583"/>
+                  </a:lnTo>
+                  <a:lnTo>
+                    <a:pt x="461565" y="553878"/>
+                  </a:lnTo>
+                  <a:close/>
+                </a:path>
+              </a:pathLst>
+            </a:custGeom>
+            <a:solidFill>
+              <a:srgbClr val="FF3885"/>
+            </a:solidFill>
+            <a:ln>
+              <a:noFill/>
+            </a:ln>
+            <a:effectLst/>
+          </p:spPr>
+          <p:style>
+            <a:lnRef idx="1">
+              <a:schemeClr val="accent1"/>
+            </a:lnRef>
+            <a:fillRef idx="3">
+              <a:schemeClr val="accent1"/>
+            </a:fillRef>
+            <a:effectRef idx="2">
+              <a:schemeClr val="accent1"/>
+            </a:effectRef>
+            <a:fontRef idx="minor">
+              <a:schemeClr val="lt1"/>
+            </a:fontRef>
+          </p:style>
+          <p:txBody>
+            <a:bodyPr rtlCol="0" anchor="ctr"/>
+            <a:lstStyle/>
+            <a:p>
+              <a:pPr algn="ctr"/>
+            </a:p>
+          </p:txBody>
+        </p:sp>
+        <p:sp>
+          <p:nvSpPr>
+            <p:cNvPr id="10" name="Freeform 9"/>
+            <p:cNvSpPr/>
+            <p:nvPr/>
+          </p:nvSpPr>
+          <p:spPr>
+            <a:xfrm>
+              <a:off x="9687005" y="3991938"/>
+              <a:ext cx="461565" cy="761583"/>
+            </a:xfrm>
+            <a:custGeom>
+              <a:avLst/>
+              <a:gdLst/>
+              <a:ahLst/>
+              <a:cxnLst/>
+              <a:rect l="l" t="t" r="r" b="b"/>
+              <a:pathLst>
+                <a:path w="461565" h="761583">
+                  <a:moveTo>
+                    <a:pt x="69234" y="0"/>
+                  </a:moveTo>
+                  <a:lnTo>
+                    <a:pt x="461565" y="484643"/>
+                  </a:lnTo>
+                  <a:lnTo>
+                    <a:pt x="461565" y="761583"/>
+                  </a:lnTo>
+                  <a:lnTo>
+                    <a:pt x="0" y="553878"/>
+                  </a:lnTo>
+                  <a:close/>
+                </a:path>
+              </a:pathLst>
+            </a:custGeom>
+            <a:solidFill>
+              <a:srgbClr val="FF3885"/>
+            </a:solidFill>
+            <a:ln>
+              <a:noFill/>
+            </a:ln>
+            <a:effectLst/>
+          </p:spPr>
+          <p:style>
+            <a:lnRef idx="1">
+              <a:schemeClr val="accent1"/>
+            </a:lnRef>
+            <a:fillRef idx="3">
+              <a:schemeClr val="accent1"/>
+            </a:fillRef>
+            <a:effectRef idx="2">
+              <a:schemeClr val="accent1"/>
+            </a:effectRef>
+            <a:fontRef idx="minor">
+              <a:schemeClr val="lt1"/>
+            </a:fontRef>
+          </p:style>
+          <p:txBody>
+            <a:bodyPr rtlCol="0" anchor="ctr"/>
+            <a:lstStyle/>
+            <a:p>
+              <a:pPr algn="ctr"/>
+            </a:p>
+          </p:txBody>
+        </p:sp>
+        <p:sp>
+          <p:nvSpPr>
+            <p:cNvPr id="11" name="Freeform 10"/>
+            <p:cNvSpPr/>
+            <p:nvPr/>
+          </p:nvSpPr>
+          <p:spPr>
+            <a:xfrm>
+              <a:off x="8948500" y="4315034"/>
+              <a:ext cx="553879" cy="346174"/>
+            </a:xfrm>
+            <a:custGeom>
+              <a:avLst/>
+              <a:gdLst/>
+              <a:ahLst/>
+              <a:cxnLst/>
+              <a:rect l="l" t="t" r="r" b="b"/>
+              <a:pathLst>
+                <a:path w="553879" h="346174">
+                  <a:moveTo>
+                    <a:pt x="0" y="0"/>
+                  </a:moveTo>
+                  <a:lnTo>
+                    <a:pt x="553879" y="0"/>
+                  </a:lnTo>
+                  <a:lnTo>
+                    <a:pt x="461566" y="346174"/>
+                  </a:lnTo>
+                  <a:lnTo>
+                    <a:pt x="92313" y="346174"/>
+                  </a:lnTo>
+                  <a:close/>
+                </a:path>
+              </a:pathLst>
+            </a:custGeom>
+            <a:solidFill>
+              <a:srgbClr val="B2B2B2"/>
+            </a:solidFill>
+            <a:ln>
+              <a:noFill/>
+            </a:ln>
+            <a:effectLst/>
+          </p:spPr>
+          <p:style>
+            <a:lnRef idx="1">
+              <a:schemeClr val="accent1"/>
+            </a:lnRef>
+            <a:fillRef idx="3">
+              <a:schemeClr val="accent1"/>
+            </a:fillRef>
+            <a:effectRef idx="2">
+              <a:schemeClr val="accent1"/>
+            </a:effectRef>
+            <a:fontRef idx="minor">
+              <a:schemeClr val="lt1"/>
+            </a:fontRef>
+          </p:style>
+          <p:txBody>
+            <a:bodyPr rtlCol="0" anchor="ctr"/>
+            <a:lstStyle/>
+            <a:p>
+              <a:pPr algn="ctr"/>
+            </a:p>
+          </p:txBody>
+        </p:sp>
+        <p:sp>
+          <p:nvSpPr>
+            <p:cNvPr id="12" name="Freeform 11"/>
+            <p:cNvSpPr/>
+            <p:nvPr/>
+          </p:nvSpPr>
+          <p:spPr>
+            <a:xfrm>
+              <a:off x="9040813" y="4661208"/>
+              <a:ext cx="369253" cy="646191"/>
+            </a:xfrm>
+            <a:custGeom>
+              <a:avLst/>
+              <a:gdLst/>
+              <a:ahLst/>
+              <a:cxnLst/>
+              <a:rect l="l" t="t" r="r" b="b"/>
+              <a:pathLst>
+                <a:path w="369253" h="646191">
+                  <a:moveTo>
+                    <a:pt x="0" y="0"/>
+                  </a:moveTo>
+                  <a:lnTo>
+                    <a:pt x="369253" y="0"/>
+                  </a:lnTo>
+                  <a:lnTo>
+                    <a:pt x="366576" y="86635"/>
+                  </a:lnTo>
+                  <a:lnTo>
+                    <a:pt x="358914" y="166902"/>
+                  </a:lnTo>
+                  <a:lnTo>
+                    <a:pt x="346821" y="241352"/>
+                  </a:lnTo>
+                  <a:lnTo>
+                    <a:pt x="330850" y="310541"/>
+                  </a:lnTo>
+                  <a:lnTo>
+                    <a:pt x="311557" y="375021"/>
+                  </a:lnTo>
+                  <a:lnTo>
+                    <a:pt x="289494" y="435348"/>
+                  </a:lnTo>
+                  <a:lnTo>
+                    <a:pt x="265216" y="492074"/>
+                  </a:lnTo>
+                  <a:lnTo>
+                    <a:pt x="239276" y="545754"/>
+                  </a:lnTo>
+                  <a:lnTo>
+                    <a:pt x="212228" y="596942"/>
+                  </a:lnTo>
+                  <a:lnTo>
+                    <a:pt x="184627" y="646191"/>
+                  </a:lnTo>
+                  <a:lnTo>
+                    <a:pt x="157025" y="596942"/>
+                  </a:lnTo>
+                  <a:lnTo>
+                    <a:pt x="129977" y="545754"/>
+                  </a:lnTo>
+                  <a:lnTo>
+                    <a:pt x="104037" y="492074"/>
+                  </a:lnTo>
+                  <a:lnTo>
+                    <a:pt x="79759" y="435348"/>
+                  </a:lnTo>
+                  <a:lnTo>
+                    <a:pt x="57696" y="375021"/>
+                  </a:lnTo>
+                  <a:lnTo>
+                    <a:pt x="38403" y="310541"/>
+                  </a:lnTo>
+                  <a:lnTo>
+                    <a:pt x="22432" y="241352"/>
+                  </a:lnTo>
+                  <a:lnTo>
+                    <a:pt x="10339" y="166902"/>
+                  </a:lnTo>
+                  <a:lnTo>
+                    <a:pt x="2677" y="86635"/>
+                  </a:lnTo>
+                  <a:lnTo>
+                    <a:pt x="0" y="0"/>
+                  </a:lnTo>
+                  <a:close/>
+                </a:path>
+              </a:pathLst>
+            </a:custGeom>
+            <a:solidFill>
+              <a:srgbClr val="FF3885"/>
+            </a:solidFill>
+            <a:ln>
+              <a:noFill/>
+            </a:ln>
+            <a:effectLst/>
+          </p:spPr>
+          <p:style>
+            <a:lnRef idx="1">
+              <a:schemeClr val="accent1"/>
+            </a:lnRef>
+            <a:fillRef idx="3">
+              <a:schemeClr val="accent1"/>
+            </a:fillRef>
+            <a:effectRef idx="2">
+              <a:schemeClr val="accent1"/>
+            </a:effectRef>
+            <a:fontRef idx="minor">
+              <a:schemeClr val="lt1"/>
+            </a:fontRef>
+          </p:style>
+          <p:txBody>
+            <a:bodyPr rtlCol="0" anchor="ctr"/>
+            <a:lstStyle/>
+            <a:p>
+              <a:pPr algn="ctr"/>
+            </a:p>
+          </p:txBody>
+        </p:sp>
+        <p:sp>
+          <p:nvSpPr>
+            <p:cNvPr id="13" name="Oval 12"/>
+            <p:cNvSpPr/>
+            <p:nvPr/>
+          </p:nvSpPr>
+          <p:spPr>
+            <a:xfrm>
+              <a:off x="7898440" y="3172660"/>
+              <a:ext cx="161547" cy="161547"/>
+            </a:xfrm>
+            <a:prstGeom prst="ellipse">
+              <a:avLst/>
+            </a:prstGeom>
+            <a:solidFill>
+              <a:srgbClr val="0077FF"/>
+            </a:solidFill>
+            <a:ln>
+              <a:noFill/>
+            </a:ln>
+            <a:effectLst/>
+          </p:spPr>
+          <p:style>
+            <a:lnRef idx="1">
+              <a:schemeClr val="accent1"/>
+            </a:lnRef>
+            <a:fillRef idx="3">
+              <a:schemeClr val="accent1"/>
+            </a:fillRef>
+            <a:effectRef idx="2">
+              <a:schemeClr val="accent1"/>
+            </a:effectRef>
+            <a:fontRef idx="minor">
+              <a:schemeClr val="lt1"/>
+            </a:fontRef>
+          </p:style>
+          <p:txBody>
+            <a:bodyPr rtlCol="0" anchor="ctr"/>
+            <a:lstStyle/>
+            <a:p>
+              <a:pPr algn="ctr"/>
+            </a:p>
+          </p:txBody>
+        </p:sp>
+        <p:sp>
+          <p:nvSpPr>
+            <p:cNvPr id="14" name="Oval 13"/>
+            <p:cNvSpPr/>
+            <p:nvPr/>
+          </p:nvSpPr>
+          <p:spPr>
+            <a:xfrm>
+              <a:off x="10448587" y="2953416"/>
+              <a:ext cx="230782" cy="230782"/>
+            </a:xfrm>
+            <a:prstGeom prst="ellipse">
+              <a:avLst/>
+            </a:prstGeom>
+            <a:solidFill>
+              <a:srgbClr val="FF3885"/>
+            </a:solidFill>
+            <a:ln>
+              <a:noFill/>
+            </a:ln>
+            <a:effectLst/>
+          </p:spPr>
+          <p:style>
+            <a:lnRef idx="1">
+              <a:schemeClr val="accent1"/>
+            </a:lnRef>
+            <a:fillRef idx="3">
+              <a:schemeClr val="accent1"/>
+            </a:fillRef>
+            <a:effectRef idx="2">
+              <a:schemeClr val="accent1"/>
+            </a:effectRef>
+            <a:fontRef idx="minor">
+              <a:schemeClr val="lt1"/>
+            </a:fontRef>
+          </p:style>
+          <p:txBody>
+            <a:bodyPr rtlCol="0" anchor="ctr"/>
+            <a:lstStyle/>
+            <a:p>
+              <a:pPr algn="ctr"/>
+            </a:p>
+          </p:txBody>
+        </p:sp>
+        <p:sp>
+          <p:nvSpPr>
+            <p:cNvPr id="15" name="Oval 14"/>
+            <p:cNvSpPr/>
+            <p:nvPr/>
+          </p:nvSpPr>
+          <p:spPr>
+            <a:xfrm>
+              <a:off x="10656292" y="4499660"/>
+              <a:ext cx="138469" cy="138469"/>
+            </a:xfrm>
+            <a:prstGeom prst="ellipse">
+              <a:avLst/>
+            </a:prstGeom>
+            <a:solidFill>
+              <a:srgbClr val="0077FF"/>
+            </a:solidFill>
+            <a:ln>
+              <a:noFill/>
+            </a:ln>
+            <a:effectLst/>
+          </p:spPr>
+          <p:style>
+            <a:lnRef idx="1">
+              <a:schemeClr val="accent1"/>
+            </a:lnRef>
+            <a:fillRef idx="3">
+              <a:schemeClr val="accent1"/>
+            </a:fillRef>
+            <a:effectRef idx="2">
+              <a:schemeClr val="accent1"/>
+            </a:effectRef>
+            <a:fontRef idx="minor">
+              <a:schemeClr val="lt1"/>
+            </a:fontRef>
+          </p:style>
+          <p:txBody>
+            <a:bodyPr rtlCol="0" anchor="ctr"/>
+            <a:lstStyle/>
+            <a:p>
+              <a:pPr algn="ctr"/>
+            </a:p>
+          </p:txBody>
+        </p:sp>
+      </p:grpSp>
     </p:spTree>
   </p:cSld>
   <p:clrMapOvr>
@@ -10344,7 +15375,7 @@
 </p:sld>
 </file>
 
-<file path=ppt/slides/slide65.xml><?xml version="1.0" encoding="utf-8"?>
+<file path=ppt/slides/slide67.xml><?xml version="1.0" encoding="utf-8"?>
 <p:sld xmlns:a="http://schemas.openxmlformats.org/drawingml/2006/main" xmlns:p="http://schemas.openxmlformats.org/presentationml/2006/main" xmlns:r="http://schemas.openxmlformats.org/officeDocument/2006/relationships">
   <p:cSld>
     <p:spTree>
@@ -10363,7 +15394,7 @@
         <p:spPr>
           <a:xfrm>
             <a:off x="658855" y="692177"/>
-            <a:ext cx="5242438" cy="822960"/>
+            <a:ext cx="5242438" cy="919480"/>
           </a:xfrm>
           <a:prstGeom prst="rect">
             <a:avLst/>
@@ -10380,7 +15411,7 @@
               <a:spcAft>
                 <a:spcPts val="300"/>
               </a:spcAft>
-              <a:defRPr sz="4000">
+              <a:defRPr sz="4800">
                 <a:solidFill>
                   <a:srgbClr val="FFFFFF"/>
                 </a:solidFill>
@@ -10390,7 +15421,7 @@
               </a:defRPr>
             </a:pPr>
             <a:r>
-              <a:rPr sz="4000">
+              <a:rPr sz="4800">
                 <a:solidFill>
                   <a:srgbClr val="FFFFFF"/>
                 </a:solidFill>
@@ -10398,7 +15429,7 @@
                 <a:ea typeface="Arial"/>
                 <a:cs typeface="Arial"/>
               </a:rPr>
-              <a:t>Следующие шаги</a:t>
+              <a:t>Заключение</a:t>
             </a:r>
           </a:p>
         </p:txBody>
@@ -10411,8 +15442,8 @@
         </p:nvSpPr>
         <p:spPr>
           <a:xfrm>
-            <a:off x="658855" y="1783080"/>
-            <a:ext cx="5242438" cy="3859476"/>
+            <a:off x="658855" y="2465070"/>
+            <a:ext cx="5242438" cy="1950720"/>
           </a:xfrm>
           <a:prstGeom prst="rect">
             <a:avLst/>
@@ -10447,7 +15478,7 @@
                 <a:ea typeface="Play"/>
                 <a:cs typeface="Play"/>
               </a:rPr>
-              <a:t>• Сервис готов к масштабированию на всю компанию</a:t>
+              <a:t>• Одобрить запуск сервиса на всю компанию</a:t>
             </a:r>
           </a:p>
           <a:p>
@@ -10473,33 +15504,7 @@
                 <a:ea typeface="Play"/>
                 <a:cs typeface="Play"/>
               </a:rPr>
-              <a:t>• Ожидаем решение о запуске в четвертом квартале 2026</a:t>
-            </a:r>
-          </a:p>
-          <a:p>
-            <a:pPr algn="l">
-              <a:spcAft>
-                <a:spcPts val="300"/>
-              </a:spcAft>
-              <a:defRPr sz="2800">
-                <a:solidFill>
-                  <a:srgbClr val="FFFFFF"/>
-                </a:solidFill>
-                <a:latin typeface="Play"/>
-                <a:ea typeface="Play"/>
-                <a:cs typeface="Play"/>
-              </a:defRPr>
-            </a:pPr>
-            <a:r>
-              <a:rPr sz="2800">
-                <a:solidFill>
-                  <a:srgbClr val="FFFFFF"/>
-                </a:solidFill>
-                <a:latin typeface="Play"/>
-                <a:ea typeface="Play"/>
-                <a:cs typeface="Play"/>
-              </a:rPr>
-              <a:t>• Планируем интеграцию с хранилищем документов</a:t>
+              <a:t>• Назначить ответственных и выделить бюджет</a:t>
             </a:r>
           </a:p>
         </p:txBody>

--- a/samples/Шаблон_презентации_VK_Education__split.pptx
+++ b/samples/Шаблон_презентации_VK_Education__split.pptx
@@ -261,434 +261,6 @@
     </a:lvl9pPr>
   </p:defaultTextStyle>
 </p:presentation>
-</file>
-
-<file path=ppt/charts/chart1.xml><?xml version="1.0" encoding="utf-8"?>
-<c:chartSpace xmlns:c="http://schemas.openxmlformats.org/drawingml/2006/chart" xmlns:a="http://schemas.openxmlformats.org/drawingml/2006/main" xmlns:r="http://schemas.openxmlformats.org/officeDocument/2006/relationships">
-  <c:date1904 val="0"/>
-  <c:chart>
-    <c:autoTitleDeleted val="1"/>
-    <c:plotArea>
-      <c:barChart>
-        <c:barDir val="col"/>
-        <c:grouping val="clustered"/>
-        <c:ser>
-          <c:idx val="0"/>
-          <c:order val="0"/>
-          <c:tx>
-            <c:strRef>
-              <c:f>Sheet1!$B$1</c:f>
-              <c:strCache>
-                <c:ptCount val="1"/>
-                <c:pt idx="0">
-                  <c:v>Время (мин)</c:v>
-                </c:pt>
-              </c:strCache>
-            </c:strRef>
-          </c:tx>
-          <c:spPr>
-            <a:solidFill>
-              <a:srgbClr val="0077FF"/>
-            </a:solidFill>
-            <a:ln>
-              <a:solidFill>
-                <a:srgbClr val="0077FF"/>
-              </a:solidFill>
-            </a:ln>
-          </c:spPr>
-          <c:cat>
-            <c:strRef>
-              <c:f>Sheet1!$A$2:$A$3</c:f>
-              <c:strCache>
-                <c:ptCount val="2"/>
-                <c:pt idx="0">
-                  <c:v>Текущий процесс</c:v>
-                </c:pt>
-                <c:pt idx="1">
-                  <c:v>Пилот</c:v>
-                </c:pt>
-              </c:strCache>
-            </c:strRef>
-          </c:cat>
-          <c:val>
-            <c:numRef>
-              <c:f>Sheet1!$B$2:$B$3</c:f>
-              <c:numCache>
-                <c:formatCode>General</c:formatCode>
-                <c:ptCount val="2"/>
-                <c:pt idx="0">
-                  <c:v>186.0</c:v>
-                </c:pt>
-                <c:pt idx="1">
-                  <c:v>4.0</c:v>
-                </c:pt>
-              </c:numCache>
-            </c:numRef>
-          </c:val>
-        </c:ser>
-        <c:dLbls>
-          <c:numFmt formatCode="0&quot; мин&quot;" sourceLinked="0"/>
-          <c:txPr>
-            <a:bodyPr wrap="none"/>
-            <a:lstStyle/>
-            <a:p>
-              <a:pPr>
-                <a:defRPr sz="1100" b="0">
-                  <a:solidFill>
-                    <a:srgbClr val="000000"/>
-                  </a:solidFill>
-                  <a:latin typeface="Play"/>
-                  <a:ea typeface="Play"/>
-                  <a:cs typeface="Play"/>
-                </a:defRPr>
-              </a:pPr>
-            </a:p>
-          </c:txPr>
-          <c:dLblPos val="outEnd"/>
-          <c:showLegendKey val="0"/>
-          <c:showVal val="1"/>
-          <c:showCatName val="0"/>
-          <c:showSerName val="0"/>
-          <c:showPercent val="0"/>
-          <c:showBubbleSize val="0"/>
-          <c:showLeaderLines val="1"/>
-        </c:dLbls>
-        <c:gapWidth val="60"/>
-        <c:axId val="-2068027336"/>
-        <c:axId val="-2113994440"/>
-      </c:barChart>
-      <c:catAx>
-        <c:axId val="-2068027336"/>
-        <c:scaling>
-          <c:orientation val="minMax"/>
-        </c:scaling>
-        <c:delete val="0"/>
-        <c:axPos val="b"/>
-        <c:majorTickMark val="out"/>
-        <c:minorTickMark val="none"/>
-        <c:tickLblPos val="nextTo"/>
-        <c:txPr>
-          <a:bodyPr/>
-          <a:lstStyle/>
-          <a:p>
-            <a:pPr>
-              <a:defRPr sz="1100" b="0">
-                <a:solidFill>
-                  <a:srgbClr val="000000"/>
-                </a:solidFill>
-                <a:latin typeface="Play"/>
-                <a:ea typeface="Play"/>
-                <a:cs typeface="Play"/>
-              </a:defRPr>
-            </a:pPr>
-          </a:p>
-        </c:txPr>
-        <c:crossAx val="-2113994440"/>
-        <c:crosses val="autoZero"/>
-        <c:auto val="1"/>
-        <c:lblAlgn val="ctr"/>
-        <c:lblOffset val="100"/>
-        <c:noMultiLvlLbl val="0"/>
-      </c:catAx>
-      <c:valAx>
-        <c:axId val="-2113994440"/>
-        <c:scaling/>
-        <c:delete val="0"/>
-        <c:axPos val="l"/>
-        <c:majorGridlines>
-          <c:spPr>
-            <a:ln w="9525">
-              <a:solidFill>
-                <a:srgbClr val="D1D1D1"/>
-              </a:solidFill>
-            </a:ln>
-          </c:spPr>
-        </c:majorGridlines>
-        <c:title>
-          <c:tx>
-            <c:rich>
-              <a:bodyPr rot="0" vert="horz"/>
-              <a:lstStyle/>
-              <a:p>
-                <a:pPr>
-                  <a:defRPr sz="1100" b="0">
-                    <a:solidFill>
-                      <a:srgbClr val="000000"/>
-                    </a:solidFill>
-                    <a:latin typeface="Play"/>
-                    <a:ea typeface="Play"/>
-                    <a:cs typeface="Play"/>
-                  </a:defRPr>
-                </a:pPr>
-                <a:r>
-                  <a:t>Время (мин), мин</a:t>
-                </a:r>
-              </a:p>
-            </c:rich>
-          </c:tx>
-          <c:layout/>
-          <c:overlay val="0"/>
-        </c:title>
-        <c:majorTickMark val="out"/>
-        <c:minorTickMark val="none"/>
-        <c:tickLblPos val="nextTo"/>
-        <c:txPr>
-          <a:bodyPr/>
-          <a:lstStyle/>
-          <a:p>
-            <a:pPr>
-              <a:defRPr sz="1100" b="0">
-                <a:solidFill>
-                  <a:srgbClr val="000000"/>
-                </a:solidFill>
-                <a:latin typeface="Play"/>
-                <a:ea typeface="Play"/>
-                <a:cs typeface="Play"/>
-              </a:defRPr>
-            </a:pPr>
-          </a:p>
-        </c:txPr>
-        <c:crossAx val="-2068027336"/>
-        <c:crosses val="autoZero"/>
-      </c:valAx>
-    </c:plotArea>
-    <c:dispBlanksAs val="gap"/>
-  </c:chart>
-  <c:txPr>
-    <a:bodyPr/>
-    <a:lstStyle/>
-    <a:p>
-      <a:pPr>
-        <a:defRPr sz="1200" b="0">
-          <a:solidFill>
-            <a:srgbClr val="000000"/>
-          </a:solidFill>
-          <a:latin typeface="Play"/>
-          <a:ea typeface="Play"/>
-          <a:cs typeface="Play"/>
-        </a:defRPr>
-      </a:pPr>
-      <a:endParaRPr lang="en-US"/>
-    </a:p>
-  </c:txPr>
-  <c:externalData r:id="rId1">
-    <c:autoUpdate val="0"/>
-  </c:externalData>
-</c:chartSpace>
-</file>
-
-<file path=ppt/charts/chart2.xml><?xml version="1.0" encoding="utf-8"?>
-<c:chartSpace xmlns:c="http://schemas.openxmlformats.org/drawingml/2006/chart" xmlns:a="http://schemas.openxmlformats.org/drawingml/2006/main" xmlns:r="http://schemas.openxmlformats.org/officeDocument/2006/relationships">
-  <c:date1904 val="0"/>
-  <c:chart>
-    <c:autoTitleDeleted val="1"/>
-    <c:plotArea>
-      <c:barChart>
-        <c:barDir val="col"/>
-        <c:grouping val="clustered"/>
-        <c:ser>
-          <c:idx val="0"/>
-          <c:order val="0"/>
-          <c:tx>
-            <c:strRef>
-              <c:f>Sheet1!$B$1</c:f>
-              <c:strCache>
-                <c:ptCount val="1"/>
-                <c:pt idx="0">
-                  <c:v>Запросы закрыты</c:v>
-                </c:pt>
-              </c:strCache>
-            </c:strRef>
-          </c:tx>
-          <c:spPr>
-            <a:solidFill>
-              <a:srgbClr val="0077FF"/>
-            </a:solidFill>
-            <a:ln>
-              <a:solidFill>
-                <a:srgbClr val="0077FF"/>
-              </a:solidFill>
-            </a:ln>
-          </c:spPr>
-          <c:cat>
-            <c:strRef>
-              <c:f>Sheet1!$A$2:$A$3</c:f>
-              <c:strCache>
-                <c:ptCount val="2"/>
-                <c:pt idx="0">
-                  <c:v>Текущий процесс</c:v>
-                </c:pt>
-                <c:pt idx="1">
-                  <c:v>Пилот</c:v>
-                </c:pt>
-              </c:strCache>
-            </c:strRef>
-          </c:cat>
-          <c:val>
-            <c:numRef>
-              <c:f>Sheet1!$B$2:$B$3</c:f>
-              <c:numCache>
-                <c:formatCode>General</c:formatCode>
-                <c:ptCount val="2"/>
-                <c:pt idx="0">
-                  <c:v>11.0</c:v>
-                </c:pt>
-                <c:pt idx="1">
-                  <c:v>38.0</c:v>
-                </c:pt>
-              </c:numCache>
-            </c:numRef>
-          </c:val>
-        </c:ser>
-        <c:dLbls>
-          <c:numFmt formatCode="0&quot; запросов&quot;" sourceLinked="0"/>
-          <c:txPr>
-            <a:bodyPr wrap="none"/>
-            <a:lstStyle/>
-            <a:p>
-              <a:pPr>
-                <a:defRPr sz="1100" b="0">
-                  <a:solidFill>
-                    <a:srgbClr val="000000"/>
-                  </a:solidFill>
-                  <a:latin typeface="Play"/>
-                  <a:ea typeface="Play"/>
-                  <a:cs typeface="Play"/>
-                </a:defRPr>
-              </a:pPr>
-            </a:p>
-          </c:txPr>
-          <c:dLblPos val="outEnd"/>
-          <c:showLegendKey val="0"/>
-          <c:showVal val="1"/>
-          <c:showCatName val="0"/>
-          <c:showSerName val="0"/>
-          <c:showPercent val="0"/>
-          <c:showBubbleSize val="0"/>
-          <c:showLeaderLines val="1"/>
-        </c:dLbls>
-        <c:gapWidth val="60"/>
-        <c:axId val="-2068027336"/>
-        <c:axId val="-2113994440"/>
-      </c:barChart>
-      <c:catAx>
-        <c:axId val="-2068027336"/>
-        <c:scaling>
-          <c:orientation val="minMax"/>
-        </c:scaling>
-        <c:delete val="0"/>
-        <c:axPos val="b"/>
-        <c:majorTickMark val="out"/>
-        <c:minorTickMark val="none"/>
-        <c:tickLblPos val="nextTo"/>
-        <c:txPr>
-          <a:bodyPr/>
-          <a:lstStyle/>
-          <a:p>
-            <a:pPr>
-              <a:defRPr sz="1100" b="0">
-                <a:solidFill>
-                  <a:srgbClr val="000000"/>
-                </a:solidFill>
-                <a:latin typeface="Play"/>
-                <a:ea typeface="Play"/>
-                <a:cs typeface="Play"/>
-              </a:defRPr>
-            </a:pPr>
-          </a:p>
-        </c:txPr>
-        <c:crossAx val="-2113994440"/>
-        <c:crosses val="autoZero"/>
-        <c:auto val="1"/>
-        <c:lblAlgn val="ctr"/>
-        <c:lblOffset val="100"/>
-        <c:noMultiLvlLbl val="0"/>
-      </c:catAx>
-      <c:valAx>
-        <c:axId val="-2113994440"/>
-        <c:scaling/>
-        <c:delete val="0"/>
-        <c:axPos val="l"/>
-        <c:majorGridlines>
-          <c:spPr>
-            <a:ln w="9525">
-              <a:solidFill>
-                <a:srgbClr val="D1D1D1"/>
-              </a:solidFill>
-            </a:ln>
-          </c:spPr>
-        </c:majorGridlines>
-        <c:title>
-          <c:tx>
-            <c:rich>
-              <a:bodyPr rot="0" vert="horz"/>
-              <a:lstStyle/>
-              <a:p>
-                <a:pPr>
-                  <a:defRPr sz="1100" b="0">
-                    <a:solidFill>
-                      <a:srgbClr val="000000"/>
-                    </a:solidFill>
-                    <a:latin typeface="Play"/>
-                    <a:ea typeface="Play"/>
-                    <a:cs typeface="Play"/>
-                  </a:defRPr>
-                </a:pPr>
-                <a:r>
-                  <a:t>Запросы закрыты, запросов</a:t>
-                </a:r>
-              </a:p>
-            </c:rich>
-          </c:tx>
-          <c:layout/>
-          <c:overlay val="0"/>
-        </c:title>
-        <c:majorTickMark val="out"/>
-        <c:minorTickMark val="none"/>
-        <c:tickLblPos val="nextTo"/>
-        <c:txPr>
-          <a:bodyPr/>
-          <a:lstStyle/>
-          <a:p>
-            <a:pPr>
-              <a:defRPr sz="1100" b="0">
-                <a:solidFill>
-                  <a:srgbClr val="000000"/>
-                </a:solidFill>
-                <a:latin typeface="Play"/>
-                <a:ea typeface="Play"/>
-                <a:cs typeface="Play"/>
-              </a:defRPr>
-            </a:pPr>
-          </a:p>
-        </c:txPr>
-        <c:crossAx val="-2068027336"/>
-        <c:crosses val="autoZero"/>
-      </c:valAx>
-    </c:plotArea>
-    <c:dispBlanksAs val="gap"/>
-  </c:chart>
-  <c:txPr>
-    <a:bodyPr/>
-    <a:lstStyle/>
-    <a:p>
-      <a:pPr>
-        <a:defRPr sz="1200" b="0">
-          <a:solidFill>
-            <a:srgbClr val="000000"/>
-          </a:solidFill>
-          <a:latin typeface="Play"/>
-          <a:ea typeface="Play"/>
-          <a:cs typeface="Play"/>
-        </a:defRPr>
-      </a:pPr>
-      <a:endParaRPr lang="en-US"/>
-    </a:p>
-  </c:txPr>
-  <c:externalData r:id="rId1">
-    <c:autoUpdate val="0"/>
-  </c:externalData>
-</c:chartSpace>
 </file>
 
 <file path=ppt/notesMasters/notesMaster1.xml><?xml version="1.0" encoding="utf-8"?>
@@ -9957,7 +9529,7 @@
         <p:spPr>
           <a:xfrm>
             <a:off x="622279" y="2598016"/>
-            <a:ext cx="7535387" cy="1661967"/>
+            <a:ext cx="7535387" cy="1686560"/>
           </a:xfrm>
           <a:prstGeom prst="rect">
             <a:avLst/>
@@ -9974,7 +9546,7 @@
               <a:spcAft>
                 <a:spcPts val="300"/>
               </a:spcAft>
-              <a:defRPr sz="4000" b="0">
+              <a:defRPr sz="4800" b="0">
                 <a:solidFill>
                   <a:srgbClr val="000000"/>
                 </a:solidFill>
@@ -9984,7 +9556,7 @@
               </a:defRPr>
             </a:pPr>
             <a:r>
-              <a:rPr sz="4000" b="0">
+              <a:rPr sz="4800" b="0">
                 <a:solidFill>
                   <a:srgbClr val="000000"/>
                 </a:solidFill>
@@ -9992,7 +9564,7 @@
                 <a:ea typeface="Arial"/>
                 <a:cs typeface="Arial"/>
               </a:rPr>
-              <a:t>Защита инициативы: сервис автоматической вёрстки</a:t>
+              <a:t>Автоматическая вёрстка презентаций</a:t>
             </a:r>
           </a:p>
         </p:txBody>
@@ -10024,7 +9596,7 @@
         <p:spPr>
           <a:xfrm>
             <a:off x="677387" y="692177"/>
-            <a:ext cx="10855878" cy="822960"/>
+            <a:ext cx="10855878" cy="1447800"/>
           </a:xfrm>
           <a:prstGeom prst="rect">
             <a:avLst/>
@@ -10059,1194 +9631,7 @@
                 <a:ea typeface="Arial"/>
                 <a:cs typeface="Arial"/>
               </a:rPr>
-              <a:t>Контекст и возможность</a:t>
-            </a:r>
-          </a:p>
-        </p:txBody>
-      </p:sp>
-      <p:sp>
-        <p:nvSpPr>
-          <p:cNvPr id="3" name="body"/>
-          <p:cNvSpPr txBox="1"/>
-          <p:nvPr/>
-        </p:nvSpPr>
-        <p:spPr>
-          <a:xfrm>
-            <a:off x="677387" y="1783080"/>
-            <a:ext cx="5245059" cy="4417717"/>
-          </a:xfrm>
-          <a:prstGeom prst="rect">
-            <a:avLst/>
-          </a:prstGeom>
-          <a:noFill/>
-        </p:spPr>
-        <p:txBody>
-          <a:bodyPr wrap="square" lIns="76200" rIns="76200" tIns="50800" bIns="50800">
-            <a:spAutoFit/>
-          </a:bodyPr>
-          <a:lstStyle/>
-          <a:p>
-            <a:pPr algn="l">
-              <a:spcAft>
-                <a:spcPts val="300"/>
-              </a:spcAft>
-              <a:defRPr sz="3200">
-                <a:solidFill>
-                  <a:srgbClr val="000000"/>
-                </a:solidFill>
-                <a:latin typeface="Play"/>
-                <a:ea typeface="Play"/>
-                <a:cs typeface="Play"/>
-              </a:defRPr>
-            </a:pPr>
-            <a:r>
-              <a:rPr sz="3200">
-                <a:solidFill>
-                  <a:srgbClr val="000000"/>
-                </a:solidFill>
-                <a:latin typeface="Play"/>
-                <a:ea typeface="Play"/>
-                <a:cs typeface="Play"/>
-              </a:rPr>
-              <a:t>• Сборка одной презентации занимает 186 мин</a:t>
-            </a:r>
-          </a:p>
-          <a:p>
-            <a:pPr algn="l">
-              <a:spcAft>
-                <a:spcPts val="300"/>
-              </a:spcAft>
-              <a:defRPr sz="3200">
-                <a:solidFill>
-                  <a:srgbClr val="000000"/>
-                </a:solidFill>
-                <a:latin typeface="Play"/>
-                <a:ea typeface="Play"/>
-                <a:cs typeface="Play"/>
-              </a:defRPr>
-            </a:pPr>
-            <a:r>
-              <a:rPr sz="3200">
-                <a:solidFill>
-                  <a:srgbClr val="000000"/>
-                </a:solidFill>
-                <a:latin typeface="Play"/>
-                <a:ea typeface="Play"/>
-                <a:cs typeface="Play"/>
-              </a:rPr>
-              <a:t>• 74 мин уходит на правки после ревью</a:t>
-            </a:r>
-          </a:p>
-          <a:p>
-            <a:pPr algn="l">
-              <a:spcAft>
-                <a:spcPts val="300"/>
-              </a:spcAft>
-              <a:defRPr sz="3200">
-                <a:solidFill>
-                  <a:srgbClr val="000000"/>
-                </a:solidFill>
-                <a:latin typeface="Play"/>
-                <a:ea typeface="Play"/>
-                <a:cs typeface="Play"/>
-              </a:defRPr>
-            </a:pPr>
-            <a:r>
-              <a:rPr sz="3200">
-                <a:solidFill>
-                  <a:srgbClr val="000000"/>
-                </a:solidFill>
-                <a:latin typeface="Play"/>
-                <a:ea typeface="Play"/>
-                <a:cs typeface="Play"/>
-              </a:rPr>
-              <a:t>• 19 из 42 колод нарушают фирменный стиль</a:t>
-            </a:r>
-          </a:p>
-        </p:txBody>
-      </p:sp>
-      <p:graphicFrame>
-        <p:nvGraphicFramePr>
-          <p:cNvPr id="4" name="Chart 3"/>
-          <p:cNvGraphicFramePr>
-            <a:graphicFrameLocks noGrp="1"/>
-          </p:cNvGraphicFramePr>
-          <p:nvPr/>
-        </p:nvGraphicFramePr>
-        <p:xfrm>
-          <a:off x="6288206" y="1783080"/>
-          <a:ext cx="5245059" cy="4417717"/>
-        </p:xfrm>
-        <a:graphic>
-          <a:graphicData uri="http://schemas.openxmlformats.org/drawingml/2006/chart">
-            <c:chart xmlns:c="http://schemas.openxmlformats.org/drawingml/2006/chart" r:id="rId2"/>
-          </a:graphicData>
-        </a:graphic>
-      </p:graphicFrame>
-    </p:spTree>
-  </p:cSld>
-  <p:clrMapOvr>
-    <a:masterClrMapping/>
-  </p:clrMapOvr>
-</p:sld>
-</file>
-
-<file path=ppt/slides/slide58.xml><?xml version="1.0" encoding="utf-8"?>
-<p:sld xmlns:a="http://schemas.openxmlformats.org/drawingml/2006/main" xmlns:p="http://schemas.openxmlformats.org/presentationml/2006/main" xmlns:r="http://schemas.openxmlformats.org/officeDocument/2006/relationships">
-  <p:cSld>
-    <p:bg>
-      <p:bgPr>
-        <a:solidFill>
-          <a:schemeClr val="lt2"/>
-        </a:solidFill>
-      </p:bgPr>
-    </p:bg>
-    <p:spTree>
-      <p:nvGrpSpPr>
-        <p:cNvPr id="1" name=""/>
-        <p:cNvGrpSpPr/>
-        <p:nvPr/>
-      </p:nvGrpSpPr>
-      <p:grpSpPr/>
-      <p:sp>
-        <p:nvSpPr>
-          <p:cNvPr id="2" name="title"/>
-          <p:cNvSpPr txBox="1"/>
-          <p:nvPr/>
-        </p:nvSpPr>
-        <p:spPr>
-          <a:xfrm>
-            <a:off x="677387" y="692177"/>
-            <a:ext cx="10855878" cy="822960"/>
-          </a:xfrm>
-          <a:prstGeom prst="rect">
-            <a:avLst/>
-          </a:prstGeom>
-          <a:noFill/>
-        </p:spPr>
-        <p:txBody>
-          <a:bodyPr wrap="square" lIns="76200" rIns="76200" tIns="50800" bIns="50800">
-            <a:spAutoFit/>
-          </a:bodyPr>
-          <a:lstStyle/>
-          <a:p>
-            <a:pPr algn="l">
-              <a:spcAft>
-                <a:spcPts val="300"/>
-              </a:spcAft>
-              <a:defRPr sz="4000">
-                <a:solidFill>
-                  <a:srgbClr val="000000"/>
-                </a:solidFill>
-                <a:latin typeface="Arial"/>
-                <a:ea typeface="Arial"/>
-                <a:cs typeface="Arial"/>
-              </a:defRPr>
-            </a:pPr>
-            <a:r>
-              <a:rPr sz="4000">
-                <a:solidFill>
-                  <a:srgbClr val="000000"/>
-                </a:solidFill>
-                <a:latin typeface="Arial"/>
-                <a:ea typeface="Arial"/>
-                <a:cs typeface="Arial"/>
-              </a:rPr>
-              <a:t>Предложение</a:t>
-            </a:r>
-          </a:p>
-        </p:txBody>
-      </p:sp>
-      <p:sp>
-        <p:nvSpPr>
-          <p:cNvPr id="3" name="body"/>
-          <p:cNvSpPr txBox="1"/>
-          <p:nvPr/>
-        </p:nvSpPr>
-        <p:spPr>
-          <a:xfrm>
-            <a:off x="677387" y="2752418"/>
-            <a:ext cx="5874466" cy="2479040"/>
-          </a:xfrm>
-          <a:prstGeom prst="rect">
-            <a:avLst/>
-          </a:prstGeom>
-          <a:noFill/>
-        </p:spPr>
-        <p:txBody>
-          <a:bodyPr wrap="square" lIns="76200" rIns="76200" tIns="50800" bIns="50800">
-            <a:spAutoFit/>
-          </a:bodyPr>
-          <a:lstStyle/>
-          <a:p>
-            <a:pPr algn="l">
-              <a:spcAft>
-                <a:spcPts val="300"/>
-              </a:spcAft>
-              <a:defRPr sz="2400">
-                <a:solidFill>
-                  <a:srgbClr val="000000"/>
-                </a:solidFill>
-                <a:latin typeface="Play"/>
-                <a:ea typeface="Play"/>
-                <a:cs typeface="Play"/>
-              </a:defRPr>
-            </a:pPr>
-            <a:r>
-              <a:rPr sz="2400">
-                <a:solidFill>
-                  <a:srgbClr val="000000"/>
-                </a:solidFill>
-                <a:latin typeface="Play"/>
-                <a:ea typeface="Play"/>
-                <a:cs typeface="Play"/>
-              </a:rPr>
-              <a:t>• Сервис принимает шаблон pptx и материалы</a:t>
-            </a:r>
-          </a:p>
-          <a:p>
-            <a:pPr algn="l">
-              <a:spcAft>
-                <a:spcPts val="300"/>
-              </a:spcAft>
-              <a:defRPr sz="2400">
-                <a:solidFill>
-                  <a:srgbClr val="000000"/>
-                </a:solidFill>
-                <a:latin typeface="Play"/>
-                <a:ea typeface="Play"/>
-                <a:cs typeface="Play"/>
-              </a:defRPr>
-            </a:pPr>
-            <a:r>
-              <a:rPr sz="2400">
-                <a:solidFill>
-                  <a:srgbClr val="000000"/>
-                </a:solidFill>
-                <a:latin typeface="Play"/>
-                <a:ea typeface="Play"/>
-                <a:cs typeface="Play"/>
-              </a:rPr>
-              <a:t>• Генерирует колоду по дизайн-системе и аудиту</a:t>
-            </a:r>
-          </a:p>
-          <a:p>
-            <a:pPr algn="l">
-              <a:spcAft>
-                <a:spcPts val="300"/>
-              </a:spcAft>
-              <a:defRPr sz="2400">
-                <a:solidFill>
-                  <a:srgbClr val="000000"/>
-                </a:solidFill>
-                <a:latin typeface="Play"/>
-                <a:ea typeface="Play"/>
-                <a:cs typeface="Play"/>
-              </a:defRPr>
-            </a:pPr>
-            <a:r>
-              <a:rPr sz="2400">
-                <a:solidFill>
-                  <a:srgbClr val="000000"/>
-                </a:solidFill>
-                <a:latin typeface="Play"/>
-                <a:ea typeface="Play"/>
-                <a:cs typeface="Play"/>
-              </a:rPr>
-              <a:t>• Экспорт в pptx, pdf, html с редактируемыми слайдами</a:t>
-            </a:r>
-          </a:p>
-        </p:txBody>
-      </p:sp>
-      <p:grpSp>
-        <p:nvGrpSpPr>
-          <p:cNvPr id="4" name="illustration:builtin-presentation"/>
-          <p:cNvGrpSpPr/>
-          <p:nvPr/>
-        </p:nvGrpSpPr>
-        <p:grpSpPr>
-          <a:xfrm>
-            <a:off x="7771509" y="2538008"/>
-            <a:ext cx="2907860" cy="2907860"/>
-            <a:chOff x="7771509" y="2538008"/>
-            <a:chExt cx="2907860" cy="2907860"/>
-          </a:xfrm>
-        </p:grpSpPr>
-        <p:sp>
-          <p:nvSpPr>
-            <p:cNvPr id="5" name="Oval 4"/>
-            <p:cNvSpPr/>
-            <p:nvPr/>
-          </p:nvSpPr>
-          <p:spPr>
-            <a:xfrm>
-              <a:off x="7771509" y="2538008"/>
-              <a:ext cx="2907860" cy="2907860"/>
-            </a:xfrm>
-            <a:prstGeom prst="ellipse">
-              <a:avLst/>
-            </a:prstGeom>
-            <a:solidFill>
-              <a:srgbClr val="D6E9FF"/>
-            </a:solidFill>
-            <a:ln>
-              <a:noFill/>
-            </a:ln>
-            <a:effectLst/>
-          </p:spPr>
-          <p:style>
-            <a:lnRef idx="1">
-              <a:schemeClr val="accent1"/>
-            </a:lnRef>
-            <a:fillRef idx="3">
-              <a:schemeClr val="accent1"/>
-            </a:fillRef>
-            <a:effectRef idx="2">
-              <a:schemeClr val="accent1"/>
-            </a:effectRef>
-            <a:fontRef idx="minor">
-              <a:schemeClr val="lt1"/>
-            </a:fontRef>
-          </p:style>
-          <p:txBody>
-            <a:bodyPr rtlCol="0" anchor="ctr"/>
-            <a:lstStyle/>
-            <a:p>
-              <a:pPr algn="ctr"/>
-            </a:p>
-          </p:txBody>
-        </p:sp>
-        <p:sp>
-          <p:nvSpPr>
-            <p:cNvPr id="6" name="Rounded Rectangle 5"/>
-            <p:cNvSpPr/>
-            <p:nvPr/>
-          </p:nvSpPr>
-          <p:spPr>
-            <a:xfrm>
-              <a:off x="7886900" y="2930338"/>
-              <a:ext cx="2677078" cy="1730869"/>
-            </a:xfrm>
-            <a:prstGeom prst="roundRect">
-              <a:avLst>
-                <a:gd name="adj" fmla="val 9333"/>
-              </a:avLst>
-            </a:prstGeom>
-            <a:solidFill>
-              <a:srgbClr val="FFFFFF"/>
-            </a:solidFill>
-            <a:ln>
-              <a:noFill/>
-            </a:ln>
-            <a:effectLst/>
-          </p:spPr>
-          <p:style>
-            <a:lnRef idx="1">
-              <a:schemeClr val="accent1"/>
-            </a:lnRef>
-            <a:fillRef idx="3">
-              <a:schemeClr val="accent1"/>
-            </a:fillRef>
-            <a:effectRef idx="2">
-              <a:schemeClr val="accent1"/>
-            </a:effectRef>
-            <a:fontRef idx="minor">
-              <a:schemeClr val="lt1"/>
-            </a:fontRef>
-          </p:style>
-          <p:txBody>
-            <a:bodyPr rtlCol="0" anchor="ctr"/>
-            <a:lstStyle/>
-            <a:p>
-              <a:pPr algn="ctr"/>
-            </a:p>
-          </p:txBody>
-        </p:sp>
-        <p:sp>
-          <p:nvSpPr>
-            <p:cNvPr id="7" name="Rounded Rectangle 6"/>
-            <p:cNvSpPr/>
-            <p:nvPr/>
-          </p:nvSpPr>
-          <p:spPr>
-            <a:xfrm>
-              <a:off x="7886900" y="2930338"/>
-              <a:ext cx="2677078" cy="346173"/>
-            </a:xfrm>
-            <a:prstGeom prst="roundRect">
-              <a:avLst>
-                <a:gd name="adj" fmla="val 46666"/>
-              </a:avLst>
-            </a:prstGeom>
-            <a:solidFill>
-              <a:srgbClr val="0077FF"/>
-            </a:solidFill>
-            <a:ln>
-              <a:noFill/>
-            </a:ln>
-            <a:effectLst/>
-          </p:spPr>
-          <p:style>
-            <a:lnRef idx="1">
-              <a:schemeClr val="accent1"/>
-            </a:lnRef>
-            <a:fillRef idx="3">
-              <a:schemeClr val="accent1"/>
-            </a:fillRef>
-            <a:effectRef idx="2">
-              <a:schemeClr val="accent1"/>
-            </a:effectRef>
-            <a:fontRef idx="minor">
-              <a:schemeClr val="lt1"/>
-            </a:fontRef>
-          </p:style>
-          <p:txBody>
-            <a:bodyPr rtlCol="0" anchor="ctr"/>
-            <a:lstStyle/>
-            <a:p>
-              <a:pPr algn="ctr"/>
-            </a:p>
-          </p:txBody>
-        </p:sp>
-        <p:sp>
-          <p:nvSpPr>
-            <p:cNvPr id="8" name="Rectangle 7"/>
-            <p:cNvSpPr/>
-            <p:nvPr/>
-          </p:nvSpPr>
-          <p:spPr>
-            <a:xfrm>
-              <a:off x="7886900" y="3114964"/>
-              <a:ext cx="2677078" cy="161547"/>
-            </a:xfrm>
-            <a:prstGeom prst="rect">
-              <a:avLst/>
-            </a:prstGeom>
-            <a:solidFill>
-              <a:srgbClr val="0077FF"/>
-            </a:solidFill>
-            <a:ln>
-              <a:noFill/>
-            </a:ln>
-            <a:effectLst/>
-          </p:spPr>
-          <p:style>
-            <a:lnRef idx="1">
-              <a:schemeClr val="accent1"/>
-            </a:lnRef>
-            <a:fillRef idx="3">
-              <a:schemeClr val="accent1"/>
-            </a:fillRef>
-            <a:effectRef idx="2">
-              <a:schemeClr val="accent1"/>
-            </a:effectRef>
-            <a:fontRef idx="minor">
-              <a:schemeClr val="lt1"/>
-            </a:fontRef>
-          </p:style>
-          <p:txBody>
-            <a:bodyPr rtlCol="0" anchor="ctr"/>
-            <a:lstStyle/>
-            <a:p>
-              <a:pPr algn="ctr"/>
-            </a:p>
-          </p:txBody>
-        </p:sp>
-        <p:sp>
-          <p:nvSpPr>
-            <p:cNvPr id="9" name="Rounded Rectangle 8"/>
-            <p:cNvSpPr/>
-            <p:nvPr/>
-          </p:nvSpPr>
-          <p:spPr>
-            <a:xfrm>
-              <a:off x="8163840" y="3507295"/>
-              <a:ext cx="969286" cy="115391"/>
-            </a:xfrm>
-            <a:prstGeom prst="roundRect">
-              <a:avLst>
-                <a:gd name="adj" fmla="val 50000"/>
-              </a:avLst>
-            </a:prstGeom>
-            <a:solidFill>
-              <a:srgbClr val="000000"/>
-            </a:solidFill>
-            <a:ln>
-              <a:noFill/>
-            </a:ln>
-            <a:effectLst/>
-          </p:spPr>
-          <p:style>
-            <a:lnRef idx="1">
-              <a:schemeClr val="accent1"/>
-            </a:lnRef>
-            <a:fillRef idx="3">
-              <a:schemeClr val="accent1"/>
-            </a:fillRef>
-            <a:effectRef idx="2">
-              <a:schemeClr val="accent1"/>
-            </a:effectRef>
-            <a:fontRef idx="minor">
-              <a:schemeClr val="lt1"/>
-            </a:fontRef>
-          </p:style>
-          <p:txBody>
-            <a:bodyPr rtlCol="0" anchor="ctr"/>
-            <a:lstStyle/>
-            <a:p>
-              <a:pPr algn="ctr"/>
-            </a:p>
-          </p:txBody>
-        </p:sp>
-        <p:sp>
-          <p:nvSpPr>
-            <p:cNvPr id="10" name="Rounded Rectangle 9"/>
-            <p:cNvSpPr/>
-            <p:nvPr/>
-          </p:nvSpPr>
-          <p:spPr>
-            <a:xfrm>
-              <a:off x="8163840" y="3738077"/>
-              <a:ext cx="738504" cy="92313"/>
-            </a:xfrm>
-            <a:prstGeom prst="roundRect">
-              <a:avLst>
-                <a:gd name="adj" fmla="val 50000"/>
-              </a:avLst>
-            </a:prstGeom>
-            <a:solidFill>
-              <a:srgbClr val="B2B2B2"/>
-            </a:solidFill>
-            <a:ln>
-              <a:noFill/>
-            </a:ln>
-            <a:effectLst/>
-          </p:spPr>
-          <p:style>
-            <a:lnRef idx="1">
-              <a:schemeClr val="accent1"/>
-            </a:lnRef>
-            <a:fillRef idx="3">
-              <a:schemeClr val="accent1"/>
-            </a:fillRef>
-            <a:effectRef idx="2">
-              <a:schemeClr val="accent1"/>
-            </a:effectRef>
-            <a:fontRef idx="minor">
-              <a:schemeClr val="lt1"/>
-            </a:fontRef>
-          </p:style>
-          <p:txBody>
-            <a:bodyPr rtlCol="0" anchor="ctr"/>
-            <a:lstStyle/>
-            <a:p>
-              <a:pPr algn="ctr"/>
-            </a:p>
-          </p:txBody>
-        </p:sp>
-        <p:sp>
-          <p:nvSpPr>
-            <p:cNvPr id="11" name="Rounded Rectangle 10"/>
-            <p:cNvSpPr/>
-            <p:nvPr/>
-          </p:nvSpPr>
-          <p:spPr>
-            <a:xfrm>
-              <a:off x="8163840" y="3922703"/>
-              <a:ext cx="853895" cy="92313"/>
-            </a:xfrm>
-            <a:prstGeom prst="roundRect">
-              <a:avLst>
-                <a:gd name="adj" fmla="val 50000"/>
-              </a:avLst>
-            </a:prstGeom>
-            <a:solidFill>
-              <a:srgbClr val="B2B2B2"/>
-            </a:solidFill>
-            <a:ln>
-              <a:noFill/>
-            </a:ln>
-            <a:effectLst/>
-          </p:spPr>
-          <p:style>
-            <a:lnRef idx="1">
-              <a:schemeClr val="accent1"/>
-            </a:lnRef>
-            <a:fillRef idx="3">
-              <a:schemeClr val="accent1"/>
-            </a:fillRef>
-            <a:effectRef idx="2">
-              <a:schemeClr val="accent1"/>
-            </a:effectRef>
-            <a:fontRef idx="minor">
-              <a:schemeClr val="lt1"/>
-            </a:fontRef>
-          </p:style>
-          <p:txBody>
-            <a:bodyPr rtlCol="0" anchor="ctr"/>
-            <a:lstStyle/>
-            <a:p>
-              <a:pPr algn="ctr"/>
-            </a:p>
-          </p:txBody>
-        </p:sp>
-        <p:sp>
-          <p:nvSpPr>
-            <p:cNvPr id="12" name="Rounded Rectangle 11"/>
-            <p:cNvSpPr/>
-            <p:nvPr/>
-          </p:nvSpPr>
-          <p:spPr>
-            <a:xfrm>
-              <a:off x="8163840" y="4107329"/>
-              <a:ext cx="646191" cy="92313"/>
-            </a:xfrm>
-            <a:prstGeom prst="roundRect">
-              <a:avLst>
-                <a:gd name="adj" fmla="val 50000"/>
-              </a:avLst>
-            </a:prstGeom>
-            <a:solidFill>
-              <a:srgbClr val="B2B2B2"/>
-            </a:solidFill>
-            <a:ln>
-              <a:noFill/>
-            </a:ln>
-            <a:effectLst/>
-          </p:spPr>
-          <p:style>
-            <a:lnRef idx="1">
-              <a:schemeClr val="accent1"/>
-            </a:lnRef>
-            <a:fillRef idx="3">
-              <a:schemeClr val="accent1"/>
-            </a:fillRef>
-            <a:effectRef idx="2">
-              <a:schemeClr val="accent1"/>
-            </a:effectRef>
-            <a:fontRef idx="minor">
-              <a:schemeClr val="lt1"/>
-            </a:fontRef>
-          </p:style>
-          <p:txBody>
-            <a:bodyPr rtlCol="0" anchor="ctr"/>
-            <a:lstStyle/>
-            <a:p>
-              <a:pPr algn="ctr"/>
-            </a:p>
-          </p:txBody>
-        </p:sp>
-        <p:sp>
-          <p:nvSpPr>
-            <p:cNvPr id="13" name="Rounded Rectangle 12"/>
-            <p:cNvSpPr/>
-            <p:nvPr/>
-          </p:nvSpPr>
-          <p:spPr>
-            <a:xfrm>
-              <a:off x="9386987" y="3991938"/>
-              <a:ext cx="207704" cy="438486"/>
-            </a:xfrm>
-            <a:prstGeom prst="roundRect">
-              <a:avLst>
-                <a:gd name="adj" fmla="val 22222"/>
-              </a:avLst>
-            </a:prstGeom>
-            <a:solidFill>
-              <a:srgbClr val="B2B2B2"/>
-            </a:solidFill>
-            <a:ln>
-              <a:noFill/>
-            </a:ln>
-            <a:effectLst/>
-          </p:spPr>
-          <p:style>
-            <a:lnRef idx="1">
-              <a:schemeClr val="accent1"/>
-            </a:lnRef>
-            <a:fillRef idx="3">
-              <a:schemeClr val="accent1"/>
-            </a:fillRef>
-            <a:effectRef idx="2">
-              <a:schemeClr val="accent1"/>
-            </a:effectRef>
-            <a:fontRef idx="minor">
-              <a:schemeClr val="lt1"/>
-            </a:fontRef>
-          </p:style>
-          <p:txBody>
-            <a:bodyPr rtlCol="0" anchor="ctr"/>
-            <a:lstStyle/>
-            <a:p>
-              <a:pPr algn="ctr"/>
-            </a:p>
-          </p:txBody>
-        </p:sp>
-        <p:sp>
-          <p:nvSpPr>
-            <p:cNvPr id="14" name="Rounded Rectangle 13"/>
-            <p:cNvSpPr/>
-            <p:nvPr/>
-          </p:nvSpPr>
-          <p:spPr>
-            <a:xfrm>
-              <a:off x="9687005" y="3761155"/>
-              <a:ext cx="207704" cy="669269"/>
-            </a:xfrm>
-            <a:prstGeom prst="roundRect">
-              <a:avLst>
-                <a:gd name="adj" fmla="val 22222"/>
-              </a:avLst>
-            </a:prstGeom>
-            <a:solidFill>
-              <a:srgbClr val="FF3885"/>
-            </a:solidFill>
-            <a:ln>
-              <a:noFill/>
-            </a:ln>
-            <a:effectLst/>
-          </p:spPr>
-          <p:style>
-            <a:lnRef idx="1">
-              <a:schemeClr val="accent1"/>
-            </a:lnRef>
-            <a:fillRef idx="3">
-              <a:schemeClr val="accent1"/>
-            </a:fillRef>
-            <a:effectRef idx="2">
-              <a:schemeClr val="accent1"/>
-            </a:effectRef>
-            <a:fontRef idx="minor">
-              <a:schemeClr val="lt1"/>
-            </a:fontRef>
-          </p:style>
-          <p:txBody>
-            <a:bodyPr rtlCol="0" anchor="ctr"/>
-            <a:lstStyle/>
-            <a:p>
-              <a:pPr algn="ctr"/>
-            </a:p>
-          </p:txBody>
-        </p:sp>
-        <p:sp>
-          <p:nvSpPr>
-            <p:cNvPr id="15" name="Rounded Rectangle 14"/>
-            <p:cNvSpPr/>
-            <p:nvPr/>
-          </p:nvSpPr>
-          <p:spPr>
-            <a:xfrm>
-              <a:off x="9987022" y="3530373"/>
-              <a:ext cx="207704" cy="900052"/>
-            </a:xfrm>
-            <a:prstGeom prst="roundRect">
-              <a:avLst>
-                <a:gd name="adj" fmla="val 22222"/>
-              </a:avLst>
-            </a:prstGeom>
-            <a:solidFill>
-              <a:srgbClr val="0077FF"/>
-            </a:solidFill>
-            <a:ln>
-              <a:noFill/>
-            </a:ln>
-            <a:effectLst/>
-          </p:spPr>
-          <p:style>
-            <a:lnRef idx="1">
-              <a:schemeClr val="accent1"/>
-            </a:lnRef>
-            <a:fillRef idx="3">
-              <a:schemeClr val="accent1"/>
-            </a:fillRef>
-            <a:effectRef idx="2">
-              <a:schemeClr val="accent1"/>
-            </a:effectRef>
-            <a:fontRef idx="minor">
-              <a:schemeClr val="lt1"/>
-            </a:fontRef>
-          </p:style>
-          <p:txBody>
-            <a:bodyPr rtlCol="0" anchor="ctr"/>
-            <a:lstStyle/>
-            <a:p>
-              <a:pPr algn="ctr"/>
-            </a:p>
-          </p:txBody>
-        </p:sp>
-        <p:sp>
-          <p:nvSpPr>
-            <p:cNvPr id="16" name="Rectangle 15"/>
-            <p:cNvSpPr/>
-            <p:nvPr/>
-          </p:nvSpPr>
-          <p:spPr>
-            <a:xfrm>
-              <a:off x="9156205" y="4661208"/>
-              <a:ext cx="138469" cy="415408"/>
-            </a:xfrm>
-            <a:prstGeom prst="rect">
-              <a:avLst/>
-            </a:prstGeom>
-            <a:solidFill>
-              <a:srgbClr val="000000"/>
-            </a:solidFill>
-            <a:ln>
-              <a:noFill/>
-            </a:ln>
-            <a:effectLst/>
-          </p:spPr>
-          <p:style>
-            <a:lnRef idx="1">
-              <a:schemeClr val="accent1"/>
-            </a:lnRef>
-            <a:fillRef idx="3">
-              <a:schemeClr val="accent1"/>
-            </a:fillRef>
-            <a:effectRef idx="2">
-              <a:schemeClr val="accent1"/>
-            </a:effectRef>
-            <a:fontRef idx="minor">
-              <a:schemeClr val="lt1"/>
-            </a:fontRef>
-          </p:style>
-          <p:txBody>
-            <a:bodyPr rtlCol="0" anchor="ctr"/>
-            <a:lstStyle/>
-            <a:p>
-              <a:pPr algn="ctr"/>
-            </a:p>
-          </p:txBody>
-        </p:sp>
-        <p:sp>
-          <p:nvSpPr>
-            <p:cNvPr id="17" name="Rounded Rectangle 16"/>
-            <p:cNvSpPr/>
-            <p:nvPr/>
-          </p:nvSpPr>
-          <p:spPr>
-            <a:xfrm>
-              <a:off x="8648483" y="5030460"/>
-              <a:ext cx="1153913" cy="138469"/>
-            </a:xfrm>
-            <a:prstGeom prst="roundRect">
-              <a:avLst>
-                <a:gd name="adj" fmla="val 50000"/>
-              </a:avLst>
-            </a:prstGeom>
-            <a:solidFill>
-              <a:srgbClr val="000000"/>
-            </a:solidFill>
-            <a:ln>
-              <a:noFill/>
-            </a:ln>
-            <a:effectLst/>
-          </p:spPr>
-          <p:style>
-            <a:lnRef idx="1">
-              <a:schemeClr val="accent1"/>
-            </a:lnRef>
-            <a:fillRef idx="3">
-              <a:schemeClr val="accent1"/>
-            </a:fillRef>
-            <a:effectRef idx="2">
-              <a:schemeClr val="accent1"/>
-            </a:effectRef>
-            <a:fontRef idx="minor">
-              <a:schemeClr val="lt1"/>
-            </a:fontRef>
-          </p:style>
-          <p:txBody>
-            <a:bodyPr rtlCol="0" anchor="ctr"/>
-            <a:lstStyle/>
-            <a:p>
-              <a:pPr algn="ctr"/>
-            </a:p>
-          </p:txBody>
-        </p:sp>
-      </p:grpSp>
-    </p:spTree>
-  </p:cSld>
-  <p:clrMapOvr>
-    <a:masterClrMapping/>
-  </p:clrMapOvr>
-</p:sld>
-</file>
-
-<file path=ppt/slides/slide59.xml><?xml version="1.0" encoding="utf-8"?>
-<p:sld xmlns:a="http://schemas.openxmlformats.org/drawingml/2006/main" xmlns:p="http://schemas.openxmlformats.org/presentationml/2006/main" xmlns:r="http://schemas.openxmlformats.org/officeDocument/2006/relationships">
-  <p:cSld>
-    <p:bg>
-      <p:bgPr>
-        <a:solidFill>
-          <a:schemeClr val="lt2"/>
-        </a:solidFill>
-      </p:bgPr>
-    </p:bg>
-    <p:spTree>
-      <p:nvGrpSpPr>
-        <p:cNvPr id="1" name=""/>
-        <p:cNvGrpSpPr/>
-        <p:nvPr/>
-      </p:nvGrpSpPr>
-      <p:grpSpPr/>
-      <p:sp>
-        <p:nvSpPr>
-          <p:cNvPr id="2" name="title"/>
-          <p:cNvSpPr txBox="1"/>
-          <p:nvPr/>
-        </p:nvSpPr>
-        <p:spPr>
-          <a:xfrm>
-            <a:off x="677387" y="692177"/>
-            <a:ext cx="10855878" cy="822960"/>
-          </a:xfrm>
-          <a:prstGeom prst="rect">
-            <a:avLst/>
-          </a:prstGeom>
-          <a:noFill/>
-        </p:spPr>
-        <p:txBody>
-          <a:bodyPr wrap="square" lIns="76200" rIns="76200" tIns="50800" bIns="50800">
-            <a:spAutoFit/>
-          </a:bodyPr>
-          <a:lstStyle/>
-          <a:p>
-            <a:pPr algn="l">
-              <a:spcAft>
-                <a:spcPts val="300"/>
-              </a:spcAft>
-              <a:defRPr sz="4000">
-                <a:solidFill>
-                  <a:srgbClr val="000000"/>
-                </a:solidFill>
-                <a:latin typeface="Arial"/>
-                <a:ea typeface="Arial"/>
-                <a:cs typeface="Arial"/>
-              </a:defRPr>
-            </a:pPr>
-            <a:r>
-              <a:rPr sz="4000">
-                <a:solidFill>
-                  <a:srgbClr val="000000"/>
-                </a:solidFill>
-                <a:latin typeface="Arial"/>
-                <a:ea typeface="Arial"/>
-                <a:cs typeface="Arial"/>
-              </a:rPr>
-              <a:t>Ожидаемый эффект</a:t>
-            </a:r>
-          </a:p>
-        </p:txBody>
-      </p:sp>
-      <p:sp>
-        <p:nvSpPr>
-          <p:cNvPr id="3" name="body"/>
-          <p:cNvSpPr txBox="1"/>
-          <p:nvPr/>
-        </p:nvSpPr>
-        <p:spPr>
-          <a:xfrm>
-            <a:off x="677387" y="1783080"/>
-            <a:ext cx="5245059" cy="4417717"/>
-          </a:xfrm>
-          <a:prstGeom prst="rect">
-            <a:avLst/>
-          </a:prstGeom>
-          <a:noFill/>
-        </p:spPr>
-        <p:txBody>
-          <a:bodyPr wrap="square" lIns="76200" rIns="76200" tIns="50800" bIns="50800">
-            <a:spAutoFit/>
-          </a:bodyPr>
-          <a:lstStyle/>
-          <a:p>
-            <a:pPr algn="l">
-              <a:spcAft>
-                <a:spcPts val="300"/>
-              </a:spcAft>
-              <a:defRPr sz="1600">
-                <a:solidFill>
-                  <a:srgbClr val="000000"/>
-                </a:solidFill>
-                <a:latin typeface="Play"/>
-                <a:ea typeface="Play"/>
-                <a:cs typeface="Play"/>
-              </a:defRPr>
-            </a:pPr>
-            <a:r>
-              <a:rPr sz="1600">
-                <a:solidFill>
-                  <a:srgbClr val="000000"/>
-                </a:solidFill>
-                <a:latin typeface="Play"/>
-                <a:ea typeface="Play"/>
-                <a:cs typeface="Play"/>
-              </a:rPr>
-              <a:t>• Сборка колоды 4 мин вместо 186</a:t>
-            </a:r>
-          </a:p>
-          <a:p>
-            <a:pPr algn="l">
-              <a:spcAft>
-                <a:spcPts val="300"/>
-              </a:spcAft>
-              <a:defRPr sz="1600">
-                <a:solidFill>
-                  <a:srgbClr val="000000"/>
-                </a:solidFill>
-                <a:latin typeface="Play"/>
-                <a:ea typeface="Play"/>
-                <a:cs typeface="Play"/>
-              </a:defRPr>
-            </a:pPr>
-            <a:r>
-              <a:rPr sz="1600">
-                <a:solidFill>
-                  <a:srgbClr val="000000"/>
-                </a:solidFill>
-                <a:latin typeface="Play"/>
-                <a:ea typeface="Play"/>
-                <a:cs typeface="Play"/>
-              </a:rPr>
-              <a:t>• Время до первой версии сократилось с 6 дней до 1</a:t>
-            </a:r>
-          </a:p>
-          <a:p>
-            <a:pPr algn="l">
-              <a:spcAft>
-                <a:spcPts val="300"/>
-              </a:spcAft>
-              <a:defRPr sz="1600">
-                <a:solidFill>
-                  <a:srgbClr val="000000"/>
-                </a:solidFill>
-                <a:latin typeface="Play"/>
-                <a:ea typeface="Play"/>
-                <a:cs typeface="Play"/>
-              </a:defRPr>
-            </a:pPr>
-            <a:r>
-              <a:rPr sz="1600">
-                <a:solidFill>
-                  <a:srgbClr val="000000"/>
-                </a:solidFill>
-                <a:latin typeface="Play"/>
-                <a:ea typeface="Play"/>
-                <a:cs typeface="Play"/>
-              </a:rPr>
-              <a:t>• Нарушений стиля 2 из 68 колод</a:t>
-            </a:r>
-          </a:p>
-          <a:p>
-            <a:pPr algn="l">
-              <a:spcAft>
-                <a:spcPts val="300"/>
-              </a:spcAft>
-              <a:defRPr sz="1600">
-                <a:solidFill>
-                  <a:srgbClr val="000000"/>
-                </a:solidFill>
-                <a:latin typeface="Play"/>
-                <a:ea typeface="Play"/>
-                <a:cs typeface="Play"/>
-              </a:defRPr>
-            </a:pPr>
-            <a:r>
-              <a:rPr sz="1600">
-                <a:solidFill>
-                  <a:srgbClr val="000000"/>
-                </a:solidFill>
-                <a:latin typeface="Play"/>
-                <a:ea typeface="Play"/>
-                <a:cs typeface="Play"/>
-              </a:rPr>
-              <a:t>• Дизайнеры закрыли 38 запросов вместо 11 в неделю</a:t>
-            </a:r>
-          </a:p>
-        </p:txBody>
-      </p:sp>
-      <p:graphicFrame>
-        <p:nvGraphicFramePr>
-          <p:cNvPr id="4" name="Chart 3"/>
-          <p:cNvGraphicFramePr>
-            <a:graphicFrameLocks noGrp="1"/>
-          </p:cNvGraphicFramePr>
-          <p:nvPr/>
-        </p:nvGraphicFramePr>
-        <p:xfrm>
-          <a:off x="6288206" y="1783080"/>
-          <a:ext cx="5245059" cy="4417717"/>
-        </p:xfrm>
-        <a:graphic>
-          <a:graphicData uri="http://schemas.openxmlformats.org/drawingml/2006/chart">
-            <c:chart xmlns:c="http://schemas.openxmlformats.org/drawingml/2006/chart" r:id="rId2"/>
-          </a:graphicData>
-        </a:graphic>
-      </p:graphicFrame>
-    </p:spTree>
-  </p:cSld>
-  <p:clrMapOvr>
-    <a:masterClrMapping/>
-  </p:clrMapOvr>
-</p:sld>
-</file>
-
-<file path=ppt/slides/slide60.xml><?xml version="1.0" encoding="utf-8"?>
-<p:sld xmlns:a="http://schemas.openxmlformats.org/drawingml/2006/main" xmlns:p="http://schemas.openxmlformats.org/presentationml/2006/main" xmlns:r="http://schemas.openxmlformats.org/officeDocument/2006/relationships">
-  <p:cSld>
-    <p:spTree>
-      <p:nvGrpSpPr>
-        <p:cNvPr id="1" name=""/>
-        <p:cNvGrpSpPr/>
-        <p:nvPr/>
-      </p:nvGrpSpPr>
-      <p:grpSpPr/>
-      <p:sp>
-        <p:nvSpPr>
-          <p:cNvPr id="2" name="title"/>
-          <p:cNvSpPr txBox="1"/>
-          <p:nvPr/>
-        </p:nvSpPr>
-        <p:spPr>
-          <a:xfrm>
-            <a:off x="677387" y="692177"/>
-            <a:ext cx="10855878" cy="822960"/>
-          </a:xfrm>
-          <a:prstGeom prst="rect">
-            <a:avLst/>
-          </a:prstGeom>
-          <a:noFill/>
-        </p:spPr>
-        <p:txBody>
-          <a:bodyPr wrap="square" lIns="76200" rIns="76200" tIns="50800" bIns="50800">
-            <a:spAutoFit/>
-          </a:bodyPr>
-          <a:lstStyle/>
-          <a:p>
-            <a:pPr algn="l">
-              <a:spcAft>
-                <a:spcPts val="300"/>
-              </a:spcAft>
-              <a:defRPr sz="4000">
-                <a:solidFill>
-                  <a:srgbClr val="000000"/>
-                </a:solidFill>
-                <a:latin typeface="Arial"/>
-                <a:ea typeface="Arial"/>
-                <a:cs typeface="Arial"/>
-              </a:defRPr>
-            </a:pPr>
-            <a:r>
-              <a:rPr sz="4000">
-                <a:solidFill>
-                  <a:srgbClr val="000000"/>
-                </a:solidFill>
-                <a:latin typeface="Arial"/>
-                <a:ea typeface="Arial"/>
-                <a:cs typeface="Arial"/>
-              </a:rPr>
-              <a:t>Что потребуется: ресурсы и сроки</a:t>
+              <a:t>42 колоды за квартал 2026: 186 минут на сборку</a:t>
             </a:r>
           </a:p>
         </p:txBody>
@@ -11259,8 +9644,8 @@
         </p:nvSpPr>
         <p:spPr>
           <a:xfrm>
-            <a:off x="677387" y="1892808"/>
-            <a:ext cx="50800" cy="1678432"/>
+            <a:off x="677387" y="2489735"/>
+            <a:ext cx="50800" cy="1150112"/>
           </a:xfrm>
           <a:prstGeom prst="rect">
             <a:avLst/>
@@ -11303,8 +9688,8 @@
         </p:nvSpPr>
         <p:spPr>
           <a:xfrm>
-            <a:off x="855187" y="1783080"/>
-            <a:ext cx="5033021" cy="1788160"/>
+            <a:off x="855187" y="2380007"/>
+            <a:ext cx="5033021" cy="1259840"/>
           </a:xfrm>
           <a:prstGeom prst="rect">
             <a:avLst/>
@@ -11342,7 +9727,7 @@
                 <a:ea typeface="Play"/>
                 <a:cs typeface="Play"/>
               </a:rPr>
-              <a:t>2 vCPU</a:t>
+              <a:t>12</a:t>
             </a:r>
           </a:p>
           <a:p>
@@ -11350,7 +9735,7 @@
               <a:spcAft>
                 <a:spcPts val="300"/>
               </a:spcAft>
-              <a:defRPr sz="2800" b="0">
+              <a:defRPr sz="2400" b="0">
                 <a:solidFill>
                   <a:srgbClr val="000000"/>
                 </a:solidFill>
@@ -11360,7 +9745,7 @@
               </a:defRPr>
             </a:pPr>
             <a:r>
-              <a:rPr sz="2800" b="0">
+              <a:rPr sz="2400" b="0">
                 <a:solidFill>
                   <a:srgbClr val="000000"/>
                 </a:solidFill>
@@ -11368,7 +9753,7 @@
                 <a:ea typeface="Play"/>
                 <a:cs typeface="Play"/>
               </a:rPr>
-              <a:t>Сервис работает на 2 vCPU / 2 GB RAM</a:t>
+              <a:t>12 слайдов в каждой колоде</a:t>
             </a:r>
           </a:p>
         </p:txBody>
@@ -11381,8 +9766,8 @@
         </p:nvSpPr>
         <p:spPr>
           <a:xfrm>
-            <a:off x="6322444" y="1892808"/>
-            <a:ext cx="50800" cy="1678432"/>
+            <a:off x="6322444" y="2489735"/>
+            <a:ext cx="50800" cy="1150112"/>
           </a:xfrm>
           <a:prstGeom prst="rect">
             <a:avLst/>
@@ -11425,8 +9810,8 @@
         </p:nvSpPr>
         <p:spPr>
           <a:xfrm>
-            <a:off x="6500244" y="1783080"/>
-            <a:ext cx="5033021" cy="1788160"/>
+            <a:off x="6500244" y="2380007"/>
+            <a:ext cx="5033021" cy="1259840"/>
           </a:xfrm>
           <a:prstGeom prst="rect">
             <a:avLst/>
@@ -11464,7 +9849,7 @@
                 <a:ea typeface="Play"/>
                 <a:cs typeface="Play"/>
               </a:rPr>
-              <a:t>6 нед.</a:t>
+              <a:t>74 мин</a:t>
             </a:r>
           </a:p>
           <a:p>
@@ -11472,7 +9857,7 @@
               <a:spcAft>
                 <a:spcPts val="300"/>
               </a:spcAft>
-              <a:defRPr sz="2800" b="0">
+              <a:defRPr sz="2400" b="0">
                 <a:solidFill>
                   <a:srgbClr val="000000"/>
                 </a:solidFill>
@@ -11482,7 +9867,7 @@
               </a:defRPr>
             </a:pPr>
             <a:r>
-              <a:rPr sz="2800" b="0">
+              <a:rPr sz="2400" b="0">
                 <a:solidFill>
                   <a:srgbClr val="000000"/>
                 </a:solidFill>
@@ -11490,7 +9875,7 @@
                 <a:ea typeface="Play"/>
                 <a:cs typeface="Play"/>
               </a:rPr>
-              <a:t>Инференс за 6 недель пилота стоит 1 400 руб</a:t>
+              <a:t>74 минуты на правки</a:t>
             </a:r>
           </a:p>
         </p:txBody>
@@ -11503,8 +9888,8 @@
         </p:nvSpPr>
         <p:spPr>
           <a:xfrm>
-            <a:off x="677387" y="4238826"/>
-            <a:ext cx="50800" cy="1678432"/>
+            <a:off x="677387" y="4537290"/>
+            <a:ext cx="50800" cy="1150112"/>
           </a:xfrm>
           <a:prstGeom prst="rect">
             <a:avLst/>
@@ -11547,8 +9932,8 @@
         </p:nvSpPr>
         <p:spPr>
           <a:xfrm>
-            <a:off x="855187" y="4129098"/>
-            <a:ext cx="5033021" cy="1788160"/>
+            <a:off x="855187" y="4427562"/>
+            <a:ext cx="5033021" cy="1259840"/>
           </a:xfrm>
           <a:prstGeom prst="rect">
             <a:avLst/>
@@ -11586,7 +9971,7 @@
                 <a:ea typeface="Play"/>
                 <a:cs typeface="Play"/>
               </a:rPr>
-              <a:t>20</a:t>
+              <a:t>19 из 42</a:t>
             </a:r>
           </a:p>
           <a:p>
@@ -11594,7 +9979,7 @@
               <a:spcAft>
                 <a:spcPts val="300"/>
               </a:spcAft>
-              <a:defRPr sz="2800" b="0">
+              <a:defRPr sz="2400" b="0">
                 <a:solidFill>
                   <a:srgbClr val="000000"/>
                 </a:solidFill>
@@ -11604,7 +9989,7 @@
               </a:defRPr>
             </a:pPr>
             <a:r>
-              <a:rPr sz="2800" b="0">
+              <a:rPr sz="2400" b="0">
                 <a:solidFill>
                   <a:srgbClr val="000000"/>
                 </a:solidFill>
@@ -11612,11 +9997,2130 @@
                 <a:ea typeface="Play"/>
                 <a:cs typeface="Play"/>
               </a:rPr>
-              <a:t>Нагрузка выше 20 задач требует внешней очереди</a:t>
+              <a:t>19 из 42 нарушили стиль</a:t>
             </a:r>
           </a:p>
         </p:txBody>
       </p:sp>
+      <p:sp>
+        <p:nvSpPr>
+          <p:cNvPr id="9" name="stat_3:bar"/>
+          <p:cNvSpPr/>
+          <p:nvPr/>
+        </p:nvSpPr>
+        <p:spPr>
+          <a:xfrm>
+            <a:off x="6322444" y="4537290"/>
+            <a:ext cx="50800" cy="1150112"/>
+          </a:xfrm>
+          <a:prstGeom prst="rect">
+            <a:avLst/>
+          </a:prstGeom>
+          <a:solidFill>
+            <a:srgbClr val="0077FF"/>
+          </a:solidFill>
+          <a:ln>
+            <a:noFill/>
+          </a:ln>
+          <a:effectLst/>
+        </p:spPr>
+        <p:style>
+          <a:lnRef idx="1">
+            <a:schemeClr val="accent1"/>
+          </a:lnRef>
+          <a:fillRef idx="3">
+            <a:schemeClr val="accent1"/>
+          </a:fillRef>
+          <a:effectRef idx="2">
+            <a:schemeClr val="accent1"/>
+          </a:effectRef>
+          <a:fontRef idx="minor">
+            <a:schemeClr val="lt1"/>
+          </a:fontRef>
+        </p:style>
+        <p:txBody>
+          <a:bodyPr rtlCol="0" anchor="ctr"/>
+          <a:lstStyle/>
+          <a:p>
+            <a:pPr algn="ctr"/>
+          </a:p>
+        </p:txBody>
+      </p:sp>
+      <p:sp>
+        <p:nvSpPr>
+          <p:cNvPr id="10" name="stat_3"/>
+          <p:cNvSpPr txBox="1"/>
+          <p:nvPr/>
+        </p:nvSpPr>
+        <p:spPr>
+          <a:xfrm>
+            <a:off x="6500244" y="4427562"/>
+            <a:ext cx="5033021" cy="1259840"/>
+          </a:xfrm>
+          <a:prstGeom prst="rect">
+            <a:avLst/>
+          </a:prstGeom>
+          <a:noFill/>
+        </p:spPr>
+        <p:txBody>
+          <a:bodyPr wrap="square" lIns="76200" rIns="76200" tIns="0" bIns="0">
+            <a:spAutoFit/>
+          </a:bodyPr>
+          <a:lstStyle/>
+          <a:p>
+            <a:pPr>
+              <a:lnSpc>
+                <a:spcPct val="100000"/>
+              </a:lnSpc>
+              <a:spcAft>
+                <a:spcPts val="200"/>
+              </a:spcAft>
+              <a:defRPr sz="4800" b="1">
+                <a:solidFill>
+                  <a:srgbClr val="0077FF"/>
+                </a:solidFill>
+                <a:latin typeface="Play"/>
+                <a:ea typeface="Play"/>
+                <a:cs typeface="Play"/>
+              </a:defRPr>
+            </a:pPr>
+            <a:r>
+              <a:rPr sz="4800" b="1">
+                <a:solidFill>
+                  <a:srgbClr val="0077FF"/>
+                </a:solidFill>
+                <a:latin typeface="Play"/>
+                <a:ea typeface="Play"/>
+                <a:cs typeface="Play"/>
+              </a:rPr>
+              <a:t>186 мин</a:t>
+            </a:r>
+          </a:p>
+          <a:p>
+            <a:pPr>
+              <a:spcAft>
+                <a:spcPts val="300"/>
+              </a:spcAft>
+              <a:defRPr sz="2400" b="0">
+                <a:solidFill>
+                  <a:srgbClr val="000000"/>
+                </a:solidFill>
+                <a:latin typeface="Play"/>
+                <a:ea typeface="Play"/>
+                <a:cs typeface="Play"/>
+              </a:defRPr>
+            </a:pPr>
+            <a:r>
+              <a:rPr sz="2400" b="0">
+                <a:solidFill>
+                  <a:srgbClr val="000000"/>
+                </a:solidFill>
+                <a:latin typeface="Play"/>
+                <a:ea typeface="Play"/>
+                <a:cs typeface="Play"/>
+              </a:rPr>
+              <a:t>Сборка 186 минут</a:t>
+            </a:r>
+          </a:p>
+        </p:txBody>
+      </p:sp>
+    </p:spTree>
+  </p:cSld>
+  <p:clrMapOvr>
+    <a:masterClrMapping/>
+  </p:clrMapOvr>
+</p:sld>
+</file>
+
+<file path=ppt/slides/slide58.xml><?xml version="1.0" encoding="utf-8"?>
+<p:sld xmlns:a="http://schemas.openxmlformats.org/drawingml/2006/main" xmlns:p="http://schemas.openxmlformats.org/presentationml/2006/main" xmlns:r="http://schemas.openxmlformats.org/officeDocument/2006/relationships">
+  <p:cSld>
+    <p:bg>
+      <p:bgPr>
+        <a:solidFill>
+          <a:schemeClr val="lt2"/>
+        </a:solidFill>
+      </p:bgPr>
+    </p:bg>
+    <p:spTree>
+      <p:nvGrpSpPr>
+        <p:cNvPr id="1" name=""/>
+        <p:cNvGrpSpPr/>
+        <p:nvPr/>
+      </p:nvGrpSpPr>
+      <p:grpSpPr/>
+      <p:sp>
+        <p:nvSpPr>
+          <p:cNvPr id="2" name="title"/>
+          <p:cNvSpPr txBox="1"/>
+          <p:nvPr/>
+        </p:nvSpPr>
+        <p:spPr>
+          <a:xfrm>
+            <a:off x="677387" y="692177"/>
+            <a:ext cx="10855878" cy="1447800"/>
+          </a:xfrm>
+          <a:prstGeom prst="rect">
+            <a:avLst/>
+          </a:prstGeom>
+          <a:noFill/>
+        </p:spPr>
+        <p:txBody>
+          <a:bodyPr wrap="square" lIns="76200" rIns="76200" tIns="50800" bIns="50800">
+            <a:spAutoFit/>
+          </a:bodyPr>
+          <a:lstStyle/>
+          <a:p>
+            <a:pPr algn="l">
+              <a:spcAft>
+                <a:spcPts val="300"/>
+              </a:spcAft>
+              <a:defRPr sz="4000">
+                <a:solidFill>
+                  <a:srgbClr val="000000"/>
+                </a:solidFill>
+                <a:latin typeface="Arial"/>
+                <a:ea typeface="Arial"/>
+                <a:cs typeface="Arial"/>
+              </a:defRPr>
+            </a:pPr>
+            <a:r>
+              <a:rPr sz="4000">
+                <a:solidFill>
+                  <a:srgbClr val="000000"/>
+                </a:solidFill>
+                <a:latin typeface="Arial"/>
+                <a:ea typeface="Arial"/>
+                <a:cs typeface="Arial"/>
+              </a:rPr>
+              <a:t>Дизайн-отдел из 4 человек обслуживает 11 запросов в неделю</a:t>
+            </a:r>
+          </a:p>
+        </p:txBody>
+      </p:sp>
+      <p:sp>
+        <p:nvSpPr>
+          <p:cNvPr id="3" name="stat_0:bar"/>
+          <p:cNvSpPr/>
+          <p:nvPr/>
+        </p:nvSpPr>
+        <p:spPr>
+          <a:xfrm>
+            <a:off x="677387" y="2489735"/>
+            <a:ext cx="50800" cy="1546352"/>
+          </a:xfrm>
+          <a:prstGeom prst="rect">
+            <a:avLst/>
+          </a:prstGeom>
+          <a:solidFill>
+            <a:srgbClr val="0077FF"/>
+          </a:solidFill>
+          <a:ln>
+            <a:noFill/>
+          </a:ln>
+          <a:effectLst/>
+        </p:spPr>
+        <p:style>
+          <a:lnRef idx="1">
+            <a:schemeClr val="accent1"/>
+          </a:lnRef>
+          <a:fillRef idx="3">
+            <a:schemeClr val="accent1"/>
+          </a:fillRef>
+          <a:effectRef idx="2">
+            <a:schemeClr val="accent1"/>
+          </a:effectRef>
+          <a:fontRef idx="minor">
+            <a:schemeClr val="lt1"/>
+          </a:fontRef>
+        </p:style>
+        <p:txBody>
+          <a:bodyPr rtlCol="0" anchor="ctr"/>
+          <a:lstStyle/>
+          <a:p>
+            <a:pPr algn="ctr"/>
+          </a:p>
+        </p:txBody>
+      </p:sp>
+      <p:sp>
+        <p:nvSpPr>
+          <p:cNvPr id="4" name="stat_0"/>
+          <p:cNvSpPr txBox="1"/>
+          <p:nvPr/>
+        </p:nvSpPr>
+        <p:spPr>
+          <a:xfrm>
+            <a:off x="855187" y="2380007"/>
+            <a:ext cx="5033021" cy="1656080"/>
+          </a:xfrm>
+          <a:prstGeom prst="rect">
+            <a:avLst/>
+          </a:prstGeom>
+          <a:noFill/>
+        </p:spPr>
+        <p:txBody>
+          <a:bodyPr wrap="square" lIns="76200" rIns="76200" tIns="0" bIns="0">
+            <a:spAutoFit/>
+          </a:bodyPr>
+          <a:lstStyle/>
+          <a:p>
+            <a:pPr>
+              <a:lnSpc>
+                <a:spcPct val="100000"/>
+              </a:lnSpc>
+              <a:spcAft>
+                <a:spcPts val="200"/>
+              </a:spcAft>
+              <a:defRPr sz="4800" b="1">
+                <a:solidFill>
+                  <a:srgbClr val="0077FF"/>
+                </a:solidFill>
+                <a:latin typeface="Play"/>
+                <a:ea typeface="Play"/>
+                <a:cs typeface="Play"/>
+              </a:defRPr>
+            </a:pPr>
+            <a:r>
+              <a:rPr sz="4800" b="1">
+                <a:solidFill>
+                  <a:srgbClr val="0077FF"/>
+                </a:solidFill>
+                <a:latin typeface="Play"/>
+                <a:ea typeface="Play"/>
+                <a:cs typeface="Play"/>
+              </a:rPr>
+              <a:t>11</a:t>
+            </a:r>
+          </a:p>
+          <a:p>
+            <a:pPr>
+              <a:spcAft>
+                <a:spcPts val="300"/>
+              </a:spcAft>
+              <a:defRPr sz="2400" b="0">
+                <a:solidFill>
+                  <a:srgbClr val="000000"/>
+                </a:solidFill>
+                <a:latin typeface="Play"/>
+                <a:ea typeface="Play"/>
+                <a:cs typeface="Play"/>
+              </a:defRPr>
+            </a:pPr>
+            <a:r>
+              <a:rPr sz="2400" b="0">
+                <a:solidFill>
+                  <a:srgbClr val="000000"/>
+                </a:solidFill>
+                <a:latin typeface="Play"/>
+                <a:ea typeface="Play"/>
+                <a:cs typeface="Play"/>
+              </a:rPr>
+              <a:t>4 человека обслуживают 11 запросов в неделю</a:t>
+            </a:r>
+          </a:p>
+        </p:txBody>
+      </p:sp>
+      <p:sp>
+        <p:nvSpPr>
+          <p:cNvPr id="5" name="stat_1:bar"/>
+          <p:cNvSpPr/>
+          <p:nvPr/>
+        </p:nvSpPr>
+        <p:spPr>
+          <a:xfrm>
+            <a:off x="6322444" y="2489735"/>
+            <a:ext cx="50800" cy="1150112"/>
+          </a:xfrm>
+          <a:prstGeom prst="rect">
+            <a:avLst/>
+          </a:prstGeom>
+          <a:solidFill>
+            <a:srgbClr val="0077FF"/>
+          </a:solidFill>
+          <a:ln>
+            <a:noFill/>
+          </a:ln>
+          <a:effectLst/>
+        </p:spPr>
+        <p:style>
+          <a:lnRef idx="1">
+            <a:schemeClr val="accent1"/>
+          </a:lnRef>
+          <a:fillRef idx="3">
+            <a:schemeClr val="accent1"/>
+          </a:fillRef>
+          <a:effectRef idx="2">
+            <a:schemeClr val="accent1"/>
+          </a:effectRef>
+          <a:fontRef idx="minor">
+            <a:schemeClr val="lt1"/>
+          </a:fontRef>
+        </p:style>
+        <p:txBody>
+          <a:bodyPr rtlCol="0" anchor="ctr"/>
+          <a:lstStyle/>
+          <a:p>
+            <a:pPr algn="ctr"/>
+          </a:p>
+        </p:txBody>
+      </p:sp>
+      <p:sp>
+        <p:nvSpPr>
+          <p:cNvPr id="6" name="stat_1"/>
+          <p:cNvSpPr txBox="1"/>
+          <p:nvPr/>
+        </p:nvSpPr>
+        <p:spPr>
+          <a:xfrm>
+            <a:off x="6500244" y="2380007"/>
+            <a:ext cx="5033021" cy="1259840"/>
+          </a:xfrm>
+          <a:prstGeom prst="rect">
+            <a:avLst/>
+          </a:prstGeom>
+          <a:noFill/>
+        </p:spPr>
+        <p:txBody>
+          <a:bodyPr wrap="square" lIns="76200" rIns="76200" tIns="0" bIns="0">
+            <a:spAutoFit/>
+          </a:bodyPr>
+          <a:lstStyle/>
+          <a:p>
+            <a:pPr>
+              <a:lnSpc>
+                <a:spcPct val="100000"/>
+              </a:lnSpc>
+              <a:spcAft>
+                <a:spcPts val="200"/>
+              </a:spcAft>
+              <a:defRPr sz="4800" b="1">
+                <a:solidFill>
+                  <a:srgbClr val="0077FF"/>
+                </a:solidFill>
+                <a:latin typeface="Play"/>
+                <a:ea typeface="Play"/>
+                <a:cs typeface="Play"/>
+              </a:defRPr>
+            </a:pPr>
+            <a:r>
+              <a:rPr sz="4800" b="1">
+                <a:solidFill>
+                  <a:srgbClr val="0077FF"/>
+                </a:solidFill>
+                <a:latin typeface="Play"/>
+                <a:ea typeface="Play"/>
+                <a:cs typeface="Play"/>
+              </a:rPr>
+              <a:t>27</a:t>
+            </a:r>
+          </a:p>
+          <a:p>
+            <a:pPr>
+              <a:spcAft>
+                <a:spcPts val="300"/>
+              </a:spcAft>
+              <a:defRPr sz="2400" b="0">
+                <a:solidFill>
+                  <a:srgbClr val="000000"/>
+                </a:solidFill>
+                <a:latin typeface="Play"/>
+                <a:ea typeface="Play"/>
+                <a:cs typeface="Play"/>
+              </a:defRPr>
+            </a:pPr>
+            <a:r>
+              <a:rPr sz="2400" b="0">
+                <a:solidFill>
+                  <a:srgbClr val="000000"/>
+                </a:solidFill>
+                <a:latin typeface="Play"/>
+                <a:ea typeface="Play"/>
+                <a:cs typeface="Play"/>
+              </a:rPr>
+              <a:t>27 поступающих запросов</a:t>
+            </a:r>
+          </a:p>
+        </p:txBody>
+      </p:sp>
+      <p:sp>
+        <p:nvSpPr>
+          <p:cNvPr id="7" name="stat_2:bar"/>
+          <p:cNvSpPr/>
+          <p:nvPr/>
+        </p:nvSpPr>
+        <p:spPr>
+          <a:xfrm>
+            <a:off x="677387" y="4537290"/>
+            <a:ext cx="50800" cy="1150112"/>
+          </a:xfrm>
+          <a:prstGeom prst="rect">
+            <a:avLst/>
+          </a:prstGeom>
+          <a:solidFill>
+            <a:srgbClr val="0077FF"/>
+          </a:solidFill>
+          <a:ln>
+            <a:noFill/>
+          </a:ln>
+          <a:effectLst/>
+        </p:spPr>
+        <p:style>
+          <a:lnRef idx="1">
+            <a:schemeClr val="accent1"/>
+          </a:lnRef>
+          <a:fillRef idx="3">
+            <a:schemeClr val="accent1"/>
+          </a:fillRef>
+          <a:effectRef idx="2">
+            <a:schemeClr val="accent1"/>
+          </a:effectRef>
+          <a:fontRef idx="minor">
+            <a:schemeClr val="lt1"/>
+          </a:fontRef>
+        </p:style>
+        <p:txBody>
+          <a:bodyPr rtlCol="0" anchor="ctr"/>
+          <a:lstStyle/>
+          <a:p>
+            <a:pPr algn="ctr"/>
+          </a:p>
+        </p:txBody>
+      </p:sp>
+      <p:sp>
+        <p:nvSpPr>
+          <p:cNvPr id="8" name="stat_2"/>
+          <p:cNvSpPr txBox="1"/>
+          <p:nvPr/>
+        </p:nvSpPr>
+        <p:spPr>
+          <a:xfrm>
+            <a:off x="855187" y="4427562"/>
+            <a:ext cx="5033021" cy="1259840"/>
+          </a:xfrm>
+          <a:prstGeom prst="rect">
+            <a:avLst/>
+          </a:prstGeom>
+          <a:noFill/>
+        </p:spPr>
+        <p:txBody>
+          <a:bodyPr wrap="square" lIns="76200" rIns="76200" tIns="0" bIns="0">
+            <a:spAutoFit/>
+          </a:bodyPr>
+          <a:lstStyle/>
+          <a:p>
+            <a:pPr>
+              <a:lnSpc>
+                <a:spcPct val="100000"/>
+              </a:lnSpc>
+              <a:spcAft>
+                <a:spcPts val="200"/>
+              </a:spcAft>
+              <a:defRPr sz="4800" b="1">
+                <a:solidFill>
+                  <a:srgbClr val="0077FF"/>
+                </a:solidFill>
+                <a:latin typeface="Play"/>
+                <a:ea typeface="Play"/>
+                <a:cs typeface="Play"/>
+              </a:defRPr>
+            </a:pPr>
+            <a:r>
+              <a:rPr sz="4800" b="1">
+                <a:solidFill>
+                  <a:srgbClr val="0077FF"/>
+                </a:solidFill>
+                <a:latin typeface="Play"/>
+                <a:ea typeface="Play"/>
+                <a:cs typeface="Play"/>
+              </a:rPr>
+              <a:t>6 дней</a:t>
+            </a:r>
+          </a:p>
+          <a:p>
+            <a:pPr>
+              <a:spcAft>
+                <a:spcPts val="300"/>
+              </a:spcAft>
+              <a:defRPr sz="2400" b="0">
+                <a:solidFill>
+                  <a:srgbClr val="000000"/>
+                </a:solidFill>
+                <a:latin typeface="Play"/>
+                <a:ea typeface="Play"/>
+                <a:cs typeface="Play"/>
+              </a:defRPr>
+            </a:pPr>
+            <a:r>
+              <a:rPr sz="2400" b="0">
+                <a:solidFill>
+                  <a:srgbClr val="000000"/>
+                </a:solidFill>
+                <a:latin typeface="Play"/>
+                <a:ea typeface="Play"/>
+                <a:cs typeface="Play"/>
+              </a:rPr>
+              <a:t>Средний срок ожидания 6 дней</a:t>
+            </a:r>
+          </a:p>
+        </p:txBody>
+      </p:sp>
+    </p:spTree>
+  </p:cSld>
+  <p:clrMapOvr>
+    <a:masterClrMapping/>
+  </p:clrMapOvr>
+</p:sld>
+</file>
+
+<file path=ppt/slides/slide59.xml><?xml version="1.0" encoding="utf-8"?>
+<p:sld xmlns:a="http://schemas.openxmlformats.org/drawingml/2006/main" xmlns:p="http://schemas.openxmlformats.org/presentationml/2006/main" xmlns:r="http://schemas.openxmlformats.org/officeDocument/2006/relationships">
+  <p:cSld>
+    <p:bg>
+      <p:bgPr>
+        <a:solidFill>
+          <a:schemeClr val="lt2"/>
+        </a:solidFill>
+      </p:bgPr>
+    </p:bg>
+    <p:spTree>
+      <p:nvGrpSpPr>
+        <p:cNvPr id="1" name=""/>
+        <p:cNvGrpSpPr/>
+        <p:nvPr/>
+      </p:nvGrpSpPr>
+      <p:grpSpPr/>
+      <p:sp>
+        <p:nvSpPr>
+          <p:cNvPr id="2" name="title"/>
+          <p:cNvSpPr txBox="1"/>
+          <p:nvPr/>
+        </p:nvSpPr>
+        <p:spPr>
+          <a:xfrm>
+            <a:off x="677387" y="692177"/>
+            <a:ext cx="10855878" cy="1447800"/>
+          </a:xfrm>
+          <a:prstGeom prst="rect">
+            <a:avLst/>
+          </a:prstGeom>
+          <a:noFill/>
+        </p:spPr>
+        <p:txBody>
+          <a:bodyPr wrap="square" lIns="76200" rIns="76200" tIns="50800" bIns="50800">
+            <a:spAutoFit/>
+          </a:bodyPr>
+          <a:lstStyle/>
+          <a:p>
+            <a:pPr algn="l">
+              <a:spcAft>
+                <a:spcPts val="300"/>
+              </a:spcAft>
+              <a:defRPr sz="4000">
+                <a:solidFill>
+                  <a:srgbClr val="000000"/>
+                </a:solidFill>
+                <a:latin typeface="Arial"/>
+                <a:ea typeface="Arial"/>
+                <a:cs typeface="Arial"/>
+              </a:defRPr>
+            </a:pPr>
+            <a:r>
+              <a:rPr sz="4000">
+                <a:solidFill>
+                  <a:srgbClr val="000000"/>
+                </a:solidFill>
+                <a:latin typeface="Arial"/>
+                <a:ea typeface="Arial"/>
+                <a:cs typeface="Arial"/>
+              </a:rPr>
+              <a:t>Сервис автоматической вёрстки: 4 минуты вместо 186</a:t>
+            </a:r>
+          </a:p>
+        </p:txBody>
+      </p:sp>
+      <p:sp>
+        <p:nvSpPr>
+          <p:cNvPr id="3" name="body"/>
+          <p:cNvSpPr txBox="1"/>
+          <p:nvPr/>
+        </p:nvSpPr>
+        <p:spPr>
+          <a:xfrm>
+            <a:off x="677387" y="3249002"/>
+            <a:ext cx="5874466" cy="2082800"/>
+          </a:xfrm>
+          <a:prstGeom prst="rect">
+            <a:avLst/>
+          </a:prstGeom>
+          <a:noFill/>
+        </p:spPr>
+        <p:txBody>
+          <a:bodyPr wrap="square" lIns="76200" rIns="76200" tIns="50800" bIns="50800">
+            <a:spAutoFit/>
+          </a:bodyPr>
+          <a:lstStyle/>
+          <a:p>
+            <a:pPr algn="l">
+              <a:spcAft>
+                <a:spcPts val="300"/>
+              </a:spcAft>
+              <a:defRPr sz="2400">
+                <a:solidFill>
+                  <a:srgbClr val="000000"/>
+                </a:solidFill>
+                <a:latin typeface="Play"/>
+                <a:ea typeface="Play"/>
+                <a:cs typeface="Play"/>
+              </a:defRPr>
+            </a:pPr>
+            <a:r>
+              <a:rPr sz="2400">
+                <a:solidFill>
+                  <a:srgbClr val="000000"/>
+                </a:solidFill>
+                <a:latin typeface="Play"/>
+                <a:ea typeface="Play"/>
+                <a:cs typeface="Play"/>
+              </a:rPr>
+              <a:t>• Принимает шаблон pptx и материалы</a:t>
+            </a:r>
+          </a:p>
+          <a:p>
+            <a:pPr algn="l">
+              <a:spcAft>
+                <a:spcPts val="300"/>
+              </a:spcAft>
+              <a:defRPr sz="2400">
+                <a:solidFill>
+                  <a:srgbClr val="000000"/>
+                </a:solidFill>
+                <a:latin typeface="Play"/>
+                <a:ea typeface="Play"/>
+                <a:cs typeface="Play"/>
+              </a:defRPr>
+            </a:pPr>
+            <a:r>
+              <a:rPr sz="2400">
+                <a:solidFill>
+                  <a:srgbClr val="000000"/>
+                </a:solidFill>
+                <a:latin typeface="Play"/>
+                <a:ea typeface="Play"/>
+                <a:cs typeface="Play"/>
+              </a:rPr>
+              <a:t>• Автоматически строит план колоды</a:t>
+            </a:r>
+          </a:p>
+          <a:p>
+            <a:pPr algn="l">
+              <a:spcAft>
+                <a:spcPts val="300"/>
+              </a:spcAft>
+              <a:defRPr sz="2400">
+                <a:solidFill>
+                  <a:srgbClr val="000000"/>
+                </a:solidFill>
+                <a:latin typeface="Play"/>
+                <a:ea typeface="Play"/>
+                <a:cs typeface="Play"/>
+              </a:defRPr>
+            </a:pPr>
+            <a:r>
+              <a:rPr sz="2400">
+                <a:solidFill>
+                  <a:srgbClr val="000000"/>
+                </a:solidFill>
+                <a:latin typeface="Play"/>
+                <a:ea typeface="Play"/>
+                <a:cs typeface="Play"/>
+              </a:rPr>
+              <a:t>• Встроенный аудит качества</a:t>
+            </a:r>
+          </a:p>
+          <a:p>
+            <a:pPr algn="l">
+              <a:spcAft>
+                <a:spcPts val="300"/>
+              </a:spcAft>
+              <a:defRPr sz="2400">
+                <a:solidFill>
+                  <a:srgbClr val="000000"/>
+                </a:solidFill>
+                <a:latin typeface="Play"/>
+                <a:ea typeface="Play"/>
+                <a:cs typeface="Play"/>
+              </a:defRPr>
+            </a:pPr>
+            <a:r>
+              <a:rPr sz="2400">
+                <a:solidFill>
+                  <a:srgbClr val="000000"/>
+                </a:solidFill>
+                <a:latin typeface="Play"/>
+                <a:ea typeface="Play"/>
+                <a:cs typeface="Play"/>
+              </a:rPr>
+              <a:t>• Экспорт в pptx, pdf, html</a:t>
+            </a:r>
+          </a:p>
+        </p:txBody>
+      </p:sp>
+      <p:grpSp>
+        <p:nvGrpSpPr>
+          <p:cNvPr id="4" name="illustration:builtin-presentation"/>
+          <p:cNvGrpSpPr/>
+          <p:nvPr/>
+        </p:nvGrpSpPr>
+        <p:grpSpPr>
+          <a:xfrm>
+            <a:off x="7771509" y="2836472"/>
+            <a:ext cx="2907860" cy="2907860"/>
+            <a:chOff x="7771509" y="2836472"/>
+            <a:chExt cx="2907860" cy="2907860"/>
+          </a:xfrm>
+        </p:grpSpPr>
+        <p:sp>
+          <p:nvSpPr>
+            <p:cNvPr id="5" name="Oval 4"/>
+            <p:cNvSpPr/>
+            <p:nvPr/>
+          </p:nvSpPr>
+          <p:spPr>
+            <a:xfrm>
+              <a:off x="7771509" y="2836472"/>
+              <a:ext cx="2907860" cy="2907860"/>
+            </a:xfrm>
+            <a:prstGeom prst="ellipse">
+              <a:avLst/>
+            </a:prstGeom>
+            <a:solidFill>
+              <a:srgbClr val="D6E9FF"/>
+            </a:solidFill>
+            <a:ln>
+              <a:noFill/>
+            </a:ln>
+            <a:effectLst/>
+          </p:spPr>
+          <p:style>
+            <a:lnRef idx="1">
+              <a:schemeClr val="accent1"/>
+            </a:lnRef>
+            <a:fillRef idx="3">
+              <a:schemeClr val="accent1"/>
+            </a:fillRef>
+            <a:effectRef idx="2">
+              <a:schemeClr val="accent1"/>
+            </a:effectRef>
+            <a:fontRef idx="minor">
+              <a:schemeClr val="lt1"/>
+            </a:fontRef>
+          </p:style>
+          <p:txBody>
+            <a:bodyPr rtlCol="0" anchor="ctr"/>
+            <a:lstStyle/>
+            <a:p>
+              <a:pPr algn="ctr"/>
+            </a:p>
+          </p:txBody>
+        </p:sp>
+        <p:sp>
+          <p:nvSpPr>
+            <p:cNvPr id="6" name="Rounded Rectangle 5"/>
+            <p:cNvSpPr/>
+            <p:nvPr/>
+          </p:nvSpPr>
+          <p:spPr>
+            <a:xfrm>
+              <a:off x="7886900" y="3228802"/>
+              <a:ext cx="2677078" cy="1730869"/>
+            </a:xfrm>
+            <a:prstGeom prst="roundRect">
+              <a:avLst>
+                <a:gd name="adj" fmla="val 9333"/>
+              </a:avLst>
+            </a:prstGeom>
+            <a:solidFill>
+              <a:srgbClr val="FFFFFF"/>
+            </a:solidFill>
+            <a:ln>
+              <a:noFill/>
+            </a:ln>
+            <a:effectLst/>
+          </p:spPr>
+          <p:style>
+            <a:lnRef idx="1">
+              <a:schemeClr val="accent1"/>
+            </a:lnRef>
+            <a:fillRef idx="3">
+              <a:schemeClr val="accent1"/>
+            </a:fillRef>
+            <a:effectRef idx="2">
+              <a:schemeClr val="accent1"/>
+            </a:effectRef>
+            <a:fontRef idx="minor">
+              <a:schemeClr val="lt1"/>
+            </a:fontRef>
+          </p:style>
+          <p:txBody>
+            <a:bodyPr rtlCol="0" anchor="ctr"/>
+            <a:lstStyle/>
+            <a:p>
+              <a:pPr algn="ctr"/>
+            </a:p>
+          </p:txBody>
+        </p:sp>
+        <p:sp>
+          <p:nvSpPr>
+            <p:cNvPr id="7" name="Rounded Rectangle 6"/>
+            <p:cNvSpPr/>
+            <p:nvPr/>
+          </p:nvSpPr>
+          <p:spPr>
+            <a:xfrm>
+              <a:off x="7886900" y="3228802"/>
+              <a:ext cx="2677078" cy="346173"/>
+            </a:xfrm>
+            <a:prstGeom prst="roundRect">
+              <a:avLst>
+                <a:gd name="adj" fmla="val 46666"/>
+              </a:avLst>
+            </a:prstGeom>
+            <a:solidFill>
+              <a:srgbClr val="0077FF"/>
+            </a:solidFill>
+            <a:ln>
+              <a:noFill/>
+            </a:ln>
+            <a:effectLst/>
+          </p:spPr>
+          <p:style>
+            <a:lnRef idx="1">
+              <a:schemeClr val="accent1"/>
+            </a:lnRef>
+            <a:fillRef idx="3">
+              <a:schemeClr val="accent1"/>
+            </a:fillRef>
+            <a:effectRef idx="2">
+              <a:schemeClr val="accent1"/>
+            </a:effectRef>
+            <a:fontRef idx="minor">
+              <a:schemeClr val="lt1"/>
+            </a:fontRef>
+          </p:style>
+          <p:txBody>
+            <a:bodyPr rtlCol="0" anchor="ctr"/>
+            <a:lstStyle/>
+            <a:p>
+              <a:pPr algn="ctr"/>
+            </a:p>
+          </p:txBody>
+        </p:sp>
+        <p:sp>
+          <p:nvSpPr>
+            <p:cNvPr id="8" name="Rectangle 7"/>
+            <p:cNvSpPr/>
+            <p:nvPr/>
+          </p:nvSpPr>
+          <p:spPr>
+            <a:xfrm>
+              <a:off x="7886900" y="3413428"/>
+              <a:ext cx="2677078" cy="161547"/>
+            </a:xfrm>
+            <a:prstGeom prst="rect">
+              <a:avLst/>
+            </a:prstGeom>
+            <a:solidFill>
+              <a:srgbClr val="0077FF"/>
+            </a:solidFill>
+            <a:ln>
+              <a:noFill/>
+            </a:ln>
+            <a:effectLst/>
+          </p:spPr>
+          <p:style>
+            <a:lnRef idx="1">
+              <a:schemeClr val="accent1"/>
+            </a:lnRef>
+            <a:fillRef idx="3">
+              <a:schemeClr val="accent1"/>
+            </a:fillRef>
+            <a:effectRef idx="2">
+              <a:schemeClr val="accent1"/>
+            </a:effectRef>
+            <a:fontRef idx="minor">
+              <a:schemeClr val="lt1"/>
+            </a:fontRef>
+          </p:style>
+          <p:txBody>
+            <a:bodyPr rtlCol="0" anchor="ctr"/>
+            <a:lstStyle/>
+            <a:p>
+              <a:pPr algn="ctr"/>
+            </a:p>
+          </p:txBody>
+        </p:sp>
+        <p:sp>
+          <p:nvSpPr>
+            <p:cNvPr id="9" name="Rounded Rectangle 8"/>
+            <p:cNvSpPr/>
+            <p:nvPr/>
+          </p:nvSpPr>
+          <p:spPr>
+            <a:xfrm>
+              <a:off x="8163840" y="3805759"/>
+              <a:ext cx="969286" cy="115391"/>
+            </a:xfrm>
+            <a:prstGeom prst="roundRect">
+              <a:avLst>
+                <a:gd name="adj" fmla="val 50000"/>
+              </a:avLst>
+            </a:prstGeom>
+            <a:solidFill>
+              <a:srgbClr val="000000"/>
+            </a:solidFill>
+            <a:ln>
+              <a:noFill/>
+            </a:ln>
+            <a:effectLst/>
+          </p:spPr>
+          <p:style>
+            <a:lnRef idx="1">
+              <a:schemeClr val="accent1"/>
+            </a:lnRef>
+            <a:fillRef idx="3">
+              <a:schemeClr val="accent1"/>
+            </a:fillRef>
+            <a:effectRef idx="2">
+              <a:schemeClr val="accent1"/>
+            </a:effectRef>
+            <a:fontRef idx="minor">
+              <a:schemeClr val="lt1"/>
+            </a:fontRef>
+          </p:style>
+          <p:txBody>
+            <a:bodyPr rtlCol="0" anchor="ctr"/>
+            <a:lstStyle/>
+            <a:p>
+              <a:pPr algn="ctr"/>
+            </a:p>
+          </p:txBody>
+        </p:sp>
+        <p:sp>
+          <p:nvSpPr>
+            <p:cNvPr id="10" name="Rounded Rectangle 9"/>
+            <p:cNvSpPr/>
+            <p:nvPr/>
+          </p:nvSpPr>
+          <p:spPr>
+            <a:xfrm>
+              <a:off x="8163840" y="4036541"/>
+              <a:ext cx="738504" cy="92313"/>
+            </a:xfrm>
+            <a:prstGeom prst="roundRect">
+              <a:avLst>
+                <a:gd name="adj" fmla="val 50000"/>
+              </a:avLst>
+            </a:prstGeom>
+            <a:solidFill>
+              <a:srgbClr val="B2B2B2"/>
+            </a:solidFill>
+            <a:ln>
+              <a:noFill/>
+            </a:ln>
+            <a:effectLst/>
+          </p:spPr>
+          <p:style>
+            <a:lnRef idx="1">
+              <a:schemeClr val="accent1"/>
+            </a:lnRef>
+            <a:fillRef idx="3">
+              <a:schemeClr val="accent1"/>
+            </a:fillRef>
+            <a:effectRef idx="2">
+              <a:schemeClr val="accent1"/>
+            </a:effectRef>
+            <a:fontRef idx="minor">
+              <a:schemeClr val="lt1"/>
+            </a:fontRef>
+          </p:style>
+          <p:txBody>
+            <a:bodyPr rtlCol="0" anchor="ctr"/>
+            <a:lstStyle/>
+            <a:p>
+              <a:pPr algn="ctr"/>
+            </a:p>
+          </p:txBody>
+        </p:sp>
+        <p:sp>
+          <p:nvSpPr>
+            <p:cNvPr id="11" name="Rounded Rectangle 10"/>
+            <p:cNvSpPr/>
+            <p:nvPr/>
+          </p:nvSpPr>
+          <p:spPr>
+            <a:xfrm>
+              <a:off x="8163840" y="4221167"/>
+              <a:ext cx="853895" cy="92313"/>
+            </a:xfrm>
+            <a:prstGeom prst="roundRect">
+              <a:avLst>
+                <a:gd name="adj" fmla="val 50000"/>
+              </a:avLst>
+            </a:prstGeom>
+            <a:solidFill>
+              <a:srgbClr val="B2B2B2"/>
+            </a:solidFill>
+            <a:ln>
+              <a:noFill/>
+            </a:ln>
+            <a:effectLst/>
+          </p:spPr>
+          <p:style>
+            <a:lnRef idx="1">
+              <a:schemeClr val="accent1"/>
+            </a:lnRef>
+            <a:fillRef idx="3">
+              <a:schemeClr val="accent1"/>
+            </a:fillRef>
+            <a:effectRef idx="2">
+              <a:schemeClr val="accent1"/>
+            </a:effectRef>
+            <a:fontRef idx="minor">
+              <a:schemeClr val="lt1"/>
+            </a:fontRef>
+          </p:style>
+          <p:txBody>
+            <a:bodyPr rtlCol="0" anchor="ctr"/>
+            <a:lstStyle/>
+            <a:p>
+              <a:pPr algn="ctr"/>
+            </a:p>
+          </p:txBody>
+        </p:sp>
+        <p:sp>
+          <p:nvSpPr>
+            <p:cNvPr id="12" name="Rounded Rectangle 11"/>
+            <p:cNvSpPr/>
+            <p:nvPr/>
+          </p:nvSpPr>
+          <p:spPr>
+            <a:xfrm>
+              <a:off x="8163840" y="4405793"/>
+              <a:ext cx="646191" cy="92313"/>
+            </a:xfrm>
+            <a:prstGeom prst="roundRect">
+              <a:avLst>
+                <a:gd name="adj" fmla="val 50000"/>
+              </a:avLst>
+            </a:prstGeom>
+            <a:solidFill>
+              <a:srgbClr val="B2B2B2"/>
+            </a:solidFill>
+            <a:ln>
+              <a:noFill/>
+            </a:ln>
+            <a:effectLst/>
+          </p:spPr>
+          <p:style>
+            <a:lnRef idx="1">
+              <a:schemeClr val="accent1"/>
+            </a:lnRef>
+            <a:fillRef idx="3">
+              <a:schemeClr val="accent1"/>
+            </a:fillRef>
+            <a:effectRef idx="2">
+              <a:schemeClr val="accent1"/>
+            </a:effectRef>
+            <a:fontRef idx="minor">
+              <a:schemeClr val="lt1"/>
+            </a:fontRef>
+          </p:style>
+          <p:txBody>
+            <a:bodyPr rtlCol="0" anchor="ctr"/>
+            <a:lstStyle/>
+            <a:p>
+              <a:pPr algn="ctr"/>
+            </a:p>
+          </p:txBody>
+        </p:sp>
+        <p:sp>
+          <p:nvSpPr>
+            <p:cNvPr id="13" name="Rounded Rectangle 12"/>
+            <p:cNvSpPr/>
+            <p:nvPr/>
+          </p:nvSpPr>
+          <p:spPr>
+            <a:xfrm>
+              <a:off x="9386987" y="4290402"/>
+              <a:ext cx="207704" cy="438486"/>
+            </a:xfrm>
+            <a:prstGeom prst="roundRect">
+              <a:avLst>
+                <a:gd name="adj" fmla="val 22222"/>
+              </a:avLst>
+            </a:prstGeom>
+            <a:solidFill>
+              <a:srgbClr val="B2B2B2"/>
+            </a:solidFill>
+            <a:ln>
+              <a:noFill/>
+            </a:ln>
+            <a:effectLst/>
+          </p:spPr>
+          <p:style>
+            <a:lnRef idx="1">
+              <a:schemeClr val="accent1"/>
+            </a:lnRef>
+            <a:fillRef idx="3">
+              <a:schemeClr val="accent1"/>
+            </a:fillRef>
+            <a:effectRef idx="2">
+              <a:schemeClr val="accent1"/>
+            </a:effectRef>
+            <a:fontRef idx="minor">
+              <a:schemeClr val="lt1"/>
+            </a:fontRef>
+          </p:style>
+          <p:txBody>
+            <a:bodyPr rtlCol="0" anchor="ctr"/>
+            <a:lstStyle/>
+            <a:p>
+              <a:pPr algn="ctr"/>
+            </a:p>
+          </p:txBody>
+        </p:sp>
+        <p:sp>
+          <p:nvSpPr>
+            <p:cNvPr id="14" name="Rounded Rectangle 13"/>
+            <p:cNvSpPr/>
+            <p:nvPr/>
+          </p:nvSpPr>
+          <p:spPr>
+            <a:xfrm>
+              <a:off x="9687005" y="4059619"/>
+              <a:ext cx="207704" cy="669269"/>
+            </a:xfrm>
+            <a:prstGeom prst="roundRect">
+              <a:avLst>
+                <a:gd name="adj" fmla="val 22222"/>
+              </a:avLst>
+            </a:prstGeom>
+            <a:solidFill>
+              <a:srgbClr val="FF3885"/>
+            </a:solidFill>
+            <a:ln>
+              <a:noFill/>
+            </a:ln>
+            <a:effectLst/>
+          </p:spPr>
+          <p:style>
+            <a:lnRef idx="1">
+              <a:schemeClr val="accent1"/>
+            </a:lnRef>
+            <a:fillRef idx="3">
+              <a:schemeClr val="accent1"/>
+            </a:fillRef>
+            <a:effectRef idx="2">
+              <a:schemeClr val="accent1"/>
+            </a:effectRef>
+            <a:fontRef idx="minor">
+              <a:schemeClr val="lt1"/>
+            </a:fontRef>
+          </p:style>
+          <p:txBody>
+            <a:bodyPr rtlCol="0" anchor="ctr"/>
+            <a:lstStyle/>
+            <a:p>
+              <a:pPr algn="ctr"/>
+            </a:p>
+          </p:txBody>
+        </p:sp>
+        <p:sp>
+          <p:nvSpPr>
+            <p:cNvPr id="15" name="Rounded Rectangle 14"/>
+            <p:cNvSpPr/>
+            <p:nvPr/>
+          </p:nvSpPr>
+          <p:spPr>
+            <a:xfrm>
+              <a:off x="9987022" y="3828837"/>
+              <a:ext cx="207704" cy="900052"/>
+            </a:xfrm>
+            <a:prstGeom prst="roundRect">
+              <a:avLst>
+                <a:gd name="adj" fmla="val 22222"/>
+              </a:avLst>
+            </a:prstGeom>
+            <a:solidFill>
+              <a:srgbClr val="0077FF"/>
+            </a:solidFill>
+            <a:ln>
+              <a:noFill/>
+            </a:ln>
+            <a:effectLst/>
+          </p:spPr>
+          <p:style>
+            <a:lnRef idx="1">
+              <a:schemeClr val="accent1"/>
+            </a:lnRef>
+            <a:fillRef idx="3">
+              <a:schemeClr val="accent1"/>
+            </a:fillRef>
+            <a:effectRef idx="2">
+              <a:schemeClr val="accent1"/>
+            </a:effectRef>
+            <a:fontRef idx="minor">
+              <a:schemeClr val="lt1"/>
+            </a:fontRef>
+          </p:style>
+          <p:txBody>
+            <a:bodyPr rtlCol="0" anchor="ctr"/>
+            <a:lstStyle/>
+            <a:p>
+              <a:pPr algn="ctr"/>
+            </a:p>
+          </p:txBody>
+        </p:sp>
+        <p:sp>
+          <p:nvSpPr>
+            <p:cNvPr id="16" name="Rectangle 15"/>
+            <p:cNvSpPr/>
+            <p:nvPr/>
+          </p:nvSpPr>
+          <p:spPr>
+            <a:xfrm>
+              <a:off x="9156205" y="4959672"/>
+              <a:ext cx="138469" cy="415408"/>
+            </a:xfrm>
+            <a:prstGeom prst="rect">
+              <a:avLst/>
+            </a:prstGeom>
+            <a:solidFill>
+              <a:srgbClr val="000000"/>
+            </a:solidFill>
+            <a:ln>
+              <a:noFill/>
+            </a:ln>
+            <a:effectLst/>
+          </p:spPr>
+          <p:style>
+            <a:lnRef idx="1">
+              <a:schemeClr val="accent1"/>
+            </a:lnRef>
+            <a:fillRef idx="3">
+              <a:schemeClr val="accent1"/>
+            </a:fillRef>
+            <a:effectRef idx="2">
+              <a:schemeClr val="accent1"/>
+            </a:effectRef>
+            <a:fontRef idx="minor">
+              <a:schemeClr val="lt1"/>
+            </a:fontRef>
+          </p:style>
+          <p:txBody>
+            <a:bodyPr rtlCol="0" anchor="ctr"/>
+            <a:lstStyle/>
+            <a:p>
+              <a:pPr algn="ctr"/>
+            </a:p>
+          </p:txBody>
+        </p:sp>
+        <p:sp>
+          <p:nvSpPr>
+            <p:cNvPr id="17" name="Rounded Rectangle 16"/>
+            <p:cNvSpPr/>
+            <p:nvPr/>
+          </p:nvSpPr>
+          <p:spPr>
+            <a:xfrm>
+              <a:off x="8648483" y="5328924"/>
+              <a:ext cx="1153913" cy="138469"/>
+            </a:xfrm>
+            <a:prstGeom prst="roundRect">
+              <a:avLst>
+                <a:gd name="adj" fmla="val 50000"/>
+              </a:avLst>
+            </a:prstGeom>
+            <a:solidFill>
+              <a:srgbClr val="000000"/>
+            </a:solidFill>
+            <a:ln>
+              <a:noFill/>
+            </a:ln>
+            <a:effectLst/>
+          </p:spPr>
+          <p:style>
+            <a:lnRef idx="1">
+              <a:schemeClr val="accent1"/>
+            </a:lnRef>
+            <a:fillRef idx="3">
+              <a:schemeClr val="accent1"/>
+            </a:fillRef>
+            <a:effectRef idx="2">
+              <a:schemeClr val="accent1"/>
+            </a:effectRef>
+            <a:fontRef idx="minor">
+              <a:schemeClr val="lt1"/>
+            </a:fontRef>
+          </p:style>
+          <p:txBody>
+            <a:bodyPr rtlCol="0" anchor="ctr"/>
+            <a:lstStyle/>
+            <a:p>
+              <a:pPr algn="ctr"/>
+            </a:p>
+          </p:txBody>
+        </p:sp>
+      </p:grpSp>
+    </p:spTree>
+  </p:cSld>
+  <p:clrMapOvr>
+    <a:masterClrMapping/>
+  </p:clrMapOvr>
+</p:sld>
+</file>
+
+<file path=ppt/slides/slide60.xml><?xml version="1.0" encoding="utf-8"?>
+<p:sld xmlns:a="http://schemas.openxmlformats.org/drawingml/2006/main" xmlns:p="http://schemas.openxmlformats.org/presentationml/2006/main" xmlns:r="http://schemas.openxmlformats.org/officeDocument/2006/relationships">
+  <p:cSld>
+    <p:spTree>
+      <p:nvGrpSpPr>
+        <p:cNvPr id="1" name=""/>
+        <p:cNvGrpSpPr/>
+        <p:nvPr/>
+      </p:nvGrpSpPr>
+      <p:grpSpPr/>
+      <p:sp>
+        <p:nvSpPr>
+          <p:cNvPr id="2" name="title"/>
+          <p:cNvSpPr txBox="1"/>
+          <p:nvPr/>
+        </p:nvSpPr>
+        <p:spPr>
+          <a:xfrm>
+            <a:off x="677387" y="692177"/>
+            <a:ext cx="10855878" cy="1447800"/>
+          </a:xfrm>
+          <a:prstGeom prst="rect">
+            <a:avLst/>
+          </a:prstGeom>
+          <a:noFill/>
+        </p:spPr>
+        <p:txBody>
+          <a:bodyPr wrap="square" lIns="76200" rIns="76200" tIns="50800" bIns="50800">
+            <a:spAutoFit/>
+          </a:bodyPr>
+          <a:lstStyle/>
+          <a:p>
+            <a:pPr algn="l">
+              <a:spcAft>
+                <a:spcPts val="300"/>
+              </a:spcAft>
+              <a:defRPr sz="4000">
+                <a:solidFill>
+                  <a:srgbClr val="000000"/>
+                </a:solidFill>
+                <a:latin typeface="Arial"/>
+                <a:ea typeface="Arial"/>
+                <a:cs typeface="Arial"/>
+              </a:defRPr>
+            </a:pPr>
+            <a:r>
+              <a:rPr sz="4000">
+                <a:solidFill>
+                  <a:srgbClr val="000000"/>
+                </a:solidFill>
+                <a:latin typeface="Arial"/>
+                <a:ea typeface="Arial"/>
+                <a:cs typeface="Arial"/>
+              </a:rPr>
+              <a:t>Слайды остаются редактируемыми без картинок</a:t>
+            </a:r>
+          </a:p>
+        </p:txBody>
+      </p:sp>
+      <p:sp>
+        <p:nvSpPr>
+          <p:cNvPr id="3" name="body"/>
+          <p:cNvSpPr txBox="1"/>
+          <p:nvPr/>
+        </p:nvSpPr>
+        <p:spPr>
+          <a:xfrm>
+            <a:off x="677387" y="3182962"/>
+            <a:ext cx="5874466" cy="2214880"/>
+          </a:xfrm>
+          <a:prstGeom prst="rect">
+            <a:avLst/>
+          </a:prstGeom>
+          <a:noFill/>
+        </p:spPr>
+        <p:txBody>
+          <a:bodyPr wrap="square" lIns="76200" rIns="76200" tIns="50800" bIns="50800">
+            <a:spAutoFit/>
+          </a:bodyPr>
+          <a:lstStyle/>
+          <a:p>
+            <a:pPr algn="l">
+              <a:spcAft>
+                <a:spcPts val="300"/>
+              </a:spcAft>
+              <a:defRPr sz="3200">
+                <a:solidFill>
+                  <a:srgbClr val="000000"/>
+                </a:solidFill>
+                <a:latin typeface="Play"/>
+                <a:ea typeface="Play"/>
+                <a:cs typeface="Play"/>
+              </a:defRPr>
+            </a:pPr>
+            <a:r>
+              <a:rPr sz="3200">
+                <a:solidFill>
+                  <a:srgbClr val="000000"/>
+                </a:solidFill>
+                <a:latin typeface="Play"/>
+                <a:ea typeface="Play"/>
+                <a:cs typeface="Play"/>
+              </a:rPr>
+              <a:t>• Нативные объекты, таблицы, диаграммы, фигуры</a:t>
+            </a:r>
+          </a:p>
+          <a:p>
+            <a:pPr algn="l">
+              <a:spcAft>
+                <a:spcPts val="300"/>
+              </a:spcAft>
+              <a:defRPr sz="3200">
+                <a:solidFill>
+                  <a:srgbClr val="000000"/>
+                </a:solidFill>
+                <a:latin typeface="Play"/>
+                <a:ea typeface="Play"/>
+                <a:cs typeface="Play"/>
+              </a:defRPr>
+            </a:pPr>
+            <a:r>
+              <a:rPr sz="3200">
+                <a:solidFill>
+                  <a:srgbClr val="000000"/>
+                </a:solidFill>
+                <a:latin typeface="Play"/>
+                <a:ea typeface="Play"/>
+                <a:cs typeface="Play"/>
+              </a:rPr>
+              <a:t>• Готовые страницы с ролями</a:t>
+            </a:r>
+          </a:p>
+        </p:txBody>
+      </p:sp>
+      <p:grpSp>
+        <p:nvGrpSpPr>
+          <p:cNvPr id="4" name="illustration:builtin-presentation"/>
+          <p:cNvGrpSpPr/>
+          <p:nvPr/>
+        </p:nvGrpSpPr>
+        <p:grpSpPr>
+          <a:xfrm>
+            <a:off x="7771509" y="2836472"/>
+            <a:ext cx="2907860" cy="2907860"/>
+            <a:chOff x="7771509" y="2836472"/>
+            <a:chExt cx="2907860" cy="2907860"/>
+          </a:xfrm>
+        </p:grpSpPr>
+        <p:sp>
+          <p:nvSpPr>
+            <p:cNvPr id="5" name="Oval 4"/>
+            <p:cNvSpPr/>
+            <p:nvPr/>
+          </p:nvSpPr>
+          <p:spPr>
+            <a:xfrm>
+              <a:off x="7771509" y="2836472"/>
+              <a:ext cx="2907860" cy="2907860"/>
+            </a:xfrm>
+            <a:prstGeom prst="ellipse">
+              <a:avLst/>
+            </a:prstGeom>
+            <a:solidFill>
+              <a:srgbClr val="D6E9FF"/>
+            </a:solidFill>
+            <a:ln>
+              <a:noFill/>
+            </a:ln>
+            <a:effectLst/>
+          </p:spPr>
+          <p:style>
+            <a:lnRef idx="1">
+              <a:schemeClr val="accent1"/>
+            </a:lnRef>
+            <a:fillRef idx="3">
+              <a:schemeClr val="accent1"/>
+            </a:fillRef>
+            <a:effectRef idx="2">
+              <a:schemeClr val="accent1"/>
+            </a:effectRef>
+            <a:fontRef idx="minor">
+              <a:schemeClr val="lt1"/>
+            </a:fontRef>
+          </p:style>
+          <p:txBody>
+            <a:bodyPr rtlCol="0" anchor="ctr"/>
+            <a:lstStyle/>
+            <a:p>
+              <a:pPr algn="ctr"/>
+            </a:p>
+          </p:txBody>
+        </p:sp>
+        <p:sp>
+          <p:nvSpPr>
+            <p:cNvPr id="6" name="Rounded Rectangle 5"/>
+            <p:cNvSpPr/>
+            <p:nvPr/>
+          </p:nvSpPr>
+          <p:spPr>
+            <a:xfrm>
+              <a:off x="7886900" y="3228802"/>
+              <a:ext cx="2677078" cy="1730869"/>
+            </a:xfrm>
+            <a:prstGeom prst="roundRect">
+              <a:avLst>
+                <a:gd name="adj" fmla="val 9333"/>
+              </a:avLst>
+            </a:prstGeom>
+            <a:solidFill>
+              <a:srgbClr val="FFFFFF"/>
+            </a:solidFill>
+            <a:ln>
+              <a:noFill/>
+            </a:ln>
+            <a:effectLst/>
+          </p:spPr>
+          <p:style>
+            <a:lnRef idx="1">
+              <a:schemeClr val="accent1"/>
+            </a:lnRef>
+            <a:fillRef idx="3">
+              <a:schemeClr val="accent1"/>
+            </a:fillRef>
+            <a:effectRef idx="2">
+              <a:schemeClr val="accent1"/>
+            </a:effectRef>
+            <a:fontRef idx="minor">
+              <a:schemeClr val="lt1"/>
+            </a:fontRef>
+          </p:style>
+          <p:txBody>
+            <a:bodyPr rtlCol="0" anchor="ctr"/>
+            <a:lstStyle/>
+            <a:p>
+              <a:pPr algn="ctr"/>
+            </a:p>
+          </p:txBody>
+        </p:sp>
+        <p:sp>
+          <p:nvSpPr>
+            <p:cNvPr id="7" name="Rounded Rectangle 6"/>
+            <p:cNvSpPr/>
+            <p:nvPr/>
+          </p:nvSpPr>
+          <p:spPr>
+            <a:xfrm>
+              <a:off x="7886900" y="3228802"/>
+              <a:ext cx="2677078" cy="346173"/>
+            </a:xfrm>
+            <a:prstGeom prst="roundRect">
+              <a:avLst>
+                <a:gd name="adj" fmla="val 46666"/>
+              </a:avLst>
+            </a:prstGeom>
+            <a:solidFill>
+              <a:srgbClr val="0077FF"/>
+            </a:solidFill>
+            <a:ln>
+              <a:noFill/>
+            </a:ln>
+            <a:effectLst/>
+          </p:spPr>
+          <p:style>
+            <a:lnRef idx="1">
+              <a:schemeClr val="accent1"/>
+            </a:lnRef>
+            <a:fillRef idx="3">
+              <a:schemeClr val="accent1"/>
+            </a:fillRef>
+            <a:effectRef idx="2">
+              <a:schemeClr val="accent1"/>
+            </a:effectRef>
+            <a:fontRef idx="minor">
+              <a:schemeClr val="lt1"/>
+            </a:fontRef>
+          </p:style>
+          <p:txBody>
+            <a:bodyPr rtlCol="0" anchor="ctr"/>
+            <a:lstStyle/>
+            <a:p>
+              <a:pPr algn="ctr"/>
+            </a:p>
+          </p:txBody>
+        </p:sp>
+        <p:sp>
+          <p:nvSpPr>
+            <p:cNvPr id="8" name="Rectangle 7"/>
+            <p:cNvSpPr/>
+            <p:nvPr/>
+          </p:nvSpPr>
+          <p:spPr>
+            <a:xfrm>
+              <a:off x="7886900" y="3413428"/>
+              <a:ext cx="2677078" cy="161547"/>
+            </a:xfrm>
+            <a:prstGeom prst="rect">
+              <a:avLst/>
+            </a:prstGeom>
+            <a:solidFill>
+              <a:srgbClr val="0077FF"/>
+            </a:solidFill>
+            <a:ln>
+              <a:noFill/>
+            </a:ln>
+            <a:effectLst/>
+          </p:spPr>
+          <p:style>
+            <a:lnRef idx="1">
+              <a:schemeClr val="accent1"/>
+            </a:lnRef>
+            <a:fillRef idx="3">
+              <a:schemeClr val="accent1"/>
+            </a:fillRef>
+            <a:effectRef idx="2">
+              <a:schemeClr val="accent1"/>
+            </a:effectRef>
+            <a:fontRef idx="minor">
+              <a:schemeClr val="lt1"/>
+            </a:fontRef>
+          </p:style>
+          <p:txBody>
+            <a:bodyPr rtlCol="0" anchor="ctr"/>
+            <a:lstStyle/>
+            <a:p>
+              <a:pPr algn="ctr"/>
+            </a:p>
+          </p:txBody>
+        </p:sp>
+        <p:sp>
+          <p:nvSpPr>
+            <p:cNvPr id="9" name="Rounded Rectangle 8"/>
+            <p:cNvSpPr/>
+            <p:nvPr/>
+          </p:nvSpPr>
+          <p:spPr>
+            <a:xfrm>
+              <a:off x="8163840" y="3805759"/>
+              <a:ext cx="969286" cy="115391"/>
+            </a:xfrm>
+            <a:prstGeom prst="roundRect">
+              <a:avLst>
+                <a:gd name="adj" fmla="val 50000"/>
+              </a:avLst>
+            </a:prstGeom>
+            <a:solidFill>
+              <a:srgbClr val="000000"/>
+            </a:solidFill>
+            <a:ln>
+              <a:noFill/>
+            </a:ln>
+            <a:effectLst/>
+          </p:spPr>
+          <p:style>
+            <a:lnRef idx="1">
+              <a:schemeClr val="accent1"/>
+            </a:lnRef>
+            <a:fillRef idx="3">
+              <a:schemeClr val="accent1"/>
+            </a:fillRef>
+            <a:effectRef idx="2">
+              <a:schemeClr val="accent1"/>
+            </a:effectRef>
+            <a:fontRef idx="minor">
+              <a:schemeClr val="lt1"/>
+            </a:fontRef>
+          </p:style>
+          <p:txBody>
+            <a:bodyPr rtlCol="0" anchor="ctr"/>
+            <a:lstStyle/>
+            <a:p>
+              <a:pPr algn="ctr"/>
+            </a:p>
+          </p:txBody>
+        </p:sp>
+        <p:sp>
+          <p:nvSpPr>
+            <p:cNvPr id="10" name="Rounded Rectangle 9"/>
+            <p:cNvSpPr/>
+            <p:nvPr/>
+          </p:nvSpPr>
+          <p:spPr>
+            <a:xfrm>
+              <a:off x="8163840" y="4036541"/>
+              <a:ext cx="738504" cy="92313"/>
+            </a:xfrm>
+            <a:prstGeom prst="roundRect">
+              <a:avLst>
+                <a:gd name="adj" fmla="val 50000"/>
+              </a:avLst>
+            </a:prstGeom>
+            <a:solidFill>
+              <a:srgbClr val="B2B2B2"/>
+            </a:solidFill>
+            <a:ln>
+              <a:noFill/>
+            </a:ln>
+            <a:effectLst/>
+          </p:spPr>
+          <p:style>
+            <a:lnRef idx="1">
+              <a:schemeClr val="accent1"/>
+            </a:lnRef>
+            <a:fillRef idx="3">
+              <a:schemeClr val="accent1"/>
+            </a:fillRef>
+            <a:effectRef idx="2">
+              <a:schemeClr val="accent1"/>
+            </a:effectRef>
+            <a:fontRef idx="minor">
+              <a:schemeClr val="lt1"/>
+            </a:fontRef>
+          </p:style>
+          <p:txBody>
+            <a:bodyPr rtlCol="0" anchor="ctr"/>
+            <a:lstStyle/>
+            <a:p>
+              <a:pPr algn="ctr"/>
+            </a:p>
+          </p:txBody>
+        </p:sp>
+        <p:sp>
+          <p:nvSpPr>
+            <p:cNvPr id="11" name="Rounded Rectangle 10"/>
+            <p:cNvSpPr/>
+            <p:nvPr/>
+          </p:nvSpPr>
+          <p:spPr>
+            <a:xfrm>
+              <a:off x="8163840" y="4221167"/>
+              <a:ext cx="853895" cy="92313"/>
+            </a:xfrm>
+            <a:prstGeom prst="roundRect">
+              <a:avLst>
+                <a:gd name="adj" fmla="val 50000"/>
+              </a:avLst>
+            </a:prstGeom>
+            <a:solidFill>
+              <a:srgbClr val="B2B2B2"/>
+            </a:solidFill>
+            <a:ln>
+              <a:noFill/>
+            </a:ln>
+            <a:effectLst/>
+          </p:spPr>
+          <p:style>
+            <a:lnRef idx="1">
+              <a:schemeClr val="accent1"/>
+            </a:lnRef>
+            <a:fillRef idx="3">
+              <a:schemeClr val="accent1"/>
+            </a:fillRef>
+            <a:effectRef idx="2">
+              <a:schemeClr val="accent1"/>
+            </a:effectRef>
+            <a:fontRef idx="minor">
+              <a:schemeClr val="lt1"/>
+            </a:fontRef>
+          </p:style>
+          <p:txBody>
+            <a:bodyPr rtlCol="0" anchor="ctr"/>
+            <a:lstStyle/>
+            <a:p>
+              <a:pPr algn="ctr"/>
+            </a:p>
+          </p:txBody>
+        </p:sp>
+        <p:sp>
+          <p:nvSpPr>
+            <p:cNvPr id="12" name="Rounded Rectangle 11"/>
+            <p:cNvSpPr/>
+            <p:nvPr/>
+          </p:nvSpPr>
+          <p:spPr>
+            <a:xfrm>
+              <a:off x="8163840" y="4405793"/>
+              <a:ext cx="646191" cy="92313"/>
+            </a:xfrm>
+            <a:prstGeom prst="roundRect">
+              <a:avLst>
+                <a:gd name="adj" fmla="val 50000"/>
+              </a:avLst>
+            </a:prstGeom>
+            <a:solidFill>
+              <a:srgbClr val="B2B2B2"/>
+            </a:solidFill>
+            <a:ln>
+              <a:noFill/>
+            </a:ln>
+            <a:effectLst/>
+          </p:spPr>
+          <p:style>
+            <a:lnRef idx="1">
+              <a:schemeClr val="accent1"/>
+            </a:lnRef>
+            <a:fillRef idx="3">
+              <a:schemeClr val="accent1"/>
+            </a:fillRef>
+            <a:effectRef idx="2">
+              <a:schemeClr val="accent1"/>
+            </a:effectRef>
+            <a:fontRef idx="minor">
+              <a:schemeClr val="lt1"/>
+            </a:fontRef>
+          </p:style>
+          <p:txBody>
+            <a:bodyPr rtlCol="0" anchor="ctr"/>
+            <a:lstStyle/>
+            <a:p>
+              <a:pPr algn="ctr"/>
+            </a:p>
+          </p:txBody>
+        </p:sp>
+        <p:sp>
+          <p:nvSpPr>
+            <p:cNvPr id="13" name="Rounded Rectangle 12"/>
+            <p:cNvSpPr/>
+            <p:nvPr/>
+          </p:nvSpPr>
+          <p:spPr>
+            <a:xfrm>
+              <a:off x="9386987" y="4290402"/>
+              <a:ext cx="207704" cy="438486"/>
+            </a:xfrm>
+            <a:prstGeom prst="roundRect">
+              <a:avLst>
+                <a:gd name="adj" fmla="val 22222"/>
+              </a:avLst>
+            </a:prstGeom>
+            <a:solidFill>
+              <a:srgbClr val="B2B2B2"/>
+            </a:solidFill>
+            <a:ln>
+              <a:noFill/>
+            </a:ln>
+            <a:effectLst/>
+          </p:spPr>
+          <p:style>
+            <a:lnRef idx="1">
+              <a:schemeClr val="accent1"/>
+            </a:lnRef>
+            <a:fillRef idx="3">
+              <a:schemeClr val="accent1"/>
+            </a:fillRef>
+            <a:effectRef idx="2">
+              <a:schemeClr val="accent1"/>
+            </a:effectRef>
+            <a:fontRef idx="minor">
+              <a:schemeClr val="lt1"/>
+            </a:fontRef>
+          </p:style>
+          <p:txBody>
+            <a:bodyPr rtlCol="0" anchor="ctr"/>
+            <a:lstStyle/>
+            <a:p>
+              <a:pPr algn="ctr"/>
+            </a:p>
+          </p:txBody>
+        </p:sp>
+        <p:sp>
+          <p:nvSpPr>
+            <p:cNvPr id="14" name="Rounded Rectangle 13"/>
+            <p:cNvSpPr/>
+            <p:nvPr/>
+          </p:nvSpPr>
+          <p:spPr>
+            <a:xfrm>
+              <a:off x="9687005" y="4059619"/>
+              <a:ext cx="207704" cy="669269"/>
+            </a:xfrm>
+            <a:prstGeom prst="roundRect">
+              <a:avLst>
+                <a:gd name="adj" fmla="val 22222"/>
+              </a:avLst>
+            </a:prstGeom>
+            <a:solidFill>
+              <a:srgbClr val="FF3885"/>
+            </a:solidFill>
+            <a:ln>
+              <a:noFill/>
+            </a:ln>
+            <a:effectLst/>
+          </p:spPr>
+          <p:style>
+            <a:lnRef idx="1">
+              <a:schemeClr val="accent1"/>
+            </a:lnRef>
+            <a:fillRef idx="3">
+              <a:schemeClr val="accent1"/>
+            </a:fillRef>
+            <a:effectRef idx="2">
+              <a:schemeClr val="accent1"/>
+            </a:effectRef>
+            <a:fontRef idx="minor">
+              <a:schemeClr val="lt1"/>
+            </a:fontRef>
+          </p:style>
+          <p:txBody>
+            <a:bodyPr rtlCol="0" anchor="ctr"/>
+            <a:lstStyle/>
+            <a:p>
+              <a:pPr algn="ctr"/>
+            </a:p>
+          </p:txBody>
+        </p:sp>
+        <p:sp>
+          <p:nvSpPr>
+            <p:cNvPr id="15" name="Rounded Rectangle 14"/>
+            <p:cNvSpPr/>
+            <p:nvPr/>
+          </p:nvSpPr>
+          <p:spPr>
+            <a:xfrm>
+              <a:off x="9987022" y="3828837"/>
+              <a:ext cx="207704" cy="900052"/>
+            </a:xfrm>
+            <a:prstGeom prst="roundRect">
+              <a:avLst>
+                <a:gd name="adj" fmla="val 22222"/>
+              </a:avLst>
+            </a:prstGeom>
+            <a:solidFill>
+              <a:srgbClr val="0077FF"/>
+            </a:solidFill>
+            <a:ln>
+              <a:noFill/>
+            </a:ln>
+            <a:effectLst/>
+          </p:spPr>
+          <p:style>
+            <a:lnRef idx="1">
+              <a:schemeClr val="accent1"/>
+            </a:lnRef>
+            <a:fillRef idx="3">
+              <a:schemeClr val="accent1"/>
+            </a:fillRef>
+            <a:effectRef idx="2">
+              <a:schemeClr val="accent1"/>
+            </a:effectRef>
+            <a:fontRef idx="minor">
+              <a:schemeClr val="lt1"/>
+            </a:fontRef>
+          </p:style>
+          <p:txBody>
+            <a:bodyPr rtlCol="0" anchor="ctr"/>
+            <a:lstStyle/>
+            <a:p>
+              <a:pPr algn="ctr"/>
+            </a:p>
+          </p:txBody>
+        </p:sp>
+        <p:sp>
+          <p:nvSpPr>
+            <p:cNvPr id="16" name="Rectangle 15"/>
+            <p:cNvSpPr/>
+            <p:nvPr/>
+          </p:nvSpPr>
+          <p:spPr>
+            <a:xfrm>
+              <a:off x="9156205" y="4959672"/>
+              <a:ext cx="138469" cy="415408"/>
+            </a:xfrm>
+            <a:prstGeom prst="rect">
+              <a:avLst/>
+            </a:prstGeom>
+            <a:solidFill>
+              <a:srgbClr val="000000"/>
+            </a:solidFill>
+            <a:ln>
+              <a:noFill/>
+            </a:ln>
+            <a:effectLst/>
+          </p:spPr>
+          <p:style>
+            <a:lnRef idx="1">
+              <a:schemeClr val="accent1"/>
+            </a:lnRef>
+            <a:fillRef idx="3">
+              <a:schemeClr val="accent1"/>
+            </a:fillRef>
+            <a:effectRef idx="2">
+              <a:schemeClr val="accent1"/>
+            </a:effectRef>
+            <a:fontRef idx="minor">
+              <a:schemeClr val="lt1"/>
+            </a:fontRef>
+          </p:style>
+          <p:txBody>
+            <a:bodyPr rtlCol="0" anchor="ctr"/>
+            <a:lstStyle/>
+            <a:p>
+              <a:pPr algn="ctr"/>
+            </a:p>
+          </p:txBody>
+        </p:sp>
+        <p:sp>
+          <p:nvSpPr>
+            <p:cNvPr id="17" name="Rounded Rectangle 16"/>
+            <p:cNvSpPr/>
+            <p:nvPr/>
+          </p:nvSpPr>
+          <p:spPr>
+            <a:xfrm>
+              <a:off x="8648483" y="5328924"/>
+              <a:ext cx="1153913" cy="138469"/>
+            </a:xfrm>
+            <a:prstGeom prst="roundRect">
+              <a:avLst>
+                <a:gd name="adj" fmla="val 50000"/>
+              </a:avLst>
+            </a:prstGeom>
+            <a:solidFill>
+              <a:srgbClr val="000000"/>
+            </a:solidFill>
+            <a:ln>
+              <a:noFill/>
+            </a:ln>
+            <a:effectLst/>
+          </p:spPr>
+          <p:style>
+            <a:lnRef idx="1">
+              <a:schemeClr val="accent1"/>
+            </a:lnRef>
+            <a:fillRef idx="3">
+              <a:schemeClr val="accent1"/>
+            </a:fillRef>
+            <a:effectRef idx="2">
+              <a:schemeClr val="accent1"/>
+            </a:effectRef>
+            <a:fontRef idx="minor">
+              <a:schemeClr val="lt1"/>
+            </a:fontRef>
+          </p:style>
+          <p:txBody>
+            <a:bodyPr rtlCol="0" anchor="ctr"/>
+            <a:lstStyle/>
+            <a:p>
+              <a:pPr algn="ctr"/>
+            </a:p>
+          </p:txBody>
+        </p:sp>
+      </p:grpSp>
     </p:spTree>
   </p:cSld>
   <p:clrMapOvr>
@@ -11708,7 +12212,7 @@
         <p:spPr>
           <a:xfrm>
             <a:off x="677387" y="692177"/>
-            <a:ext cx="10855878" cy="822960"/>
+            <a:ext cx="10855878" cy="1447800"/>
           </a:xfrm>
           <a:prstGeom prst="rect">
             <a:avLst/>
@@ -11743,21 +12247,65 @@
                 <a:ea typeface="Arial"/>
                 <a:cs typeface="Arial"/>
               </a:rPr>
-              <a:t>План пилота</a:t>
+              <a:t>68 презентаций за 6 недель: 4 минуты на сборку</a:t>
             </a:r>
           </a:p>
         </p:txBody>
       </p:sp>
       <p:sp>
         <p:nvSpPr>
-          <p:cNvPr id="797" name="body"/>
+          <p:cNvPr id="797" name="stat_0:bar"/>
+          <p:cNvSpPr/>
+          <p:nvPr/>
+        </p:nvSpPr>
+        <p:spPr>
+          <a:xfrm>
+            <a:off x="677387" y="2489735"/>
+            <a:ext cx="50800" cy="1150112"/>
+          </a:xfrm>
+          <a:prstGeom prst="rect">
+            <a:avLst/>
+          </a:prstGeom>
+          <a:solidFill>
+            <a:srgbClr val="0077FF"/>
+          </a:solidFill>
+          <a:ln>
+            <a:noFill/>
+          </a:ln>
+          <a:effectLst/>
+        </p:spPr>
+        <p:style>
+          <a:lnRef idx="1">
+            <a:schemeClr val="accent1"/>
+          </a:lnRef>
+          <a:fillRef idx="3">
+            <a:schemeClr val="accent1"/>
+          </a:fillRef>
+          <a:effectRef idx="2">
+            <a:schemeClr val="accent1"/>
+          </a:effectRef>
+          <a:fontRef idx="minor">
+            <a:schemeClr val="lt1"/>
+          </a:fontRef>
+        </p:style>
+        <p:txBody>
+          <a:bodyPr rtlCol="0" anchor="ctr"/>
+          <a:lstStyle/>
+          <a:p>
+            <a:pPr algn="ctr"/>
+          </a:p>
+        </p:txBody>
+      </p:sp>
+      <p:sp>
+        <p:nvSpPr>
+          <p:cNvPr id="798" name="stat_0"/>
           <p:cNvSpPr txBox="1"/>
           <p:nvPr/>
         </p:nvSpPr>
         <p:spPr>
           <a:xfrm>
-            <a:off x="677387" y="1783080"/>
-            <a:ext cx="5245059" cy="4417717"/>
+            <a:off x="855187" y="2380007"/>
+            <a:ext cx="5033021" cy="1259840"/>
           </a:xfrm>
           <a:prstGeom prst="rect">
             <a:avLst/>
@@ -11765,18 +12313,21 @@
           <a:noFill/>
         </p:spPr>
         <p:txBody>
-          <a:bodyPr wrap="square" lIns="76200" rIns="76200" tIns="50800" bIns="50800">
+          <a:bodyPr wrap="square" lIns="76200" rIns="76200" tIns="0" bIns="0">
             <a:spAutoFit/>
           </a:bodyPr>
           <a:lstStyle/>
           <a:p>
-            <a:pPr algn="l">
-              <a:spcAft>
-                <a:spcPts val="300"/>
-              </a:spcAft>
-              <a:defRPr sz="1600">
-                <a:solidFill>
-                  <a:srgbClr val="000000"/>
+            <a:pPr>
+              <a:lnSpc>
+                <a:spcPct val="100000"/>
+              </a:lnSpc>
+              <a:spcAft>
+                <a:spcPts val="200"/>
+              </a:spcAft>
+              <a:defRPr sz="4800" b="1">
+                <a:solidFill>
+                  <a:srgbClr val="0077FF"/>
                 </a:solidFill>
                 <a:latin typeface="Play"/>
                 <a:ea typeface="Play"/>
@@ -11784,23 +12335,23 @@
               </a:defRPr>
             </a:pPr>
             <a:r>
-              <a:rPr sz="1600">
-                <a:solidFill>
-                  <a:srgbClr val="000000"/>
+              <a:rPr sz="4800" b="1">
+                <a:solidFill>
+                  <a:srgbClr val="0077FF"/>
                 </a:solidFill>
                 <a:latin typeface="Play"/>
                 <a:ea typeface="Play"/>
                 <a:cs typeface="Play"/>
               </a:rPr>
-              <a:t>• Пилот 6 недель на двух командах, 68 презентаций</a:t>
+              <a:t>4 мин</a:t>
             </a:r>
           </a:p>
           <a:p>
-            <a:pPr algn="l">
+            <a:pPr>
               <a:spcAft>
                 <a:spcPts val="300"/>
               </a:spcAft>
-              <a:defRPr sz="1600">
+              <a:defRPr sz="2400" b="0">
                 <a:solidFill>
                   <a:srgbClr val="000000"/>
                 </a:solidFill>
@@ -11810,7 +12361,7 @@
               </a:defRPr>
             </a:pPr>
             <a:r>
-              <a:rPr sz="1600">
+              <a:rPr sz="2400" b="0">
                 <a:solidFill>
                   <a:srgbClr val="000000"/>
                 </a:solidFill>
@@ -11818,438 +12369,377 @@
                 <a:ea typeface="Play"/>
                 <a:cs typeface="Play"/>
               </a:rPr>
-              <a:t>• Сборка 4 мин, 1 день до первой версии, 2 нарушения стиля</a:t>
+              <a:t>4 минуты на сборку</a:t>
             </a:r>
           </a:p>
         </p:txBody>
       </p:sp>
-      <p:graphicFrame>
-        <p:nvGraphicFramePr>
-          <p:cNvPr id="798" name="Table 797"/>
-          <p:cNvGraphicFramePr>
-            <a:graphicFrameLocks noGrp="1"/>
-          </p:cNvGraphicFramePr>
+      <p:sp>
+        <p:nvSpPr>
+          <p:cNvPr id="799" name="stat_1:bar"/>
+          <p:cNvSpPr/>
           <p:nvPr/>
-        </p:nvGraphicFramePr>
-        <p:xfrm>
-          <a:off x="6288206" y="1783080"/>
-          <a:ext cx="5245059" cy="4417717"/>
-        </p:xfrm>
-        <a:graphic>
-          <a:graphicData uri="http://schemas.openxmlformats.org/drawingml/2006/table">
-            <a:tbl>
-              <a:tblPr firstRow="1" bandRow="1">
-                <a:tableStyleId>{5C22544A-7EE6-4342-B048-85BDC9FD1C3A}</a:tableStyleId>
-              </a:tblPr>
-              <a:tblGrid>
-                <a:gridCol w="1748353"/>
-                <a:gridCol w="1748353"/>
-                <a:gridCol w="1748353"/>
-              </a:tblGrid>
-              <a:tr h="883543">
-                <a:tc>
-                  <a:txBody>
-                    <a:bodyPr/>
-                    <a:lstStyle/>
-                    <a:p>
-                      <a:pPr>
-                        <a:defRPr sz="1300" b="1">
-                          <a:solidFill>
-                            <a:srgbClr val="FFFFFF"/>
-                          </a:solidFill>
-                          <a:latin typeface="Play"/>
-                          <a:ea typeface="Play"/>
-                          <a:cs typeface="Play"/>
-                        </a:defRPr>
-                      </a:pPr>
-                      <a:r>
-                        <a:t>Метрика</a:t>
-                      </a:r>
-                    </a:p>
-                  </a:txBody>
-                  <a:tcPr>
-                    <a:solidFill>
-                      <a:srgbClr val="0077FF"/>
-                    </a:solidFill>
-                  </a:tcPr>
-                </a:tc>
-                <a:tc>
-                  <a:txBody>
-                    <a:bodyPr/>
-                    <a:lstStyle/>
-                    <a:p>
-                      <a:pPr>
-                        <a:defRPr sz="1300" b="1">
-                          <a:solidFill>
-                            <a:srgbClr val="FFFFFF"/>
-                          </a:solidFill>
-                          <a:latin typeface="Play"/>
-                          <a:ea typeface="Play"/>
-                          <a:cs typeface="Play"/>
-                        </a:defRPr>
-                      </a:pPr>
-                      <a:r>
-                        <a:t>Текущий процесс</a:t>
-                      </a:r>
-                    </a:p>
-                  </a:txBody>
-                  <a:tcPr>
-                    <a:solidFill>
-                      <a:srgbClr val="0077FF"/>
-                    </a:solidFill>
-                  </a:tcPr>
-                </a:tc>
-                <a:tc>
-                  <a:txBody>
-                    <a:bodyPr/>
-                    <a:lstStyle/>
-                    <a:p>
-                      <a:pPr>
-                        <a:defRPr sz="1300" b="1">
-                          <a:solidFill>
-                            <a:srgbClr val="FFFFFF"/>
-                          </a:solidFill>
-                          <a:latin typeface="Play"/>
-                          <a:ea typeface="Play"/>
-                          <a:cs typeface="Play"/>
-                        </a:defRPr>
-                      </a:pPr>
-                      <a:r>
-                        <a:t>Пилот</a:t>
-                      </a:r>
-                    </a:p>
-                  </a:txBody>
-                  <a:tcPr>
-                    <a:solidFill>
-                      <a:srgbClr val="0077FF"/>
-                    </a:solidFill>
-                  </a:tcPr>
-                </a:tc>
-              </a:tr>
-              <a:tr h="883543">
-                <a:tc>
-                  <a:txBody>
-                    <a:bodyPr/>
-                    <a:lstStyle/>
-                    <a:p>
-                      <a:pPr>
-                        <a:defRPr sz="1300" b="0">
-                          <a:solidFill>
-                            <a:srgbClr val="000000"/>
-                          </a:solidFill>
-                          <a:latin typeface="Play"/>
-                          <a:ea typeface="Play"/>
-                          <a:cs typeface="Play"/>
-                        </a:defRPr>
-                      </a:pPr>
-                      <a:r>
-                        <a:t>Время сборки (мин)</a:t>
-                      </a:r>
-                    </a:p>
-                  </a:txBody>
-                  <a:tcPr>
-                    <a:solidFill>
-                      <a:srgbClr val="FFFFFF"/>
-                    </a:solidFill>
-                  </a:tcPr>
-                </a:tc>
-                <a:tc>
-                  <a:txBody>
-                    <a:bodyPr/>
-                    <a:lstStyle/>
-                    <a:p>
-                      <a:pPr>
-                        <a:defRPr sz="1300" b="0">
-                          <a:solidFill>
-                            <a:srgbClr val="000000"/>
-                          </a:solidFill>
-                          <a:latin typeface="Play"/>
-                          <a:ea typeface="Play"/>
-                          <a:cs typeface="Play"/>
-                        </a:defRPr>
-                      </a:pPr>
-                      <a:r>
-                        <a:t>186</a:t>
-                      </a:r>
-                    </a:p>
-                  </a:txBody>
-                  <a:tcPr>
-                    <a:solidFill>
-                      <a:srgbClr val="FFFFFF"/>
-                    </a:solidFill>
-                  </a:tcPr>
-                </a:tc>
-                <a:tc>
-                  <a:txBody>
-                    <a:bodyPr/>
-                    <a:lstStyle/>
-                    <a:p>
-                      <a:pPr>
-                        <a:defRPr sz="1300" b="0">
-                          <a:solidFill>
-                            <a:srgbClr val="000000"/>
-                          </a:solidFill>
-                          <a:latin typeface="Play"/>
-                          <a:ea typeface="Play"/>
-                          <a:cs typeface="Play"/>
-                        </a:defRPr>
-                      </a:pPr>
-                      <a:r>
-                        <a:t>4</a:t>
-                      </a:r>
-                    </a:p>
-                  </a:txBody>
-                  <a:tcPr>
-                    <a:solidFill>
-                      <a:srgbClr val="FFFFFF"/>
-                    </a:solidFill>
-                  </a:tcPr>
-                </a:tc>
-              </a:tr>
-              <a:tr h="883543">
-                <a:tc>
-                  <a:txBody>
-                    <a:bodyPr/>
-                    <a:lstStyle/>
-                    <a:p>
-                      <a:pPr>
-                        <a:defRPr sz="1300" b="0">
-                          <a:solidFill>
-                            <a:srgbClr val="000000"/>
-                          </a:solidFill>
-                          <a:latin typeface="Play"/>
-                          <a:ea typeface="Play"/>
-                          <a:cs typeface="Play"/>
-                        </a:defRPr>
-                      </a:pPr>
-                      <a:r>
-                        <a:t>Время до первой версии (дней)</a:t>
-                      </a:r>
-                    </a:p>
-                  </a:txBody>
-                  <a:tcPr>
-                    <a:solidFill>
-                      <a:srgbClr val="FFFFFF"/>
-                    </a:solidFill>
-                  </a:tcPr>
-                </a:tc>
-                <a:tc>
-                  <a:txBody>
-                    <a:bodyPr/>
-                    <a:lstStyle/>
-                    <a:p>
-                      <a:pPr>
-                        <a:defRPr sz="1300" b="0">
-                          <a:solidFill>
-                            <a:srgbClr val="000000"/>
-                          </a:solidFill>
-                          <a:latin typeface="Play"/>
-                          <a:ea typeface="Play"/>
-                          <a:cs typeface="Play"/>
-                        </a:defRPr>
-                      </a:pPr>
-                      <a:r>
-                        <a:t>6</a:t>
-                      </a:r>
-                    </a:p>
-                  </a:txBody>
-                  <a:tcPr>
-                    <a:solidFill>
-                      <a:srgbClr val="FFFFFF"/>
-                    </a:solidFill>
-                  </a:tcPr>
-                </a:tc>
-                <a:tc>
-                  <a:txBody>
-                    <a:bodyPr/>
-                    <a:lstStyle/>
-                    <a:p>
-                      <a:pPr>
-                        <a:defRPr sz="1300" b="0">
-                          <a:solidFill>
-                            <a:srgbClr val="000000"/>
-                          </a:solidFill>
-                          <a:latin typeface="Play"/>
-                          <a:ea typeface="Play"/>
-                          <a:cs typeface="Play"/>
-                        </a:defRPr>
-                      </a:pPr>
-                      <a:r>
-                        <a:t>1</a:t>
-                      </a:r>
-                    </a:p>
-                  </a:txBody>
-                  <a:tcPr>
-                    <a:solidFill>
-                      <a:srgbClr val="FFFFFF"/>
-                    </a:solidFill>
-                  </a:tcPr>
-                </a:tc>
-              </a:tr>
-              <a:tr h="883543">
-                <a:tc>
-                  <a:txBody>
-                    <a:bodyPr/>
-                    <a:lstStyle/>
-                    <a:p>
-                      <a:pPr>
-                        <a:defRPr sz="1300" b="0">
-                          <a:solidFill>
-                            <a:srgbClr val="000000"/>
-                          </a:solidFill>
-                          <a:latin typeface="Play"/>
-                          <a:ea typeface="Play"/>
-                          <a:cs typeface="Play"/>
-                        </a:defRPr>
-                      </a:pPr>
-                      <a:r>
-                        <a:t>Нарушения стиля</a:t>
-                      </a:r>
-                    </a:p>
-                  </a:txBody>
-                  <a:tcPr>
-                    <a:solidFill>
-                      <a:srgbClr val="FFFFFF"/>
-                    </a:solidFill>
-                  </a:tcPr>
-                </a:tc>
-                <a:tc>
-                  <a:txBody>
-                    <a:bodyPr/>
-                    <a:lstStyle/>
-                    <a:p>
-                      <a:pPr>
-                        <a:defRPr sz="1300" b="0">
-                          <a:solidFill>
-                            <a:srgbClr val="000000"/>
-                          </a:solidFill>
-                          <a:latin typeface="Play"/>
-                          <a:ea typeface="Play"/>
-                          <a:cs typeface="Play"/>
-                        </a:defRPr>
-                      </a:pPr>
-                      <a:r>
-                        <a:t>19/42</a:t>
-                      </a:r>
-                    </a:p>
-                  </a:txBody>
-                  <a:tcPr>
-                    <a:solidFill>
-                      <a:srgbClr val="FFFFFF"/>
-                    </a:solidFill>
-                  </a:tcPr>
-                </a:tc>
-                <a:tc>
-                  <a:txBody>
-                    <a:bodyPr/>
-                    <a:lstStyle/>
-                    <a:p>
-                      <a:pPr>
-                        <a:defRPr sz="1300" b="0">
-                          <a:solidFill>
-                            <a:srgbClr val="000000"/>
-                          </a:solidFill>
-                          <a:latin typeface="Play"/>
-                          <a:ea typeface="Play"/>
-                          <a:cs typeface="Play"/>
-                        </a:defRPr>
-                      </a:pPr>
-                      <a:r>
-                        <a:t>2/68</a:t>
-                      </a:r>
-                    </a:p>
-                  </a:txBody>
-                  <a:tcPr>
-                    <a:solidFill>
-                      <a:srgbClr val="FFFFFF"/>
-                    </a:solidFill>
-                  </a:tcPr>
-                </a:tc>
-              </a:tr>
-              <a:tr h="883545">
-                <a:tc>
-                  <a:txBody>
-                    <a:bodyPr/>
-                    <a:lstStyle/>
-                    <a:p>
-                      <a:pPr>
-                        <a:defRPr sz="1300" b="0">
-                          <a:solidFill>
-                            <a:srgbClr val="000000"/>
-                          </a:solidFill>
-                          <a:latin typeface="Play"/>
-                          <a:ea typeface="Play"/>
-                          <a:cs typeface="Play"/>
-                        </a:defRPr>
-                      </a:pPr>
-                      <a:r>
-                        <a:t>Запросы закрыты</a:t>
-                      </a:r>
-                    </a:p>
-                  </a:txBody>
-                  <a:tcPr>
-                    <a:solidFill>
-                      <a:srgbClr val="FFFFFF"/>
-                    </a:solidFill>
-                  </a:tcPr>
-                </a:tc>
-                <a:tc>
-                  <a:txBody>
-                    <a:bodyPr/>
-                    <a:lstStyle/>
-                    <a:p>
-                      <a:pPr>
-                        <a:defRPr sz="1300" b="0">
-                          <a:solidFill>
-                            <a:srgbClr val="000000"/>
-                          </a:solidFill>
-                          <a:latin typeface="Play"/>
-                          <a:ea typeface="Play"/>
-                          <a:cs typeface="Play"/>
-                        </a:defRPr>
-                      </a:pPr>
-                      <a:r>
-                        <a:t>11/нед</a:t>
-                      </a:r>
-                    </a:p>
-                  </a:txBody>
-                  <a:tcPr>
-                    <a:solidFill>
-                      <a:srgbClr val="FFFFFF"/>
-                    </a:solidFill>
-                  </a:tcPr>
-                </a:tc>
-                <a:tc>
-                  <a:txBody>
-                    <a:bodyPr/>
-                    <a:lstStyle/>
-                    <a:p>
-                      <a:pPr>
-                        <a:defRPr sz="1300" b="0">
-                          <a:solidFill>
-                            <a:srgbClr val="000000"/>
-                          </a:solidFill>
-                          <a:latin typeface="Play"/>
-                          <a:ea typeface="Play"/>
-                          <a:cs typeface="Play"/>
-                        </a:defRPr>
-                      </a:pPr>
-                      <a:r>
-                        <a:t>38/нед</a:t>
-                      </a:r>
-                    </a:p>
-                  </a:txBody>
-                  <a:tcPr>
-                    <a:solidFill>
-                      <a:srgbClr val="FFFFFF"/>
-                    </a:solidFill>
-                  </a:tcPr>
-                </a:tc>
-              </a:tr>
-            </a:tbl>
-          </a:graphicData>
-        </a:graphic>
-      </p:graphicFrame>
+        </p:nvSpPr>
+        <p:spPr>
+          <a:xfrm>
+            <a:off x="6322444" y="2489735"/>
+            <a:ext cx="50800" cy="1150112"/>
+          </a:xfrm>
+          <a:prstGeom prst="rect">
+            <a:avLst/>
+          </a:prstGeom>
+          <a:solidFill>
+            <a:srgbClr val="0077FF"/>
+          </a:solidFill>
+          <a:ln>
+            <a:noFill/>
+          </a:ln>
+          <a:effectLst/>
+        </p:spPr>
+        <p:style>
+          <a:lnRef idx="1">
+            <a:schemeClr val="accent1"/>
+          </a:lnRef>
+          <a:fillRef idx="3">
+            <a:schemeClr val="accent1"/>
+          </a:fillRef>
+          <a:effectRef idx="2">
+            <a:schemeClr val="accent1"/>
+          </a:effectRef>
+          <a:fontRef idx="minor">
+            <a:schemeClr val="lt1"/>
+          </a:fontRef>
+        </p:style>
+        <p:txBody>
+          <a:bodyPr rtlCol="0" anchor="ctr"/>
+          <a:lstStyle/>
+          <a:p>
+            <a:pPr algn="ctr"/>
+          </a:p>
+        </p:txBody>
+      </p:sp>
+      <p:sp>
+        <p:nvSpPr>
+          <p:cNvPr id="800" name="stat_1"/>
+          <p:cNvSpPr txBox="1"/>
+          <p:nvPr/>
+        </p:nvSpPr>
+        <p:spPr>
+          <a:xfrm>
+            <a:off x="6500244" y="2380007"/>
+            <a:ext cx="5033021" cy="1259840"/>
+          </a:xfrm>
+          <a:prstGeom prst="rect">
+            <a:avLst/>
+          </a:prstGeom>
+          <a:noFill/>
+        </p:spPr>
+        <p:txBody>
+          <a:bodyPr wrap="square" lIns="76200" rIns="76200" tIns="0" bIns="0">
+            <a:spAutoFit/>
+          </a:bodyPr>
+          <a:lstStyle/>
+          <a:p>
+            <a:pPr>
+              <a:lnSpc>
+                <a:spcPct val="100000"/>
+              </a:lnSpc>
+              <a:spcAft>
+                <a:spcPts val="200"/>
+              </a:spcAft>
+              <a:defRPr sz="4800" b="1">
+                <a:solidFill>
+                  <a:srgbClr val="0077FF"/>
+                </a:solidFill>
+                <a:latin typeface="Play"/>
+                <a:ea typeface="Play"/>
+                <a:cs typeface="Play"/>
+              </a:defRPr>
+            </a:pPr>
+            <a:r>
+              <a:rPr sz="4800" b="1">
+                <a:solidFill>
+                  <a:srgbClr val="0077FF"/>
+                </a:solidFill>
+                <a:latin typeface="Play"/>
+                <a:ea typeface="Play"/>
+                <a:cs typeface="Play"/>
+              </a:rPr>
+              <a:t>1 день</a:t>
+            </a:r>
+          </a:p>
+          <a:p>
+            <a:pPr>
+              <a:spcAft>
+                <a:spcPts val="300"/>
+              </a:spcAft>
+              <a:defRPr sz="2400" b="0">
+                <a:solidFill>
+                  <a:srgbClr val="000000"/>
+                </a:solidFill>
+                <a:latin typeface="Play"/>
+                <a:ea typeface="Play"/>
+                <a:cs typeface="Play"/>
+              </a:defRPr>
+            </a:pPr>
+            <a:r>
+              <a:rPr sz="2400" b="0">
+                <a:solidFill>
+                  <a:srgbClr val="000000"/>
+                </a:solidFill>
+                <a:latin typeface="Play"/>
+                <a:ea typeface="Play"/>
+                <a:cs typeface="Play"/>
+              </a:rPr>
+              <a:t>Время до первой версии 1 день</a:t>
+            </a:r>
+          </a:p>
+        </p:txBody>
+      </p:sp>
+      <p:sp>
+        <p:nvSpPr>
+          <p:cNvPr id="801" name="stat_2:bar"/>
+          <p:cNvSpPr/>
+          <p:nvPr/>
+        </p:nvSpPr>
+        <p:spPr>
+          <a:xfrm>
+            <a:off x="677387" y="4537290"/>
+            <a:ext cx="50800" cy="1150112"/>
+          </a:xfrm>
+          <a:prstGeom prst="rect">
+            <a:avLst/>
+          </a:prstGeom>
+          <a:solidFill>
+            <a:srgbClr val="0077FF"/>
+          </a:solidFill>
+          <a:ln>
+            <a:noFill/>
+          </a:ln>
+          <a:effectLst/>
+        </p:spPr>
+        <p:style>
+          <a:lnRef idx="1">
+            <a:schemeClr val="accent1"/>
+          </a:lnRef>
+          <a:fillRef idx="3">
+            <a:schemeClr val="accent1"/>
+          </a:fillRef>
+          <a:effectRef idx="2">
+            <a:schemeClr val="accent1"/>
+          </a:effectRef>
+          <a:fontRef idx="minor">
+            <a:schemeClr val="lt1"/>
+          </a:fontRef>
+        </p:style>
+        <p:txBody>
+          <a:bodyPr rtlCol="0" anchor="ctr"/>
+          <a:lstStyle/>
+          <a:p>
+            <a:pPr algn="ctr"/>
+          </a:p>
+        </p:txBody>
+      </p:sp>
+      <p:sp>
+        <p:nvSpPr>
+          <p:cNvPr id="802" name="stat_2"/>
+          <p:cNvSpPr txBox="1"/>
+          <p:nvPr/>
+        </p:nvSpPr>
+        <p:spPr>
+          <a:xfrm>
+            <a:off x="855187" y="4427562"/>
+            <a:ext cx="5033021" cy="1259840"/>
+          </a:xfrm>
+          <a:prstGeom prst="rect">
+            <a:avLst/>
+          </a:prstGeom>
+          <a:noFill/>
+        </p:spPr>
+        <p:txBody>
+          <a:bodyPr wrap="square" lIns="76200" rIns="76200" tIns="0" bIns="0">
+            <a:spAutoFit/>
+          </a:bodyPr>
+          <a:lstStyle/>
+          <a:p>
+            <a:pPr>
+              <a:lnSpc>
+                <a:spcPct val="100000"/>
+              </a:lnSpc>
+              <a:spcAft>
+                <a:spcPts val="200"/>
+              </a:spcAft>
+              <a:defRPr sz="4800" b="1">
+                <a:solidFill>
+                  <a:srgbClr val="0077FF"/>
+                </a:solidFill>
+                <a:latin typeface="Play"/>
+                <a:ea typeface="Play"/>
+                <a:cs typeface="Play"/>
+              </a:defRPr>
+            </a:pPr>
+            <a:r>
+              <a:rPr sz="4800" b="1">
+                <a:solidFill>
+                  <a:srgbClr val="0077FF"/>
+                </a:solidFill>
+                <a:latin typeface="Play"/>
+                <a:ea typeface="Play"/>
+                <a:cs typeface="Play"/>
+              </a:rPr>
+              <a:t>2 из 68</a:t>
+            </a:r>
+          </a:p>
+          <a:p>
+            <a:pPr>
+              <a:spcAft>
+                <a:spcPts val="300"/>
+              </a:spcAft>
+              <a:defRPr sz="2400" b="0">
+                <a:solidFill>
+                  <a:srgbClr val="000000"/>
+                </a:solidFill>
+                <a:latin typeface="Play"/>
+                <a:ea typeface="Play"/>
+                <a:cs typeface="Play"/>
+              </a:defRPr>
+            </a:pPr>
+            <a:r>
+              <a:rPr sz="2400" b="0">
+                <a:solidFill>
+                  <a:srgbClr val="000000"/>
+                </a:solidFill>
+                <a:latin typeface="Play"/>
+                <a:ea typeface="Play"/>
+                <a:cs typeface="Play"/>
+              </a:rPr>
+              <a:t>Нарушений стиля 2 из 68</a:t>
+            </a:r>
+          </a:p>
+        </p:txBody>
+      </p:sp>
+      <p:sp>
+        <p:nvSpPr>
+          <p:cNvPr id="803" name="stat_3:bar"/>
+          <p:cNvSpPr/>
+          <p:nvPr/>
+        </p:nvSpPr>
+        <p:spPr>
+          <a:xfrm>
+            <a:off x="6322444" y="4537290"/>
+            <a:ext cx="50800" cy="1150112"/>
+          </a:xfrm>
+          <a:prstGeom prst="rect">
+            <a:avLst/>
+          </a:prstGeom>
+          <a:solidFill>
+            <a:srgbClr val="0077FF"/>
+          </a:solidFill>
+          <a:ln>
+            <a:noFill/>
+          </a:ln>
+          <a:effectLst/>
+        </p:spPr>
+        <p:style>
+          <a:lnRef idx="1">
+            <a:schemeClr val="accent1"/>
+          </a:lnRef>
+          <a:fillRef idx="3">
+            <a:schemeClr val="accent1"/>
+          </a:fillRef>
+          <a:effectRef idx="2">
+            <a:schemeClr val="accent1"/>
+          </a:effectRef>
+          <a:fontRef idx="minor">
+            <a:schemeClr val="lt1"/>
+          </a:fontRef>
+        </p:style>
+        <p:txBody>
+          <a:bodyPr rtlCol="0" anchor="ctr"/>
+          <a:lstStyle/>
+          <a:p>
+            <a:pPr algn="ctr"/>
+          </a:p>
+        </p:txBody>
+      </p:sp>
+      <p:sp>
+        <p:nvSpPr>
+          <p:cNvPr id="804" name="stat_3"/>
+          <p:cNvSpPr txBox="1"/>
+          <p:nvPr/>
+        </p:nvSpPr>
+        <p:spPr>
+          <a:xfrm>
+            <a:off x="6500244" y="4427562"/>
+            <a:ext cx="5033021" cy="1259840"/>
+          </a:xfrm>
+          <a:prstGeom prst="rect">
+            <a:avLst/>
+          </a:prstGeom>
+          <a:noFill/>
+        </p:spPr>
+        <p:txBody>
+          <a:bodyPr wrap="square" lIns="76200" rIns="76200" tIns="0" bIns="0">
+            <a:spAutoFit/>
+          </a:bodyPr>
+          <a:lstStyle/>
+          <a:p>
+            <a:pPr>
+              <a:lnSpc>
+                <a:spcPct val="100000"/>
+              </a:lnSpc>
+              <a:spcAft>
+                <a:spcPts val="200"/>
+              </a:spcAft>
+              <a:defRPr sz="4800" b="1">
+                <a:solidFill>
+                  <a:srgbClr val="0077FF"/>
+                </a:solidFill>
+                <a:latin typeface="Play"/>
+                <a:ea typeface="Play"/>
+                <a:cs typeface="Play"/>
+              </a:defRPr>
+            </a:pPr>
+            <a:r>
+              <a:rPr sz="4800" b="1">
+                <a:solidFill>
+                  <a:srgbClr val="0077FF"/>
+                </a:solidFill>
+                <a:latin typeface="Play"/>
+                <a:ea typeface="Play"/>
+                <a:cs typeface="Play"/>
+              </a:rPr>
+              <a:t>38</a:t>
+            </a:r>
+          </a:p>
+          <a:p>
+            <a:pPr>
+              <a:spcAft>
+                <a:spcPts val="300"/>
+              </a:spcAft>
+              <a:defRPr sz="2400" b="0">
+                <a:solidFill>
+                  <a:srgbClr val="000000"/>
+                </a:solidFill>
+                <a:latin typeface="Play"/>
+                <a:ea typeface="Play"/>
+                <a:cs typeface="Play"/>
+              </a:defRPr>
+            </a:pPr>
+            <a:r>
+              <a:rPr sz="2400" b="0">
+                <a:solidFill>
+                  <a:srgbClr val="000000"/>
+                </a:solidFill>
+                <a:latin typeface="Play"/>
+                <a:ea typeface="Play"/>
+                <a:cs typeface="Play"/>
+              </a:rPr>
+              <a:t>Дизайнеры закрыли 38 запросов</a:t>
+            </a:r>
+          </a:p>
+        </p:txBody>
+      </p:sp>
     </p:spTree>
   </p:cSld>
   <p:clrMapOvr>
@@ -12284,7 +12774,7 @@
         <p:spPr>
           <a:xfrm>
             <a:off x="677387" y="692177"/>
-            <a:ext cx="10855878" cy="822960"/>
+            <a:ext cx="10855878" cy="919480"/>
           </a:xfrm>
           <a:prstGeom prst="rect">
             <a:avLst/>
@@ -12301,7 +12791,7 @@
               <a:spcAft>
                 <a:spcPts val="300"/>
               </a:spcAft>
-              <a:defRPr sz="4000">
+              <a:defRPr sz="4800">
                 <a:solidFill>
                   <a:srgbClr val="000000"/>
                 </a:solidFill>
@@ -12311,7 +12801,7 @@
               </a:defRPr>
             </a:pPr>
             <a:r>
-              <a:rPr sz="4000">
+              <a:rPr sz="4800">
                 <a:solidFill>
                   <a:srgbClr val="000000"/>
                 </a:solidFill>
@@ -12319,7 +12809,7 @@
                 <a:ea typeface="Arial"/>
                 <a:cs typeface="Arial"/>
               </a:rPr>
-              <a:t>Риски</a:t>
+              <a:t>Рутина ушла в сервис</a:t>
             </a:r>
           </a:p>
         </p:txBody>
@@ -12332,8 +12822,8 @@
         </p:nvSpPr>
         <p:spPr>
           <a:xfrm>
-            <a:off x="677387" y="2752418"/>
-            <a:ext cx="5874466" cy="2479040"/>
+            <a:off x="677387" y="3282022"/>
+            <a:ext cx="5874466" cy="1488440"/>
           </a:xfrm>
           <a:prstGeom prst="rect">
             <a:avLst/>
@@ -12350,7 +12840,7 @@
               <a:spcAft>
                 <a:spcPts val="300"/>
               </a:spcAft>
-              <a:defRPr sz="2400">
+              <a:defRPr sz="2800">
                 <a:solidFill>
                   <a:srgbClr val="000000"/>
                 </a:solidFill>
@@ -12360,7 +12850,7 @@
               </a:defRPr>
             </a:pPr>
             <a:r>
-              <a:rPr sz="2400">
+              <a:rPr sz="2800">
                 <a:solidFill>
                   <a:srgbClr val="000000"/>
                 </a:solidFill>
@@ -12368,7 +12858,7 @@
                 <a:ea typeface="Play"/>
                 <a:cs typeface="Play"/>
               </a:rPr>
-              <a:t>• Слабая модель может выдумать неподтверждённые цифры</a:t>
+              <a:t>• Дизайнеры сосредоточились на сложных задачах</a:t>
             </a:r>
           </a:p>
           <a:p>
@@ -12376,7 +12866,7 @@
               <a:spcAft>
                 <a:spcPts val="300"/>
               </a:spcAft>
-              <a:defRPr sz="2400">
+              <a:defRPr sz="2800">
                 <a:solidFill>
                   <a:srgbClr val="000000"/>
                 </a:solidFill>
@@ -12386,7 +12876,7 @@
               </a:defRPr>
             </a:pPr>
             <a:r>
-              <a:rPr sz="2400">
+              <a:rPr sz="2800">
                 <a:solidFill>
                   <a:srgbClr val="000000"/>
                 </a:solidFill>
@@ -12394,49 +12884,23 @@
                 <a:ea typeface="Play"/>
                 <a:cs typeface="Play"/>
               </a:rPr>
-              <a:t>• Некачественный шаблон приводит к ошибкам стиля</a:t>
-            </a:r>
-          </a:p>
-          <a:p>
-            <a:pPr algn="l">
-              <a:spcAft>
-                <a:spcPts val="300"/>
-              </a:spcAft>
-              <a:defRPr sz="2400">
-                <a:solidFill>
-                  <a:srgbClr val="000000"/>
-                </a:solidFill>
-                <a:latin typeface="Play"/>
-                <a:ea typeface="Play"/>
-                <a:cs typeface="Play"/>
-              </a:defRPr>
-            </a:pPr>
-            <a:r>
-              <a:rPr sz="2400">
-                <a:solidFill>
-                  <a:srgbClr val="000000"/>
-                </a:solidFill>
-                <a:latin typeface="Play"/>
-                <a:ea typeface="Play"/>
-                <a:cs typeface="Play"/>
-              </a:rPr>
-              <a:t>• Нагрузка &gt;20 задач требует внешней очереди</a:t>
+              <a:t>• Время на правки сократилось</a:t>
             </a:r>
           </a:p>
         </p:txBody>
       </p:sp>
       <p:grpSp>
         <p:nvGrpSpPr>
-          <p:cNvPr id="4" name="illustration:builtin-risk"/>
+          <p:cNvPr id="4" name="illustration:builtin-team"/>
           <p:cNvGrpSpPr/>
           <p:nvPr/>
         </p:nvGrpSpPr>
         <p:grpSpPr>
           <a:xfrm>
-            <a:off x="7771509" y="2538008"/>
-            <a:ext cx="3023252" cy="2907860"/>
-            <a:chOff x="7771509" y="2538008"/>
-            <a:chExt cx="3023252" cy="2907860"/>
+            <a:off x="7586883" y="2710781"/>
+            <a:ext cx="3300191" cy="2861704"/>
+            <a:chOff x="7586883" y="2710781"/>
+            <a:chExt cx="3300191" cy="2861704"/>
           </a:xfrm>
         </p:grpSpPr>
         <p:sp>
@@ -12447,8 +12911,8 @@
           </p:nvSpPr>
           <p:spPr>
             <a:xfrm>
-              <a:off x="7771509" y="2538008"/>
-              <a:ext cx="2907860" cy="2907860"/>
+              <a:off x="7794587" y="2710781"/>
+              <a:ext cx="2861704" cy="2861704"/>
             </a:xfrm>
             <a:prstGeom prst="ellipse">
               <a:avLst/>
@@ -12485,140 +12949,20 @@
         </p:sp>
         <p:sp>
           <p:nvSpPr>
-            <p:cNvPr id="6" name="Freeform 5"/>
+            <p:cNvPr id="6" name="Oval 5"/>
             <p:cNvSpPr/>
             <p:nvPr/>
           </p:nvSpPr>
           <p:spPr>
             <a:xfrm>
-              <a:off x="7958443" y="2863942"/>
-              <a:ext cx="2533993" cy="2304987"/>
+              <a:off x="8166147" y="3356972"/>
+              <a:ext cx="456949" cy="456949"/>
             </a:xfrm>
-            <a:custGeom>
+            <a:prstGeom prst="ellipse">
               <a:avLst/>
-              <a:gdLst/>
-              <a:ahLst/>
-              <a:cxnLst/>
-              <a:rect l="l" t="t" r="r" b="b"/>
-              <a:pathLst>
-                <a:path w="2533993" h="2304987">
-                  <a:moveTo>
-                    <a:pt x="1082370" y="112553"/>
-                  </a:moveTo>
-                  <a:lnTo>
-                    <a:pt x="1102702" y="80624"/>
-                  </a:lnTo>
-                  <a:lnTo>
-                    <a:pt x="1128492" y="52918"/>
-                  </a:lnTo>
-                  <a:lnTo>
-                    <a:pt x="1158886" y="30359"/>
-                  </a:lnTo>
-                  <a:lnTo>
-                    <a:pt x="1192858" y="13685"/>
-                  </a:lnTo>
-                  <a:lnTo>
-                    <a:pt x="1229298" y="3450"/>
-                  </a:lnTo>
-                  <a:lnTo>
-                    <a:pt x="1266997" y="0"/>
-                  </a:lnTo>
-                  <a:lnTo>
-                    <a:pt x="1304695" y="3450"/>
-                  </a:lnTo>
-                  <a:lnTo>
-                    <a:pt x="1341135" y="13685"/>
-                  </a:lnTo>
-                  <a:lnTo>
-                    <a:pt x="1375107" y="30359"/>
-                  </a:lnTo>
-                  <a:lnTo>
-                    <a:pt x="1405501" y="52918"/>
-                  </a:lnTo>
-                  <a:lnTo>
-                    <a:pt x="1431291" y="80624"/>
-                  </a:lnTo>
-                  <a:lnTo>
-                    <a:pt x="1451623" y="112553"/>
-                  </a:lnTo>
-                  <a:lnTo>
-                    <a:pt x="2513223" y="2004970"/>
-                  </a:lnTo>
-                  <a:lnTo>
-                    <a:pt x="2526977" y="2040580"/>
-                  </a:lnTo>
-                  <a:lnTo>
-                    <a:pt x="2533981" y="2078105"/>
-                  </a:lnTo>
-                  <a:lnTo>
-                    <a:pt x="2533993" y="2116276"/>
-                  </a:lnTo>
-                  <a:lnTo>
-                    <a:pt x="2527023" y="2153813"/>
-                  </a:lnTo>
-                  <a:lnTo>
-                    <a:pt x="2513315" y="2189434"/>
-                  </a:lnTo>
-                  <a:lnTo>
-                    <a:pt x="2493306" y="2221940"/>
-                  </a:lnTo>
-                  <a:lnTo>
-                    <a:pt x="2467689" y="2250234"/>
-                  </a:lnTo>
-                  <a:lnTo>
-                    <a:pt x="2437318" y="2273370"/>
-                  </a:lnTo>
-                  <a:lnTo>
-                    <a:pt x="2403232" y="2290563"/>
-                  </a:lnTo>
-                  <a:lnTo>
-                    <a:pt x="2366583" y="2301214"/>
-                  </a:lnTo>
-                  <a:lnTo>
-                    <a:pt x="2328596" y="2304987"/>
-                  </a:lnTo>
-                  <a:lnTo>
-                    <a:pt x="205397" y="2304987"/>
-                  </a:lnTo>
-                  <a:lnTo>
-                    <a:pt x="167410" y="2301214"/>
-                  </a:lnTo>
-                  <a:lnTo>
-                    <a:pt x="130761" y="2290563"/>
-                  </a:lnTo>
-                  <a:lnTo>
-                    <a:pt x="96675" y="2273370"/>
-                  </a:lnTo>
-                  <a:lnTo>
-                    <a:pt x="66304" y="2250234"/>
-                  </a:lnTo>
-                  <a:lnTo>
-                    <a:pt x="40687" y="2221940"/>
-                  </a:lnTo>
-                  <a:lnTo>
-                    <a:pt x="20678" y="2189434"/>
-                  </a:lnTo>
-                  <a:lnTo>
-                    <a:pt x="6970" y="2153813"/>
-                  </a:lnTo>
-                  <a:lnTo>
-                    <a:pt x="0" y="2116276"/>
-                  </a:lnTo>
-                  <a:lnTo>
-                    <a:pt x="12" y="2078105"/>
-                  </a:lnTo>
-                  <a:lnTo>
-                    <a:pt x="7016" y="2040580"/>
-                  </a:lnTo>
-                  <a:lnTo>
-                    <a:pt x="20770" y="2004970"/>
-                  </a:lnTo>
-                  <a:close/>
-                </a:path>
-              </a:pathLst>
-            </a:custGeom>
+            </a:prstGeom>
             <a:solidFill>
-              <a:srgbClr val="0077FF"/>
+              <a:srgbClr val="B2B2B2"/>
             </a:solidFill>
             <a:ln>
               <a:noFill/>
@@ -12649,22 +12993,80 @@
         </p:sp>
         <p:sp>
           <p:nvSpPr>
-            <p:cNvPr id="7" name="Rounded Rectangle 6"/>
+            <p:cNvPr id="7" name="Freeform 6"/>
             <p:cNvSpPr/>
             <p:nvPr/>
           </p:nvSpPr>
           <p:spPr>
             <a:xfrm>
-              <a:off x="9110048" y="3553451"/>
-              <a:ext cx="230782" cy="853895"/>
+              <a:off x="7999984" y="3917774"/>
+              <a:ext cx="789276" cy="560802"/>
             </a:xfrm>
-            <a:prstGeom prst="roundRect">
-              <a:avLst>
-                <a:gd name="adj" fmla="val 50000"/>
-              </a:avLst>
-            </a:prstGeom>
+            <a:custGeom>
+              <a:avLst/>
+              <a:gdLst/>
+              <a:ahLst/>
+              <a:cxnLst/>
+              <a:rect l="l" t="t" r="r" b="b"/>
+              <a:pathLst>
+                <a:path w="789276" h="560802">
+                  <a:moveTo>
+                    <a:pt x="0" y="560802"/>
+                  </a:moveTo>
+                  <a:lnTo>
+                    <a:pt x="7581" y="451399"/>
+                  </a:lnTo>
+                  <a:lnTo>
+                    <a:pt x="30036" y="346197"/>
+                  </a:lnTo>
+                  <a:lnTo>
+                    <a:pt x="66511" y="249234"/>
+                  </a:lnTo>
+                  <a:lnTo>
+                    <a:pt x="115587" y="164260"/>
+                  </a:lnTo>
+                  <a:lnTo>
+                    <a:pt x="175383" y="94517"/>
+                  </a:lnTo>
+                  <a:lnTo>
+                    <a:pt x="243614" y="42683"/>
+                  </a:lnTo>
+                  <a:lnTo>
+                    <a:pt x="317649" y="10778"/>
+                  </a:lnTo>
+                  <a:lnTo>
+                    <a:pt x="394638" y="0"/>
+                  </a:lnTo>
+                  <a:lnTo>
+                    <a:pt x="471627" y="10778"/>
+                  </a:lnTo>
+                  <a:lnTo>
+                    <a:pt x="545662" y="42683"/>
+                  </a:lnTo>
+                  <a:lnTo>
+                    <a:pt x="613893" y="94517"/>
+                  </a:lnTo>
+                  <a:lnTo>
+                    <a:pt x="673689" y="164260"/>
+                  </a:lnTo>
+                  <a:lnTo>
+                    <a:pt x="722765" y="249234"/>
+                  </a:lnTo>
+                  <a:lnTo>
+                    <a:pt x="759240" y="346197"/>
+                  </a:lnTo>
+                  <a:lnTo>
+                    <a:pt x="781695" y="451399"/>
+                  </a:lnTo>
+                  <a:lnTo>
+                    <a:pt x="789276" y="560802"/>
+                  </a:lnTo>
+                  <a:close/>
+                </a:path>
+              </a:pathLst>
+            </a:custGeom>
             <a:solidFill>
-              <a:srgbClr val="FFFFFF"/>
+              <a:srgbClr val="B2B2B2"/>
             </a:solidFill>
             <a:ln>
               <a:noFill/>
@@ -12701,14 +13103,14 @@
           </p:nvSpPr>
           <p:spPr>
             <a:xfrm>
-              <a:off x="9086970" y="4591973"/>
-              <a:ext cx="276939" cy="276939"/>
+              <a:off x="9827782" y="3356972"/>
+              <a:ext cx="456949" cy="456949"/>
             </a:xfrm>
             <a:prstGeom prst="ellipse">
               <a:avLst/>
             </a:prstGeom>
             <a:solidFill>
-              <a:srgbClr val="FFFFFF"/>
+              <a:srgbClr val="FF3885"/>
             </a:solidFill>
             <a:ln>
               <a:noFill/>
@@ -12739,18 +13141,78 @@
         </p:sp>
         <p:sp>
           <p:nvSpPr>
-            <p:cNvPr id="9" name="Oval 8"/>
+            <p:cNvPr id="9" name="Freeform 8"/>
             <p:cNvSpPr/>
             <p:nvPr/>
           </p:nvSpPr>
           <p:spPr>
             <a:xfrm>
-              <a:off x="7771509" y="3253434"/>
-              <a:ext cx="230782" cy="230782"/>
+              <a:off x="9661619" y="3917774"/>
+              <a:ext cx="789276" cy="560802"/>
             </a:xfrm>
-            <a:prstGeom prst="ellipse">
+            <a:custGeom>
               <a:avLst/>
-            </a:prstGeom>
+              <a:gdLst/>
+              <a:ahLst/>
+              <a:cxnLst/>
+              <a:rect l="l" t="t" r="r" b="b"/>
+              <a:pathLst>
+                <a:path w="789276" h="560802">
+                  <a:moveTo>
+                    <a:pt x="0" y="560802"/>
+                  </a:moveTo>
+                  <a:lnTo>
+                    <a:pt x="7581" y="451399"/>
+                  </a:lnTo>
+                  <a:lnTo>
+                    <a:pt x="30036" y="346197"/>
+                  </a:lnTo>
+                  <a:lnTo>
+                    <a:pt x="66511" y="249234"/>
+                  </a:lnTo>
+                  <a:lnTo>
+                    <a:pt x="115587" y="164260"/>
+                  </a:lnTo>
+                  <a:lnTo>
+                    <a:pt x="175383" y="94517"/>
+                  </a:lnTo>
+                  <a:lnTo>
+                    <a:pt x="243614" y="42683"/>
+                  </a:lnTo>
+                  <a:lnTo>
+                    <a:pt x="317649" y="10778"/>
+                  </a:lnTo>
+                  <a:lnTo>
+                    <a:pt x="394638" y="0"/>
+                  </a:lnTo>
+                  <a:lnTo>
+                    <a:pt x="471627" y="10778"/>
+                  </a:lnTo>
+                  <a:lnTo>
+                    <a:pt x="545662" y="42683"/>
+                  </a:lnTo>
+                  <a:lnTo>
+                    <a:pt x="613893" y="94517"/>
+                  </a:lnTo>
+                  <a:lnTo>
+                    <a:pt x="673689" y="164260"/>
+                  </a:lnTo>
+                  <a:lnTo>
+                    <a:pt x="722765" y="249234"/>
+                  </a:lnTo>
+                  <a:lnTo>
+                    <a:pt x="759240" y="346197"/>
+                  </a:lnTo>
+                  <a:lnTo>
+                    <a:pt x="781695" y="451399"/>
+                  </a:lnTo>
+                  <a:lnTo>
+                    <a:pt x="789276" y="560802"/>
+                  </a:lnTo>
+                  <a:close/>
+                </a:path>
+              </a:pathLst>
+            </a:custGeom>
             <a:solidFill>
               <a:srgbClr val="FF3885"/>
             </a:solidFill>
@@ -12789,14 +13251,252 @@
           </p:nvSpPr>
           <p:spPr>
             <a:xfrm>
-              <a:off x="10471666" y="3068808"/>
-              <a:ext cx="323095" cy="323095"/>
+              <a:off x="8933500" y="3103112"/>
+              <a:ext cx="583879" cy="583879"/>
             </a:xfrm>
             <a:prstGeom prst="ellipse">
               <a:avLst/>
             </a:prstGeom>
             <a:solidFill>
-              <a:srgbClr val="B2B2B2"/>
+              <a:srgbClr val="0077FF"/>
+            </a:solidFill>
+            <a:ln>
+              <a:noFill/>
+            </a:ln>
+            <a:effectLst/>
+          </p:spPr>
+          <p:style>
+            <a:lnRef idx="1">
+              <a:schemeClr val="accent1"/>
+            </a:lnRef>
+            <a:fillRef idx="3">
+              <a:schemeClr val="accent1"/>
+            </a:fillRef>
+            <a:effectRef idx="2">
+              <a:schemeClr val="accent1"/>
+            </a:effectRef>
+            <a:fontRef idx="minor">
+              <a:schemeClr val="lt1"/>
+            </a:fontRef>
+          </p:style>
+          <p:txBody>
+            <a:bodyPr rtlCol="0" anchor="ctr"/>
+            <a:lstStyle/>
+            <a:p>
+              <a:pPr algn="ctr"/>
+            </a:p>
+          </p:txBody>
+        </p:sp>
+        <p:sp>
+          <p:nvSpPr>
+            <p:cNvPr id="11" name="Freeform 10"/>
+            <p:cNvSpPr/>
+            <p:nvPr/>
+          </p:nvSpPr>
+          <p:spPr>
+            <a:xfrm>
+              <a:off x="8721180" y="3819692"/>
+              <a:ext cx="1008519" cy="716580"/>
+            </a:xfrm>
+            <a:custGeom>
+              <a:avLst/>
+              <a:gdLst/>
+              <a:ahLst/>
+              <a:cxnLst/>
+              <a:rect l="l" t="t" r="r" b="b"/>
+              <a:pathLst>
+                <a:path w="1008519" h="716580">
+                  <a:moveTo>
+                    <a:pt x="0" y="716580"/>
+                  </a:moveTo>
+                  <a:lnTo>
+                    <a:pt x="9692" y="576783"/>
+                  </a:lnTo>
+                  <a:lnTo>
+                    <a:pt x="38379" y="442352"/>
+                  </a:lnTo>
+                  <a:lnTo>
+                    <a:pt x="84985" y="318468"/>
+                  </a:lnTo>
+                  <a:lnTo>
+                    <a:pt x="147689" y="209885"/>
+                  </a:lnTo>
+                  <a:lnTo>
+                    <a:pt x="224113" y="120768"/>
+                  </a:lnTo>
+                  <a:lnTo>
+                    <a:pt x="311291" y="54545"/>
+                  </a:lnTo>
+                  <a:lnTo>
+                    <a:pt x="405888" y="13766"/>
+                  </a:lnTo>
+                  <a:lnTo>
+                    <a:pt x="504260" y="0"/>
+                  </a:lnTo>
+                  <a:lnTo>
+                    <a:pt x="602631" y="13766"/>
+                  </a:lnTo>
+                  <a:lnTo>
+                    <a:pt x="697228" y="54545"/>
+                  </a:lnTo>
+                  <a:lnTo>
+                    <a:pt x="784406" y="120768"/>
+                  </a:lnTo>
+                  <a:lnTo>
+                    <a:pt x="860830" y="209885"/>
+                  </a:lnTo>
+                  <a:lnTo>
+                    <a:pt x="923534" y="318468"/>
+                  </a:lnTo>
+                  <a:lnTo>
+                    <a:pt x="970140" y="442352"/>
+                  </a:lnTo>
+                  <a:lnTo>
+                    <a:pt x="998827" y="576783"/>
+                  </a:lnTo>
+                  <a:lnTo>
+                    <a:pt x="1008519" y="716580"/>
+                  </a:lnTo>
+                  <a:close/>
+                </a:path>
+              </a:pathLst>
+            </a:custGeom>
+            <a:solidFill>
+              <a:srgbClr val="0077FF"/>
+            </a:solidFill>
+            <a:ln>
+              <a:noFill/>
+            </a:ln>
+            <a:effectLst/>
+          </p:spPr>
+          <p:style>
+            <a:lnRef idx="1">
+              <a:schemeClr val="accent1"/>
+            </a:lnRef>
+            <a:fillRef idx="3">
+              <a:schemeClr val="accent1"/>
+            </a:fillRef>
+            <a:effectRef idx="2">
+              <a:schemeClr val="accent1"/>
+            </a:effectRef>
+            <a:fontRef idx="minor">
+              <a:schemeClr val="lt1"/>
+            </a:fontRef>
+          </p:style>
+          <p:txBody>
+            <a:bodyPr rtlCol="0" anchor="ctr"/>
+            <a:lstStyle/>
+            <a:p>
+              <a:pPr algn="ctr"/>
+            </a:p>
+          </p:txBody>
+        </p:sp>
+        <p:sp>
+          <p:nvSpPr>
+            <p:cNvPr id="12" name="Rounded Rectangle 11"/>
+            <p:cNvSpPr/>
+            <p:nvPr/>
+          </p:nvSpPr>
+          <p:spPr>
+            <a:xfrm>
+              <a:off x="8025370" y="4972451"/>
+              <a:ext cx="2400139" cy="138469"/>
+            </a:xfrm>
+            <a:prstGeom prst="roundRect">
+              <a:avLst>
+                <a:gd name="adj" fmla="val 50000"/>
+              </a:avLst>
+            </a:prstGeom>
+            <a:solidFill>
+              <a:srgbClr val="000000"/>
+            </a:solidFill>
+            <a:ln>
+              <a:noFill/>
+            </a:ln>
+            <a:effectLst/>
+          </p:spPr>
+          <p:style>
+            <a:lnRef idx="1">
+              <a:schemeClr val="accent1"/>
+            </a:lnRef>
+            <a:fillRef idx="3">
+              <a:schemeClr val="accent1"/>
+            </a:fillRef>
+            <a:effectRef idx="2">
+              <a:schemeClr val="accent1"/>
+            </a:effectRef>
+            <a:fontRef idx="minor">
+              <a:schemeClr val="lt1"/>
+            </a:fontRef>
+          </p:style>
+          <p:txBody>
+            <a:bodyPr rtlCol="0" anchor="ctr"/>
+            <a:lstStyle/>
+            <a:p>
+              <a:pPr algn="ctr"/>
+            </a:p>
+          </p:txBody>
+        </p:sp>
+        <p:sp>
+          <p:nvSpPr>
+            <p:cNvPr id="13" name="Oval 12"/>
+            <p:cNvSpPr/>
+            <p:nvPr/>
+          </p:nvSpPr>
+          <p:spPr>
+            <a:xfrm>
+              <a:off x="10610135" y="3126190"/>
+              <a:ext cx="276939" cy="276939"/>
+            </a:xfrm>
+            <a:prstGeom prst="ellipse">
+              <a:avLst/>
+            </a:prstGeom>
+            <a:solidFill>
+              <a:srgbClr val="0077FF"/>
+            </a:solidFill>
+            <a:ln>
+              <a:noFill/>
+            </a:ln>
+            <a:effectLst/>
+          </p:spPr>
+          <p:style>
+            <a:lnRef idx="1">
+              <a:schemeClr val="accent1"/>
+            </a:lnRef>
+            <a:fillRef idx="3">
+              <a:schemeClr val="accent1"/>
+            </a:fillRef>
+            <a:effectRef idx="2">
+              <a:schemeClr val="accent1"/>
+            </a:effectRef>
+            <a:fontRef idx="minor">
+              <a:schemeClr val="lt1"/>
+            </a:fontRef>
+          </p:style>
+          <p:txBody>
+            <a:bodyPr rtlCol="0" anchor="ctr"/>
+            <a:lstStyle/>
+            <a:p>
+              <a:pPr algn="ctr"/>
+            </a:p>
+          </p:txBody>
+        </p:sp>
+        <p:sp>
+          <p:nvSpPr>
+            <p:cNvPr id="14" name="Oval 13"/>
+            <p:cNvSpPr/>
+            <p:nvPr/>
+          </p:nvSpPr>
+          <p:spPr>
+            <a:xfrm>
+              <a:off x="7586883" y="3472364"/>
+              <a:ext cx="184626" cy="184626"/>
+            </a:xfrm>
+            <a:prstGeom prst="ellipse">
+              <a:avLst/>
+            </a:prstGeom>
+            <a:solidFill>
+              <a:srgbClr val="FF3885"/>
             </a:solidFill>
             <a:ln>
               <a:noFill/>
@@ -12860,7 +13560,7 @@
         <p:spPr>
           <a:xfrm>
             <a:off x="677875" y="692177"/>
-            <a:ext cx="10855391" cy="822960"/>
+            <a:ext cx="10855391" cy="1447800"/>
           </a:xfrm>
           <a:prstGeom prst="rect">
             <a:avLst/>
@@ -12895,7 +13595,7 @@
                 <a:ea typeface="Arial"/>
                 <a:cs typeface="Arial"/>
               </a:rPr>
-              <a:t>Стоимость и ресурсы</a:t>
+              <a:t>Инференс за 6 недель стоит 1 400 рублей</a:t>
             </a:r>
           </a:p>
         </p:txBody>
@@ -12908,8 +13608,8 @@
         </p:nvSpPr>
         <p:spPr>
           <a:xfrm>
-            <a:off x="677875" y="1783080"/>
-            <a:ext cx="10855391" cy="1158240"/>
+            <a:off x="677875" y="3447122"/>
+            <a:ext cx="5874193" cy="1686560"/>
           </a:xfrm>
           <a:prstGeom prst="rect">
             <a:avLst/>
@@ -12944,87 +13644,17 @@
                 <a:ea typeface="Play"/>
                 <a:cs typeface="Play"/>
               </a:rPr>
-              <a:t>Модель gpt-oss-20b подключается по OpenAI-совместимому протоколу</a:t>
+              <a:t>• Сервис на 2 vCPU / 2 GB RAM</a:t>
             </a:r>
           </a:p>
-        </p:txBody>
-      </p:sp>
-      <p:sp>
-        <p:nvSpPr>
-          <p:cNvPr id="4" name="stat_0:bar"/>
-          <p:cNvSpPr/>
-          <p:nvPr/>
-        </p:nvSpPr>
-        <p:spPr>
-          <a:xfrm>
-            <a:off x="677875" y="3256788"/>
-            <a:ext cx="50800" cy="1810512"/>
-          </a:xfrm>
-          <a:prstGeom prst="rect">
-            <a:avLst/>
-          </a:prstGeom>
-          <a:solidFill>
-            <a:srgbClr val="0077FF"/>
-          </a:solidFill>
-          <a:ln>
-            <a:noFill/>
-          </a:ln>
-          <a:effectLst/>
-        </p:spPr>
-        <p:style>
-          <a:lnRef idx="1">
-            <a:schemeClr val="accent1"/>
-          </a:lnRef>
-          <a:fillRef idx="3">
-            <a:schemeClr val="accent1"/>
-          </a:fillRef>
-          <a:effectRef idx="2">
-            <a:schemeClr val="accent1"/>
-          </a:effectRef>
-          <a:fontRef idx="minor">
-            <a:schemeClr val="lt1"/>
-          </a:fontRef>
-        </p:style>
-        <p:txBody>
-          <a:bodyPr rtlCol="0" anchor="ctr"/>
-          <a:lstStyle/>
           <a:p>
-            <a:pPr algn="ctr"/>
-          </a:p>
-        </p:txBody>
-      </p:sp>
-      <p:sp>
-        <p:nvSpPr>
-          <p:cNvPr id="5" name="stat_0"/>
-          <p:cNvSpPr txBox="1"/>
-          <p:nvPr/>
-        </p:nvSpPr>
-        <p:spPr>
-          <a:xfrm>
-            <a:off x="855675" y="3147060"/>
-            <a:ext cx="5032787" cy="1920239"/>
-          </a:xfrm>
-          <a:prstGeom prst="rect">
-            <a:avLst/>
-          </a:prstGeom>
-          <a:noFill/>
-        </p:spPr>
-        <p:txBody>
-          <a:bodyPr wrap="square" lIns="76200" rIns="76200" tIns="0" bIns="0">
-            <a:spAutoFit/>
-          </a:bodyPr>
-          <a:lstStyle/>
-          <a:p>
-            <a:pPr>
-              <a:lnSpc>
-                <a:spcPct val="100000"/>
-              </a:lnSpc>
-              <a:spcAft>
-                <a:spcPts val="200"/>
-              </a:spcAft>
-              <a:defRPr sz="4800" b="1">
-                <a:solidFill>
-                  <a:srgbClr val="0077FF"/>
+            <a:pPr algn="l">
+              <a:spcAft>
+                <a:spcPts val="300"/>
+              </a:spcAft>
+              <a:defRPr sz="3200">
+                <a:solidFill>
+                  <a:srgbClr val="000000"/>
                 </a:solidFill>
                 <a:latin typeface="Play"/>
                 <a:ea typeface="Play"/>
@@ -13032,167 +13662,606 @@
               </a:defRPr>
             </a:pPr>
             <a:r>
-              <a:rPr sz="4800" b="1">
-                <a:solidFill>
-                  <a:srgbClr val="0077FF"/>
+              <a:rPr sz="3200">
+                <a:solidFill>
+                  <a:srgbClr val="000000"/>
                 </a:solidFill>
                 <a:latin typeface="Play"/>
                 <a:ea typeface="Play"/>
                 <a:cs typeface="Play"/>
               </a:rPr>
-              <a:t>2 vCPU</a:t>
-            </a:r>
-          </a:p>
-          <a:p>
-            <a:pPr>
-              <a:spcAft>
-                <a:spcPts val="300"/>
-              </a:spcAft>
-              <a:defRPr sz="3200" b="0">
-                <a:solidFill>
-                  <a:srgbClr val="000000"/>
-                </a:solidFill>
-                <a:latin typeface="Play"/>
-                <a:ea typeface="Play"/>
-                <a:cs typeface="Play"/>
-              </a:defRPr>
-            </a:pPr>
-            <a:r>
-              <a:rPr sz="3200" b="0">
-                <a:solidFill>
-                  <a:srgbClr val="000000"/>
-                </a:solidFill>
-                <a:latin typeface="Play"/>
-                <a:ea typeface="Play"/>
-                <a:cs typeface="Play"/>
-              </a:rPr>
-              <a:t>Сервис использует 2 vCPU / 2 GB RAM</a:t>
+              <a:t>• Модель gpt-oss-20b</a:t>
             </a:r>
           </a:p>
         </p:txBody>
       </p:sp>
-      <p:sp>
-        <p:nvSpPr>
-          <p:cNvPr id="6" name="stat_1:bar"/>
-          <p:cNvSpPr/>
+      <p:grpSp>
+        <p:nvGrpSpPr>
+          <p:cNvPr id="4" name="illustration:builtin-money"/>
+          <p:cNvGrpSpPr/>
           <p:nvPr/>
-        </p:nvSpPr>
-        <p:spPr>
+        </p:nvGrpSpPr>
+        <p:grpSpPr>
           <a:xfrm>
-            <a:off x="6322678" y="3256788"/>
-            <a:ext cx="50800" cy="1810512"/>
+            <a:off x="7771683" y="2836539"/>
+            <a:ext cx="2907725" cy="2907725"/>
+            <a:chOff x="7771683" y="2836539"/>
+            <a:chExt cx="2907725" cy="2907725"/>
           </a:xfrm>
-          <a:prstGeom prst="rect">
-            <a:avLst/>
-          </a:prstGeom>
-          <a:solidFill>
-            <a:srgbClr val="0077FF"/>
-          </a:solidFill>
-          <a:ln>
+        </p:grpSpPr>
+        <p:sp>
+          <p:nvSpPr>
+            <p:cNvPr id="5" name="Oval 4"/>
+            <p:cNvSpPr/>
+            <p:nvPr/>
+          </p:nvSpPr>
+          <p:spPr>
+            <a:xfrm>
+              <a:off x="7771683" y="2836539"/>
+              <a:ext cx="2907725" cy="2907725"/>
+            </a:xfrm>
+            <a:prstGeom prst="ellipse">
+              <a:avLst/>
+            </a:prstGeom>
+            <a:solidFill>
+              <a:srgbClr val="D6E9FF"/>
+            </a:solidFill>
+            <a:ln>
+              <a:noFill/>
+            </a:ln>
+            <a:effectLst/>
+          </p:spPr>
+          <p:style>
+            <a:lnRef idx="1">
+              <a:schemeClr val="accent1"/>
+            </a:lnRef>
+            <a:fillRef idx="3">
+              <a:schemeClr val="accent1"/>
+            </a:fillRef>
+            <a:effectRef idx="2">
+              <a:schemeClr val="accent1"/>
+            </a:effectRef>
+            <a:fontRef idx="minor">
+              <a:schemeClr val="lt1"/>
+            </a:fontRef>
+          </p:style>
+          <p:txBody>
+            <a:bodyPr rtlCol="0" anchor="ctr"/>
+            <a:lstStyle/>
+            <a:p>
+              <a:pPr algn="ctr"/>
+            </a:p>
+          </p:txBody>
+        </p:sp>
+        <p:sp>
+          <p:nvSpPr>
+            <p:cNvPr id="6" name="Rounded Rectangle 5"/>
+            <p:cNvSpPr/>
+            <p:nvPr/>
+          </p:nvSpPr>
+          <p:spPr>
+            <a:xfrm>
+              <a:off x="7979378" y="3667318"/>
+              <a:ext cx="2030792" cy="1200013"/>
+            </a:xfrm>
+            <a:prstGeom prst="roundRect">
+              <a:avLst>
+                <a:gd name="adj" fmla="val 13461"/>
+              </a:avLst>
+            </a:prstGeom>
+            <a:solidFill>
+              <a:srgbClr val="0077FF"/>
+            </a:solidFill>
+            <a:ln>
+              <a:noFill/>
+            </a:ln>
+            <a:effectLst/>
+          </p:spPr>
+          <p:style>
+            <a:lnRef idx="1">
+              <a:schemeClr val="accent1"/>
+            </a:lnRef>
+            <a:fillRef idx="3">
+              <a:schemeClr val="accent1"/>
+            </a:fillRef>
+            <a:effectRef idx="2">
+              <a:schemeClr val="accent1"/>
+            </a:effectRef>
+            <a:fontRef idx="minor">
+              <a:schemeClr val="lt1"/>
+            </a:fontRef>
+          </p:style>
+          <p:txBody>
+            <a:bodyPr rtlCol="0" anchor="ctr"/>
+            <a:lstStyle/>
+            <a:p>
+              <a:pPr algn="ctr"/>
+            </a:p>
+          </p:txBody>
+        </p:sp>
+        <p:sp>
+          <p:nvSpPr>
+            <p:cNvPr id="7" name="Oval 6"/>
+            <p:cNvSpPr/>
+            <p:nvPr/>
+          </p:nvSpPr>
+          <p:spPr>
+            <a:xfrm>
+              <a:off x="8648616" y="3921167"/>
+              <a:ext cx="692315" cy="692315"/>
+            </a:xfrm>
+            <a:prstGeom prst="ellipse">
+              <a:avLst/>
+            </a:prstGeom>
+            <a:solidFill>
+              <a:srgbClr val="FFFFFF"/>
+            </a:solidFill>
+            <a:ln>
+              <a:noFill/>
+            </a:ln>
+            <a:effectLst/>
+          </p:spPr>
+          <p:style>
+            <a:lnRef idx="1">
+              <a:schemeClr val="accent1"/>
+            </a:lnRef>
+            <a:fillRef idx="3">
+              <a:schemeClr val="accent1"/>
+            </a:fillRef>
+            <a:effectRef idx="2">
+              <a:schemeClr val="accent1"/>
+            </a:effectRef>
+            <a:fontRef idx="minor">
+              <a:schemeClr val="lt1"/>
+            </a:fontRef>
+          </p:style>
+          <p:txBody>
+            <a:bodyPr rtlCol="0" anchor="ctr"/>
+            <a:lstStyle/>
+            <a:p>
+              <a:pPr algn="ctr"/>
+            </a:p>
+          </p:txBody>
+        </p:sp>
+        <p:sp>
+          <p:nvSpPr>
+            <p:cNvPr id="8" name="Freeform 7"/>
+            <p:cNvSpPr/>
+            <p:nvPr/>
+          </p:nvSpPr>
+          <p:spPr>
+            <a:xfrm>
+              <a:off x="8856311" y="4082707"/>
+              <a:ext cx="276926" cy="392312"/>
+            </a:xfrm>
+            <a:custGeom>
+              <a:avLst/>
+              <a:gdLst/>
+              <a:ahLst/>
+              <a:cxnLst/>
+              <a:rect l="l" t="t" r="r" b="b"/>
+              <a:pathLst>
+                <a:path w="276926" h="392312">
+                  <a:moveTo>
+                    <a:pt x="69232" y="392312"/>
+                  </a:moveTo>
+                  <a:lnTo>
+                    <a:pt x="69232" y="0"/>
+                  </a:lnTo>
+                  <a:lnTo>
+                    <a:pt x="184618" y="0"/>
+                  </a:lnTo>
+                  <a:lnTo>
+                    <a:pt x="202629" y="1777"/>
+                  </a:lnTo>
+                  <a:lnTo>
+                    <a:pt x="219937" y="7027"/>
+                  </a:lnTo>
+                  <a:lnTo>
+                    <a:pt x="235907" y="15554"/>
+                  </a:lnTo>
+                  <a:lnTo>
+                    <a:pt x="249891" y="27035"/>
+                  </a:lnTo>
+                  <a:lnTo>
+                    <a:pt x="261372" y="41020"/>
+                  </a:lnTo>
+                  <a:lnTo>
+                    <a:pt x="269899" y="56989"/>
+                  </a:lnTo>
+                  <a:lnTo>
+                    <a:pt x="275149" y="74297"/>
+                  </a:lnTo>
+                  <a:lnTo>
+                    <a:pt x="276926" y="92309"/>
+                  </a:lnTo>
+                  <a:lnTo>
+                    <a:pt x="275149" y="110320"/>
+                  </a:lnTo>
+                  <a:lnTo>
+                    <a:pt x="269899" y="127628"/>
+                  </a:lnTo>
+                  <a:lnTo>
+                    <a:pt x="261372" y="143598"/>
+                  </a:lnTo>
+                  <a:lnTo>
+                    <a:pt x="249891" y="157582"/>
+                  </a:lnTo>
+                  <a:lnTo>
+                    <a:pt x="235907" y="169063"/>
+                  </a:lnTo>
+                  <a:lnTo>
+                    <a:pt x="219937" y="177590"/>
+                  </a:lnTo>
+                  <a:lnTo>
+                    <a:pt x="202629" y="182840"/>
+                  </a:lnTo>
+                  <a:lnTo>
+                    <a:pt x="184618" y="184617"/>
+                  </a:lnTo>
+                  <a:lnTo>
+                    <a:pt x="0" y="184617"/>
+                  </a:lnTo>
+                </a:path>
+              </a:pathLst>
+            </a:custGeom>
             <a:noFill/>
-          </a:ln>
-          <a:effectLst/>
-        </p:spPr>
-        <p:style>
-          <a:lnRef idx="1">
-            <a:schemeClr val="accent1"/>
-          </a:lnRef>
-          <a:fillRef idx="3">
-            <a:schemeClr val="accent1"/>
-          </a:fillRef>
-          <a:effectRef idx="2">
-            <a:schemeClr val="accent1"/>
-          </a:effectRef>
-          <a:fontRef idx="minor">
-            <a:schemeClr val="lt1"/>
-          </a:fontRef>
-        </p:style>
-        <p:txBody>
-          <a:bodyPr rtlCol="0" anchor="ctr"/>
-          <a:lstStyle/>
-          <a:p>
-            <a:pPr algn="ctr"/>
-          </a:p>
-        </p:txBody>
-      </p:sp>
-      <p:sp>
-        <p:nvSpPr>
-          <p:cNvPr id="7" name="stat_1"/>
-          <p:cNvSpPr txBox="1"/>
-          <p:nvPr/>
-        </p:nvSpPr>
-        <p:spPr>
-          <a:xfrm>
-            <a:off x="6500478" y="3147060"/>
-            <a:ext cx="5032787" cy="1920239"/>
-          </a:xfrm>
-          <a:prstGeom prst="rect">
-            <a:avLst/>
-          </a:prstGeom>
-          <a:noFill/>
-        </p:spPr>
-        <p:txBody>
-          <a:bodyPr wrap="square" lIns="76200" rIns="76200" tIns="0" bIns="0">
-            <a:spAutoFit/>
-          </a:bodyPr>
-          <a:lstStyle/>
-          <a:p>
-            <a:pPr>
-              <a:lnSpc>
-                <a:spcPct val="100000"/>
-              </a:lnSpc>
-              <a:spcAft>
-                <a:spcPts val="200"/>
-              </a:spcAft>
-              <a:defRPr sz="4800" b="1">
-                <a:solidFill>
-                  <a:srgbClr val="0077FF"/>
-                </a:solidFill>
-                <a:latin typeface="Play"/>
-                <a:ea typeface="Play"/>
-                <a:cs typeface="Play"/>
-              </a:defRPr>
-            </a:pPr>
-            <a:r>
-              <a:rPr sz="4800" b="1">
-                <a:solidFill>
-                  <a:srgbClr val="0077FF"/>
-                </a:solidFill>
-                <a:latin typeface="Play"/>
-                <a:ea typeface="Play"/>
-                <a:cs typeface="Play"/>
-              </a:rPr>
-              <a:t>6 нед.</a:t>
-            </a:r>
-          </a:p>
-          <a:p>
-            <a:pPr>
-              <a:spcAft>
-                <a:spcPts val="300"/>
-              </a:spcAft>
-              <a:defRPr sz="3200" b="0">
-                <a:solidFill>
-                  <a:srgbClr val="000000"/>
-                </a:solidFill>
-                <a:latin typeface="Play"/>
-                <a:ea typeface="Play"/>
-                <a:cs typeface="Play"/>
-              </a:defRPr>
-            </a:pPr>
-            <a:r>
-              <a:rPr sz="3200" b="0">
-                <a:solidFill>
-                  <a:srgbClr val="000000"/>
-                </a:solidFill>
-                <a:latin typeface="Play"/>
-                <a:ea typeface="Play"/>
-                <a:cs typeface="Play"/>
-              </a:rPr>
-              <a:t>Инференс за 6 недель пилота 1 400 руб</a:t>
-            </a:r>
-          </a:p>
-        </p:txBody>
-      </p:sp>
+            <a:ln w="69231" cap="rnd">
+              <a:solidFill>
+                <a:srgbClr val="0077FF"/>
+              </a:solidFill>
+              <a:round/>
+            </a:ln>
+            <a:effectLst/>
+          </p:spPr>
+          <p:style>
+            <a:lnRef idx="1">
+              <a:schemeClr val="accent1"/>
+            </a:lnRef>
+            <a:fillRef idx="3">
+              <a:schemeClr val="accent1"/>
+            </a:fillRef>
+            <a:effectRef idx="2">
+              <a:schemeClr val="accent1"/>
+            </a:effectRef>
+            <a:fontRef idx="minor">
+              <a:schemeClr val="lt1"/>
+            </a:fontRef>
+          </p:style>
+          <p:txBody>
+            <a:bodyPr rtlCol="0" anchor="ctr"/>
+            <a:lstStyle/>
+            <a:p>
+              <a:pPr algn="ctr"/>
+            </a:p>
+          </p:txBody>
+        </p:sp>
+        <p:sp>
+          <p:nvSpPr>
+            <p:cNvPr id="9" name="Freeform 8"/>
+            <p:cNvSpPr/>
+            <p:nvPr/>
+          </p:nvSpPr>
+          <p:spPr>
+            <a:xfrm>
+              <a:off x="8856311" y="4371172"/>
+              <a:ext cx="207695" cy="0"/>
+            </a:xfrm>
+            <a:custGeom>
+              <a:avLst/>
+              <a:gdLst/>
+              <a:ahLst/>
+              <a:cxnLst/>
+              <a:rect l="l" t="t" r="r" b="b"/>
+              <a:pathLst>
+                <a:path w="207695" h="0">
+                  <a:moveTo>
+                    <a:pt x="0" y="0"/>
+                  </a:moveTo>
+                  <a:lnTo>
+                    <a:pt x="207695" y="0"/>
+                  </a:lnTo>
+                </a:path>
+              </a:pathLst>
+            </a:custGeom>
+            <a:solidFill>
+              <a:srgbClr val="000000"/>
+            </a:solidFill>
+            <a:ln w="69231" cap="rnd">
+              <a:solidFill>
+                <a:srgbClr val="0077FF"/>
+              </a:solidFill>
+              <a:round/>
+            </a:ln>
+            <a:effectLst/>
+          </p:spPr>
+          <p:style>
+            <a:lnRef idx="1">
+              <a:schemeClr val="accent1"/>
+            </a:lnRef>
+            <a:fillRef idx="3">
+              <a:schemeClr val="accent1"/>
+            </a:fillRef>
+            <a:effectRef idx="2">
+              <a:schemeClr val="accent1"/>
+            </a:effectRef>
+            <a:fontRef idx="minor">
+              <a:schemeClr val="lt1"/>
+            </a:fontRef>
+          </p:style>
+          <p:txBody>
+            <a:bodyPr rtlCol="0" anchor="ctr"/>
+            <a:lstStyle/>
+            <a:p>
+              <a:pPr algn="ctr"/>
+            </a:p>
+          </p:txBody>
+        </p:sp>
+        <p:sp>
+          <p:nvSpPr>
+            <p:cNvPr id="10" name="Oval 9"/>
+            <p:cNvSpPr/>
+            <p:nvPr/>
+          </p:nvSpPr>
+          <p:spPr>
+            <a:xfrm>
+              <a:off x="9687090" y="5075026"/>
+              <a:ext cx="923087" cy="276926"/>
+            </a:xfrm>
+            <a:prstGeom prst="ellipse">
+              <a:avLst/>
+            </a:prstGeom>
+            <a:solidFill>
+              <a:srgbClr val="FF3885"/>
+            </a:solidFill>
+            <a:ln>
+              <a:noFill/>
+            </a:ln>
+            <a:effectLst/>
+          </p:spPr>
+          <p:style>
+            <a:lnRef idx="1">
+              <a:schemeClr val="accent1"/>
+            </a:lnRef>
+            <a:fillRef idx="3">
+              <a:schemeClr val="accent1"/>
+            </a:fillRef>
+            <a:effectRef idx="2">
+              <a:schemeClr val="accent1"/>
+            </a:effectRef>
+            <a:fontRef idx="minor">
+              <a:schemeClr val="lt1"/>
+            </a:fontRef>
+          </p:style>
+          <p:txBody>
+            <a:bodyPr rtlCol="0" anchor="ctr"/>
+            <a:lstStyle/>
+            <a:p>
+              <a:pPr algn="ctr"/>
+            </a:p>
+          </p:txBody>
+        </p:sp>
+        <p:sp>
+          <p:nvSpPr>
+            <p:cNvPr id="11" name="Oval 10"/>
+            <p:cNvSpPr/>
+            <p:nvPr/>
+          </p:nvSpPr>
+          <p:spPr>
+            <a:xfrm>
+              <a:off x="9687090" y="4867331"/>
+              <a:ext cx="923087" cy="276926"/>
+            </a:xfrm>
+            <a:prstGeom prst="ellipse">
+              <a:avLst/>
+            </a:prstGeom>
+            <a:solidFill>
+              <a:srgbClr val="B2B2B2"/>
+            </a:solidFill>
+            <a:ln>
+              <a:noFill/>
+            </a:ln>
+            <a:effectLst/>
+          </p:spPr>
+          <p:style>
+            <a:lnRef idx="1">
+              <a:schemeClr val="accent1"/>
+            </a:lnRef>
+            <a:fillRef idx="3">
+              <a:schemeClr val="accent1"/>
+            </a:fillRef>
+            <a:effectRef idx="2">
+              <a:schemeClr val="accent1"/>
+            </a:effectRef>
+            <a:fontRef idx="minor">
+              <a:schemeClr val="lt1"/>
+            </a:fontRef>
+          </p:style>
+          <p:txBody>
+            <a:bodyPr rtlCol="0" anchor="ctr"/>
+            <a:lstStyle/>
+            <a:p>
+              <a:pPr algn="ctr"/>
+            </a:p>
+          </p:txBody>
+        </p:sp>
+        <p:sp>
+          <p:nvSpPr>
+            <p:cNvPr id="12" name="Oval 11"/>
+            <p:cNvSpPr/>
+            <p:nvPr/>
+          </p:nvSpPr>
+          <p:spPr>
+            <a:xfrm>
+              <a:off x="9687090" y="4659636"/>
+              <a:ext cx="923087" cy="276926"/>
+            </a:xfrm>
+            <a:prstGeom prst="ellipse">
+              <a:avLst/>
+            </a:prstGeom>
+            <a:solidFill>
+              <a:srgbClr val="FF3885"/>
+            </a:solidFill>
+            <a:ln>
+              <a:noFill/>
+            </a:ln>
+            <a:effectLst/>
+          </p:spPr>
+          <p:style>
+            <a:lnRef idx="1">
+              <a:schemeClr val="accent1"/>
+            </a:lnRef>
+            <a:fillRef idx="3">
+              <a:schemeClr val="accent1"/>
+            </a:fillRef>
+            <a:effectRef idx="2">
+              <a:schemeClr val="accent1"/>
+            </a:effectRef>
+            <a:fontRef idx="minor">
+              <a:schemeClr val="lt1"/>
+            </a:fontRef>
+          </p:style>
+          <p:txBody>
+            <a:bodyPr rtlCol="0" anchor="ctr"/>
+            <a:lstStyle/>
+            <a:p>
+              <a:pPr algn="ctr"/>
+            </a:p>
+          </p:txBody>
+        </p:sp>
+        <p:sp>
+          <p:nvSpPr>
+            <p:cNvPr id="13" name="Oval 12"/>
+            <p:cNvSpPr/>
+            <p:nvPr/>
+          </p:nvSpPr>
+          <p:spPr>
+            <a:xfrm>
+              <a:off x="9687090" y="4451942"/>
+              <a:ext cx="923087" cy="276926"/>
+            </a:xfrm>
+            <a:prstGeom prst="ellipse">
+              <a:avLst/>
+            </a:prstGeom>
+            <a:solidFill>
+              <a:srgbClr val="B2B2B2"/>
+            </a:solidFill>
+            <a:ln>
+              <a:noFill/>
+            </a:ln>
+            <a:effectLst/>
+          </p:spPr>
+          <p:style>
+            <a:lnRef idx="1">
+              <a:schemeClr val="accent1"/>
+            </a:lnRef>
+            <a:fillRef idx="3">
+              <a:schemeClr val="accent1"/>
+            </a:fillRef>
+            <a:effectRef idx="2">
+              <a:schemeClr val="accent1"/>
+            </a:effectRef>
+            <a:fontRef idx="minor">
+              <a:schemeClr val="lt1"/>
+            </a:fontRef>
+          </p:style>
+          <p:txBody>
+            <a:bodyPr rtlCol="0" anchor="ctr"/>
+            <a:lstStyle/>
+            <a:p>
+              <a:pPr algn="ctr"/>
+            </a:p>
+          </p:txBody>
+        </p:sp>
+        <p:sp>
+          <p:nvSpPr>
+            <p:cNvPr id="14" name="Oval 13"/>
+            <p:cNvSpPr/>
+            <p:nvPr/>
+          </p:nvSpPr>
+          <p:spPr>
+            <a:xfrm>
+              <a:off x="9687090" y="4244247"/>
+              <a:ext cx="923087" cy="276926"/>
+            </a:xfrm>
+            <a:prstGeom prst="ellipse">
+              <a:avLst/>
+            </a:prstGeom>
+            <a:solidFill>
+              <a:srgbClr val="FF3885"/>
+            </a:solidFill>
+            <a:ln>
+              <a:noFill/>
+            </a:ln>
+            <a:effectLst/>
+          </p:spPr>
+          <p:style>
+            <a:lnRef idx="1">
+              <a:schemeClr val="accent1"/>
+            </a:lnRef>
+            <a:fillRef idx="3">
+              <a:schemeClr val="accent1"/>
+            </a:fillRef>
+            <a:effectRef idx="2">
+              <a:schemeClr val="accent1"/>
+            </a:effectRef>
+            <a:fontRef idx="minor">
+              <a:schemeClr val="lt1"/>
+            </a:fontRef>
+          </p:style>
+          <p:txBody>
+            <a:bodyPr rtlCol="0" anchor="ctr"/>
+            <a:lstStyle/>
+            <a:p>
+              <a:pPr algn="ctr"/>
+            </a:p>
+          </p:txBody>
+        </p:sp>
+        <p:sp>
+          <p:nvSpPr>
+            <p:cNvPr id="15" name="Oval 14"/>
+            <p:cNvSpPr/>
+            <p:nvPr/>
+          </p:nvSpPr>
+          <p:spPr>
+            <a:xfrm>
+              <a:off x="7887069" y="5098103"/>
+              <a:ext cx="276926" cy="276926"/>
+            </a:xfrm>
+            <a:prstGeom prst="ellipse">
+              <a:avLst/>
+            </a:prstGeom>
+            <a:solidFill>
+              <a:srgbClr val="FF3885"/>
+            </a:solidFill>
+            <a:ln>
+              <a:noFill/>
+            </a:ln>
+            <a:effectLst/>
+          </p:spPr>
+          <p:style>
+            <a:lnRef idx="1">
+              <a:schemeClr val="accent1"/>
+            </a:lnRef>
+            <a:fillRef idx="3">
+              <a:schemeClr val="accent1"/>
+            </a:fillRef>
+            <a:effectRef idx="2">
+              <a:schemeClr val="accent1"/>
+            </a:effectRef>
+            <a:fontRef idx="minor">
+              <a:schemeClr val="lt1"/>
+            </a:fontRef>
+          </p:style>
+          <p:txBody>
+            <a:bodyPr rtlCol="0" anchor="ctr"/>
+            <a:lstStyle/>
+            <a:p>
+              <a:pPr algn="ctr"/>
+            </a:p>
+          </p:txBody>
+        </p:sp>
+      </p:grpSp>
     </p:spTree>
   </p:cSld>
   <p:clrMapOvr>
@@ -13336,7 +14405,7 @@
         <p:spPr>
           <a:xfrm>
             <a:off x="677387" y="692177"/>
-            <a:ext cx="10855878" cy="822960"/>
+            <a:ext cx="10855878" cy="1447800"/>
           </a:xfrm>
           <a:prstGeom prst="rect">
             <a:avLst/>
@@ -13371,107 +14440,21 @@
                 <a:ea typeface="Arial"/>
                 <a:cs typeface="Arial"/>
               </a:rPr>
-              <a:t>План развития</a:t>
+              <a:t>Главный риск — нагрузка выше 20 задач</a:t>
             </a:r>
           </a:p>
         </p:txBody>
       </p:sp>
       <p:sp>
         <p:nvSpPr>
-          <p:cNvPr id="451" name="Rectangle 450"/>
-          <p:cNvSpPr/>
-          <p:nvPr/>
-        </p:nvSpPr>
-        <p:spPr>
-          <a:xfrm>
-            <a:off x="6288206" y="3815229"/>
-            <a:ext cx="5245059" cy="132531"/>
-          </a:xfrm>
-          <a:prstGeom prst="rect">
-            <a:avLst/>
-          </a:prstGeom>
-          <a:solidFill>
-            <a:srgbClr val="0077FF"/>
-          </a:solidFill>
-          <a:ln>
-            <a:noFill/>
-          </a:ln>
-        </p:spPr>
-        <p:style>
-          <a:lnRef idx="1">
-            <a:schemeClr val="accent1"/>
-          </a:lnRef>
-          <a:fillRef idx="3">
-            <a:schemeClr val="accent1"/>
-          </a:fillRef>
-          <a:effectRef idx="2">
-            <a:schemeClr val="accent1"/>
-          </a:effectRef>
-          <a:fontRef idx="minor">
-            <a:schemeClr val="lt1"/>
-          </a:fontRef>
-        </p:style>
-        <p:txBody>
-          <a:bodyPr rtlCol="0" anchor="ctr"/>
-          <a:lstStyle/>
-          <a:p>
-            <a:pPr algn="ctr"/>
-          </a:p>
-        </p:txBody>
-      </p:sp>
-      <p:sp>
-        <p:nvSpPr>
-          <p:cNvPr id="452" name="Oval 451"/>
-          <p:cNvSpPr/>
-          <p:nvPr/>
-        </p:nvSpPr>
-        <p:spPr>
-          <a:xfrm>
-            <a:off x="6900129" y="3619242"/>
-            <a:ext cx="524505" cy="524505"/>
-          </a:xfrm>
-          <a:prstGeom prst="ellipse">
-            <a:avLst/>
-          </a:prstGeom>
-          <a:solidFill>
-            <a:srgbClr val="0077FF"/>
-          </a:solidFill>
-          <a:ln>
-            <a:noFill/>
-          </a:ln>
-        </p:spPr>
-        <p:style>
-          <a:lnRef idx="1">
-            <a:schemeClr val="accent1"/>
-          </a:lnRef>
-          <a:fillRef idx="3">
-            <a:schemeClr val="accent1"/>
-          </a:fillRef>
-          <a:effectRef idx="2">
-            <a:schemeClr val="accent1"/>
-          </a:effectRef>
-          <a:fontRef idx="minor">
-            <a:schemeClr val="lt1"/>
-          </a:fontRef>
-        </p:style>
-        <p:txBody>
-          <a:bodyPr rtlCol="0" anchor="ctr"/>
-          <a:lstStyle/>
-          <a:p>
-            <a:pPr algn="ctr"/>
-          </a:p>
-        </p:txBody>
-      </p:sp>
-      <p:sp>
-        <p:nvSpPr>
-          <p:cNvPr id="453" name="TextBox 452"/>
+          <p:cNvPr id="451" name="body"/>
           <p:cNvSpPr txBox="1"/>
           <p:nvPr/>
         </p:nvSpPr>
         <p:spPr>
           <a:xfrm>
-            <a:off x="6288206" y="1783080"/>
-            <a:ext cx="2622529" cy="1678732"/>
+            <a:off x="677387" y="2852762"/>
+            <a:ext cx="5874466" cy="2875280"/>
           </a:xfrm>
           <a:prstGeom prst="rect">
             <a:avLst/>
@@ -13479,13 +14462,16 @@
           <a:noFill/>
         </p:spPr>
         <p:txBody>
-          <a:bodyPr wrap="square" lIns="12700" rIns="12700" tIns="12700" bIns="12700">
+          <a:bodyPr wrap="square" lIns="76200" rIns="76200" tIns="50800" bIns="50800">
             <a:spAutoFit/>
           </a:bodyPr>
           <a:lstStyle/>
           <a:p>
-            <a:pPr algn="ctr">
-              <a:defRPr sz="1400" b="0">
+            <a:pPr algn="l">
+              <a:spcAft>
+                <a:spcPts val="300"/>
+              </a:spcAft>
+              <a:defRPr sz="2400" b="1">
                 <a:solidFill>
                   <a:srgbClr val="000000"/>
                 </a:solidFill>
@@ -13495,7 +14481,7 @@
               </a:defRPr>
             </a:pPr>
             <a:r>
-              <a:rPr sz="1400" b="0">
+              <a:rPr sz="2400" b="1">
                 <a:solidFill>
                   <a:srgbClr val="000000"/>
                 </a:solidFill>
@@ -13503,78 +14489,15 @@
                 <a:ea typeface="Play"/>
                 <a:cs typeface="Play"/>
               </a:rPr>
-              <a:t>Третий квартал 2026</a:t>
+              <a:t>• Модель может выдумать цифры, аудит проверяет</a:t>
             </a:r>
           </a:p>
-        </p:txBody>
-      </p:sp>
-      <p:sp>
-        <p:nvSpPr>
-          <p:cNvPr id="454" name="Oval 453"/>
-          <p:cNvSpPr/>
-          <p:nvPr/>
-        </p:nvSpPr>
-        <p:spPr>
-          <a:xfrm>
-            <a:off x="8648482" y="3619242"/>
-            <a:ext cx="524505" cy="524505"/>
-          </a:xfrm>
-          <a:prstGeom prst="ellipse">
-            <a:avLst/>
-          </a:prstGeom>
-          <a:solidFill>
-            <a:srgbClr val="0077FF"/>
-          </a:solidFill>
-          <a:ln>
-            <a:noFill/>
-          </a:ln>
-        </p:spPr>
-        <p:style>
-          <a:lnRef idx="1">
-            <a:schemeClr val="accent1"/>
-          </a:lnRef>
-          <a:fillRef idx="3">
-            <a:schemeClr val="accent1"/>
-          </a:fillRef>
-          <a:effectRef idx="2">
-            <a:schemeClr val="accent1"/>
-          </a:effectRef>
-          <a:fontRef idx="minor">
-            <a:schemeClr val="lt1"/>
-          </a:fontRef>
-        </p:style>
-        <p:txBody>
-          <a:bodyPr rtlCol="0" anchor="ctr"/>
-          <a:lstStyle/>
           <a:p>
-            <a:pPr algn="ctr"/>
-          </a:p>
-        </p:txBody>
-      </p:sp>
-      <p:sp>
-        <p:nvSpPr>
-          <p:cNvPr id="455" name="TextBox 454"/>
-          <p:cNvSpPr txBox="1"/>
-          <p:nvPr/>
-        </p:nvSpPr>
-        <p:spPr>
-          <a:xfrm>
-            <a:off x="7599470" y="4339735"/>
-            <a:ext cx="2622529" cy="1678732"/>
-          </a:xfrm>
-          <a:prstGeom prst="rect">
-            <a:avLst/>
-          </a:prstGeom>
-          <a:noFill/>
-        </p:spPr>
-        <p:txBody>
-          <a:bodyPr wrap="square" lIns="12700" rIns="12700" tIns="12700" bIns="12700">
-            <a:spAutoFit/>
-          </a:bodyPr>
-          <a:lstStyle/>
-          <a:p>
-            <a:pPr algn="ctr">
-              <a:defRPr sz="1400" b="0">
+            <a:pPr algn="l">
+              <a:spcAft>
+                <a:spcPts val="300"/>
+              </a:spcAft>
+              <a:defRPr sz="2400" b="1">
                 <a:solidFill>
                   <a:srgbClr val="000000"/>
                 </a:solidFill>
@@ -13584,7 +14507,7 @@
               </a:defRPr>
             </a:pPr>
             <a:r>
-              <a:rPr sz="1400" b="0">
+              <a:rPr sz="2400" b="1">
                 <a:solidFill>
                   <a:srgbClr val="000000"/>
                 </a:solidFill>
@@ -13592,78 +14515,15 @@
                 <a:ea typeface="Play"/>
                 <a:cs typeface="Play"/>
               </a:rPr>
-              <a:t>Четвёртый квартал 2026</a:t>
+              <a:t>• Неизвестный шаблон может быть плохо сделан, сервис использует рабочую область</a:t>
             </a:r>
           </a:p>
-        </p:txBody>
-      </p:sp>
-      <p:sp>
-        <p:nvSpPr>
-          <p:cNvPr id="456" name="Oval 455"/>
-          <p:cNvSpPr/>
-          <p:nvPr/>
-        </p:nvSpPr>
-        <p:spPr>
-          <a:xfrm>
-            <a:off x="10396835" y="3619242"/>
-            <a:ext cx="524505" cy="524505"/>
-          </a:xfrm>
-          <a:prstGeom prst="ellipse">
-            <a:avLst/>
-          </a:prstGeom>
-          <a:solidFill>
-            <a:srgbClr val="0077FF"/>
-          </a:solidFill>
-          <a:ln>
-            <a:noFill/>
-          </a:ln>
-        </p:spPr>
-        <p:style>
-          <a:lnRef idx="1">
-            <a:schemeClr val="accent1"/>
-          </a:lnRef>
-          <a:fillRef idx="3">
-            <a:schemeClr val="accent1"/>
-          </a:fillRef>
-          <a:effectRef idx="2">
-            <a:schemeClr val="accent1"/>
-          </a:effectRef>
-          <a:fontRef idx="minor">
-            <a:schemeClr val="lt1"/>
-          </a:fontRef>
-        </p:style>
-        <p:txBody>
-          <a:bodyPr rtlCol="0" anchor="ctr"/>
-          <a:lstStyle/>
           <a:p>
-            <a:pPr algn="ctr"/>
-          </a:p>
-        </p:txBody>
-      </p:sp>
-      <p:sp>
-        <p:nvSpPr>
-          <p:cNvPr id="457" name="TextBox 456"/>
-          <p:cNvSpPr txBox="1"/>
-          <p:nvPr/>
-        </p:nvSpPr>
-        <p:spPr>
-          <a:xfrm>
-            <a:off x="8910735" y="1783080"/>
-            <a:ext cx="2622529" cy="1678732"/>
-          </a:xfrm>
-          <a:prstGeom prst="rect">
-            <a:avLst/>
-          </a:prstGeom>
-          <a:noFill/>
-        </p:spPr>
-        <p:txBody>
-          <a:bodyPr wrap="square" lIns="12700" rIns="12700" tIns="12700" bIns="12700">
-            <a:spAutoFit/>
-          </a:bodyPr>
-          <a:lstStyle/>
-          <a:p>
-            <a:pPr algn="ctr">
-              <a:defRPr sz="1400" b="0">
+            <a:pPr algn="l">
+              <a:spcAft>
+                <a:spcPts val="300"/>
+              </a:spcAft>
+              <a:defRPr sz="2400" b="1">
                 <a:solidFill>
                   <a:srgbClr val="000000"/>
                 </a:solidFill>
@@ -13673,7 +14533,7 @@
               </a:defRPr>
             </a:pPr>
             <a:r>
-              <a:rPr sz="1400" b="0">
+              <a:rPr sz="2400" b="1">
                 <a:solidFill>
                   <a:srgbClr val="000000"/>
                 </a:solidFill>
@@ -13681,11 +14541,437 @@
                 <a:ea typeface="Play"/>
                 <a:cs typeface="Play"/>
               </a:rPr>
-              <a:t>Первый квартал 2027</a:t>
+              <a:t>• Нагрузка выше 20 задач требует внешней очереди</a:t>
             </a:r>
           </a:p>
         </p:txBody>
       </p:sp>
+      <p:grpSp>
+        <p:nvGrpSpPr>
+          <p:cNvPr id="2" name="illustration:builtin-security"/>
+          <p:cNvGrpSpPr/>
+          <p:nvPr/>
+        </p:nvGrpSpPr>
+        <p:grpSpPr>
+          <a:xfrm>
+            <a:off x="7771509" y="2859550"/>
+            <a:ext cx="3046330" cy="2861704"/>
+            <a:chOff x="7771509" y="2859550"/>
+            <a:chExt cx="3046330" cy="2861704"/>
+          </a:xfrm>
+        </p:grpSpPr>
+        <p:sp>
+          <p:nvSpPr>
+            <p:cNvPr id="452" name="Oval 451"/>
+            <p:cNvSpPr/>
+            <p:nvPr/>
+          </p:nvSpPr>
+          <p:spPr>
+            <a:xfrm>
+              <a:off x="7794587" y="2859550"/>
+              <a:ext cx="2861704" cy="2861704"/>
+            </a:xfrm>
+            <a:prstGeom prst="ellipse">
+              <a:avLst/>
+            </a:prstGeom>
+            <a:solidFill>
+              <a:srgbClr val="D6E9FF"/>
+            </a:solidFill>
+            <a:ln>
+              <a:noFill/>
+            </a:ln>
+            <a:effectLst/>
+          </p:spPr>
+          <p:style>
+            <a:lnRef idx="1">
+              <a:schemeClr val="accent1"/>
+            </a:lnRef>
+            <a:fillRef idx="3">
+              <a:schemeClr val="accent1"/>
+            </a:fillRef>
+            <a:effectRef idx="2">
+              <a:schemeClr val="accent1"/>
+            </a:effectRef>
+            <a:fontRef idx="minor">
+              <a:schemeClr val="lt1"/>
+            </a:fontRef>
+          </p:style>
+          <p:txBody>
+            <a:bodyPr rtlCol="0" anchor="ctr"/>
+            <a:lstStyle/>
+            <a:p>
+              <a:pPr algn="ctr"/>
+            </a:p>
+          </p:txBody>
+        </p:sp>
+        <p:sp>
+          <p:nvSpPr>
+            <p:cNvPr id="3" name="Freeform 2"/>
+            <p:cNvSpPr/>
+            <p:nvPr/>
+          </p:nvSpPr>
+          <p:spPr>
+            <a:xfrm>
+              <a:off x="8163840" y="3021098"/>
+              <a:ext cx="2123199" cy="2561687"/>
+            </a:xfrm>
+            <a:custGeom>
+              <a:avLst/>
+              <a:gdLst/>
+              <a:ahLst/>
+              <a:cxnLst/>
+              <a:rect l="l" t="t" r="r" b="b"/>
+              <a:pathLst>
+                <a:path w="2123199" h="2561687">
+                  <a:moveTo>
+                    <a:pt x="1061600" y="0"/>
+                  </a:moveTo>
+                  <a:lnTo>
+                    <a:pt x="2123199" y="415408"/>
+                  </a:lnTo>
+                  <a:lnTo>
+                    <a:pt x="2123199" y="1130834"/>
+                  </a:lnTo>
+                  <a:lnTo>
+                    <a:pt x="2110299" y="1327300"/>
+                  </a:lnTo>
+                  <a:lnTo>
+                    <a:pt x="2072612" y="1514487"/>
+                  </a:lnTo>
+                  <a:lnTo>
+                    <a:pt x="2011662" y="1691428"/>
+                  </a:lnTo>
+                  <a:lnTo>
+                    <a:pt x="1928973" y="1857153"/>
+                  </a:lnTo>
+                  <a:lnTo>
+                    <a:pt x="1826067" y="2010693"/>
+                  </a:lnTo>
+                  <a:lnTo>
+                    <a:pt x="1704468" y="2151078"/>
+                  </a:lnTo>
+                  <a:lnTo>
+                    <a:pt x="1565698" y="2277339"/>
+                  </a:lnTo>
+                  <a:lnTo>
+                    <a:pt x="1411281" y="2388507"/>
+                  </a:lnTo>
+                  <a:lnTo>
+                    <a:pt x="1242741" y="2483613"/>
+                  </a:lnTo>
+                  <a:lnTo>
+                    <a:pt x="1061600" y="2561687"/>
+                  </a:lnTo>
+                  <a:lnTo>
+                    <a:pt x="880458" y="2483613"/>
+                  </a:lnTo>
+                  <a:lnTo>
+                    <a:pt x="711918" y="2388507"/>
+                  </a:lnTo>
+                  <a:lnTo>
+                    <a:pt x="557501" y="2277339"/>
+                  </a:lnTo>
+                  <a:lnTo>
+                    <a:pt x="418731" y="2151078"/>
+                  </a:lnTo>
+                  <a:lnTo>
+                    <a:pt x="297132" y="2010693"/>
+                  </a:lnTo>
+                  <a:lnTo>
+                    <a:pt x="194226" y="1857153"/>
+                  </a:lnTo>
+                  <a:lnTo>
+                    <a:pt x="111537" y="1691428"/>
+                  </a:lnTo>
+                  <a:lnTo>
+                    <a:pt x="50587" y="1514487"/>
+                  </a:lnTo>
+                  <a:lnTo>
+                    <a:pt x="12900" y="1327300"/>
+                  </a:lnTo>
+                  <a:lnTo>
+                    <a:pt x="0" y="1130834"/>
+                  </a:lnTo>
+                  <a:lnTo>
+                    <a:pt x="0" y="415408"/>
+                  </a:lnTo>
+                  <a:close/>
+                </a:path>
+              </a:pathLst>
+            </a:custGeom>
+            <a:solidFill>
+              <a:srgbClr val="0077FF"/>
+            </a:solidFill>
+            <a:ln>
+              <a:noFill/>
+            </a:ln>
+            <a:effectLst/>
+          </p:spPr>
+          <p:style>
+            <a:lnRef idx="1">
+              <a:schemeClr val="accent1"/>
+            </a:lnRef>
+            <a:fillRef idx="3">
+              <a:schemeClr val="accent1"/>
+            </a:fillRef>
+            <a:effectRef idx="2">
+              <a:schemeClr val="accent1"/>
+            </a:effectRef>
+            <a:fontRef idx="minor">
+              <a:schemeClr val="lt1"/>
+            </a:fontRef>
+          </p:style>
+          <p:txBody>
+            <a:bodyPr rtlCol="0" anchor="ctr"/>
+            <a:lstStyle/>
+            <a:p>
+              <a:pPr algn="ctr"/>
+            </a:p>
+          </p:txBody>
+        </p:sp>
+        <p:sp>
+          <p:nvSpPr>
+            <p:cNvPr id="4" name="Freeform 3"/>
+            <p:cNvSpPr/>
+            <p:nvPr/>
+          </p:nvSpPr>
+          <p:spPr>
+            <a:xfrm>
+              <a:off x="9225440" y="3321115"/>
+              <a:ext cx="761582" cy="1915496"/>
+            </a:xfrm>
+            <a:custGeom>
+              <a:avLst/>
+              <a:gdLst/>
+              <a:ahLst/>
+              <a:cxnLst/>
+              <a:rect l="l" t="t" r="r" b="b"/>
+              <a:pathLst>
+                <a:path w="761582" h="1915496">
+                  <a:moveTo>
+                    <a:pt x="0" y="0"/>
+                  </a:moveTo>
+                  <a:lnTo>
+                    <a:pt x="761582" y="300017"/>
+                  </a:lnTo>
+                  <a:lnTo>
+                    <a:pt x="761582" y="853896"/>
+                  </a:lnTo>
+                  <a:lnTo>
+                    <a:pt x="752097" y="996404"/>
+                  </a:lnTo>
+                  <a:lnTo>
+                    <a:pt x="724472" y="1132681"/>
+                  </a:lnTo>
+                  <a:lnTo>
+                    <a:pt x="679954" y="1262035"/>
+                  </a:lnTo>
+                  <a:lnTo>
+                    <a:pt x="619789" y="1383773"/>
+                  </a:lnTo>
+                  <a:lnTo>
+                    <a:pt x="545223" y="1497202"/>
+                  </a:lnTo>
+                  <a:lnTo>
+                    <a:pt x="457503" y="1601631"/>
+                  </a:lnTo>
+                  <a:lnTo>
+                    <a:pt x="357874" y="1696368"/>
+                  </a:lnTo>
+                  <a:lnTo>
+                    <a:pt x="247583" y="1780719"/>
+                  </a:lnTo>
+                  <a:lnTo>
+                    <a:pt x="127876" y="1853992"/>
+                  </a:lnTo>
+                  <a:lnTo>
+                    <a:pt x="0" y="1915496"/>
+                  </a:lnTo>
+                  <a:close/>
+                </a:path>
+              </a:pathLst>
+            </a:custGeom>
+            <a:solidFill>
+              <a:srgbClr val="FF3885"/>
+            </a:solidFill>
+            <a:ln>
+              <a:noFill/>
+            </a:ln>
+            <a:effectLst/>
+          </p:spPr>
+          <p:style>
+            <a:lnRef idx="1">
+              <a:schemeClr val="accent1"/>
+            </a:lnRef>
+            <a:fillRef idx="3">
+              <a:schemeClr val="accent1"/>
+            </a:fillRef>
+            <a:effectRef idx="2">
+              <a:schemeClr val="accent1"/>
+            </a:effectRef>
+            <a:fontRef idx="minor">
+              <a:schemeClr val="lt1"/>
+            </a:fontRef>
+          </p:style>
+          <p:txBody>
+            <a:bodyPr rtlCol="0" anchor="ctr"/>
+            <a:lstStyle/>
+            <a:p>
+              <a:pPr algn="ctr"/>
+            </a:p>
+          </p:txBody>
+        </p:sp>
+        <p:sp>
+          <p:nvSpPr>
+            <p:cNvPr id="5" name="Freeform 4"/>
+            <p:cNvSpPr/>
+            <p:nvPr/>
+          </p:nvSpPr>
+          <p:spPr>
+            <a:xfrm>
+              <a:off x="8763874" y="3990385"/>
+              <a:ext cx="969287" cy="669269"/>
+            </a:xfrm>
+            <a:custGeom>
+              <a:avLst/>
+              <a:gdLst/>
+              <a:ahLst/>
+              <a:cxnLst/>
+              <a:rect l="l" t="t" r="r" b="b"/>
+              <a:pathLst>
+                <a:path w="969287" h="669269">
+                  <a:moveTo>
+                    <a:pt x="0" y="323095"/>
+                  </a:moveTo>
+                  <a:lnTo>
+                    <a:pt x="346174" y="669269"/>
+                  </a:lnTo>
+                  <a:lnTo>
+                    <a:pt x="969287" y="0"/>
+                  </a:lnTo>
+                </a:path>
+              </a:pathLst>
+            </a:custGeom>
+            <a:noFill/>
+            <a:ln w="184626" cap="rnd">
+              <a:solidFill>
+                <a:srgbClr val="FFFFFF"/>
+              </a:solidFill>
+              <a:round/>
+            </a:ln>
+            <a:effectLst/>
+          </p:spPr>
+          <p:style>
+            <a:lnRef idx="1">
+              <a:schemeClr val="accent1"/>
+            </a:lnRef>
+            <a:fillRef idx="3">
+              <a:schemeClr val="accent1"/>
+            </a:fillRef>
+            <a:effectRef idx="2">
+              <a:schemeClr val="accent1"/>
+            </a:effectRef>
+            <a:fontRef idx="minor">
+              <a:schemeClr val="lt1"/>
+            </a:fontRef>
+          </p:style>
+          <p:txBody>
+            <a:bodyPr rtlCol="0" anchor="ctr"/>
+            <a:lstStyle/>
+            <a:p>
+              <a:pPr algn="ctr"/>
+            </a:p>
+          </p:txBody>
+        </p:sp>
+        <p:sp>
+          <p:nvSpPr>
+            <p:cNvPr id="453" name="Oval 452"/>
+            <p:cNvSpPr/>
+            <p:nvPr/>
+          </p:nvSpPr>
+          <p:spPr>
+            <a:xfrm>
+              <a:off x="7771509" y="3367272"/>
+              <a:ext cx="230782" cy="230782"/>
+            </a:xfrm>
+            <a:prstGeom prst="ellipse">
+              <a:avLst/>
+            </a:prstGeom>
+            <a:solidFill>
+              <a:srgbClr val="FF3885"/>
+            </a:solidFill>
+            <a:ln>
+              <a:noFill/>
+            </a:ln>
+            <a:effectLst/>
+          </p:spPr>
+          <p:style>
+            <a:lnRef idx="1">
+              <a:schemeClr val="accent1"/>
+            </a:lnRef>
+            <a:fillRef idx="3">
+              <a:schemeClr val="accent1"/>
+            </a:fillRef>
+            <a:effectRef idx="2">
+              <a:schemeClr val="accent1"/>
+            </a:effectRef>
+            <a:fontRef idx="minor">
+              <a:schemeClr val="lt1"/>
+            </a:fontRef>
+          </p:style>
+          <p:txBody>
+            <a:bodyPr rtlCol="0" anchor="ctr"/>
+            <a:lstStyle/>
+            <a:p>
+              <a:pPr algn="ctr"/>
+            </a:p>
+          </p:txBody>
+        </p:sp>
+        <p:sp>
+          <p:nvSpPr>
+            <p:cNvPr id="454" name="Oval 453"/>
+            <p:cNvSpPr/>
+            <p:nvPr/>
+          </p:nvSpPr>
+          <p:spPr>
+            <a:xfrm>
+              <a:off x="10494744" y="5028906"/>
+              <a:ext cx="323095" cy="323095"/>
+            </a:xfrm>
+            <a:prstGeom prst="ellipse">
+              <a:avLst/>
+            </a:prstGeom>
+            <a:solidFill>
+              <a:srgbClr val="B2B2B2"/>
+            </a:solidFill>
+            <a:ln>
+              <a:noFill/>
+            </a:ln>
+            <a:effectLst/>
+          </p:spPr>
+          <p:style>
+            <a:lnRef idx="1">
+              <a:schemeClr val="accent1"/>
+            </a:lnRef>
+            <a:fillRef idx="3">
+              <a:schemeClr val="accent1"/>
+            </a:fillRef>
+            <a:effectRef idx="2">
+              <a:schemeClr val="accent1"/>
+            </a:effectRef>
+            <a:fontRef idx="minor">
+              <a:schemeClr val="lt1"/>
+            </a:fontRef>
+          </p:style>
+          <p:txBody>
+            <a:bodyPr rtlCol="0" anchor="ctr"/>
+            <a:lstStyle/>
+            <a:p>
+              <a:pPr algn="ctr"/>
+            </a:p>
+          </p:txBody>
+        </p:sp>
+      </p:grpSp>
     </p:spTree>
   </p:cSld>
   <p:clrMapOvr>
@@ -13713,7 +14999,7 @@
         <p:spPr>
           <a:xfrm>
             <a:off x="677387" y="692177"/>
-            <a:ext cx="10855878" cy="822960"/>
+            <a:ext cx="10855878" cy="919480"/>
           </a:xfrm>
           <a:prstGeom prst="rect">
             <a:avLst/>
@@ -13730,7 +15016,7 @@
               <a:spcAft>
                 <a:spcPts val="300"/>
               </a:spcAft>
-              <a:defRPr sz="4000">
+              <a:defRPr sz="4800">
                 <a:solidFill>
                   <a:srgbClr val="000000"/>
                 </a:solidFill>
@@ -13740,7 +15026,7 @@
               </a:defRPr>
             </a:pPr>
             <a:r>
-              <a:rPr sz="4000">
+              <a:rPr sz="4800">
                 <a:solidFill>
                   <a:srgbClr val="000000"/>
                 </a:solidFill>
@@ -13748,21 +15034,65 @@
                 <a:ea typeface="Arial"/>
                 <a:cs typeface="Arial"/>
               </a:rPr>
-              <a:t>Преимущества для компании</a:t>
+              <a:t>3Q 2026 – 4Q 2026 – 1Q 2027</a:t>
             </a:r>
           </a:p>
         </p:txBody>
       </p:sp>
       <p:sp>
         <p:nvSpPr>
-          <p:cNvPr id="3" name="body"/>
+          <p:cNvPr id="3" name="stat_0:bar"/>
+          <p:cNvSpPr/>
+          <p:nvPr/>
+        </p:nvSpPr>
+        <p:spPr>
+          <a:xfrm>
+            <a:off x="677387" y="1961415"/>
+            <a:ext cx="50800" cy="1348232"/>
+          </a:xfrm>
+          <a:prstGeom prst="rect">
+            <a:avLst/>
+          </a:prstGeom>
+          <a:solidFill>
+            <a:srgbClr val="0077FF"/>
+          </a:solidFill>
+          <a:ln>
+            <a:noFill/>
+          </a:ln>
+          <a:effectLst/>
+        </p:spPr>
+        <p:style>
+          <a:lnRef idx="1">
+            <a:schemeClr val="accent1"/>
+          </a:lnRef>
+          <a:fillRef idx="3">
+            <a:schemeClr val="accent1"/>
+          </a:fillRef>
+          <a:effectRef idx="2">
+            <a:schemeClr val="accent1"/>
+          </a:effectRef>
+          <a:fontRef idx="minor">
+            <a:schemeClr val="lt1"/>
+          </a:fontRef>
+        </p:style>
+        <p:txBody>
+          <a:bodyPr rtlCol="0" anchor="ctr"/>
+          <a:lstStyle/>
+          <a:p>
+            <a:pPr algn="ctr"/>
+          </a:p>
+        </p:txBody>
+      </p:sp>
+      <p:sp>
+        <p:nvSpPr>
+          <p:cNvPr id="4" name="stat_0"/>
           <p:cNvSpPr txBox="1"/>
           <p:nvPr/>
         </p:nvSpPr>
         <p:spPr>
           <a:xfrm>
-            <a:off x="677387" y="2554298"/>
-            <a:ext cx="5874466" cy="2875280"/>
+            <a:off x="855187" y="1851687"/>
+            <a:ext cx="5033021" cy="1457960"/>
           </a:xfrm>
           <a:prstGeom prst="rect">
             <a:avLst/>
@@ -13770,18 +15100,21 @@
           <a:noFill/>
         </p:spPr>
         <p:txBody>
-          <a:bodyPr wrap="square" lIns="76200" rIns="76200" tIns="50800" bIns="50800">
+          <a:bodyPr wrap="square" lIns="76200" rIns="76200" tIns="0" bIns="0">
             <a:spAutoFit/>
           </a:bodyPr>
           <a:lstStyle/>
           <a:p>
-            <a:pPr algn="l">
-              <a:spcAft>
-                <a:spcPts val="300"/>
-              </a:spcAft>
-              <a:defRPr sz="2400">
-                <a:solidFill>
-                  <a:srgbClr val="000000"/>
+            <a:pPr>
+              <a:lnSpc>
+                <a:spcPct val="100000"/>
+              </a:lnSpc>
+              <a:spcAft>
+                <a:spcPts val="200"/>
+              </a:spcAft>
+              <a:defRPr sz="4800" b="1">
+                <a:solidFill>
+                  <a:srgbClr val="0077FF"/>
                 </a:solidFill>
                 <a:latin typeface="Play"/>
                 <a:ea typeface="Play"/>
@@ -13789,23 +15122,23 @@
               </a:defRPr>
             </a:pPr>
             <a:r>
-              <a:rPr sz="2400">
-                <a:solidFill>
-                  <a:srgbClr val="000000"/>
+              <a:rPr sz="4800" b="1">
+                <a:solidFill>
+                  <a:srgbClr val="0077FF"/>
                 </a:solidFill>
                 <a:latin typeface="Play"/>
                 <a:ea typeface="Play"/>
                 <a:cs typeface="Play"/>
               </a:rPr>
-              <a:t>• Ускорение создания презентаций до 4 мин</a:t>
+              <a:t>2026</a:t>
             </a:r>
           </a:p>
           <a:p>
-            <a:pPr algn="l">
+            <a:pPr>
               <a:spcAft>
                 <a:spcPts val="300"/>
               </a:spcAft>
-              <a:defRPr sz="2400">
+              <a:defRPr sz="1800" b="0">
                 <a:solidFill>
                   <a:srgbClr val="000000"/>
                 </a:solidFill>
@@ -13815,7 +15148,7 @@
               </a:defRPr>
             </a:pPr>
             <a:r>
-              <a:rPr sz="2400">
+              <a:rPr sz="1800" b="0">
                 <a:solidFill>
                   <a:srgbClr val="000000"/>
                 </a:solidFill>
@@ -13823,17 +15156,87 @@
                 <a:ea typeface="Play"/>
                 <a:cs typeface="Play"/>
               </a:rPr>
-              <a:t>• Снижение ошибок стиля до 2 из 68 колод</a:t>
+              <a:t>Третий квартал 2026: подключение 4 команд, домен и HTTPS</a:t>
             </a:r>
           </a:p>
+        </p:txBody>
+      </p:sp>
+      <p:sp>
+        <p:nvSpPr>
+          <p:cNvPr id="5" name="stat_1:bar"/>
+          <p:cNvSpPr/>
+          <p:nvPr/>
+        </p:nvSpPr>
+        <p:spPr>
+          <a:xfrm>
+            <a:off x="6322444" y="1961415"/>
+            <a:ext cx="50800" cy="1348232"/>
+          </a:xfrm>
+          <a:prstGeom prst="rect">
+            <a:avLst/>
+          </a:prstGeom>
+          <a:solidFill>
+            <a:srgbClr val="0077FF"/>
+          </a:solidFill>
+          <a:ln>
+            <a:noFill/>
+          </a:ln>
+          <a:effectLst/>
+        </p:spPr>
+        <p:style>
+          <a:lnRef idx="1">
+            <a:schemeClr val="accent1"/>
+          </a:lnRef>
+          <a:fillRef idx="3">
+            <a:schemeClr val="accent1"/>
+          </a:fillRef>
+          <a:effectRef idx="2">
+            <a:schemeClr val="accent1"/>
+          </a:effectRef>
+          <a:fontRef idx="minor">
+            <a:schemeClr val="lt1"/>
+          </a:fontRef>
+        </p:style>
+        <p:txBody>
+          <a:bodyPr rtlCol="0" anchor="ctr"/>
+          <a:lstStyle/>
           <a:p>
-            <a:pPr algn="l">
-              <a:spcAft>
-                <a:spcPts val="300"/>
-              </a:spcAft>
-              <a:defRPr sz="2400">
-                <a:solidFill>
-                  <a:srgbClr val="000000"/>
+            <a:pPr algn="ctr"/>
+          </a:p>
+        </p:txBody>
+      </p:sp>
+      <p:sp>
+        <p:nvSpPr>
+          <p:cNvPr id="6" name="stat_1"/>
+          <p:cNvSpPr txBox="1"/>
+          <p:nvPr/>
+        </p:nvSpPr>
+        <p:spPr>
+          <a:xfrm>
+            <a:off x="6500244" y="1851687"/>
+            <a:ext cx="5033021" cy="1457960"/>
+          </a:xfrm>
+          <a:prstGeom prst="rect">
+            <a:avLst/>
+          </a:prstGeom>
+          <a:noFill/>
+        </p:spPr>
+        <p:txBody>
+          <a:bodyPr wrap="square" lIns="76200" rIns="76200" tIns="0" bIns="0">
+            <a:spAutoFit/>
+          </a:bodyPr>
+          <a:lstStyle/>
+          <a:p>
+            <a:pPr>
+              <a:lnSpc>
+                <a:spcPct val="100000"/>
+              </a:lnSpc>
+              <a:spcAft>
+                <a:spcPts val="200"/>
+              </a:spcAft>
+              <a:defRPr sz="4800" b="1">
+                <a:solidFill>
+                  <a:srgbClr val="0077FF"/>
                 </a:solidFill>
                 <a:latin typeface="Play"/>
                 <a:ea typeface="Play"/>
@@ -13841,23 +15244,23 @@
               </a:defRPr>
             </a:pPr>
             <a:r>
-              <a:rPr sz="2400">
-                <a:solidFill>
-                  <a:srgbClr val="000000"/>
+              <a:rPr sz="4800" b="1">
+                <a:solidFill>
+                  <a:srgbClr val="0077FF"/>
                 </a:solidFill>
                 <a:latin typeface="Play"/>
                 <a:ea typeface="Play"/>
                 <a:cs typeface="Play"/>
               </a:rPr>
-              <a:t>• Экономия времени дизайнеров</a:t>
+              <a:t>2026</a:t>
             </a:r>
           </a:p>
           <a:p>
-            <a:pPr algn="l">
+            <a:pPr>
               <a:spcAft>
                 <a:spcPts val="300"/>
               </a:spcAft>
-              <a:defRPr sz="2400">
+              <a:defRPr sz="1800" b="0">
                 <a:solidFill>
                   <a:srgbClr val="000000"/>
                 </a:solidFill>
@@ -13867,7 +15270,7 @@
               </a:defRPr>
             </a:pPr>
             <a:r>
-              <a:rPr sz="2400">
+              <a:rPr sz="1800" b="0">
                 <a:solidFill>
                   <a:srgbClr val="000000"/>
                 </a:solidFill>
@@ -13875,618 +15278,133 @@
                 <a:ea typeface="Play"/>
                 <a:cs typeface="Play"/>
               </a:rPr>
-              <a:t>• Масштабируемость без дополнительных сотрудников</a:t>
+              <a:t>Четвёртый квартал 2026: доступ для всей компании, интеграция с хранилищем</a:t>
             </a:r>
           </a:p>
         </p:txBody>
       </p:sp>
-      <p:grpSp>
-        <p:nvGrpSpPr>
-          <p:cNvPr id="4" name="illustration:builtin-presentation"/>
-          <p:cNvGrpSpPr/>
+      <p:sp>
+        <p:nvSpPr>
+          <p:cNvPr id="7" name="stat_2:bar"/>
+          <p:cNvSpPr/>
           <p:nvPr/>
-        </p:nvGrpSpPr>
-        <p:grpSpPr>
+        </p:nvSpPr>
+        <p:spPr>
           <a:xfrm>
-            <a:off x="7771509" y="2538008"/>
-            <a:ext cx="2907860" cy="2907860"/>
-            <a:chOff x="7771509" y="2538008"/>
-            <a:chExt cx="2907860" cy="2907860"/>
+            <a:off x="677387" y="4273130"/>
+            <a:ext cx="50800" cy="1348232"/>
           </a:xfrm>
-        </p:grpSpPr>
-        <p:sp>
-          <p:nvSpPr>
-            <p:cNvPr id="5" name="Oval 4"/>
-            <p:cNvSpPr/>
-            <p:nvPr/>
-          </p:nvSpPr>
-          <p:spPr>
-            <a:xfrm>
-              <a:off x="7771509" y="2538008"/>
-              <a:ext cx="2907860" cy="2907860"/>
-            </a:xfrm>
-            <a:prstGeom prst="ellipse">
-              <a:avLst/>
-            </a:prstGeom>
-            <a:solidFill>
-              <a:srgbClr val="D6E9FF"/>
-            </a:solidFill>
-            <a:ln>
-              <a:noFill/>
-            </a:ln>
-            <a:effectLst/>
-          </p:spPr>
-          <p:style>
-            <a:lnRef idx="1">
-              <a:schemeClr val="accent1"/>
-            </a:lnRef>
-            <a:fillRef idx="3">
-              <a:schemeClr val="accent1"/>
-            </a:fillRef>
-            <a:effectRef idx="2">
-              <a:schemeClr val="accent1"/>
-            </a:effectRef>
-            <a:fontRef idx="minor">
-              <a:schemeClr val="lt1"/>
-            </a:fontRef>
-          </p:style>
-          <p:txBody>
-            <a:bodyPr rtlCol="0" anchor="ctr"/>
-            <a:lstStyle/>
-            <a:p>
-              <a:pPr algn="ctr"/>
-            </a:p>
-          </p:txBody>
-        </p:sp>
-        <p:sp>
-          <p:nvSpPr>
-            <p:cNvPr id="6" name="Rounded Rectangle 5"/>
-            <p:cNvSpPr/>
-            <p:nvPr/>
-          </p:nvSpPr>
-          <p:spPr>
-            <a:xfrm>
-              <a:off x="7886900" y="2930338"/>
-              <a:ext cx="2677078" cy="1730869"/>
-            </a:xfrm>
-            <a:prstGeom prst="roundRect">
-              <a:avLst>
-                <a:gd name="adj" fmla="val 9333"/>
-              </a:avLst>
-            </a:prstGeom>
-            <a:solidFill>
-              <a:srgbClr val="FFFFFF"/>
-            </a:solidFill>
-            <a:ln>
-              <a:noFill/>
-            </a:ln>
-            <a:effectLst/>
-          </p:spPr>
-          <p:style>
-            <a:lnRef idx="1">
-              <a:schemeClr val="accent1"/>
-            </a:lnRef>
-            <a:fillRef idx="3">
-              <a:schemeClr val="accent1"/>
-            </a:fillRef>
-            <a:effectRef idx="2">
-              <a:schemeClr val="accent1"/>
-            </a:effectRef>
-            <a:fontRef idx="minor">
-              <a:schemeClr val="lt1"/>
-            </a:fontRef>
-          </p:style>
-          <p:txBody>
-            <a:bodyPr rtlCol="0" anchor="ctr"/>
-            <a:lstStyle/>
-            <a:p>
-              <a:pPr algn="ctr"/>
-            </a:p>
-          </p:txBody>
-        </p:sp>
-        <p:sp>
-          <p:nvSpPr>
-            <p:cNvPr id="7" name="Rounded Rectangle 6"/>
-            <p:cNvSpPr/>
-            <p:nvPr/>
-          </p:nvSpPr>
-          <p:spPr>
-            <a:xfrm>
-              <a:off x="7886900" y="2930338"/>
-              <a:ext cx="2677078" cy="346173"/>
-            </a:xfrm>
-            <a:prstGeom prst="roundRect">
-              <a:avLst>
-                <a:gd name="adj" fmla="val 46666"/>
-              </a:avLst>
-            </a:prstGeom>
-            <a:solidFill>
-              <a:srgbClr val="0077FF"/>
-            </a:solidFill>
-            <a:ln>
-              <a:noFill/>
-            </a:ln>
-            <a:effectLst/>
-          </p:spPr>
-          <p:style>
-            <a:lnRef idx="1">
-              <a:schemeClr val="accent1"/>
-            </a:lnRef>
-            <a:fillRef idx="3">
-              <a:schemeClr val="accent1"/>
-            </a:fillRef>
-            <a:effectRef idx="2">
-              <a:schemeClr val="accent1"/>
-            </a:effectRef>
-            <a:fontRef idx="minor">
-              <a:schemeClr val="lt1"/>
-            </a:fontRef>
-          </p:style>
-          <p:txBody>
-            <a:bodyPr rtlCol="0" anchor="ctr"/>
-            <a:lstStyle/>
-            <a:p>
-              <a:pPr algn="ctr"/>
-            </a:p>
-          </p:txBody>
-        </p:sp>
-        <p:sp>
-          <p:nvSpPr>
-            <p:cNvPr id="8" name="Rectangle 7"/>
-            <p:cNvSpPr/>
-            <p:nvPr/>
-          </p:nvSpPr>
-          <p:spPr>
-            <a:xfrm>
-              <a:off x="7886900" y="3114964"/>
-              <a:ext cx="2677078" cy="161547"/>
-            </a:xfrm>
-            <a:prstGeom prst="rect">
-              <a:avLst/>
-            </a:prstGeom>
-            <a:solidFill>
-              <a:srgbClr val="0077FF"/>
-            </a:solidFill>
-            <a:ln>
-              <a:noFill/>
-            </a:ln>
-            <a:effectLst/>
-          </p:spPr>
-          <p:style>
-            <a:lnRef idx="1">
-              <a:schemeClr val="accent1"/>
-            </a:lnRef>
-            <a:fillRef idx="3">
-              <a:schemeClr val="accent1"/>
-            </a:fillRef>
-            <a:effectRef idx="2">
-              <a:schemeClr val="accent1"/>
-            </a:effectRef>
-            <a:fontRef idx="minor">
-              <a:schemeClr val="lt1"/>
-            </a:fontRef>
-          </p:style>
-          <p:txBody>
-            <a:bodyPr rtlCol="0" anchor="ctr"/>
-            <a:lstStyle/>
-            <a:p>
-              <a:pPr algn="ctr"/>
-            </a:p>
-          </p:txBody>
-        </p:sp>
-        <p:sp>
-          <p:nvSpPr>
-            <p:cNvPr id="9" name="Rounded Rectangle 8"/>
-            <p:cNvSpPr/>
-            <p:nvPr/>
-          </p:nvSpPr>
-          <p:spPr>
-            <a:xfrm>
-              <a:off x="8163840" y="3507295"/>
-              <a:ext cx="969286" cy="115391"/>
-            </a:xfrm>
-            <a:prstGeom prst="roundRect">
-              <a:avLst>
-                <a:gd name="adj" fmla="val 50000"/>
-              </a:avLst>
-            </a:prstGeom>
-            <a:solidFill>
-              <a:srgbClr val="000000"/>
-            </a:solidFill>
-            <a:ln>
-              <a:noFill/>
-            </a:ln>
-            <a:effectLst/>
-          </p:spPr>
-          <p:style>
-            <a:lnRef idx="1">
-              <a:schemeClr val="accent1"/>
-            </a:lnRef>
-            <a:fillRef idx="3">
-              <a:schemeClr val="accent1"/>
-            </a:fillRef>
-            <a:effectRef idx="2">
-              <a:schemeClr val="accent1"/>
-            </a:effectRef>
-            <a:fontRef idx="minor">
-              <a:schemeClr val="lt1"/>
-            </a:fontRef>
-          </p:style>
-          <p:txBody>
-            <a:bodyPr rtlCol="0" anchor="ctr"/>
-            <a:lstStyle/>
-            <a:p>
-              <a:pPr algn="ctr"/>
-            </a:p>
-          </p:txBody>
-        </p:sp>
-        <p:sp>
-          <p:nvSpPr>
-            <p:cNvPr id="10" name="Rounded Rectangle 9"/>
-            <p:cNvSpPr/>
-            <p:nvPr/>
-          </p:nvSpPr>
-          <p:spPr>
-            <a:xfrm>
-              <a:off x="8163840" y="3738077"/>
-              <a:ext cx="738504" cy="92313"/>
-            </a:xfrm>
-            <a:prstGeom prst="roundRect">
-              <a:avLst>
-                <a:gd name="adj" fmla="val 50000"/>
-              </a:avLst>
-            </a:prstGeom>
-            <a:solidFill>
-              <a:srgbClr val="B2B2B2"/>
-            </a:solidFill>
-            <a:ln>
-              <a:noFill/>
-            </a:ln>
-            <a:effectLst/>
-          </p:spPr>
-          <p:style>
-            <a:lnRef idx="1">
-              <a:schemeClr val="accent1"/>
-            </a:lnRef>
-            <a:fillRef idx="3">
-              <a:schemeClr val="accent1"/>
-            </a:fillRef>
-            <a:effectRef idx="2">
-              <a:schemeClr val="accent1"/>
-            </a:effectRef>
-            <a:fontRef idx="minor">
-              <a:schemeClr val="lt1"/>
-            </a:fontRef>
-          </p:style>
-          <p:txBody>
-            <a:bodyPr rtlCol="0" anchor="ctr"/>
-            <a:lstStyle/>
-            <a:p>
-              <a:pPr algn="ctr"/>
-            </a:p>
-          </p:txBody>
-        </p:sp>
-        <p:sp>
-          <p:nvSpPr>
-            <p:cNvPr id="11" name="Rounded Rectangle 10"/>
-            <p:cNvSpPr/>
-            <p:nvPr/>
-          </p:nvSpPr>
-          <p:spPr>
-            <a:xfrm>
-              <a:off x="8163840" y="3922703"/>
-              <a:ext cx="853895" cy="92313"/>
-            </a:xfrm>
-            <a:prstGeom prst="roundRect">
-              <a:avLst>
-                <a:gd name="adj" fmla="val 50000"/>
-              </a:avLst>
-            </a:prstGeom>
-            <a:solidFill>
-              <a:srgbClr val="B2B2B2"/>
-            </a:solidFill>
-            <a:ln>
-              <a:noFill/>
-            </a:ln>
-            <a:effectLst/>
-          </p:spPr>
-          <p:style>
-            <a:lnRef idx="1">
-              <a:schemeClr val="accent1"/>
-            </a:lnRef>
-            <a:fillRef idx="3">
-              <a:schemeClr val="accent1"/>
-            </a:fillRef>
-            <a:effectRef idx="2">
-              <a:schemeClr val="accent1"/>
-            </a:effectRef>
-            <a:fontRef idx="minor">
-              <a:schemeClr val="lt1"/>
-            </a:fontRef>
-          </p:style>
-          <p:txBody>
-            <a:bodyPr rtlCol="0" anchor="ctr"/>
-            <a:lstStyle/>
-            <a:p>
-              <a:pPr algn="ctr"/>
-            </a:p>
-          </p:txBody>
-        </p:sp>
-        <p:sp>
-          <p:nvSpPr>
-            <p:cNvPr id="12" name="Rounded Rectangle 11"/>
-            <p:cNvSpPr/>
-            <p:nvPr/>
-          </p:nvSpPr>
-          <p:spPr>
-            <a:xfrm>
-              <a:off x="8163840" y="4107329"/>
-              <a:ext cx="646191" cy="92313"/>
-            </a:xfrm>
-            <a:prstGeom prst="roundRect">
-              <a:avLst>
-                <a:gd name="adj" fmla="val 50000"/>
-              </a:avLst>
-            </a:prstGeom>
-            <a:solidFill>
-              <a:srgbClr val="B2B2B2"/>
-            </a:solidFill>
-            <a:ln>
-              <a:noFill/>
-            </a:ln>
-            <a:effectLst/>
-          </p:spPr>
-          <p:style>
-            <a:lnRef idx="1">
-              <a:schemeClr val="accent1"/>
-            </a:lnRef>
-            <a:fillRef idx="3">
-              <a:schemeClr val="accent1"/>
-            </a:fillRef>
-            <a:effectRef idx="2">
-              <a:schemeClr val="accent1"/>
-            </a:effectRef>
-            <a:fontRef idx="minor">
-              <a:schemeClr val="lt1"/>
-            </a:fontRef>
-          </p:style>
-          <p:txBody>
-            <a:bodyPr rtlCol="0" anchor="ctr"/>
-            <a:lstStyle/>
-            <a:p>
-              <a:pPr algn="ctr"/>
-            </a:p>
-          </p:txBody>
-        </p:sp>
-        <p:sp>
-          <p:nvSpPr>
-            <p:cNvPr id="13" name="Rounded Rectangle 12"/>
-            <p:cNvSpPr/>
-            <p:nvPr/>
-          </p:nvSpPr>
-          <p:spPr>
-            <a:xfrm>
-              <a:off x="9386987" y="3991938"/>
-              <a:ext cx="207704" cy="438486"/>
-            </a:xfrm>
-            <a:prstGeom prst="roundRect">
-              <a:avLst>
-                <a:gd name="adj" fmla="val 22222"/>
-              </a:avLst>
-            </a:prstGeom>
-            <a:solidFill>
-              <a:srgbClr val="B2B2B2"/>
-            </a:solidFill>
-            <a:ln>
-              <a:noFill/>
-            </a:ln>
-            <a:effectLst/>
-          </p:spPr>
-          <p:style>
-            <a:lnRef idx="1">
-              <a:schemeClr val="accent1"/>
-            </a:lnRef>
-            <a:fillRef idx="3">
-              <a:schemeClr val="accent1"/>
-            </a:fillRef>
-            <a:effectRef idx="2">
-              <a:schemeClr val="accent1"/>
-            </a:effectRef>
-            <a:fontRef idx="minor">
-              <a:schemeClr val="lt1"/>
-            </a:fontRef>
-          </p:style>
-          <p:txBody>
-            <a:bodyPr rtlCol="0" anchor="ctr"/>
-            <a:lstStyle/>
-            <a:p>
-              <a:pPr algn="ctr"/>
-            </a:p>
-          </p:txBody>
-        </p:sp>
-        <p:sp>
-          <p:nvSpPr>
-            <p:cNvPr id="14" name="Rounded Rectangle 13"/>
-            <p:cNvSpPr/>
-            <p:nvPr/>
-          </p:nvSpPr>
-          <p:spPr>
-            <a:xfrm>
-              <a:off x="9687005" y="3761155"/>
-              <a:ext cx="207704" cy="669269"/>
-            </a:xfrm>
-            <a:prstGeom prst="roundRect">
-              <a:avLst>
-                <a:gd name="adj" fmla="val 22222"/>
-              </a:avLst>
-            </a:prstGeom>
-            <a:solidFill>
-              <a:srgbClr val="FF3885"/>
-            </a:solidFill>
-            <a:ln>
-              <a:noFill/>
-            </a:ln>
-            <a:effectLst/>
-          </p:spPr>
-          <p:style>
-            <a:lnRef idx="1">
-              <a:schemeClr val="accent1"/>
-            </a:lnRef>
-            <a:fillRef idx="3">
-              <a:schemeClr val="accent1"/>
-            </a:fillRef>
-            <a:effectRef idx="2">
-              <a:schemeClr val="accent1"/>
-            </a:effectRef>
-            <a:fontRef idx="minor">
-              <a:schemeClr val="lt1"/>
-            </a:fontRef>
-          </p:style>
-          <p:txBody>
-            <a:bodyPr rtlCol="0" anchor="ctr"/>
-            <a:lstStyle/>
-            <a:p>
-              <a:pPr algn="ctr"/>
-            </a:p>
-          </p:txBody>
-        </p:sp>
-        <p:sp>
-          <p:nvSpPr>
-            <p:cNvPr id="15" name="Rounded Rectangle 14"/>
-            <p:cNvSpPr/>
-            <p:nvPr/>
-          </p:nvSpPr>
-          <p:spPr>
-            <a:xfrm>
-              <a:off x="9987022" y="3530373"/>
-              <a:ext cx="207704" cy="900052"/>
-            </a:xfrm>
-            <a:prstGeom prst="roundRect">
-              <a:avLst>
-                <a:gd name="adj" fmla="val 22222"/>
-              </a:avLst>
-            </a:prstGeom>
-            <a:solidFill>
-              <a:srgbClr val="0077FF"/>
-            </a:solidFill>
-            <a:ln>
-              <a:noFill/>
-            </a:ln>
-            <a:effectLst/>
-          </p:spPr>
-          <p:style>
-            <a:lnRef idx="1">
-              <a:schemeClr val="accent1"/>
-            </a:lnRef>
-            <a:fillRef idx="3">
-              <a:schemeClr val="accent1"/>
-            </a:fillRef>
-            <a:effectRef idx="2">
-              <a:schemeClr val="accent1"/>
-            </a:effectRef>
-            <a:fontRef idx="minor">
-              <a:schemeClr val="lt1"/>
-            </a:fontRef>
-          </p:style>
-          <p:txBody>
-            <a:bodyPr rtlCol="0" anchor="ctr"/>
-            <a:lstStyle/>
-            <a:p>
-              <a:pPr algn="ctr"/>
-            </a:p>
-          </p:txBody>
-        </p:sp>
-        <p:sp>
-          <p:nvSpPr>
-            <p:cNvPr id="16" name="Rectangle 15"/>
-            <p:cNvSpPr/>
-            <p:nvPr/>
-          </p:nvSpPr>
-          <p:spPr>
-            <a:xfrm>
-              <a:off x="9156205" y="4661208"/>
-              <a:ext cx="138469" cy="415408"/>
-            </a:xfrm>
-            <a:prstGeom prst="rect">
-              <a:avLst/>
-            </a:prstGeom>
-            <a:solidFill>
-              <a:srgbClr val="000000"/>
-            </a:solidFill>
-            <a:ln>
-              <a:noFill/>
-            </a:ln>
-            <a:effectLst/>
-          </p:spPr>
-          <p:style>
-            <a:lnRef idx="1">
-              <a:schemeClr val="accent1"/>
-            </a:lnRef>
-            <a:fillRef idx="3">
-              <a:schemeClr val="accent1"/>
-            </a:fillRef>
-            <a:effectRef idx="2">
-              <a:schemeClr val="accent1"/>
-            </a:effectRef>
-            <a:fontRef idx="minor">
-              <a:schemeClr val="lt1"/>
-            </a:fontRef>
-          </p:style>
-          <p:txBody>
-            <a:bodyPr rtlCol="0" anchor="ctr"/>
-            <a:lstStyle/>
-            <a:p>
-              <a:pPr algn="ctr"/>
-            </a:p>
-          </p:txBody>
-        </p:sp>
-        <p:sp>
-          <p:nvSpPr>
-            <p:cNvPr id="17" name="Rounded Rectangle 16"/>
-            <p:cNvSpPr/>
-            <p:nvPr/>
-          </p:nvSpPr>
-          <p:spPr>
-            <a:xfrm>
-              <a:off x="8648483" y="5030460"/>
-              <a:ext cx="1153913" cy="138469"/>
-            </a:xfrm>
-            <a:prstGeom prst="roundRect">
-              <a:avLst>
-                <a:gd name="adj" fmla="val 50000"/>
-              </a:avLst>
-            </a:prstGeom>
-            <a:solidFill>
-              <a:srgbClr val="000000"/>
-            </a:solidFill>
-            <a:ln>
-              <a:noFill/>
-            </a:ln>
-            <a:effectLst/>
-          </p:spPr>
-          <p:style>
-            <a:lnRef idx="1">
-              <a:schemeClr val="accent1"/>
-            </a:lnRef>
-            <a:fillRef idx="3">
-              <a:schemeClr val="accent1"/>
-            </a:fillRef>
-            <a:effectRef idx="2">
-              <a:schemeClr val="accent1"/>
-            </a:effectRef>
-            <a:fontRef idx="minor">
-              <a:schemeClr val="lt1"/>
-            </a:fontRef>
-          </p:style>
-          <p:txBody>
-            <a:bodyPr rtlCol="0" anchor="ctr"/>
-            <a:lstStyle/>
-            <a:p>
-              <a:pPr algn="ctr"/>
-            </a:p>
-          </p:txBody>
-        </p:sp>
-      </p:grpSp>
+          <a:prstGeom prst="rect">
+            <a:avLst/>
+          </a:prstGeom>
+          <a:solidFill>
+            <a:srgbClr val="0077FF"/>
+          </a:solidFill>
+          <a:ln>
+            <a:noFill/>
+          </a:ln>
+          <a:effectLst/>
+        </p:spPr>
+        <p:style>
+          <a:lnRef idx="1">
+            <a:schemeClr val="accent1"/>
+          </a:lnRef>
+          <a:fillRef idx="3">
+            <a:schemeClr val="accent1"/>
+          </a:fillRef>
+          <a:effectRef idx="2">
+            <a:schemeClr val="accent1"/>
+          </a:effectRef>
+          <a:fontRef idx="minor">
+            <a:schemeClr val="lt1"/>
+          </a:fontRef>
+        </p:style>
+        <p:txBody>
+          <a:bodyPr rtlCol="0" anchor="ctr"/>
+          <a:lstStyle/>
+          <a:p>
+            <a:pPr algn="ctr"/>
+          </a:p>
+        </p:txBody>
+      </p:sp>
+      <p:sp>
+        <p:nvSpPr>
+          <p:cNvPr id="8" name="stat_2"/>
+          <p:cNvSpPr txBox="1"/>
+          <p:nvPr/>
+        </p:nvSpPr>
+        <p:spPr>
+          <a:xfrm>
+            <a:off x="855187" y="4163402"/>
+            <a:ext cx="5033021" cy="1457960"/>
+          </a:xfrm>
+          <a:prstGeom prst="rect">
+            <a:avLst/>
+          </a:prstGeom>
+          <a:noFill/>
+        </p:spPr>
+        <p:txBody>
+          <a:bodyPr wrap="square" lIns="76200" rIns="76200" tIns="0" bIns="0">
+            <a:spAutoFit/>
+          </a:bodyPr>
+          <a:lstStyle/>
+          <a:p>
+            <a:pPr>
+              <a:lnSpc>
+                <a:spcPct val="100000"/>
+              </a:lnSpc>
+              <a:spcAft>
+                <a:spcPts val="200"/>
+              </a:spcAft>
+              <a:defRPr sz="4800" b="1">
+                <a:solidFill>
+                  <a:srgbClr val="0077FF"/>
+                </a:solidFill>
+                <a:latin typeface="Play"/>
+                <a:ea typeface="Play"/>
+                <a:cs typeface="Play"/>
+              </a:defRPr>
+            </a:pPr>
+            <a:r>
+              <a:rPr sz="4800" b="1">
+                <a:solidFill>
+                  <a:srgbClr val="0077FF"/>
+                </a:solidFill>
+                <a:latin typeface="Play"/>
+                <a:ea typeface="Play"/>
+                <a:cs typeface="Play"/>
+              </a:rPr>
+              <a:t>2027</a:t>
+            </a:r>
+          </a:p>
+          <a:p>
+            <a:pPr>
+              <a:spcAft>
+                <a:spcPts val="300"/>
+              </a:spcAft>
+              <a:defRPr sz="1800" b="0">
+                <a:solidFill>
+                  <a:srgbClr val="000000"/>
+                </a:solidFill>
+                <a:latin typeface="Play"/>
+                <a:ea typeface="Play"/>
+                <a:cs typeface="Play"/>
+              </a:defRPr>
+            </a:pPr>
+            <a:r>
+              <a:rPr sz="1800" b="0">
+                <a:solidFill>
+                  <a:srgbClr val="000000"/>
+                </a:solidFill>
+                <a:latin typeface="Play"/>
+                <a:ea typeface="Play"/>
+                <a:cs typeface="Play"/>
+              </a:rPr>
+              <a:t>Первый квартал 2027: генерация иллюстраций под стиль шаблона</a:t>
+            </a:r>
+          </a:p>
+        </p:txBody>
+      </p:sp>
     </p:spTree>
   </p:cSld>
   <p:clrMapOvr>
@@ -14514,7 +15432,7 @@
         <p:spPr>
           <a:xfrm>
             <a:off x="677387" y="692177"/>
-            <a:ext cx="10855878" cy="822960"/>
+            <a:ext cx="10855878" cy="1447800"/>
           </a:xfrm>
           <a:prstGeom prst="rect">
             <a:avLst/>
@@ -14549,7 +15467,7 @@
                 <a:ea typeface="Arial"/>
                 <a:cs typeface="Arial"/>
               </a:rPr>
-              <a:t>Что мы просим решить</a:t>
+              <a:t>Запрос решения о запуске сервиса на всю компанию</a:t>
             </a:r>
           </a:p>
         </p:txBody>
@@ -14562,8 +15480,8 @@
         </p:nvSpPr>
         <p:spPr>
           <a:xfrm>
-            <a:off x="677387" y="2356178"/>
-            <a:ext cx="5874466" cy="3271520"/>
+            <a:off x="677387" y="2390482"/>
+            <a:ext cx="5874466" cy="3799840"/>
           </a:xfrm>
           <a:prstGeom prst="rect">
             <a:avLst/>
@@ -14598,7 +15516,7 @@
                 <a:ea typeface="Play"/>
                 <a:cs typeface="Play"/>
               </a:rPr>
-              <a:t>• Одобрить запуск сервиса на всю компанию</a:t>
+              <a:t>• Решить о полном запуске сервиса</a:t>
             </a:r>
           </a:p>
           <a:p>
@@ -14624,7 +15542,7 @@
                 <a:ea typeface="Play"/>
                 <a:cs typeface="Play"/>
               </a:rPr>
-              <a:t>• Выделить бюджет на инфраструктуру и интеграцию</a:t>
+              <a:t>• Подтвердить план по генерации иллюстраций в 1Q 2027</a:t>
             </a:r>
           </a:p>
           <a:p>
@@ -14650,7 +15568,7 @@
                 <a:ea typeface="Play"/>
                 <a:cs typeface="Play"/>
               </a:rPr>
-              <a:t>• Назначить ответственных за внедрение</a:t>
+              <a:t>• Обеспечить доступ для всех команд</a:t>
             </a:r>
           </a:p>
         </p:txBody>
@@ -14663,9 +15581,9 @@
         </p:nvGrpSpPr>
         <p:grpSpPr>
           <a:xfrm>
-            <a:off x="7771509" y="2538008"/>
+            <a:off x="7771509" y="2836472"/>
             <a:ext cx="3023252" cy="2907860"/>
-            <a:chOff x="7771509" y="2538008"/>
+            <a:chOff x="7771509" y="2836472"/>
             <a:chExt cx="3023252" cy="2907860"/>
           </a:xfrm>
         </p:grpSpPr>
@@ -14677,7 +15595,7 @@
           </p:nvSpPr>
           <p:spPr>
             <a:xfrm>
-              <a:off x="7771509" y="2538008"/>
+              <a:off x="7771509" y="2836472"/>
               <a:ext cx="2907860" cy="2907860"/>
             </a:xfrm>
             <a:prstGeom prst="ellipse">
@@ -14721,7 +15639,7 @@
           </p:nvSpPr>
           <p:spPr>
             <a:xfrm>
-              <a:off x="8650145" y="2676477"/>
+              <a:off x="8650145" y="2974941"/>
               <a:ext cx="1150589" cy="1592400"/>
             </a:xfrm>
             <a:custGeom>
@@ -14840,7 +15758,7 @@
           </p:nvSpPr>
           <p:spPr>
             <a:xfrm>
-              <a:off x="8948500" y="3276512"/>
+              <a:off x="8948500" y="3574976"/>
               <a:ext cx="553878" cy="553878"/>
             </a:xfrm>
             <a:prstGeom prst="ellipse">
@@ -14884,7 +15802,7 @@
           </p:nvSpPr>
           <p:spPr>
             <a:xfrm>
-              <a:off x="9063892" y="3391903"/>
+              <a:off x="9063892" y="3690367"/>
               <a:ext cx="323095" cy="323095"/>
             </a:xfrm>
             <a:prstGeom prst="ellipse">
@@ -14928,7 +15846,7 @@
           </p:nvSpPr>
           <p:spPr>
             <a:xfrm>
-              <a:off x="8302309" y="3991938"/>
+              <a:off x="8302309" y="4290402"/>
               <a:ext cx="461565" cy="761583"/>
             </a:xfrm>
             <a:custGeom>
@@ -14993,7 +15911,7 @@
           </p:nvSpPr>
           <p:spPr>
             <a:xfrm>
-              <a:off x="9687005" y="3991938"/>
+              <a:off x="9687005" y="4290402"/>
               <a:ext cx="461565" cy="761583"/>
             </a:xfrm>
             <a:custGeom>
@@ -15058,7 +15976,7 @@
           </p:nvSpPr>
           <p:spPr>
             <a:xfrm>
-              <a:off x="8948500" y="4315034"/>
+              <a:off x="8948500" y="4613498"/>
               <a:ext cx="553879" cy="346174"/>
             </a:xfrm>
             <a:custGeom>
@@ -15123,7 +16041,7 @@
           </p:nvSpPr>
           <p:spPr>
             <a:xfrm>
-              <a:off x="9040813" y="4661208"/>
+              <a:off x="9040813" y="4959672"/>
               <a:ext cx="369253" cy="646191"/>
             </a:xfrm>
             <a:custGeom>
@@ -15242,7 +16160,7 @@
           </p:nvSpPr>
           <p:spPr>
             <a:xfrm>
-              <a:off x="7898440" y="3172660"/>
+              <a:off x="7898440" y="3471124"/>
               <a:ext cx="161547" cy="161547"/>
             </a:xfrm>
             <a:prstGeom prst="ellipse">
@@ -15286,7 +16204,7 @@
           </p:nvSpPr>
           <p:spPr>
             <a:xfrm>
-              <a:off x="10448587" y="2953416"/>
+              <a:off x="10448587" y="3251880"/>
               <a:ext cx="230782" cy="230782"/>
             </a:xfrm>
             <a:prstGeom prst="ellipse">
@@ -15330,7 +16248,7 @@
           </p:nvSpPr>
           <p:spPr>
             <a:xfrm>
-              <a:off x="10656292" y="4499660"/>
+              <a:off x="10656292" y="4798124"/>
               <a:ext cx="138469" cy="138469"/>
             </a:xfrm>
             <a:prstGeom prst="ellipse">
@@ -15394,7 +16312,7 @@
         <p:spPr>
           <a:xfrm>
             <a:off x="658855" y="692177"/>
-            <a:ext cx="5242438" cy="919480"/>
+            <a:ext cx="5242438" cy="1183640"/>
           </a:xfrm>
           <a:prstGeom prst="rect">
             <a:avLst/>
@@ -15411,7 +16329,7 @@
               <a:spcAft>
                 <a:spcPts val="300"/>
               </a:spcAft>
-              <a:defRPr sz="4800">
+              <a:defRPr sz="3200">
                 <a:solidFill>
                   <a:srgbClr val="FFFFFF"/>
                 </a:solidFill>
@@ -15421,7 +16339,7 @@
               </a:defRPr>
             </a:pPr>
             <a:r>
-              <a:rPr sz="4800">
+              <a:rPr sz="3200">
                 <a:solidFill>
                   <a:srgbClr val="FFFFFF"/>
                 </a:solidFill>
@@ -15429,7 +16347,7 @@
                 <a:ea typeface="Arial"/>
                 <a:cs typeface="Arial"/>
               </a:rPr>
-              <a:t>Заключение</a:t>
+              <a:t>Сервис повышает эффективность компании</a:t>
             </a:r>
           </a:p>
         </p:txBody>
@@ -15442,8 +16360,8 @@
         </p:nvSpPr>
         <p:spPr>
           <a:xfrm>
-            <a:off x="658855" y="2465070"/>
-            <a:ext cx="5242438" cy="1950720"/>
+            <a:off x="658855" y="2115847"/>
+            <a:ext cx="5242438" cy="3526708"/>
           </a:xfrm>
           <a:prstGeom prst="rect">
             <a:avLst/>
@@ -15478,7 +16396,7 @@
                 <a:ea typeface="Play"/>
                 <a:cs typeface="Play"/>
               </a:rPr>
-              <a:t>• Одобрить запуск сервиса на всю компанию</a:t>
+              <a:t>• Сервис повышает эффективность дизайнеров</a:t>
             </a:r>
           </a:p>
           <a:p>
@@ -15504,7 +16422,33 @@
                 <a:ea typeface="Play"/>
                 <a:cs typeface="Play"/>
               </a:rPr>
-              <a:t>• Назначить ответственных и выделить бюджет</a:t>
+              <a:t>• Сокращение времени сборки ускоряет коммуникацию</a:t>
+            </a:r>
+          </a:p>
+          <a:p>
+            <a:pPr algn="l">
+              <a:spcAft>
+                <a:spcPts val="300"/>
+              </a:spcAft>
+              <a:defRPr sz="2800">
+                <a:solidFill>
+                  <a:srgbClr val="FFFFFF"/>
+                </a:solidFill>
+                <a:latin typeface="Play"/>
+                <a:ea typeface="Play"/>
+                <a:cs typeface="Play"/>
+              </a:defRPr>
+            </a:pPr>
+            <a:r>
+              <a:rPr sz="2800">
+                <a:solidFill>
+                  <a:srgbClr val="FFFFFF"/>
+                </a:solidFill>
+                <a:latin typeface="Play"/>
+                <a:ea typeface="Play"/>
+                <a:cs typeface="Play"/>
+              </a:rPr>
+              <a:t>• Уменьшение ошибок стиля снижает риск недовольства заказчиков</a:t>
             </a:r>
           </a:p>
         </p:txBody>
